--- a/JPA-HIBERNATE.pptx
+++ b/JPA-HIBERNATE.pptx
@@ -289,7 +289,7 @@
             <a:pPr rtl="0"/>
             <a:fld id="{3C80F580-3B6A-44CD-9A1E-E890016126F8}" type="datetime1">
               <a:rPr lang="fr-FR" smtClean="0"/>
-              <a:t>17/06/2021</a:t>
+              <a:t>18/06/2021</a:t>
             </a:fld>
             <a:endParaRPr lang="fr-FR"/>
           </a:p>
@@ -459,7 +459,7 @@
             <a:pPr rtl="0"/>
             <a:fld id="{7DF8ED89-FBF4-48E3-B6C6-C071DA98F802}" type="datetime1">
               <a:rPr lang="fr-FR" noProof="1" dirty="0" smtClean="0"/>
-              <a:t>17/06/2021</a:t>
+              <a:t>18/06/2021</a:t>
             </a:fld>
             <a:endParaRPr lang="fr-FR" noProof="1"/>
           </a:p>
@@ -967,6 +967,14 @@
               <a:tabLst/>
               <a:defRPr/>
             </a:pPr>
+            <a:r>
+              <a:rPr lang="fr-FR" dirty="0"/>
+              <a:t>On va parler du problème du N+1 en détail avec un exemple classique de sortie d’entité via un </a:t>
+            </a:r>
+            <a:r>
+              <a:rPr lang="fr-FR" dirty="0" err="1"/>
+              <a:t>controller</a:t>
+            </a:r>
             <a:endParaRPr lang="fr-FR" dirty="0"/>
           </a:p>
         </p:txBody>
@@ -3830,6 +3838,12 @@
             <a:r>
               <a:rPr lang="fr-FR" noProof="1"/>
               <a:t>Exemple : je récupère une liste d’écoles par le nom ou la location, 500 résultats, 500 select unitaires vers la table « director »  !</a:t>
+            </a:r>
+          </a:p>
+          <a:p>
+            <a:r>
+              <a:rPr lang="fr-FR" noProof="1"/>
+              <a:t>Eager ne veut pas dire que les entités seront récupérées correctement !</a:t>
             </a:r>
           </a:p>
         </p:txBody>
@@ -4309,7 +4323,7 @@
             <a:pPr rtl="0"/>
             <a:fld id="{7DF3CA4B-903E-431D-AF93-2AD02E04DE8A}" type="datetime1">
               <a:rPr lang="fr-FR" noProof="0" smtClean="0"/>
-              <a:t>17/06/2021</a:t>
+              <a:t>18/06/2021</a:t>
             </a:fld>
             <a:endParaRPr lang="fr-FR" noProof="0"/>
           </a:p>
@@ -4935,7 +4949,7 @@
             <a:pPr rtl="0"/>
             <a:fld id="{802CD4F2-526B-4131-B91B-856C46007FC5}" type="datetime1">
               <a:rPr lang="fr-FR" noProof="0" smtClean="0"/>
-              <a:t>17/06/2021</a:t>
+              <a:t>18/06/2021</a:t>
             </a:fld>
             <a:endParaRPr lang="fr-FR" noProof="0"/>
           </a:p>
@@ -5588,7 +5602,7 @@
         <p:spPr>
           <a:xfrm>
             <a:off x="521207" y="1243786"/>
-            <a:ext cx="10961915" cy="3139321"/>
+            <a:ext cx="10961915" cy="1477328"/>
           </a:xfrm>
           <a:prstGeom prst="rect">
             <a:avLst/>
@@ -5632,91 +5646,7 @@
             <a:endParaRPr lang="fr-FR" dirty="0"/>
           </a:p>
           <a:p>
-            <a:pPr marL="285750" indent="-285750">
-              <a:buFont typeface="Wingdings" panose="05000000000000000000" pitchFamily="2" charset="2"/>
-              <a:buChar char="Ø"/>
-            </a:pPr>
             <a:endParaRPr lang="fr-FR" dirty="0"/>
-          </a:p>
-          <a:p>
-            <a:pPr marL="285750" indent="-285750">
-              <a:buFont typeface="Wingdings" panose="05000000000000000000" pitchFamily="2" charset="2"/>
-              <a:buChar char="Ø"/>
-            </a:pPr>
-            <a:endParaRPr lang="fr-FR" dirty="0"/>
-          </a:p>
-          <a:p>
-            <a:pPr marL="285750" indent="-285750">
-              <a:buFont typeface="Wingdings" panose="05000000000000000000" pitchFamily="2" charset="2"/>
-              <a:buChar char="Ø"/>
-            </a:pPr>
-            <a:r>
-              <a:rPr lang="fr-FR" dirty="0"/>
-              <a:t>Problème du « n+1 » : à chaque fois qu’une donnée sera lue (</a:t>
-            </a:r>
-            <a:r>
-              <a:rPr lang="fr-FR" dirty="0" err="1"/>
-              <a:t>getStudents</a:t>
-            </a:r>
-            <a:r>
-              <a:rPr lang="fr-FR" dirty="0"/>
-              <a:t>, </a:t>
-            </a:r>
-            <a:r>
-              <a:rPr lang="fr-FR" dirty="0" err="1"/>
-              <a:t>getTeachers</a:t>
-            </a:r>
-            <a:r>
-              <a:rPr lang="fr-FR" dirty="0"/>
-              <a:t>) un select sera lancé afin de satisfaire la demande /!\</a:t>
-            </a:r>
-            <a:br>
-              <a:rPr lang="fr-FR" dirty="0"/>
-            </a:br>
-            <a:endParaRPr lang="fr-FR" dirty="0">
-              <a:solidFill>
-                <a:srgbClr val="00627A"/>
-              </a:solidFill>
-              <a:latin typeface="Fira Code"/>
-            </a:endParaRPr>
-          </a:p>
-          <a:p>
-            <a:pPr marL="285750" indent="-285750">
-              <a:buFont typeface="Wingdings" panose="05000000000000000000" pitchFamily="2" charset="2"/>
-              <a:buChar char="Ø"/>
-            </a:pPr>
-            <a:endParaRPr lang="fr-FR" dirty="0">
-              <a:solidFill>
-                <a:srgbClr val="00627A"/>
-              </a:solidFill>
-              <a:latin typeface="Fira Code"/>
-            </a:endParaRPr>
-          </a:p>
-          <a:p>
-            <a:pPr marL="285750" indent="-285750">
-              <a:buFont typeface="Wingdings" panose="05000000000000000000" pitchFamily="2" charset="2"/>
-              <a:buChar char="Ø"/>
-            </a:pPr>
-            <a:r>
-              <a:rPr lang="fr-FR" dirty="0"/>
-              <a:t>A minima, on peut faire un </a:t>
-            </a:r>
-            <a:r>
-              <a:rPr lang="fr-FR" dirty="0" err="1"/>
-              <a:t>Fetch</a:t>
-            </a:r>
-            <a:r>
-              <a:rPr lang="fr-FR" dirty="0"/>
-              <a:t> (jointure) au moins sur toutes les relations </a:t>
-            </a:r>
-            <a:r>
-              <a:rPr lang="fr-FR" dirty="0" err="1"/>
-              <a:t>OneToOne</a:t>
-            </a:r>
-            <a:r>
-              <a:rPr lang="fr-FR" dirty="0"/>
-              <a:t> (voir suite) !</a:t>
-            </a:r>
           </a:p>
         </p:txBody>
       </p:sp>
@@ -6176,104 +6106,6 @@
                                         </p:cTn>
                                         <p:tgtEl>
                                           <p:spTgt spid="5"/>
-                                        </p:tgtEl>
-                                        <p:attrNameLst>
-                                          <p:attrName>style.visibility</p:attrName>
-                                        </p:attrNameLst>
-                                      </p:cBhvr>
-                                      <p:to>
-                                        <p:strVal val="visible"/>
-                                      </p:to>
-                                    </p:set>
-                                  </p:childTnLst>
-                                </p:cTn>
-                              </p:par>
-                            </p:childTnLst>
-                          </p:cTn>
-                        </p:par>
-                      </p:childTnLst>
-                    </p:cTn>
-                  </p:par>
-                  <p:par>
-                    <p:cTn id="9" fill="hold">
-                      <p:stCondLst>
-                        <p:cond delay="indefinite"/>
-                      </p:stCondLst>
-                      <p:childTnLst>
-                        <p:par>
-                          <p:cTn id="10" fill="hold">
-                            <p:stCondLst>
-                              <p:cond delay="0"/>
-                            </p:stCondLst>
-                            <p:childTnLst>
-                              <p:par>
-                                <p:cTn id="11" presetID="1" presetClass="entr" presetSubtype="0" fill="hold" nodeType="clickEffect">
-                                  <p:stCondLst>
-                                    <p:cond delay="0"/>
-                                  </p:stCondLst>
-                                  <p:childTnLst>
-                                    <p:set>
-                                      <p:cBhvr>
-                                        <p:cTn id="12" dur="1" fill="hold">
-                                          <p:stCondLst>
-                                            <p:cond delay="0"/>
-                                          </p:stCondLst>
-                                        </p:cTn>
-                                        <p:tgtEl>
-                                          <p:spTgt spid="2">
-                                            <p:txEl>
-                                              <p:pRg st="6" end="6"/>
-                                            </p:txEl>
-                                          </p:spTgt>
-                                        </p:tgtEl>
-                                        <p:attrNameLst>
-                                          <p:attrName>style.visibility</p:attrName>
-                                        </p:attrNameLst>
-                                      </p:cBhvr>
-                                      <p:to>
-                                        <p:strVal val="visible"/>
-                                      </p:to>
-                                    </p:set>
-                                  </p:childTnLst>
-                                </p:cTn>
-                              </p:par>
-                            </p:childTnLst>
-                          </p:cTn>
-                        </p:par>
-                      </p:childTnLst>
-                    </p:cTn>
-                  </p:par>
-                  <p:par>
-                    <p:cTn id="13" fill="hold">
-                      <p:stCondLst>
-                        <p:cond delay="indefinite"/>
-                      </p:stCondLst>
-                      <p:childTnLst>
-                        <p:par>
-                          <p:cTn id="14" fill="hold">
-                            <p:stCondLst>
-                              <p:cond delay="0"/>
-                            </p:stCondLst>
-                            <p:childTnLst>
-                              <p:par>
-                                <p:cTn id="15" presetID="1" presetClass="entr" presetSubtype="0" fill="hold" nodeType="clickEffect">
-                                  <p:stCondLst>
-                                    <p:cond delay="0"/>
-                                  </p:stCondLst>
-                                  <p:childTnLst>
-                                    <p:set>
-                                      <p:cBhvr>
-                                        <p:cTn id="16" dur="1" fill="hold">
-                                          <p:stCondLst>
-                                            <p:cond delay="0"/>
-                                          </p:stCondLst>
-                                        </p:cTn>
-                                        <p:tgtEl>
-                                          <p:spTgt spid="2">
-                                            <p:txEl>
-                                              <p:pRg st="8" end="8"/>
-                                            </p:txEl>
-                                          </p:spTgt>
                                         </p:tgtEl>
                                         <p:attrNameLst>
                                           <p:attrName>style.visibility</p:attrName>
@@ -11360,8 +11192,8 @@
         </p:nvSpPr>
         <p:spPr bwMode="auto">
           <a:xfrm>
-            <a:off x="4927637" y="2551645"/>
-            <a:ext cx="6356448" cy="1169551"/>
+            <a:off x="4927637" y="2443923"/>
+            <a:ext cx="6356448" cy="1384995"/>
           </a:xfrm>
           <a:prstGeom prst="rect">
             <a:avLst/>
@@ -11421,7 +11253,7 @@
                 </a:solidFill>
                 <a:latin typeface="Fira Code"/>
               </a:rPr>
-              <a:t>  // </a:t>
+              <a:t>// </a:t>
             </a:r>
             <a:r>
               <a:rPr lang="fr-FR" altLang="fr-FR" sz="1400" dirty="0" err="1">
@@ -11460,12 +11292,12 @@
                   <a:noFill/>
                 </a:ln>
                 <a:solidFill>
-                  <a:srgbClr val="080808"/>
-                </a:solidFill>
-                <a:effectLst/>
-                <a:latin typeface="Fira Code"/>
-              </a:rPr>
-              <a:t> </a:t>
+                  <a:srgbClr val="9E880D"/>
+                </a:solidFill>
+                <a:effectLst/>
+                <a:latin typeface="Fira Code"/>
+              </a:rPr>
+              <a:t>@Transactional</a:t>
             </a:r>
             <a:r>
               <a:rPr kumimoji="0" lang="fr-FR" altLang="fr-FR" sz="1400" b="0" i="0" u="none" strike="noStrike" cap="none" normalizeH="0" baseline="0" dirty="0">
@@ -11473,12 +11305,25 @@
                   <a:noFill/>
                 </a:ln>
                 <a:solidFill>
-                  <a:srgbClr val="9E880D"/>
-                </a:solidFill>
-                <a:effectLst/>
-                <a:latin typeface="Fira Code"/>
-              </a:rPr>
-              <a:t>@Transactional</a:t>
+                  <a:srgbClr val="080808"/>
+                </a:solidFill>
+                <a:effectLst/>
+                <a:latin typeface="Fira Code"/>
+              </a:rPr>
+              <a:t>(readOnly = </a:t>
+            </a:r>
+            <a:r>
+              <a:rPr kumimoji="0" lang="fr-FR" altLang="fr-FR" sz="1400" b="0" i="0" u="none" strike="noStrike" cap="none" normalizeH="0" baseline="0" dirty="0" err="1">
+                <a:ln>
+                  <a:noFill/>
+                </a:ln>
+                <a:solidFill>
+                  <a:srgbClr val="0033B3"/>
+                </a:solidFill>
+                <a:effectLst/>
+                <a:latin typeface="Fira Code"/>
+              </a:rPr>
+              <a:t>true</a:t>
             </a:r>
             <a:r>
               <a:rPr kumimoji="0" lang="fr-FR" altLang="fr-FR" sz="1400" b="0" i="0" u="none" strike="noStrike" cap="none" normalizeH="0" baseline="0" dirty="0">
@@ -11491,47 +11336,24 @@
                 <a:effectLst/>
                 <a:latin typeface="Fira Code"/>
               </a:rPr>
-              <a:t>(readOnly = </a:t>
-            </a:r>
-            <a:r>
-              <a:rPr kumimoji="0" lang="fr-FR" altLang="fr-FR" sz="1400" b="0" i="0" u="none" strike="noStrike" cap="none" normalizeH="0" baseline="0" dirty="0" err="1">
-                <a:ln>
-                  <a:noFill/>
-                </a:ln>
-                <a:solidFill>
-                  <a:srgbClr val="0033B3"/>
-                </a:solidFill>
-                <a:effectLst/>
-                <a:latin typeface="Fira Code"/>
-              </a:rPr>
-              <a:t>true</a:t>
-            </a:r>
-            <a:r>
-              <a:rPr kumimoji="0" lang="fr-FR" altLang="fr-FR" sz="1400" b="0" i="0" u="none" strike="noStrike" cap="none" normalizeH="0" baseline="0" dirty="0">
-                <a:ln>
-                  <a:noFill/>
-                </a:ln>
-                <a:solidFill>
-                  <a:srgbClr val="080808"/>
-                </a:solidFill>
-                <a:effectLst/>
-                <a:latin typeface="Fira Code"/>
-              </a:rPr>
               <a:t>)</a:t>
             </a:r>
-            <a:r>
-              <a:rPr kumimoji="0" lang="fr-FR" altLang="fr-FR" sz="1400" b="0" i="1" u="none" strike="noStrike" cap="none" normalizeH="0" baseline="0" dirty="0">
-                <a:ln>
-                  <a:noFill/>
-                </a:ln>
-                <a:solidFill>
-                  <a:srgbClr val="8C8C8C"/>
-                </a:solidFill>
-                <a:effectLst/>
-                <a:latin typeface="Fira Code"/>
-              </a:rPr>
-              <a:t> </a:t>
-            </a:r>
+            <a:endParaRPr lang="fr-FR" altLang="fr-FR" sz="1400" i="1" dirty="0">
+              <a:solidFill>
+                <a:srgbClr val="8C8C8C"/>
+              </a:solidFill>
+              <a:latin typeface="Fira Code"/>
+            </a:endParaRPr>
+          </a:p>
+          <a:p>
+            <a:pPr eaLnBrk="0" fontAlgn="base" hangingPunct="0">
+              <a:spcBef>
+                <a:spcPct val="0"/>
+              </a:spcBef>
+              <a:spcAft>
+                <a:spcPct val="0"/>
+              </a:spcAft>
+            </a:pPr>
             <a:r>
               <a:rPr kumimoji="0" lang="fr-FR" altLang="fr-FR" sz="1400" b="0" i="0" u="none" strike="noStrike" cap="none" normalizeH="0" baseline="0" dirty="0">
                 <a:ln>
@@ -40780,6 +40602,33 @@
                                   </p:childTnLst>
                                 </p:cTn>
                               </p:par>
+                              <p:par>
+                                <p:cTn id="21" presetID="1" presetClass="entr" presetSubtype="0" fill="hold" grpId="0" nodeType="withEffect">
+                                  <p:stCondLst>
+                                    <p:cond delay="0"/>
+                                  </p:stCondLst>
+                                  <p:childTnLst>
+                                    <p:set>
+                                      <p:cBhvr>
+                                        <p:cTn id="22" dur="1" fill="hold">
+                                          <p:stCondLst>
+                                            <p:cond delay="0"/>
+                                          </p:stCondLst>
+                                        </p:cTn>
+                                        <p:tgtEl>
+                                          <p:spTgt spid="3"/>
+                                        </p:tgtEl>
+                                        <p:attrNameLst>
+                                          <p:attrName>style.visibility</p:attrName>
+                                        </p:attrNameLst>
+                                      </p:cBhvr>
+                                      <p:to>
+                                        <p:strVal val="visible"/>
+                                      </p:to>
+                                    </p:set>
+                                  </p:childTnLst>
+                                </p:cTn>
+                              </p:par>
                             </p:childTnLst>
                           </p:cTn>
                         </p:par>
@@ -40809,6 +40658,7 @@
     </p:tnLst>
     <p:bldLst>
       <p:bldP spid="7" grpId="0" animBg="1"/>
+      <p:bldP spid="3" grpId="0" animBg="1"/>
     </p:bldLst>
   </p:timing>
 </p:sld>

--- a/JPA-HIBERNATE.pptx
+++ b/JPA-HIBERNATE.pptx
@@ -5,10 +5,10 @@
     <p:sldMasterId id="2147483660" r:id="rId4"/>
   </p:sldMasterIdLst>
   <p:notesMasterIdLst>
-    <p:notesMasterId r:id="rId35"/>
+    <p:notesMasterId r:id="rId36"/>
   </p:notesMasterIdLst>
   <p:handoutMasterIdLst>
-    <p:handoutMasterId r:id="rId36"/>
+    <p:handoutMasterId r:id="rId37"/>
   </p:handoutMasterIdLst>
   <p:sldIdLst>
     <p:sldId id="256" r:id="rId5"/>
@@ -41,6 +41,7 @@
     <p:sldId id="326" r:id="rId32"/>
     <p:sldId id="306" r:id="rId33"/>
     <p:sldId id="299" r:id="rId34"/>
+    <p:sldId id="327" r:id="rId35"/>
   </p:sldIdLst>
   <p:sldSz cx="12192000" cy="6858000"/>
   <p:notesSz cx="6858000" cy="9144000"/>
@@ -174,6 +175,7 @@
             <p14:sldId id="326"/>
             <p14:sldId id="306"/>
             <p14:sldId id="299"/>
+            <p14:sldId id="327"/>
           </p14:sldIdLst>
         </p14:section>
       </p14:sectionLst>
@@ -1173,6 +1175,14 @@
           <a:bodyPr/>
           <a:lstStyle/>
           <a:p>
+            <a:r>
+              <a:rPr lang="fr-FR" noProof="1"/>
+              <a:t>Vous aurez un erreur type qui vons indiquera si la session est fermée : </a:t>
+            </a:r>
+            <a:r>
+              <a:rPr lang="en-US" noProof="1"/>
+              <a:t>failed to lazily initialize a collection of role</a:t>
+            </a:r>
             <a:endParaRPr lang="fr-FR" noProof="1"/>
           </a:p>
         </p:txBody>
@@ -1344,499 +1354,46 @@
           <a:lstStyle/>
           <a:p>
             <a:r>
-              <a:rPr lang="en-US" dirty="0">
-                <a:solidFill>
-                  <a:srgbClr val="0033B3"/>
-                </a:solidFill>
-                <a:effectLst/>
-              </a:rPr>
-              <a:t>select </a:t>
-            </a:r>
-            <a:r>
-              <a:rPr lang="en-US" dirty="0">
-                <a:solidFill>
-                  <a:srgbClr val="000000"/>
-                </a:solidFill>
-                <a:effectLst/>
-              </a:rPr>
-              <a:t>teachers0_</a:t>
-            </a:r>
-            <a:r>
-              <a:rPr lang="en-US" dirty="0"/>
-              <a:t>.</a:t>
-            </a:r>
-            <a:r>
-              <a:rPr lang="en-US" dirty="0">
-                <a:solidFill>
-                  <a:srgbClr val="871094"/>
-                </a:solidFill>
-                <a:effectLst/>
-              </a:rPr>
-              <a:t>school_id </a:t>
-            </a:r>
-            <a:r>
-              <a:rPr lang="en-US" dirty="0">
-                <a:solidFill>
-                  <a:srgbClr val="0033B3"/>
-                </a:solidFill>
-                <a:effectLst/>
-              </a:rPr>
-              <a:t>as </a:t>
-            </a:r>
-            <a:r>
-              <a:rPr lang="en-US" dirty="0">
-                <a:solidFill>
-                  <a:srgbClr val="000000"/>
-                </a:solidFill>
-                <a:effectLst/>
-              </a:rPr>
-              <a:t>school_i3_4_1_</a:t>
-            </a:r>
-            <a:r>
-              <a:rPr lang="en-US" dirty="0"/>
-              <a:t>,</a:t>
-            </a:r>
-            <a:br>
-              <a:rPr lang="en-US" dirty="0"/>
-            </a:br>
-            <a:r>
-              <a:rPr lang="en-US" dirty="0"/>
-              <a:t>       </a:t>
-            </a:r>
-            <a:r>
-              <a:rPr lang="en-US" dirty="0">
-                <a:solidFill>
-                  <a:srgbClr val="000000"/>
-                </a:solidFill>
-                <a:effectLst/>
-              </a:rPr>
-              <a:t>teachers0_</a:t>
-            </a:r>
-            <a:r>
-              <a:rPr lang="en-US" dirty="0"/>
-              <a:t>.</a:t>
-            </a:r>
-            <a:r>
-              <a:rPr lang="en-US" dirty="0">
-                <a:solidFill>
-                  <a:srgbClr val="871094"/>
-                </a:solidFill>
-                <a:effectLst/>
-              </a:rPr>
-              <a:t>id        </a:t>
-            </a:r>
-            <a:r>
-              <a:rPr lang="en-US" dirty="0">
-                <a:solidFill>
-                  <a:srgbClr val="0033B3"/>
-                </a:solidFill>
-                <a:effectLst/>
-              </a:rPr>
-              <a:t>as </a:t>
-            </a:r>
-            <a:r>
-              <a:rPr lang="en-US" dirty="0">
-                <a:solidFill>
-                  <a:srgbClr val="000000"/>
-                </a:solidFill>
-                <a:effectLst/>
-              </a:rPr>
-              <a:t>id1_4_1_</a:t>
-            </a:r>
-            <a:r>
-              <a:rPr lang="en-US" dirty="0"/>
-              <a:t>,</a:t>
-            </a:r>
-            <a:br>
-              <a:rPr lang="en-US" dirty="0"/>
-            </a:br>
-            <a:r>
-              <a:rPr lang="en-US" dirty="0"/>
-              <a:t>       </a:t>
-            </a:r>
-            <a:r>
-              <a:rPr lang="en-US" dirty="0">
-                <a:solidFill>
-                  <a:srgbClr val="000000"/>
-                </a:solidFill>
-                <a:effectLst/>
-              </a:rPr>
-              <a:t>teachers0_</a:t>
-            </a:r>
-            <a:r>
-              <a:rPr lang="en-US" dirty="0"/>
-              <a:t>.</a:t>
-            </a:r>
-            <a:r>
-              <a:rPr lang="en-US" dirty="0">
-                <a:solidFill>
-                  <a:srgbClr val="871094"/>
-                </a:solidFill>
-                <a:effectLst/>
-              </a:rPr>
-              <a:t>id        </a:t>
-            </a:r>
-            <a:r>
-              <a:rPr lang="en-US" dirty="0">
-                <a:solidFill>
-                  <a:srgbClr val="0033B3"/>
-                </a:solidFill>
-                <a:effectLst/>
-              </a:rPr>
-              <a:t>as </a:t>
-            </a:r>
-            <a:r>
-              <a:rPr lang="en-US" dirty="0">
-                <a:solidFill>
-                  <a:srgbClr val="000000"/>
-                </a:solidFill>
-                <a:effectLst/>
-              </a:rPr>
-              <a:t>id1_4_0_</a:t>
-            </a:r>
-            <a:r>
-              <a:rPr lang="en-US" dirty="0"/>
-              <a:t>,</a:t>
-            </a:r>
-            <a:br>
-              <a:rPr lang="en-US" dirty="0"/>
-            </a:br>
-            <a:r>
-              <a:rPr lang="en-US" dirty="0"/>
-              <a:t>       </a:t>
-            </a:r>
-            <a:r>
-              <a:rPr lang="en-US" dirty="0">
-                <a:solidFill>
-                  <a:srgbClr val="000000"/>
-                </a:solidFill>
-                <a:effectLst/>
-              </a:rPr>
-              <a:t>teachers0_</a:t>
-            </a:r>
-            <a:r>
-              <a:rPr lang="en-US" dirty="0"/>
-              <a:t>.</a:t>
-            </a:r>
-            <a:r>
-              <a:rPr lang="en-US" dirty="0">
-                <a:solidFill>
-                  <a:srgbClr val="871094"/>
-                </a:solidFill>
-                <a:effectLst/>
-              </a:rPr>
-              <a:t>name      </a:t>
-            </a:r>
-            <a:r>
-              <a:rPr lang="en-US" dirty="0">
-                <a:solidFill>
-                  <a:srgbClr val="0033B3"/>
-                </a:solidFill>
-                <a:effectLst/>
-              </a:rPr>
-              <a:t>as </a:t>
-            </a:r>
-            <a:r>
-              <a:rPr lang="en-US" dirty="0">
-                <a:solidFill>
-                  <a:srgbClr val="000000"/>
-                </a:solidFill>
-                <a:effectLst/>
-              </a:rPr>
-              <a:t>name2_4_0_</a:t>
-            </a:r>
-            <a:r>
-              <a:rPr lang="en-US" dirty="0"/>
-              <a:t>,</a:t>
-            </a:r>
-            <a:br>
-              <a:rPr lang="en-US" dirty="0"/>
-            </a:br>
-            <a:r>
-              <a:rPr lang="en-US" dirty="0"/>
-              <a:t>       </a:t>
-            </a:r>
-            <a:r>
-              <a:rPr lang="en-US" dirty="0">
-                <a:solidFill>
-                  <a:srgbClr val="000000"/>
-                </a:solidFill>
-                <a:effectLst/>
-              </a:rPr>
-              <a:t>teachers0_</a:t>
-            </a:r>
-            <a:r>
-              <a:rPr lang="en-US" dirty="0"/>
-              <a:t>.</a:t>
-            </a:r>
-            <a:r>
-              <a:rPr lang="en-US" dirty="0">
-                <a:solidFill>
-                  <a:srgbClr val="871094"/>
-                </a:solidFill>
-                <a:effectLst/>
-              </a:rPr>
-              <a:t>school_id </a:t>
-            </a:r>
-            <a:r>
-              <a:rPr lang="en-US" dirty="0">
-                <a:solidFill>
-                  <a:srgbClr val="0033B3"/>
-                </a:solidFill>
-                <a:effectLst/>
-              </a:rPr>
-              <a:t>as </a:t>
-            </a:r>
-            <a:r>
-              <a:rPr lang="en-US" dirty="0">
-                <a:solidFill>
-                  <a:srgbClr val="000000"/>
-                </a:solidFill>
-                <a:effectLst/>
-              </a:rPr>
-              <a:t>school_i3_4_0_</a:t>
-            </a:r>
-            <a:br>
-              <a:rPr lang="en-US" dirty="0">
-                <a:solidFill>
-                  <a:srgbClr val="000000"/>
-                </a:solidFill>
-                <a:effectLst/>
-              </a:rPr>
-            </a:br>
-            <a:r>
-              <a:rPr lang="en-US" dirty="0">
-                <a:solidFill>
-                  <a:srgbClr val="0033B3"/>
-                </a:solidFill>
-                <a:effectLst/>
-              </a:rPr>
-              <a:t>from </a:t>
-            </a:r>
-            <a:r>
-              <a:rPr lang="en-US" dirty="0">
-                <a:solidFill>
-                  <a:srgbClr val="000000"/>
-                </a:solidFill>
-                <a:effectLst/>
-              </a:rPr>
-              <a:t>teacher teachers0_</a:t>
-            </a:r>
-            <a:br>
-              <a:rPr lang="en-US" dirty="0">
-                <a:solidFill>
-                  <a:srgbClr val="000000"/>
-                </a:solidFill>
-                <a:effectLst/>
-              </a:rPr>
-            </a:br>
-            <a:r>
-              <a:rPr lang="en-US" dirty="0">
-                <a:solidFill>
-                  <a:srgbClr val="0033B3"/>
-                </a:solidFill>
-                <a:effectLst/>
-              </a:rPr>
-              <a:t>where </a:t>
-            </a:r>
-            <a:r>
-              <a:rPr lang="en-US" dirty="0">
-                <a:solidFill>
-                  <a:srgbClr val="000000"/>
-                </a:solidFill>
-                <a:effectLst/>
-              </a:rPr>
-              <a:t>teachers0_</a:t>
-            </a:r>
-            <a:r>
-              <a:rPr lang="en-US" dirty="0"/>
-              <a:t>.</a:t>
-            </a:r>
-            <a:r>
-              <a:rPr lang="en-US" dirty="0">
-                <a:solidFill>
-                  <a:srgbClr val="871094"/>
-                </a:solidFill>
-                <a:effectLst/>
-              </a:rPr>
-              <a:t>school_id </a:t>
-            </a:r>
-            <a:r>
-              <a:rPr lang="en-US" dirty="0">
-                <a:solidFill>
-                  <a:srgbClr val="0033B3"/>
-                </a:solidFill>
-                <a:effectLst/>
-              </a:rPr>
-              <a:t>in </a:t>
-            </a:r>
-            <a:r>
-              <a:rPr lang="en-US" dirty="0"/>
-              <a:t>(</a:t>
-            </a:r>
-            <a:r>
-              <a:rPr lang="en-US" dirty="0">
-                <a:solidFill>
-                  <a:srgbClr val="0033B3"/>
-                </a:solidFill>
-                <a:effectLst/>
-              </a:rPr>
-              <a:t>select </a:t>
-            </a:r>
-            <a:r>
-              <a:rPr lang="en-US" dirty="0">
-                <a:solidFill>
-                  <a:srgbClr val="000000"/>
-                </a:solidFill>
-                <a:effectLst/>
-              </a:rPr>
-              <a:t>school0_</a:t>
-            </a:r>
-            <a:r>
-              <a:rPr lang="en-US" dirty="0"/>
-              <a:t>.</a:t>
-            </a:r>
-            <a:r>
-              <a:rPr lang="en-US" dirty="0">
-                <a:solidFill>
-                  <a:srgbClr val="871094"/>
-                </a:solidFill>
-                <a:effectLst/>
-              </a:rPr>
-              <a:t>id</a:t>
-            </a:r>
-            <a:br>
-              <a:rPr lang="en-US" dirty="0">
-                <a:solidFill>
-                  <a:srgbClr val="871094"/>
-                </a:solidFill>
-                <a:effectLst/>
-              </a:rPr>
-            </a:br>
-            <a:r>
-              <a:rPr lang="en-US" dirty="0">
-                <a:solidFill>
-                  <a:srgbClr val="871094"/>
-                </a:solidFill>
-                <a:effectLst/>
-              </a:rPr>
-              <a:t>                               </a:t>
-            </a:r>
-            <a:r>
-              <a:rPr lang="en-US" dirty="0">
-                <a:solidFill>
-                  <a:srgbClr val="0033B3"/>
-                </a:solidFill>
-                <a:effectLst/>
-              </a:rPr>
-              <a:t>from </a:t>
-            </a:r>
-            <a:r>
-              <a:rPr lang="en-US" dirty="0">
-                <a:solidFill>
-                  <a:srgbClr val="000000"/>
-                </a:solidFill>
-                <a:effectLst/>
-              </a:rPr>
-              <a:t>school school0_</a:t>
-            </a:r>
-            <a:br>
-              <a:rPr lang="en-US" dirty="0">
-                <a:solidFill>
-                  <a:srgbClr val="000000"/>
-                </a:solidFill>
-                <a:effectLst/>
-              </a:rPr>
-            </a:br>
-            <a:r>
-              <a:rPr lang="en-US" dirty="0">
-                <a:solidFill>
-                  <a:srgbClr val="000000"/>
-                </a:solidFill>
-                <a:effectLst/>
-              </a:rPr>
-              <a:t>                                        </a:t>
-            </a:r>
-            <a:r>
-              <a:rPr lang="en-US" dirty="0">
-                <a:solidFill>
-                  <a:srgbClr val="0033B3"/>
-                </a:solidFill>
-                <a:effectLst/>
-              </a:rPr>
-              <a:t>inner join </a:t>
-            </a:r>
-            <a:r>
-              <a:rPr lang="en-US" dirty="0">
-                <a:solidFill>
-                  <a:srgbClr val="000000"/>
-                </a:solidFill>
-                <a:effectLst/>
-              </a:rPr>
-              <a:t>director director1_ </a:t>
-            </a:r>
-            <a:r>
-              <a:rPr lang="en-US" dirty="0">
-                <a:solidFill>
-                  <a:srgbClr val="0033B3"/>
-                </a:solidFill>
-                <a:effectLst/>
-              </a:rPr>
-              <a:t>on </a:t>
-            </a:r>
-            <a:r>
-              <a:rPr lang="en-US" dirty="0">
-                <a:solidFill>
-                  <a:srgbClr val="000000"/>
-                </a:solidFill>
-                <a:effectLst/>
-              </a:rPr>
-              <a:t>school0_</a:t>
-            </a:r>
-            <a:r>
-              <a:rPr lang="en-US" dirty="0"/>
-              <a:t>.</a:t>
-            </a:r>
-            <a:r>
-              <a:rPr lang="en-US" dirty="0">
-                <a:solidFill>
-                  <a:srgbClr val="871094"/>
-                </a:solidFill>
-                <a:effectLst/>
-              </a:rPr>
-              <a:t>director_id </a:t>
-            </a:r>
-            <a:r>
-              <a:rPr lang="en-US" dirty="0"/>
-              <a:t>= </a:t>
-            </a:r>
-            <a:r>
-              <a:rPr lang="en-US" dirty="0">
-                <a:solidFill>
-                  <a:srgbClr val="000000"/>
-                </a:solidFill>
-                <a:effectLst/>
-              </a:rPr>
-              <a:t>director1_</a:t>
-            </a:r>
-            <a:r>
-              <a:rPr lang="en-US" dirty="0"/>
-              <a:t>.</a:t>
-            </a:r>
-            <a:r>
-              <a:rPr lang="en-US" dirty="0">
-                <a:solidFill>
-                  <a:srgbClr val="871094"/>
-                </a:solidFill>
-                <a:effectLst/>
-              </a:rPr>
-              <a:t>id</a:t>
-            </a:r>
-            <a:r>
-              <a:rPr lang="en-US" dirty="0"/>
-              <a:t>)</a:t>
+              <a:rPr lang="fr-FR" noProof="1"/>
+              <a:t>Defaut : fonctionne très bien sur la récupération d’une seule entité, mais dès lors que l’on veut récupérer une liste avec ou sans pagination, nous arons bcp de N+1</a:t>
+            </a:r>
+          </a:p>
+          <a:p>
+            <a:r>
+              <a:rPr lang="fr-FR" noProof="1"/>
+              <a:t>En plusieurs fois : finalement ce que l’on veut c’est pouvoir faire notre récupération de données en utilisant le mapping relationnel de nos entités et non le faire à la main</a:t>
+            </a:r>
+          </a:p>
+          <a:p>
+            <a:r>
+              <a:rPr lang="fr-FR" noProof="1"/>
+              <a:t>BatchSize : On va réduire le nombre de requête et on en aura autant que dans le cas par défaut mais quelque soit le nombre d’entités que l’on récupère (pour peu qu’il soit inférieur à x)</a:t>
+            </a:r>
+          </a:p>
+          <a:p>
+            <a:r>
+              <a:rPr lang="fr-FR" noProof="1"/>
+              <a:t>SubSelect : On aura de façon certaine une seule requête par relation, car au lieu d’avoir where id in (…) on aura un id in (subselect)</a:t>
+            </a:r>
+          </a:p>
+          <a:p>
+            <a:r>
+              <a:rPr lang="fr-FR" noProof="1"/>
+              <a:t>FETCH : il est déclaratif lors de la requête, donc pas dans le code c’est pour cette raison que l’ incompatibilité est en vert </a:t>
+            </a:r>
+            <a:r>
+              <a:rPr lang="fr-FR" noProof="1">
+                <a:sym typeface="Wingdings" panose="05000000000000000000" pitchFamily="2" charset="2"/>
+              </a:rPr>
+              <a:t></a:t>
             </a:r>
             <a:endParaRPr lang="fr-FR" noProof="1"/>
+          </a:p>
+          <a:p>
+            <a:r>
+              <a:rPr lang="fr-FR" noProof="1"/>
+              <a:t>JPQL : Java Persistence Query Langage</a:t>
+            </a:r>
           </a:p>
         </p:txBody>
       </p:sp>
@@ -1923,7 +1480,7 @@
           <a:p>
             <a:r>
               <a:rPr lang="fr-FR" noProof="1"/>
-              <a:t>Pas de BatchSize sur les relations OneToOne</a:t>
+              <a:t>Pas de BatchSize sur les relations OneToOne !!</a:t>
             </a:r>
           </a:p>
         </p:txBody>
@@ -2040,7 +1597,53 @@
             </a:pPr>
             <a:r>
               <a:rPr lang="fr-FR" noProof="1"/>
-              <a:t>Pas de BatchSize sur les relations OneToOne</a:t>
+              <a:t>A mettre d’office sur toutes les relations OneToOne</a:t>
+            </a:r>
+          </a:p>
+          <a:p>
+            <a:pPr marL="0" marR="0" lvl="0" indent="0" algn="l" defTabSz="914400" rtl="0" eaLnBrk="1" fontAlgn="auto" latinLnBrk="0" hangingPunct="1">
+              <a:lnSpc>
+                <a:spcPct val="100000"/>
+              </a:lnSpc>
+              <a:spcBef>
+                <a:spcPts val="0"/>
+              </a:spcBef>
+              <a:spcAft>
+                <a:spcPts val="0"/>
+              </a:spcAft>
+              <a:buClrTx/>
+              <a:buSzTx/>
+              <a:buFontTx/>
+              <a:buNone/>
+              <a:tabLst/>
+              <a:defRPr/>
+            </a:pPr>
+            <a:r>
+              <a:rPr lang="fr-FR" noProof="1"/>
+              <a:t>Le produit cartesien pour une ou quelque grappe est bien meilleur que les autres solutions car ça ne fait qu’un seul SELECT.</a:t>
+            </a:r>
+          </a:p>
+          <a:p>
+            <a:pPr marL="0" marR="0" lvl="0" indent="0" algn="l" defTabSz="914400" rtl="0" eaLnBrk="1" fontAlgn="auto" latinLnBrk="0" hangingPunct="1">
+              <a:lnSpc>
+                <a:spcPct val="100000"/>
+              </a:lnSpc>
+              <a:spcBef>
+                <a:spcPts val="0"/>
+              </a:spcBef>
+              <a:spcAft>
+                <a:spcPts val="0"/>
+              </a:spcAft>
+              <a:buClrTx/>
+              <a:buSzTx/>
+              <a:buFontTx/>
+              <a:buNone/>
+              <a:tabLst/>
+              <a:defRPr/>
+            </a:pPr>
+            <a:r>
+              <a:rPr lang="fr-FR" noProof="1"/>
+              <a:t>Et pour des temps aussi courts, c’est l’aller retour server BDD qui va compter le plus.</a:t>
             </a:r>
           </a:p>
           <a:p>
@@ -2214,7 +1817,10 @@
           <a:bodyPr/>
           <a:lstStyle/>
           <a:p>
-            <a:endParaRPr lang="fr-FR" noProof="1"/>
+            <a:r>
+              <a:rPr lang="fr-FR" noProof="1"/>
+              <a:t>Avec les batch size = taille de page sur les entités xxxToMany, on est pas mal mais on peut faire encore un peu mieux !</a:t>
+            </a:r>
           </a:p>
         </p:txBody>
       </p:sp>
@@ -2509,7 +2115,33 @@
           <a:bodyPr/>
           <a:lstStyle/>
           <a:p>
-            <a:endParaRPr lang="fr-FR" noProof="1"/>
+            <a:r>
+              <a:rPr lang="fr-FR" dirty="0"/>
+              <a:t>Maintenant on passe un peu aux choses sérieuses </a:t>
+            </a:r>
+            <a:r>
+              <a:rPr lang="fr-FR" dirty="0">
+                <a:sym typeface="Wingdings" panose="05000000000000000000" pitchFamily="2" charset="2"/>
+              </a:rPr>
+              <a:t></a:t>
+            </a:r>
+          </a:p>
+          <a:p>
+            <a:r>
+              <a:rPr lang="fr-FR" dirty="0">
+                <a:sym typeface="Wingdings" panose="05000000000000000000" pitchFamily="2" charset="2"/>
+              </a:rPr>
+              <a:t>Tout à l’heure j’ai dit que FETCHER les données n’était pas compatible avec la pagination !</a:t>
+            </a:r>
+          </a:p>
+          <a:p>
+            <a:r>
+              <a:rPr lang="fr-FR" dirty="0">
+                <a:sym typeface="Wingdings" panose="05000000000000000000" pitchFamily="2" charset="2"/>
+              </a:rPr>
+              <a:t>Avec une seule requête je peux faire planter le serveur !</a:t>
+            </a:r>
+            <a:endParaRPr lang="fr-FR" dirty="0"/>
           </a:p>
         </p:txBody>
       </p:sp>
@@ -2530,8 +2162,8 @@
           <a:p>
             <a:pPr rtl="0"/>
             <a:fld id="{DF61EA0F-A667-4B49-8422-0062BC55E249}" type="slidenum">
-              <a:rPr lang="fr-FR" noProof="1" dirty="0" smtClean="0"/>
-              <a:t>22</a:t>
+              <a:rPr lang="fr-FR" noProof="1" smtClean="0"/>
+              <a:t>21</a:t>
             </a:fld>
             <a:endParaRPr lang="fr-FR" noProof="1"/>
           </a:p>
@@ -2540,7 +2172,7 @@
     </p:spTree>
     <p:extLst>
       <p:ext uri="{BB962C8B-B14F-4D97-AF65-F5344CB8AC3E}">
-        <p14:creationId xmlns:p14="http://schemas.microsoft.com/office/powerpoint/2010/main" val="2685482423"/>
+        <p14:creationId xmlns:p14="http://schemas.microsoft.com/office/powerpoint/2010/main" val="1644808820"/>
       </p:ext>
     </p:extLst>
   </p:cSld>
@@ -2594,7 +2226,10 @@
           <a:bodyPr/>
           <a:lstStyle/>
           <a:p>
-            <a:endParaRPr lang="fr-FR" noProof="1"/>
+            <a:r>
+              <a:rPr lang="fr-FR" noProof="1"/>
+              <a:t>On ne peut pas utiliser une entité pour récupérer le résultat, mais le mapping sera fait automatiquement par le système via une projection</a:t>
+            </a:r>
           </a:p>
         </p:txBody>
       </p:sp>
@@ -2616,7 +2251,7 @@
             <a:pPr rtl="0"/>
             <a:fld id="{DF61EA0F-A667-4B49-8422-0062BC55E249}" type="slidenum">
               <a:rPr lang="fr-FR" noProof="1" dirty="0" smtClean="0"/>
-              <a:t>23</a:t>
+              <a:t>22</a:t>
             </a:fld>
             <a:endParaRPr lang="fr-FR" noProof="1"/>
           </a:p>
@@ -2625,7 +2260,7 @@
     </p:spTree>
     <p:extLst>
       <p:ext uri="{BB962C8B-B14F-4D97-AF65-F5344CB8AC3E}">
-        <p14:creationId xmlns:p14="http://schemas.microsoft.com/office/powerpoint/2010/main" val="3804920323"/>
+        <p14:creationId xmlns:p14="http://schemas.microsoft.com/office/powerpoint/2010/main" val="2685482423"/>
       </p:ext>
     </p:extLst>
   </p:cSld>
@@ -2701,7 +2336,7 @@
             <a:pPr rtl="0"/>
             <a:fld id="{DF61EA0F-A667-4B49-8422-0062BC55E249}" type="slidenum">
               <a:rPr lang="fr-FR" noProof="1" dirty="0" smtClean="0"/>
-              <a:t>24</a:t>
+              <a:t>23</a:t>
             </a:fld>
             <a:endParaRPr lang="fr-FR" noProof="1"/>
           </a:p>
@@ -2710,7 +2345,7 @@
     </p:spTree>
     <p:extLst>
       <p:ext uri="{BB962C8B-B14F-4D97-AF65-F5344CB8AC3E}">
-        <p14:creationId xmlns:p14="http://schemas.microsoft.com/office/powerpoint/2010/main" val="2263289659"/>
+        <p14:creationId xmlns:p14="http://schemas.microsoft.com/office/powerpoint/2010/main" val="3804920323"/>
       </p:ext>
     </p:extLst>
   </p:cSld>
@@ -2764,7 +2399,16 @@
           <a:bodyPr/>
           <a:lstStyle/>
           <a:p>
-            <a:endParaRPr lang="fr-FR" noProof="1"/>
+            <a:r>
+              <a:rPr lang="fr-FR" noProof="1"/>
+              <a:t>Le résultat est le même dans les deux cas, je récupère un object ou une liste d’objets remplis avec le résultat de la requete</a:t>
+            </a:r>
+          </a:p>
+          <a:p>
+            <a:r>
+              <a:rPr lang="fr-FR" noProof="1"/>
+              <a:t>Petite note sur le fait que ces objects peuvent sortir des controllers car ils ne sont pas liés au modèle de données et correspondent à un besoin métier précis</a:t>
+            </a:r>
           </a:p>
         </p:txBody>
       </p:sp>
@@ -2786,7 +2430,7 @@
             <a:pPr rtl="0"/>
             <a:fld id="{DF61EA0F-A667-4B49-8422-0062BC55E249}" type="slidenum">
               <a:rPr lang="fr-FR" noProof="1" dirty="0" smtClean="0"/>
-              <a:t>25</a:t>
+              <a:t>24</a:t>
             </a:fld>
             <a:endParaRPr lang="fr-FR" noProof="1"/>
           </a:p>
@@ -2795,7 +2439,7 @@
     </p:spTree>
     <p:extLst>
       <p:ext uri="{BB962C8B-B14F-4D97-AF65-F5344CB8AC3E}">
-        <p14:creationId xmlns:p14="http://schemas.microsoft.com/office/powerpoint/2010/main" val="512973995"/>
+        <p14:creationId xmlns:p14="http://schemas.microsoft.com/office/powerpoint/2010/main" val="2263289659"/>
       </p:ext>
     </p:extLst>
   </p:cSld>
@@ -2871,7 +2515,7 @@
             <a:pPr rtl="0"/>
             <a:fld id="{DF61EA0F-A667-4B49-8422-0062BC55E249}" type="slidenum">
               <a:rPr lang="fr-FR" noProof="1" dirty="0" smtClean="0"/>
-              <a:t>26</a:t>
+              <a:t>25</a:t>
             </a:fld>
             <a:endParaRPr lang="fr-FR" noProof="1"/>
           </a:p>
@@ -2880,7 +2524,7 @@
     </p:spTree>
     <p:extLst>
       <p:ext uri="{BB962C8B-B14F-4D97-AF65-F5344CB8AC3E}">
-        <p14:creationId xmlns:p14="http://schemas.microsoft.com/office/powerpoint/2010/main" val="2015775768"/>
+        <p14:creationId xmlns:p14="http://schemas.microsoft.com/office/powerpoint/2010/main" val="512973995"/>
       </p:ext>
     </p:extLst>
   </p:cSld>
@@ -2956,7 +2600,7 @@
             <a:pPr rtl="0"/>
             <a:fld id="{DF61EA0F-A667-4B49-8422-0062BC55E249}" type="slidenum">
               <a:rPr lang="fr-FR" noProof="1" dirty="0" smtClean="0"/>
-              <a:t>27</a:t>
+              <a:t>26</a:t>
             </a:fld>
             <a:endParaRPr lang="fr-FR" noProof="1"/>
           </a:p>
@@ -2965,7 +2609,7 @@
     </p:spTree>
     <p:extLst>
       <p:ext uri="{BB962C8B-B14F-4D97-AF65-F5344CB8AC3E}">
-        <p14:creationId xmlns:p14="http://schemas.microsoft.com/office/powerpoint/2010/main" val="1067624400"/>
+        <p14:creationId xmlns:p14="http://schemas.microsoft.com/office/powerpoint/2010/main" val="2015775768"/>
       </p:ext>
     </p:extLst>
   </p:cSld>
@@ -3019,7 +2663,50 @@
           <a:bodyPr/>
           <a:lstStyle/>
           <a:p>
-            <a:endParaRPr lang="fr-FR" noProof="1"/>
+            <a:pPr marL="0" marR="0" lvl="0" indent="0" algn="l" defTabSz="914400" rtl="0" eaLnBrk="1" fontAlgn="auto" latinLnBrk="0" hangingPunct="1">
+              <a:lnSpc>
+                <a:spcPct val="100000"/>
+              </a:lnSpc>
+              <a:spcBef>
+                <a:spcPts val="0"/>
+              </a:spcBef>
+              <a:spcAft>
+                <a:spcPts val="0"/>
+              </a:spcAft>
+              <a:buClrTx/>
+              <a:buSzTx/>
+              <a:buFontTx/>
+              <a:buNone/>
+              <a:tabLst/>
+              <a:defRPr/>
+            </a:pPr>
+            <a:r>
+              <a:rPr lang="fr-FR" noProof="1"/>
+              <a:t>Dès que vous souhaitez récupérer des listes très grandes (avec pagination de préférence), utiliser les annotations</a:t>
+            </a:r>
+          </a:p>
+          <a:p>
+            <a:pPr marL="0" marR="0" lvl="0" indent="0" algn="l" defTabSz="914400" rtl="0" eaLnBrk="1" fontAlgn="auto" latinLnBrk="0" hangingPunct="1">
+              <a:lnSpc>
+                <a:spcPct val="100000"/>
+              </a:lnSpc>
+              <a:spcBef>
+                <a:spcPts val="0"/>
+              </a:spcBef>
+              <a:spcAft>
+                <a:spcPts val="0"/>
+              </a:spcAft>
+              <a:buClrTx/>
+              <a:buSzTx/>
+              <a:buFontTx/>
+              <a:buNone/>
+              <a:tabLst/>
+              <a:defRPr/>
+            </a:pPr>
+            <a:r>
+              <a:rPr lang="fr-FR" noProof="1"/>
+              <a:t>Et en plus ça reste copmpatible avec le cas précédent !</a:t>
+            </a:r>
           </a:p>
         </p:txBody>
       </p:sp>
@@ -3041,7 +2728,7 @@
             <a:pPr rtl="0"/>
             <a:fld id="{DF61EA0F-A667-4B49-8422-0062BC55E249}" type="slidenum">
               <a:rPr lang="fr-FR" noProof="1" dirty="0" smtClean="0"/>
-              <a:t>28</a:t>
+              <a:t>27</a:t>
             </a:fld>
             <a:endParaRPr lang="fr-FR" noProof="1"/>
           </a:p>
@@ -3050,7 +2737,7 @@
     </p:spTree>
     <p:extLst>
       <p:ext uri="{BB962C8B-B14F-4D97-AF65-F5344CB8AC3E}">
-        <p14:creationId xmlns:p14="http://schemas.microsoft.com/office/powerpoint/2010/main" val="2446949418"/>
+        <p14:creationId xmlns:p14="http://schemas.microsoft.com/office/powerpoint/2010/main" val="1067624400"/>
       </p:ext>
     </p:extLst>
   </p:cSld>
@@ -3126,7 +2813,7 @@
             <a:pPr rtl="0"/>
             <a:fld id="{DF61EA0F-A667-4B49-8422-0062BC55E249}" type="slidenum">
               <a:rPr lang="fr-FR" noProof="1" dirty="0" smtClean="0"/>
-              <a:t>29</a:t>
+              <a:t>28</a:t>
             </a:fld>
             <a:endParaRPr lang="fr-FR" noProof="1"/>
           </a:p>
@@ -3135,7 +2822,7 @@
     </p:spTree>
     <p:extLst>
       <p:ext uri="{BB962C8B-B14F-4D97-AF65-F5344CB8AC3E}">
-        <p14:creationId xmlns:p14="http://schemas.microsoft.com/office/powerpoint/2010/main" val="198457126"/>
+        <p14:creationId xmlns:p14="http://schemas.microsoft.com/office/powerpoint/2010/main" val="2446949418"/>
       </p:ext>
     </p:extLst>
   </p:cSld>
@@ -3189,6 +2876,18 @@
           <a:bodyPr/>
           <a:lstStyle/>
           <a:p>
+            <a:r>
+              <a:rPr lang="fr-FR" noProof="1"/>
+              <a:t>Le premier properties est utile, j’en reparle dans le slide suivant !</a:t>
+            </a:r>
+          </a:p>
+          <a:p>
+            <a:r>
+              <a:rPr lang="fr-FR" noProof="1"/>
+              <a:t>Open in view va vous permettre de détecter plus facilement les N+1</a:t>
+            </a:r>
+          </a:p>
+          <a:p>
             <a:endParaRPr lang="fr-FR" noProof="1"/>
           </a:p>
         </p:txBody>
@@ -3211,7 +2910,7 @@
             <a:pPr rtl="0"/>
             <a:fld id="{DF61EA0F-A667-4B49-8422-0062BC55E249}" type="slidenum">
               <a:rPr lang="fr-FR" noProof="1" dirty="0" smtClean="0"/>
-              <a:t>30</a:t>
+              <a:t>29</a:t>
             </a:fld>
             <a:endParaRPr lang="fr-FR" noProof="1"/>
           </a:p>
@@ -3220,7 +2919,7 @@
     </p:spTree>
     <p:extLst>
       <p:ext uri="{BB962C8B-B14F-4D97-AF65-F5344CB8AC3E}">
-        <p14:creationId xmlns:p14="http://schemas.microsoft.com/office/powerpoint/2010/main" val="1359022272"/>
+        <p14:creationId xmlns:p14="http://schemas.microsoft.com/office/powerpoint/2010/main" val="198457126"/>
       </p:ext>
     </p:extLst>
   </p:cSld>
@@ -3323,6 +3022,176 @@
     <p:extLst>
       <p:ext uri="{BB962C8B-B14F-4D97-AF65-F5344CB8AC3E}">
         <p14:creationId xmlns:p14="http://schemas.microsoft.com/office/powerpoint/2010/main" val="976932870"/>
+      </p:ext>
+    </p:extLst>
+  </p:cSld>
+  <p:clrMapOvr>
+    <a:masterClrMapping/>
+  </p:clrMapOvr>
+</p:notes>
+</file>
+
+<file path=ppt/notesSlides/notesSlide30.xml><?xml version="1.0" encoding="utf-8"?>
+<p:notes xmlns:a="http://schemas.openxmlformats.org/drawingml/2006/main" xmlns:r="http://schemas.openxmlformats.org/officeDocument/2006/relationships" xmlns:p="http://schemas.openxmlformats.org/presentationml/2006/main">
+  <p:cSld>
+    <p:spTree>
+      <p:nvGrpSpPr>
+        <p:cNvPr id="1" name=""/>
+        <p:cNvGrpSpPr/>
+        <p:nvPr/>
+      </p:nvGrpSpPr>
+      <p:grpSpPr>
+        <a:xfrm>
+          <a:off x="0" y="0"/>
+          <a:ext cx="0" cy="0"/>
+          <a:chOff x="0" y="0"/>
+          <a:chExt cx="0" cy="0"/>
+        </a:xfrm>
+      </p:grpSpPr>
+      <p:sp>
+        <p:nvSpPr>
+          <p:cNvPr id="2" name="Espace réservé de l'image des diapositives 1"/>
+          <p:cNvSpPr>
+            <a:spLocks noGrp="1" noRot="1" noChangeAspect="1"/>
+          </p:cNvSpPr>
+          <p:nvPr>
+            <p:ph type="sldImg"/>
+          </p:nvPr>
+        </p:nvSpPr>
+        <p:spPr/>
+      </p:sp>
+      <p:sp>
+        <p:nvSpPr>
+          <p:cNvPr id="3" name="Espace réservé des notes 2"/>
+          <p:cNvSpPr>
+            <a:spLocks noGrp="1"/>
+          </p:cNvSpPr>
+          <p:nvPr>
+            <p:ph type="body" idx="1"/>
+          </p:nvPr>
+        </p:nvSpPr>
+        <p:spPr/>
+        <p:txBody>
+          <a:bodyPr/>
+          <a:lstStyle/>
+          <a:p>
+            <a:endParaRPr lang="fr-FR" noProof="1"/>
+          </a:p>
+        </p:txBody>
+      </p:sp>
+      <p:sp>
+        <p:nvSpPr>
+          <p:cNvPr id="4" name="Espace réservé du numéro de diapositive 3"/>
+          <p:cNvSpPr>
+            <a:spLocks noGrp="1"/>
+          </p:cNvSpPr>
+          <p:nvPr>
+            <p:ph type="sldNum" sz="quarter" idx="5"/>
+          </p:nvPr>
+        </p:nvSpPr>
+        <p:spPr/>
+        <p:txBody>
+          <a:bodyPr/>
+          <a:lstStyle/>
+          <a:p>
+            <a:pPr rtl="0"/>
+            <a:fld id="{DF61EA0F-A667-4B49-8422-0062BC55E249}" type="slidenum">
+              <a:rPr lang="fr-FR" noProof="1" dirty="0" smtClean="0"/>
+              <a:t>30</a:t>
+            </a:fld>
+            <a:endParaRPr lang="fr-FR" noProof="1"/>
+          </a:p>
+        </p:txBody>
+      </p:sp>
+    </p:spTree>
+    <p:extLst>
+      <p:ext uri="{BB962C8B-B14F-4D97-AF65-F5344CB8AC3E}">
+        <p14:creationId xmlns:p14="http://schemas.microsoft.com/office/powerpoint/2010/main" val="1359022272"/>
+      </p:ext>
+    </p:extLst>
+  </p:cSld>
+  <p:clrMapOvr>
+    <a:masterClrMapping/>
+  </p:clrMapOvr>
+</p:notes>
+</file>
+
+<file path=ppt/notesSlides/notesSlide31.xml><?xml version="1.0" encoding="utf-8"?>
+<p:notes xmlns:a="http://schemas.openxmlformats.org/drawingml/2006/main" xmlns:r="http://schemas.openxmlformats.org/officeDocument/2006/relationships" xmlns:p="http://schemas.openxmlformats.org/presentationml/2006/main">
+  <p:cSld>
+    <p:spTree>
+      <p:nvGrpSpPr>
+        <p:cNvPr id="1" name=""/>
+        <p:cNvGrpSpPr/>
+        <p:nvPr/>
+      </p:nvGrpSpPr>
+      <p:grpSpPr>
+        <a:xfrm>
+          <a:off x="0" y="0"/>
+          <a:ext cx="0" cy="0"/>
+          <a:chOff x="0" y="0"/>
+          <a:chExt cx="0" cy="0"/>
+        </a:xfrm>
+      </p:grpSpPr>
+      <p:sp>
+        <p:nvSpPr>
+          <p:cNvPr id="2" name="Espace réservé de l'image des diapositives 1"/>
+          <p:cNvSpPr>
+            <a:spLocks noGrp="1" noRot="1" noChangeAspect="1"/>
+          </p:cNvSpPr>
+          <p:nvPr>
+            <p:ph type="sldImg"/>
+          </p:nvPr>
+        </p:nvSpPr>
+        <p:spPr/>
+      </p:sp>
+      <p:sp>
+        <p:nvSpPr>
+          <p:cNvPr id="3" name="Espace réservé des notes 2"/>
+          <p:cNvSpPr>
+            <a:spLocks noGrp="1"/>
+          </p:cNvSpPr>
+          <p:nvPr>
+            <p:ph type="body" idx="1"/>
+          </p:nvPr>
+        </p:nvSpPr>
+        <p:spPr/>
+        <p:txBody>
+          <a:bodyPr/>
+          <a:lstStyle/>
+          <a:p>
+            <a:endParaRPr lang="fr-FR" noProof="1"/>
+          </a:p>
+        </p:txBody>
+      </p:sp>
+      <p:sp>
+        <p:nvSpPr>
+          <p:cNvPr id="4" name="Espace réservé du numéro de diapositive 3"/>
+          <p:cNvSpPr>
+            <a:spLocks noGrp="1"/>
+          </p:cNvSpPr>
+          <p:nvPr>
+            <p:ph type="sldNum" sz="quarter" idx="5"/>
+          </p:nvPr>
+        </p:nvSpPr>
+        <p:spPr/>
+        <p:txBody>
+          <a:bodyPr/>
+          <a:lstStyle/>
+          <a:p>
+            <a:pPr rtl="0"/>
+            <a:fld id="{DF61EA0F-A667-4B49-8422-0062BC55E249}" type="slidenum">
+              <a:rPr lang="fr-FR" noProof="1" dirty="0" smtClean="0"/>
+              <a:t>31</a:t>
+            </a:fld>
+            <a:endParaRPr lang="fr-FR" noProof="1"/>
+          </a:p>
+        </p:txBody>
+      </p:sp>
+    </p:spTree>
+    <p:extLst>
+      <p:ext uri="{BB962C8B-B14F-4D97-AF65-F5344CB8AC3E}">
+        <p14:creationId xmlns:p14="http://schemas.microsoft.com/office/powerpoint/2010/main" val="2594538779"/>
       </p:ext>
     </p:extLst>
   </p:cSld>
@@ -12354,7 +12223,7 @@
         <p:spPr>
           <a:xfrm>
             <a:off x="521207" y="1674674"/>
-            <a:ext cx="9790161" cy="1477328"/>
+            <a:ext cx="9790161" cy="2031325"/>
           </a:xfrm>
           <a:prstGeom prst="rect">
             <a:avLst/>
@@ -12373,7 +12242,7 @@
             </a:pPr>
             <a:r>
               <a:rPr lang="fr-FR" dirty="0"/>
-              <a:t>Pagination sur requête avec une réponse « conséquente » (voir section ad hoc) qui nécessite des jointures</a:t>
+              <a:t>Je filtre sur une entité particulière et je récupère l’arbre, c’est le cas que nous allons traiter dans le slide suivant !</a:t>
             </a:r>
           </a:p>
           <a:p>
@@ -12388,10 +12257,20 @@
               <a:buFont typeface="Wingdings" panose="05000000000000000000" pitchFamily="2" charset="2"/>
               <a:buChar char="Ø"/>
             </a:pPr>
+            <a:endParaRPr lang="fr-FR" dirty="0"/>
+          </a:p>
+          <a:p>
+            <a:pPr marL="285750" indent="-285750">
+              <a:buFont typeface="Wingdings" panose="05000000000000000000" pitchFamily="2" charset="2"/>
+              <a:buChar char="Ø"/>
+            </a:pPr>
             <a:r>
               <a:rPr lang="fr-FR" dirty="0"/>
-              <a:t>Je filtre sur une entité particulière et je récupère l’arbre, c’est le cas que nous allons traiter dans le slide suivant !</a:t>
-            </a:r>
+              <a:t>Pagination sur requête avec une réponse « conséquente » (voir section ad hoc) qui nécessite des jointures</a:t>
+            </a:r>
+          </a:p>
+          <a:p>
+            <a:endParaRPr lang="fr-FR" dirty="0"/>
           </a:p>
         </p:txBody>
       </p:sp>
@@ -12449,7 +12328,7 @@
                                         <p:tgtEl>
                                           <p:spTgt spid="5">
                                             <p:txEl>
-                                              <p:pRg st="0" end="0"/>
+                                              <p:pRg st="3" end="3"/>
                                             </p:txEl>
                                           </p:spTgt>
                                         </p:tgtEl>
@@ -12498,7 +12377,7 @@
                                         <p:tgtEl>
                                           <p:spTgt spid="5">
                                             <p:txEl>
-                                              <p:pRg st="2" end="2"/>
+                                              <p:pRg st="0" end="0"/>
                                             </p:txEl>
                                           </p:spTgt>
                                         </p:tgtEl>
@@ -19104,7 +18983,7 @@
                 <a:effectLst/>
                 <a:latin typeface="Fira Code"/>
               </a:rPr>
-              <a:t>findAllPagination</a:t>
+              <a:t>findAll</a:t>
             </a:r>
             <a:r>
               <a:rPr kumimoji="0" lang="fr-FR" altLang="fr-FR" sz="1400" b="0" i="0" u="none" strike="noStrike" cap="none" normalizeH="0" baseline="0" dirty="0">
@@ -20357,21 +20236,13 @@
             </a:endParaRPr>
           </a:p>
           <a:p>
-            <a:pPr marL="0" marR="0" lvl="0" indent="0" algn="l" defTabSz="914400" rtl="0" eaLnBrk="0" fontAlgn="base" latinLnBrk="0" hangingPunct="0">
-              <a:lnSpc>
-                <a:spcPct val="100000"/>
-              </a:lnSpc>
+            <a:pPr lvl="0" eaLnBrk="0" fontAlgn="base" hangingPunct="0">
               <a:spcBef>
                 <a:spcPct val="0"/>
               </a:spcBef>
               <a:spcAft>
                 <a:spcPct val="0"/>
               </a:spcAft>
-              <a:buClrTx/>
-              <a:buSzTx/>
-              <a:buFontTx/>
-              <a:buNone/>
-              <a:tabLst/>
             </a:pPr>
             <a:r>
               <a:rPr kumimoji="0" lang="fr-FR" altLang="fr-FR" sz="1400" b="0" i="1" u="none" strike="noStrike" cap="none" normalizeH="0" baseline="0" dirty="0">
@@ -20661,17 +20532,13 @@
               <a:t>findAllSlice</a:t>
             </a:r>
             <a:r>
-              <a:rPr kumimoji="0" lang="fr-FR" altLang="fr-FR" sz="1400" b="0" i="0" u="none" strike="noStrike" cap="none" normalizeH="0" baseline="0" dirty="0">
-                <a:ln>
-                  <a:noFill/>
-                </a:ln>
-                <a:solidFill>
-                  <a:srgbClr val="080808"/>
-                </a:solidFill>
-                <a:effectLst/>
-                <a:latin typeface="Fira Code"/>
-              </a:rPr>
-              <a:t>(</a:t>
+              <a:rPr lang="fr-FR" altLang="fr-FR" sz="1400" dirty="0">
+                <a:solidFill>
+                  <a:srgbClr val="080808"/>
+                </a:solidFill>
+                <a:latin typeface="Fira Code"/>
+              </a:rPr>
+              <a:t>(Type param, </a:t>
             </a:r>
             <a:r>
               <a:rPr kumimoji="0" lang="fr-FR" altLang="fr-FR" sz="1400" b="0" i="0" u="none" strike="noStrike" cap="none" normalizeH="0" baseline="0" dirty="0" err="1">
@@ -21876,8 +21743,8 @@
         </p:nvSpPr>
         <p:spPr bwMode="auto">
           <a:xfrm>
-            <a:off x="636494" y="2251645"/>
-            <a:ext cx="10919012" cy="2031325"/>
+            <a:off x="636494" y="2390144"/>
+            <a:ext cx="10919012" cy="1754326"/>
           </a:xfrm>
           <a:prstGeom prst="rect">
             <a:avLst/>
@@ -22311,12 +22178,12 @@
                   <a:noFill/>
                 </a:ln>
                 <a:solidFill>
-                  <a:srgbClr val="9E880D"/>
-                </a:solidFill>
-                <a:effectLst/>
-                <a:latin typeface="Fira Code"/>
-              </a:rPr>
-              <a:t>@Query</a:t>
+                  <a:srgbClr val="000000"/>
+                </a:solidFill>
+                <a:effectLst/>
+                <a:latin typeface="Fira Code"/>
+              </a:rPr>
+              <a:t>Page</a:t>
             </a:r>
             <a:r>
               <a:rPr kumimoji="0" lang="fr-FR" altLang="fr-FR" b="0" i="0" u="none" strike="noStrike" cap="none" normalizeH="0" baseline="0" dirty="0">
@@ -22329,7 +22196,20 @@
                 <a:effectLst/>
                 <a:latin typeface="Fira Code"/>
               </a:rPr>
-              <a:t>(</a:t>
+              <a:t>&lt;</a:t>
+            </a:r>
+            <a:r>
+              <a:rPr kumimoji="0" lang="fr-FR" altLang="fr-FR" b="0" i="0" u="none" strike="noStrike" cap="none" normalizeH="0" baseline="0" dirty="0" err="1">
+                <a:ln>
+                  <a:noFill/>
+                </a:ln>
+                <a:solidFill>
+                  <a:srgbClr val="000000"/>
+                </a:solidFill>
+                <a:effectLst/>
+                <a:latin typeface="Fira Code"/>
+              </a:rPr>
+              <a:t>School</a:t>
             </a:r>
             <a:r>
               <a:rPr kumimoji="0" lang="fr-FR" altLang="fr-FR" b="0" i="0" u="none" strike="noStrike" cap="none" normalizeH="0" baseline="0" dirty="0">
@@ -22337,12 +22217,12 @@
                   <a:noFill/>
                 </a:ln>
                 <a:solidFill>
-                  <a:srgbClr val="067D17"/>
-                </a:solidFill>
-                <a:effectLst/>
-                <a:latin typeface="Fira Code"/>
-              </a:rPr>
-              <a:t>"SELECT sc FROM </a:t>
+                  <a:srgbClr val="080808"/>
+                </a:solidFill>
+                <a:effectLst/>
+                <a:latin typeface="Fira Code"/>
+              </a:rPr>
+              <a:t>&gt; </a:t>
             </a:r>
             <a:r>
               <a:rPr kumimoji="0" lang="fr-FR" altLang="fr-FR" b="0" i="0" u="none" strike="noStrike" cap="none" normalizeH="0" baseline="0" dirty="0" err="1">
@@ -22350,115 +22230,12 @@
                   <a:noFill/>
                 </a:ln>
                 <a:solidFill>
-                  <a:srgbClr val="067D17"/>
-                </a:solidFill>
-                <a:effectLst/>
-                <a:latin typeface="Fira Code"/>
-              </a:rPr>
-              <a:t>School</a:t>
-            </a:r>
-            <a:r>
-              <a:rPr kumimoji="0" lang="fr-FR" altLang="fr-FR" b="0" i="0" u="none" strike="noStrike" cap="none" normalizeH="0" baseline="0" dirty="0">
-                <a:ln>
-                  <a:noFill/>
-                </a:ln>
-                <a:solidFill>
-                  <a:srgbClr val="067D17"/>
-                </a:solidFill>
-                <a:effectLst/>
-                <a:latin typeface="Fira Code"/>
-              </a:rPr>
-              <a:t> sc"</a:t>
-            </a:r>
-            <a:r>
-              <a:rPr kumimoji="0" lang="fr-FR" altLang="fr-FR" b="0" i="0" u="none" strike="noStrike" cap="none" normalizeH="0" baseline="0" dirty="0">
-                <a:ln>
-                  <a:noFill/>
-                </a:ln>
-                <a:solidFill>
-                  <a:srgbClr val="080808"/>
-                </a:solidFill>
-                <a:effectLst/>
-                <a:latin typeface="Fira Code"/>
-              </a:rPr>
-              <a:t>)</a:t>
-            </a:r>
-            <a:br>
-              <a:rPr kumimoji="0" lang="fr-FR" altLang="fr-FR" b="0" i="0" u="none" strike="noStrike" cap="none" normalizeH="0" baseline="0" dirty="0">
-                <a:ln>
-                  <a:noFill/>
-                </a:ln>
-                <a:solidFill>
-                  <a:srgbClr val="080808"/>
-                </a:solidFill>
-                <a:effectLst/>
-                <a:latin typeface="Fira Code"/>
-              </a:rPr>
-            </a:br>
-            <a:r>
-              <a:rPr kumimoji="0" lang="fr-FR" altLang="fr-FR" b="0" i="0" u="none" strike="noStrike" cap="none" normalizeH="0" baseline="0" dirty="0">
-                <a:ln>
-                  <a:noFill/>
-                </a:ln>
-                <a:solidFill>
-                  <a:srgbClr val="000000"/>
-                </a:solidFill>
-                <a:effectLst/>
-                <a:latin typeface="Fira Code"/>
-              </a:rPr>
-              <a:t>Page</a:t>
-            </a:r>
-            <a:r>
-              <a:rPr kumimoji="0" lang="fr-FR" altLang="fr-FR" b="0" i="0" u="none" strike="noStrike" cap="none" normalizeH="0" baseline="0" dirty="0">
-                <a:ln>
-                  <a:noFill/>
-                </a:ln>
-                <a:solidFill>
-                  <a:srgbClr val="080808"/>
-                </a:solidFill>
-                <a:effectLst/>
-                <a:latin typeface="Fira Code"/>
-              </a:rPr>
-              <a:t>&lt;</a:t>
-            </a:r>
-            <a:r>
-              <a:rPr kumimoji="0" lang="fr-FR" altLang="fr-FR" b="0" i="0" u="none" strike="noStrike" cap="none" normalizeH="0" baseline="0" dirty="0" err="1">
-                <a:ln>
-                  <a:noFill/>
-                </a:ln>
-                <a:solidFill>
-                  <a:srgbClr val="000000"/>
-                </a:solidFill>
-                <a:effectLst/>
-                <a:latin typeface="Fira Code"/>
-              </a:rPr>
-              <a:t>School</a:t>
-            </a:r>
-            <a:r>
-              <a:rPr kumimoji="0" lang="fr-FR" altLang="fr-FR" b="0" i="0" u="none" strike="noStrike" cap="none" normalizeH="0" baseline="0" dirty="0">
-                <a:ln>
-                  <a:noFill/>
-                </a:ln>
-                <a:solidFill>
-                  <a:srgbClr val="080808"/>
-                </a:solidFill>
-                <a:effectLst/>
-                <a:latin typeface="Fira Code"/>
-              </a:rPr>
-              <a:t>&gt; </a:t>
-            </a:r>
-            <a:r>
-              <a:rPr kumimoji="0" lang="fr-FR" altLang="fr-FR" b="0" i="0" u="none" strike="noStrike" cap="none" normalizeH="0" baseline="0" dirty="0" err="1">
-                <a:ln>
-                  <a:noFill/>
-                </a:ln>
-                <a:solidFill>
                   <a:srgbClr val="00627A"/>
                 </a:solidFill>
                 <a:effectLst/>
                 <a:latin typeface="Fira Code"/>
               </a:rPr>
-              <a:t>findAllPagination</a:t>
+              <a:t>findAll</a:t>
             </a:r>
             <a:r>
               <a:rPr kumimoji="0" lang="fr-FR" altLang="fr-FR" b="0" i="0" u="none" strike="noStrike" cap="none" normalizeH="0" baseline="0" dirty="0">
@@ -23595,8 +23372,30 @@
           <a:p>
             <a:r>
               <a:rPr lang="fr-FR" dirty="0"/>
-              <a:t>Pourquoi faire ? Pour sortir du modèle relationnel et faire des requêtes très rapides (Dashboard etc…)</a:t>
-            </a:r>
+              <a:t>Pourquoi faire ? Pour sortir du modèle relationnel et faire des requêtes très rapides (Dashboard etc…) </a:t>
+            </a:r>
+            <a:r>
+              <a:rPr lang="fr-FR" dirty="0">
+                <a:sym typeface="Wingdings" panose="05000000000000000000" pitchFamily="2" charset="2"/>
+              </a:rPr>
+              <a:t> je ne récupère </a:t>
+            </a:r>
+            <a:r>
+              <a:rPr lang="fr-FR" u="sng" dirty="0">
+                <a:solidFill>
+                  <a:srgbClr val="C00000"/>
+                </a:solidFill>
+                <a:sym typeface="Wingdings" panose="05000000000000000000" pitchFamily="2" charset="2"/>
+              </a:rPr>
+              <a:t>que</a:t>
+            </a:r>
+            <a:r>
+              <a:rPr lang="fr-FR" dirty="0">
+                <a:sym typeface="Wingdings" panose="05000000000000000000" pitchFamily="2" charset="2"/>
+              </a:rPr>
+              <a:t> les données nécessaires</a:t>
+            </a:r>
+            <a:endParaRPr lang="fr-FR" dirty="0"/>
           </a:p>
           <a:p>
             <a:endParaRPr lang="fr-FR" dirty="0"/>
@@ -29204,7 +29003,13 @@
           <p:cNvGraphicFramePr>
             <a:graphicFrameLocks noGrp="1"/>
           </p:cNvGraphicFramePr>
-          <p:nvPr/>
+          <p:nvPr>
+            <p:extLst>
+              <p:ext uri="{D42A27DB-BD31-4B8C-83A1-F6EECF244321}">
+                <p14:modId xmlns:p14="http://schemas.microsoft.com/office/powerpoint/2010/main" val="3287725693"/>
+              </p:ext>
+            </p:extLst>
+          </p:nvPr>
         </p:nvGraphicFramePr>
         <p:xfrm>
           <a:off x="687421" y="1284051"/>
@@ -29717,7 +29522,7 @@
                       <a:pPr algn="ctr"/>
                       <a:r>
                         <a:rPr lang="fr-FR" sz="1400" dirty="0"/>
-                        <a:t>(tape dans toutes les tables, &gt; 5, 6 jointures)</a:t>
+                        <a:t>(tape dans toutes les tables, &gt; 6 jointures)</a:t>
                       </a:r>
                     </a:p>
                     <a:p>
@@ -32027,7 +31832,7 @@
                             </p:stCondLst>
                             <p:childTnLst>
                               <p:par>
-                                <p:cTn id="5" presetID="1" presetClass="entr" presetSubtype="0" fill="hold" nodeType="clickEffect">
+                                <p:cTn id="5" presetID="1" presetClass="entr" presetSubtype="0" fill="hold" grpId="0" nodeType="clickEffect">
                                   <p:stCondLst>
                                     <p:cond delay="0"/>
                                   </p:stCondLst>
@@ -32040,11 +31845,7 @@
                                           </p:stCondLst>
                                         </p:cTn>
                                         <p:tgtEl>
-                                          <p:spTgt spid="2">
-                                            <p:txEl>
-                                              <p:pRg st="0" end="0"/>
-                                            </p:txEl>
-                                          </p:spTgt>
+                                          <p:spTgt spid="6"/>
                                         </p:tgtEl>
                                         <p:attrNameLst>
                                           <p:attrName>style.visibility</p:attrName>
@@ -32084,7 +31885,128 @@
         </p:cTn>
       </p:par>
     </p:tnLst>
+    <p:bldLst>
+      <p:bldP spid="6" grpId="0" animBg="1"/>
+    </p:bldLst>
   </p:timing>
+</p:sld>
+</file>
+
+<file path=ppt/slides/slide31.xml><?xml version="1.0" encoding="utf-8"?>
+<p:sld xmlns:a="http://schemas.openxmlformats.org/drawingml/2006/main" xmlns:r="http://schemas.openxmlformats.org/officeDocument/2006/relationships" xmlns:p="http://schemas.openxmlformats.org/presentationml/2006/main">
+  <p:cSld>
+    <p:spTree>
+      <p:nvGrpSpPr>
+        <p:cNvPr id="1" name=""/>
+        <p:cNvGrpSpPr/>
+        <p:nvPr/>
+      </p:nvGrpSpPr>
+      <p:grpSpPr>
+        <a:xfrm>
+          <a:off x="0" y="0"/>
+          <a:ext cx="0" cy="0"/>
+          <a:chOff x="0" y="0"/>
+          <a:chExt cx="0" cy="0"/>
+        </a:xfrm>
+      </p:grpSpPr>
+      <p:sp>
+        <p:nvSpPr>
+          <p:cNvPr id="4" name="Titre 3"/>
+          <p:cNvSpPr>
+            <a:spLocks noGrp="1"/>
+          </p:cNvSpPr>
+          <p:nvPr>
+            <p:ph type="title"/>
+          </p:nvPr>
+        </p:nvSpPr>
+        <p:spPr>
+          <a:xfrm>
+            <a:off x="521207" y="448056"/>
+            <a:ext cx="7783344" cy="640080"/>
+          </a:xfrm>
+        </p:spPr>
+        <p:txBody>
+          <a:bodyPr rtlCol="0">
+            <a:normAutofit/>
+          </a:bodyPr>
+          <a:lstStyle/>
+          <a:p>
+            <a:pPr rtl="0"/>
+            <a:r>
+              <a:rPr lang="fr-FR" noProof="1">
+                <a:latin typeface="Segoe UI Light" panose="020B0502040204020203" pitchFamily="34" charset="0"/>
+                <a:cs typeface="Segoe UI Light" panose="020B0502040204020203" pitchFamily="34" charset="0"/>
+              </a:rPr>
+              <a:t>Questions ?</a:t>
+            </a:r>
+          </a:p>
+        </p:txBody>
+      </p:sp>
+      <p:pic>
+        <p:nvPicPr>
+          <p:cNvPr id="1026" name="Picture 2" descr="La comédie «lourde» à la française, un cinéma social | Slate.fr">
+            <a:extLst>
+              <a:ext uri="{FF2B5EF4-FFF2-40B4-BE49-F238E27FC236}">
+                <a16:creationId xmlns:a16="http://schemas.microsoft.com/office/drawing/2014/main" id="{4625B0D1-5AEC-4614-BD48-24C59880CB52}"/>
+              </a:ext>
+            </a:extLst>
+          </p:cNvPr>
+          <p:cNvPicPr>
+            <a:picLocks noChangeAspect="1" noChangeArrowheads="1" noCrop="1"/>
+          </p:cNvPicPr>
+          <p:nvPr/>
+        </p:nvPicPr>
+        <p:blipFill>
+          <a:blip r:embed="rId3">
+            <a:extLst>
+              <a:ext uri="{28A0092B-C50C-407E-A947-70E740481C1C}">
+                <a14:useLocalDpi xmlns:a14="http://schemas.microsoft.com/office/drawing/2010/main" val="0"/>
+              </a:ext>
+            </a:extLst>
+          </a:blip>
+          <a:srcRect/>
+          <a:stretch>
+            <a:fillRect/>
+          </a:stretch>
+        </p:blipFill>
+        <p:spPr bwMode="auto">
+          <a:xfrm>
+            <a:off x="619341" y="1709737"/>
+            <a:ext cx="10953318" cy="4462463"/>
+          </a:xfrm>
+          <a:prstGeom prst="rect">
+            <a:avLst/>
+          </a:prstGeom>
+          <a:noFill/>
+          <a:extLst>
+            <a:ext uri="{909E8E84-426E-40DD-AFC4-6F175D3DCCD1}">
+              <a14:hiddenFill xmlns:a14="http://schemas.microsoft.com/office/drawing/2010/main">
+                <a:solidFill>
+                  <a:srgbClr val="FFFFFF"/>
+                </a:solidFill>
+              </a14:hiddenFill>
+            </a:ext>
+          </a:extLst>
+        </p:spPr>
+      </p:pic>
+    </p:spTree>
+    <p:extLst>
+      <p:ext uri="{BB962C8B-B14F-4D97-AF65-F5344CB8AC3E}">
+        <p14:creationId xmlns:p14="http://schemas.microsoft.com/office/powerpoint/2010/main" val="809557882"/>
+      </p:ext>
+    </p:extLst>
+  </p:cSld>
+  <p:clrMapOvr>
+    <a:masterClrMapping/>
+  </p:clrMapOvr>
+  <mc:AlternateContent xmlns:mc="http://schemas.openxmlformats.org/markup-compatibility/2006" xmlns:p14="http://schemas.microsoft.com/office/powerpoint/2010/main">
+    <mc:Choice Requires="p14">
+      <p:transition p14:dur="10"/>
+    </mc:Choice>
+    <mc:Fallback xmlns="">
+      <p:transition/>
+    </mc:Fallback>
+  </mc:AlternateContent>
 </p:sld>
 </file>
 
@@ -41422,15 +41344,6 @@
 </file>
 
 <file path=customXml/item1.xml><?xml version="1.0" encoding="utf-8"?>
-<?mso-contentType ?>
-<FormTemplates xmlns="http://schemas.microsoft.com/sharepoint/v3/contenttype/forms">
-  <Display>DocumentLibraryForm</Display>
-  <Edit>DocumentLibraryForm</Edit>
-  <New>DocumentLibraryForm</New>
-</FormTemplates>
-</file>
-
-<file path=customXml/item2.xml><?xml version="1.0" encoding="utf-8"?>
 <ct:contentTypeSchema xmlns:ct="http://schemas.microsoft.com/office/2006/metadata/contentType" xmlns:ma="http://schemas.microsoft.com/office/2006/metadata/properties/metaAttributes" ct:_="" ma:_="" ma:contentTypeName="Document" ma:contentTypeID="0x01010079F111ED35F8CC479449609E8A0923A6" ma:contentTypeVersion="12" ma:contentTypeDescription="Create a new document." ma:contentTypeScope="" ma:versionID="a8a52e8c320b9a064ae3583ae3861c92">
   <xsd:schema xmlns:xsd="http://www.w3.org/2001/XMLSchema" xmlns:xs="http://www.w3.org/2001/XMLSchema" xmlns:p="http://schemas.microsoft.com/office/2006/metadata/properties" xmlns:ns2="71af3243-3dd4-4a8d-8c0d-dd76da1f02a5" xmlns:ns3="16c05727-aa75-4e4a-9b5f-8a80a1165891" targetNamespace="http://schemas.microsoft.com/office/2006/metadata/properties" ma:root="true" ma:fieldsID="88020cb39231a0945110f9cd888b521a" ns2:_="" ns3:_="">
     <xsd:import namespace="71af3243-3dd4-4a8d-8c0d-dd76da1f02a5"/>
@@ -41651,6 +41564,15 @@
 </ct:contentTypeSchema>
 </file>
 
+<file path=customXml/item2.xml><?xml version="1.0" encoding="utf-8"?>
+<?mso-contentType ?>
+<FormTemplates xmlns="http://schemas.microsoft.com/sharepoint/v3/contenttype/forms">
+  <Display>DocumentLibraryForm</Display>
+  <Edit>DocumentLibraryForm</Edit>
+  <New>DocumentLibraryForm</New>
+</FormTemplates>
+</file>
+
 <file path=customXml/item3.xml><?xml version="1.0" encoding="utf-8"?>
 <p:properties xmlns:p="http://schemas.microsoft.com/office/2006/metadata/properties" xmlns:xsi="http://www.w3.org/2001/XMLSchema-instance" xmlns:pc="http://schemas.microsoft.com/office/infopath/2007/PartnerControls">
   <documentManagement>
@@ -41661,14 +41583,6 @@
 </file>
 
 <file path=customXml/itemProps1.xml><?xml version="1.0" encoding="utf-8"?>
-<ds:datastoreItem xmlns:ds="http://schemas.openxmlformats.org/officeDocument/2006/customXml" ds:itemID="{7EE8C63A-4744-4DE4-BB49-0FF0B5375C60}">
-  <ds:schemaRefs>
-    <ds:schemaRef ds:uri="http://schemas.microsoft.com/sharepoint/v3/contenttype/forms"/>
-  </ds:schemaRefs>
-</ds:datastoreItem>
-</file>
-
-<file path=customXml/itemProps2.xml><?xml version="1.0" encoding="utf-8"?>
 <ds:datastoreItem xmlns:ds="http://schemas.openxmlformats.org/officeDocument/2006/customXml" ds:itemID="{FD7FC771-7DFE-49DA-B577-71181BFBCB2E}">
   <ds:schemaRefs>
     <ds:schemaRef ds:uri="http://schemas.microsoft.com/office/2006/metadata/contentType"/>
@@ -41683,6 +41597,14 @@
     <ds:schemaRef ds:uri="http://purl.org/dc/elements/1.1/"/>
     <ds:schemaRef ds:uri="http://purl.org/dc/terms/"/>
     <ds:schemaRef ds:uri="http://schemas.microsoft.com/internal/obd"/>
+  </ds:schemaRefs>
+</ds:datastoreItem>
+</file>
+
+<file path=customXml/itemProps2.xml><?xml version="1.0" encoding="utf-8"?>
+<ds:datastoreItem xmlns:ds="http://schemas.openxmlformats.org/officeDocument/2006/customXml" ds:itemID="{7EE8C63A-4744-4DE4-BB49-0FF0B5375C60}">
+  <ds:schemaRefs>
+    <ds:schemaRef ds:uri="http://schemas.microsoft.com/sharepoint/v3/contenttype/forms"/>
   </ds:schemaRefs>
 </ds:datastoreItem>
 </file>

--- a/JPA-HIBERNATE.pptx
+++ b/JPA-HIBERNATE.pptx
@@ -12328,7 +12328,7 @@
                                         <p:tgtEl>
                                           <p:spTgt spid="5">
                                             <p:txEl>
-                                              <p:pRg st="3" end="3"/>
+                                              <p:pRg st="0" end="0"/>
                                             </p:txEl>
                                           </p:spTgt>
                                         </p:tgtEl>
@@ -12377,7 +12377,7 @@
                                         <p:tgtEl>
                                           <p:spTgt spid="5">
                                             <p:txEl>
-                                              <p:pRg st="0" end="0"/>
+                                              <p:pRg st="3" end="3"/>
                                             </p:txEl>
                                           </p:spTgt>
                                         </p:tgtEl>
@@ -41565,21 +41565,21 @@
 </file>
 
 <file path=customXml/item2.xml><?xml version="1.0" encoding="utf-8"?>
+<p:properties xmlns:p="http://schemas.microsoft.com/office/2006/metadata/properties" xmlns:xsi="http://www.w3.org/2001/XMLSchema-instance" xmlns:pc="http://schemas.microsoft.com/office/infopath/2007/PartnerControls">
+  <documentManagement>
+    <Status xmlns="71af3243-3dd4-4a8d-8c0d-dd76da1f02a5">Not started</Status>
+    <MediaServiceKeyPoints xmlns="71af3243-3dd4-4a8d-8c0d-dd76da1f02a5" xsi:nil="true"/>
+  </documentManagement>
+</p:properties>
+</file>
+
+<file path=customXml/item3.xml><?xml version="1.0" encoding="utf-8"?>
 <?mso-contentType ?>
 <FormTemplates xmlns="http://schemas.microsoft.com/sharepoint/v3/contenttype/forms">
   <Display>DocumentLibraryForm</Display>
   <Edit>DocumentLibraryForm</Edit>
   <New>DocumentLibraryForm</New>
 </FormTemplates>
-</file>
-
-<file path=customXml/item3.xml><?xml version="1.0" encoding="utf-8"?>
-<p:properties xmlns:p="http://schemas.microsoft.com/office/2006/metadata/properties" xmlns:xsi="http://www.w3.org/2001/XMLSchema-instance" xmlns:pc="http://schemas.microsoft.com/office/infopath/2007/PartnerControls">
-  <documentManagement>
-    <Status xmlns="71af3243-3dd4-4a8d-8c0d-dd76da1f02a5">Not started</Status>
-    <MediaServiceKeyPoints xmlns="71af3243-3dd4-4a8d-8c0d-dd76da1f02a5" xsi:nil="true"/>
-  </documentManagement>
-</p:properties>
 </file>
 
 <file path=customXml/itemProps1.xml><?xml version="1.0" encoding="utf-8"?>
@@ -41602,14 +41602,6 @@
 </file>
 
 <file path=customXml/itemProps2.xml><?xml version="1.0" encoding="utf-8"?>
-<ds:datastoreItem xmlns:ds="http://schemas.openxmlformats.org/officeDocument/2006/customXml" ds:itemID="{7EE8C63A-4744-4DE4-BB49-0FF0B5375C60}">
-  <ds:schemaRefs>
-    <ds:schemaRef ds:uri="http://schemas.microsoft.com/sharepoint/v3/contenttype/forms"/>
-  </ds:schemaRefs>
-</ds:datastoreItem>
-</file>
-
-<file path=customXml/itemProps3.xml><?xml version="1.0" encoding="utf-8"?>
 <ds:datastoreItem xmlns:ds="http://schemas.openxmlformats.org/officeDocument/2006/customXml" ds:itemID="{950072C5-DDE0-4258-BA7A-4D4B80DFA632}">
   <ds:schemaRefs>
     <ds:schemaRef ds:uri="http://purl.org/dc/terms/"/>
@@ -41624,4 +41616,12 @@
     <ds:schemaRef ds:uri="http://purl.org/dc/dcmitype/"/>
   </ds:schemaRefs>
 </ds:datastoreItem>
+</file>
+
+<file path=customXml/itemProps3.xml><?xml version="1.0" encoding="utf-8"?>
+<ds:datastoreItem xmlns:ds="http://schemas.openxmlformats.org/officeDocument/2006/customXml" ds:itemID="{7EE8C63A-4744-4DE4-BB49-0FF0B5375C60}">
+  <ds:schemaRefs>
+    <ds:schemaRef ds:uri="http://schemas.microsoft.com/sharepoint/v3/contenttype/forms"/>
+  </ds:schemaRefs>
+</ds:datastoreItem>
 </file>
--- a/JPA-HIBERNATE.pptx
+++ b/JPA-HIBERNATE.pptx
@@ -5,43 +5,44 @@
     <p:sldMasterId id="2147483660" r:id="rId4"/>
   </p:sldMasterIdLst>
   <p:notesMasterIdLst>
-    <p:notesMasterId r:id="rId36"/>
+    <p:notesMasterId r:id="rId37"/>
   </p:notesMasterIdLst>
   <p:handoutMasterIdLst>
-    <p:handoutMasterId r:id="rId37"/>
+    <p:handoutMasterId r:id="rId38"/>
   </p:handoutMasterIdLst>
   <p:sldIdLst>
     <p:sldId id="256" r:id="rId5"/>
     <p:sldId id="279" r:id="rId6"/>
-    <p:sldId id="300" r:id="rId7"/>
-    <p:sldId id="301" r:id="rId8"/>
-    <p:sldId id="321" r:id="rId9"/>
-    <p:sldId id="292" r:id="rId10"/>
-    <p:sldId id="293" r:id="rId11"/>
-    <p:sldId id="303" r:id="rId12"/>
-    <p:sldId id="295" r:id="rId13"/>
-    <p:sldId id="307" r:id="rId14"/>
-    <p:sldId id="323" r:id="rId15"/>
-    <p:sldId id="322" r:id="rId16"/>
-    <p:sldId id="312" r:id="rId17"/>
-    <p:sldId id="308" r:id="rId18"/>
-    <p:sldId id="309" r:id="rId19"/>
-    <p:sldId id="311" r:id="rId20"/>
-    <p:sldId id="310" r:id="rId21"/>
-    <p:sldId id="305" r:id="rId22"/>
-    <p:sldId id="315" r:id="rId23"/>
-    <p:sldId id="317" r:id="rId24"/>
-    <p:sldId id="320" r:id="rId25"/>
-    <p:sldId id="313" r:id="rId26"/>
-    <p:sldId id="314" r:id="rId27"/>
-    <p:sldId id="318" r:id="rId28"/>
-    <p:sldId id="319" r:id="rId29"/>
-    <p:sldId id="324" r:id="rId30"/>
-    <p:sldId id="325" r:id="rId31"/>
-    <p:sldId id="326" r:id="rId32"/>
-    <p:sldId id="306" r:id="rId33"/>
-    <p:sldId id="299" r:id="rId34"/>
-    <p:sldId id="327" r:id="rId35"/>
+    <p:sldId id="328" r:id="rId7"/>
+    <p:sldId id="300" r:id="rId8"/>
+    <p:sldId id="301" r:id="rId9"/>
+    <p:sldId id="321" r:id="rId10"/>
+    <p:sldId id="292" r:id="rId11"/>
+    <p:sldId id="293" r:id="rId12"/>
+    <p:sldId id="303" r:id="rId13"/>
+    <p:sldId id="295" r:id="rId14"/>
+    <p:sldId id="307" r:id="rId15"/>
+    <p:sldId id="323" r:id="rId16"/>
+    <p:sldId id="322" r:id="rId17"/>
+    <p:sldId id="312" r:id="rId18"/>
+    <p:sldId id="308" r:id="rId19"/>
+    <p:sldId id="309" r:id="rId20"/>
+    <p:sldId id="311" r:id="rId21"/>
+    <p:sldId id="310" r:id="rId22"/>
+    <p:sldId id="305" r:id="rId23"/>
+    <p:sldId id="315" r:id="rId24"/>
+    <p:sldId id="317" r:id="rId25"/>
+    <p:sldId id="320" r:id="rId26"/>
+    <p:sldId id="313" r:id="rId27"/>
+    <p:sldId id="314" r:id="rId28"/>
+    <p:sldId id="318" r:id="rId29"/>
+    <p:sldId id="319" r:id="rId30"/>
+    <p:sldId id="324" r:id="rId31"/>
+    <p:sldId id="325" r:id="rId32"/>
+    <p:sldId id="326" r:id="rId33"/>
+    <p:sldId id="306" r:id="rId34"/>
+    <p:sldId id="299" r:id="rId35"/>
+    <p:sldId id="327" r:id="rId36"/>
   </p:sldIdLst>
   <p:sldSz cx="12192000" cy="6858000"/>
   <p:notesSz cx="6858000" cy="9144000"/>
@@ -147,6 +148,7 @@
           <p14:sldIdLst>
             <p14:sldId id="256"/>
             <p14:sldId id="279"/>
+            <p14:sldId id="328"/>
             <p14:sldId id="300"/>
             <p14:sldId id="301"/>
             <p14:sldId id="321"/>
@@ -291,7 +293,7 @@
             <a:pPr rtl="0"/>
             <a:fld id="{3C80F580-3B6A-44CD-9A1E-E890016126F8}" type="datetime1">
               <a:rPr lang="fr-FR" smtClean="0"/>
-              <a:t>18/06/2021</a:t>
+              <a:t>20/06/2021</a:t>
             </a:fld>
             <a:endParaRPr lang="fr-FR"/>
           </a:p>
@@ -461,7 +463,7 @@
             <a:pPr rtl="0"/>
             <a:fld id="{7DF8ED89-FBF4-48E3-B6C6-C071DA98F802}" type="datetime1">
               <a:rPr lang="fr-FR" noProof="1" dirty="0" smtClean="0"/>
-              <a:t>18/06/2021</a:t>
+              <a:t>20/06/2021</a:t>
             </a:fld>
             <a:endParaRPr lang="fr-FR" noProof="1"/>
           </a:p>
@@ -889,7 +891,7 @@
             <a:pPr rtl="0"/>
             <a:fld id="{DF61EA0F-A667-4B49-8422-0062BC55E249}" type="slidenum">
               <a:rPr lang="fr-FR" noProof="1" dirty="0" smtClean="0"/>
-              <a:t>10</a:t>
+              <a:t>11</a:t>
             </a:fld>
             <a:endParaRPr lang="fr-FR" noProof="1"/>
           </a:p>
@@ -999,7 +1001,7 @@
             <a:pPr rtl="0"/>
             <a:fld id="{DF61EA0F-A667-4B49-8422-0062BC55E249}" type="slidenum">
               <a:rPr lang="fr-FR" noProof="1" dirty="0" smtClean="0"/>
-              <a:t>11</a:t>
+              <a:t>12</a:t>
             </a:fld>
             <a:endParaRPr lang="fr-FR" noProof="1"/>
           </a:p>
@@ -1112,7 +1114,7 @@
             <a:pPr rtl="0"/>
             <a:fld id="{DF61EA0F-A667-4B49-8422-0062BC55E249}" type="slidenum">
               <a:rPr lang="fr-FR" noProof="1" dirty="0" smtClean="0"/>
-              <a:t>12</a:t>
+              <a:t>13</a:t>
             </a:fld>
             <a:endParaRPr lang="fr-FR" noProof="1"/>
           </a:p>
@@ -1205,7 +1207,7 @@
             <a:pPr rtl="0"/>
             <a:fld id="{DF61EA0F-A667-4B49-8422-0062BC55E249}" type="slidenum">
               <a:rPr lang="fr-FR" noProof="1" dirty="0" smtClean="0"/>
-              <a:t>13</a:t>
+              <a:t>14</a:t>
             </a:fld>
             <a:endParaRPr lang="fr-FR" noProof="1"/>
           </a:p>
@@ -1290,7 +1292,7 @@
             <a:pPr rtl="0"/>
             <a:fld id="{DF61EA0F-A667-4B49-8422-0062BC55E249}" type="slidenum">
               <a:rPr lang="fr-FR" noProof="1" dirty="0" smtClean="0"/>
-              <a:t>14</a:t>
+              <a:t>15</a:t>
             </a:fld>
             <a:endParaRPr lang="fr-FR" noProof="1"/>
           </a:p>
@@ -1415,7 +1417,7 @@
             <a:pPr rtl="0"/>
             <a:fld id="{DF61EA0F-A667-4B49-8422-0062BC55E249}" type="slidenum">
               <a:rPr lang="fr-FR" noProof="1" dirty="0" smtClean="0"/>
-              <a:t>15</a:t>
+              <a:t>16</a:t>
             </a:fld>
             <a:endParaRPr lang="fr-FR" noProof="1"/>
           </a:p>
@@ -1503,7 +1505,7 @@
             <a:pPr rtl="0"/>
             <a:fld id="{DF61EA0F-A667-4B49-8422-0062BC55E249}" type="slidenum">
               <a:rPr lang="fr-FR" noProof="1" dirty="0" smtClean="0"/>
-              <a:t>16</a:t>
+              <a:t>17</a:t>
             </a:fld>
             <a:endParaRPr lang="fr-FR" noProof="1"/>
           </a:p>
@@ -1669,7 +1671,7 @@
             <a:pPr rtl="0"/>
             <a:fld id="{DF61EA0F-A667-4B49-8422-0062BC55E249}" type="slidenum">
               <a:rPr lang="fr-FR" noProof="1" dirty="0" smtClean="0"/>
-              <a:t>17</a:t>
+              <a:t>18</a:t>
             </a:fld>
             <a:endParaRPr lang="fr-FR" noProof="1"/>
           </a:p>
@@ -1754,7 +1756,7 @@
             <a:pPr rtl="0"/>
             <a:fld id="{DF61EA0F-A667-4B49-8422-0062BC55E249}" type="slidenum">
               <a:rPr lang="fr-FR" noProof="1" dirty="0" smtClean="0"/>
-              <a:t>18</a:t>
+              <a:t>19</a:t>
             </a:fld>
             <a:endParaRPr lang="fr-FR" noProof="1"/>
           </a:p>
@@ -1842,7 +1844,7 @@
             <a:pPr rtl="0"/>
             <a:fld id="{DF61EA0F-A667-4B49-8422-0062BC55E249}" type="slidenum">
               <a:rPr lang="fr-FR" noProof="1" dirty="0" smtClean="0"/>
-              <a:t>19</a:t>
+              <a:t>20</a:t>
             </a:fld>
             <a:endParaRPr lang="fr-FR" noProof="1"/>
           </a:p>
@@ -2052,7 +2054,7 @@
             <a:pPr rtl="0"/>
             <a:fld id="{DF61EA0F-A667-4B49-8422-0062BC55E249}" type="slidenum">
               <a:rPr lang="fr-FR" noProof="1" dirty="0" smtClean="0"/>
-              <a:t>20</a:t>
+              <a:t>21</a:t>
             </a:fld>
             <a:endParaRPr lang="fr-FR" noProof="1"/>
           </a:p>
@@ -2163,7 +2165,7 @@
             <a:pPr rtl="0"/>
             <a:fld id="{DF61EA0F-A667-4B49-8422-0062BC55E249}" type="slidenum">
               <a:rPr lang="fr-FR" noProof="1" smtClean="0"/>
-              <a:t>21</a:t>
+              <a:t>22</a:t>
             </a:fld>
             <a:endParaRPr lang="fr-FR" noProof="1"/>
           </a:p>
@@ -2251,7 +2253,7 @@
             <a:pPr rtl="0"/>
             <a:fld id="{DF61EA0F-A667-4B49-8422-0062BC55E249}" type="slidenum">
               <a:rPr lang="fr-FR" noProof="1" dirty="0" smtClean="0"/>
-              <a:t>22</a:t>
+              <a:t>23</a:t>
             </a:fld>
             <a:endParaRPr lang="fr-FR" noProof="1"/>
           </a:p>
@@ -2336,7 +2338,7 @@
             <a:pPr rtl="0"/>
             <a:fld id="{DF61EA0F-A667-4B49-8422-0062BC55E249}" type="slidenum">
               <a:rPr lang="fr-FR" noProof="1" dirty="0" smtClean="0"/>
-              <a:t>23</a:t>
+              <a:t>24</a:t>
             </a:fld>
             <a:endParaRPr lang="fr-FR" noProof="1"/>
           </a:p>
@@ -2430,7 +2432,7 @@
             <a:pPr rtl="0"/>
             <a:fld id="{DF61EA0F-A667-4B49-8422-0062BC55E249}" type="slidenum">
               <a:rPr lang="fr-FR" noProof="1" dirty="0" smtClean="0"/>
-              <a:t>24</a:t>
+              <a:t>25</a:t>
             </a:fld>
             <a:endParaRPr lang="fr-FR" noProof="1"/>
           </a:p>
@@ -2515,7 +2517,7 @@
             <a:pPr rtl="0"/>
             <a:fld id="{DF61EA0F-A667-4B49-8422-0062BC55E249}" type="slidenum">
               <a:rPr lang="fr-FR" noProof="1" dirty="0" smtClean="0"/>
-              <a:t>25</a:t>
+              <a:t>26</a:t>
             </a:fld>
             <a:endParaRPr lang="fr-FR" noProof="1"/>
           </a:p>
@@ -2600,7 +2602,7 @@
             <a:pPr rtl="0"/>
             <a:fld id="{DF61EA0F-A667-4B49-8422-0062BC55E249}" type="slidenum">
               <a:rPr lang="fr-FR" noProof="1" dirty="0" smtClean="0"/>
-              <a:t>26</a:t>
+              <a:t>27</a:t>
             </a:fld>
             <a:endParaRPr lang="fr-FR" noProof="1"/>
           </a:p>
@@ -2728,7 +2730,7 @@
             <a:pPr rtl="0"/>
             <a:fld id="{DF61EA0F-A667-4B49-8422-0062BC55E249}" type="slidenum">
               <a:rPr lang="fr-FR" noProof="1" dirty="0" smtClean="0"/>
-              <a:t>27</a:t>
+              <a:t>28</a:t>
             </a:fld>
             <a:endParaRPr lang="fr-FR" noProof="1"/>
           </a:p>
@@ -2813,7 +2815,7 @@
             <a:pPr rtl="0"/>
             <a:fld id="{DF61EA0F-A667-4B49-8422-0062BC55E249}" type="slidenum">
               <a:rPr lang="fr-FR" noProof="1" dirty="0" smtClean="0"/>
-              <a:t>28</a:t>
+              <a:t>29</a:t>
             </a:fld>
             <a:endParaRPr lang="fr-FR" noProof="1"/>
           </a:p>
@@ -2910,7 +2912,7 @@
             <a:pPr rtl="0"/>
             <a:fld id="{DF61EA0F-A667-4B49-8422-0062BC55E249}" type="slidenum">
               <a:rPr lang="fr-FR" noProof="1" dirty="0" smtClean="0"/>
-              <a:t>29</a:t>
+              <a:t>30</a:t>
             </a:fld>
             <a:endParaRPr lang="fr-FR" noProof="1"/>
           </a:p>
@@ -3012,7 +3014,7 @@
             <a:pPr rtl="0"/>
             <a:fld id="{DF61EA0F-A667-4B49-8422-0062BC55E249}" type="slidenum">
               <a:rPr lang="fr-FR" noProof="1" dirty="0" smtClean="0"/>
-              <a:t>3</a:t>
+              <a:t>4</a:t>
             </a:fld>
             <a:endParaRPr lang="fr-FR" noProof="1"/>
           </a:p>
@@ -3097,7 +3099,7 @@
             <a:pPr rtl="0"/>
             <a:fld id="{DF61EA0F-A667-4B49-8422-0062BC55E249}" type="slidenum">
               <a:rPr lang="fr-FR" noProof="1" dirty="0" smtClean="0"/>
-              <a:t>30</a:t>
+              <a:t>31</a:t>
             </a:fld>
             <a:endParaRPr lang="fr-FR" noProof="1"/>
           </a:p>
@@ -3182,7 +3184,7 @@
             <a:pPr rtl="0"/>
             <a:fld id="{DF61EA0F-A667-4B49-8422-0062BC55E249}" type="slidenum">
               <a:rPr lang="fr-FR" noProof="1" dirty="0" smtClean="0"/>
-              <a:t>31</a:t>
+              <a:t>32</a:t>
             </a:fld>
             <a:endParaRPr lang="fr-FR" noProof="1"/>
           </a:p>
@@ -3284,7 +3286,7 @@
             <a:pPr rtl="0"/>
             <a:fld id="{DF61EA0F-A667-4B49-8422-0062BC55E249}" type="slidenum">
               <a:rPr lang="fr-FR" noProof="1" dirty="0" smtClean="0"/>
-              <a:t>4</a:t>
+              <a:t>5</a:t>
             </a:fld>
             <a:endParaRPr lang="fr-FR" noProof="1"/>
           </a:p>
@@ -3386,7 +3388,7 @@
             <a:pPr rtl="0"/>
             <a:fld id="{DF61EA0F-A667-4B49-8422-0062BC55E249}" type="slidenum">
               <a:rPr lang="fr-FR" noProof="1" dirty="0" smtClean="0"/>
-              <a:t>5</a:t>
+              <a:t>6</a:t>
             </a:fld>
             <a:endParaRPr lang="fr-FR" noProof="1"/>
           </a:p>
@@ -3471,7 +3473,7 @@
             <a:pPr rtl="0"/>
             <a:fld id="{DF61EA0F-A667-4B49-8422-0062BC55E249}" type="slidenum">
               <a:rPr lang="fr-FR" noProof="1" dirty="0" smtClean="0"/>
-              <a:t>6</a:t>
+              <a:t>7</a:t>
             </a:fld>
             <a:endParaRPr lang="fr-FR" noProof="1"/>
           </a:p>
@@ -3556,7 +3558,7 @@
             <a:pPr rtl="0"/>
             <a:fld id="{DF61EA0F-A667-4B49-8422-0062BC55E249}" type="slidenum">
               <a:rPr lang="fr-FR" noProof="1" dirty="0" smtClean="0"/>
-              <a:t>7</a:t>
+              <a:t>8</a:t>
             </a:fld>
             <a:endParaRPr lang="fr-FR" noProof="1"/>
           </a:p>
@@ -3641,7 +3643,7 @@
             <a:pPr rtl="0"/>
             <a:fld id="{DF61EA0F-A667-4B49-8422-0062BC55E249}" type="slidenum">
               <a:rPr lang="fr-FR" noProof="1" dirty="0" smtClean="0"/>
-              <a:t>8</a:t>
+              <a:t>9</a:t>
             </a:fld>
             <a:endParaRPr lang="fr-FR" noProof="1"/>
           </a:p>
@@ -3735,7 +3737,7 @@
             <a:pPr rtl="0"/>
             <a:fld id="{DF61EA0F-A667-4B49-8422-0062BC55E249}" type="slidenum">
               <a:rPr lang="fr-FR" noProof="1" dirty="0" smtClean="0"/>
-              <a:t>9</a:t>
+              <a:t>10</a:t>
             </a:fld>
             <a:endParaRPr lang="fr-FR" noProof="1"/>
           </a:p>
@@ -4192,7 +4194,7 @@
             <a:pPr rtl="0"/>
             <a:fld id="{7DF3CA4B-903E-431D-AF93-2AD02E04DE8A}" type="datetime1">
               <a:rPr lang="fr-FR" noProof="0" smtClean="0"/>
-              <a:t>18/06/2021</a:t>
+              <a:t>20/06/2021</a:t>
             </a:fld>
             <a:endParaRPr lang="fr-FR" noProof="0"/>
           </a:p>
@@ -4818,7 +4820,7 @@
             <a:pPr rtl="0"/>
             <a:fld id="{802CD4F2-526B-4131-B91B-856C46007FC5}" type="datetime1">
               <a:rPr lang="fr-FR" noProof="0" smtClean="0"/>
-              <a:t>18/06/2021</a:t>
+              <a:t>20/06/2021</a:t>
             </a:fld>
             <a:endParaRPr lang="fr-FR" noProof="0"/>
           </a:p>
@@ -5289,8 +5291,8 @@
         </p:nvSpPr>
         <p:spPr>
           <a:xfrm>
-            <a:off x="3346390" y="2290888"/>
-            <a:ext cx="5801096" cy="2387600"/>
+            <a:off x="2771715" y="2201069"/>
+            <a:ext cx="5801096" cy="3364038"/>
           </a:xfrm>
         </p:spPr>
         <p:txBody>
@@ -5305,7 +5307,7 @@
                   <a:schemeClr val="bg1"/>
                 </a:solidFill>
               </a:rPr>
-              <a:t>JPA</a:t>
+              <a:t>Spring Data</a:t>
             </a:r>
             <a:br>
               <a:rPr lang="fr-FR" sz="4800" dirty="0">
@@ -5320,8 +5322,30 @@
                   <a:schemeClr val="bg1"/>
                 </a:solidFill>
               </a:rPr>
+              <a:t>JPA</a:t>
+            </a:r>
+            <a:br>
+              <a:rPr lang="fr-FR" sz="4800" dirty="0">
+                <a:solidFill>
+                  <a:schemeClr val="bg1"/>
+                </a:solidFill>
+              </a:rPr>
+            </a:br>
+            <a:r>
+              <a:rPr lang="fr-FR" sz="4800" dirty="0">
+                <a:solidFill>
+                  <a:schemeClr val="bg1"/>
+                </a:solidFill>
+              </a:rPr>
               <a:t>Hibernate</a:t>
             </a:r>
+            <a:br>
+              <a:rPr lang="fr-FR" sz="4800" dirty="0">
+                <a:solidFill>
+                  <a:schemeClr val="bg1"/>
+                </a:solidFill>
+              </a:rPr>
+            </a:br>
             <a:br>
               <a:rPr lang="fr-FR" sz="4800" dirty="0">
                 <a:solidFill>
@@ -5381,7 +5405,7 @@
         </p:blipFill>
         <p:spPr bwMode="auto">
           <a:xfrm>
-            <a:off x="6831051" y="2417268"/>
+            <a:off x="7580359" y="2119610"/>
             <a:ext cx="1905000" cy="1666875"/>
           </a:xfrm>
           <a:prstGeom prst="rect">
@@ -5397,6 +5421,36 @@
               </a14:hiddenFill>
             </a:ext>
           </a:extLst>
+        </p:spPr>
+      </p:pic>
+      <p:pic>
+        <p:nvPicPr>
+          <p:cNvPr id="4" name="Image 3">
+            <a:extLst>
+              <a:ext uri="{FF2B5EF4-FFF2-40B4-BE49-F238E27FC236}">
+                <a16:creationId xmlns:a16="http://schemas.microsoft.com/office/drawing/2014/main" id="{73B57CA5-CF57-417D-87A5-8D4D7DB8E14A}"/>
+              </a:ext>
+            </a:extLst>
+          </p:cNvPr>
+          <p:cNvPicPr>
+            <a:picLocks noChangeAspect="1"/>
+          </p:cNvPicPr>
+          <p:nvPr/>
+        </p:nvPicPr>
+        <p:blipFill>
+          <a:blip r:embed="rId4"/>
+          <a:stretch>
+            <a:fillRect/>
+          </a:stretch>
+        </p:blipFill>
+        <p:spPr>
+          <a:xfrm>
+            <a:off x="5923738" y="2119610"/>
+            <a:ext cx="1656622" cy="1666875"/>
+          </a:xfrm>
+          <a:prstGeom prst="rect">
+            <a:avLst/>
+          </a:prstGeom>
         </p:spPr>
       </p:pic>
     </p:spTree>
@@ -5413,6 +5467,1060 @@
 </file>
 
 <file path=ppt/slides/slide10.xml><?xml version="1.0" encoding="utf-8"?>
+<p:sld xmlns:a="http://schemas.openxmlformats.org/drawingml/2006/main" xmlns:r="http://schemas.openxmlformats.org/officeDocument/2006/relationships" xmlns:p="http://schemas.openxmlformats.org/presentationml/2006/main">
+  <p:cSld>
+    <p:spTree>
+      <p:nvGrpSpPr>
+        <p:cNvPr id="1" name=""/>
+        <p:cNvGrpSpPr/>
+        <p:nvPr/>
+      </p:nvGrpSpPr>
+      <p:grpSpPr>
+        <a:xfrm>
+          <a:off x="0" y="0"/>
+          <a:ext cx="0" cy="0"/>
+          <a:chOff x="0" y="0"/>
+          <a:chExt cx="0" cy="0"/>
+        </a:xfrm>
+      </p:grpSpPr>
+      <p:sp>
+        <p:nvSpPr>
+          <p:cNvPr id="4" name="Titre 3"/>
+          <p:cNvSpPr>
+            <a:spLocks noGrp="1"/>
+          </p:cNvSpPr>
+          <p:nvPr>
+            <p:ph type="title"/>
+          </p:nvPr>
+        </p:nvSpPr>
+        <p:spPr>
+          <a:xfrm>
+            <a:off x="521207" y="448056"/>
+            <a:ext cx="7783344" cy="640080"/>
+          </a:xfrm>
+        </p:spPr>
+        <p:txBody>
+          <a:bodyPr rtlCol="0">
+            <a:normAutofit/>
+          </a:bodyPr>
+          <a:lstStyle/>
+          <a:p>
+            <a:pPr rtl="0"/>
+            <a:r>
+              <a:rPr lang="fr-FR" noProof="1">
+                <a:latin typeface="Segoe UI Light" panose="020B0502040204020203" pitchFamily="34" charset="0"/>
+                <a:cs typeface="Segoe UI Light" panose="020B0502040204020203" pitchFamily="34" charset="0"/>
+              </a:rPr>
+              <a:t>Jointure Eager ou Lazy ?</a:t>
+            </a:r>
+          </a:p>
+        </p:txBody>
+      </p:sp>
+      <p:sp>
+        <p:nvSpPr>
+          <p:cNvPr id="2" name="ZoneTexte 1"/>
+          <p:cNvSpPr txBox="1"/>
+          <p:nvPr/>
+        </p:nvSpPr>
+        <p:spPr>
+          <a:xfrm>
+            <a:off x="521207" y="1243786"/>
+            <a:ext cx="10961915" cy="4247317"/>
+          </a:xfrm>
+          <a:prstGeom prst="rect">
+            <a:avLst/>
+          </a:prstGeom>
+          <a:noFill/>
+        </p:spPr>
+        <p:txBody>
+          <a:bodyPr wrap="square" rtlCol="0">
+            <a:spAutoFit/>
+          </a:bodyPr>
+          <a:lstStyle/>
+          <a:p>
+            <a:pPr marL="285750" indent="-285750">
+              <a:buFont typeface="Wingdings" panose="05000000000000000000" pitchFamily="2" charset="2"/>
+              <a:buChar char="Ø"/>
+            </a:pPr>
+            <a:r>
+              <a:rPr lang="fr-FR" dirty="0"/>
+              <a:t>One To One / </a:t>
+            </a:r>
+            <a:r>
+              <a:rPr lang="fr-FR" dirty="0" err="1"/>
+              <a:t>Many</a:t>
+            </a:r>
+            <a:r>
+              <a:rPr lang="fr-FR" dirty="0"/>
+              <a:t> To One  </a:t>
+            </a:r>
+            <a:r>
+              <a:rPr lang="fr-FR" dirty="0">
+                <a:sym typeface="Wingdings" panose="05000000000000000000" pitchFamily="2" charset="2"/>
+              </a:rPr>
+              <a:t> </a:t>
+            </a:r>
+            <a:r>
+              <a:rPr lang="fr-FR" dirty="0" err="1"/>
+              <a:t>Eager</a:t>
+            </a:r>
+            <a:r>
+              <a:rPr lang="fr-FR" dirty="0"/>
+              <a:t> par défaut</a:t>
+            </a:r>
+          </a:p>
+          <a:p>
+            <a:pPr marL="285750" indent="-285750">
+              <a:buFont typeface="Wingdings" panose="05000000000000000000" pitchFamily="2" charset="2"/>
+              <a:buChar char="Ø"/>
+            </a:pPr>
+            <a:r>
+              <a:rPr lang="fr-FR" dirty="0"/>
+              <a:t>Les autres </a:t>
+            </a:r>
+            <a:r>
+              <a:rPr lang="fr-FR" dirty="0">
+                <a:sym typeface="Wingdings" panose="05000000000000000000" pitchFamily="2" charset="2"/>
+              </a:rPr>
+              <a:t></a:t>
+            </a:r>
+            <a:r>
+              <a:rPr lang="fr-FR" dirty="0"/>
+              <a:t> </a:t>
+            </a:r>
+            <a:r>
+              <a:rPr lang="fr-FR" dirty="0" err="1"/>
+              <a:t>Lazy</a:t>
+            </a:r>
+            <a:r>
+              <a:rPr lang="fr-FR" dirty="0"/>
+              <a:t> par défaut, on ne touche pas !</a:t>
+            </a:r>
+          </a:p>
+          <a:p>
+            <a:pPr marL="285750" indent="-285750">
+              <a:buFont typeface="Wingdings" panose="05000000000000000000" pitchFamily="2" charset="2"/>
+              <a:buChar char="Ø"/>
+            </a:pPr>
+            <a:endParaRPr lang="fr-FR" dirty="0"/>
+          </a:p>
+          <a:p>
+            <a:pPr marL="285750" indent="-285750">
+              <a:buFont typeface="Wingdings" panose="05000000000000000000" pitchFamily="2" charset="2"/>
+              <a:buChar char="Ø"/>
+            </a:pPr>
+            <a:r>
+              <a:rPr lang="fr-FR" dirty="0"/>
+              <a:t>Une jointure doit être déclarative avec un </a:t>
+            </a:r>
+            <a:r>
+              <a:rPr lang="fr-FR" dirty="0" err="1"/>
+              <a:t>fetch</a:t>
+            </a:r>
+            <a:r>
+              <a:rPr lang="fr-FR" dirty="0"/>
+              <a:t> ou une requête directe !</a:t>
+            </a:r>
+            <a:br>
+              <a:rPr lang="fr-FR" dirty="0"/>
+            </a:br>
+            <a:r>
+              <a:rPr lang="fr-FR" dirty="0"/>
+              <a:t>En effet, figer les requêtes « </a:t>
+            </a:r>
+            <a:r>
+              <a:rPr lang="fr-FR" dirty="0" err="1"/>
+              <a:t>programmatiquement</a:t>
+            </a:r>
+            <a:r>
+              <a:rPr lang="fr-FR" dirty="0"/>
+              <a:t> » avec les annotations, empêchera toute évolution…</a:t>
+            </a:r>
+            <a:br>
+              <a:rPr lang="fr-FR" dirty="0"/>
+            </a:br>
+            <a:r>
+              <a:rPr lang="fr-FR" dirty="0"/>
+              <a:t>De plus, cela pourrait conduire à des problèmes de performances car des données inutiles seraient systématiquement récupérée</a:t>
+            </a:r>
+          </a:p>
+          <a:p>
+            <a:pPr marL="285750" indent="-285750">
+              <a:buFont typeface="Wingdings" panose="05000000000000000000" pitchFamily="2" charset="2"/>
+              <a:buChar char="Ø"/>
+            </a:pPr>
+            <a:endParaRPr lang="fr-FR" dirty="0"/>
+          </a:p>
+          <a:p>
+            <a:pPr marL="285750" indent="-285750">
+              <a:buFont typeface="Wingdings" panose="05000000000000000000" pitchFamily="2" charset="2"/>
+              <a:buChar char="Ø"/>
+            </a:pPr>
+            <a:endParaRPr lang="fr-FR" dirty="0"/>
+          </a:p>
+          <a:p>
+            <a:pPr marL="285750" indent="-285750">
+              <a:buFont typeface="Wingdings" panose="05000000000000000000" pitchFamily="2" charset="2"/>
+              <a:buChar char="Ø"/>
+            </a:pPr>
+            <a:r>
+              <a:rPr lang="fr-FR" dirty="0"/>
+              <a:t>Conseil ? </a:t>
+            </a:r>
+          </a:p>
+          <a:p>
+            <a:pPr marL="285750" indent="-285750">
+              <a:buFont typeface="Wingdings" panose="05000000000000000000" pitchFamily="2" charset="2"/>
+              <a:buChar char="Ø"/>
+            </a:pPr>
+            <a:endParaRPr lang="fr-FR" dirty="0"/>
+          </a:p>
+          <a:p>
+            <a:pPr marL="285750" indent="-285750">
+              <a:buFont typeface="Wingdings" panose="05000000000000000000" pitchFamily="2" charset="2"/>
+              <a:buChar char="Ø"/>
+            </a:pPr>
+            <a:endParaRPr lang="fr-FR" dirty="0"/>
+          </a:p>
+          <a:p>
+            <a:pPr marL="285750" indent="-285750">
+              <a:buFont typeface="Wingdings" panose="05000000000000000000" pitchFamily="2" charset="2"/>
+              <a:buChar char="Ø"/>
+            </a:pPr>
+            <a:endParaRPr lang="fr-FR" dirty="0"/>
+          </a:p>
+          <a:p>
+            <a:pPr marL="285750" indent="-285750">
+              <a:buFont typeface="Wingdings" panose="05000000000000000000" pitchFamily="2" charset="2"/>
+              <a:buChar char="Ø"/>
+            </a:pPr>
+            <a:endParaRPr lang="fr-FR" dirty="0"/>
+          </a:p>
+          <a:p>
+            <a:endParaRPr lang="fr-FR" dirty="0"/>
+          </a:p>
+        </p:txBody>
+      </p:sp>
+      <p:sp>
+        <p:nvSpPr>
+          <p:cNvPr id="7" name="Rectangle 2">
+            <a:extLst>
+              <a:ext uri="{FF2B5EF4-FFF2-40B4-BE49-F238E27FC236}">
+                <a16:creationId xmlns:a16="http://schemas.microsoft.com/office/drawing/2014/main" id="{A93C32C6-9C38-4791-A753-B4DA8822BD08}"/>
+              </a:ext>
+            </a:extLst>
+          </p:cNvPr>
+          <p:cNvSpPr>
+            <a:spLocks noChangeArrowheads="1"/>
+          </p:cNvSpPr>
+          <p:nvPr/>
+        </p:nvSpPr>
+        <p:spPr bwMode="auto">
+          <a:xfrm>
+            <a:off x="849492" y="4173707"/>
+            <a:ext cx="3018263" cy="400110"/>
+          </a:xfrm>
+          <a:prstGeom prst="rect">
+            <a:avLst/>
+          </a:prstGeom>
+          <a:solidFill>
+            <a:srgbClr val="FFFFFF"/>
+          </a:solidFill>
+          <a:ln>
+            <a:noFill/>
+          </a:ln>
+          <a:effectLst/>
+          <a:extLst>
+            <a:ext uri="{91240B29-F687-4F45-9708-019B960494DF}">
+              <a14:hiddenLine xmlns:a14="http://schemas.microsoft.com/office/drawing/2010/main" w="9525">
+                <a:solidFill>
+                  <a:schemeClr val="tx1"/>
+                </a:solidFill>
+                <a:miter lim="800000"/>
+                <a:headEnd/>
+                <a:tailEnd/>
+              </a14:hiddenLine>
+            </a:ext>
+            <a:ext uri="{AF507438-7753-43E0-B8FC-AC1667EBCBE1}">
+              <a14:hiddenEffects xmlns:a14="http://schemas.microsoft.com/office/drawing/2010/main">
+                <a:effectLst>
+                  <a:outerShdw dist="35921" dir="2700000" algn="ctr" rotWithShape="0">
+                    <a:schemeClr val="bg2"/>
+                  </a:outerShdw>
+                </a:effectLst>
+              </a14:hiddenEffects>
+            </a:ext>
+          </a:extLst>
+        </p:spPr>
+        <p:txBody>
+          <a:bodyPr vert="horz" wrap="square" lIns="91440" tIns="45720" rIns="91440" bIns="45720" numCol="1" anchor="ctr" anchorCtr="0" compatLnSpc="1">
+            <a:prstTxWarp prst="textNoShape">
+              <a:avLst/>
+            </a:prstTxWarp>
+            <a:spAutoFit/>
+          </a:bodyPr>
+          <a:lstStyle/>
+          <a:p>
+            <a:pPr marL="0" marR="0" lvl="0" indent="0" algn="l" defTabSz="914400" rtl="0" eaLnBrk="0" fontAlgn="base" latinLnBrk="0" hangingPunct="0">
+              <a:lnSpc>
+                <a:spcPct val="100000"/>
+              </a:lnSpc>
+              <a:spcBef>
+                <a:spcPct val="0"/>
+              </a:spcBef>
+              <a:spcAft>
+                <a:spcPct val="0"/>
+              </a:spcAft>
+              <a:buClrTx/>
+              <a:buSzTx/>
+              <a:buFontTx/>
+              <a:buNone/>
+              <a:tabLst/>
+            </a:pPr>
+            <a:r>
+              <a:rPr kumimoji="0" lang="fr-FR" altLang="fr-FR" sz="1000" b="0" i="0" u="none" strike="noStrike" cap="none" normalizeH="0" baseline="0" dirty="0">
+                <a:ln>
+                  <a:noFill/>
+                </a:ln>
+                <a:solidFill>
+                  <a:srgbClr val="9E880D"/>
+                </a:solidFill>
+                <a:effectLst/>
+                <a:latin typeface="Fira Code"/>
+              </a:rPr>
+              <a:t>@OneToOne</a:t>
+            </a:r>
+            <a:r>
+              <a:rPr kumimoji="0" lang="fr-FR" altLang="fr-FR" sz="1000" b="0" i="0" u="none" strike="noStrike" cap="none" normalizeH="0" baseline="0" dirty="0">
+                <a:ln>
+                  <a:noFill/>
+                </a:ln>
+                <a:solidFill>
+                  <a:srgbClr val="080808"/>
+                </a:solidFill>
+                <a:effectLst/>
+                <a:latin typeface="Fira Code"/>
+              </a:rPr>
+              <a:t>(fetch = </a:t>
+            </a:r>
+            <a:r>
+              <a:rPr kumimoji="0" lang="fr-FR" altLang="fr-FR" sz="1000" b="0" i="0" u="none" strike="noStrike" cap="none" normalizeH="0" baseline="0" dirty="0" err="1">
+                <a:ln>
+                  <a:noFill/>
+                </a:ln>
+                <a:solidFill>
+                  <a:srgbClr val="000000"/>
+                </a:solidFill>
+                <a:effectLst/>
+                <a:latin typeface="Fira Code"/>
+              </a:rPr>
+              <a:t>FetchType</a:t>
+            </a:r>
+            <a:r>
+              <a:rPr kumimoji="0" lang="fr-FR" altLang="fr-FR" sz="1000" b="0" i="0" u="none" strike="noStrike" cap="none" normalizeH="0" baseline="0" dirty="0" err="1">
+                <a:ln>
+                  <a:noFill/>
+                </a:ln>
+                <a:solidFill>
+                  <a:srgbClr val="080808"/>
+                </a:solidFill>
+                <a:effectLst/>
+                <a:latin typeface="Fira Code"/>
+              </a:rPr>
+              <a:t>.</a:t>
+            </a:r>
+            <a:r>
+              <a:rPr kumimoji="0" lang="fr-FR" altLang="fr-FR" sz="1000" b="0" i="1" u="none" strike="noStrike" cap="none" normalizeH="0" baseline="0" dirty="0" err="1">
+                <a:ln>
+                  <a:noFill/>
+                </a:ln>
+                <a:solidFill>
+                  <a:srgbClr val="871094"/>
+                </a:solidFill>
+                <a:effectLst/>
+                <a:latin typeface="Fira Code"/>
+              </a:rPr>
+              <a:t>LAZY</a:t>
+            </a:r>
+            <a:r>
+              <a:rPr kumimoji="0" lang="fr-FR" altLang="fr-FR" sz="1000" b="0" i="0" u="none" strike="noStrike" cap="none" normalizeH="0" baseline="0" dirty="0">
+                <a:ln>
+                  <a:noFill/>
+                </a:ln>
+                <a:solidFill>
+                  <a:srgbClr val="080808"/>
+                </a:solidFill>
+                <a:effectLst/>
+                <a:latin typeface="Fira Code"/>
+              </a:rPr>
+              <a:t>)</a:t>
+            </a:r>
+            <a:br>
+              <a:rPr kumimoji="0" lang="fr-FR" altLang="fr-FR" sz="1000" b="0" i="0" u="none" strike="noStrike" cap="none" normalizeH="0" baseline="0" dirty="0">
+                <a:ln>
+                  <a:noFill/>
+                </a:ln>
+                <a:solidFill>
+                  <a:srgbClr val="080808"/>
+                </a:solidFill>
+                <a:effectLst/>
+                <a:latin typeface="Fira Code"/>
+              </a:rPr>
+            </a:br>
+            <a:r>
+              <a:rPr kumimoji="0" lang="fr-FR" altLang="fr-FR" sz="1000" b="0" i="0" u="none" strike="noStrike" cap="none" normalizeH="0" baseline="0" dirty="0" err="1">
+                <a:ln>
+                  <a:noFill/>
+                </a:ln>
+                <a:solidFill>
+                  <a:srgbClr val="0033B3"/>
+                </a:solidFill>
+                <a:effectLst/>
+                <a:latin typeface="Fira Code"/>
+              </a:rPr>
+              <a:t>private</a:t>
+            </a:r>
+            <a:r>
+              <a:rPr kumimoji="0" lang="fr-FR" altLang="fr-FR" sz="1000" b="0" i="0" u="none" strike="noStrike" cap="none" normalizeH="0" baseline="0" dirty="0">
+                <a:ln>
+                  <a:noFill/>
+                </a:ln>
+                <a:solidFill>
+                  <a:srgbClr val="0033B3"/>
+                </a:solidFill>
+                <a:effectLst/>
+                <a:latin typeface="Fira Code"/>
+              </a:rPr>
+              <a:t> </a:t>
+            </a:r>
+            <a:r>
+              <a:rPr kumimoji="0" lang="fr-FR" altLang="fr-FR" sz="1000" b="0" i="0" u="none" strike="noStrike" cap="none" normalizeH="0" baseline="0" dirty="0" err="1">
+                <a:ln>
+                  <a:noFill/>
+                </a:ln>
+                <a:solidFill>
+                  <a:srgbClr val="000000"/>
+                </a:solidFill>
+                <a:effectLst/>
+                <a:latin typeface="Fira Code"/>
+              </a:rPr>
+              <a:t>Director</a:t>
+            </a:r>
+            <a:r>
+              <a:rPr kumimoji="0" lang="fr-FR" altLang="fr-FR" sz="1000" b="0" i="0" u="none" strike="noStrike" cap="none" normalizeH="0" baseline="0" dirty="0">
+                <a:ln>
+                  <a:noFill/>
+                </a:ln>
+                <a:solidFill>
+                  <a:srgbClr val="000000"/>
+                </a:solidFill>
+                <a:effectLst/>
+                <a:latin typeface="Fira Code"/>
+              </a:rPr>
+              <a:t> </a:t>
+            </a:r>
+            <a:r>
+              <a:rPr kumimoji="0" lang="fr-FR" altLang="fr-FR" sz="1000" b="0" i="0" u="none" strike="noStrike" cap="none" normalizeH="0" baseline="0" dirty="0" err="1">
+                <a:ln>
+                  <a:noFill/>
+                </a:ln>
+                <a:solidFill>
+                  <a:srgbClr val="871094"/>
+                </a:solidFill>
+                <a:effectLst/>
+                <a:latin typeface="Fira Code"/>
+              </a:rPr>
+              <a:t>director</a:t>
+            </a:r>
+            <a:r>
+              <a:rPr kumimoji="0" lang="fr-FR" altLang="fr-FR" sz="1000" b="0" i="0" u="none" strike="noStrike" cap="none" normalizeH="0" baseline="0" dirty="0">
+                <a:ln>
+                  <a:noFill/>
+                </a:ln>
+                <a:solidFill>
+                  <a:srgbClr val="080808"/>
+                </a:solidFill>
+                <a:effectLst/>
+                <a:latin typeface="Fira Code"/>
+              </a:rPr>
+              <a:t>;</a:t>
+            </a:r>
+            <a:endParaRPr kumimoji="0" lang="fr-FR" altLang="fr-FR" sz="1800" b="0" i="0" u="none" strike="noStrike" cap="none" normalizeH="0" baseline="0" dirty="0">
+              <a:ln>
+                <a:noFill/>
+              </a:ln>
+              <a:solidFill>
+                <a:schemeClr val="tx1"/>
+              </a:solidFill>
+              <a:effectLst/>
+              <a:latin typeface="Arial" panose="020B0604020202020204" pitchFamily="34" charset="0"/>
+            </a:endParaRPr>
+          </a:p>
+        </p:txBody>
+      </p:sp>
+      <p:sp>
+        <p:nvSpPr>
+          <p:cNvPr id="3" name="Rectangle 1">
+            <a:extLst>
+              <a:ext uri="{FF2B5EF4-FFF2-40B4-BE49-F238E27FC236}">
+                <a16:creationId xmlns:a16="http://schemas.microsoft.com/office/drawing/2014/main" id="{AA16727A-6C9F-4BB4-A0D4-E7AE87AB7273}"/>
+              </a:ext>
+            </a:extLst>
+          </p:cNvPr>
+          <p:cNvSpPr>
+            <a:spLocks noChangeArrowheads="1"/>
+          </p:cNvSpPr>
+          <p:nvPr/>
+        </p:nvSpPr>
+        <p:spPr bwMode="auto">
+          <a:xfrm>
+            <a:off x="849492" y="4832405"/>
+            <a:ext cx="3018263" cy="400110"/>
+          </a:xfrm>
+          <a:prstGeom prst="rect">
+            <a:avLst/>
+          </a:prstGeom>
+          <a:solidFill>
+            <a:srgbClr val="FFFFFF"/>
+          </a:solidFill>
+          <a:ln>
+            <a:noFill/>
+          </a:ln>
+          <a:effectLst/>
+          <a:extLst>
+            <a:ext uri="{91240B29-F687-4F45-9708-019B960494DF}">
+              <a14:hiddenLine xmlns:a14="http://schemas.microsoft.com/office/drawing/2010/main" w="9525">
+                <a:solidFill>
+                  <a:schemeClr val="tx1"/>
+                </a:solidFill>
+                <a:miter lim="800000"/>
+                <a:headEnd/>
+                <a:tailEnd/>
+              </a14:hiddenLine>
+            </a:ext>
+            <a:ext uri="{AF507438-7753-43E0-B8FC-AC1667EBCBE1}">
+              <a14:hiddenEffects xmlns:a14="http://schemas.microsoft.com/office/drawing/2010/main">
+                <a:effectLst>
+                  <a:outerShdw dist="35921" dir="2700000" algn="ctr" rotWithShape="0">
+                    <a:schemeClr val="bg2"/>
+                  </a:outerShdw>
+                </a:effectLst>
+              </a14:hiddenEffects>
+            </a:ext>
+          </a:extLst>
+        </p:spPr>
+        <p:txBody>
+          <a:bodyPr vert="horz" wrap="square" lIns="91440" tIns="45720" rIns="91440" bIns="45720" numCol="1" anchor="ctr" anchorCtr="0" compatLnSpc="1">
+            <a:prstTxWarp prst="textNoShape">
+              <a:avLst/>
+            </a:prstTxWarp>
+            <a:spAutoFit/>
+          </a:bodyPr>
+          <a:lstStyle/>
+          <a:p>
+            <a:pPr marL="0" marR="0" lvl="0" indent="0" algn="l" defTabSz="914400" rtl="0" eaLnBrk="0" fontAlgn="base" latinLnBrk="0" hangingPunct="0">
+              <a:lnSpc>
+                <a:spcPct val="100000"/>
+              </a:lnSpc>
+              <a:spcBef>
+                <a:spcPct val="0"/>
+              </a:spcBef>
+              <a:spcAft>
+                <a:spcPct val="0"/>
+              </a:spcAft>
+              <a:buClrTx/>
+              <a:buSzTx/>
+              <a:buFontTx/>
+              <a:buNone/>
+              <a:tabLst/>
+            </a:pPr>
+            <a:r>
+              <a:rPr kumimoji="0" lang="fr-FR" altLang="fr-FR" sz="1000" b="0" i="0" u="none" strike="noStrike" cap="none" normalizeH="0" baseline="0" dirty="0">
+                <a:ln>
+                  <a:noFill/>
+                </a:ln>
+                <a:solidFill>
+                  <a:srgbClr val="9E880D"/>
+                </a:solidFill>
+                <a:effectLst/>
+                <a:latin typeface="Fira Code"/>
+              </a:rPr>
+              <a:t>@ManyToOne</a:t>
+            </a:r>
+            <a:r>
+              <a:rPr kumimoji="0" lang="fr-FR" altLang="fr-FR" sz="1000" b="0" i="0" u="none" strike="noStrike" cap="none" normalizeH="0" baseline="0" dirty="0">
+                <a:ln>
+                  <a:noFill/>
+                </a:ln>
+                <a:solidFill>
+                  <a:srgbClr val="080808"/>
+                </a:solidFill>
+                <a:effectLst/>
+                <a:latin typeface="Fira Code"/>
+              </a:rPr>
+              <a:t>(fetch = </a:t>
+            </a:r>
+            <a:r>
+              <a:rPr kumimoji="0" lang="fr-FR" altLang="fr-FR" sz="1000" b="0" i="0" u="none" strike="noStrike" cap="none" normalizeH="0" baseline="0" dirty="0" err="1">
+                <a:ln>
+                  <a:noFill/>
+                </a:ln>
+                <a:solidFill>
+                  <a:srgbClr val="000000"/>
+                </a:solidFill>
+                <a:effectLst/>
+                <a:latin typeface="Fira Code"/>
+              </a:rPr>
+              <a:t>FetchType</a:t>
+            </a:r>
+            <a:r>
+              <a:rPr kumimoji="0" lang="fr-FR" altLang="fr-FR" sz="1000" b="0" i="0" u="none" strike="noStrike" cap="none" normalizeH="0" baseline="0" dirty="0" err="1">
+                <a:ln>
+                  <a:noFill/>
+                </a:ln>
+                <a:solidFill>
+                  <a:srgbClr val="080808"/>
+                </a:solidFill>
+                <a:effectLst/>
+                <a:latin typeface="Fira Code"/>
+              </a:rPr>
+              <a:t>.</a:t>
+            </a:r>
+            <a:r>
+              <a:rPr kumimoji="0" lang="fr-FR" altLang="fr-FR" sz="1000" b="0" i="1" u="none" strike="noStrike" cap="none" normalizeH="0" baseline="0" dirty="0" err="1">
+                <a:ln>
+                  <a:noFill/>
+                </a:ln>
+                <a:solidFill>
+                  <a:srgbClr val="871094"/>
+                </a:solidFill>
+                <a:effectLst/>
+                <a:latin typeface="Fira Code"/>
+              </a:rPr>
+              <a:t>LAZY</a:t>
+            </a:r>
+            <a:r>
+              <a:rPr kumimoji="0" lang="fr-FR" altLang="fr-FR" sz="1000" b="0" i="0" u="none" strike="noStrike" cap="none" normalizeH="0" baseline="0" dirty="0">
+                <a:ln>
+                  <a:noFill/>
+                </a:ln>
+                <a:solidFill>
+                  <a:srgbClr val="080808"/>
+                </a:solidFill>
+                <a:effectLst/>
+                <a:latin typeface="Fira Code"/>
+              </a:rPr>
+              <a:t>)</a:t>
+            </a:r>
+            <a:br>
+              <a:rPr kumimoji="0" lang="fr-FR" altLang="fr-FR" sz="1000" b="0" i="0" u="none" strike="noStrike" cap="none" normalizeH="0" baseline="0" dirty="0">
+                <a:ln>
+                  <a:noFill/>
+                </a:ln>
+                <a:solidFill>
+                  <a:srgbClr val="080808"/>
+                </a:solidFill>
+                <a:effectLst/>
+                <a:latin typeface="Fira Code"/>
+              </a:rPr>
+            </a:br>
+            <a:r>
+              <a:rPr kumimoji="0" lang="fr-FR" altLang="fr-FR" sz="1000" b="0" i="0" u="none" strike="noStrike" cap="none" normalizeH="0" baseline="0" dirty="0" err="1">
+                <a:ln>
+                  <a:noFill/>
+                </a:ln>
+                <a:solidFill>
+                  <a:srgbClr val="0033B3"/>
+                </a:solidFill>
+                <a:effectLst/>
+                <a:latin typeface="Fira Code"/>
+              </a:rPr>
+              <a:t>private</a:t>
+            </a:r>
+            <a:r>
+              <a:rPr kumimoji="0" lang="fr-FR" altLang="fr-FR" sz="1000" b="0" i="0" u="none" strike="noStrike" cap="none" normalizeH="0" baseline="0" dirty="0">
+                <a:ln>
+                  <a:noFill/>
+                </a:ln>
+                <a:solidFill>
+                  <a:srgbClr val="0033B3"/>
+                </a:solidFill>
+                <a:effectLst/>
+                <a:latin typeface="Fira Code"/>
+              </a:rPr>
+              <a:t> </a:t>
+            </a:r>
+            <a:r>
+              <a:rPr kumimoji="0" lang="fr-FR" altLang="fr-FR" sz="1000" b="0" i="0" u="none" strike="noStrike" cap="none" normalizeH="0" baseline="0" dirty="0" err="1">
+                <a:ln>
+                  <a:noFill/>
+                </a:ln>
+                <a:solidFill>
+                  <a:srgbClr val="000000"/>
+                </a:solidFill>
+                <a:effectLst/>
+                <a:latin typeface="Fira Code"/>
+              </a:rPr>
+              <a:t>School</a:t>
+            </a:r>
+            <a:r>
+              <a:rPr kumimoji="0" lang="fr-FR" altLang="fr-FR" sz="1000" b="0" i="0" u="none" strike="noStrike" cap="none" normalizeH="0" baseline="0" dirty="0">
+                <a:ln>
+                  <a:noFill/>
+                </a:ln>
+                <a:solidFill>
+                  <a:srgbClr val="000000"/>
+                </a:solidFill>
+                <a:effectLst/>
+                <a:latin typeface="Fira Code"/>
+              </a:rPr>
+              <a:t> </a:t>
+            </a:r>
+            <a:r>
+              <a:rPr kumimoji="0" lang="fr-FR" altLang="fr-FR" sz="1000" b="0" i="0" u="none" strike="noStrike" cap="none" normalizeH="0" baseline="0" dirty="0" err="1">
+                <a:ln>
+                  <a:noFill/>
+                </a:ln>
+                <a:solidFill>
+                  <a:srgbClr val="871094"/>
+                </a:solidFill>
+                <a:effectLst/>
+                <a:latin typeface="Fira Code"/>
+              </a:rPr>
+              <a:t>school</a:t>
+            </a:r>
+            <a:r>
+              <a:rPr kumimoji="0" lang="fr-FR" altLang="fr-FR" sz="1000" b="0" i="0" u="none" strike="noStrike" cap="none" normalizeH="0" baseline="0" dirty="0">
+                <a:ln>
+                  <a:noFill/>
+                </a:ln>
+                <a:solidFill>
+                  <a:srgbClr val="080808"/>
+                </a:solidFill>
+                <a:effectLst/>
+                <a:latin typeface="Fira Code"/>
+              </a:rPr>
+              <a:t>;</a:t>
+            </a:r>
+            <a:endParaRPr kumimoji="0" lang="fr-FR" altLang="fr-FR" sz="1800" b="0" i="0" u="none" strike="noStrike" cap="none" normalizeH="0" baseline="0" dirty="0">
+              <a:ln>
+                <a:noFill/>
+              </a:ln>
+              <a:solidFill>
+                <a:schemeClr val="tx1"/>
+              </a:solidFill>
+              <a:effectLst/>
+              <a:latin typeface="Arial" panose="020B0604020202020204" pitchFamily="34" charset="0"/>
+            </a:endParaRPr>
+          </a:p>
+        </p:txBody>
+      </p:sp>
+    </p:spTree>
+    <p:extLst>
+      <p:ext uri="{BB962C8B-B14F-4D97-AF65-F5344CB8AC3E}">
+        <p14:creationId xmlns:p14="http://schemas.microsoft.com/office/powerpoint/2010/main" val="1501793512"/>
+      </p:ext>
+    </p:extLst>
+  </p:cSld>
+  <p:clrMapOvr>
+    <a:masterClrMapping/>
+  </p:clrMapOvr>
+  <mc:AlternateContent xmlns:mc="http://schemas.openxmlformats.org/markup-compatibility/2006" xmlns:p14="http://schemas.microsoft.com/office/powerpoint/2010/main">
+    <mc:Choice Requires="p14">
+      <p:transition p14:dur="10"/>
+    </mc:Choice>
+    <mc:Fallback xmlns="">
+      <p:transition/>
+    </mc:Fallback>
+  </mc:AlternateContent>
+  <p:timing>
+    <p:tnLst>
+      <p:par>
+        <p:cTn id="1" dur="indefinite" restart="never" nodeType="tmRoot">
+          <p:childTnLst>
+            <p:seq concurrent="1" nextAc="seek">
+              <p:cTn id="2" dur="indefinite" nodeType="mainSeq">
+                <p:childTnLst>
+                  <p:par>
+                    <p:cTn id="3" fill="hold">
+                      <p:stCondLst>
+                        <p:cond delay="indefinite"/>
+                      </p:stCondLst>
+                      <p:childTnLst>
+                        <p:par>
+                          <p:cTn id="4" fill="hold">
+                            <p:stCondLst>
+                              <p:cond delay="0"/>
+                            </p:stCondLst>
+                            <p:childTnLst>
+                              <p:par>
+                                <p:cTn id="5" presetID="1" presetClass="entr" presetSubtype="0" fill="hold" nodeType="clickEffect">
+                                  <p:stCondLst>
+                                    <p:cond delay="0"/>
+                                  </p:stCondLst>
+                                  <p:childTnLst>
+                                    <p:set>
+                                      <p:cBhvr>
+                                        <p:cTn id="6" dur="1" fill="hold">
+                                          <p:stCondLst>
+                                            <p:cond delay="0"/>
+                                          </p:stCondLst>
+                                        </p:cTn>
+                                        <p:tgtEl>
+                                          <p:spTgt spid="2">
+                                            <p:txEl>
+                                              <p:pRg st="0" end="0"/>
+                                            </p:txEl>
+                                          </p:spTgt>
+                                        </p:tgtEl>
+                                        <p:attrNameLst>
+                                          <p:attrName>style.visibility</p:attrName>
+                                        </p:attrNameLst>
+                                      </p:cBhvr>
+                                      <p:to>
+                                        <p:strVal val="visible"/>
+                                      </p:to>
+                                    </p:set>
+                                  </p:childTnLst>
+                                </p:cTn>
+                              </p:par>
+                            </p:childTnLst>
+                          </p:cTn>
+                        </p:par>
+                      </p:childTnLst>
+                    </p:cTn>
+                  </p:par>
+                  <p:par>
+                    <p:cTn id="7" fill="hold">
+                      <p:stCondLst>
+                        <p:cond delay="indefinite"/>
+                      </p:stCondLst>
+                      <p:childTnLst>
+                        <p:par>
+                          <p:cTn id="8" fill="hold">
+                            <p:stCondLst>
+                              <p:cond delay="0"/>
+                            </p:stCondLst>
+                            <p:childTnLst>
+                              <p:par>
+                                <p:cTn id="9" presetID="1" presetClass="entr" presetSubtype="0" fill="hold" nodeType="clickEffect">
+                                  <p:stCondLst>
+                                    <p:cond delay="0"/>
+                                  </p:stCondLst>
+                                  <p:childTnLst>
+                                    <p:set>
+                                      <p:cBhvr>
+                                        <p:cTn id="10" dur="1" fill="hold">
+                                          <p:stCondLst>
+                                            <p:cond delay="0"/>
+                                          </p:stCondLst>
+                                        </p:cTn>
+                                        <p:tgtEl>
+                                          <p:spTgt spid="2">
+                                            <p:txEl>
+                                              <p:pRg st="1" end="1"/>
+                                            </p:txEl>
+                                          </p:spTgt>
+                                        </p:tgtEl>
+                                        <p:attrNameLst>
+                                          <p:attrName>style.visibility</p:attrName>
+                                        </p:attrNameLst>
+                                      </p:cBhvr>
+                                      <p:to>
+                                        <p:strVal val="visible"/>
+                                      </p:to>
+                                    </p:set>
+                                  </p:childTnLst>
+                                </p:cTn>
+                              </p:par>
+                            </p:childTnLst>
+                          </p:cTn>
+                        </p:par>
+                      </p:childTnLst>
+                    </p:cTn>
+                  </p:par>
+                  <p:par>
+                    <p:cTn id="11" fill="hold">
+                      <p:stCondLst>
+                        <p:cond delay="indefinite"/>
+                      </p:stCondLst>
+                      <p:childTnLst>
+                        <p:par>
+                          <p:cTn id="12" fill="hold">
+                            <p:stCondLst>
+                              <p:cond delay="0"/>
+                            </p:stCondLst>
+                            <p:childTnLst>
+                              <p:par>
+                                <p:cTn id="13" presetID="1" presetClass="entr" presetSubtype="0" fill="hold" nodeType="clickEffect">
+                                  <p:stCondLst>
+                                    <p:cond delay="0"/>
+                                  </p:stCondLst>
+                                  <p:childTnLst>
+                                    <p:set>
+                                      <p:cBhvr>
+                                        <p:cTn id="14" dur="1" fill="hold">
+                                          <p:stCondLst>
+                                            <p:cond delay="0"/>
+                                          </p:stCondLst>
+                                        </p:cTn>
+                                        <p:tgtEl>
+                                          <p:spTgt spid="2">
+                                            <p:txEl>
+                                              <p:pRg st="3" end="3"/>
+                                            </p:txEl>
+                                          </p:spTgt>
+                                        </p:tgtEl>
+                                        <p:attrNameLst>
+                                          <p:attrName>style.visibility</p:attrName>
+                                        </p:attrNameLst>
+                                      </p:cBhvr>
+                                      <p:to>
+                                        <p:strVal val="visible"/>
+                                      </p:to>
+                                    </p:set>
+                                  </p:childTnLst>
+                                </p:cTn>
+                              </p:par>
+                            </p:childTnLst>
+                          </p:cTn>
+                        </p:par>
+                      </p:childTnLst>
+                    </p:cTn>
+                  </p:par>
+                  <p:par>
+                    <p:cTn id="15" fill="hold">
+                      <p:stCondLst>
+                        <p:cond delay="indefinite"/>
+                      </p:stCondLst>
+                      <p:childTnLst>
+                        <p:par>
+                          <p:cTn id="16" fill="hold">
+                            <p:stCondLst>
+                              <p:cond delay="0"/>
+                            </p:stCondLst>
+                            <p:childTnLst>
+                              <p:par>
+                                <p:cTn id="17" presetID="1" presetClass="entr" presetSubtype="0" fill="hold" nodeType="clickEffect">
+                                  <p:stCondLst>
+                                    <p:cond delay="0"/>
+                                  </p:stCondLst>
+                                  <p:childTnLst>
+                                    <p:set>
+                                      <p:cBhvr>
+                                        <p:cTn id="18" dur="1" fill="hold">
+                                          <p:stCondLst>
+                                            <p:cond delay="0"/>
+                                          </p:stCondLst>
+                                        </p:cTn>
+                                        <p:tgtEl>
+                                          <p:spTgt spid="2">
+                                            <p:txEl>
+                                              <p:pRg st="6" end="6"/>
+                                            </p:txEl>
+                                          </p:spTgt>
+                                        </p:tgtEl>
+                                        <p:attrNameLst>
+                                          <p:attrName>style.visibility</p:attrName>
+                                        </p:attrNameLst>
+                                      </p:cBhvr>
+                                      <p:to>
+                                        <p:strVal val="visible"/>
+                                      </p:to>
+                                    </p:set>
+                                  </p:childTnLst>
+                                </p:cTn>
+                              </p:par>
+                              <p:par>
+                                <p:cTn id="19" presetID="1" presetClass="entr" presetSubtype="0" fill="hold" grpId="0" nodeType="withEffect">
+                                  <p:stCondLst>
+                                    <p:cond delay="0"/>
+                                  </p:stCondLst>
+                                  <p:childTnLst>
+                                    <p:set>
+                                      <p:cBhvr>
+                                        <p:cTn id="20" dur="1" fill="hold">
+                                          <p:stCondLst>
+                                            <p:cond delay="0"/>
+                                          </p:stCondLst>
+                                        </p:cTn>
+                                        <p:tgtEl>
+                                          <p:spTgt spid="7"/>
+                                        </p:tgtEl>
+                                        <p:attrNameLst>
+                                          <p:attrName>style.visibility</p:attrName>
+                                        </p:attrNameLst>
+                                      </p:cBhvr>
+                                      <p:to>
+                                        <p:strVal val="visible"/>
+                                      </p:to>
+                                    </p:set>
+                                  </p:childTnLst>
+                                </p:cTn>
+                              </p:par>
+                              <p:par>
+                                <p:cTn id="21" presetID="1" presetClass="entr" presetSubtype="0" fill="hold" grpId="0" nodeType="withEffect">
+                                  <p:stCondLst>
+                                    <p:cond delay="0"/>
+                                  </p:stCondLst>
+                                  <p:childTnLst>
+                                    <p:set>
+                                      <p:cBhvr>
+                                        <p:cTn id="22" dur="1" fill="hold">
+                                          <p:stCondLst>
+                                            <p:cond delay="0"/>
+                                          </p:stCondLst>
+                                        </p:cTn>
+                                        <p:tgtEl>
+                                          <p:spTgt spid="3"/>
+                                        </p:tgtEl>
+                                        <p:attrNameLst>
+                                          <p:attrName>style.visibility</p:attrName>
+                                        </p:attrNameLst>
+                                      </p:cBhvr>
+                                      <p:to>
+                                        <p:strVal val="visible"/>
+                                      </p:to>
+                                    </p:set>
+                                  </p:childTnLst>
+                                </p:cTn>
+                              </p:par>
+                            </p:childTnLst>
+                          </p:cTn>
+                        </p:par>
+                      </p:childTnLst>
+                    </p:cTn>
+                  </p:par>
+                </p:childTnLst>
+              </p:cTn>
+              <p:prevCondLst>
+                <p:cond evt="onPrev" delay="0">
+                  <p:tgtEl>
+                    <p:sldTgt/>
+                  </p:tgtEl>
+                </p:cond>
+              </p:prevCondLst>
+              <p:nextCondLst>
+                <p:cond evt="onNext" delay="0">
+                  <p:tgtEl>
+                    <p:sldTgt/>
+                  </p:tgtEl>
+                </p:cond>
+              </p:nextCondLst>
+            </p:seq>
+          </p:childTnLst>
+        </p:cTn>
+      </p:par>
+    </p:tnLst>
+    <p:bldLst>
+      <p:bldP spid="7" grpId="0" animBg="1"/>
+      <p:bldP spid="3" grpId="0" animBg="1"/>
+    </p:bldLst>
+  </p:timing>
+</p:sld>
+</file>
+
+<file path=ppt/slides/slide11.xml><?xml version="1.0" encoding="utf-8"?>
 <p:sld xmlns:a="http://schemas.openxmlformats.org/drawingml/2006/main" xmlns:r="http://schemas.openxmlformats.org/officeDocument/2006/relationships" xmlns:p="http://schemas.openxmlformats.org/presentationml/2006/main">
   <p:cSld>
     <p:spTree>
@@ -6021,7 +7129,7 @@
 </p:sld>
 </file>
 
-<file path=ppt/slides/slide11.xml><?xml version="1.0" encoding="utf-8"?>
+<file path=ppt/slides/slide12.xml><?xml version="1.0" encoding="utf-8"?>
 <p:sld xmlns:a="http://schemas.openxmlformats.org/drawingml/2006/main" xmlns:r="http://schemas.openxmlformats.org/officeDocument/2006/relationships" xmlns:p="http://schemas.openxmlformats.org/presentationml/2006/main">
   <p:cSld>
     <p:spTree>
@@ -6050,13 +7158,13 @@
         </p:nvSpPr>
         <p:spPr>
           <a:xfrm>
-            <a:off x="521207" y="448056"/>
-            <a:ext cx="7783344" cy="640080"/>
+            <a:off x="521206" y="448056"/>
+            <a:ext cx="8801387" cy="640080"/>
           </a:xfrm>
         </p:spPr>
         <p:txBody>
           <a:bodyPr rtlCol="0">
-            <a:normAutofit/>
+            <a:normAutofit fontScale="90000"/>
           </a:bodyPr>
           <a:lstStyle/>
           <a:p>
@@ -6065,7 +7173,7 @@
                 <a:latin typeface="Segoe UI Light" panose="020B0502040204020203" pitchFamily="34" charset="0"/>
                 <a:cs typeface="Segoe UI Light" panose="020B0502040204020203" pitchFamily="34" charset="0"/>
               </a:rPr>
-              <a:t>N+1 &amp; Sortie de Controller &amp; Proxy Entité </a:t>
+              <a:t>N+1 ?? Exemple avec une sortie de Controller &amp; Proxy Entité </a:t>
             </a:r>
             <a:endParaRPr lang="fr-FR" sz="1200" noProof="1">
               <a:latin typeface="Segoe UI Light" panose="020B0502040204020203" pitchFamily="34" charset="0"/>
@@ -9033,7 +10141,7 @@
 </p:sld>
 </file>
 
-<file path=ppt/slides/slide12.xml><?xml version="1.0" encoding="utf-8"?>
+<file path=ppt/slides/slide13.xml><?xml version="1.0" encoding="utf-8"?>
 <p:sld xmlns:a="http://schemas.openxmlformats.org/drawingml/2006/main" xmlns:r="http://schemas.openxmlformats.org/officeDocument/2006/relationships" xmlns:p="http://schemas.openxmlformats.org/presentationml/2006/main">
   <p:cSld>
     <p:spTree>
@@ -9694,7 +10802,7 @@
         <p:spPr>
           <a:xfrm>
             <a:off x="1936165" y="5016141"/>
-            <a:ext cx="522896" cy="492868"/>
+            <a:ext cx="678448" cy="492868"/>
           </a:xfrm>
           <a:prstGeom prst="irregularSeal1">
             <a:avLst/>
@@ -10841,7 +11949,7 @@
 </p:sld>
 </file>
 
-<file path=ppt/slides/slide13.xml><?xml version="1.0" encoding="utf-8"?>
+<file path=ppt/slides/slide14.xml><?xml version="1.0" encoding="utf-8"?>
 <p:sld xmlns:a="http://schemas.openxmlformats.org/drawingml/2006/main" xmlns:r="http://schemas.openxmlformats.org/officeDocument/2006/relationships" xmlns:p="http://schemas.openxmlformats.org/presentationml/2006/main">
   <p:cSld>
     <p:spTree>
@@ -12157,7 +13265,7 @@
 </p:sld>
 </file>
 
-<file path=ppt/slides/slide14.xml><?xml version="1.0" encoding="utf-8"?>
+<file path=ppt/slides/slide15.xml><?xml version="1.0" encoding="utf-8"?>
 <p:sld xmlns:a="http://schemas.openxmlformats.org/drawingml/2006/main" xmlns:r="http://schemas.openxmlformats.org/officeDocument/2006/relationships" xmlns:p="http://schemas.openxmlformats.org/presentationml/2006/main">
   <p:cSld>
     <p:spTree>
@@ -12423,7 +13531,7 @@
 </p:sld>
 </file>
 
-<file path=ppt/slides/slide15.xml><?xml version="1.0" encoding="utf-8"?>
+<file path=ppt/slides/slide16.xml><?xml version="1.0" encoding="utf-8"?>
 <p:sld xmlns:a="http://schemas.openxmlformats.org/drawingml/2006/main" xmlns:r="http://schemas.openxmlformats.org/officeDocument/2006/relationships" xmlns:p="http://schemas.openxmlformats.org/presentationml/2006/main">
   <p:cSld>
     <p:spTree>
@@ -12625,7 +13733,7 @@
             </a:pPr>
             <a:r>
               <a:rPr lang="fr-FR" dirty="0"/>
-              <a:t>La solution « par défaut / N+1 » </a:t>
+              <a:t>La solution par défaut « N+1 » </a:t>
             </a:r>
           </a:p>
           <a:p>
@@ -13998,7 +15106,7 @@
 </p:sld>
 </file>
 
-<file path=ppt/slides/slide16.xml><?xml version="1.0" encoding="utf-8"?>
+<file path=ppt/slides/slide17.xml><?xml version="1.0" encoding="utf-8"?>
 <p:sld xmlns:a="http://schemas.openxmlformats.org/drawingml/2006/main" xmlns:r="http://schemas.openxmlformats.org/officeDocument/2006/relationships" xmlns:p="http://schemas.openxmlformats.org/presentationml/2006/main">
   <p:cSld>
     <p:spTree>
@@ -15634,7 +16742,7 @@
 </p:sld>
 </file>
 
-<file path=ppt/slides/slide17.xml><?xml version="1.0" encoding="utf-8"?>
+<file path=ppt/slides/slide18.xml><?xml version="1.0" encoding="utf-8"?>
 <p:sld xmlns:a="http://schemas.openxmlformats.org/drawingml/2006/main" xmlns:r="http://schemas.openxmlformats.org/officeDocument/2006/relationships" xmlns:p="http://schemas.openxmlformats.org/presentationml/2006/main">
   <p:cSld>
     <p:spTree>
@@ -18141,7 +19249,7 @@
 </p:sld>
 </file>
 
-<file path=ppt/slides/slide18.xml><?xml version="1.0" encoding="utf-8"?>
+<file path=ppt/slides/slide19.xml><?xml version="1.0" encoding="utf-8"?>
 <p:sld xmlns:a="http://schemas.openxmlformats.org/drawingml/2006/main" xmlns:r="http://schemas.openxmlformats.org/officeDocument/2006/relationships" xmlns:p="http://schemas.openxmlformats.org/presentationml/2006/main">
   <p:cSld>
     <p:spTree>
@@ -18359,7 +19467,111 @@
 </p:sld>
 </file>
 
-<file path=ppt/slides/slide19.xml><?xml version="1.0" encoding="utf-8"?>
+<file path=ppt/slides/slide2.xml><?xml version="1.0" encoding="utf-8"?>
+<p:sld xmlns:a="http://schemas.openxmlformats.org/drawingml/2006/main" xmlns:r="http://schemas.openxmlformats.org/officeDocument/2006/relationships" xmlns:p="http://schemas.openxmlformats.org/presentationml/2006/main">
+  <p:cSld>
+    <p:spTree>
+      <p:nvGrpSpPr>
+        <p:cNvPr id="1" name=""/>
+        <p:cNvGrpSpPr/>
+        <p:nvPr/>
+      </p:nvGrpSpPr>
+      <p:grpSpPr>
+        <a:xfrm>
+          <a:off x="0" y="0"/>
+          <a:ext cx="0" cy="0"/>
+          <a:chOff x="0" y="0"/>
+          <a:chExt cx="0" cy="0"/>
+        </a:xfrm>
+      </p:grpSpPr>
+      <p:sp>
+        <p:nvSpPr>
+          <p:cNvPr id="4" name="Titre 3"/>
+          <p:cNvSpPr>
+            <a:spLocks noGrp="1"/>
+          </p:cNvSpPr>
+          <p:nvPr>
+            <p:ph type="title"/>
+          </p:nvPr>
+        </p:nvSpPr>
+        <p:spPr>
+          <a:xfrm>
+            <a:off x="521207" y="448056"/>
+            <a:ext cx="7783344" cy="640080"/>
+          </a:xfrm>
+        </p:spPr>
+        <p:txBody>
+          <a:bodyPr rtlCol="0">
+            <a:normAutofit/>
+          </a:bodyPr>
+          <a:lstStyle/>
+          <a:p>
+            <a:r>
+              <a:rPr lang="fr-FR" noProof="1">
+                <a:latin typeface="Segoe UI Light" panose="020B0502040204020203" pitchFamily="34" charset="0"/>
+                <a:cs typeface="Segoe UI Light" panose="020B0502040204020203" pitchFamily="34" charset="0"/>
+              </a:rPr>
+              <a:t>Spring Boot / Spring Data</a:t>
+            </a:r>
+            <a:endParaRPr lang="fr-FR" sz="1200" noProof="1">
+              <a:latin typeface="Segoe UI Light" panose="020B0502040204020203" pitchFamily="34" charset="0"/>
+              <a:cs typeface="Segoe UI Light" panose="020B0502040204020203" pitchFamily="34" charset="0"/>
+            </a:endParaRPr>
+          </a:p>
+        </p:txBody>
+      </p:sp>
+      <p:pic>
+        <p:nvPicPr>
+          <p:cNvPr id="3" name="Image 2">
+            <a:extLst>
+              <a:ext uri="{FF2B5EF4-FFF2-40B4-BE49-F238E27FC236}">
+                <a16:creationId xmlns:a16="http://schemas.microsoft.com/office/drawing/2014/main" id="{DDFFF470-9BA6-43F7-91BD-551442E24915}"/>
+              </a:ext>
+            </a:extLst>
+          </p:cNvPr>
+          <p:cNvPicPr>
+            <a:picLocks noChangeAspect="1"/>
+          </p:cNvPicPr>
+          <p:nvPr/>
+        </p:nvPicPr>
+        <p:blipFill>
+          <a:blip r:embed="rId3"/>
+          <a:stretch>
+            <a:fillRect/>
+          </a:stretch>
+        </p:blipFill>
+        <p:spPr>
+          <a:xfrm>
+            <a:off x="2247900" y="1218389"/>
+            <a:ext cx="7696200" cy="5562600"/>
+          </a:xfrm>
+          <a:prstGeom prst="rect">
+            <a:avLst/>
+          </a:prstGeom>
+        </p:spPr>
+      </p:pic>
+    </p:spTree>
+    <p:extLst>
+      <p:ext uri="{BB962C8B-B14F-4D97-AF65-F5344CB8AC3E}">
+        <p14:creationId xmlns:p14="http://schemas.microsoft.com/office/powerpoint/2010/main" val="1107001750"/>
+      </p:ext>
+    </p:extLst>
+  </p:cSld>
+  <p:clrMapOvr>
+    <a:masterClrMapping/>
+  </p:clrMapOvr>
+  <mc:AlternateContent xmlns:mc="http://schemas.openxmlformats.org/markup-compatibility/2006" xmlns:p14="http://schemas.microsoft.com/office/powerpoint/2010/main">
+    <mc:Choice Requires="p14">
+      <p:transition p14:dur="10"/>
+    </mc:Choice>
+    <mc:Fallback xmlns="">
+      <p:transition/>
+    </mc:Fallback>
+  </mc:AlternateContent>
+</p:sld>
+</file>
+
+<file path=ppt/slides/slide20.xml><?xml version="1.0" encoding="utf-8"?>
 <p:sld xmlns:a="http://schemas.openxmlformats.org/drawingml/2006/main" xmlns:r="http://schemas.openxmlformats.org/officeDocument/2006/relationships" xmlns:p="http://schemas.openxmlformats.org/presentationml/2006/main">
   <p:cSld>
     <p:spTree>
@@ -19839,111 +21051,7 @@
 </p:sld>
 </file>
 
-<file path=ppt/slides/slide2.xml><?xml version="1.0" encoding="utf-8"?>
-<p:sld xmlns:a="http://schemas.openxmlformats.org/drawingml/2006/main" xmlns:r="http://schemas.openxmlformats.org/officeDocument/2006/relationships" xmlns:p="http://schemas.openxmlformats.org/presentationml/2006/main">
-  <p:cSld>
-    <p:spTree>
-      <p:nvGrpSpPr>
-        <p:cNvPr id="1" name=""/>
-        <p:cNvGrpSpPr/>
-        <p:nvPr/>
-      </p:nvGrpSpPr>
-      <p:grpSpPr>
-        <a:xfrm>
-          <a:off x="0" y="0"/>
-          <a:ext cx="0" cy="0"/>
-          <a:chOff x="0" y="0"/>
-          <a:chExt cx="0" cy="0"/>
-        </a:xfrm>
-      </p:grpSpPr>
-      <p:sp>
-        <p:nvSpPr>
-          <p:cNvPr id="4" name="Titre 3"/>
-          <p:cNvSpPr>
-            <a:spLocks noGrp="1"/>
-          </p:cNvSpPr>
-          <p:nvPr>
-            <p:ph type="title"/>
-          </p:nvPr>
-        </p:nvSpPr>
-        <p:spPr>
-          <a:xfrm>
-            <a:off x="521207" y="448056"/>
-            <a:ext cx="7783344" cy="640080"/>
-          </a:xfrm>
-        </p:spPr>
-        <p:txBody>
-          <a:bodyPr rtlCol="0">
-            <a:normAutofit/>
-          </a:bodyPr>
-          <a:lstStyle/>
-          <a:p>
-            <a:r>
-              <a:rPr lang="fr-FR" noProof="1">
-                <a:latin typeface="Segoe UI Light" panose="020B0502040204020203" pitchFamily="34" charset="0"/>
-                <a:cs typeface="Segoe UI Light" panose="020B0502040204020203" pitchFamily="34" charset="0"/>
-              </a:rPr>
-              <a:t>Spring Boot / Spring Data</a:t>
-            </a:r>
-            <a:endParaRPr lang="fr-FR" sz="1200" noProof="1">
-              <a:latin typeface="Segoe UI Light" panose="020B0502040204020203" pitchFamily="34" charset="0"/>
-              <a:cs typeface="Segoe UI Light" panose="020B0502040204020203" pitchFamily="34" charset="0"/>
-            </a:endParaRPr>
-          </a:p>
-        </p:txBody>
-      </p:sp>
-      <p:pic>
-        <p:nvPicPr>
-          <p:cNvPr id="3" name="Image 2">
-            <a:extLst>
-              <a:ext uri="{FF2B5EF4-FFF2-40B4-BE49-F238E27FC236}">
-                <a16:creationId xmlns:a16="http://schemas.microsoft.com/office/drawing/2014/main" id="{DDFFF470-9BA6-43F7-91BD-551442E24915}"/>
-              </a:ext>
-            </a:extLst>
-          </p:cNvPr>
-          <p:cNvPicPr>
-            <a:picLocks noChangeAspect="1"/>
-          </p:cNvPicPr>
-          <p:nvPr/>
-        </p:nvPicPr>
-        <p:blipFill>
-          <a:blip r:embed="rId3"/>
-          <a:stretch>
-            <a:fillRect/>
-          </a:stretch>
-        </p:blipFill>
-        <p:spPr>
-          <a:xfrm>
-            <a:off x="2247900" y="1218389"/>
-            <a:ext cx="7696200" cy="5562600"/>
-          </a:xfrm>
-          <a:prstGeom prst="rect">
-            <a:avLst/>
-          </a:prstGeom>
-        </p:spPr>
-      </p:pic>
-    </p:spTree>
-    <p:extLst>
-      <p:ext uri="{BB962C8B-B14F-4D97-AF65-F5344CB8AC3E}">
-        <p14:creationId xmlns:p14="http://schemas.microsoft.com/office/powerpoint/2010/main" val="1107001750"/>
-      </p:ext>
-    </p:extLst>
-  </p:cSld>
-  <p:clrMapOvr>
-    <a:masterClrMapping/>
-  </p:clrMapOvr>
-  <mc:AlternateContent xmlns:mc="http://schemas.openxmlformats.org/markup-compatibility/2006" xmlns:p14="http://schemas.microsoft.com/office/powerpoint/2010/main">
-    <mc:Choice Requires="p14">
-      <p:transition p14:dur="10"/>
-    </mc:Choice>
-    <mc:Fallback xmlns="">
-      <p:transition/>
-    </mc:Fallback>
-  </mc:AlternateContent>
-</p:sld>
-</file>
-
-<file path=ppt/slides/slide20.xml><?xml version="1.0" encoding="utf-8"?>
+<file path=ppt/slides/slide21.xml><?xml version="1.0" encoding="utf-8"?>
 <p:sld xmlns:a="http://schemas.openxmlformats.org/drawingml/2006/main" xmlns:r="http://schemas.openxmlformats.org/officeDocument/2006/relationships" xmlns:p="http://schemas.openxmlformats.org/presentationml/2006/main">
   <p:cSld>
     <p:spTree>
@@ -21589,7 +22697,7 @@
 </p:sld>
 </file>
 
-<file path=ppt/slides/slide21.xml><?xml version="1.0" encoding="utf-8"?>
+<file path=ppt/slides/slide22.xml><?xml version="1.0" encoding="utf-8"?>
 <p:sld xmlns:a="http://schemas.openxmlformats.org/drawingml/2006/main" xmlns:r="http://schemas.openxmlformats.org/officeDocument/2006/relationships" xmlns:p="http://schemas.openxmlformats.org/presentationml/2006/main">
   <p:cSld>
     <p:spTree>
@@ -22452,7 +23560,7 @@
 </p:sld>
 </file>
 
-<file path=ppt/slides/slide22.xml><?xml version="1.0" encoding="utf-8"?>
+<file path=ppt/slides/slide23.xml><?xml version="1.0" encoding="utf-8"?>
 <p:sld xmlns:a="http://schemas.openxmlformats.org/drawingml/2006/main" xmlns:r="http://schemas.openxmlformats.org/officeDocument/2006/relationships" xmlns:p="http://schemas.openxmlformats.org/presentationml/2006/main">
   <p:cSld>
     <p:spTree>
@@ -23325,7 +24433,7 @@
 </p:sld>
 </file>
 
-<file path=ppt/slides/slide23.xml><?xml version="1.0" encoding="utf-8"?>
+<file path=ppt/slides/slide24.xml><?xml version="1.0" encoding="utf-8"?>
 <p:sld xmlns:a="http://schemas.openxmlformats.org/drawingml/2006/main" xmlns:r="http://schemas.openxmlformats.org/officeDocument/2006/relationships" xmlns:p="http://schemas.openxmlformats.org/presentationml/2006/main">
   <p:cSld>
     <p:spTree>
@@ -25591,7 +26699,7 @@
 </p:sld>
 </file>
 
-<file path=ppt/slides/slide24.xml><?xml version="1.0" encoding="utf-8"?>
+<file path=ppt/slides/slide25.xml><?xml version="1.0" encoding="utf-8"?>
 <p:sld xmlns:a="http://schemas.openxmlformats.org/drawingml/2006/main" xmlns:r="http://schemas.openxmlformats.org/officeDocument/2006/relationships" xmlns:p="http://schemas.openxmlformats.org/presentationml/2006/main">
   <p:cSld>
     <p:spTree>
@@ -27797,7 +28905,7 @@
 </p:sld>
 </file>
 
-<file path=ppt/slides/slide25.xml><?xml version="1.0" encoding="utf-8"?>
+<file path=ppt/slides/slide26.xml><?xml version="1.0" encoding="utf-8"?>
 <p:sld xmlns:a="http://schemas.openxmlformats.org/drawingml/2006/main" xmlns:r="http://schemas.openxmlformats.org/officeDocument/2006/relationships" xmlns:p="http://schemas.openxmlformats.org/presentationml/2006/main">
   <p:cSld>
     <p:spTree>
@@ -28039,7 +29147,7 @@
 </p:sld>
 </file>
 
-<file path=ppt/slides/slide26.xml><?xml version="1.0" encoding="utf-8"?>
+<file path=ppt/slides/slide27.xml><?xml version="1.0" encoding="utf-8"?>
 <p:sld xmlns:a="http://schemas.openxmlformats.org/drawingml/2006/main" xmlns:r="http://schemas.openxmlformats.org/officeDocument/2006/relationships" xmlns:p="http://schemas.openxmlformats.org/presentationml/2006/main">
   <p:cSld>
     <p:spTree>
@@ -28378,7 +29486,7 @@
 </p:sld>
 </file>
 
-<file path=ppt/slides/slide27.xml><?xml version="1.0" encoding="utf-8"?>
+<file path=ppt/slides/slide28.xml><?xml version="1.0" encoding="utf-8"?>
 <p:sld xmlns:a="http://schemas.openxmlformats.org/drawingml/2006/main" xmlns:r="http://schemas.openxmlformats.org/officeDocument/2006/relationships" xmlns:p="http://schemas.openxmlformats.org/presentationml/2006/main">
   <p:cSld>
     <p:spTree>
@@ -28941,7 +30049,7 @@
 </p:sld>
 </file>
 
-<file path=ppt/slides/slide28.xml><?xml version="1.0" encoding="utf-8"?>
+<file path=ppt/slides/slide29.xml><?xml version="1.0" encoding="utf-8"?>
 <p:sld xmlns:a="http://schemas.openxmlformats.org/drawingml/2006/main" xmlns:r="http://schemas.openxmlformats.org/officeDocument/2006/relationships" xmlns:p="http://schemas.openxmlformats.org/presentationml/2006/main">
   <p:cSld>
     <p:spTree>
@@ -29591,7 +30699,126 @@
 </p:sld>
 </file>
 
-<file path=ppt/slides/slide29.xml><?xml version="1.0" encoding="utf-8"?>
+<file path=ppt/slides/slide3.xml><?xml version="1.0" encoding="utf-8"?>
+<p:sld xmlns:a="http://schemas.openxmlformats.org/drawingml/2006/main" xmlns:r="http://schemas.openxmlformats.org/officeDocument/2006/relationships" xmlns:p="http://schemas.openxmlformats.org/presentationml/2006/main">
+  <p:cSld>
+    <p:spTree>
+      <p:nvGrpSpPr>
+        <p:cNvPr id="1" name=""/>
+        <p:cNvGrpSpPr/>
+        <p:nvPr/>
+      </p:nvGrpSpPr>
+      <p:grpSpPr>
+        <a:xfrm>
+          <a:off x="0" y="0"/>
+          <a:ext cx="0" cy="0"/>
+          <a:chOff x="0" y="0"/>
+          <a:chExt cx="0" cy="0"/>
+        </a:xfrm>
+      </p:grpSpPr>
+      <p:sp>
+        <p:nvSpPr>
+          <p:cNvPr id="2" name="Titre 1">
+            <a:extLst>
+              <a:ext uri="{FF2B5EF4-FFF2-40B4-BE49-F238E27FC236}">
+                <a16:creationId xmlns:a16="http://schemas.microsoft.com/office/drawing/2014/main" id="{0C3CF6A7-E17D-4316-8AD8-CAC6DB3A712D}"/>
+              </a:ext>
+            </a:extLst>
+          </p:cNvPr>
+          <p:cNvSpPr>
+            <a:spLocks noGrp="1"/>
+          </p:cNvSpPr>
+          <p:nvPr>
+            <p:ph type="title"/>
+          </p:nvPr>
+        </p:nvSpPr>
+        <p:spPr/>
+        <p:txBody>
+          <a:bodyPr/>
+          <a:lstStyle/>
+          <a:p>
+            <a:r>
+              <a:rPr lang="fr-FR" dirty="0"/>
+              <a:t>Le but de cette présentation</a:t>
+            </a:r>
+          </a:p>
+        </p:txBody>
+      </p:sp>
+      <p:sp>
+        <p:nvSpPr>
+          <p:cNvPr id="3" name="Espace réservé du contenu 2">
+            <a:extLst>
+              <a:ext uri="{FF2B5EF4-FFF2-40B4-BE49-F238E27FC236}">
+                <a16:creationId xmlns:a16="http://schemas.microsoft.com/office/drawing/2014/main" id="{6159C144-B174-42C5-8664-9366D104618A}"/>
+              </a:ext>
+            </a:extLst>
+          </p:cNvPr>
+          <p:cNvSpPr>
+            <a:spLocks noGrp="1"/>
+          </p:cNvSpPr>
+          <p:nvPr>
+            <p:ph sz="quarter" idx="13"/>
+          </p:nvPr>
+        </p:nvSpPr>
+        <p:spPr>
+          <a:xfrm>
+            <a:off x="539495" y="2560320"/>
+            <a:ext cx="10790493" cy="3977640"/>
+          </a:xfrm>
+        </p:spPr>
+        <p:txBody>
+          <a:bodyPr/>
+          <a:lstStyle/>
+          <a:p>
+            <a:pPr marL="342900" indent="-342900">
+              <a:buFont typeface="Wingdings" panose="05000000000000000000" pitchFamily="2" charset="2"/>
+              <a:buChar char="Ø"/>
+            </a:pPr>
+            <a:r>
+              <a:rPr lang="fr-FR" dirty="0"/>
+              <a:t>Identifier les mapping qui peuvent poser des problèmes de performance (N+1)</a:t>
+            </a:r>
+            <a:br>
+              <a:rPr lang="fr-FR" dirty="0"/>
+            </a:br>
+            <a:r>
+              <a:rPr lang="fr-FR" dirty="0"/>
+              <a:t>Et dans quelle situation !</a:t>
+            </a:r>
+          </a:p>
+          <a:p>
+            <a:pPr marL="342900" indent="-342900">
+              <a:buFont typeface="Wingdings" panose="05000000000000000000" pitchFamily="2" charset="2"/>
+              <a:buChar char="Ø"/>
+            </a:pPr>
+            <a:r>
+              <a:rPr lang="fr-FR" dirty="0"/>
+              <a:t>Quelques solutions pour y remédier</a:t>
+            </a:r>
+          </a:p>
+          <a:p>
+            <a:pPr marL="342900" indent="-342900">
+              <a:buFont typeface="Wingdings" panose="05000000000000000000" pitchFamily="2" charset="2"/>
+              <a:buChar char="Ø"/>
+            </a:pPr>
+            <a:endParaRPr lang="fr-FR" dirty="0"/>
+          </a:p>
+        </p:txBody>
+      </p:sp>
+    </p:spTree>
+    <p:extLst>
+      <p:ext uri="{BB962C8B-B14F-4D97-AF65-F5344CB8AC3E}">
+        <p14:creationId xmlns:p14="http://schemas.microsoft.com/office/powerpoint/2010/main" val="3600004125"/>
+      </p:ext>
+    </p:extLst>
+  </p:cSld>
+  <p:clrMapOvr>
+    <a:masterClrMapping/>
+  </p:clrMapOvr>
+</p:sld>
+</file>
+
+<file path=ppt/slides/slide30.xml><?xml version="1.0" encoding="utf-8"?>
 <p:sld xmlns:a="http://schemas.openxmlformats.org/drawingml/2006/main" xmlns:r="http://schemas.openxmlformats.org/officeDocument/2006/relationships" xmlns:p="http://schemas.openxmlformats.org/presentationml/2006/main">
   <p:cSld>
     <p:spTree>
@@ -30240,7 +31467,7 @@
 </p:sld>
 </file>
 
-<file path=ppt/slides/slide3.xml><?xml version="1.0" encoding="utf-8"?>
+<file path=ppt/slides/slide31.xml><?xml version="1.0" encoding="utf-8"?>
 <p:sld xmlns:a="http://schemas.openxmlformats.org/drawingml/2006/main" xmlns:r="http://schemas.openxmlformats.org/officeDocument/2006/relationships" xmlns:p="http://schemas.openxmlformats.org/presentationml/2006/main">
   <p:cSld>
     <p:spTree>
@@ -30279,12 +31506,1173 @@
           </a:bodyPr>
           <a:lstStyle/>
           <a:p>
+            <a:pPr rtl="0"/>
             <a:r>
               <a:rPr lang="fr-FR" noProof="1">
                 <a:latin typeface="Segoe UI Light" panose="020B0502040204020203" pitchFamily="34" charset="0"/>
                 <a:cs typeface="Segoe UI Light" panose="020B0502040204020203" pitchFamily="34" charset="0"/>
               </a:rPr>
-              <a:t>Notre modèle de démo !</a:t>
+              <a:t>Contrôle du schéma</a:t>
+            </a:r>
+          </a:p>
+        </p:txBody>
+      </p:sp>
+      <p:sp>
+        <p:nvSpPr>
+          <p:cNvPr id="2" name="ZoneTexte 1"/>
+          <p:cNvSpPr txBox="1"/>
+          <p:nvPr/>
+        </p:nvSpPr>
+        <p:spPr>
+          <a:xfrm>
+            <a:off x="521207" y="1228267"/>
+            <a:ext cx="10961915" cy="369332"/>
+          </a:xfrm>
+          <a:prstGeom prst="rect">
+            <a:avLst/>
+          </a:prstGeom>
+          <a:noFill/>
+        </p:spPr>
+        <p:txBody>
+          <a:bodyPr wrap="square" rtlCol="0">
+            <a:spAutoFit/>
+          </a:bodyPr>
+          <a:lstStyle/>
+          <a:p>
+            <a:pPr marL="285750" indent="-285750">
+              <a:buFont typeface="Wingdings" panose="05000000000000000000" pitchFamily="2" charset="2"/>
+              <a:buChar char="Ø"/>
+            </a:pPr>
+            <a:r>
+              <a:rPr lang="fr-FR" dirty="0"/>
+              <a:t>Création des indexes dans le modèle sur les champs où des filtres sont faits !</a:t>
+            </a:r>
+          </a:p>
+        </p:txBody>
+      </p:sp>
+      <p:sp>
+        <p:nvSpPr>
+          <p:cNvPr id="5" name="ZoneTexte 4">
+            <a:extLst>
+              <a:ext uri="{FF2B5EF4-FFF2-40B4-BE49-F238E27FC236}">
+                <a16:creationId xmlns:a16="http://schemas.microsoft.com/office/drawing/2014/main" id="{60D7C881-1033-4C95-A3F5-721F77D326D7}"/>
+              </a:ext>
+            </a:extLst>
+          </p:cNvPr>
+          <p:cNvSpPr txBox="1"/>
+          <p:nvPr/>
+        </p:nvSpPr>
+        <p:spPr>
+          <a:xfrm>
+            <a:off x="743430" y="1737730"/>
+            <a:ext cx="4097511" cy="369332"/>
+          </a:xfrm>
+          <a:prstGeom prst="rect">
+            <a:avLst/>
+          </a:prstGeom>
+          <a:solidFill>
+            <a:schemeClr val="bg1"/>
+          </a:solidFill>
+        </p:spPr>
+        <p:txBody>
+          <a:bodyPr wrap="square">
+            <a:spAutoFit/>
+          </a:bodyPr>
+          <a:lstStyle/>
+          <a:p>
+            <a:r>
+              <a:rPr kumimoji="0" lang="fr-FR" altLang="fr-FR" b="0" i="0" u="none" strike="noStrike" cap="none" normalizeH="0" baseline="0" dirty="0" err="1">
+                <a:ln>
+                  <a:noFill/>
+                </a:ln>
+                <a:solidFill>
+                  <a:srgbClr val="083080"/>
+                </a:solidFill>
+                <a:effectLst/>
+                <a:latin typeface="Fira Code"/>
+              </a:rPr>
+              <a:t>spring.jpa.hibernate.ddl</a:t>
+            </a:r>
+            <a:r>
+              <a:rPr kumimoji="0" lang="fr-FR" altLang="fr-FR" b="0" i="0" u="none" strike="noStrike" cap="none" normalizeH="0" baseline="0" dirty="0">
+                <a:ln>
+                  <a:noFill/>
+                </a:ln>
+                <a:solidFill>
+                  <a:srgbClr val="083080"/>
+                </a:solidFill>
+                <a:effectLst/>
+                <a:latin typeface="Fira Code"/>
+              </a:rPr>
+              <a:t>-auto</a:t>
+            </a:r>
+            <a:r>
+              <a:rPr kumimoji="0" lang="fr-FR" altLang="fr-FR" b="0" i="0" u="none" strike="noStrike" cap="none" normalizeH="0" baseline="0" dirty="0">
+                <a:ln>
+                  <a:noFill/>
+                </a:ln>
+                <a:solidFill>
+                  <a:srgbClr val="080808"/>
+                </a:solidFill>
+                <a:effectLst/>
+                <a:latin typeface="Fira Code"/>
+              </a:rPr>
+              <a:t>=</a:t>
+            </a:r>
+            <a:r>
+              <a:rPr kumimoji="0" lang="fr-FR" altLang="fr-FR" b="0" i="0" u="none" strike="noStrike" cap="none" normalizeH="0" baseline="0" dirty="0" err="1">
+                <a:ln>
+                  <a:noFill/>
+                </a:ln>
+                <a:solidFill>
+                  <a:srgbClr val="00627A"/>
+                </a:solidFill>
+                <a:effectLst/>
+                <a:latin typeface="Fira Code"/>
+              </a:rPr>
+              <a:t>validate</a:t>
+            </a:r>
+            <a:endParaRPr lang="fr-FR" dirty="0"/>
+          </a:p>
+        </p:txBody>
+      </p:sp>
+      <p:sp>
+        <p:nvSpPr>
+          <p:cNvPr id="6" name="Rectangle 1">
+            <a:extLst>
+              <a:ext uri="{FF2B5EF4-FFF2-40B4-BE49-F238E27FC236}">
+                <a16:creationId xmlns:a16="http://schemas.microsoft.com/office/drawing/2014/main" id="{915A37DB-C73C-4F48-A6B3-8B848B9F791B}"/>
+              </a:ext>
+            </a:extLst>
+          </p:cNvPr>
+          <p:cNvSpPr>
+            <a:spLocks noChangeArrowheads="1"/>
+          </p:cNvSpPr>
+          <p:nvPr/>
+        </p:nvSpPr>
+        <p:spPr bwMode="auto">
+          <a:xfrm>
+            <a:off x="743430" y="2318249"/>
+            <a:ext cx="7595673" cy="1477328"/>
+          </a:xfrm>
+          <a:prstGeom prst="rect">
+            <a:avLst/>
+          </a:prstGeom>
+          <a:solidFill>
+            <a:srgbClr val="FFFFFF"/>
+          </a:solidFill>
+          <a:ln>
+            <a:noFill/>
+          </a:ln>
+          <a:effectLst/>
+          <a:extLst>
+            <a:ext uri="{91240B29-F687-4F45-9708-019B960494DF}">
+              <a14:hiddenLine xmlns:a14="http://schemas.microsoft.com/office/drawing/2010/main" w="9525">
+                <a:solidFill>
+                  <a:schemeClr val="tx1"/>
+                </a:solidFill>
+                <a:miter lim="800000"/>
+                <a:headEnd/>
+                <a:tailEnd/>
+              </a14:hiddenLine>
+            </a:ext>
+            <a:ext uri="{AF507438-7753-43E0-B8FC-AC1667EBCBE1}">
+              <a14:hiddenEffects xmlns:a14="http://schemas.microsoft.com/office/drawing/2010/main">
+                <a:effectLst>
+                  <a:outerShdw dist="35921" dir="2700000" algn="ctr" rotWithShape="0">
+                    <a:schemeClr val="bg2"/>
+                  </a:outerShdw>
+                </a:effectLst>
+              </a14:hiddenEffects>
+            </a:ext>
+          </a:extLst>
+        </p:spPr>
+        <p:txBody>
+          <a:bodyPr vert="horz" wrap="square" lIns="91440" tIns="45720" rIns="91440" bIns="45720" numCol="1" anchor="ctr" anchorCtr="0" compatLnSpc="1">
+            <a:prstTxWarp prst="textNoShape">
+              <a:avLst/>
+            </a:prstTxWarp>
+            <a:spAutoFit/>
+          </a:bodyPr>
+          <a:lstStyle/>
+          <a:p>
+            <a:pPr eaLnBrk="0" fontAlgn="base" hangingPunct="0">
+              <a:spcBef>
+                <a:spcPct val="0"/>
+              </a:spcBef>
+              <a:spcAft>
+                <a:spcPct val="0"/>
+              </a:spcAft>
+            </a:pPr>
+            <a:r>
+              <a:rPr kumimoji="0" lang="fr-FR" altLang="fr-FR" sz="1000" b="0" i="0" u="none" strike="noStrike" cap="none" normalizeH="0" baseline="0" dirty="0">
+                <a:ln>
+                  <a:noFill/>
+                </a:ln>
+                <a:solidFill>
+                  <a:srgbClr val="9E880D"/>
+                </a:solidFill>
+                <a:effectLst/>
+                <a:latin typeface="Fira Code"/>
+              </a:rPr>
+              <a:t>@Entity</a:t>
+            </a:r>
+            <a:br>
+              <a:rPr kumimoji="0" lang="fr-FR" altLang="fr-FR" sz="1000" b="0" i="0" u="none" strike="noStrike" cap="none" normalizeH="0" baseline="0" dirty="0">
+                <a:ln>
+                  <a:noFill/>
+                </a:ln>
+                <a:solidFill>
+                  <a:srgbClr val="9E880D"/>
+                </a:solidFill>
+                <a:effectLst/>
+                <a:latin typeface="Fira Code"/>
+              </a:rPr>
+            </a:br>
+            <a:r>
+              <a:rPr kumimoji="0" lang="fr-FR" altLang="fr-FR" sz="1000" b="0" i="0" u="none" strike="noStrike" cap="none" normalizeH="0" baseline="0" dirty="0">
+                <a:ln>
+                  <a:noFill/>
+                </a:ln>
+                <a:solidFill>
+                  <a:srgbClr val="9E880D"/>
+                </a:solidFill>
+                <a:effectLst/>
+                <a:latin typeface="Fira Code"/>
+              </a:rPr>
+              <a:t>@Getter</a:t>
+            </a:r>
+            <a:br>
+              <a:rPr kumimoji="0" lang="fr-FR" altLang="fr-FR" sz="1000" b="0" i="0" u="none" strike="noStrike" cap="none" normalizeH="0" baseline="0" dirty="0">
+                <a:ln>
+                  <a:noFill/>
+                </a:ln>
+                <a:solidFill>
+                  <a:srgbClr val="9E880D"/>
+                </a:solidFill>
+                <a:effectLst/>
+                <a:latin typeface="Fira Code"/>
+              </a:rPr>
+            </a:br>
+            <a:r>
+              <a:rPr kumimoji="0" lang="fr-FR" altLang="fr-FR" sz="1000" b="0" i="0" u="none" strike="noStrike" cap="none" normalizeH="0" baseline="0" dirty="0">
+                <a:ln>
+                  <a:noFill/>
+                </a:ln>
+                <a:solidFill>
+                  <a:srgbClr val="9E880D"/>
+                </a:solidFill>
+                <a:effectLst/>
+                <a:latin typeface="Fira Code"/>
+              </a:rPr>
+              <a:t>@Setter</a:t>
+            </a:r>
+            <a:br>
+              <a:rPr kumimoji="0" lang="fr-FR" altLang="fr-FR" sz="1000" b="0" i="0" u="none" strike="noStrike" cap="none" normalizeH="0" baseline="0" dirty="0">
+                <a:ln>
+                  <a:noFill/>
+                </a:ln>
+                <a:solidFill>
+                  <a:srgbClr val="9E880D"/>
+                </a:solidFill>
+                <a:effectLst/>
+                <a:latin typeface="Fira Code"/>
+              </a:rPr>
+            </a:br>
+            <a:r>
+              <a:rPr kumimoji="0" lang="fr-FR" altLang="fr-FR" sz="1000" b="0" i="0" u="none" strike="noStrike" cap="none" normalizeH="0" baseline="0" dirty="0">
+                <a:ln>
+                  <a:noFill/>
+                </a:ln>
+                <a:solidFill>
+                  <a:srgbClr val="9E880D"/>
+                </a:solidFill>
+                <a:effectLst/>
+                <a:latin typeface="Fira Code"/>
+              </a:rPr>
+              <a:t>@Table</a:t>
+            </a:r>
+            <a:r>
+              <a:rPr kumimoji="0" lang="fr-FR" altLang="fr-FR" sz="1000" b="0" i="0" u="none" strike="noStrike" cap="none" normalizeH="0" baseline="0" dirty="0">
+                <a:ln>
+                  <a:noFill/>
+                </a:ln>
+                <a:solidFill>
+                  <a:srgbClr val="080808"/>
+                </a:solidFill>
+                <a:effectLst/>
+                <a:latin typeface="Fira Code"/>
+              </a:rPr>
+              <a:t>(name = </a:t>
+            </a:r>
+            <a:r>
+              <a:rPr kumimoji="0" lang="fr-FR" altLang="fr-FR" sz="1000" b="0" i="0" u="none" strike="noStrike" cap="none" normalizeH="0" baseline="0" dirty="0">
+                <a:ln>
+                  <a:noFill/>
+                </a:ln>
+                <a:solidFill>
+                  <a:srgbClr val="067D17"/>
+                </a:solidFill>
+                <a:effectLst/>
+                <a:latin typeface="Fira Code"/>
+              </a:rPr>
+              <a:t>"SCHOOL"</a:t>
+            </a:r>
+            <a:r>
+              <a:rPr kumimoji="0" lang="fr-FR" altLang="fr-FR" sz="1000" b="0" i="0" u="none" strike="noStrike" cap="none" normalizeH="0" baseline="0" dirty="0">
+                <a:ln>
+                  <a:noFill/>
+                </a:ln>
+                <a:solidFill>
+                  <a:srgbClr val="080808"/>
+                </a:solidFill>
+                <a:effectLst/>
+                <a:latin typeface="Fira Code"/>
+              </a:rPr>
+              <a:t>,</a:t>
+            </a:r>
+            <a:br>
+              <a:rPr kumimoji="0" lang="fr-FR" altLang="fr-FR" sz="1000" b="0" i="0" u="none" strike="noStrike" cap="none" normalizeH="0" baseline="0" dirty="0">
+                <a:ln>
+                  <a:noFill/>
+                </a:ln>
+                <a:solidFill>
+                  <a:srgbClr val="080808"/>
+                </a:solidFill>
+                <a:effectLst/>
+                <a:latin typeface="Fira Code"/>
+              </a:rPr>
+            </a:br>
+            <a:r>
+              <a:rPr kumimoji="0" lang="fr-FR" altLang="fr-FR" sz="1000" b="0" i="0" u="none" strike="noStrike" cap="none" normalizeH="0" baseline="0" dirty="0">
+                <a:ln>
+                  <a:noFill/>
+                </a:ln>
+                <a:solidFill>
+                  <a:srgbClr val="080808"/>
+                </a:solidFill>
+                <a:effectLst/>
+                <a:latin typeface="Fira Code"/>
+              </a:rPr>
+              <a:t>        indexes = {</a:t>
+            </a:r>
+            <a:br>
+              <a:rPr kumimoji="0" lang="fr-FR" altLang="fr-FR" sz="1000" b="0" i="0" u="none" strike="noStrike" cap="none" normalizeH="0" baseline="0" dirty="0">
+                <a:ln>
+                  <a:noFill/>
+                </a:ln>
+                <a:solidFill>
+                  <a:srgbClr val="080808"/>
+                </a:solidFill>
+                <a:effectLst/>
+                <a:latin typeface="Fira Code"/>
+              </a:rPr>
+            </a:br>
+            <a:r>
+              <a:rPr kumimoji="0" lang="fr-FR" altLang="fr-FR" sz="1000" b="0" i="0" u="none" strike="noStrike" cap="none" normalizeH="0" baseline="0" dirty="0">
+                <a:ln>
+                  <a:noFill/>
+                </a:ln>
+                <a:solidFill>
+                  <a:srgbClr val="080808"/>
+                </a:solidFill>
+                <a:effectLst/>
+                <a:latin typeface="Fira Code"/>
+              </a:rPr>
+              <a:t>                </a:t>
+            </a:r>
+            <a:r>
+              <a:rPr kumimoji="0" lang="fr-FR" altLang="fr-FR" sz="1000" b="0" i="0" u="none" strike="noStrike" cap="none" normalizeH="0" baseline="0" dirty="0">
+                <a:ln>
+                  <a:noFill/>
+                </a:ln>
+                <a:solidFill>
+                  <a:srgbClr val="9E880D"/>
+                </a:solidFill>
+                <a:effectLst/>
+                <a:latin typeface="Fira Code"/>
+              </a:rPr>
+              <a:t>@Index</a:t>
+            </a:r>
+            <a:r>
+              <a:rPr kumimoji="0" lang="fr-FR" altLang="fr-FR" sz="1000" b="0" i="0" u="none" strike="noStrike" cap="none" normalizeH="0" baseline="0" dirty="0">
+                <a:ln>
+                  <a:noFill/>
+                </a:ln>
+                <a:solidFill>
+                  <a:srgbClr val="080808"/>
+                </a:solidFill>
+                <a:effectLst/>
+                <a:latin typeface="Fira Code"/>
+              </a:rPr>
+              <a:t>(name = </a:t>
+            </a:r>
+            <a:r>
+              <a:rPr kumimoji="0" lang="fr-FR" altLang="fr-FR" sz="1000" b="0" i="0" u="none" strike="noStrike" cap="none" normalizeH="0" baseline="0" dirty="0">
+                <a:ln>
+                  <a:noFill/>
+                </a:ln>
+                <a:solidFill>
+                  <a:srgbClr val="067D17"/>
+                </a:solidFill>
+                <a:effectLst/>
+                <a:latin typeface="Fira Code"/>
+              </a:rPr>
+              <a:t>"</a:t>
+            </a:r>
+            <a:r>
+              <a:rPr kumimoji="0" lang="fr-FR" altLang="fr-FR" sz="1000" b="0" i="0" u="none" strike="noStrike" cap="none" normalizeH="0" baseline="0" dirty="0" err="1">
+                <a:ln>
+                  <a:noFill/>
+                </a:ln>
+                <a:solidFill>
+                  <a:srgbClr val="067D17"/>
+                </a:solidFill>
+                <a:effectLst/>
+                <a:latin typeface="Fira Code"/>
+              </a:rPr>
+              <a:t>director_school_index</a:t>
+            </a:r>
+            <a:r>
+              <a:rPr kumimoji="0" lang="fr-FR" altLang="fr-FR" sz="1000" b="0" i="0" u="none" strike="noStrike" cap="none" normalizeH="0" baseline="0" dirty="0">
+                <a:ln>
+                  <a:noFill/>
+                </a:ln>
+                <a:solidFill>
+                  <a:srgbClr val="067D17"/>
+                </a:solidFill>
+                <a:effectLst/>
+                <a:latin typeface="Fira Code"/>
+              </a:rPr>
+              <a:t>"</a:t>
+            </a:r>
+            <a:r>
+              <a:rPr kumimoji="0" lang="fr-FR" altLang="fr-FR" sz="1000" b="0" i="0" u="none" strike="noStrike" cap="none" normalizeH="0" baseline="0" dirty="0">
+                <a:ln>
+                  <a:noFill/>
+                </a:ln>
+                <a:solidFill>
+                  <a:srgbClr val="080808"/>
+                </a:solidFill>
+                <a:effectLst/>
+                <a:latin typeface="Fira Code"/>
+              </a:rPr>
+              <a:t>, </a:t>
+            </a:r>
+            <a:r>
+              <a:rPr kumimoji="0" lang="fr-FR" altLang="fr-FR" sz="1000" b="0" i="0" u="none" strike="noStrike" cap="none" normalizeH="0" baseline="0" dirty="0" err="1">
+                <a:ln>
+                  <a:noFill/>
+                </a:ln>
+                <a:solidFill>
+                  <a:srgbClr val="080808"/>
+                </a:solidFill>
+                <a:effectLst/>
+                <a:latin typeface="Fira Code"/>
+              </a:rPr>
+              <a:t>columnList</a:t>
+            </a:r>
+            <a:r>
+              <a:rPr kumimoji="0" lang="fr-FR" altLang="fr-FR" sz="1000" b="0" i="0" u="none" strike="noStrike" cap="none" normalizeH="0" baseline="0" dirty="0">
+                <a:ln>
+                  <a:noFill/>
+                </a:ln>
+                <a:solidFill>
+                  <a:srgbClr val="080808"/>
+                </a:solidFill>
+                <a:effectLst/>
+                <a:latin typeface="Fira Code"/>
+              </a:rPr>
+              <a:t> = </a:t>
+            </a:r>
+            <a:r>
+              <a:rPr kumimoji="0" lang="fr-FR" altLang="fr-FR" sz="1000" b="0" i="0" u="none" strike="noStrike" cap="none" normalizeH="0" baseline="0" dirty="0">
+                <a:ln>
+                  <a:noFill/>
+                </a:ln>
+                <a:solidFill>
+                  <a:srgbClr val="067D17"/>
+                </a:solidFill>
+                <a:effectLst/>
+                <a:latin typeface="Fira Code"/>
+              </a:rPr>
+              <a:t>"</a:t>
+            </a:r>
+            <a:r>
+              <a:rPr kumimoji="0" lang="fr-FR" altLang="fr-FR" sz="1000" b="0" i="0" u="none" strike="noStrike" cap="none" normalizeH="0" baseline="0" dirty="0" err="1">
+                <a:ln>
+                  <a:noFill/>
+                </a:ln>
+                <a:solidFill>
+                  <a:srgbClr val="067D17"/>
+                </a:solidFill>
+                <a:effectLst/>
+                <a:latin typeface="Fira Code"/>
+              </a:rPr>
+              <a:t>director_id</a:t>
+            </a:r>
+            <a:r>
+              <a:rPr kumimoji="0" lang="fr-FR" altLang="fr-FR" sz="1000" b="0" i="0" u="none" strike="noStrike" cap="none" normalizeH="0" baseline="0" dirty="0">
+                <a:ln>
+                  <a:noFill/>
+                </a:ln>
+                <a:solidFill>
+                  <a:srgbClr val="067D17"/>
+                </a:solidFill>
+                <a:effectLst/>
+                <a:latin typeface="Fira Code"/>
+              </a:rPr>
+              <a:t>"</a:t>
+            </a:r>
+            <a:r>
+              <a:rPr kumimoji="0" lang="fr-FR" altLang="fr-FR" sz="1000" b="0" i="0" u="none" strike="noStrike" cap="none" normalizeH="0" baseline="0" dirty="0">
+                <a:ln>
+                  <a:noFill/>
+                </a:ln>
+                <a:solidFill>
+                  <a:srgbClr val="080808"/>
+                </a:solidFill>
+                <a:effectLst/>
+                <a:latin typeface="Fira Code"/>
+              </a:rPr>
+              <a:t>),</a:t>
+            </a:r>
+            <a:br>
+              <a:rPr kumimoji="0" lang="fr-FR" altLang="fr-FR" sz="1000" b="0" i="0" u="none" strike="noStrike" cap="none" normalizeH="0" baseline="0" dirty="0">
+                <a:ln>
+                  <a:noFill/>
+                </a:ln>
+                <a:solidFill>
+                  <a:srgbClr val="080808"/>
+                </a:solidFill>
+                <a:effectLst/>
+                <a:latin typeface="Fira Code"/>
+              </a:rPr>
+            </a:br>
+            <a:r>
+              <a:rPr kumimoji="0" lang="fr-FR" altLang="fr-FR" sz="1000" b="0" i="0" u="none" strike="noStrike" cap="none" normalizeH="0" baseline="0" dirty="0">
+                <a:ln>
+                  <a:noFill/>
+                </a:ln>
+                <a:solidFill>
+                  <a:srgbClr val="080808"/>
+                </a:solidFill>
+                <a:effectLst/>
+                <a:latin typeface="Fira Code"/>
+              </a:rPr>
+              <a:t>                </a:t>
+            </a:r>
+            <a:r>
+              <a:rPr kumimoji="0" lang="fr-FR" altLang="fr-FR" sz="1000" b="0" i="0" u="none" strike="noStrike" cap="none" normalizeH="0" baseline="0" dirty="0">
+                <a:ln>
+                  <a:noFill/>
+                </a:ln>
+                <a:solidFill>
+                  <a:srgbClr val="9E880D"/>
+                </a:solidFill>
+                <a:effectLst/>
+                <a:latin typeface="Fira Code"/>
+              </a:rPr>
+              <a:t>@Index</a:t>
+            </a:r>
+            <a:r>
+              <a:rPr kumimoji="0" lang="fr-FR" altLang="fr-FR" sz="1000" b="0" i="0" u="none" strike="noStrike" cap="none" normalizeH="0" baseline="0" dirty="0">
+                <a:ln>
+                  <a:noFill/>
+                </a:ln>
+                <a:solidFill>
+                  <a:srgbClr val="080808"/>
+                </a:solidFill>
+                <a:effectLst/>
+                <a:latin typeface="Fira Code"/>
+              </a:rPr>
+              <a:t>(name = </a:t>
+            </a:r>
+            <a:r>
+              <a:rPr kumimoji="0" lang="fr-FR" altLang="fr-FR" sz="1000" b="0" i="0" u="none" strike="noStrike" cap="none" normalizeH="0" baseline="0" dirty="0">
+                <a:ln>
+                  <a:noFill/>
+                </a:ln>
+                <a:solidFill>
+                  <a:srgbClr val="067D17"/>
+                </a:solidFill>
+                <a:effectLst/>
+                <a:latin typeface="Fira Code"/>
+              </a:rPr>
+              <a:t>"</a:t>
+            </a:r>
+            <a:r>
+              <a:rPr kumimoji="0" lang="fr-FR" altLang="fr-FR" sz="1000" b="0" i="0" u="none" strike="noStrike" cap="none" normalizeH="0" baseline="0" dirty="0" err="1">
+                <a:ln>
+                  <a:noFill/>
+                </a:ln>
+                <a:solidFill>
+                  <a:srgbClr val="067D17"/>
+                </a:solidFill>
+                <a:effectLst/>
+                <a:latin typeface="Fira Code"/>
+              </a:rPr>
+              <a:t>name_school_index</a:t>
+            </a:r>
+            <a:r>
+              <a:rPr kumimoji="0" lang="fr-FR" altLang="fr-FR" sz="1000" b="0" i="0" u="none" strike="noStrike" cap="none" normalizeH="0" baseline="0" dirty="0">
+                <a:ln>
+                  <a:noFill/>
+                </a:ln>
+                <a:solidFill>
+                  <a:srgbClr val="067D17"/>
+                </a:solidFill>
+                <a:effectLst/>
+                <a:latin typeface="Fira Code"/>
+              </a:rPr>
+              <a:t>"</a:t>
+            </a:r>
+            <a:r>
+              <a:rPr kumimoji="0" lang="fr-FR" altLang="fr-FR" sz="1000" b="0" i="0" u="none" strike="noStrike" cap="none" normalizeH="0" baseline="0" dirty="0">
+                <a:ln>
+                  <a:noFill/>
+                </a:ln>
+                <a:solidFill>
+                  <a:srgbClr val="080808"/>
+                </a:solidFill>
+                <a:effectLst/>
+                <a:latin typeface="Fira Code"/>
+              </a:rPr>
+              <a:t>, </a:t>
+            </a:r>
+            <a:r>
+              <a:rPr kumimoji="0" lang="fr-FR" altLang="fr-FR" sz="1000" b="0" i="0" u="none" strike="noStrike" cap="none" normalizeH="0" baseline="0" dirty="0" err="1">
+                <a:ln>
+                  <a:noFill/>
+                </a:ln>
+                <a:solidFill>
+                  <a:srgbClr val="080808"/>
+                </a:solidFill>
+                <a:effectLst/>
+                <a:latin typeface="Fira Code"/>
+              </a:rPr>
+              <a:t>columnList</a:t>
+            </a:r>
+            <a:r>
+              <a:rPr kumimoji="0" lang="fr-FR" altLang="fr-FR" sz="1000" b="0" i="0" u="none" strike="noStrike" cap="none" normalizeH="0" baseline="0" dirty="0">
+                <a:ln>
+                  <a:noFill/>
+                </a:ln>
+                <a:solidFill>
+                  <a:srgbClr val="080808"/>
+                </a:solidFill>
+                <a:effectLst/>
+                <a:latin typeface="Fira Code"/>
+              </a:rPr>
+              <a:t> = </a:t>
+            </a:r>
+            <a:r>
+              <a:rPr kumimoji="0" lang="fr-FR" altLang="fr-FR" sz="1000" b="0" i="0" u="none" strike="noStrike" cap="none" normalizeH="0" baseline="0" dirty="0">
+                <a:ln>
+                  <a:noFill/>
+                </a:ln>
+                <a:solidFill>
+                  <a:srgbClr val="067D17"/>
+                </a:solidFill>
+                <a:effectLst/>
+                <a:latin typeface="Fira Code"/>
+              </a:rPr>
+              <a:t>"</a:t>
+            </a:r>
+            <a:r>
+              <a:rPr kumimoji="0" lang="fr-FR" altLang="fr-FR" sz="1000" b="0" i="0" u="none" strike="noStrike" cap="none" normalizeH="0" baseline="0" dirty="0" err="1">
+                <a:ln>
+                  <a:noFill/>
+                </a:ln>
+                <a:solidFill>
+                  <a:srgbClr val="067D17"/>
+                </a:solidFill>
+                <a:effectLst/>
+                <a:latin typeface="Fira Code"/>
+              </a:rPr>
+              <a:t>name</a:t>
+            </a:r>
+            <a:r>
+              <a:rPr kumimoji="0" lang="fr-FR" altLang="fr-FR" sz="1000" b="0" i="0" u="none" strike="noStrike" cap="none" normalizeH="0" baseline="0" dirty="0">
+                <a:ln>
+                  <a:noFill/>
+                </a:ln>
+                <a:solidFill>
+                  <a:srgbClr val="067D17"/>
+                </a:solidFill>
+                <a:effectLst/>
+                <a:latin typeface="Fira Code"/>
+              </a:rPr>
+              <a:t>"</a:t>
+            </a:r>
+            <a:r>
+              <a:rPr kumimoji="0" lang="fr-FR" altLang="fr-FR" sz="1000" b="0" i="0" u="none" strike="noStrike" cap="none" normalizeH="0" baseline="0" dirty="0">
+                <a:ln>
+                  <a:noFill/>
+                </a:ln>
+                <a:solidFill>
+                  <a:srgbClr val="080808"/>
+                </a:solidFill>
+                <a:effectLst/>
+                <a:latin typeface="Fira Code"/>
+              </a:rPr>
+              <a:t>),</a:t>
+            </a:r>
+            <a:br>
+              <a:rPr kumimoji="0" lang="fr-FR" altLang="fr-FR" sz="1000" b="0" i="0" u="none" strike="noStrike" cap="none" normalizeH="0" baseline="0" dirty="0">
+                <a:ln>
+                  <a:noFill/>
+                </a:ln>
+                <a:solidFill>
+                  <a:srgbClr val="080808"/>
+                </a:solidFill>
+                <a:effectLst/>
+                <a:latin typeface="Fira Code"/>
+              </a:rPr>
+            </a:br>
+            <a:r>
+              <a:rPr kumimoji="0" lang="fr-FR" altLang="fr-FR" sz="1000" b="0" i="0" u="none" strike="noStrike" cap="none" normalizeH="0" baseline="0" dirty="0">
+                <a:ln>
+                  <a:noFill/>
+                </a:ln>
+                <a:solidFill>
+                  <a:srgbClr val="080808"/>
+                </a:solidFill>
+                <a:effectLst/>
+                <a:latin typeface="Fira Code"/>
+              </a:rPr>
+              <a:t>                </a:t>
+            </a:r>
+            <a:r>
+              <a:rPr kumimoji="0" lang="fr-FR" altLang="fr-FR" sz="1000" b="0" i="0" u="none" strike="noStrike" cap="none" normalizeH="0" baseline="0" dirty="0">
+                <a:ln>
+                  <a:noFill/>
+                </a:ln>
+                <a:solidFill>
+                  <a:srgbClr val="9E880D"/>
+                </a:solidFill>
+                <a:effectLst/>
+                <a:latin typeface="Fira Code"/>
+              </a:rPr>
+              <a:t>@Index</a:t>
+            </a:r>
+            <a:r>
+              <a:rPr kumimoji="0" lang="fr-FR" altLang="fr-FR" sz="1000" b="0" i="0" u="none" strike="noStrike" cap="none" normalizeH="0" baseline="0" dirty="0">
+                <a:ln>
+                  <a:noFill/>
+                </a:ln>
+                <a:solidFill>
+                  <a:srgbClr val="080808"/>
+                </a:solidFill>
+                <a:effectLst/>
+                <a:latin typeface="Fira Code"/>
+              </a:rPr>
+              <a:t>(name = </a:t>
+            </a:r>
+            <a:r>
+              <a:rPr kumimoji="0" lang="fr-FR" altLang="fr-FR" sz="1000" b="0" i="0" u="none" strike="noStrike" cap="none" normalizeH="0" baseline="0" dirty="0">
+                <a:ln>
+                  <a:noFill/>
+                </a:ln>
+                <a:solidFill>
+                  <a:srgbClr val="067D17"/>
+                </a:solidFill>
+                <a:effectLst/>
+                <a:latin typeface="Fira Code"/>
+              </a:rPr>
+              <a:t>"</a:t>
+            </a:r>
+            <a:r>
+              <a:rPr kumimoji="0" lang="fr-FR" altLang="fr-FR" sz="1000" b="0" i="0" u="none" strike="noStrike" cap="none" normalizeH="0" baseline="0" dirty="0" err="1">
+                <a:ln>
+                  <a:noFill/>
+                </a:ln>
+                <a:solidFill>
+                  <a:srgbClr val="067D17"/>
+                </a:solidFill>
+                <a:effectLst/>
+                <a:latin typeface="Fira Code"/>
+              </a:rPr>
+              <a:t>location_school_index</a:t>
+            </a:r>
+            <a:r>
+              <a:rPr kumimoji="0" lang="fr-FR" altLang="fr-FR" sz="1000" b="0" i="0" u="none" strike="noStrike" cap="none" normalizeH="0" baseline="0" dirty="0">
+                <a:ln>
+                  <a:noFill/>
+                </a:ln>
+                <a:solidFill>
+                  <a:srgbClr val="067D17"/>
+                </a:solidFill>
+                <a:effectLst/>
+                <a:latin typeface="Fira Code"/>
+              </a:rPr>
+              <a:t>"</a:t>
+            </a:r>
+            <a:r>
+              <a:rPr kumimoji="0" lang="fr-FR" altLang="fr-FR" sz="1000" b="0" i="0" u="none" strike="noStrike" cap="none" normalizeH="0" baseline="0" dirty="0">
+                <a:ln>
+                  <a:noFill/>
+                </a:ln>
+                <a:solidFill>
+                  <a:srgbClr val="080808"/>
+                </a:solidFill>
+                <a:effectLst/>
+                <a:latin typeface="Fira Code"/>
+              </a:rPr>
+              <a:t>, </a:t>
+            </a:r>
+            <a:r>
+              <a:rPr kumimoji="0" lang="fr-FR" altLang="fr-FR" sz="1000" b="0" i="0" u="none" strike="noStrike" cap="none" normalizeH="0" baseline="0" dirty="0" err="1">
+                <a:ln>
+                  <a:noFill/>
+                </a:ln>
+                <a:solidFill>
+                  <a:srgbClr val="080808"/>
+                </a:solidFill>
+                <a:effectLst/>
+                <a:latin typeface="Fira Code"/>
+              </a:rPr>
+              <a:t>columnList</a:t>
+            </a:r>
+            <a:r>
+              <a:rPr kumimoji="0" lang="fr-FR" altLang="fr-FR" sz="1000" b="0" i="0" u="none" strike="noStrike" cap="none" normalizeH="0" baseline="0" dirty="0">
+                <a:ln>
+                  <a:noFill/>
+                </a:ln>
+                <a:solidFill>
+                  <a:srgbClr val="080808"/>
+                </a:solidFill>
+                <a:effectLst/>
+                <a:latin typeface="Fira Code"/>
+              </a:rPr>
+              <a:t> = </a:t>
+            </a:r>
+            <a:r>
+              <a:rPr kumimoji="0" lang="fr-FR" altLang="fr-FR" sz="1000" b="0" i="0" u="none" strike="noStrike" cap="none" normalizeH="0" baseline="0" dirty="0">
+                <a:ln>
+                  <a:noFill/>
+                </a:ln>
+                <a:solidFill>
+                  <a:srgbClr val="067D17"/>
+                </a:solidFill>
+                <a:effectLst/>
+                <a:latin typeface="Fira Code"/>
+              </a:rPr>
+              <a:t>"location"</a:t>
+            </a:r>
+            <a:r>
+              <a:rPr kumimoji="0" lang="fr-FR" altLang="fr-FR" sz="1000" b="0" i="0" u="none" strike="noStrike" cap="none" normalizeH="0" baseline="0" dirty="0">
+                <a:ln>
+                  <a:noFill/>
+                </a:ln>
+                <a:solidFill>
+                  <a:srgbClr val="080808"/>
+                </a:solidFill>
+                <a:effectLst/>
+                <a:latin typeface="Fira Code"/>
+              </a:rPr>
+              <a:t>)</a:t>
+            </a:r>
+            <a:br>
+              <a:rPr kumimoji="0" lang="fr-FR" altLang="fr-FR" sz="1000" b="0" i="0" u="none" strike="noStrike" cap="none" normalizeH="0" baseline="0" dirty="0">
+                <a:ln>
+                  <a:noFill/>
+                </a:ln>
+                <a:solidFill>
+                  <a:srgbClr val="080808"/>
+                </a:solidFill>
+                <a:effectLst/>
+                <a:latin typeface="Fira Code"/>
+              </a:rPr>
+            </a:br>
+            <a:r>
+              <a:rPr kumimoji="0" lang="fr-FR" altLang="fr-FR" sz="1000" b="0" i="0" u="none" strike="noStrike" cap="none" normalizeH="0" baseline="0" dirty="0">
+                <a:ln>
+                  <a:noFill/>
+                </a:ln>
+                <a:solidFill>
+                  <a:srgbClr val="080808"/>
+                </a:solidFill>
+                <a:effectLst/>
+                <a:latin typeface="Fira Code"/>
+              </a:rPr>
+              <a:t>        })</a:t>
+            </a:r>
+            <a:endParaRPr kumimoji="0" lang="fr-FR" altLang="fr-FR" sz="1800" b="0" i="0" u="none" strike="noStrike" cap="none" normalizeH="0" baseline="0" dirty="0">
+              <a:ln>
+                <a:noFill/>
+              </a:ln>
+              <a:solidFill>
+                <a:schemeClr val="tx1"/>
+              </a:solidFill>
+              <a:effectLst/>
+              <a:latin typeface="Arial" panose="020B0604020202020204" pitchFamily="34" charset="0"/>
+            </a:endParaRPr>
+          </a:p>
+        </p:txBody>
+      </p:sp>
+    </p:spTree>
+    <p:extLst>
+      <p:ext uri="{BB962C8B-B14F-4D97-AF65-F5344CB8AC3E}">
+        <p14:creationId xmlns:p14="http://schemas.microsoft.com/office/powerpoint/2010/main" val="3434981604"/>
+      </p:ext>
+    </p:extLst>
+  </p:cSld>
+  <p:clrMapOvr>
+    <a:masterClrMapping/>
+  </p:clrMapOvr>
+  <mc:AlternateContent xmlns:mc="http://schemas.openxmlformats.org/markup-compatibility/2006" xmlns:p14="http://schemas.microsoft.com/office/powerpoint/2010/main">
+    <mc:Choice Requires="p14">
+      <p:transition p14:dur="10"/>
+    </mc:Choice>
+    <mc:Fallback xmlns="">
+      <p:transition/>
+    </mc:Fallback>
+  </mc:AlternateContent>
+  <p:timing>
+    <p:tnLst>
+      <p:par>
+        <p:cTn id="1" dur="indefinite" restart="never" nodeType="tmRoot">
+          <p:childTnLst>
+            <p:seq concurrent="1" nextAc="seek">
+              <p:cTn id="2" dur="indefinite" nodeType="mainSeq">
+                <p:childTnLst>
+                  <p:par>
+                    <p:cTn id="3" fill="hold">
+                      <p:stCondLst>
+                        <p:cond delay="indefinite"/>
+                      </p:stCondLst>
+                      <p:childTnLst>
+                        <p:par>
+                          <p:cTn id="4" fill="hold">
+                            <p:stCondLst>
+                              <p:cond delay="0"/>
+                            </p:stCondLst>
+                            <p:childTnLst>
+                              <p:par>
+                                <p:cTn id="5" presetID="1" presetClass="entr" presetSubtype="0" fill="hold" grpId="0" nodeType="clickEffect">
+                                  <p:stCondLst>
+                                    <p:cond delay="0"/>
+                                  </p:stCondLst>
+                                  <p:childTnLst>
+                                    <p:set>
+                                      <p:cBhvr>
+                                        <p:cTn id="6" dur="1" fill="hold">
+                                          <p:stCondLst>
+                                            <p:cond delay="0"/>
+                                          </p:stCondLst>
+                                        </p:cTn>
+                                        <p:tgtEl>
+                                          <p:spTgt spid="6"/>
+                                        </p:tgtEl>
+                                        <p:attrNameLst>
+                                          <p:attrName>style.visibility</p:attrName>
+                                        </p:attrNameLst>
+                                      </p:cBhvr>
+                                      <p:to>
+                                        <p:strVal val="visible"/>
+                                      </p:to>
+                                    </p:set>
+                                  </p:childTnLst>
+                                </p:cTn>
+                              </p:par>
+                            </p:childTnLst>
+                          </p:cTn>
+                        </p:par>
+                      </p:childTnLst>
+                    </p:cTn>
+                  </p:par>
+                </p:childTnLst>
+              </p:cTn>
+              <p:prevCondLst>
+                <p:cond evt="onPrev" delay="0">
+                  <p:tgtEl>
+                    <p:sldTgt/>
+                  </p:tgtEl>
+                </p:cond>
+              </p:prevCondLst>
+              <p:nextCondLst>
+                <p:cond evt="onNext" delay="0">
+                  <p:tgtEl>
+                    <p:sldTgt/>
+                  </p:tgtEl>
+                </p:cond>
+              </p:nextCondLst>
+            </p:seq>
+          </p:childTnLst>
+        </p:cTn>
+      </p:par>
+    </p:tnLst>
+    <p:bldLst>
+      <p:bldP spid="6" grpId="0" animBg="1"/>
+    </p:bldLst>
+  </p:timing>
+</p:sld>
+</file>
+
+<file path=ppt/slides/slide32.xml><?xml version="1.0" encoding="utf-8"?>
+<p:sld xmlns:a="http://schemas.openxmlformats.org/drawingml/2006/main" xmlns:r="http://schemas.openxmlformats.org/officeDocument/2006/relationships" xmlns:p="http://schemas.openxmlformats.org/presentationml/2006/main">
+  <p:cSld>
+    <p:spTree>
+      <p:nvGrpSpPr>
+        <p:cNvPr id="1" name=""/>
+        <p:cNvGrpSpPr/>
+        <p:nvPr/>
+      </p:nvGrpSpPr>
+      <p:grpSpPr>
+        <a:xfrm>
+          <a:off x="0" y="0"/>
+          <a:ext cx="0" cy="0"/>
+          <a:chOff x="0" y="0"/>
+          <a:chExt cx="0" cy="0"/>
+        </a:xfrm>
+      </p:grpSpPr>
+      <p:sp>
+        <p:nvSpPr>
+          <p:cNvPr id="4" name="Titre 3"/>
+          <p:cNvSpPr>
+            <a:spLocks noGrp="1"/>
+          </p:cNvSpPr>
+          <p:nvPr>
+            <p:ph type="title"/>
+          </p:nvPr>
+        </p:nvSpPr>
+        <p:spPr>
+          <a:xfrm>
+            <a:off x="521207" y="448056"/>
+            <a:ext cx="7783344" cy="640080"/>
+          </a:xfrm>
+        </p:spPr>
+        <p:txBody>
+          <a:bodyPr rtlCol="0">
+            <a:normAutofit/>
+          </a:bodyPr>
+          <a:lstStyle/>
+          <a:p>
+            <a:pPr rtl="0"/>
+            <a:r>
+              <a:rPr lang="fr-FR" noProof="1">
+                <a:latin typeface="Segoe UI Light" panose="020B0502040204020203" pitchFamily="34" charset="0"/>
+                <a:cs typeface="Segoe UI Light" panose="020B0502040204020203" pitchFamily="34" charset="0"/>
+              </a:rPr>
+              <a:t>Questions ?</a:t>
+            </a:r>
+          </a:p>
+        </p:txBody>
+      </p:sp>
+      <p:pic>
+        <p:nvPicPr>
+          <p:cNvPr id="1026" name="Picture 2" descr="La comédie «lourde» à la française, un cinéma social | Slate.fr">
+            <a:extLst>
+              <a:ext uri="{FF2B5EF4-FFF2-40B4-BE49-F238E27FC236}">
+                <a16:creationId xmlns:a16="http://schemas.microsoft.com/office/drawing/2014/main" id="{4625B0D1-5AEC-4614-BD48-24C59880CB52}"/>
+              </a:ext>
+            </a:extLst>
+          </p:cNvPr>
+          <p:cNvPicPr>
+            <a:picLocks noChangeAspect="1" noChangeArrowheads="1" noCrop="1"/>
+          </p:cNvPicPr>
+          <p:nvPr/>
+        </p:nvPicPr>
+        <p:blipFill>
+          <a:blip r:embed="rId3">
+            <a:extLst>
+              <a:ext uri="{28A0092B-C50C-407E-A947-70E740481C1C}">
+                <a14:useLocalDpi xmlns:a14="http://schemas.microsoft.com/office/drawing/2010/main" val="0"/>
+              </a:ext>
+            </a:extLst>
+          </a:blip>
+          <a:srcRect/>
+          <a:stretch>
+            <a:fillRect/>
+          </a:stretch>
+        </p:blipFill>
+        <p:spPr bwMode="auto">
+          <a:xfrm>
+            <a:off x="619341" y="1709737"/>
+            <a:ext cx="10953318" cy="4462463"/>
+          </a:xfrm>
+          <a:prstGeom prst="rect">
+            <a:avLst/>
+          </a:prstGeom>
+          <a:noFill/>
+          <a:extLst>
+            <a:ext uri="{909E8E84-426E-40DD-AFC4-6F175D3DCCD1}">
+              <a14:hiddenFill xmlns:a14="http://schemas.microsoft.com/office/drawing/2010/main">
+                <a:solidFill>
+                  <a:srgbClr val="FFFFFF"/>
+                </a:solidFill>
+              </a14:hiddenFill>
+            </a:ext>
+          </a:extLst>
+        </p:spPr>
+      </p:pic>
+    </p:spTree>
+    <p:extLst>
+      <p:ext uri="{BB962C8B-B14F-4D97-AF65-F5344CB8AC3E}">
+        <p14:creationId xmlns:p14="http://schemas.microsoft.com/office/powerpoint/2010/main" val="809557882"/>
+      </p:ext>
+    </p:extLst>
+  </p:cSld>
+  <p:clrMapOvr>
+    <a:masterClrMapping/>
+  </p:clrMapOvr>
+  <mc:AlternateContent xmlns:mc="http://schemas.openxmlformats.org/markup-compatibility/2006" xmlns:p14="http://schemas.microsoft.com/office/powerpoint/2010/main">
+    <mc:Choice Requires="p14">
+      <p:transition p14:dur="10"/>
+    </mc:Choice>
+    <mc:Fallback xmlns="">
+      <p:transition/>
+    </mc:Fallback>
+  </mc:AlternateContent>
+</p:sld>
+</file>
+
+<file path=ppt/slides/slide4.xml><?xml version="1.0" encoding="utf-8"?>
+<p:sld xmlns:a="http://schemas.openxmlformats.org/drawingml/2006/main" xmlns:r="http://schemas.openxmlformats.org/officeDocument/2006/relationships" xmlns:p="http://schemas.openxmlformats.org/presentationml/2006/main">
+  <p:cSld>
+    <p:spTree>
+      <p:nvGrpSpPr>
+        <p:cNvPr id="1" name=""/>
+        <p:cNvGrpSpPr/>
+        <p:nvPr/>
+      </p:nvGrpSpPr>
+      <p:grpSpPr>
+        <a:xfrm>
+          <a:off x="0" y="0"/>
+          <a:ext cx="0" cy="0"/>
+          <a:chOff x="0" y="0"/>
+          <a:chExt cx="0" cy="0"/>
+        </a:xfrm>
+      </p:grpSpPr>
+      <p:sp>
+        <p:nvSpPr>
+          <p:cNvPr id="4" name="Titre 3"/>
+          <p:cNvSpPr>
+            <a:spLocks noGrp="1"/>
+          </p:cNvSpPr>
+          <p:nvPr>
+            <p:ph type="title"/>
+          </p:nvPr>
+        </p:nvSpPr>
+        <p:spPr>
+          <a:xfrm>
+            <a:off x="521207" y="448056"/>
+            <a:ext cx="7783344" cy="640080"/>
+          </a:xfrm>
+        </p:spPr>
+        <p:txBody>
+          <a:bodyPr rtlCol="0">
+            <a:normAutofit fontScale="90000"/>
+          </a:bodyPr>
+          <a:lstStyle/>
+          <a:p>
+            <a:r>
+              <a:rPr lang="fr-FR" noProof="1">
+                <a:latin typeface="Segoe UI Light" panose="020B0502040204020203" pitchFamily="34" charset="0"/>
+                <a:cs typeface="Segoe UI Light" panose="020B0502040204020203" pitchFamily="34" charset="0"/>
+              </a:rPr>
+              <a:t>Notre modèle de démo ui va nous poser des problèles !</a:t>
             </a:r>
             <a:endParaRPr lang="fr-FR" sz="1200" noProof="1">
               <a:latin typeface="Segoe UI Light" panose="020B0502040204020203" pitchFamily="34" charset="0"/>
@@ -30849,1271 +33237,6 @@
 </p:sld>
 </file>
 
-<file path=ppt/slides/slide30.xml><?xml version="1.0" encoding="utf-8"?>
-<p:sld xmlns:a="http://schemas.openxmlformats.org/drawingml/2006/main" xmlns:r="http://schemas.openxmlformats.org/officeDocument/2006/relationships" xmlns:p="http://schemas.openxmlformats.org/presentationml/2006/main">
-  <p:cSld>
-    <p:spTree>
-      <p:nvGrpSpPr>
-        <p:cNvPr id="1" name=""/>
-        <p:cNvGrpSpPr/>
-        <p:nvPr/>
-      </p:nvGrpSpPr>
-      <p:grpSpPr>
-        <a:xfrm>
-          <a:off x="0" y="0"/>
-          <a:ext cx="0" cy="0"/>
-          <a:chOff x="0" y="0"/>
-          <a:chExt cx="0" cy="0"/>
-        </a:xfrm>
-      </p:grpSpPr>
-      <p:sp>
-        <p:nvSpPr>
-          <p:cNvPr id="4" name="Titre 3"/>
-          <p:cNvSpPr>
-            <a:spLocks noGrp="1"/>
-          </p:cNvSpPr>
-          <p:nvPr>
-            <p:ph type="title"/>
-          </p:nvPr>
-        </p:nvSpPr>
-        <p:spPr>
-          <a:xfrm>
-            <a:off x="521207" y="448056"/>
-            <a:ext cx="7783344" cy="640080"/>
-          </a:xfrm>
-        </p:spPr>
-        <p:txBody>
-          <a:bodyPr rtlCol="0">
-            <a:normAutofit/>
-          </a:bodyPr>
-          <a:lstStyle/>
-          <a:p>
-            <a:pPr rtl="0"/>
-            <a:r>
-              <a:rPr lang="fr-FR" noProof="1">
-                <a:latin typeface="Segoe UI Light" panose="020B0502040204020203" pitchFamily="34" charset="0"/>
-                <a:cs typeface="Segoe UI Light" panose="020B0502040204020203" pitchFamily="34" charset="0"/>
-              </a:rPr>
-              <a:t>Contrôle du schéma</a:t>
-            </a:r>
-          </a:p>
-        </p:txBody>
-      </p:sp>
-      <p:sp>
-        <p:nvSpPr>
-          <p:cNvPr id="2" name="ZoneTexte 1"/>
-          <p:cNvSpPr txBox="1"/>
-          <p:nvPr/>
-        </p:nvSpPr>
-        <p:spPr>
-          <a:xfrm>
-            <a:off x="521207" y="1228267"/>
-            <a:ext cx="10961915" cy="369332"/>
-          </a:xfrm>
-          <a:prstGeom prst="rect">
-            <a:avLst/>
-          </a:prstGeom>
-          <a:noFill/>
-        </p:spPr>
-        <p:txBody>
-          <a:bodyPr wrap="square" rtlCol="0">
-            <a:spAutoFit/>
-          </a:bodyPr>
-          <a:lstStyle/>
-          <a:p>
-            <a:pPr marL="285750" indent="-285750">
-              <a:buFont typeface="Wingdings" panose="05000000000000000000" pitchFamily="2" charset="2"/>
-              <a:buChar char="Ø"/>
-            </a:pPr>
-            <a:r>
-              <a:rPr lang="fr-FR" dirty="0"/>
-              <a:t>Création des indexes dans le modèle sur les champs où des filtres sont faits !</a:t>
-            </a:r>
-          </a:p>
-        </p:txBody>
-      </p:sp>
-      <p:sp>
-        <p:nvSpPr>
-          <p:cNvPr id="5" name="ZoneTexte 4">
-            <a:extLst>
-              <a:ext uri="{FF2B5EF4-FFF2-40B4-BE49-F238E27FC236}">
-                <a16:creationId xmlns:a16="http://schemas.microsoft.com/office/drawing/2014/main" id="{60D7C881-1033-4C95-A3F5-721F77D326D7}"/>
-              </a:ext>
-            </a:extLst>
-          </p:cNvPr>
-          <p:cNvSpPr txBox="1"/>
-          <p:nvPr/>
-        </p:nvSpPr>
-        <p:spPr>
-          <a:xfrm>
-            <a:off x="743430" y="1737730"/>
-            <a:ext cx="4097511" cy="369332"/>
-          </a:xfrm>
-          <a:prstGeom prst="rect">
-            <a:avLst/>
-          </a:prstGeom>
-          <a:solidFill>
-            <a:schemeClr val="bg1"/>
-          </a:solidFill>
-        </p:spPr>
-        <p:txBody>
-          <a:bodyPr wrap="square">
-            <a:spAutoFit/>
-          </a:bodyPr>
-          <a:lstStyle/>
-          <a:p>
-            <a:r>
-              <a:rPr kumimoji="0" lang="fr-FR" altLang="fr-FR" b="0" i="0" u="none" strike="noStrike" cap="none" normalizeH="0" baseline="0" dirty="0" err="1">
-                <a:ln>
-                  <a:noFill/>
-                </a:ln>
-                <a:solidFill>
-                  <a:srgbClr val="083080"/>
-                </a:solidFill>
-                <a:effectLst/>
-                <a:latin typeface="Fira Code"/>
-              </a:rPr>
-              <a:t>spring.jpa.hibernate.ddl</a:t>
-            </a:r>
-            <a:r>
-              <a:rPr kumimoji="0" lang="fr-FR" altLang="fr-FR" b="0" i="0" u="none" strike="noStrike" cap="none" normalizeH="0" baseline="0" dirty="0">
-                <a:ln>
-                  <a:noFill/>
-                </a:ln>
-                <a:solidFill>
-                  <a:srgbClr val="083080"/>
-                </a:solidFill>
-                <a:effectLst/>
-                <a:latin typeface="Fira Code"/>
-              </a:rPr>
-              <a:t>-auto</a:t>
-            </a:r>
-            <a:r>
-              <a:rPr kumimoji="0" lang="fr-FR" altLang="fr-FR" b="0" i="0" u="none" strike="noStrike" cap="none" normalizeH="0" baseline="0" dirty="0">
-                <a:ln>
-                  <a:noFill/>
-                </a:ln>
-                <a:solidFill>
-                  <a:srgbClr val="080808"/>
-                </a:solidFill>
-                <a:effectLst/>
-                <a:latin typeface="Fira Code"/>
-              </a:rPr>
-              <a:t>=</a:t>
-            </a:r>
-            <a:r>
-              <a:rPr kumimoji="0" lang="fr-FR" altLang="fr-FR" b="0" i="0" u="none" strike="noStrike" cap="none" normalizeH="0" baseline="0" dirty="0" err="1">
-                <a:ln>
-                  <a:noFill/>
-                </a:ln>
-                <a:solidFill>
-                  <a:srgbClr val="00627A"/>
-                </a:solidFill>
-                <a:effectLst/>
-                <a:latin typeface="Fira Code"/>
-              </a:rPr>
-              <a:t>validate</a:t>
-            </a:r>
-            <a:endParaRPr lang="fr-FR" dirty="0"/>
-          </a:p>
-        </p:txBody>
-      </p:sp>
-      <p:sp>
-        <p:nvSpPr>
-          <p:cNvPr id="6" name="Rectangle 1">
-            <a:extLst>
-              <a:ext uri="{FF2B5EF4-FFF2-40B4-BE49-F238E27FC236}">
-                <a16:creationId xmlns:a16="http://schemas.microsoft.com/office/drawing/2014/main" id="{915A37DB-C73C-4F48-A6B3-8B848B9F791B}"/>
-              </a:ext>
-            </a:extLst>
-          </p:cNvPr>
-          <p:cNvSpPr>
-            <a:spLocks noChangeArrowheads="1"/>
-          </p:cNvSpPr>
-          <p:nvPr/>
-        </p:nvSpPr>
-        <p:spPr bwMode="auto">
-          <a:xfrm>
-            <a:off x="743430" y="2318249"/>
-            <a:ext cx="7595673" cy="1477328"/>
-          </a:xfrm>
-          <a:prstGeom prst="rect">
-            <a:avLst/>
-          </a:prstGeom>
-          <a:solidFill>
-            <a:srgbClr val="FFFFFF"/>
-          </a:solidFill>
-          <a:ln>
-            <a:noFill/>
-          </a:ln>
-          <a:effectLst/>
-          <a:extLst>
-            <a:ext uri="{91240B29-F687-4F45-9708-019B960494DF}">
-              <a14:hiddenLine xmlns:a14="http://schemas.microsoft.com/office/drawing/2010/main" w="9525">
-                <a:solidFill>
-                  <a:schemeClr val="tx1"/>
-                </a:solidFill>
-                <a:miter lim="800000"/>
-                <a:headEnd/>
-                <a:tailEnd/>
-              </a14:hiddenLine>
-            </a:ext>
-            <a:ext uri="{AF507438-7753-43E0-B8FC-AC1667EBCBE1}">
-              <a14:hiddenEffects xmlns:a14="http://schemas.microsoft.com/office/drawing/2010/main">
-                <a:effectLst>
-                  <a:outerShdw dist="35921" dir="2700000" algn="ctr" rotWithShape="0">
-                    <a:schemeClr val="bg2"/>
-                  </a:outerShdw>
-                </a:effectLst>
-              </a14:hiddenEffects>
-            </a:ext>
-          </a:extLst>
-        </p:spPr>
-        <p:txBody>
-          <a:bodyPr vert="horz" wrap="square" lIns="91440" tIns="45720" rIns="91440" bIns="45720" numCol="1" anchor="ctr" anchorCtr="0" compatLnSpc="1">
-            <a:prstTxWarp prst="textNoShape">
-              <a:avLst/>
-            </a:prstTxWarp>
-            <a:spAutoFit/>
-          </a:bodyPr>
-          <a:lstStyle/>
-          <a:p>
-            <a:pPr eaLnBrk="0" fontAlgn="base" hangingPunct="0">
-              <a:spcBef>
-                <a:spcPct val="0"/>
-              </a:spcBef>
-              <a:spcAft>
-                <a:spcPct val="0"/>
-              </a:spcAft>
-            </a:pPr>
-            <a:r>
-              <a:rPr kumimoji="0" lang="fr-FR" altLang="fr-FR" sz="1000" b="0" i="0" u="none" strike="noStrike" cap="none" normalizeH="0" baseline="0" dirty="0">
-                <a:ln>
-                  <a:noFill/>
-                </a:ln>
-                <a:solidFill>
-                  <a:srgbClr val="9E880D"/>
-                </a:solidFill>
-                <a:effectLst/>
-                <a:latin typeface="Fira Code"/>
-              </a:rPr>
-              <a:t>@Entity</a:t>
-            </a:r>
-            <a:br>
-              <a:rPr kumimoji="0" lang="fr-FR" altLang="fr-FR" sz="1000" b="0" i="0" u="none" strike="noStrike" cap="none" normalizeH="0" baseline="0" dirty="0">
-                <a:ln>
-                  <a:noFill/>
-                </a:ln>
-                <a:solidFill>
-                  <a:srgbClr val="9E880D"/>
-                </a:solidFill>
-                <a:effectLst/>
-                <a:latin typeface="Fira Code"/>
-              </a:rPr>
-            </a:br>
-            <a:r>
-              <a:rPr kumimoji="0" lang="fr-FR" altLang="fr-FR" sz="1000" b="0" i="0" u="none" strike="noStrike" cap="none" normalizeH="0" baseline="0" dirty="0">
-                <a:ln>
-                  <a:noFill/>
-                </a:ln>
-                <a:solidFill>
-                  <a:srgbClr val="9E880D"/>
-                </a:solidFill>
-                <a:effectLst/>
-                <a:latin typeface="Fira Code"/>
-              </a:rPr>
-              <a:t>@Getter</a:t>
-            </a:r>
-            <a:br>
-              <a:rPr kumimoji="0" lang="fr-FR" altLang="fr-FR" sz="1000" b="0" i="0" u="none" strike="noStrike" cap="none" normalizeH="0" baseline="0" dirty="0">
-                <a:ln>
-                  <a:noFill/>
-                </a:ln>
-                <a:solidFill>
-                  <a:srgbClr val="9E880D"/>
-                </a:solidFill>
-                <a:effectLst/>
-                <a:latin typeface="Fira Code"/>
-              </a:rPr>
-            </a:br>
-            <a:r>
-              <a:rPr kumimoji="0" lang="fr-FR" altLang="fr-FR" sz="1000" b="0" i="0" u="none" strike="noStrike" cap="none" normalizeH="0" baseline="0" dirty="0">
-                <a:ln>
-                  <a:noFill/>
-                </a:ln>
-                <a:solidFill>
-                  <a:srgbClr val="9E880D"/>
-                </a:solidFill>
-                <a:effectLst/>
-                <a:latin typeface="Fira Code"/>
-              </a:rPr>
-              <a:t>@Setter</a:t>
-            </a:r>
-            <a:br>
-              <a:rPr kumimoji="0" lang="fr-FR" altLang="fr-FR" sz="1000" b="0" i="0" u="none" strike="noStrike" cap="none" normalizeH="0" baseline="0" dirty="0">
-                <a:ln>
-                  <a:noFill/>
-                </a:ln>
-                <a:solidFill>
-                  <a:srgbClr val="9E880D"/>
-                </a:solidFill>
-                <a:effectLst/>
-                <a:latin typeface="Fira Code"/>
-              </a:rPr>
-            </a:br>
-            <a:r>
-              <a:rPr kumimoji="0" lang="fr-FR" altLang="fr-FR" sz="1000" b="0" i="0" u="none" strike="noStrike" cap="none" normalizeH="0" baseline="0" dirty="0">
-                <a:ln>
-                  <a:noFill/>
-                </a:ln>
-                <a:solidFill>
-                  <a:srgbClr val="9E880D"/>
-                </a:solidFill>
-                <a:effectLst/>
-                <a:latin typeface="Fira Code"/>
-              </a:rPr>
-              <a:t>@Table</a:t>
-            </a:r>
-            <a:r>
-              <a:rPr kumimoji="0" lang="fr-FR" altLang="fr-FR" sz="1000" b="0" i="0" u="none" strike="noStrike" cap="none" normalizeH="0" baseline="0" dirty="0">
-                <a:ln>
-                  <a:noFill/>
-                </a:ln>
-                <a:solidFill>
-                  <a:srgbClr val="080808"/>
-                </a:solidFill>
-                <a:effectLst/>
-                <a:latin typeface="Fira Code"/>
-              </a:rPr>
-              <a:t>(name = </a:t>
-            </a:r>
-            <a:r>
-              <a:rPr kumimoji="0" lang="fr-FR" altLang="fr-FR" sz="1000" b="0" i="0" u="none" strike="noStrike" cap="none" normalizeH="0" baseline="0" dirty="0">
-                <a:ln>
-                  <a:noFill/>
-                </a:ln>
-                <a:solidFill>
-                  <a:srgbClr val="067D17"/>
-                </a:solidFill>
-                <a:effectLst/>
-                <a:latin typeface="Fira Code"/>
-              </a:rPr>
-              <a:t>"SCHOOL"</a:t>
-            </a:r>
-            <a:r>
-              <a:rPr kumimoji="0" lang="fr-FR" altLang="fr-FR" sz="1000" b="0" i="0" u="none" strike="noStrike" cap="none" normalizeH="0" baseline="0" dirty="0">
-                <a:ln>
-                  <a:noFill/>
-                </a:ln>
-                <a:solidFill>
-                  <a:srgbClr val="080808"/>
-                </a:solidFill>
-                <a:effectLst/>
-                <a:latin typeface="Fira Code"/>
-              </a:rPr>
-              <a:t>,</a:t>
-            </a:r>
-            <a:br>
-              <a:rPr kumimoji="0" lang="fr-FR" altLang="fr-FR" sz="1000" b="0" i="0" u="none" strike="noStrike" cap="none" normalizeH="0" baseline="0" dirty="0">
-                <a:ln>
-                  <a:noFill/>
-                </a:ln>
-                <a:solidFill>
-                  <a:srgbClr val="080808"/>
-                </a:solidFill>
-                <a:effectLst/>
-                <a:latin typeface="Fira Code"/>
-              </a:rPr>
-            </a:br>
-            <a:r>
-              <a:rPr kumimoji="0" lang="fr-FR" altLang="fr-FR" sz="1000" b="0" i="0" u="none" strike="noStrike" cap="none" normalizeH="0" baseline="0" dirty="0">
-                <a:ln>
-                  <a:noFill/>
-                </a:ln>
-                <a:solidFill>
-                  <a:srgbClr val="080808"/>
-                </a:solidFill>
-                <a:effectLst/>
-                <a:latin typeface="Fira Code"/>
-              </a:rPr>
-              <a:t>        indexes = {</a:t>
-            </a:r>
-            <a:br>
-              <a:rPr kumimoji="0" lang="fr-FR" altLang="fr-FR" sz="1000" b="0" i="0" u="none" strike="noStrike" cap="none" normalizeH="0" baseline="0" dirty="0">
-                <a:ln>
-                  <a:noFill/>
-                </a:ln>
-                <a:solidFill>
-                  <a:srgbClr val="080808"/>
-                </a:solidFill>
-                <a:effectLst/>
-                <a:latin typeface="Fira Code"/>
-              </a:rPr>
-            </a:br>
-            <a:r>
-              <a:rPr kumimoji="0" lang="fr-FR" altLang="fr-FR" sz="1000" b="0" i="0" u="none" strike="noStrike" cap="none" normalizeH="0" baseline="0" dirty="0">
-                <a:ln>
-                  <a:noFill/>
-                </a:ln>
-                <a:solidFill>
-                  <a:srgbClr val="080808"/>
-                </a:solidFill>
-                <a:effectLst/>
-                <a:latin typeface="Fira Code"/>
-              </a:rPr>
-              <a:t>                </a:t>
-            </a:r>
-            <a:r>
-              <a:rPr kumimoji="0" lang="fr-FR" altLang="fr-FR" sz="1000" b="0" i="0" u="none" strike="noStrike" cap="none" normalizeH="0" baseline="0" dirty="0">
-                <a:ln>
-                  <a:noFill/>
-                </a:ln>
-                <a:solidFill>
-                  <a:srgbClr val="9E880D"/>
-                </a:solidFill>
-                <a:effectLst/>
-                <a:latin typeface="Fira Code"/>
-              </a:rPr>
-              <a:t>@Index</a:t>
-            </a:r>
-            <a:r>
-              <a:rPr kumimoji="0" lang="fr-FR" altLang="fr-FR" sz="1000" b="0" i="0" u="none" strike="noStrike" cap="none" normalizeH="0" baseline="0" dirty="0">
-                <a:ln>
-                  <a:noFill/>
-                </a:ln>
-                <a:solidFill>
-                  <a:srgbClr val="080808"/>
-                </a:solidFill>
-                <a:effectLst/>
-                <a:latin typeface="Fira Code"/>
-              </a:rPr>
-              <a:t>(name = </a:t>
-            </a:r>
-            <a:r>
-              <a:rPr kumimoji="0" lang="fr-FR" altLang="fr-FR" sz="1000" b="0" i="0" u="none" strike="noStrike" cap="none" normalizeH="0" baseline="0" dirty="0">
-                <a:ln>
-                  <a:noFill/>
-                </a:ln>
-                <a:solidFill>
-                  <a:srgbClr val="067D17"/>
-                </a:solidFill>
-                <a:effectLst/>
-                <a:latin typeface="Fira Code"/>
-              </a:rPr>
-              <a:t>"</a:t>
-            </a:r>
-            <a:r>
-              <a:rPr kumimoji="0" lang="fr-FR" altLang="fr-FR" sz="1000" b="0" i="0" u="none" strike="noStrike" cap="none" normalizeH="0" baseline="0" dirty="0" err="1">
-                <a:ln>
-                  <a:noFill/>
-                </a:ln>
-                <a:solidFill>
-                  <a:srgbClr val="067D17"/>
-                </a:solidFill>
-                <a:effectLst/>
-                <a:latin typeface="Fira Code"/>
-              </a:rPr>
-              <a:t>director_school_index</a:t>
-            </a:r>
-            <a:r>
-              <a:rPr kumimoji="0" lang="fr-FR" altLang="fr-FR" sz="1000" b="0" i="0" u="none" strike="noStrike" cap="none" normalizeH="0" baseline="0" dirty="0">
-                <a:ln>
-                  <a:noFill/>
-                </a:ln>
-                <a:solidFill>
-                  <a:srgbClr val="067D17"/>
-                </a:solidFill>
-                <a:effectLst/>
-                <a:latin typeface="Fira Code"/>
-              </a:rPr>
-              <a:t>"</a:t>
-            </a:r>
-            <a:r>
-              <a:rPr kumimoji="0" lang="fr-FR" altLang="fr-FR" sz="1000" b="0" i="0" u="none" strike="noStrike" cap="none" normalizeH="0" baseline="0" dirty="0">
-                <a:ln>
-                  <a:noFill/>
-                </a:ln>
-                <a:solidFill>
-                  <a:srgbClr val="080808"/>
-                </a:solidFill>
-                <a:effectLst/>
-                <a:latin typeface="Fira Code"/>
-              </a:rPr>
-              <a:t>, </a:t>
-            </a:r>
-            <a:r>
-              <a:rPr kumimoji="0" lang="fr-FR" altLang="fr-FR" sz="1000" b="0" i="0" u="none" strike="noStrike" cap="none" normalizeH="0" baseline="0" dirty="0" err="1">
-                <a:ln>
-                  <a:noFill/>
-                </a:ln>
-                <a:solidFill>
-                  <a:srgbClr val="080808"/>
-                </a:solidFill>
-                <a:effectLst/>
-                <a:latin typeface="Fira Code"/>
-              </a:rPr>
-              <a:t>columnList</a:t>
-            </a:r>
-            <a:r>
-              <a:rPr kumimoji="0" lang="fr-FR" altLang="fr-FR" sz="1000" b="0" i="0" u="none" strike="noStrike" cap="none" normalizeH="0" baseline="0" dirty="0">
-                <a:ln>
-                  <a:noFill/>
-                </a:ln>
-                <a:solidFill>
-                  <a:srgbClr val="080808"/>
-                </a:solidFill>
-                <a:effectLst/>
-                <a:latin typeface="Fira Code"/>
-              </a:rPr>
-              <a:t> = </a:t>
-            </a:r>
-            <a:r>
-              <a:rPr kumimoji="0" lang="fr-FR" altLang="fr-FR" sz="1000" b="0" i="0" u="none" strike="noStrike" cap="none" normalizeH="0" baseline="0" dirty="0">
-                <a:ln>
-                  <a:noFill/>
-                </a:ln>
-                <a:solidFill>
-                  <a:srgbClr val="067D17"/>
-                </a:solidFill>
-                <a:effectLst/>
-                <a:latin typeface="Fira Code"/>
-              </a:rPr>
-              <a:t>"</a:t>
-            </a:r>
-            <a:r>
-              <a:rPr kumimoji="0" lang="fr-FR" altLang="fr-FR" sz="1000" b="0" i="0" u="none" strike="noStrike" cap="none" normalizeH="0" baseline="0" dirty="0" err="1">
-                <a:ln>
-                  <a:noFill/>
-                </a:ln>
-                <a:solidFill>
-                  <a:srgbClr val="067D17"/>
-                </a:solidFill>
-                <a:effectLst/>
-                <a:latin typeface="Fira Code"/>
-              </a:rPr>
-              <a:t>director_id</a:t>
-            </a:r>
-            <a:r>
-              <a:rPr kumimoji="0" lang="fr-FR" altLang="fr-FR" sz="1000" b="0" i="0" u="none" strike="noStrike" cap="none" normalizeH="0" baseline="0" dirty="0">
-                <a:ln>
-                  <a:noFill/>
-                </a:ln>
-                <a:solidFill>
-                  <a:srgbClr val="067D17"/>
-                </a:solidFill>
-                <a:effectLst/>
-                <a:latin typeface="Fira Code"/>
-              </a:rPr>
-              <a:t>"</a:t>
-            </a:r>
-            <a:r>
-              <a:rPr kumimoji="0" lang="fr-FR" altLang="fr-FR" sz="1000" b="0" i="0" u="none" strike="noStrike" cap="none" normalizeH="0" baseline="0" dirty="0">
-                <a:ln>
-                  <a:noFill/>
-                </a:ln>
-                <a:solidFill>
-                  <a:srgbClr val="080808"/>
-                </a:solidFill>
-                <a:effectLst/>
-                <a:latin typeface="Fira Code"/>
-              </a:rPr>
-              <a:t>),</a:t>
-            </a:r>
-            <a:br>
-              <a:rPr kumimoji="0" lang="fr-FR" altLang="fr-FR" sz="1000" b="0" i="0" u="none" strike="noStrike" cap="none" normalizeH="0" baseline="0" dirty="0">
-                <a:ln>
-                  <a:noFill/>
-                </a:ln>
-                <a:solidFill>
-                  <a:srgbClr val="080808"/>
-                </a:solidFill>
-                <a:effectLst/>
-                <a:latin typeface="Fira Code"/>
-              </a:rPr>
-            </a:br>
-            <a:r>
-              <a:rPr kumimoji="0" lang="fr-FR" altLang="fr-FR" sz="1000" b="0" i="0" u="none" strike="noStrike" cap="none" normalizeH="0" baseline="0" dirty="0">
-                <a:ln>
-                  <a:noFill/>
-                </a:ln>
-                <a:solidFill>
-                  <a:srgbClr val="080808"/>
-                </a:solidFill>
-                <a:effectLst/>
-                <a:latin typeface="Fira Code"/>
-              </a:rPr>
-              <a:t>                </a:t>
-            </a:r>
-            <a:r>
-              <a:rPr kumimoji="0" lang="fr-FR" altLang="fr-FR" sz="1000" b="0" i="0" u="none" strike="noStrike" cap="none" normalizeH="0" baseline="0" dirty="0">
-                <a:ln>
-                  <a:noFill/>
-                </a:ln>
-                <a:solidFill>
-                  <a:srgbClr val="9E880D"/>
-                </a:solidFill>
-                <a:effectLst/>
-                <a:latin typeface="Fira Code"/>
-              </a:rPr>
-              <a:t>@Index</a:t>
-            </a:r>
-            <a:r>
-              <a:rPr kumimoji="0" lang="fr-FR" altLang="fr-FR" sz="1000" b="0" i="0" u="none" strike="noStrike" cap="none" normalizeH="0" baseline="0" dirty="0">
-                <a:ln>
-                  <a:noFill/>
-                </a:ln>
-                <a:solidFill>
-                  <a:srgbClr val="080808"/>
-                </a:solidFill>
-                <a:effectLst/>
-                <a:latin typeface="Fira Code"/>
-              </a:rPr>
-              <a:t>(name = </a:t>
-            </a:r>
-            <a:r>
-              <a:rPr kumimoji="0" lang="fr-FR" altLang="fr-FR" sz="1000" b="0" i="0" u="none" strike="noStrike" cap="none" normalizeH="0" baseline="0" dirty="0">
-                <a:ln>
-                  <a:noFill/>
-                </a:ln>
-                <a:solidFill>
-                  <a:srgbClr val="067D17"/>
-                </a:solidFill>
-                <a:effectLst/>
-                <a:latin typeface="Fira Code"/>
-              </a:rPr>
-              <a:t>"</a:t>
-            </a:r>
-            <a:r>
-              <a:rPr kumimoji="0" lang="fr-FR" altLang="fr-FR" sz="1000" b="0" i="0" u="none" strike="noStrike" cap="none" normalizeH="0" baseline="0" dirty="0" err="1">
-                <a:ln>
-                  <a:noFill/>
-                </a:ln>
-                <a:solidFill>
-                  <a:srgbClr val="067D17"/>
-                </a:solidFill>
-                <a:effectLst/>
-                <a:latin typeface="Fira Code"/>
-              </a:rPr>
-              <a:t>name_school_index</a:t>
-            </a:r>
-            <a:r>
-              <a:rPr kumimoji="0" lang="fr-FR" altLang="fr-FR" sz="1000" b="0" i="0" u="none" strike="noStrike" cap="none" normalizeH="0" baseline="0" dirty="0">
-                <a:ln>
-                  <a:noFill/>
-                </a:ln>
-                <a:solidFill>
-                  <a:srgbClr val="067D17"/>
-                </a:solidFill>
-                <a:effectLst/>
-                <a:latin typeface="Fira Code"/>
-              </a:rPr>
-              <a:t>"</a:t>
-            </a:r>
-            <a:r>
-              <a:rPr kumimoji="0" lang="fr-FR" altLang="fr-FR" sz="1000" b="0" i="0" u="none" strike="noStrike" cap="none" normalizeH="0" baseline="0" dirty="0">
-                <a:ln>
-                  <a:noFill/>
-                </a:ln>
-                <a:solidFill>
-                  <a:srgbClr val="080808"/>
-                </a:solidFill>
-                <a:effectLst/>
-                <a:latin typeface="Fira Code"/>
-              </a:rPr>
-              <a:t>, </a:t>
-            </a:r>
-            <a:r>
-              <a:rPr kumimoji="0" lang="fr-FR" altLang="fr-FR" sz="1000" b="0" i="0" u="none" strike="noStrike" cap="none" normalizeH="0" baseline="0" dirty="0" err="1">
-                <a:ln>
-                  <a:noFill/>
-                </a:ln>
-                <a:solidFill>
-                  <a:srgbClr val="080808"/>
-                </a:solidFill>
-                <a:effectLst/>
-                <a:latin typeface="Fira Code"/>
-              </a:rPr>
-              <a:t>columnList</a:t>
-            </a:r>
-            <a:r>
-              <a:rPr kumimoji="0" lang="fr-FR" altLang="fr-FR" sz="1000" b="0" i="0" u="none" strike="noStrike" cap="none" normalizeH="0" baseline="0" dirty="0">
-                <a:ln>
-                  <a:noFill/>
-                </a:ln>
-                <a:solidFill>
-                  <a:srgbClr val="080808"/>
-                </a:solidFill>
-                <a:effectLst/>
-                <a:latin typeface="Fira Code"/>
-              </a:rPr>
-              <a:t> = </a:t>
-            </a:r>
-            <a:r>
-              <a:rPr kumimoji="0" lang="fr-FR" altLang="fr-FR" sz="1000" b="0" i="0" u="none" strike="noStrike" cap="none" normalizeH="0" baseline="0" dirty="0">
-                <a:ln>
-                  <a:noFill/>
-                </a:ln>
-                <a:solidFill>
-                  <a:srgbClr val="067D17"/>
-                </a:solidFill>
-                <a:effectLst/>
-                <a:latin typeface="Fira Code"/>
-              </a:rPr>
-              <a:t>"</a:t>
-            </a:r>
-            <a:r>
-              <a:rPr kumimoji="0" lang="fr-FR" altLang="fr-FR" sz="1000" b="0" i="0" u="none" strike="noStrike" cap="none" normalizeH="0" baseline="0" dirty="0" err="1">
-                <a:ln>
-                  <a:noFill/>
-                </a:ln>
-                <a:solidFill>
-                  <a:srgbClr val="067D17"/>
-                </a:solidFill>
-                <a:effectLst/>
-                <a:latin typeface="Fira Code"/>
-              </a:rPr>
-              <a:t>name</a:t>
-            </a:r>
-            <a:r>
-              <a:rPr kumimoji="0" lang="fr-FR" altLang="fr-FR" sz="1000" b="0" i="0" u="none" strike="noStrike" cap="none" normalizeH="0" baseline="0" dirty="0">
-                <a:ln>
-                  <a:noFill/>
-                </a:ln>
-                <a:solidFill>
-                  <a:srgbClr val="067D17"/>
-                </a:solidFill>
-                <a:effectLst/>
-                <a:latin typeface="Fira Code"/>
-              </a:rPr>
-              <a:t>"</a:t>
-            </a:r>
-            <a:r>
-              <a:rPr kumimoji="0" lang="fr-FR" altLang="fr-FR" sz="1000" b="0" i="0" u="none" strike="noStrike" cap="none" normalizeH="0" baseline="0" dirty="0">
-                <a:ln>
-                  <a:noFill/>
-                </a:ln>
-                <a:solidFill>
-                  <a:srgbClr val="080808"/>
-                </a:solidFill>
-                <a:effectLst/>
-                <a:latin typeface="Fira Code"/>
-              </a:rPr>
-              <a:t>),</a:t>
-            </a:r>
-            <a:br>
-              <a:rPr kumimoji="0" lang="fr-FR" altLang="fr-FR" sz="1000" b="0" i="0" u="none" strike="noStrike" cap="none" normalizeH="0" baseline="0" dirty="0">
-                <a:ln>
-                  <a:noFill/>
-                </a:ln>
-                <a:solidFill>
-                  <a:srgbClr val="080808"/>
-                </a:solidFill>
-                <a:effectLst/>
-                <a:latin typeface="Fira Code"/>
-              </a:rPr>
-            </a:br>
-            <a:r>
-              <a:rPr kumimoji="0" lang="fr-FR" altLang="fr-FR" sz="1000" b="0" i="0" u="none" strike="noStrike" cap="none" normalizeH="0" baseline="0" dirty="0">
-                <a:ln>
-                  <a:noFill/>
-                </a:ln>
-                <a:solidFill>
-                  <a:srgbClr val="080808"/>
-                </a:solidFill>
-                <a:effectLst/>
-                <a:latin typeface="Fira Code"/>
-              </a:rPr>
-              <a:t>                </a:t>
-            </a:r>
-            <a:r>
-              <a:rPr kumimoji="0" lang="fr-FR" altLang="fr-FR" sz="1000" b="0" i="0" u="none" strike="noStrike" cap="none" normalizeH="0" baseline="0" dirty="0">
-                <a:ln>
-                  <a:noFill/>
-                </a:ln>
-                <a:solidFill>
-                  <a:srgbClr val="9E880D"/>
-                </a:solidFill>
-                <a:effectLst/>
-                <a:latin typeface="Fira Code"/>
-              </a:rPr>
-              <a:t>@Index</a:t>
-            </a:r>
-            <a:r>
-              <a:rPr kumimoji="0" lang="fr-FR" altLang="fr-FR" sz="1000" b="0" i="0" u="none" strike="noStrike" cap="none" normalizeH="0" baseline="0" dirty="0">
-                <a:ln>
-                  <a:noFill/>
-                </a:ln>
-                <a:solidFill>
-                  <a:srgbClr val="080808"/>
-                </a:solidFill>
-                <a:effectLst/>
-                <a:latin typeface="Fira Code"/>
-              </a:rPr>
-              <a:t>(name = </a:t>
-            </a:r>
-            <a:r>
-              <a:rPr kumimoji="0" lang="fr-FR" altLang="fr-FR" sz="1000" b="0" i="0" u="none" strike="noStrike" cap="none" normalizeH="0" baseline="0" dirty="0">
-                <a:ln>
-                  <a:noFill/>
-                </a:ln>
-                <a:solidFill>
-                  <a:srgbClr val="067D17"/>
-                </a:solidFill>
-                <a:effectLst/>
-                <a:latin typeface="Fira Code"/>
-              </a:rPr>
-              <a:t>"</a:t>
-            </a:r>
-            <a:r>
-              <a:rPr kumimoji="0" lang="fr-FR" altLang="fr-FR" sz="1000" b="0" i="0" u="none" strike="noStrike" cap="none" normalizeH="0" baseline="0" dirty="0" err="1">
-                <a:ln>
-                  <a:noFill/>
-                </a:ln>
-                <a:solidFill>
-                  <a:srgbClr val="067D17"/>
-                </a:solidFill>
-                <a:effectLst/>
-                <a:latin typeface="Fira Code"/>
-              </a:rPr>
-              <a:t>location_school_index</a:t>
-            </a:r>
-            <a:r>
-              <a:rPr kumimoji="0" lang="fr-FR" altLang="fr-FR" sz="1000" b="0" i="0" u="none" strike="noStrike" cap="none" normalizeH="0" baseline="0" dirty="0">
-                <a:ln>
-                  <a:noFill/>
-                </a:ln>
-                <a:solidFill>
-                  <a:srgbClr val="067D17"/>
-                </a:solidFill>
-                <a:effectLst/>
-                <a:latin typeface="Fira Code"/>
-              </a:rPr>
-              <a:t>"</a:t>
-            </a:r>
-            <a:r>
-              <a:rPr kumimoji="0" lang="fr-FR" altLang="fr-FR" sz="1000" b="0" i="0" u="none" strike="noStrike" cap="none" normalizeH="0" baseline="0" dirty="0">
-                <a:ln>
-                  <a:noFill/>
-                </a:ln>
-                <a:solidFill>
-                  <a:srgbClr val="080808"/>
-                </a:solidFill>
-                <a:effectLst/>
-                <a:latin typeface="Fira Code"/>
-              </a:rPr>
-              <a:t>, </a:t>
-            </a:r>
-            <a:r>
-              <a:rPr kumimoji="0" lang="fr-FR" altLang="fr-FR" sz="1000" b="0" i="0" u="none" strike="noStrike" cap="none" normalizeH="0" baseline="0" dirty="0" err="1">
-                <a:ln>
-                  <a:noFill/>
-                </a:ln>
-                <a:solidFill>
-                  <a:srgbClr val="080808"/>
-                </a:solidFill>
-                <a:effectLst/>
-                <a:latin typeface="Fira Code"/>
-              </a:rPr>
-              <a:t>columnList</a:t>
-            </a:r>
-            <a:r>
-              <a:rPr kumimoji="0" lang="fr-FR" altLang="fr-FR" sz="1000" b="0" i="0" u="none" strike="noStrike" cap="none" normalizeH="0" baseline="0" dirty="0">
-                <a:ln>
-                  <a:noFill/>
-                </a:ln>
-                <a:solidFill>
-                  <a:srgbClr val="080808"/>
-                </a:solidFill>
-                <a:effectLst/>
-                <a:latin typeface="Fira Code"/>
-              </a:rPr>
-              <a:t> = </a:t>
-            </a:r>
-            <a:r>
-              <a:rPr kumimoji="0" lang="fr-FR" altLang="fr-FR" sz="1000" b="0" i="0" u="none" strike="noStrike" cap="none" normalizeH="0" baseline="0" dirty="0">
-                <a:ln>
-                  <a:noFill/>
-                </a:ln>
-                <a:solidFill>
-                  <a:srgbClr val="067D17"/>
-                </a:solidFill>
-                <a:effectLst/>
-                <a:latin typeface="Fira Code"/>
-              </a:rPr>
-              <a:t>"location"</a:t>
-            </a:r>
-            <a:r>
-              <a:rPr kumimoji="0" lang="fr-FR" altLang="fr-FR" sz="1000" b="0" i="0" u="none" strike="noStrike" cap="none" normalizeH="0" baseline="0" dirty="0">
-                <a:ln>
-                  <a:noFill/>
-                </a:ln>
-                <a:solidFill>
-                  <a:srgbClr val="080808"/>
-                </a:solidFill>
-                <a:effectLst/>
-                <a:latin typeface="Fira Code"/>
-              </a:rPr>
-              <a:t>)</a:t>
-            </a:r>
-            <a:br>
-              <a:rPr kumimoji="0" lang="fr-FR" altLang="fr-FR" sz="1000" b="0" i="0" u="none" strike="noStrike" cap="none" normalizeH="0" baseline="0" dirty="0">
-                <a:ln>
-                  <a:noFill/>
-                </a:ln>
-                <a:solidFill>
-                  <a:srgbClr val="080808"/>
-                </a:solidFill>
-                <a:effectLst/>
-                <a:latin typeface="Fira Code"/>
-              </a:rPr>
-            </a:br>
-            <a:r>
-              <a:rPr kumimoji="0" lang="fr-FR" altLang="fr-FR" sz="1000" b="0" i="0" u="none" strike="noStrike" cap="none" normalizeH="0" baseline="0" dirty="0">
-                <a:ln>
-                  <a:noFill/>
-                </a:ln>
-                <a:solidFill>
-                  <a:srgbClr val="080808"/>
-                </a:solidFill>
-                <a:effectLst/>
-                <a:latin typeface="Fira Code"/>
-              </a:rPr>
-              <a:t>        })</a:t>
-            </a:r>
-            <a:endParaRPr kumimoji="0" lang="fr-FR" altLang="fr-FR" sz="1800" b="0" i="0" u="none" strike="noStrike" cap="none" normalizeH="0" baseline="0" dirty="0">
-              <a:ln>
-                <a:noFill/>
-              </a:ln>
-              <a:solidFill>
-                <a:schemeClr val="tx1"/>
-              </a:solidFill>
-              <a:effectLst/>
-              <a:latin typeface="Arial" panose="020B0604020202020204" pitchFamily="34" charset="0"/>
-            </a:endParaRPr>
-          </a:p>
-        </p:txBody>
-      </p:sp>
-    </p:spTree>
-    <p:extLst>
-      <p:ext uri="{BB962C8B-B14F-4D97-AF65-F5344CB8AC3E}">
-        <p14:creationId xmlns:p14="http://schemas.microsoft.com/office/powerpoint/2010/main" val="3434981604"/>
-      </p:ext>
-    </p:extLst>
-  </p:cSld>
-  <p:clrMapOvr>
-    <a:masterClrMapping/>
-  </p:clrMapOvr>
-  <mc:AlternateContent xmlns:mc="http://schemas.openxmlformats.org/markup-compatibility/2006" xmlns:p14="http://schemas.microsoft.com/office/powerpoint/2010/main">
-    <mc:Choice Requires="p14">
-      <p:transition p14:dur="10"/>
-    </mc:Choice>
-    <mc:Fallback xmlns="">
-      <p:transition/>
-    </mc:Fallback>
-  </mc:AlternateContent>
-  <p:timing>
-    <p:tnLst>
-      <p:par>
-        <p:cTn id="1" dur="indefinite" restart="never" nodeType="tmRoot">
-          <p:childTnLst>
-            <p:seq concurrent="1" nextAc="seek">
-              <p:cTn id="2" dur="indefinite" nodeType="mainSeq">
-                <p:childTnLst>
-                  <p:par>
-                    <p:cTn id="3" fill="hold">
-                      <p:stCondLst>
-                        <p:cond delay="indefinite"/>
-                      </p:stCondLst>
-                      <p:childTnLst>
-                        <p:par>
-                          <p:cTn id="4" fill="hold">
-                            <p:stCondLst>
-                              <p:cond delay="0"/>
-                            </p:stCondLst>
-                            <p:childTnLst>
-                              <p:par>
-                                <p:cTn id="5" presetID="1" presetClass="entr" presetSubtype="0" fill="hold" grpId="0" nodeType="clickEffect">
-                                  <p:stCondLst>
-                                    <p:cond delay="0"/>
-                                  </p:stCondLst>
-                                  <p:childTnLst>
-                                    <p:set>
-                                      <p:cBhvr>
-                                        <p:cTn id="6" dur="1" fill="hold">
-                                          <p:stCondLst>
-                                            <p:cond delay="0"/>
-                                          </p:stCondLst>
-                                        </p:cTn>
-                                        <p:tgtEl>
-                                          <p:spTgt spid="6"/>
-                                        </p:tgtEl>
-                                        <p:attrNameLst>
-                                          <p:attrName>style.visibility</p:attrName>
-                                        </p:attrNameLst>
-                                      </p:cBhvr>
-                                      <p:to>
-                                        <p:strVal val="visible"/>
-                                      </p:to>
-                                    </p:set>
-                                  </p:childTnLst>
-                                </p:cTn>
-                              </p:par>
-                            </p:childTnLst>
-                          </p:cTn>
-                        </p:par>
-                      </p:childTnLst>
-                    </p:cTn>
-                  </p:par>
-                </p:childTnLst>
-              </p:cTn>
-              <p:prevCondLst>
-                <p:cond evt="onPrev" delay="0">
-                  <p:tgtEl>
-                    <p:sldTgt/>
-                  </p:tgtEl>
-                </p:cond>
-              </p:prevCondLst>
-              <p:nextCondLst>
-                <p:cond evt="onNext" delay="0">
-                  <p:tgtEl>
-                    <p:sldTgt/>
-                  </p:tgtEl>
-                </p:cond>
-              </p:nextCondLst>
-            </p:seq>
-          </p:childTnLst>
-        </p:cTn>
-      </p:par>
-    </p:tnLst>
-    <p:bldLst>
-      <p:bldP spid="6" grpId="0" animBg="1"/>
-    </p:bldLst>
-  </p:timing>
-</p:sld>
-</file>
-
-<file path=ppt/slides/slide31.xml><?xml version="1.0" encoding="utf-8"?>
-<p:sld xmlns:a="http://schemas.openxmlformats.org/drawingml/2006/main" xmlns:r="http://schemas.openxmlformats.org/officeDocument/2006/relationships" xmlns:p="http://schemas.openxmlformats.org/presentationml/2006/main">
-  <p:cSld>
-    <p:spTree>
-      <p:nvGrpSpPr>
-        <p:cNvPr id="1" name=""/>
-        <p:cNvGrpSpPr/>
-        <p:nvPr/>
-      </p:nvGrpSpPr>
-      <p:grpSpPr>
-        <a:xfrm>
-          <a:off x="0" y="0"/>
-          <a:ext cx="0" cy="0"/>
-          <a:chOff x="0" y="0"/>
-          <a:chExt cx="0" cy="0"/>
-        </a:xfrm>
-      </p:grpSpPr>
-      <p:sp>
-        <p:nvSpPr>
-          <p:cNvPr id="4" name="Titre 3"/>
-          <p:cNvSpPr>
-            <a:spLocks noGrp="1"/>
-          </p:cNvSpPr>
-          <p:nvPr>
-            <p:ph type="title"/>
-          </p:nvPr>
-        </p:nvSpPr>
-        <p:spPr>
-          <a:xfrm>
-            <a:off x="521207" y="448056"/>
-            <a:ext cx="7783344" cy="640080"/>
-          </a:xfrm>
-        </p:spPr>
-        <p:txBody>
-          <a:bodyPr rtlCol="0">
-            <a:normAutofit/>
-          </a:bodyPr>
-          <a:lstStyle/>
-          <a:p>
-            <a:pPr rtl="0"/>
-            <a:r>
-              <a:rPr lang="fr-FR" noProof="1">
-                <a:latin typeface="Segoe UI Light" panose="020B0502040204020203" pitchFamily="34" charset="0"/>
-                <a:cs typeface="Segoe UI Light" panose="020B0502040204020203" pitchFamily="34" charset="0"/>
-              </a:rPr>
-              <a:t>Questions ?</a:t>
-            </a:r>
-          </a:p>
-        </p:txBody>
-      </p:sp>
-      <p:pic>
-        <p:nvPicPr>
-          <p:cNvPr id="1026" name="Picture 2" descr="La comédie «lourde» à la française, un cinéma social | Slate.fr">
-            <a:extLst>
-              <a:ext uri="{FF2B5EF4-FFF2-40B4-BE49-F238E27FC236}">
-                <a16:creationId xmlns:a16="http://schemas.microsoft.com/office/drawing/2014/main" id="{4625B0D1-5AEC-4614-BD48-24C59880CB52}"/>
-              </a:ext>
-            </a:extLst>
-          </p:cNvPr>
-          <p:cNvPicPr>
-            <a:picLocks noChangeAspect="1" noChangeArrowheads="1" noCrop="1"/>
-          </p:cNvPicPr>
-          <p:nvPr/>
-        </p:nvPicPr>
-        <p:blipFill>
-          <a:blip r:embed="rId3">
-            <a:extLst>
-              <a:ext uri="{28A0092B-C50C-407E-A947-70E740481C1C}">
-                <a14:useLocalDpi xmlns:a14="http://schemas.microsoft.com/office/drawing/2010/main" val="0"/>
-              </a:ext>
-            </a:extLst>
-          </a:blip>
-          <a:srcRect/>
-          <a:stretch>
-            <a:fillRect/>
-          </a:stretch>
-        </p:blipFill>
-        <p:spPr bwMode="auto">
-          <a:xfrm>
-            <a:off x="619341" y="1709737"/>
-            <a:ext cx="10953318" cy="4462463"/>
-          </a:xfrm>
-          <a:prstGeom prst="rect">
-            <a:avLst/>
-          </a:prstGeom>
-          <a:noFill/>
-          <a:extLst>
-            <a:ext uri="{909E8E84-426E-40DD-AFC4-6F175D3DCCD1}">
-              <a14:hiddenFill xmlns:a14="http://schemas.microsoft.com/office/drawing/2010/main">
-                <a:solidFill>
-                  <a:srgbClr val="FFFFFF"/>
-                </a:solidFill>
-              </a14:hiddenFill>
-            </a:ext>
-          </a:extLst>
-        </p:spPr>
-      </p:pic>
-    </p:spTree>
-    <p:extLst>
-      <p:ext uri="{BB962C8B-B14F-4D97-AF65-F5344CB8AC3E}">
-        <p14:creationId xmlns:p14="http://schemas.microsoft.com/office/powerpoint/2010/main" val="809557882"/>
-      </p:ext>
-    </p:extLst>
-  </p:cSld>
-  <p:clrMapOvr>
-    <a:masterClrMapping/>
-  </p:clrMapOvr>
-  <mc:AlternateContent xmlns:mc="http://schemas.openxmlformats.org/markup-compatibility/2006" xmlns:p14="http://schemas.microsoft.com/office/powerpoint/2010/main">
-    <mc:Choice Requires="p14">
-      <p:transition p14:dur="10"/>
-    </mc:Choice>
-    <mc:Fallback xmlns="">
-      <p:transition/>
-    </mc:Fallback>
-  </mc:AlternateContent>
-</p:sld>
-</file>
-
-<file path=ppt/slides/slide4.xml><?xml version="1.0" encoding="utf-8"?>
-<p:sld xmlns:a="http://schemas.openxmlformats.org/drawingml/2006/main" xmlns:r="http://schemas.openxmlformats.org/officeDocument/2006/relationships" xmlns:p="http://schemas.openxmlformats.org/presentationml/2006/main">
-  <p:cSld>
-    <p:spTree>
-      <p:nvGrpSpPr>
-        <p:cNvPr id="1" name=""/>
-        <p:cNvGrpSpPr/>
-        <p:nvPr/>
-      </p:nvGrpSpPr>
-      <p:grpSpPr>
-        <a:xfrm>
-          <a:off x="0" y="0"/>
-          <a:ext cx="0" cy="0"/>
-          <a:chOff x="0" y="0"/>
-          <a:chExt cx="0" cy="0"/>
-        </a:xfrm>
-      </p:grpSpPr>
-      <p:sp>
-        <p:nvSpPr>
-          <p:cNvPr id="4" name="Titre 3"/>
-          <p:cNvSpPr>
-            <a:spLocks noGrp="1"/>
-          </p:cNvSpPr>
-          <p:nvPr>
-            <p:ph type="title"/>
-          </p:nvPr>
-        </p:nvSpPr>
-        <p:spPr>
-          <a:xfrm>
-            <a:off x="521207" y="448056"/>
-            <a:ext cx="7783344" cy="640080"/>
-          </a:xfrm>
-        </p:spPr>
-        <p:txBody>
-          <a:bodyPr rtlCol="0">
-            <a:normAutofit/>
-          </a:bodyPr>
-          <a:lstStyle/>
-          <a:p>
-            <a:r>
-              <a:rPr lang="fr-FR" noProof="1">
-                <a:latin typeface="Segoe UI Light" panose="020B0502040204020203" pitchFamily="34" charset="0"/>
-                <a:cs typeface="Segoe UI Light" panose="020B0502040204020203" pitchFamily="34" charset="0"/>
-              </a:rPr>
-              <a:t>Notre modèle de démo !</a:t>
-            </a:r>
-            <a:endParaRPr lang="fr-FR" sz="1200" noProof="1">
-              <a:latin typeface="Segoe UI Light" panose="020B0502040204020203" pitchFamily="34" charset="0"/>
-              <a:cs typeface="Segoe UI Light" panose="020B0502040204020203" pitchFamily="34" charset="0"/>
-            </a:endParaRPr>
-          </a:p>
-        </p:txBody>
-      </p:sp>
-      <p:pic>
-        <p:nvPicPr>
-          <p:cNvPr id="6" name="Image 5">
-            <a:extLst>
-              <a:ext uri="{FF2B5EF4-FFF2-40B4-BE49-F238E27FC236}">
-                <a16:creationId xmlns:a16="http://schemas.microsoft.com/office/drawing/2014/main" id="{959EA93D-BB12-4074-B5D6-E31A2CB72C36}"/>
-              </a:ext>
-            </a:extLst>
-          </p:cNvPr>
-          <p:cNvPicPr>
-            <a:picLocks noChangeAspect="1"/>
-          </p:cNvPicPr>
-          <p:nvPr/>
-        </p:nvPicPr>
-        <p:blipFill>
-          <a:blip r:embed="rId3"/>
-          <a:stretch>
-            <a:fillRect/>
-          </a:stretch>
-        </p:blipFill>
-        <p:spPr>
-          <a:xfrm>
-            <a:off x="521207" y="1221174"/>
-            <a:ext cx="11105798" cy="5593505"/>
-          </a:xfrm>
-          <a:prstGeom prst="rect">
-            <a:avLst/>
-          </a:prstGeom>
-        </p:spPr>
-      </p:pic>
-    </p:spTree>
-    <p:extLst>
-      <p:ext uri="{BB962C8B-B14F-4D97-AF65-F5344CB8AC3E}">
-        <p14:creationId xmlns:p14="http://schemas.microsoft.com/office/powerpoint/2010/main" val="4039801808"/>
-      </p:ext>
-    </p:extLst>
-  </p:cSld>
-  <p:clrMapOvr>
-    <a:masterClrMapping/>
-  </p:clrMapOvr>
-  <mc:AlternateContent xmlns:mc="http://schemas.openxmlformats.org/markup-compatibility/2006" xmlns:p14="http://schemas.microsoft.com/office/powerpoint/2010/main">
-    <mc:Choice Requires="p14">
-      <p:transition p14:dur="10"/>
-    </mc:Choice>
-    <mc:Fallback xmlns="">
-      <p:transition/>
-    </mc:Fallback>
-  </mc:AlternateContent>
-</p:sld>
-</file>
-
 <file path=ppt/slides/slide5.xml><?xml version="1.0" encoding="utf-8"?>
 <p:sld xmlns:a="http://schemas.openxmlformats.org/drawingml/2006/main" xmlns:r="http://schemas.openxmlformats.org/officeDocument/2006/relationships" xmlns:p="http://schemas.openxmlformats.org/presentationml/2006/main">
   <p:cSld>
@@ -32158,7 +33281,7 @@
                 <a:latin typeface="Segoe UI Light" panose="020B0502040204020203" pitchFamily="34" charset="0"/>
                 <a:cs typeface="Segoe UI Light" panose="020B0502040204020203" pitchFamily="34" charset="0"/>
               </a:rPr>
-              <a:t>JSON / 1 « grappe » complète</a:t>
+              <a:t>Notre modèle de démo : MCD</a:t>
             </a:r>
             <a:endParaRPr lang="fr-FR" sz="1200" noProof="1">
               <a:latin typeface="Segoe UI Light" panose="020B0502040204020203" pitchFamily="34" charset="0"/>
@@ -32167,557 +33290,40 @@
           </a:p>
         </p:txBody>
       </p:sp>
-      <p:sp>
-        <p:nvSpPr>
-          <p:cNvPr id="5" name="ZoneTexte 4">
+      <p:pic>
+        <p:nvPicPr>
+          <p:cNvPr id="6" name="Image 5">
             <a:extLst>
               <a:ext uri="{FF2B5EF4-FFF2-40B4-BE49-F238E27FC236}">
-                <a16:creationId xmlns:a16="http://schemas.microsoft.com/office/drawing/2014/main" id="{503DA2E8-7087-4648-A0E3-49196BB601E5}"/>
+                <a16:creationId xmlns:a16="http://schemas.microsoft.com/office/drawing/2014/main" id="{959EA93D-BB12-4074-B5D6-E31A2CB72C36}"/>
               </a:ext>
             </a:extLst>
           </p:cNvPr>
-          <p:cNvSpPr txBox="1"/>
+          <p:cNvPicPr>
+            <a:picLocks noChangeAspect="1"/>
+          </p:cNvPicPr>
           <p:nvPr/>
-        </p:nvSpPr>
+        </p:nvPicPr>
+        <p:blipFill>
+          <a:blip r:embed="rId3"/>
+          <a:stretch>
+            <a:fillRect/>
+          </a:stretch>
+        </p:blipFill>
         <p:spPr>
           <a:xfrm>
-            <a:off x="521208" y="1221760"/>
-            <a:ext cx="3259338" cy="5447645"/>
+            <a:off x="521207" y="1221174"/>
+            <a:ext cx="11105798" cy="5593505"/>
           </a:xfrm>
           <a:prstGeom prst="rect">
             <a:avLst/>
           </a:prstGeom>
-          <a:noFill/>
         </p:spPr>
-        <p:txBody>
-          <a:bodyPr wrap="square">
-            <a:spAutoFit/>
-          </a:bodyPr>
-          <a:lstStyle/>
-          <a:p>
-            <a:r>
-              <a:rPr lang="fr-FR" sz="1200" b="1" dirty="0">
-                <a:solidFill>
-                  <a:srgbClr val="0070C0"/>
-                </a:solidFill>
-              </a:rPr>
-              <a:t> </a:t>
-            </a:r>
-            <a:r>
-              <a:rPr lang="fr-FR" sz="1200" b="1" dirty="0"/>
-              <a:t>{</a:t>
-            </a:r>
-          </a:p>
-          <a:p>
-            <a:r>
-              <a:rPr lang="fr-FR" sz="1200" b="1" dirty="0"/>
-              <a:t>    "id": 1,</a:t>
-            </a:r>
-          </a:p>
-          <a:p>
-            <a:r>
-              <a:rPr lang="fr-FR" sz="1200" b="1" dirty="0"/>
-              <a:t>    "location": "Location0",</a:t>
-            </a:r>
-          </a:p>
-          <a:p>
-            <a:r>
-              <a:rPr lang="fr-FR" sz="1200" b="1" dirty="0"/>
-              <a:t>    "</a:t>
-            </a:r>
-            <a:r>
-              <a:rPr lang="fr-FR" sz="1200" b="1" dirty="0" err="1"/>
-              <a:t>name</a:t>
-            </a:r>
-            <a:r>
-              <a:rPr lang="fr-FR" sz="1200" b="1" dirty="0"/>
-              <a:t>": "School0",</a:t>
-            </a:r>
-          </a:p>
-          <a:p>
-            <a:r>
-              <a:rPr lang="fr-FR" sz="1200" b="1" dirty="0">
-                <a:solidFill>
-                  <a:schemeClr val="accent5">
-                    <a:lumMod val="75000"/>
-                  </a:schemeClr>
-                </a:solidFill>
-              </a:rPr>
-              <a:t>    "</a:t>
-            </a:r>
-            <a:r>
-              <a:rPr lang="fr-FR" sz="1200" b="1" dirty="0" err="1">
-                <a:solidFill>
-                  <a:schemeClr val="accent5">
-                    <a:lumMod val="75000"/>
-                  </a:schemeClr>
-                </a:solidFill>
-              </a:rPr>
-              <a:t>director</a:t>
-            </a:r>
-            <a:r>
-              <a:rPr lang="fr-FR" sz="1200" b="1" dirty="0">
-                <a:solidFill>
-                  <a:schemeClr val="accent5">
-                    <a:lumMod val="75000"/>
-                  </a:schemeClr>
-                </a:solidFill>
-              </a:rPr>
-              <a:t>": {</a:t>
-            </a:r>
-          </a:p>
-          <a:p>
-            <a:r>
-              <a:rPr lang="fr-FR" sz="1200" b="1" dirty="0">
-                <a:solidFill>
-                  <a:schemeClr val="accent5">
-                    <a:lumMod val="75000"/>
-                  </a:schemeClr>
-                </a:solidFill>
-              </a:rPr>
-              <a:t>      "id": 1,</a:t>
-            </a:r>
-          </a:p>
-          <a:p>
-            <a:r>
-              <a:rPr lang="fr-FR" sz="1200" b="1" dirty="0">
-                <a:solidFill>
-                  <a:schemeClr val="accent5">
-                    <a:lumMod val="75000"/>
-                  </a:schemeClr>
-                </a:solidFill>
-              </a:rPr>
-              <a:t>      "</a:t>
-            </a:r>
-            <a:r>
-              <a:rPr lang="fr-FR" sz="1200" b="1" dirty="0" err="1">
-                <a:solidFill>
-                  <a:schemeClr val="accent5">
-                    <a:lumMod val="75000"/>
-                  </a:schemeClr>
-                </a:solidFill>
-              </a:rPr>
-              <a:t>name</a:t>
-            </a:r>
-            <a:r>
-              <a:rPr lang="fr-FR" sz="1200" b="1" dirty="0">
-                <a:solidFill>
-                  <a:schemeClr val="accent5">
-                    <a:lumMod val="75000"/>
-                  </a:schemeClr>
-                </a:solidFill>
-              </a:rPr>
-              <a:t>": "Director0"</a:t>
-            </a:r>
-          </a:p>
-          <a:p>
-            <a:r>
-              <a:rPr lang="fr-FR" sz="1200" b="1" dirty="0">
-                <a:solidFill>
-                  <a:schemeClr val="accent5">
-                    <a:lumMod val="75000"/>
-                  </a:schemeClr>
-                </a:solidFill>
-              </a:rPr>
-              <a:t>    },</a:t>
-            </a:r>
-          </a:p>
-          <a:p>
-            <a:r>
-              <a:rPr lang="fr-FR" sz="1200" b="1" dirty="0">
-                <a:solidFill>
-                  <a:srgbClr val="0070C0"/>
-                </a:solidFill>
-              </a:rPr>
-              <a:t>    </a:t>
-            </a:r>
-            <a:r>
-              <a:rPr lang="fr-FR" sz="1200" b="1" dirty="0">
-                <a:solidFill>
-                  <a:schemeClr val="accent6">
-                    <a:lumMod val="75000"/>
-                  </a:schemeClr>
-                </a:solidFill>
-              </a:rPr>
-              <a:t>"</a:t>
-            </a:r>
-            <a:r>
-              <a:rPr lang="fr-FR" sz="1200" b="1" dirty="0" err="1">
-                <a:solidFill>
-                  <a:schemeClr val="accent6">
-                    <a:lumMod val="75000"/>
-                  </a:schemeClr>
-                </a:solidFill>
-              </a:rPr>
-              <a:t>students</a:t>
-            </a:r>
-            <a:r>
-              <a:rPr lang="fr-FR" sz="1200" b="1" dirty="0">
-                <a:solidFill>
-                  <a:schemeClr val="accent6">
-                    <a:lumMod val="75000"/>
-                  </a:schemeClr>
-                </a:solidFill>
-              </a:rPr>
-              <a:t>": [</a:t>
-            </a:r>
-          </a:p>
-          <a:p>
-            <a:r>
-              <a:rPr lang="fr-FR" sz="1200" b="1" dirty="0">
-                <a:solidFill>
-                  <a:schemeClr val="accent6">
-                    <a:lumMod val="75000"/>
-                  </a:schemeClr>
-                </a:solidFill>
-              </a:rPr>
-              <a:t>      {</a:t>
-            </a:r>
-          </a:p>
-          <a:p>
-            <a:r>
-              <a:rPr lang="fr-FR" sz="1200" b="1" dirty="0">
-                <a:solidFill>
-                  <a:schemeClr val="accent6">
-                    <a:lumMod val="75000"/>
-                  </a:schemeClr>
-                </a:solidFill>
-              </a:rPr>
-              <a:t>        "id": 1,</a:t>
-            </a:r>
-          </a:p>
-          <a:p>
-            <a:r>
-              <a:rPr lang="fr-FR" sz="1200" b="1" dirty="0">
-                <a:solidFill>
-                  <a:schemeClr val="accent6">
-                    <a:lumMod val="75000"/>
-                  </a:schemeClr>
-                </a:solidFill>
-              </a:rPr>
-              <a:t>        "</a:t>
-            </a:r>
-            <a:r>
-              <a:rPr lang="fr-FR" sz="1200" b="1" dirty="0" err="1">
-                <a:solidFill>
-                  <a:schemeClr val="accent6">
-                    <a:lumMod val="75000"/>
-                  </a:schemeClr>
-                </a:solidFill>
-              </a:rPr>
-              <a:t>name</a:t>
-            </a:r>
-            <a:r>
-              <a:rPr lang="fr-FR" sz="1200" b="1" dirty="0">
-                <a:solidFill>
-                  <a:schemeClr val="accent6">
-                    <a:lumMod val="75000"/>
-                  </a:schemeClr>
-                </a:solidFill>
-              </a:rPr>
-              <a:t>": "StudentB0"</a:t>
-            </a:r>
-          </a:p>
-          <a:p>
-            <a:r>
-              <a:rPr lang="fr-FR" sz="1200" b="1" dirty="0">
-                <a:solidFill>
-                  <a:schemeClr val="accent6">
-                    <a:lumMod val="75000"/>
-                  </a:schemeClr>
-                </a:solidFill>
-              </a:rPr>
-              <a:t>      },</a:t>
-            </a:r>
-          </a:p>
-          <a:p>
-            <a:r>
-              <a:rPr lang="fr-FR" sz="1200" b="1" dirty="0">
-                <a:solidFill>
-                  <a:schemeClr val="accent6">
-                    <a:lumMod val="75000"/>
-                  </a:schemeClr>
-                </a:solidFill>
-              </a:rPr>
-              <a:t>      {</a:t>
-            </a:r>
-          </a:p>
-          <a:p>
-            <a:r>
-              <a:rPr lang="fr-FR" sz="1200" b="1" dirty="0">
-                <a:solidFill>
-                  <a:schemeClr val="accent6">
-                    <a:lumMod val="75000"/>
-                  </a:schemeClr>
-                </a:solidFill>
-              </a:rPr>
-              <a:t>        "id": 2,</a:t>
-            </a:r>
-          </a:p>
-          <a:p>
-            <a:r>
-              <a:rPr lang="fr-FR" sz="1200" b="1" dirty="0">
-                <a:solidFill>
-                  <a:schemeClr val="accent6">
-                    <a:lumMod val="75000"/>
-                  </a:schemeClr>
-                </a:solidFill>
-              </a:rPr>
-              <a:t>        "</a:t>
-            </a:r>
-            <a:r>
-              <a:rPr lang="fr-FR" sz="1200" b="1" dirty="0" err="1">
-                <a:solidFill>
-                  <a:schemeClr val="accent6">
-                    <a:lumMod val="75000"/>
-                  </a:schemeClr>
-                </a:solidFill>
-              </a:rPr>
-              <a:t>name</a:t>
-            </a:r>
-            <a:r>
-              <a:rPr lang="fr-FR" sz="1200" b="1" dirty="0">
-                <a:solidFill>
-                  <a:schemeClr val="accent6">
-                    <a:lumMod val="75000"/>
-                  </a:schemeClr>
-                </a:solidFill>
-              </a:rPr>
-              <a:t>": "StudentA0"</a:t>
-            </a:r>
-          </a:p>
-          <a:p>
-            <a:r>
-              <a:rPr lang="fr-FR" sz="1200" b="1" dirty="0">
-                <a:solidFill>
-                  <a:schemeClr val="accent6">
-                    <a:lumMod val="75000"/>
-                  </a:schemeClr>
-                </a:solidFill>
-              </a:rPr>
-              <a:t>      }</a:t>
-            </a:r>
-          </a:p>
-          <a:p>
-            <a:r>
-              <a:rPr lang="fr-FR" sz="1200" b="1" dirty="0">
-                <a:solidFill>
-                  <a:schemeClr val="accent6">
-                    <a:lumMod val="75000"/>
-                  </a:schemeClr>
-                </a:solidFill>
-              </a:rPr>
-              <a:t>    ]</a:t>
-            </a:r>
-            <a:r>
-              <a:rPr lang="fr-FR" sz="1200" b="1" dirty="0">
-                <a:solidFill>
-                  <a:srgbClr val="0070C0"/>
-                </a:solidFill>
-              </a:rPr>
-              <a:t>,</a:t>
-            </a:r>
-          </a:p>
-          <a:p>
-            <a:r>
-              <a:rPr lang="fr-FR" sz="1200" b="1" dirty="0">
-                <a:solidFill>
-                  <a:srgbClr val="0070C0"/>
-                </a:solidFill>
-              </a:rPr>
-              <a:t>    </a:t>
-            </a:r>
-            <a:r>
-              <a:rPr lang="fr-FR" sz="1200" b="1" dirty="0">
-                <a:solidFill>
-                  <a:schemeClr val="accent2">
-                    <a:lumMod val="75000"/>
-                  </a:schemeClr>
-                </a:solidFill>
-              </a:rPr>
-              <a:t>"</a:t>
-            </a:r>
-            <a:r>
-              <a:rPr lang="fr-FR" sz="1200" b="1" dirty="0" err="1">
-                <a:solidFill>
-                  <a:schemeClr val="accent2">
-                    <a:lumMod val="75000"/>
-                  </a:schemeClr>
-                </a:solidFill>
-              </a:rPr>
-              <a:t>teachers</a:t>
-            </a:r>
-            <a:r>
-              <a:rPr lang="fr-FR" sz="1200" b="1" dirty="0">
-                <a:solidFill>
-                  <a:schemeClr val="accent2">
-                    <a:lumMod val="75000"/>
-                  </a:schemeClr>
-                </a:solidFill>
-              </a:rPr>
-              <a:t>": [</a:t>
-            </a:r>
-          </a:p>
-          <a:p>
-            <a:r>
-              <a:rPr lang="fr-FR" sz="1200" b="1" dirty="0">
-                <a:solidFill>
-                  <a:schemeClr val="accent2">
-                    <a:lumMod val="75000"/>
-                  </a:schemeClr>
-                </a:solidFill>
-              </a:rPr>
-              <a:t>      {</a:t>
-            </a:r>
-          </a:p>
-          <a:p>
-            <a:r>
-              <a:rPr lang="fr-FR" sz="1200" b="1" dirty="0">
-                <a:solidFill>
-                  <a:schemeClr val="accent2">
-                    <a:lumMod val="75000"/>
-                  </a:schemeClr>
-                </a:solidFill>
-              </a:rPr>
-              <a:t>        "id": 1,</a:t>
-            </a:r>
-          </a:p>
-          <a:p>
-            <a:r>
-              <a:rPr lang="fr-FR" sz="1200" b="1" dirty="0">
-                <a:solidFill>
-                  <a:schemeClr val="accent2">
-                    <a:lumMod val="75000"/>
-                  </a:schemeClr>
-                </a:solidFill>
-              </a:rPr>
-              <a:t>        "</a:t>
-            </a:r>
-            <a:r>
-              <a:rPr lang="fr-FR" sz="1200" b="1" dirty="0" err="1">
-                <a:solidFill>
-                  <a:schemeClr val="accent2">
-                    <a:lumMod val="75000"/>
-                  </a:schemeClr>
-                </a:solidFill>
-              </a:rPr>
-              <a:t>name</a:t>
-            </a:r>
-            <a:r>
-              <a:rPr lang="fr-FR" sz="1200" b="1" dirty="0">
-                <a:solidFill>
-                  <a:schemeClr val="accent2">
-                    <a:lumMod val="75000"/>
-                  </a:schemeClr>
-                </a:solidFill>
-              </a:rPr>
-              <a:t>": "TeacherA0"</a:t>
-            </a:r>
-          </a:p>
-          <a:p>
-            <a:r>
-              <a:rPr lang="fr-FR" sz="1200" b="1" dirty="0">
-                <a:solidFill>
-                  <a:schemeClr val="accent2">
-                    <a:lumMod val="75000"/>
-                  </a:schemeClr>
-                </a:solidFill>
-              </a:rPr>
-              <a:t>      },</a:t>
-            </a:r>
-          </a:p>
-          <a:p>
-            <a:r>
-              <a:rPr lang="fr-FR" sz="1200" b="1" dirty="0">
-                <a:solidFill>
-                  <a:schemeClr val="accent2">
-                    <a:lumMod val="75000"/>
-                  </a:schemeClr>
-                </a:solidFill>
-              </a:rPr>
-              <a:t>      {</a:t>
-            </a:r>
-          </a:p>
-          <a:p>
-            <a:r>
-              <a:rPr lang="fr-FR" sz="1200" b="1" dirty="0">
-                <a:solidFill>
-                  <a:schemeClr val="accent2">
-                    <a:lumMod val="75000"/>
-                  </a:schemeClr>
-                </a:solidFill>
-              </a:rPr>
-              <a:t>        "id": 2,</a:t>
-            </a:r>
-          </a:p>
-          <a:p>
-            <a:r>
-              <a:rPr lang="fr-FR" sz="1200" b="1" dirty="0">
-                <a:solidFill>
-                  <a:schemeClr val="accent2">
-                    <a:lumMod val="75000"/>
-                  </a:schemeClr>
-                </a:solidFill>
-              </a:rPr>
-              <a:t>        "</a:t>
-            </a:r>
-            <a:r>
-              <a:rPr lang="fr-FR" sz="1200" b="1" dirty="0" err="1">
-                <a:solidFill>
-                  <a:schemeClr val="accent2">
-                    <a:lumMod val="75000"/>
-                  </a:schemeClr>
-                </a:solidFill>
-              </a:rPr>
-              <a:t>name</a:t>
-            </a:r>
-            <a:r>
-              <a:rPr lang="fr-FR" sz="1200" b="1" dirty="0">
-                <a:solidFill>
-                  <a:schemeClr val="accent2">
-                    <a:lumMod val="75000"/>
-                  </a:schemeClr>
-                </a:solidFill>
-              </a:rPr>
-              <a:t>": "TeacherB0"</a:t>
-            </a:r>
-          </a:p>
-          <a:p>
-            <a:r>
-              <a:rPr lang="fr-FR" sz="1200" b="1" dirty="0">
-                <a:solidFill>
-                  <a:schemeClr val="accent2">
-                    <a:lumMod val="75000"/>
-                  </a:schemeClr>
-                </a:solidFill>
-              </a:rPr>
-              <a:t>      }</a:t>
-            </a:r>
-          </a:p>
-          <a:p>
-            <a:r>
-              <a:rPr lang="fr-FR" sz="1200" b="1" dirty="0">
-                <a:solidFill>
-                  <a:schemeClr val="accent2">
-                    <a:lumMod val="75000"/>
-                  </a:schemeClr>
-                </a:solidFill>
-              </a:rPr>
-              <a:t>    ]</a:t>
-            </a:r>
-          </a:p>
-          <a:p>
-            <a:r>
-              <a:rPr lang="fr-FR" sz="1200" b="1" dirty="0"/>
-              <a:t>  },</a:t>
-            </a:r>
-          </a:p>
-        </p:txBody>
-      </p:sp>
+      </p:pic>
     </p:spTree>
     <p:extLst>
       <p:ext uri="{BB962C8B-B14F-4D97-AF65-F5344CB8AC3E}">
-        <p14:creationId xmlns:p14="http://schemas.microsoft.com/office/powerpoint/2010/main" val="741295722"/>
+        <p14:creationId xmlns:p14="http://schemas.microsoft.com/office/powerpoint/2010/main" val="4039801808"/>
       </p:ext>
     </p:extLst>
   </p:cSld>
@@ -32774,27 +33380,36 @@
           </a:bodyPr>
           <a:lstStyle/>
           <a:p>
-            <a:pPr rtl="0"/>
             <a:r>
               <a:rPr lang="fr-FR" noProof="1">
                 <a:latin typeface="Segoe UI Light" panose="020B0502040204020203" pitchFamily="34" charset="0"/>
                 <a:cs typeface="Segoe UI Light" panose="020B0502040204020203" pitchFamily="34" charset="0"/>
               </a:rPr>
-              <a:t>One to One / Many to One</a:t>
-            </a:r>
+              <a:t>Sérialisation JSON / « grappe » complète</a:t>
+            </a:r>
+            <a:endParaRPr lang="fr-FR" sz="1200" noProof="1">
+              <a:latin typeface="Segoe UI Light" panose="020B0502040204020203" pitchFamily="34" charset="0"/>
+              <a:cs typeface="Segoe UI Light" panose="020B0502040204020203" pitchFamily="34" charset="0"/>
+            </a:endParaRPr>
           </a:p>
         </p:txBody>
       </p:sp>
       <p:sp>
         <p:nvSpPr>
-          <p:cNvPr id="2" name="ZoneTexte 1"/>
+          <p:cNvPr id="5" name="ZoneTexte 4">
+            <a:extLst>
+              <a:ext uri="{FF2B5EF4-FFF2-40B4-BE49-F238E27FC236}">
+                <a16:creationId xmlns:a16="http://schemas.microsoft.com/office/drawing/2014/main" id="{503DA2E8-7087-4648-A0E3-49196BB601E5}"/>
+              </a:ext>
+            </a:extLst>
+          </p:cNvPr>
           <p:cNvSpPr txBox="1"/>
           <p:nvPr/>
         </p:nvSpPr>
         <p:spPr>
           <a:xfrm>
-            <a:off x="521207" y="1228267"/>
-            <a:ext cx="10961915" cy="369332"/>
+            <a:off x="521208" y="1221760"/>
+            <a:ext cx="3259338" cy="5447645"/>
           </a:xfrm>
           <a:prstGeom prst="rect">
             <a:avLst/>
@@ -32802,18 +33417,597 @@
           <a:noFill/>
         </p:spPr>
         <p:txBody>
-          <a:bodyPr wrap="square" rtlCol="0">
+          <a:bodyPr wrap="square">
             <a:spAutoFit/>
           </a:bodyPr>
           <a:lstStyle/>
           <a:p>
-            <a:pPr marL="285750" indent="-285750">
-              <a:buFont typeface="Wingdings" panose="05000000000000000000" pitchFamily="2" charset="2"/>
-              <a:buChar char="Ø"/>
-            </a:pPr>
-            <a:r>
-              <a:rPr lang="fr-FR" dirty="0"/>
-              <a:t>Pratique si on doit pointer vers une table de référence pour 1 liaison</a:t>
+            <a:r>
+              <a:rPr lang="fr-FR" sz="1200" b="1" dirty="0">
+                <a:solidFill>
+                  <a:srgbClr val="0070C0"/>
+                </a:solidFill>
+              </a:rPr>
+              <a:t> </a:t>
+            </a:r>
+            <a:r>
+              <a:rPr lang="fr-FR" sz="1200" b="1" dirty="0"/>
+              <a:t>{</a:t>
+            </a:r>
+          </a:p>
+          <a:p>
+            <a:r>
+              <a:rPr lang="fr-FR" sz="1200" b="1" dirty="0"/>
+              <a:t>    "id": 1,</a:t>
+            </a:r>
+          </a:p>
+          <a:p>
+            <a:r>
+              <a:rPr lang="fr-FR" sz="1200" b="1" dirty="0"/>
+              <a:t>    "location": "Location0",</a:t>
+            </a:r>
+          </a:p>
+          <a:p>
+            <a:r>
+              <a:rPr lang="fr-FR" sz="1200" b="1" dirty="0"/>
+              <a:t>    "</a:t>
+            </a:r>
+            <a:r>
+              <a:rPr lang="fr-FR" sz="1200" b="1" dirty="0" err="1"/>
+              <a:t>name</a:t>
+            </a:r>
+            <a:r>
+              <a:rPr lang="fr-FR" sz="1200" b="1" dirty="0"/>
+              <a:t>": "School0",</a:t>
+            </a:r>
+          </a:p>
+          <a:p>
+            <a:r>
+              <a:rPr lang="fr-FR" sz="1200" b="1" dirty="0">
+                <a:solidFill>
+                  <a:schemeClr val="accent5">
+                    <a:lumMod val="75000"/>
+                  </a:schemeClr>
+                </a:solidFill>
+              </a:rPr>
+              <a:t>    "</a:t>
+            </a:r>
+            <a:r>
+              <a:rPr lang="fr-FR" sz="1200" b="1" dirty="0" err="1">
+                <a:solidFill>
+                  <a:schemeClr val="accent5">
+                    <a:lumMod val="75000"/>
+                  </a:schemeClr>
+                </a:solidFill>
+              </a:rPr>
+              <a:t>director</a:t>
+            </a:r>
+            <a:r>
+              <a:rPr lang="fr-FR" sz="1200" b="1" dirty="0">
+                <a:solidFill>
+                  <a:schemeClr val="accent5">
+                    <a:lumMod val="75000"/>
+                  </a:schemeClr>
+                </a:solidFill>
+              </a:rPr>
+              <a:t>": {</a:t>
+            </a:r>
+          </a:p>
+          <a:p>
+            <a:r>
+              <a:rPr lang="fr-FR" sz="1200" b="1" dirty="0">
+                <a:solidFill>
+                  <a:schemeClr val="accent5">
+                    <a:lumMod val="75000"/>
+                  </a:schemeClr>
+                </a:solidFill>
+              </a:rPr>
+              <a:t>      "id": 1,</a:t>
+            </a:r>
+          </a:p>
+          <a:p>
+            <a:r>
+              <a:rPr lang="fr-FR" sz="1200" b="1" dirty="0">
+                <a:solidFill>
+                  <a:schemeClr val="accent5">
+                    <a:lumMod val="75000"/>
+                  </a:schemeClr>
+                </a:solidFill>
+              </a:rPr>
+              <a:t>      "</a:t>
+            </a:r>
+            <a:r>
+              <a:rPr lang="fr-FR" sz="1200" b="1" dirty="0" err="1">
+                <a:solidFill>
+                  <a:schemeClr val="accent5">
+                    <a:lumMod val="75000"/>
+                  </a:schemeClr>
+                </a:solidFill>
+              </a:rPr>
+              <a:t>name</a:t>
+            </a:r>
+            <a:r>
+              <a:rPr lang="fr-FR" sz="1200" b="1" dirty="0">
+                <a:solidFill>
+                  <a:schemeClr val="accent5">
+                    <a:lumMod val="75000"/>
+                  </a:schemeClr>
+                </a:solidFill>
+              </a:rPr>
+              <a:t>": "Director0"</a:t>
+            </a:r>
+          </a:p>
+          <a:p>
+            <a:r>
+              <a:rPr lang="fr-FR" sz="1200" b="1" dirty="0">
+                <a:solidFill>
+                  <a:schemeClr val="accent5">
+                    <a:lumMod val="75000"/>
+                  </a:schemeClr>
+                </a:solidFill>
+              </a:rPr>
+              <a:t>    },</a:t>
+            </a:r>
+          </a:p>
+          <a:p>
+            <a:r>
+              <a:rPr lang="fr-FR" sz="1200" b="1" dirty="0">
+                <a:solidFill>
+                  <a:srgbClr val="0070C0"/>
+                </a:solidFill>
+              </a:rPr>
+              <a:t>    </a:t>
+            </a:r>
+            <a:r>
+              <a:rPr lang="fr-FR" sz="1200" b="1" dirty="0">
+                <a:solidFill>
+                  <a:schemeClr val="accent6">
+                    <a:lumMod val="75000"/>
+                  </a:schemeClr>
+                </a:solidFill>
+              </a:rPr>
+              <a:t>"</a:t>
+            </a:r>
+            <a:r>
+              <a:rPr lang="fr-FR" sz="1200" b="1" dirty="0" err="1">
+                <a:solidFill>
+                  <a:schemeClr val="accent6">
+                    <a:lumMod val="75000"/>
+                  </a:schemeClr>
+                </a:solidFill>
+              </a:rPr>
+              <a:t>students</a:t>
+            </a:r>
+            <a:r>
+              <a:rPr lang="fr-FR" sz="1200" b="1" dirty="0">
+                <a:solidFill>
+                  <a:schemeClr val="accent6">
+                    <a:lumMod val="75000"/>
+                  </a:schemeClr>
+                </a:solidFill>
+              </a:rPr>
+              <a:t>": [</a:t>
+            </a:r>
+          </a:p>
+          <a:p>
+            <a:r>
+              <a:rPr lang="fr-FR" sz="1200" b="1" dirty="0">
+                <a:solidFill>
+                  <a:schemeClr val="accent6">
+                    <a:lumMod val="75000"/>
+                  </a:schemeClr>
+                </a:solidFill>
+              </a:rPr>
+              <a:t>      {</a:t>
+            </a:r>
+          </a:p>
+          <a:p>
+            <a:r>
+              <a:rPr lang="fr-FR" sz="1200" b="1" dirty="0">
+                <a:solidFill>
+                  <a:schemeClr val="accent6">
+                    <a:lumMod val="75000"/>
+                  </a:schemeClr>
+                </a:solidFill>
+              </a:rPr>
+              <a:t>        "id": 1,</a:t>
+            </a:r>
+          </a:p>
+          <a:p>
+            <a:r>
+              <a:rPr lang="fr-FR" sz="1200" b="1" dirty="0">
+                <a:solidFill>
+                  <a:schemeClr val="accent6">
+                    <a:lumMod val="75000"/>
+                  </a:schemeClr>
+                </a:solidFill>
+              </a:rPr>
+              <a:t>        "</a:t>
+            </a:r>
+            <a:r>
+              <a:rPr lang="fr-FR" sz="1200" b="1" dirty="0" err="1">
+                <a:solidFill>
+                  <a:schemeClr val="accent6">
+                    <a:lumMod val="75000"/>
+                  </a:schemeClr>
+                </a:solidFill>
+              </a:rPr>
+              <a:t>name</a:t>
+            </a:r>
+            <a:r>
+              <a:rPr lang="fr-FR" sz="1200" b="1" dirty="0">
+                <a:solidFill>
+                  <a:schemeClr val="accent6">
+                    <a:lumMod val="75000"/>
+                  </a:schemeClr>
+                </a:solidFill>
+              </a:rPr>
+              <a:t>": "StudentB0"</a:t>
+            </a:r>
+          </a:p>
+          <a:p>
+            <a:r>
+              <a:rPr lang="fr-FR" sz="1200" b="1" dirty="0">
+                <a:solidFill>
+                  <a:schemeClr val="accent6">
+                    <a:lumMod val="75000"/>
+                  </a:schemeClr>
+                </a:solidFill>
+              </a:rPr>
+              <a:t>      },</a:t>
+            </a:r>
+          </a:p>
+          <a:p>
+            <a:r>
+              <a:rPr lang="fr-FR" sz="1200" b="1" dirty="0">
+                <a:solidFill>
+                  <a:schemeClr val="accent6">
+                    <a:lumMod val="75000"/>
+                  </a:schemeClr>
+                </a:solidFill>
+              </a:rPr>
+              <a:t>      {</a:t>
+            </a:r>
+          </a:p>
+          <a:p>
+            <a:r>
+              <a:rPr lang="fr-FR" sz="1200" b="1" dirty="0">
+                <a:solidFill>
+                  <a:schemeClr val="accent6">
+                    <a:lumMod val="75000"/>
+                  </a:schemeClr>
+                </a:solidFill>
+              </a:rPr>
+              <a:t>        "id": 2,</a:t>
+            </a:r>
+          </a:p>
+          <a:p>
+            <a:r>
+              <a:rPr lang="fr-FR" sz="1200" b="1" dirty="0">
+                <a:solidFill>
+                  <a:schemeClr val="accent6">
+                    <a:lumMod val="75000"/>
+                  </a:schemeClr>
+                </a:solidFill>
+              </a:rPr>
+              <a:t>        "</a:t>
+            </a:r>
+            <a:r>
+              <a:rPr lang="fr-FR" sz="1200" b="1" dirty="0" err="1">
+                <a:solidFill>
+                  <a:schemeClr val="accent6">
+                    <a:lumMod val="75000"/>
+                  </a:schemeClr>
+                </a:solidFill>
+              </a:rPr>
+              <a:t>name</a:t>
+            </a:r>
+            <a:r>
+              <a:rPr lang="fr-FR" sz="1200" b="1" dirty="0">
+                <a:solidFill>
+                  <a:schemeClr val="accent6">
+                    <a:lumMod val="75000"/>
+                  </a:schemeClr>
+                </a:solidFill>
+              </a:rPr>
+              <a:t>": "StudentA0"</a:t>
+            </a:r>
+          </a:p>
+          <a:p>
+            <a:r>
+              <a:rPr lang="fr-FR" sz="1200" b="1" dirty="0">
+                <a:solidFill>
+                  <a:schemeClr val="accent6">
+                    <a:lumMod val="75000"/>
+                  </a:schemeClr>
+                </a:solidFill>
+              </a:rPr>
+              <a:t>      }</a:t>
+            </a:r>
+          </a:p>
+          <a:p>
+            <a:r>
+              <a:rPr lang="fr-FR" sz="1200" b="1" dirty="0">
+                <a:solidFill>
+                  <a:schemeClr val="accent6">
+                    <a:lumMod val="75000"/>
+                  </a:schemeClr>
+                </a:solidFill>
+              </a:rPr>
+              <a:t>    ]</a:t>
+            </a:r>
+            <a:r>
+              <a:rPr lang="fr-FR" sz="1200" b="1" dirty="0">
+                <a:solidFill>
+                  <a:srgbClr val="0070C0"/>
+                </a:solidFill>
+              </a:rPr>
+              <a:t>,</a:t>
+            </a:r>
+          </a:p>
+          <a:p>
+            <a:r>
+              <a:rPr lang="fr-FR" sz="1200" b="1" dirty="0">
+                <a:solidFill>
+                  <a:srgbClr val="0070C0"/>
+                </a:solidFill>
+              </a:rPr>
+              <a:t>    </a:t>
+            </a:r>
+            <a:r>
+              <a:rPr lang="fr-FR" sz="1200" b="1" dirty="0">
+                <a:solidFill>
+                  <a:schemeClr val="accent2">
+                    <a:lumMod val="75000"/>
+                  </a:schemeClr>
+                </a:solidFill>
+              </a:rPr>
+              <a:t>"</a:t>
+            </a:r>
+            <a:r>
+              <a:rPr lang="fr-FR" sz="1200" b="1" dirty="0" err="1">
+                <a:solidFill>
+                  <a:schemeClr val="accent2">
+                    <a:lumMod val="75000"/>
+                  </a:schemeClr>
+                </a:solidFill>
+              </a:rPr>
+              <a:t>teachers</a:t>
+            </a:r>
+            <a:r>
+              <a:rPr lang="fr-FR" sz="1200" b="1" dirty="0">
+                <a:solidFill>
+                  <a:schemeClr val="accent2">
+                    <a:lumMod val="75000"/>
+                  </a:schemeClr>
+                </a:solidFill>
+              </a:rPr>
+              <a:t>": [</a:t>
+            </a:r>
+          </a:p>
+          <a:p>
+            <a:r>
+              <a:rPr lang="fr-FR" sz="1200" b="1" dirty="0">
+                <a:solidFill>
+                  <a:schemeClr val="accent2">
+                    <a:lumMod val="75000"/>
+                  </a:schemeClr>
+                </a:solidFill>
+              </a:rPr>
+              <a:t>      {</a:t>
+            </a:r>
+          </a:p>
+          <a:p>
+            <a:r>
+              <a:rPr lang="fr-FR" sz="1200" b="1" dirty="0">
+                <a:solidFill>
+                  <a:schemeClr val="accent2">
+                    <a:lumMod val="75000"/>
+                  </a:schemeClr>
+                </a:solidFill>
+              </a:rPr>
+              <a:t>        "id": 1,</a:t>
+            </a:r>
+          </a:p>
+          <a:p>
+            <a:r>
+              <a:rPr lang="fr-FR" sz="1200" b="1" dirty="0">
+                <a:solidFill>
+                  <a:schemeClr val="accent2">
+                    <a:lumMod val="75000"/>
+                  </a:schemeClr>
+                </a:solidFill>
+              </a:rPr>
+              <a:t>        "</a:t>
+            </a:r>
+            <a:r>
+              <a:rPr lang="fr-FR" sz="1200" b="1" dirty="0" err="1">
+                <a:solidFill>
+                  <a:schemeClr val="accent2">
+                    <a:lumMod val="75000"/>
+                  </a:schemeClr>
+                </a:solidFill>
+              </a:rPr>
+              <a:t>name</a:t>
+            </a:r>
+            <a:r>
+              <a:rPr lang="fr-FR" sz="1200" b="1" dirty="0">
+                <a:solidFill>
+                  <a:schemeClr val="accent2">
+                    <a:lumMod val="75000"/>
+                  </a:schemeClr>
+                </a:solidFill>
+              </a:rPr>
+              <a:t>": "TeacherA0"</a:t>
+            </a:r>
+          </a:p>
+          <a:p>
+            <a:r>
+              <a:rPr lang="fr-FR" sz="1200" b="1" dirty="0">
+                <a:solidFill>
+                  <a:schemeClr val="accent2">
+                    <a:lumMod val="75000"/>
+                  </a:schemeClr>
+                </a:solidFill>
+              </a:rPr>
+              <a:t>      },</a:t>
+            </a:r>
+          </a:p>
+          <a:p>
+            <a:r>
+              <a:rPr lang="fr-FR" sz="1200" b="1" dirty="0">
+                <a:solidFill>
+                  <a:schemeClr val="accent2">
+                    <a:lumMod val="75000"/>
+                  </a:schemeClr>
+                </a:solidFill>
+              </a:rPr>
+              <a:t>      {</a:t>
+            </a:r>
+          </a:p>
+          <a:p>
+            <a:r>
+              <a:rPr lang="fr-FR" sz="1200" b="1" dirty="0">
+                <a:solidFill>
+                  <a:schemeClr val="accent2">
+                    <a:lumMod val="75000"/>
+                  </a:schemeClr>
+                </a:solidFill>
+              </a:rPr>
+              <a:t>        "id": 2,</a:t>
+            </a:r>
+          </a:p>
+          <a:p>
+            <a:r>
+              <a:rPr lang="fr-FR" sz="1200" b="1" dirty="0">
+                <a:solidFill>
+                  <a:schemeClr val="accent2">
+                    <a:lumMod val="75000"/>
+                  </a:schemeClr>
+                </a:solidFill>
+              </a:rPr>
+              <a:t>        "</a:t>
+            </a:r>
+            <a:r>
+              <a:rPr lang="fr-FR" sz="1200" b="1" dirty="0" err="1">
+                <a:solidFill>
+                  <a:schemeClr val="accent2">
+                    <a:lumMod val="75000"/>
+                  </a:schemeClr>
+                </a:solidFill>
+              </a:rPr>
+              <a:t>name</a:t>
+            </a:r>
+            <a:r>
+              <a:rPr lang="fr-FR" sz="1200" b="1" dirty="0">
+                <a:solidFill>
+                  <a:schemeClr val="accent2">
+                    <a:lumMod val="75000"/>
+                  </a:schemeClr>
+                </a:solidFill>
+              </a:rPr>
+              <a:t>": "TeacherB0"</a:t>
+            </a:r>
+          </a:p>
+          <a:p>
+            <a:r>
+              <a:rPr lang="fr-FR" sz="1200" b="1" dirty="0">
+                <a:solidFill>
+                  <a:schemeClr val="accent2">
+                    <a:lumMod val="75000"/>
+                  </a:schemeClr>
+                </a:solidFill>
+              </a:rPr>
+              <a:t>      }</a:t>
+            </a:r>
+          </a:p>
+          <a:p>
+            <a:r>
+              <a:rPr lang="fr-FR" sz="1200" b="1" dirty="0">
+                <a:solidFill>
+                  <a:schemeClr val="accent2">
+                    <a:lumMod val="75000"/>
+                  </a:schemeClr>
+                </a:solidFill>
+              </a:rPr>
+              <a:t>    ]</a:t>
+            </a:r>
+          </a:p>
+          <a:p>
+            <a:r>
+              <a:rPr lang="fr-FR" sz="1200" b="1" dirty="0"/>
+              <a:t>  },</a:t>
+            </a:r>
+          </a:p>
+        </p:txBody>
+      </p:sp>
+    </p:spTree>
+    <p:extLst>
+      <p:ext uri="{BB962C8B-B14F-4D97-AF65-F5344CB8AC3E}">
+        <p14:creationId xmlns:p14="http://schemas.microsoft.com/office/powerpoint/2010/main" val="741295722"/>
+      </p:ext>
+    </p:extLst>
+  </p:cSld>
+  <p:clrMapOvr>
+    <a:masterClrMapping/>
+  </p:clrMapOvr>
+  <mc:AlternateContent xmlns:mc="http://schemas.openxmlformats.org/markup-compatibility/2006" xmlns:p14="http://schemas.microsoft.com/office/powerpoint/2010/main">
+    <mc:Choice Requires="p14">
+      <p:transition p14:dur="10"/>
+    </mc:Choice>
+    <mc:Fallback xmlns="">
+      <p:transition/>
+    </mc:Fallback>
+  </mc:AlternateContent>
+</p:sld>
+</file>
+
+<file path=ppt/slides/slide7.xml><?xml version="1.0" encoding="utf-8"?>
+<p:sld xmlns:a="http://schemas.openxmlformats.org/drawingml/2006/main" xmlns:r="http://schemas.openxmlformats.org/officeDocument/2006/relationships" xmlns:p="http://schemas.openxmlformats.org/presentationml/2006/main">
+  <p:cSld>
+    <p:spTree>
+      <p:nvGrpSpPr>
+        <p:cNvPr id="1" name=""/>
+        <p:cNvGrpSpPr/>
+        <p:nvPr/>
+      </p:nvGrpSpPr>
+      <p:grpSpPr>
+        <a:xfrm>
+          <a:off x="0" y="0"/>
+          <a:ext cx="0" cy="0"/>
+          <a:chOff x="0" y="0"/>
+          <a:chExt cx="0" cy="0"/>
+        </a:xfrm>
+      </p:grpSpPr>
+      <p:sp>
+        <p:nvSpPr>
+          <p:cNvPr id="4" name="Titre 3"/>
+          <p:cNvSpPr>
+            <a:spLocks noGrp="1"/>
+          </p:cNvSpPr>
+          <p:nvPr>
+            <p:ph type="title"/>
+          </p:nvPr>
+        </p:nvSpPr>
+        <p:spPr>
+          <a:xfrm>
+            <a:off x="521207" y="448056"/>
+            <a:ext cx="7783344" cy="640080"/>
+          </a:xfrm>
+        </p:spPr>
+        <p:txBody>
+          <a:bodyPr rtlCol="0">
+            <a:normAutofit/>
+          </a:bodyPr>
+          <a:lstStyle/>
+          <a:p>
+            <a:pPr rtl="0"/>
+            <a:r>
+              <a:rPr lang="fr-FR" noProof="1">
+                <a:latin typeface="Segoe UI Light" panose="020B0502040204020203" pitchFamily="34" charset="0"/>
+                <a:cs typeface="Segoe UI Light" panose="020B0502040204020203" pitchFamily="34" charset="0"/>
+              </a:rPr>
+              <a:t>One to One / Many to One</a:t>
             </a:r>
           </a:p>
         </p:txBody>
@@ -33830,7 +35024,7 @@
         </p:blipFill>
         <p:spPr>
           <a:xfrm>
-            <a:off x="3246776" y="5331725"/>
+            <a:off x="3246776" y="5296005"/>
             <a:ext cx="5057775" cy="1409700"/>
           </a:xfrm>
           <a:prstGeom prst="rect">
@@ -35115,6 +36309,45 @@
           </a:fontRef>
         </p:style>
       </p:cxnSp>
+      <p:sp>
+        <p:nvSpPr>
+          <p:cNvPr id="14" name="ZoneTexte 13">
+            <a:extLst>
+              <a:ext uri="{FF2B5EF4-FFF2-40B4-BE49-F238E27FC236}">
+                <a16:creationId xmlns:a16="http://schemas.microsoft.com/office/drawing/2014/main" id="{3C0B9410-E858-4776-8057-97B758F08B3E}"/>
+              </a:ext>
+            </a:extLst>
+          </p:cNvPr>
+          <p:cNvSpPr txBox="1"/>
+          <p:nvPr/>
+        </p:nvSpPr>
+        <p:spPr>
+          <a:xfrm>
+            <a:off x="521205" y="1241529"/>
+            <a:ext cx="10961915" cy="369332"/>
+          </a:xfrm>
+          <a:prstGeom prst="rect">
+            <a:avLst/>
+          </a:prstGeom>
+          <a:noFill/>
+        </p:spPr>
+        <p:txBody>
+          <a:bodyPr wrap="square">
+            <a:spAutoFit/>
+          </a:bodyPr>
+          <a:lstStyle/>
+          <a:p>
+            <a:pPr marL="285750" indent="-285750">
+              <a:buFont typeface="Wingdings" panose="05000000000000000000" pitchFamily="2" charset="2"/>
+              <a:buChar char="Ø"/>
+            </a:pPr>
+            <a:r>
+              <a:rPr lang="fr-FR" dirty="0"/>
+              <a:t>Si relation inverse, attention aux entités qui sortent des contrôleurs : boucles infinies !</a:t>
+            </a:r>
+          </a:p>
+        </p:txBody>
+      </p:sp>
     </p:spTree>
     <p:extLst>
       <p:ext uri="{BB962C8B-B14F-4D97-AF65-F5344CB8AC3E}">
@@ -35154,7 +36387,7 @@
                             </p:stCondLst>
                             <p:childTnLst>
                               <p:par>
-                                <p:cTn id="5" presetID="1" presetClass="entr" presetSubtype="0" fill="hold" nodeType="clickEffect">
+                                <p:cTn id="5" presetID="1" presetClass="entr" presetSubtype="0" fill="hold" grpId="0" nodeType="clickEffect">
                                   <p:stCondLst>
                                     <p:cond delay="0"/>
                                   </p:stCondLst>
@@ -35162,55 +36395,6 @@
                                     <p:set>
                                       <p:cBhvr>
                                         <p:cTn id="6" dur="1" fill="hold">
-                                          <p:stCondLst>
-                                            <p:cond delay="0"/>
-                                          </p:stCondLst>
-                                        </p:cTn>
-                                        <p:tgtEl>
-                                          <p:spTgt spid="2">
-                                            <p:txEl>
-                                              <p:pRg st="0" end="0"/>
-                                            </p:txEl>
-                                          </p:spTgt>
-                                        </p:tgtEl>
-                                        <p:attrNameLst>
-                                          <p:attrName>style.visibility</p:attrName>
-                                        </p:attrNameLst>
-                                      </p:cBhvr>
-                                      <p:to>
-                                        <p:strVal val="visible"/>
-                                      </p:to>
-                                    </p:set>
-                                  </p:childTnLst>
-                                </p:cTn>
-                              </p:par>
-                            </p:childTnLst>
-                          </p:cTn>
-                        </p:par>
-                      </p:childTnLst>
-                    </p:cTn>
-                  </p:par>
-                  <p:par>
-                    <p:cTn id="7" fill="hold">
-                      <p:stCondLst>
-                        <p:cond delay="indefinite"/>
-                      </p:stCondLst>
-                      <p:childTnLst>
-                        <p:par>
-                          <p:cTn id="8" fill="hold">
-                            <p:stCondLst>
-                              <p:cond delay="0"/>
-                            </p:stCondLst>
-                            <p:childTnLst>
-                              <p:par>
-                                <p:cTn id="9" presetID="1" presetClass="entr" presetSubtype="0" fill="hold" grpId="0" nodeType="clickEffect">
-                                  <p:stCondLst>
-                                    <p:cond delay="0"/>
-                                  </p:stCondLst>
-                                  <p:childTnLst>
-                                    <p:set>
-                                      <p:cBhvr>
-                                        <p:cTn id="10" dur="1" fill="hold">
                                           <p:stCondLst>
                                             <p:cond delay="0"/>
                                           </p:stCondLst>
@@ -35230,14 +36414,14 @@
                                 </p:cTn>
                               </p:par>
                               <p:par>
-                                <p:cTn id="11" presetID="1" presetClass="entr" presetSubtype="0" fill="hold" grpId="0" nodeType="withEffect">
+                                <p:cTn id="7" presetID="1" presetClass="entr" presetSubtype="0" fill="hold" grpId="0" nodeType="withEffect">
                                   <p:stCondLst>
                                     <p:cond delay="0"/>
                                   </p:stCondLst>
                                   <p:childTnLst>
                                     <p:set>
                                       <p:cBhvr>
-                                        <p:cTn id="12" dur="1" fill="hold">
+                                        <p:cTn id="8" dur="1" fill="hold">
                                           <p:stCondLst>
                                             <p:cond delay="0"/>
                                           </p:stCondLst>
@@ -35257,14 +36441,14 @@
                                 </p:cTn>
                               </p:par>
                               <p:par>
-                                <p:cTn id="13" presetID="1" presetClass="entr" presetSubtype="0" fill="hold" grpId="0" nodeType="withEffect">
+                                <p:cTn id="9" presetID="1" presetClass="entr" presetSubtype="0" fill="hold" grpId="0" nodeType="withEffect">
                                   <p:stCondLst>
                                     <p:cond delay="0"/>
                                   </p:stCondLst>
                                   <p:childTnLst>
                                     <p:set>
                                       <p:cBhvr>
-                                        <p:cTn id="14" dur="1" fill="hold">
+                                        <p:cTn id="10" dur="1" fill="hold">
                                           <p:stCondLst>
                                             <p:cond delay="0"/>
                                           </p:stCondLst>
@@ -35290,26 +36474,26 @@
                     </p:cTn>
                   </p:par>
                   <p:par>
-                    <p:cTn id="15" fill="hold">
+                    <p:cTn id="11" fill="hold">
                       <p:stCondLst>
                         <p:cond delay="indefinite"/>
                       </p:stCondLst>
                       <p:childTnLst>
                         <p:par>
-                          <p:cTn id="16" fill="hold">
+                          <p:cTn id="12" fill="hold">
                             <p:stCondLst>
                               <p:cond delay="0"/>
                             </p:stCondLst>
                             <p:childTnLst>
                               <p:par>
-                                <p:cTn id="17" presetID="1" presetClass="entr" presetSubtype="0" fill="hold" grpId="0" nodeType="clickEffect">
+                                <p:cTn id="13" presetID="1" presetClass="entr" presetSubtype="0" fill="hold" grpId="0" nodeType="clickEffect">
                                   <p:stCondLst>
                                     <p:cond delay="0"/>
                                   </p:stCondLst>
                                   <p:childTnLst>
                                     <p:set>
                                       <p:cBhvr>
-                                        <p:cTn id="18" dur="1" fill="hold">
+                                        <p:cTn id="14" dur="1" fill="hold">
                                           <p:stCondLst>
                                             <p:cond delay="0"/>
                                           </p:stCondLst>
@@ -35329,14 +36513,14 @@
                                 </p:cTn>
                               </p:par>
                               <p:par>
-                                <p:cTn id="19" presetID="1" presetClass="entr" presetSubtype="0" fill="hold" grpId="0" nodeType="withEffect">
+                                <p:cTn id="15" presetID="1" presetClass="entr" presetSubtype="0" fill="hold" grpId="0" nodeType="withEffect">
                                   <p:stCondLst>
                                     <p:cond delay="0"/>
                                   </p:stCondLst>
                                   <p:childTnLst>
                                     <p:set>
                                       <p:cBhvr>
-                                        <p:cTn id="20" dur="1" fill="hold">
+                                        <p:cTn id="16" dur="1" fill="hold">
                                           <p:stCondLst>
                                             <p:cond delay="0"/>
                                           </p:stCondLst>
@@ -35356,14 +36540,14 @@
                                 </p:cTn>
                               </p:par>
                               <p:par>
-                                <p:cTn id="21" presetID="1" presetClass="entr" presetSubtype="0" fill="hold" grpId="0" nodeType="withEffect">
+                                <p:cTn id="17" presetID="1" presetClass="entr" presetSubtype="0" fill="hold" grpId="0" nodeType="withEffect">
                                   <p:stCondLst>
                                     <p:cond delay="0"/>
                                   </p:stCondLst>
                                   <p:childTnLst>
                                     <p:set>
                                       <p:cBhvr>
-                                        <p:cTn id="22" dur="1" fill="hold">
+                                        <p:cTn id="18" dur="1" fill="hold">
                                           <p:stCondLst>
                                             <p:cond delay="0"/>
                                           </p:stCondLst>
@@ -35421,7 +36605,7 @@
 </p:sld>
 </file>
 
-<file path=ppt/slides/slide7.xml><?xml version="1.0" encoding="utf-8"?>
+<file path=ppt/slides/slide8.xml><?xml version="1.0" encoding="utf-8"?>
 <p:sld xmlns:a="http://schemas.openxmlformats.org/drawingml/2006/main" xmlns:r="http://schemas.openxmlformats.org/officeDocument/2006/relationships" xmlns:p="http://schemas.openxmlformats.org/presentationml/2006/main">
   <p:cSld>
     <p:spTree>
@@ -36843,7 +38027,7 @@
         </p:blipFill>
         <p:spPr>
           <a:xfrm>
-            <a:off x="3768182" y="5253619"/>
+            <a:off x="3768182" y="5096451"/>
             <a:ext cx="4343400" cy="1257300"/>
           </a:xfrm>
           <a:prstGeom prst="rect">
@@ -37104,7 +38288,7 @@
 </p:sld>
 </file>
 
-<file path=ppt/slides/slide8.xml><?xml version="1.0" encoding="utf-8"?>
+<file path=ppt/slides/slide9.xml><?xml version="1.0" encoding="utf-8"?>
 <p:sld xmlns:a="http://schemas.openxmlformats.org/drawingml/2006/main" xmlns:r="http://schemas.openxmlformats.org/officeDocument/2006/relationships" xmlns:p="http://schemas.openxmlformats.org/presentationml/2006/main">
   <p:cSld>
     <p:spTree>
@@ -37156,39 +38340,6 @@
       </p:sp>
       <p:sp>
         <p:nvSpPr>
-          <p:cNvPr id="2" name="ZoneTexte 1"/>
-          <p:cNvSpPr txBox="1"/>
-          <p:nvPr/>
-        </p:nvSpPr>
-        <p:spPr>
-          <a:xfrm>
-            <a:off x="521207" y="1228267"/>
-            <a:ext cx="10961915" cy="369332"/>
-          </a:xfrm>
-          <a:prstGeom prst="rect">
-            <a:avLst/>
-          </a:prstGeom>
-          <a:noFill/>
-        </p:spPr>
-        <p:txBody>
-          <a:bodyPr wrap="square" rtlCol="0">
-            <a:spAutoFit/>
-          </a:bodyPr>
-          <a:lstStyle/>
-          <a:p>
-            <a:pPr marL="285750" indent="-285750">
-              <a:buFont typeface="Wingdings" panose="05000000000000000000" pitchFamily="2" charset="2"/>
-              <a:buChar char="Ø"/>
-            </a:pPr>
-            <a:r>
-              <a:rPr lang="fr-FR" dirty="0"/>
-              <a:t>Pratique si on doit pointer vers une table de référence pour n liaisons</a:t>
-            </a:r>
-          </a:p>
-        </p:txBody>
-      </p:sp>
-      <p:sp>
-        <p:nvSpPr>
           <p:cNvPr id="5" name="Rectangle 1">
             <a:extLst>
               <a:ext uri="{FF2B5EF4-FFF2-40B4-BE49-F238E27FC236}">
@@ -37203,7 +38354,7 @@
         </p:nvSpPr>
         <p:spPr bwMode="auto">
           <a:xfrm>
-            <a:off x="521206" y="1868175"/>
+            <a:off x="521206" y="1496697"/>
             <a:ext cx="5382323" cy="3447098"/>
           </a:xfrm>
           <a:prstGeom prst="rect">
@@ -38805,7 +39956,7 @@
         </p:nvSpPr>
         <p:spPr bwMode="auto">
           <a:xfrm>
-            <a:off x="7561345" y="2923478"/>
+            <a:off x="7561345" y="2552000"/>
             <a:ext cx="3872759" cy="1169551"/>
           </a:xfrm>
           <a:prstGeom prst="rect">
@@ -39266,7 +40417,7 @@
         </p:nvSpPr>
         <p:spPr>
           <a:xfrm>
-            <a:off x="6130271" y="3228278"/>
+            <a:off x="6130271" y="2856800"/>
             <a:ext cx="1204332" cy="810322"/>
           </a:xfrm>
           <a:prstGeom prst="rightArrow">
@@ -39320,7 +40471,7 @@
         </p:blipFill>
         <p:spPr>
           <a:xfrm>
-            <a:off x="2173114" y="5438087"/>
+            <a:off x="2173114" y="5066609"/>
             <a:ext cx="7658100" cy="1314450"/>
           </a:xfrm>
           <a:prstGeom prst="rect">
@@ -39367,7 +40518,7 @@
                             </p:stCondLst>
                             <p:childTnLst>
                               <p:par>
-                                <p:cTn id="5" presetID="1" presetClass="entr" presetSubtype="0" fill="hold" nodeType="clickEffect">
+                                <p:cTn id="5" presetID="1" presetClass="entr" presetSubtype="0" fill="hold" grpId="0" nodeType="clickEffect">
                                   <p:stCondLst>
                                     <p:cond delay="0"/>
                                   </p:stCondLst>
@@ -39375,55 +40526,6 @@
                                     <p:set>
                                       <p:cBhvr>
                                         <p:cTn id="6" dur="1" fill="hold">
-                                          <p:stCondLst>
-                                            <p:cond delay="0"/>
-                                          </p:stCondLst>
-                                        </p:cTn>
-                                        <p:tgtEl>
-                                          <p:spTgt spid="2">
-                                            <p:txEl>
-                                              <p:pRg st="0" end="0"/>
-                                            </p:txEl>
-                                          </p:spTgt>
-                                        </p:tgtEl>
-                                        <p:attrNameLst>
-                                          <p:attrName>style.visibility</p:attrName>
-                                        </p:attrNameLst>
-                                      </p:cBhvr>
-                                      <p:to>
-                                        <p:strVal val="visible"/>
-                                      </p:to>
-                                    </p:set>
-                                  </p:childTnLst>
-                                </p:cTn>
-                              </p:par>
-                            </p:childTnLst>
-                          </p:cTn>
-                        </p:par>
-                      </p:childTnLst>
-                    </p:cTn>
-                  </p:par>
-                  <p:par>
-                    <p:cTn id="7" fill="hold">
-                      <p:stCondLst>
-                        <p:cond delay="indefinite"/>
-                      </p:stCondLst>
-                      <p:childTnLst>
-                        <p:par>
-                          <p:cTn id="8" fill="hold">
-                            <p:stCondLst>
-                              <p:cond delay="0"/>
-                            </p:stCondLst>
-                            <p:childTnLst>
-                              <p:par>
-                                <p:cTn id="9" presetID="1" presetClass="entr" presetSubtype="0" fill="hold" grpId="0" nodeType="clickEffect">
-                                  <p:stCondLst>
-                                    <p:cond delay="0"/>
-                                  </p:stCondLst>
-                                  <p:childTnLst>
-                                    <p:set>
-                                      <p:cBhvr>
-                                        <p:cTn id="10" dur="1" fill="hold">
                                           <p:stCondLst>
                                             <p:cond delay="0"/>
                                           </p:stCondLst>
@@ -39443,14 +40545,14 @@
                                 </p:cTn>
                               </p:par>
                               <p:par>
-                                <p:cTn id="11" presetID="1" presetClass="entr" presetSubtype="0" fill="hold" grpId="0" nodeType="withEffect">
+                                <p:cTn id="7" presetID="1" presetClass="entr" presetSubtype="0" fill="hold" grpId="0" nodeType="withEffect">
                                   <p:stCondLst>
                                     <p:cond delay="0"/>
                                   </p:stCondLst>
                                   <p:childTnLst>
                                     <p:set>
                                       <p:cBhvr>
-                                        <p:cTn id="12" dur="1" fill="hold">
+                                        <p:cTn id="8" dur="1" fill="hold">
                                           <p:stCondLst>
                                             <p:cond delay="0"/>
                                           </p:stCondLst>
@@ -39470,14 +40572,14 @@
                                 </p:cTn>
                               </p:par>
                               <p:par>
-                                <p:cTn id="13" presetID="1" presetClass="entr" presetSubtype="0" fill="hold" grpId="0" nodeType="withEffect">
+                                <p:cTn id="9" presetID="1" presetClass="entr" presetSubtype="0" fill="hold" grpId="0" nodeType="withEffect">
                                   <p:stCondLst>
                                     <p:cond delay="0"/>
                                   </p:stCondLst>
                                   <p:childTnLst>
                                     <p:set>
                                       <p:cBhvr>
-                                        <p:cTn id="14" dur="1" fill="hold">
+                                        <p:cTn id="10" dur="1" fill="hold">
                                           <p:stCondLst>
                                             <p:cond delay="0"/>
                                           </p:stCondLst>
@@ -39526,1060 +40628,6 @@
     <p:bldLst>
       <p:bldP spid="5" grpId="0" animBg="1"/>
       <p:bldP spid="6" grpId="0" animBg="1"/>
-      <p:bldP spid="3" grpId="0" animBg="1"/>
-    </p:bldLst>
-  </p:timing>
-</p:sld>
-</file>
-
-<file path=ppt/slides/slide9.xml><?xml version="1.0" encoding="utf-8"?>
-<p:sld xmlns:a="http://schemas.openxmlformats.org/drawingml/2006/main" xmlns:r="http://schemas.openxmlformats.org/officeDocument/2006/relationships" xmlns:p="http://schemas.openxmlformats.org/presentationml/2006/main">
-  <p:cSld>
-    <p:spTree>
-      <p:nvGrpSpPr>
-        <p:cNvPr id="1" name=""/>
-        <p:cNvGrpSpPr/>
-        <p:nvPr/>
-      </p:nvGrpSpPr>
-      <p:grpSpPr>
-        <a:xfrm>
-          <a:off x="0" y="0"/>
-          <a:ext cx="0" cy="0"/>
-          <a:chOff x="0" y="0"/>
-          <a:chExt cx="0" cy="0"/>
-        </a:xfrm>
-      </p:grpSpPr>
-      <p:sp>
-        <p:nvSpPr>
-          <p:cNvPr id="4" name="Titre 3"/>
-          <p:cNvSpPr>
-            <a:spLocks noGrp="1"/>
-          </p:cNvSpPr>
-          <p:nvPr>
-            <p:ph type="title"/>
-          </p:nvPr>
-        </p:nvSpPr>
-        <p:spPr>
-          <a:xfrm>
-            <a:off x="521207" y="448056"/>
-            <a:ext cx="7783344" cy="640080"/>
-          </a:xfrm>
-        </p:spPr>
-        <p:txBody>
-          <a:bodyPr rtlCol="0">
-            <a:normAutofit/>
-          </a:bodyPr>
-          <a:lstStyle/>
-          <a:p>
-            <a:pPr rtl="0"/>
-            <a:r>
-              <a:rPr lang="fr-FR" noProof="1">
-                <a:latin typeface="Segoe UI Light" panose="020B0502040204020203" pitchFamily="34" charset="0"/>
-                <a:cs typeface="Segoe UI Light" panose="020B0502040204020203" pitchFamily="34" charset="0"/>
-              </a:rPr>
-              <a:t>Jointure Eager ou Lazy ?</a:t>
-            </a:r>
-          </a:p>
-        </p:txBody>
-      </p:sp>
-      <p:sp>
-        <p:nvSpPr>
-          <p:cNvPr id="2" name="ZoneTexte 1"/>
-          <p:cNvSpPr txBox="1"/>
-          <p:nvPr/>
-        </p:nvSpPr>
-        <p:spPr>
-          <a:xfrm>
-            <a:off x="521207" y="1243786"/>
-            <a:ext cx="10961915" cy="4247317"/>
-          </a:xfrm>
-          <a:prstGeom prst="rect">
-            <a:avLst/>
-          </a:prstGeom>
-          <a:noFill/>
-        </p:spPr>
-        <p:txBody>
-          <a:bodyPr wrap="square" rtlCol="0">
-            <a:spAutoFit/>
-          </a:bodyPr>
-          <a:lstStyle/>
-          <a:p>
-            <a:pPr marL="285750" indent="-285750">
-              <a:buFont typeface="Wingdings" panose="05000000000000000000" pitchFamily="2" charset="2"/>
-              <a:buChar char="Ø"/>
-            </a:pPr>
-            <a:r>
-              <a:rPr lang="fr-FR" dirty="0"/>
-              <a:t>One To One / </a:t>
-            </a:r>
-            <a:r>
-              <a:rPr lang="fr-FR" dirty="0" err="1"/>
-              <a:t>Many</a:t>
-            </a:r>
-            <a:r>
-              <a:rPr lang="fr-FR" dirty="0"/>
-              <a:t> To One  </a:t>
-            </a:r>
-            <a:r>
-              <a:rPr lang="fr-FR" dirty="0">
-                <a:sym typeface="Wingdings" panose="05000000000000000000" pitchFamily="2" charset="2"/>
-              </a:rPr>
-              <a:t> </a:t>
-            </a:r>
-            <a:r>
-              <a:rPr lang="fr-FR" dirty="0" err="1"/>
-              <a:t>Eager</a:t>
-            </a:r>
-            <a:r>
-              <a:rPr lang="fr-FR" dirty="0"/>
-              <a:t> par défaut</a:t>
-            </a:r>
-          </a:p>
-          <a:p>
-            <a:pPr marL="285750" indent="-285750">
-              <a:buFont typeface="Wingdings" panose="05000000000000000000" pitchFamily="2" charset="2"/>
-              <a:buChar char="Ø"/>
-            </a:pPr>
-            <a:r>
-              <a:rPr lang="fr-FR" dirty="0"/>
-              <a:t>Les autres </a:t>
-            </a:r>
-            <a:r>
-              <a:rPr lang="fr-FR" dirty="0">
-                <a:sym typeface="Wingdings" panose="05000000000000000000" pitchFamily="2" charset="2"/>
-              </a:rPr>
-              <a:t></a:t>
-            </a:r>
-            <a:r>
-              <a:rPr lang="fr-FR" dirty="0"/>
-              <a:t> </a:t>
-            </a:r>
-            <a:r>
-              <a:rPr lang="fr-FR" dirty="0" err="1"/>
-              <a:t>Lazy</a:t>
-            </a:r>
-            <a:r>
-              <a:rPr lang="fr-FR" dirty="0"/>
-              <a:t> par défaut, on ne touche pas !</a:t>
-            </a:r>
-          </a:p>
-          <a:p>
-            <a:pPr marL="285750" indent="-285750">
-              <a:buFont typeface="Wingdings" panose="05000000000000000000" pitchFamily="2" charset="2"/>
-              <a:buChar char="Ø"/>
-            </a:pPr>
-            <a:endParaRPr lang="fr-FR" dirty="0"/>
-          </a:p>
-          <a:p>
-            <a:pPr marL="285750" indent="-285750">
-              <a:buFont typeface="Wingdings" panose="05000000000000000000" pitchFamily="2" charset="2"/>
-              <a:buChar char="Ø"/>
-            </a:pPr>
-            <a:r>
-              <a:rPr lang="fr-FR" dirty="0"/>
-              <a:t>Une jointure doit être déclarative avec un </a:t>
-            </a:r>
-            <a:r>
-              <a:rPr lang="fr-FR" dirty="0" err="1"/>
-              <a:t>fetch</a:t>
-            </a:r>
-            <a:r>
-              <a:rPr lang="fr-FR" dirty="0"/>
-              <a:t> ou une requête directe !</a:t>
-            </a:r>
-            <a:br>
-              <a:rPr lang="fr-FR" dirty="0"/>
-            </a:br>
-            <a:r>
-              <a:rPr lang="fr-FR" dirty="0"/>
-              <a:t>En effet, figer les requêtes « </a:t>
-            </a:r>
-            <a:r>
-              <a:rPr lang="fr-FR" dirty="0" err="1"/>
-              <a:t>programmatiquement</a:t>
-            </a:r>
-            <a:r>
-              <a:rPr lang="fr-FR" dirty="0"/>
-              <a:t> » avec les annotations, empêchera toute évolution…</a:t>
-            </a:r>
-            <a:br>
-              <a:rPr lang="fr-FR" dirty="0"/>
-            </a:br>
-            <a:r>
-              <a:rPr lang="fr-FR" dirty="0"/>
-              <a:t>De plus, cela pourrait conduire à des problèmes de performances car des données inutiles seraient systématiquement récupérée</a:t>
-            </a:r>
-          </a:p>
-          <a:p>
-            <a:pPr marL="285750" indent="-285750">
-              <a:buFont typeface="Wingdings" panose="05000000000000000000" pitchFamily="2" charset="2"/>
-              <a:buChar char="Ø"/>
-            </a:pPr>
-            <a:endParaRPr lang="fr-FR" dirty="0"/>
-          </a:p>
-          <a:p>
-            <a:pPr marL="285750" indent="-285750">
-              <a:buFont typeface="Wingdings" panose="05000000000000000000" pitchFamily="2" charset="2"/>
-              <a:buChar char="Ø"/>
-            </a:pPr>
-            <a:endParaRPr lang="fr-FR" dirty="0"/>
-          </a:p>
-          <a:p>
-            <a:pPr marL="285750" indent="-285750">
-              <a:buFont typeface="Wingdings" panose="05000000000000000000" pitchFamily="2" charset="2"/>
-              <a:buChar char="Ø"/>
-            </a:pPr>
-            <a:r>
-              <a:rPr lang="fr-FR" dirty="0"/>
-              <a:t>Conseil ? </a:t>
-            </a:r>
-          </a:p>
-          <a:p>
-            <a:pPr marL="285750" indent="-285750">
-              <a:buFont typeface="Wingdings" panose="05000000000000000000" pitchFamily="2" charset="2"/>
-              <a:buChar char="Ø"/>
-            </a:pPr>
-            <a:endParaRPr lang="fr-FR" dirty="0"/>
-          </a:p>
-          <a:p>
-            <a:pPr marL="285750" indent="-285750">
-              <a:buFont typeface="Wingdings" panose="05000000000000000000" pitchFamily="2" charset="2"/>
-              <a:buChar char="Ø"/>
-            </a:pPr>
-            <a:endParaRPr lang="fr-FR" dirty="0"/>
-          </a:p>
-          <a:p>
-            <a:pPr marL="285750" indent="-285750">
-              <a:buFont typeface="Wingdings" panose="05000000000000000000" pitchFamily="2" charset="2"/>
-              <a:buChar char="Ø"/>
-            </a:pPr>
-            <a:endParaRPr lang="fr-FR" dirty="0"/>
-          </a:p>
-          <a:p>
-            <a:pPr marL="285750" indent="-285750">
-              <a:buFont typeface="Wingdings" panose="05000000000000000000" pitchFamily="2" charset="2"/>
-              <a:buChar char="Ø"/>
-            </a:pPr>
-            <a:endParaRPr lang="fr-FR" dirty="0"/>
-          </a:p>
-          <a:p>
-            <a:endParaRPr lang="fr-FR" dirty="0"/>
-          </a:p>
-        </p:txBody>
-      </p:sp>
-      <p:sp>
-        <p:nvSpPr>
-          <p:cNvPr id="7" name="Rectangle 2">
-            <a:extLst>
-              <a:ext uri="{FF2B5EF4-FFF2-40B4-BE49-F238E27FC236}">
-                <a16:creationId xmlns:a16="http://schemas.microsoft.com/office/drawing/2014/main" id="{A93C32C6-9C38-4791-A753-B4DA8822BD08}"/>
-              </a:ext>
-            </a:extLst>
-          </p:cNvPr>
-          <p:cNvSpPr>
-            <a:spLocks noChangeArrowheads="1"/>
-          </p:cNvSpPr>
-          <p:nvPr/>
-        </p:nvSpPr>
-        <p:spPr bwMode="auto">
-          <a:xfrm>
-            <a:off x="849492" y="4173707"/>
-            <a:ext cx="3018263" cy="400110"/>
-          </a:xfrm>
-          <a:prstGeom prst="rect">
-            <a:avLst/>
-          </a:prstGeom>
-          <a:solidFill>
-            <a:srgbClr val="FFFFFF"/>
-          </a:solidFill>
-          <a:ln>
-            <a:noFill/>
-          </a:ln>
-          <a:effectLst/>
-          <a:extLst>
-            <a:ext uri="{91240B29-F687-4F45-9708-019B960494DF}">
-              <a14:hiddenLine xmlns:a14="http://schemas.microsoft.com/office/drawing/2010/main" w="9525">
-                <a:solidFill>
-                  <a:schemeClr val="tx1"/>
-                </a:solidFill>
-                <a:miter lim="800000"/>
-                <a:headEnd/>
-                <a:tailEnd/>
-              </a14:hiddenLine>
-            </a:ext>
-            <a:ext uri="{AF507438-7753-43E0-B8FC-AC1667EBCBE1}">
-              <a14:hiddenEffects xmlns:a14="http://schemas.microsoft.com/office/drawing/2010/main">
-                <a:effectLst>
-                  <a:outerShdw dist="35921" dir="2700000" algn="ctr" rotWithShape="0">
-                    <a:schemeClr val="bg2"/>
-                  </a:outerShdw>
-                </a:effectLst>
-              </a14:hiddenEffects>
-            </a:ext>
-          </a:extLst>
-        </p:spPr>
-        <p:txBody>
-          <a:bodyPr vert="horz" wrap="square" lIns="91440" tIns="45720" rIns="91440" bIns="45720" numCol="1" anchor="ctr" anchorCtr="0" compatLnSpc="1">
-            <a:prstTxWarp prst="textNoShape">
-              <a:avLst/>
-            </a:prstTxWarp>
-            <a:spAutoFit/>
-          </a:bodyPr>
-          <a:lstStyle/>
-          <a:p>
-            <a:pPr marL="0" marR="0" lvl="0" indent="0" algn="l" defTabSz="914400" rtl="0" eaLnBrk="0" fontAlgn="base" latinLnBrk="0" hangingPunct="0">
-              <a:lnSpc>
-                <a:spcPct val="100000"/>
-              </a:lnSpc>
-              <a:spcBef>
-                <a:spcPct val="0"/>
-              </a:spcBef>
-              <a:spcAft>
-                <a:spcPct val="0"/>
-              </a:spcAft>
-              <a:buClrTx/>
-              <a:buSzTx/>
-              <a:buFontTx/>
-              <a:buNone/>
-              <a:tabLst/>
-            </a:pPr>
-            <a:r>
-              <a:rPr kumimoji="0" lang="fr-FR" altLang="fr-FR" sz="1000" b="0" i="0" u="none" strike="noStrike" cap="none" normalizeH="0" baseline="0" dirty="0">
-                <a:ln>
-                  <a:noFill/>
-                </a:ln>
-                <a:solidFill>
-                  <a:srgbClr val="9E880D"/>
-                </a:solidFill>
-                <a:effectLst/>
-                <a:latin typeface="Fira Code"/>
-              </a:rPr>
-              <a:t>@OneToOne</a:t>
-            </a:r>
-            <a:r>
-              <a:rPr kumimoji="0" lang="fr-FR" altLang="fr-FR" sz="1000" b="0" i="0" u="none" strike="noStrike" cap="none" normalizeH="0" baseline="0" dirty="0">
-                <a:ln>
-                  <a:noFill/>
-                </a:ln>
-                <a:solidFill>
-                  <a:srgbClr val="080808"/>
-                </a:solidFill>
-                <a:effectLst/>
-                <a:latin typeface="Fira Code"/>
-              </a:rPr>
-              <a:t>(fetch = </a:t>
-            </a:r>
-            <a:r>
-              <a:rPr kumimoji="0" lang="fr-FR" altLang="fr-FR" sz="1000" b="0" i="0" u="none" strike="noStrike" cap="none" normalizeH="0" baseline="0" dirty="0" err="1">
-                <a:ln>
-                  <a:noFill/>
-                </a:ln>
-                <a:solidFill>
-                  <a:srgbClr val="000000"/>
-                </a:solidFill>
-                <a:effectLst/>
-                <a:latin typeface="Fira Code"/>
-              </a:rPr>
-              <a:t>FetchType</a:t>
-            </a:r>
-            <a:r>
-              <a:rPr kumimoji="0" lang="fr-FR" altLang="fr-FR" sz="1000" b="0" i="0" u="none" strike="noStrike" cap="none" normalizeH="0" baseline="0" dirty="0" err="1">
-                <a:ln>
-                  <a:noFill/>
-                </a:ln>
-                <a:solidFill>
-                  <a:srgbClr val="080808"/>
-                </a:solidFill>
-                <a:effectLst/>
-                <a:latin typeface="Fira Code"/>
-              </a:rPr>
-              <a:t>.</a:t>
-            </a:r>
-            <a:r>
-              <a:rPr kumimoji="0" lang="fr-FR" altLang="fr-FR" sz="1000" b="0" i="1" u="none" strike="noStrike" cap="none" normalizeH="0" baseline="0" dirty="0" err="1">
-                <a:ln>
-                  <a:noFill/>
-                </a:ln>
-                <a:solidFill>
-                  <a:srgbClr val="871094"/>
-                </a:solidFill>
-                <a:effectLst/>
-                <a:latin typeface="Fira Code"/>
-              </a:rPr>
-              <a:t>LAZY</a:t>
-            </a:r>
-            <a:r>
-              <a:rPr kumimoji="0" lang="fr-FR" altLang="fr-FR" sz="1000" b="0" i="0" u="none" strike="noStrike" cap="none" normalizeH="0" baseline="0" dirty="0">
-                <a:ln>
-                  <a:noFill/>
-                </a:ln>
-                <a:solidFill>
-                  <a:srgbClr val="080808"/>
-                </a:solidFill>
-                <a:effectLst/>
-                <a:latin typeface="Fira Code"/>
-              </a:rPr>
-              <a:t>)</a:t>
-            </a:r>
-            <a:br>
-              <a:rPr kumimoji="0" lang="fr-FR" altLang="fr-FR" sz="1000" b="0" i="0" u="none" strike="noStrike" cap="none" normalizeH="0" baseline="0" dirty="0">
-                <a:ln>
-                  <a:noFill/>
-                </a:ln>
-                <a:solidFill>
-                  <a:srgbClr val="080808"/>
-                </a:solidFill>
-                <a:effectLst/>
-                <a:latin typeface="Fira Code"/>
-              </a:rPr>
-            </a:br>
-            <a:r>
-              <a:rPr kumimoji="0" lang="fr-FR" altLang="fr-FR" sz="1000" b="0" i="0" u="none" strike="noStrike" cap="none" normalizeH="0" baseline="0" dirty="0" err="1">
-                <a:ln>
-                  <a:noFill/>
-                </a:ln>
-                <a:solidFill>
-                  <a:srgbClr val="0033B3"/>
-                </a:solidFill>
-                <a:effectLst/>
-                <a:latin typeface="Fira Code"/>
-              </a:rPr>
-              <a:t>private</a:t>
-            </a:r>
-            <a:r>
-              <a:rPr kumimoji="0" lang="fr-FR" altLang="fr-FR" sz="1000" b="0" i="0" u="none" strike="noStrike" cap="none" normalizeH="0" baseline="0" dirty="0">
-                <a:ln>
-                  <a:noFill/>
-                </a:ln>
-                <a:solidFill>
-                  <a:srgbClr val="0033B3"/>
-                </a:solidFill>
-                <a:effectLst/>
-                <a:latin typeface="Fira Code"/>
-              </a:rPr>
-              <a:t> </a:t>
-            </a:r>
-            <a:r>
-              <a:rPr kumimoji="0" lang="fr-FR" altLang="fr-FR" sz="1000" b="0" i="0" u="none" strike="noStrike" cap="none" normalizeH="0" baseline="0" dirty="0" err="1">
-                <a:ln>
-                  <a:noFill/>
-                </a:ln>
-                <a:solidFill>
-                  <a:srgbClr val="000000"/>
-                </a:solidFill>
-                <a:effectLst/>
-                <a:latin typeface="Fira Code"/>
-              </a:rPr>
-              <a:t>Director</a:t>
-            </a:r>
-            <a:r>
-              <a:rPr kumimoji="0" lang="fr-FR" altLang="fr-FR" sz="1000" b="0" i="0" u="none" strike="noStrike" cap="none" normalizeH="0" baseline="0" dirty="0">
-                <a:ln>
-                  <a:noFill/>
-                </a:ln>
-                <a:solidFill>
-                  <a:srgbClr val="000000"/>
-                </a:solidFill>
-                <a:effectLst/>
-                <a:latin typeface="Fira Code"/>
-              </a:rPr>
-              <a:t> </a:t>
-            </a:r>
-            <a:r>
-              <a:rPr kumimoji="0" lang="fr-FR" altLang="fr-FR" sz="1000" b="0" i="0" u="none" strike="noStrike" cap="none" normalizeH="0" baseline="0" dirty="0" err="1">
-                <a:ln>
-                  <a:noFill/>
-                </a:ln>
-                <a:solidFill>
-                  <a:srgbClr val="871094"/>
-                </a:solidFill>
-                <a:effectLst/>
-                <a:latin typeface="Fira Code"/>
-              </a:rPr>
-              <a:t>director</a:t>
-            </a:r>
-            <a:r>
-              <a:rPr kumimoji="0" lang="fr-FR" altLang="fr-FR" sz="1000" b="0" i="0" u="none" strike="noStrike" cap="none" normalizeH="0" baseline="0" dirty="0">
-                <a:ln>
-                  <a:noFill/>
-                </a:ln>
-                <a:solidFill>
-                  <a:srgbClr val="080808"/>
-                </a:solidFill>
-                <a:effectLst/>
-                <a:latin typeface="Fira Code"/>
-              </a:rPr>
-              <a:t>;</a:t>
-            </a:r>
-            <a:endParaRPr kumimoji="0" lang="fr-FR" altLang="fr-FR" sz="1800" b="0" i="0" u="none" strike="noStrike" cap="none" normalizeH="0" baseline="0" dirty="0">
-              <a:ln>
-                <a:noFill/>
-              </a:ln>
-              <a:solidFill>
-                <a:schemeClr val="tx1"/>
-              </a:solidFill>
-              <a:effectLst/>
-              <a:latin typeface="Arial" panose="020B0604020202020204" pitchFamily="34" charset="0"/>
-            </a:endParaRPr>
-          </a:p>
-        </p:txBody>
-      </p:sp>
-      <p:sp>
-        <p:nvSpPr>
-          <p:cNvPr id="3" name="Rectangle 1">
-            <a:extLst>
-              <a:ext uri="{FF2B5EF4-FFF2-40B4-BE49-F238E27FC236}">
-                <a16:creationId xmlns:a16="http://schemas.microsoft.com/office/drawing/2014/main" id="{AA16727A-6C9F-4BB4-A0D4-E7AE87AB7273}"/>
-              </a:ext>
-            </a:extLst>
-          </p:cNvPr>
-          <p:cNvSpPr>
-            <a:spLocks noChangeArrowheads="1"/>
-          </p:cNvSpPr>
-          <p:nvPr/>
-        </p:nvSpPr>
-        <p:spPr bwMode="auto">
-          <a:xfrm>
-            <a:off x="849492" y="4832405"/>
-            <a:ext cx="3018263" cy="400110"/>
-          </a:xfrm>
-          <a:prstGeom prst="rect">
-            <a:avLst/>
-          </a:prstGeom>
-          <a:solidFill>
-            <a:srgbClr val="FFFFFF"/>
-          </a:solidFill>
-          <a:ln>
-            <a:noFill/>
-          </a:ln>
-          <a:effectLst/>
-          <a:extLst>
-            <a:ext uri="{91240B29-F687-4F45-9708-019B960494DF}">
-              <a14:hiddenLine xmlns:a14="http://schemas.microsoft.com/office/drawing/2010/main" w="9525">
-                <a:solidFill>
-                  <a:schemeClr val="tx1"/>
-                </a:solidFill>
-                <a:miter lim="800000"/>
-                <a:headEnd/>
-                <a:tailEnd/>
-              </a14:hiddenLine>
-            </a:ext>
-            <a:ext uri="{AF507438-7753-43E0-B8FC-AC1667EBCBE1}">
-              <a14:hiddenEffects xmlns:a14="http://schemas.microsoft.com/office/drawing/2010/main">
-                <a:effectLst>
-                  <a:outerShdw dist="35921" dir="2700000" algn="ctr" rotWithShape="0">
-                    <a:schemeClr val="bg2"/>
-                  </a:outerShdw>
-                </a:effectLst>
-              </a14:hiddenEffects>
-            </a:ext>
-          </a:extLst>
-        </p:spPr>
-        <p:txBody>
-          <a:bodyPr vert="horz" wrap="square" lIns="91440" tIns="45720" rIns="91440" bIns="45720" numCol="1" anchor="ctr" anchorCtr="0" compatLnSpc="1">
-            <a:prstTxWarp prst="textNoShape">
-              <a:avLst/>
-            </a:prstTxWarp>
-            <a:spAutoFit/>
-          </a:bodyPr>
-          <a:lstStyle/>
-          <a:p>
-            <a:pPr marL="0" marR="0" lvl="0" indent="0" algn="l" defTabSz="914400" rtl="0" eaLnBrk="0" fontAlgn="base" latinLnBrk="0" hangingPunct="0">
-              <a:lnSpc>
-                <a:spcPct val="100000"/>
-              </a:lnSpc>
-              <a:spcBef>
-                <a:spcPct val="0"/>
-              </a:spcBef>
-              <a:spcAft>
-                <a:spcPct val="0"/>
-              </a:spcAft>
-              <a:buClrTx/>
-              <a:buSzTx/>
-              <a:buFontTx/>
-              <a:buNone/>
-              <a:tabLst/>
-            </a:pPr>
-            <a:r>
-              <a:rPr kumimoji="0" lang="fr-FR" altLang="fr-FR" sz="1000" b="0" i="0" u="none" strike="noStrike" cap="none" normalizeH="0" baseline="0" dirty="0">
-                <a:ln>
-                  <a:noFill/>
-                </a:ln>
-                <a:solidFill>
-                  <a:srgbClr val="9E880D"/>
-                </a:solidFill>
-                <a:effectLst/>
-                <a:latin typeface="Fira Code"/>
-              </a:rPr>
-              <a:t>@ManyToOne</a:t>
-            </a:r>
-            <a:r>
-              <a:rPr kumimoji="0" lang="fr-FR" altLang="fr-FR" sz="1000" b="0" i="0" u="none" strike="noStrike" cap="none" normalizeH="0" baseline="0" dirty="0">
-                <a:ln>
-                  <a:noFill/>
-                </a:ln>
-                <a:solidFill>
-                  <a:srgbClr val="080808"/>
-                </a:solidFill>
-                <a:effectLst/>
-                <a:latin typeface="Fira Code"/>
-              </a:rPr>
-              <a:t>(fetch = </a:t>
-            </a:r>
-            <a:r>
-              <a:rPr kumimoji="0" lang="fr-FR" altLang="fr-FR" sz="1000" b="0" i="0" u="none" strike="noStrike" cap="none" normalizeH="0" baseline="0" dirty="0" err="1">
-                <a:ln>
-                  <a:noFill/>
-                </a:ln>
-                <a:solidFill>
-                  <a:srgbClr val="000000"/>
-                </a:solidFill>
-                <a:effectLst/>
-                <a:latin typeface="Fira Code"/>
-              </a:rPr>
-              <a:t>FetchType</a:t>
-            </a:r>
-            <a:r>
-              <a:rPr kumimoji="0" lang="fr-FR" altLang="fr-FR" sz="1000" b="0" i="0" u="none" strike="noStrike" cap="none" normalizeH="0" baseline="0" dirty="0" err="1">
-                <a:ln>
-                  <a:noFill/>
-                </a:ln>
-                <a:solidFill>
-                  <a:srgbClr val="080808"/>
-                </a:solidFill>
-                <a:effectLst/>
-                <a:latin typeface="Fira Code"/>
-              </a:rPr>
-              <a:t>.</a:t>
-            </a:r>
-            <a:r>
-              <a:rPr kumimoji="0" lang="fr-FR" altLang="fr-FR" sz="1000" b="0" i="1" u="none" strike="noStrike" cap="none" normalizeH="0" baseline="0" dirty="0" err="1">
-                <a:ln>
-                  <a:noFill/>
-                </a:ln>
-                <a:solidFill>
-                  <a:srgbClr val="871094"/>
-                </a:solidFill>
-                <a:effectLst/>
-                <a:latin typeface="Fira Code"/>
-              </a:rPr>
-              <a:t>LAZY</a:t>
-            </a:r>
-            <a:r>
-              <a:rPr kumimoji="0" lang="fr-FR" altLang="fr-FR" sz="1000" b="0" i="0" u="none" strike="noStrike" cap="none" normalizeH="0" baseline="0" dirty="0">
-                <a:ln>
-                  <a:noFill/>
-                </a:ln>
-                <a:solidFill>
-                  <a:srgbClr val="080808"/>
-                </a:solidFill>
-                <a:effectLst/>
-                <a:latin typeface="Fira Code"/>
-              </a:rPr>
-              <a:t>)</a:t>
-            </a:r>
-            <a:br>
-              <a:rPr kumimoji="0" lang="fr-FR" altLang="fr-FR" sz="1000" b="0" i="0" u="none" strike="noStrike" cap="none" normalizeH="0" baseline="0" dirty="0">
-                <a:ln>
-                  <a:noFill/>
-                </a:ln>
-                <a:solidFill>
-                  <a:srgbClr val="080808"/>
-                </a:solidFill>
-                <a:effectLst/>
-                <a:latin typeface="Fira Code"/>
-              </a:rPr>
-            </a:br>
-            <a:r>
-              <a:rPr kumimoji="0" lang="fr-FR" altLang="fr-FR" sz="1000" b="0" i="0" u="none" strike="noStrike" cap="none" normalizeH="0" baseline="0" dirty="0" err="1">
-                <a:ln>
-                  <a:noFill/>
-                </a:ln>
-                <a:solidFill>
-                  <a:srgbClr val="0033B3"/>
-                </a:solidFill>
-                <a:effectLst/>
-                <a:latin typeface="Fira Code"/>
-              </a:rPr>
-              <a:t>private</a:t>
-            </a:r>
-            <a:r>
-              <a:rPr kumimoji="0" lang="fr-FR" altLang="fr-FR" sz="1000" b="0" i="0" u="none" strike="noStrike" cap="none" normalizeH="0" baseline="0" dirty="0">
-                <a:ln>
-                  <a:noFill/>
-                </a:ln>
-                <a:solidFill>
-                  <a:srgbClr val="0033B3"/>
-                </a:solidFill>
-                <a:effectLst/>
-                <a:latin typeface="Fira Code"/>
-              </a:rPr>
-              <a:t> </a:t>
-            </a:r>
-            <a:r>
-              <a:rPr kumimoji="0" lang="fr-FR" altLang="fr-FR" sz="1000" b="0" i="0" u="none" strike="noStrike" cap="none" normalizeH="0" baseline="0" dirty="0" err="1">
-                <a:ln>
-                  <a:noFill/>
-                </a:ln>
-                <a:solidFill>
-                  <a:srgbClr val="000000"/>
-                </a:solidFill>
-                <a:effectLst/>
-                <a:latin typeface="Fira Code"/>
-              </a:rPr>
-              <a:t>School</a:t>
-            </a:r>
-            <a:r>
-              <a:rPr kumimoji="0" lang="fr-FR" altLang="fr-FR" sz="1000" b="0" i="0" u="none" strike="noStrike" cap="none" normalizeH="0" baseline="0" dirty="0">
-                <a:ln>
-                  <a:noFill/>
-                </a:ln>
-                <a:solidFill>
-                  <a:srgbClr val="000000"/>
-                </a:solidFill>
-                <a:effectLst/>
-                <a:latin typeface="Fira Code"/>
-              </a:rPr>
-              <a:t> </a:t>
-            </a:r>
-            <a:r>
-              <a:rPr kumimoji="0" lang="fr-FR" altLang="fr-FR" sz="1000" b="0" i="0" u="none" strike="noStrike" cap="none" normalizeH="0" baseline="0" dirty="0" err="1">
-                <a:ln>
-                  <a:noFill/>
-                </a:ln>
-                <a:solidFill>
-                  <a:srgbClr val="871094"/>
-                </a:solidFill>
-                <a:effectLst/>
-                <a:latin typeface="Fira Code"/>
-              </a:rPr>
-              <a:t>school</a:t>
-            </a:r>
-            <a:r>
-              <a:rPr kumimoji="0" lang="fr-FR" altLang="fr-FR" sz="1000" b="0" i="0" u="none" strike="noStrike" cap="none" normalizeH="0" baseline="0" dirty="0">
-                <a:ln>
-                  <a:noFill/>
-                </a:ln>
-                <a:solidFill>
-                  <a:srgbClr val="080808"/>
-                </a:solidFill>
-                <a:effectLst/>
-                <a:latin typeface="Fira Code"/>
-              </a:rPr>
-              <a:t>;</a:t>
-            </a:r>
-            <a:endParaRPr kumimoji="0" lang="fr-FR" altLang="fr-FR" sz="1800" b="0" i="0" u="none" strike="noStrike" cap="none" normalizeH="0" baseline="0" dirty="0">
-              <a:ln>
-                <a:noFill/>
-              </a:ln>
-              <a:solidFill>
-                <a:schemeClr val="tx1"/>
-              </a:solidFill>
-              <a:effectLst/>
-              <a:latin typeface="Arial" panose="020B0604020202020204" pitchFamily="34" charset="0"/>
-            </a:endParaRPr>
-          </a:p>
-        </p:txBody>
-      </p:sp>
-    </p:spTree>
-    <p:extLst>
-      <p:ext uri="{BB962C8B-B14F-4D97-AF65-F5344CB8AC3E}">
-        <p14:creationId xmlns:p14="http://schemas.microsoft.com/office/powerpoint/2010/main" val="1501793512"/>
-      </p:ext>
-    </p:extLst>
-  </p:cSld>
-  <p:clrMapOvr>
-    <a:masterClrMapping/>
-  </p:clrMapOvr>
-  <mc:AlternateContent xmlns:mc="http://schemas.openxmlformats.org/markup-compatibility/2006" xmlns:p14="http://schemas.microsoft.com/office/powerpoint/2010/main">
-    <mc:Choice Requires="p14">
-      <p:transition p14:dur="10"/>
-    </mc:Choice>
-    <mc:Fallback xmlns="">
-      <p:transition/>
-    </mc:Fallback>
-  </mc:AlternateContent>
-  <p:timing>
-    <p:tnLst>
-      <p:par>
-        <p:cTn id="1" dur="indefinite" restart="never" nodeType="tmRoot">
-          <p:childTnLst>
-            <p:seq concurrent="1" nextAc="seek">
-              <p:cTn id="2" dur="indefinite" nodeType="mainSeq">
-                <p:childTnLst>
-                  <p:par>
-                    <p:cTn id="3" fill="hold">
-                      <p:stCondLst>
-                        <p:cond delay="indefinite"/>
-                      </p:stCondLst>
-                      <p:childTnLst>
-                        <p:par>
-                          <p:cTn id="4" fill="hold">
-                            <p:stCondLst>
-                              <p:cond delay="0"/>
-                            </p:stCondLst>
-                            <p:childTnLst>
-                              <p:par>
-                                <p:cTn id="5" presetID="1" presetClass="entr" presetSubtype="0" fill="hold" nodeType="clickEffect">
-                                  <p:stCondLst>
-                                    <p:cond delay="0"/>
-                                  </p:stCondLst>
-                                  <p:childTnLst>
-                                    <p:set>
-                                      <p:cBhvr>
-                                        <p:cTn id="6" dur="1" fill="hold">
-                                          <p:stCondLst>
-                                            <p:cond delay="0"/>
-                                          </p:stCondLst>
-                                        </p:cTn>
-                                        <p:tgtEl>
-                                          <p:spTgt spid="2">
-                                            <p:txEl>
-                                              <p:pRg st="0" end="0"/>
-                                            </p:txEl>
-                                          </p:spTgt>
-                                        </p:tgtEl>
-                                        <p:attrNameLst>
-                                          <p:attrName>style.visibility</p:attrName>
-                                        </p:attrNameLst>
-                                      </p:cBhvr>
-                                      <p:to>
-                                        <p:strVal val="visible"/>
-                                      </p:to>
-                                    </p:set>
-                                  </p:childTnLst>
-                                </p:cTn>
-                              </p:par>
-                            </p:childTnLst>
-                          </p:cTn>
-                        </p:par>
-                      </p:childTnLst>
-                    </p:cTn>
-                  </p:par>
-                  <p:par>
-                    <p:cTn id="7" fill="hold">
-                      <p:stCondLst>
-                        <p:cond delay="indefinite"/>
-                      </p:stCondLst>
-                      <p:childTnLst>
-                        <p:par>
-                          <p:cTn id="8" fill="hold">
-                            <p:stCondLst>
-                              <p:cond delay="0"/>
-                            </p:stCondLst>
-                            <p:childTnLst>
-                              <p:par>
-                                <p:cTn id="9" presetID="1" presetClass="entr" presetSubtype="0" fill="hold" nodeType="clickEffect">
-                                  <p:stCondLst>
-                                    <p:cond delay="0"/>
-                                  </p:stCondLst>
-                                  <p:childTnLst>
-                                    <p:set>
-                                      <p:cBhvr>
-                                        <p:cTn id="10" dur="1" fill="hold">
-                                          <p:stCondLst>
-                                            <p:cond delay="0"/>
-                                          </p:stCondLst>
-                                        </p:cTn>
-                                        <p:tgtEl>
-                                          <p:spTgt spid="2">
-                                            <p:txEl>
-                                              <p:pRg st="1" end="1"/>
-                                            </p:txEl>
-                                          </p:spTgt>
-                                        </p:tgtEl>
-                                        <p:attrNameLst>
-                                          <p:attrName>style.visibility</p:attrName>
-                                        </p:attrNameLst>
-                                      </p:cBhvr>
-                                      <p:to>
-                                        <p:strVal val="visible"/>
-                                      </p:to>
-                                    </p:set>
-                                  </p:childTnLst>
-                                </p:cTn>
-                              </p:par>
-                            </p:childTnLst>
-                          </p:cTn>
-                        </p:par>
-                      </p:childTnLst>
-                    </p:cTn>
-                  </p:par>
-                  <p:par>
-                    <p:cTn id="11" fill="hold">
-                      <p:stCondLst>
-                        <p:cond delay="indefinite"/>
-                      </p:stCondLst>
-                      <p:childTnLst>
-                        <p:par>
-                          <p:cTn id="12" fill="hold">
-                            <p:stCondLst>
-                              <p:cond delay="0"/>
-                            </p:stCondLst>
-                            <p:childTnLst>
-                              <p:par>
-                                <p:cTn id="13" presetID="1" presetClass="entr" presetSubtype="0" fill="hold" nodeType="clickEffect">
-                                  <p:stCondLst>
-                                    <p:cond delay="0"/>
-                                  </p:stCondLst>
-                                  <p:childTnLst>
-                                    <p:set>
-                                      <p:cBhvr>
-                                        <p:cTn id="14" dur="1" fill="hold">
-                                          <p:stCondLst>
-                                            <p:cond delay="0"/>
-                                          </p:stCondLst>
-                                        </p:cTn>
-                                        <p:tgtEl>
-                                          <p:spTgt spid="2">
-                                            <p:txEl>
-                                              <p:pRg st="3" end="3"/>
-                                            </p:txEl>
-                                          </p:spTgt>
-                                        </p:tgtEl>
-                                        <p:attrNameLst>
-                                          <p:attrName>style.visibility</p:attrName>
-                                        </p:attrNameLst>
-                                      </p:cBhvr>
-                                      <p:to>
-                                        <p:strVal val="visible"/>
-                                      </p:to>
-                                    </p:set>
-                                  </p:childTnLst>
-                                </p:cTn>
-                              </p:par>
-                            </p:childTnLst>
-                          </p:cTn>
-                        </p:par>
-                      </p:childTnLst>
-                    </p:cTn>
-                  </p:par>
-                  <p:par>
-                    <p:cTn id="15" fill="hold">
-                      <p:stCondLst>
-                        <p:cond delay="indefinite"/>
-                      </p:stCondLst>
-                      <p:childTnLst>
-                        <p:par>
-                          <p:cTn id="16" fill="hold">
-                            <p:stCondLst>
-                              <p:cond delay="0"/>
-                            </p:stCondLst>
-                            <p:childTnLst>
-                              <p:par>
-                                <p:cTn id="17" presetID="1" presetClass="entr" presetSubtype="0" fill="hold" nodeType="clickEffect">
-                                  <p:stCondLst>
-                                    <p:cond delay="0"/>
-                                  </p:stCondLst>
-                                  <p:childTnLst>
-                                    <p:set>
-                                      <p:cBhvr>
-                                        <p:cTn id="18" dur="1" fill="hold">
-                                          <p:stCondLst>
-                                            <p:cond delay="0"/>
-                                          </p:stCondLst>
-                                        </p:cTn>
-                                        <p:tgtEl>
-                                          <p:spTgt spid="2">
-                                            <p:txEl>
-                                              <p:pRg st="6" end="6"/>
-                                            </p:txEl>
-                                          </p:spTgt>
-                                        </p:tgtEl>
-                                        <p:attrNameLst>
-                                          <p:attrName>style.visibility</p:attrName>
-                                        </p:attrNameLst>
-                                      </p:cBhvr>
-                                      <p:to>
-                                        <p:strVal val="visible"/>
-                                      </p:to>
-                                    </p:set>
-                                  </p:childTnLst>
-                                </p:cTn>
-                              </p:par>
-                              <p:par>
-                                <p:cTn id="19" presetID="1" presetClass="entr" presetSubtype="0" fill="hold" grpId="0" nodeType="withEffect">
-                                  <p:stCondLst>
-                                    <p:cond delay="0"/>
-                                  </p:stCondLst>
-                                  <p:childTnLst>
-                                    <p:set>
-                                      <p:cBhvr>
-                                        <p:cTn id="20" dur="1" fill="hold">
-                                          <p:stCondLst>
-                                            <p:cond delay="0"/>
-                                          </p:stCondLst>
-                                        </p:cTn>
-                                        <p:tgtEl>
-                                          <p:spTgt spid="7"/>
-                                        </p:tgtEl>
-                                        <p:attrNameLst>
-                                          <p:attrName>style.visibility</p:attrName>
-                                        </p:attrNameLst>
-                                      </p:cBhvr>
-                                      <p:to>
-                                        <p:strVal val="visible"/>
-                                      </p:to>
-                                    </p:set>
-                                  </p:childTnLst>
-                                </p:cTn>
-                              </p:par>
-                              <p:par>
-                                <p:cTn id="21" presetID="1" presetClass="entr" presetSubtype="0" fill="hold" grpId="0" nodeType="withEffect">
-                                  <p:stCondLst>
-                                    <p:cond delay="0"/>
-                                  </p:stCondLst>
-                                  <p:childTnLst>
-                                    <p:set>
-                                      <p:cBhvr>
-                                        <p:cTn id="22" dur="1" fill="hold">
-                                          <p:stCondLst>
-                                            <p:cond delay="0"/>
-                                          </p:stCondLst>
-                                        </p:cTn>
-                                        <p:tgtEl>
-                                          <p:spTgt spid="3"/>
-                                        </p:tgtEl>
-                                        <p:attrNameLst>
-                                          <p:attrName>style.visibility</p:attrName>
-                                        </p:attrNameLst>
-                                      </p:cBhvr>
-                                      <p:to>
-                                        <p:strVal val="visible"/>
-                                      </p:to>
-                                    </p:set>
-                                  </p:childTnLst>
-                                </p:cTn>
-                              </p:par>
-                            </p:childTnLst>
-                          </p:cTn>
-                        </p:par>
-                      </p:childTnLst>
-                    </p:cTn>
-                  </p:par>
-                </p:childTnLst>
-              </p:cTn>
-              <p:prevCondLst>
-                <p:cond evt="onPrev" delay="0">
-                  <p:tgtEl>
-                    <p:sldTgt/>
-                  </p:tgtEl>
-                </p:cond>
-              </p:prevCondLst>
-              <p:nextCondLst>
-                <p:cond evt="onNext" delay="0">
-                  <p:tgtEl>
-                    <p:sldTgt/>
-                  </p:tgtEl>
-                </p:cond>
-              </p:nextCondLst>
-            </p:seq>
-          </p:childTnLst>
-        </p:cTn>
-      </p:par>
-    </p:tnLst>
-    <p:bldLst>
-      <p:bldP spid="7" grpId="0" animBg="1"/>
       <p:bldP spid="3" grpId="0" animBg="1"/>
     </p:bldLst>
   </p:timing>

--- a/JPA-HIBERNATE.pptx
+++ b/JPA-HIBERNATE.pptx
@@ -293,7 +293,7 @@
             <a:pPr rtl="0"/>
             <a:fld id="{3C80F580-3B6A-44CD-9A1E-E890016126F8}" type="datetime1">
               <a:rPr lang="fr-FR" smtClean="0"/>
-              <a:t>20/06/2021</a:t>
+              <a:t>21/06/2021</a:t>
             </a:fld>
             <a:endParaRPr lang="fr-FR"/>
           </a:p>
@@ -463,7 +463,7 @@
             <a:pPr rtl="0"/>
             <a:fld id="{7DF8ED89-FBF4-48E3-B6C6-C071DA98F802}" type="datetime1">
               <a:rPr lang="fr-FR" noProof="1" dirty="0" smtClean="0"/>
-              <a:t>20/06/2021</a:t>
+              <a:t>21/06/2021</a:t>
             </a:fld>
             <a:endParaRPr lang="fr-FR" noProof="1"/>
           </a:p>
@@ -1357,7 +1357,7 @@
           <a:p>
             <a:r>
               <a:rPr lang="fr-FR" noProof="1"/>
-              <a:t>Defaut : fonctionne très bien sur la récupération d’une seule entité, mais dès lors que l’on veut récupérer une liste avec ou sans pagination, nous arons bcp de N+1</a:t>
+              <a:t>Defaut : fonctionne très bien sur la récupération d’une seule entité, mais dès lors que l’on veut récupérer une liste avec ou sans pagination, nous arons bcp de N+1, Mais même sur une seule entite, on peut faire mieux</a:t>
             </a:r>
           </a:p>
           <a:p>
@@ -4194,7 +4194,7 @@
             <a:pPr rtl="0"/>
             <a:fld id="{7DF3CA4B-903E-431D-AF93-2AD02E04DE8A}" type="datetime1">
               <a:rPr lang="fr-FR" noProof="0" smtClean="0"/>
-              <a:t>20/06/2021</a:t>
+              <a:t>21/06/2021</a:t>
             </a:fld>
             <a:endParaRPr lang="fr-FR" noProof="0"/>
           </a:p>
@@ -4820,7 +4820,7 @@
             <a:pPr rtl="0"/>
             <a:fld id="{802CD4F2-526B-4131-B91B-856C46007FC5}" type="datetime1">
               <a:rPr lang="fr-FR" noProof="0" smtClean="0"/>
-              <a:t>20/06/2021</a:t>
+              <a:t>21/06/2021</a:t>
             </a:fld>
             <a:endParaRPr lang="fr-FR" noProof="0"/>
           </a:p>
@@ -10974,45 +10974,6 @@
           </a:fontRef>
         </p:style>
       </p:cxnSp>
-      <p:sp>
-        <p:nvSpPr>
-          <p:cNvPr id="31" name="ZoneTexte 30">
-            <a:extLst>
-              <a:ext uri="{FF2B5EF4-FFF2-40B4-BE49-F238E27FC236}">
-                <a16:creationId xmlns:a16="http://schemas.microsoft.com/office/drawing/2014/main" id="{D61B7011-D4DF-4F0D-8D1C-7E0073E45A83}"/>
-              </a:ext>
-            </a:extLst>
-          </p:cNvPr>
-          <p:cNvSpPr txBox="1"/>
-          <p:nvPr/>
-        </p:nvSpPr>
-        <p:spPr>
-          <a:xfrm>
-            <a:off x="4617719" y="6256932"/>
-            <a:ext cx="823285" cy="457213"/>
-          </a:xfrm>
-          <a:prstGeom prst="rect">
-            <a:avLst/>
-          </a:prstGeom>
-          <a:noFill/>
-        </p:spPr>
-        <p:txBody>
-          <a:bodyPr wrap="square" rtlCol="0">
-            <a:spAutoFit/>
-          </a:bodyPr>
-          <a:lstStyle/>
-          <a:p>
-            <a:r>
-              <a:rPr lang="fr-FR" sz="2400" b="1" dirty="0">
-                <a:solidFill>
-                  <a:srgbClr val="FF0000"/>
-                </a:solidFill>
-              </a:rPr>
-              <a:t>N+1</a:t>
-            </a:r>
-          </a:p>
-        </p:txBody>
-      </p:sp>
       <p:cxnSp>
         <p:nvCxnSpPr>
           <p:cNvPr id="33" name="Connecteur droit avec flèche 32">
@@ -11030,7 +10991,7 @@
         </p:nvCxnSpPr>
         <p:spPr>
           <a:xfrm flipH="1">
-            <a:off x="5441004" y="5509009"/>
+            <a:off x="5441004" y="5552041"/>
             <a:ext cx="1407598" cy="976530"/>
           </a:xfrm>
           <a:prstGeom prst="straightConnector1">
@@ -11075,7 +11036,7 @@
         </p:nvCxnSpPr>
         <p:spPr>
           <a:xfrm>
-            <a:off x="2347935" y="5474119"/>
+            <a:off x="2347935" y="5517151"/>
             <a:ext cx="2269784" cy="1011420"/>
           </a:xfrm>
           <a:prstGeom prst="straightConnector1">
@@ -11103,6 +11064,45 @@
           </a:fontRef>
         </p:style>
       </p:cxnSp>
+      <p:sp>
+        <p:nvSpPr>
+          <p:cNvPr id="31" name="ZoneTexte 30">
+            <a:extLst>
+              <a:ext uri="{FF2B5EF4-FFF2-40B4-BE49-F238E27FC236}">
+                <a16:creationId xmlns:a16="http://schemas.microsoft.com/office/drawing/2014/main" id="{D61B7011-D4DF-4F0D-8D1C-7E0073E45A83}"/>
+              </a:ext>
+            </a:extLst>
+          </p:cNvPr>
+          <p:cNvSpPr txBox="1"/>
+          <p:nvPr/>
+        </p:nvSpPr>
+        <p:spPr>
+          <a:xfrm>
+            <a:off x="4617719" y="6299964"/>
+            <a:ext cx="823285" cy="457213"/>
+          </a:xfrm>
+          <a:prstGeom prst="rect">
+            <a:avLst/>
+          </a:prstGeom>
+          <a:noFill/>
+        </p:spPr>
+        <p:txBody>
+          <a:bodyPr wrap="square" rtlCol="0">
+            <a:spAutoFit/>
+          </a:bodyPr>
+          <a:lstStyle/>
+          <a:p>
+            <a:r>
+              <a:rPr lang="fr-FR" sz="2400" b="1" dirty="0">
+                <a:solidFill>
+                  <a:srgbClr val="FF0000"/>
+                </a:solidFill>
+              </a:rPr>
+              <a:t>N+1</a:t>
+            </a:r>
+          </a:p>
+        </p:txBody>
+      </p:sp>
     </p:spTree>
     <p:extLst>
       <p:ext uri="{BB962C8B-B14F-4D97-AF65-F5344CB8AC3E}">
@@ -16484,7 +16484,7 @@
         <p:spPr>
           <a:xfrm>
             <a:off x="9811256" y="5235569"/>
-            <a:ext cx="1725747" cy="646331"/>
+            <a:ext cx="1725747" cy="923330"/>
           </a:xfrm>
           <a:prstGeom prst="rect">
             <a:avLst/>
@@ -16505,6 +16505,22 @@
               </a:rPr>
               <a:t>Démo ?</a:t>
             </a:r>
+          </a:p>
+          <a:p>
+            <a:r>
+              <a:rPr lang="fr-FR" altLang="fr-FR" dirty="0" err="1">
+                <a:solidFill>
+                  <a:srgbClr val="067D17"/>
+                </a:solidFill>
+                <a:latin typeface="Fira Code"/>
+              </a:rPr>
+              <a:t>findById</a:t>
+            </a:r>
+            <a:endParaRPr lang="fr-FR" b="1" dirty="0">
+              <a:solidFill>
+                <a:srgbClr val="FF0000"/>
+              </a:solidFill>
+            </a:endParaRPr>
           </a:p>
           <a:p>
             <a:r>
@@ -18826,8 +18842,8 @@
         </p:nvSpPr>
         <p:spPr>
           <a:xfrm>
-            <a:off x="521207" y="5188390"/>
-            <a:ext cx="10065833" cy="1477328"/>
+            <a:off x="521207" y="5091569"/>
+            <a:ext cx="10065833" cy="1754326"/>
           </a:xfrm>
           <a:prstGeom prst="rect">
             <a:avLst/>
@@ -18846,32 +18862,7 @@
             </a:pPr>
             <a:r>
               <a:rPr lang="fr-FR" dirty="0"/>
-              <a:t>Réalise un produit cartésien, mais avec une seule requête </a:t>
-            </a:r>
-            <a:r>
-              <a:rPr lang="fr-FR" dirty="0" err="1">
-                <a:solidFill>
-                  <a:srgbClr val="FF0000"/>
-                </a:solidFill>
-              </a:rPr>
-              <a:t>Demo</a:t>
-            </a:r>
-            <a:r>
-              <a:rPr lang="fr-FR" dirty="0">
-                <a:solidFill>
-                  <a:srgbClr val="FF0000"/>
-                </a:solidFill>
-              </a:rPr>
-              <a:t> ? </a:t>
-            </a:r>
-            <a:r>
-              <a:rPr lang="fr-FR" altLang="fr-FR" dirty="0" err="1">
-                <a:solidFill>
-                  <a:srgbClr val="067D17"/>
-                </a:solidFill>
-                <a:latin typeface="Fira Code"/>
-              </a:rPr>
-              <a:t>findByLocation</a:t>
+              <a:t>Réalise un produit cartésien, mais avec une seule requête</a:t>
             </a:r>
             <a:br>
               <a:rPr lang="fr-FR" dirty="0">
@@ -18999,6 +18990,92 @@
               <a:rPr lang="fr-FR" dirty="0"/>
               <a:t>)</a:t>
             </a:r>
+          </a:p>
+          <a:p>
+            <a:pPr marL="285750" indent="-285750">
+              <a:buFont typeface="Wingdings" panose="05000000000000000000" pitchFamily="2" charset="2"/>
+              <a:buChar char="Ø"/>
+            </a:pPr>
+            <a:r>
+              <a:rPr lang="fr-FR" dirty="0"/>
+              <a:t>Si recherche, utilisez la clause </a:t>
+            </a:r>
+            <a:r>
+              <a:rPr lang="fr-FR" dirty="0" err="1"/>
+              <a:t>limit</a:t>
+            </a:r>
+            <a:endParaRPr lang="fr-FR" dirty="0"/>
+          </a:p>
+        </p:txBody>
+      </p:sp>
+      <p:sp>
+        <p:nvSpPr>
+          <p:cNvPr id="7" name="ZoneTexte 6">
+            <a:extLst>
+              <a:ext uri="{FF2B5EF4-FFF2-40B4-BE49-F238E27FC236}">
+                <a16:creationId xmlns:a16="http://schemas.microsoft.com/office/drawing/2014/main" id="{D819BF36-B9EE-4A35-9774-BC2012A8FE53}"/>
+              </a:ext>
+            </a:extLst>
+          </p:cNvPr>
+          <p:cNvSpPr txBox="1"/>
+          <p:nvPr/>
+        </p:nvSpPr>
+        <p:spPr>
+          <a:xfrm>
+            <a:off x="10166258" y="5569056"/>
+            <a:ext cx="1725747" cy="923330"/>
+          </a:xfrm>
+          <a:prstGeom prst="rect">
+            <a:avLst/>
+          </a:prstGeom>
+          <a:noFill/>
+        </p:spPr>
+        <p:txBody>
+          <a:bodyPr wrap="square" rtlCol="0">
+            <a:spAutoFit/>
+          </a:bodyPr>
+          <a:lstStyle/>
+          <a:p>
+            <a:r>
+              <a:rPr lang="fr-FR" b="1" dirty="0">
+                <a:solidFill>
+                  <a:srgbClr val="FF0000"/>
+                </a:solidFill>
+              </a:rPr>
+              <a:t>Démo ?</a:t>
+            </a:r>
+          </a:p>
+          <a:p>
+            <a:r>
+              <a:rPr lang="fr-FR" altLang="fr-FR" dirty="0" err="1">
+                <a:solidFill>
+                  <a:srgbClr val="067D17"/>
+                </a:solidFill>
+                <a:latin typeface="Fira Code"/>
+              </a:rPr>
+              <a:t>findById</a:t>
+            </a:r>
+            <a:endParaRPr lang="fr-FR" b="1" dirty="0">
+              <a:solidFill>
+                <a:srgbClr val="FF0000"/>
+              </a:solidFill>
+            </a:endParaRPr>
+          </a:p>
+          <a:p>
+            <a:r>
+              <a:rPr lang="fr-FR" altLang="fr-FR" dirty="0" err="1">
+                <a:solidFill>
+                  <a:srgbClr val="067D17"/>
+                </a:solidFill>
+                <a:latin typeface="Fira Code"/>
+              </a:rPr>
+              <a:t>findByLocation</a:t>
+            </a:r>
+            <a:endParaRPr lang="fr-FR" b="1" dirty="0">
+              <a:solidFill>
+                <a:srgbClr val="FF0000"/>
+              </a:solidFill>
+            </a:endParaRPr>
           </a:p>
         </p:txBody>
       </p:sp>
@@ -19090,7 +19167,7 @@
                             </p:stCondLst>
                             <p:childTnLst>
                               <p:par>
-                                <p:cTn id="9" presetID="1" presetClass="entr" presetSubtype="0" fill="hold" nodeType="clickEffect">
+                                <p:cTn id="9" presetID="1" presetClass="entr" presetSubtype="0" fill="hold" grpId="0" nodeType="clickEffect">
                                   <p:stCondLst>
                                     <p:cond delay="0"/>
                                   </p:stCondLst>
@@ -19103,11 +19180,7 @@
                                           </p:stCondLst>
                                         </p:cTn>
                                         <p:tgtEl>
-                                          <p:spTgt spid="9">
-                                            <p:txEl>
-                                              <p:pRg st="1" end="1"/>
-                                            </p:txEl>
-                                          </p:spTgt>
+                                          <p:spTgt spid="7"/>
                                         </p:tgtEl>
                                         <p:attrNameLst>
                                           <p:attrName>style.visibility</p:attrName>
@@ -19154,7 +19227,7 @@
                                         <p:tgtEl>
                                           <p:spTgt spid="9">
                                             <p:txEl>
-                                              <p:pRg st="2" end="2"/>
+                                              <p:pRg st="1" end="1"/>
                                             </p:txEl>
                                           </p:spTgt>
                                         </p:tgtEl>
@@ -19203,7 +19276,105 @@
                                         <p:tgtEl>
                                           <p:spTgt spid="9">
                                             <p:txEl>
+                                              <p:pRg st="2" end="2"/>
+                                            </p:txEl>
+                                          </p:spTgt>
+                                        </p:tgtEl>
+                                        <p:attrNameLst>
+                                          <p:attrName>style.visibility</p:attrName>
+                                        </p:attrNameLst>
+                                      </p:cBhvr>
+                                      <p:to>
+                                        <p:strVal val="visible"/>
+                                      </p:to>
+                                    </p:set>
+                                  </p:childTnLst>
+                                </p:cTn>
+                              </p:par>
+                            </p:childTnLst>
+                          </p:cTn>
+                        </p:par>
+                      </p:childTnLst>
+                    </p:cTn>
+                  </p:par>
+                  <p:par>
+                    <p:cTn id="19" fill="hold">
+                      <p:stCondLst>
+                        <p:cond delay="indefinite"/>
+                      </p:stCondLst>
+                      <p:childTnLst>
+                        <p:par>
+                          <p:cTn id="20" fill="hold">
+                            <p:stCondLst>
+                              <p:cond delay="0"/>
+                            </p:stCondLst>
+                            <p:childTnLst>
+                              <p:par>
+                                <p:cTn id="21" presetID="1" presetClass="entr" presetSubtype="0" fill="hold" nodeType="clickEffect">
+                                  <p:stCondLst>
+                                    <p:cond delay="0"/>
+                                  </p:stCondLst>
+                                  <p:childTnLst>
+                                    <p:set>
+                                      <p:cBhvr>
+                                        <p:cTn id="22" dur="1" fill="hold">
+                                          <p:stCondLst>
+                                            <p:cond delay="0"/>
+                                          </p:stCondLst>
+                                        </p:cTn>
+                                        <p:tgtEl>
+                                          <p:spTgt spid="9">
+                                            <p:txEl>
                                               <p:pRg st="3" end="3"/>
+                                            </p:txEl>
+                                          </p:spTgt>
+                                        </p:tgtEl>
+                                        <p:attrNameLst>
+                                          <p:attrName>style.visibility</p:attrName>
+                                        </p:attrNameLst>
+                                      </p:cBhvr>
+                                      <p:to>
+                                        <p:strVal val="visible"/>
+                                      </p:to>
+                                    </p:set>
+                                  </p:childTnLst>
+                                </p:cTn>
+                              </p:par>
+                            </p:childTnLst>
+                          </p:cTn>
+                        </p:par>
+                      </p:childTnLst>
+                    </p:cTn>
+                  </p:par>
+                  <p:par>
+                    <p:cTn id="23" fill="hold">
+                      <p:stCondLst>
+                        <p:cond delay="indefinite"/>
+                      </p:stCondLst>
+                      <p:childTnLst>
+                        <p:par>
+                          <p:cTn id="24" fill="hold">
+                            <p:stCondLst>
+                              <p:cond delay="0"/>
+                            </p:stCondLst>
+                            <p:childTnLst>
+                              <p:par>
+                                <p:cTn id="25" presetID="1" presetClass="entr" presetSubtype="0" fill="hold" nodeType="clickEffect">
+                                  <p:stCondLst>
+                                    <p:cond delay="0"/>
+                                  </p:stCondLst>
+                                  <p:childTnLst>
+                                    <p:set>
+                                      <p:cBhvr>
+                                        <p:cTn id="26" dur="1" fill="hold">
+                                          <p:stCondLst>
+                                            <p:cond delay="0"/>
+                                          </p:stCondLst>
+                                        </p:cTn>
+                                        <p:tgtEl>
+                                          <p:spTgt spid="9">
+                                            <p:txEl>
+                                              <p:pRg st="4" end="4"/>
                                             </p:txEl>
                                           </p:spTgt>
                                         </p:tgtEl>
@@ -19245,6 +19416,9 @@
         </p:cTn>
       </p:par>
     </p:tnLst>
+    <p:bldLst>
+      <p:bldP spid="7" grpId="0"/>
+    </p:bldLst>
   </p:timing>
 </p:sld>
 </file>
@@ -20847,6 +21021,61 @@
               <a:rPr lang="fr-FR" sz="1400" dirty="0"/>
               <a:t>}</a:t>
             </a:r>
+          </a:p>
+        </p:txBody>
+      </p:sp>
+      <p:sp>
+        <p:nvSpPr>
+          <p:cNvPr id="8" name="ZoneTexte 7">
+            <a:extLst>
+              <a:ext uri="{FF2B5EF4-FFF2-40B4-BE49-F238E27FC236}">
+                <a16:creationId xmlns:a16="http://schemas.microsoft.com/office/drawing/2014/main" id="{7660169F-952A-4E96-B592-E414BD734445}"/>
+              </a:ext>
+            </a:extLst>
+          </p:cNvPr>
+          <p:cNvSpPr txBox="1"/>
+          <p:nvPr/>
+        </p:nvSpPr>
+        <p:spPr>
+          <a:xfrm>
+            <a:off x="10015651" y="5622845"/>
+            <a:ext cx="1860791" cy="646331"/>
+          </a:xfrm>
+          <a:prstGeom prst="rect">
+            <a:avLst/>
+          </a:prstGeom>
+          <a:noFill/>
+        </p:spPr>
+        <p:txBody>
+          <a:bodyPr wrap="square" rtlCol="0">
+            <a:spAutoFit/>
+          </a:bodyPr>
+          <a:lstStyle/>
+          <a:p>
+            <a:r>
+              <a:rPr lang="fr-FR" b="1" dirty="0">
+                <a:solidFill>
+                  <a:srgbClr val="FF0000"/>
+                </a:solidFill>
+              </a:rPr>
+              <a:t>Démo ?</a:t>
+            </a:r>
+          </a:p>
+          <a:p>
+            <a:r>
+              <a:rPr lang="fr-FR" altLang="fr-FR" dirty="0" err="1">
+                <a:solidFill>
+                  <a:srgbClr val="067D17"/>
+                </a:solidFill>
+                <a:latin typeface="Fira Code"/>
+              </a:rPr>
+              <a:t>findAllPagination</a:t>
+            </a:r>
+            <a:endParaRPr lang="fr-FR" b="1" dirty="0">
+              <a:solidFill>
+                <a:srgbClr val="FF0000"/>
+              </a:solidFill>
+            </a:endParaRPr>
           </a:p>
         </p:txBody>
       </p:sp>
@@ -21020,6 +21249,51 @@
                       </p:childTnLst>
                     </p:cTn>
                   </p:par>
+                  <p:par>
+                    <p:cTn id="15" fill="hold">
+                      <p:stCondLst>
+                        <p:cond delay="indefinite"/>
+                      </p:stCondLst>
+                      <p:childTnLst>
+                        <p:par>
+                          <p:cTn id="16" fill="hold">
+                            <p:stCondLst>
+                              <p:cond delay="0"/>
+                            </p:stCondLst>
+                            <p:childTnLst>
+                              <p:par>
+                                <p:cTn id="17" presetID="1" presetClass="entr" presetSubtype="0" fill="hold" grpId="0" nodeType="clickEffect">
+                                  <p:stCondLst>
+                                    <p:cond delay="0"/>
+                                  </p:stCondLst>
+                                  <p:childTnLst>
+                                    <p:set>
+                                      <p:cBhvr>
+                                        <p:cTn id="18" dur="1" fill="hold">
+                                          <p:stCondLst>
+                                            <p:cond delay="0"/>
+                                          </p:stCondLst>
+                                        </p:cTn>
+                                        <p:tgtEl>
+                                          <p:spTgt spid="8"/>
+                                        </p:tgtEl>
+                                        <p:attrNameLst>
+                                          <p:attrName>style.visibility</p:attrName>
+                                        </p:attrNameLst>
+                                      </p:cBhvr>
+                                      <p:to>
+                                        <p:strVal val="visible"/>
+                                      </p:to>
+                                    </p:set>
+                                  </p:childTnLst>
+                                </p:cTn>
+                              </p:par>
+                            </p:childTnLst>
+                          </p:cTn>
+                        </p:par>
+                      </p:childTnLst>
+                    </p:cTn>
+                  </p:par>
                 </p:childTnLst>
               </p:cTn>
               <p:prevCondLst>
@@ -21046,6 +21320,7 @@
       <p:bldP spid="5" grpId="0" animBg="1"/>
       <p:bldP spid="6" grpId="0" animBg="1"/>
       <p:bldP spid="10" grpId="0"/>
+      <p:bldP spid="8" grpId="0"/>
     </p:bldLst>
   </p:timing>
 </p:sld>
@@ -22391,6 +22666,61 @@
               <a:rPr lang="fr-FR" dirty="0"/>
               <a:t> count économisée !</a:t>
             </a:r>
+          </a:p>
+        </p:txBody>
+      </p:sp>
+      <p:sp>
+        <p:nvSpPr>
+          <p:cNvPr id="12" name="ZoneTexte 11">
+            <a:extLst>
+              <a:ext uri="{FF2B5EF4-FFF2-40B4-BE49-F238E27FC236}">
+                <a16:creationId xmlns:a16="http://schemas.microsoft.com/office/drawing/2014/main" id="{5C35F6EF-9ACE-436C-8D37-482743F7B4CA}"/>
+              </a:ext>
+            </a:extLst>
+          </p:cNvPr>
+          <p:cNvSpPr txBox="1"/>
+          <p:nvPr/>
+        </p:nvSpPr>
+        <p:spPr>
+          <a:xfrm>
+            <a:off x="10331209" y="5675532"/>
+            <a:ext cx="1860791" cy="646331"/>
+          </a:xfrm>
+          <a:prstGeom prst="rect">
+            <a:avLst/>
+          </a:prstGeom>
+          <a:noFill/>
+        </p:spPr>
+        <p:txBody>
+          <a:bodyPr wrap="square" rtlCol="0">
+            <a:spAutoFit/>
+          </a:bodyPr>
+          <a:lstStyle/>
+          <a:p>
+            <a:r>
+              <a:rPr lang="fr-FR" b="1" dirty="0">
+                <a:solidFill>
+                  <a:srgbClr val="FF0000"/>
+                </a:solidFill>
+              </a:rPr>
+              <a:t>Démo ?</a:t>
+            </a:r>
+          </a:p>
+          <a:p>
+            <a:r>
+              <a:rPr lang="fr-FR" altLang="fr-FR" dirty="0" err="1">
+                <a:solidFill>
+                  <a:srgbClr val="067D17"/>
+                </a:solidFill>
+                <a:latin typeface="Fira Code"/>
+              </a:rPr>
+              <a:t>findAllSlice</a:t>
+            </a:r>
+            <a:endParaRPr lang="fr-FR" b="1" dirty="0">
+              <a:solidFill>
+                <a:srgbClr val="FF0000"/>
+              </a:solidFill>
+            </a:endParaRPr>
           </a:p>
         </p:txBody>
       </p:sp>
@@ -22663,6 +22993,51 @@
                       </p:childTnLst>
                     </p:cTn>
                   </p:par>
+                  <p:par>
+                    <p:cTn id="23" fill="hold">
+                      <p:stCondLst>
+                        <p:cond delay="indefinite"/>
+                      </p:stCondLst>
+                      <p:childTnLst>
+                        <p:par>
+                          <p:cTn id="24" fill="hold">
+                            <p:stCondLst>
+                              <p:cond delay="0"/>
+                            </p:stCondLst>
+                            <p:childTnLst>
+                              <p:par>
+                                <p:cTn id="25" presetID="1" presetClass="entr" presetSubtype="0" fill="hold" grpId="0" nodeType="clickEffect">
+                                  <p:stCondLst>
+                                    <p:cond delay="0"/>
+                                  </p:stCondLst>
+                                  <p:childTnLst>
+                                    <p:set>
+                                      <p:cBhvr>
+                                        <p:cTn id="26" dur="1" fill="hold">
+                                          <p:stCondLst>
+                                            <p:cond delay="0"/>
+                                          </p:stCondLst>
+                                        </p:cTn>
+                                        <p:tgtEl>
+                                          <p:spTgt spid="12"/>
+                                        </p:tgtEl>
+                                        <p:attrNameLst>
+                                          <p:attrName>style.visibility</p:attrName>
+                                        </p:attrNameLst>
+                                      </p:cBhvr>
+                                      <p:to>
+                                        <p:strVal val="visible"/>
+                                      </p:to>
+                                    </p:set>
+                                  </p:childTnLst>
+                                </p:cTn>
+                              </p:par>
+                            </p:childTnLst>
+                          </p:cTn>
+                        </p:par>
+                      </p:childTnLst>
+                    </p:cTn>
+                  </p:par>
                 </p:childTnLst>
               </p:cTn>
               <p:prevCondLst>
@@ -22692,6 +23067,7 @@
       <p:bldP spid="9" grpId="0"/>
       <p:bldP spid="8" grpId="0" animBg="1"/>
       <p:bldP spid="11" grpId="0"/>
+      <p:bldP spid="12" grpId="0"/>
     </p:bldLst>
   </p:timing>
 </p:sld>
@@ -41613,21 +41989,21 @@
 </file>
 
 <file path=customXml/item2.xml><?xml version="1.0" encoding="utf-8"?>
+<?mso-contentType ?>
+<FormTemplates xmlns="http://schemas.microsoft.com/sharepoint/v3/contenttype/forms">
+  <Display>DocumentLibraryForm</Display>
+  <Edit>DocumentLibraryForm</Edit>
+  <New>DocumentLibraryForm</New>
+</FormTemplates>
+</file>
+
+<file path=customXml/item3.xml><?xml version="1.0" encoding="utf-8"?>
 <p:properties xmlns:p="http://schemas.microsoft.com/office/2006/metadata/properties" xmlns:xsi="http://www.w3.org/2001/XMLSchema-instance" xmlns:pc="http://schemas.microsoft.com/office/infopath/2007/PartnerControls">
   <documentManagement>
     <Status xmlns="71af3243-3dd4-4a8d-8c0d-dd76da1f02a5">Not started</Status>
     <MediaServiceKeyPoints xmlns="71af3243-3dd4-4a8d-8c0d-dd76da1f02a5" xsi:nil="true"/>
   </documentManagement>
 </p:properties>
-</file>
-
-<file path=customXml/item3.xml><?xml version="1.0" encoding="utf-8"?>
-<?mso-contentType ?>
-<FormTemplates xmlns="http://schemas.microsoft.com/sharepoint/v3/contenttype/forms">
-  <Display>DocumentLibraryForm</Display>
-  <Edit>DocumentLibraryForm</Edit>
-  <New>DocumentLibraryForm</New>
-</FormTemplates>
 </file>
 
 <file path=customXml/itemProps1.xml><?xml version="1.0" encoding="utf-8"?>
@@ -41650,6 +42026,14 @@
 </file>
 
 <file path=customXml/itemProps2.xml><?xml version="1.0" encoding="utf-8"?>
+<ds:datastoreItem xmlns:ds="http://schemas.openxmlformats.org/officeDocument/2006/customXml" ds:itemID="{7EE8C63A-4744-4DE4-BB49-0FF0B5375C60}">
+  <ds:schemaRefs>
+    <ds:schemaRef ds:uri="http://schemas.microsoft.com/sharepoint/v3/contenttype/forms"/>
+  </ds:schemaRefs>
+</ds:datastoreItem>
+</file>
+
+<file path=customXml/itemProps3.xml><?xml version="1.0" encoding="utf-8"?>
 <ds:datastoreItem xmlns:ds="http://schemas.openxmlformats.org/officeDocument/2006/customXml" ds:itemID="{950072C5-DDE0-4258-BA7A-4D4B80DFA632}">
   <ds:schemaRefs>
     <ds:schemaRef ds:uri="http://purl.org/dc/terms/"/>
@@ -41664,12 +42048,4 @@
     <ds:schemaRef ds:uri="http://purl.org/dc/dcmitype/"/>
   </ds:schemaRefs>
 </ds:datastoreItem>
-</file>
-
-<file path=customXml/itemProps3.xml><?xml version="1.0" encoding="utf-8"?>
-<ds:datastoreItem xmlns:ds="http://schemas.openxmlformats.org/officeDocument/2006/customXml" ds:itemID="{7EE8C63A-4744-4DE4-BB49-0FF0B5375C60}">
-  <ds:schemaRefs>
-    <ds:schemaRef ds:uri="http://schemas.microsoft.com/sharepoint/v3/contenttype/forms"/>
-  </ds:schemaRefs>
-</ds:datastoreItem>
 </file>
--- a/JPA-HIBERNATE.pptx
+++ b/JPA-HIBERNATE.pptx
@@ -5,10 +5,10 @@
     <p:sldMasterId id="2147483660" r:id="rId4"/>
   </p:sldMasterIdLst>
   <p:notesMasterIdLst>
-    <p:notesMasterId r:id="rId37"/>
+    <p:notesMasterId r:id="rId38"/>
   </p:notesMasterIdLst>
   <p:handoutMasterIdLst>
-    <p:handoutMasterId r:id="rId38"/>
+    <p:handoutMasterId r:id="rId39"/>
   </p:handoutMasterIdLst>
   <p:sldIdLst>
     <p:sldId id="256" r:id="rId5"/>
@@ -29,20 +29,21 @@
     <p:sldId id="309" r:id="rId20"/>
     <p:sldId id="311" r:id="rId21"/>
     <p:sldId id="310" r:id="rId22"/>
-    <p:sldId id="305" r:id="rId23"/>
-    <p:sldId id="315" r:id="rId24"/>
-    <p:sldId id="317" r:id="rId25"/>
-    <p:sldId id="320" r:id="rId26"/>
-    <p:sldId id="313" r:id="rId27"/>
-    <p:sldId id="314" r:id="rId28"/>
-    <p:sldId id="318" r:id="rId29"/>
-    <p:sldId id="319" r:id="rId30"/>
-    <p:sldId id="324" r:id="rId31"/>
-    <p:sldId id="325" r:id="rId32"/>
-    <p:sldId id="326" r:id="rId33"/>
-    <p:sldId id="306" r:id="rId34"/>
-    <p:sldId id="299" r:id="rId35"/>
-    <p:sldId id="327" r:id="rId36"/>
+    <p:sldId id="329" r:id="rId23"/>
+    <p:sldId id="305" r:id="rId24"/>
+    <p:sldId id="315" r:id="rId25"/>
+    <p:sldId id="317" r:id="rId26"/>
+    <p:sldId id="320" r:id="rId27"/>
+    <p:sldId id="313" r:id="rId28"/>
+    <p:sldId id="314" r:id="rId29"/>
+    <p:sldId id="318" r:id="rId30"/>
+    <p:sldId id="319" r:id="rId31"/>
+    <p:sldId id="324" r:id="rId32"/>
+    <p:sldId id="325" r:id="rId33"/>
+    <p:sldId id="326" r:id="rId34"/>
+    <p:sldId id="306" r:id="rId35"/>
+    <p:sldId id="299" r:id="rId36"/>
+    <p:sldId id="327" r:id="rId37"/>
   </p:sldIdLst>
   <p:sldSz cx="12192000" cy="6858000"/>
   <p:notesSz cx="6858000" cy="9144000"/>
@@ -164,6 +165,7 @@
             <p14:sldId id="309"/>
             <p14:sldId id="311"/>
             <p14:sldId id="310"/>
+            <p14:sldId id="329"/>
             <p14:sldId id="305"/>
             <p14:sldId id="315"/>
             <p14:sldId id="317"/>
@@ -1734,6 +1736,87 @@
           <a:bodyPr/>
           <a:lstStyle/>
           <a:p>
+            <a:r>
+              <a:rPr lang="fr-FR" noProof="1"/>
+              <a:t>Réalise l’équivalent un CROSS JOIN, en effet, la clause JOIN se transforme en CROSS JOIN dès lors qu’elle est réalisée sur plusieurs entités non liées entre elles !</a:t>
+            </a:r>
+          </a:p>
+          <a:p>
+            <a:r>
+              <a:rPr lang="fr-FR" noProof="1"/>
+              <a:t>Et c’est le cas de Student et Teacher !</a:t>
+            </a:r>
+          </a:p>
+          <a:p>
+            <a:pPr marL="0" marR="0" lvl="0" indent="0" algn="l" defTabSz="914400" rtl="0" eaLnBrk="1" fontAlgn="auto" latinLnBrk="0" hangingPunct="1">
+              <a:lnSpc>
+                <a:spcPct val="100000"/>
+              </a:lnSpc>
+              <a:spcBef>
+                <a:spcPts val="0"/>
+              </a:spcBef>
+              <a:spcAft>
+                <a:spcPts val="0"/>
+              </a:spcAft>
+              <a:buClrTx/>
+              <a:buSzTx/>
+              <a:buFontTx/>
+              <a:buNone/>
+              <a:tabLst/>
+              <a:defRPr/>
+            </a:pPr>
+            <a:r>
+              <a:rPr lang="fr-FR" noProof="1"/>
+              <a:t>A mettre d’office sur toutes les relations OneToOne</a:t>
+            </a:r>
+          </a:p>
+          <a:p>
+            <a:pPr marL="0" marR="0" lvl="0" indent="0" algn="l" defTabSz="914400" rtl="0" eaLnBrk="1" fontAlgn="auto" latinLnBrk="0" hangingPunct="1">
+              <a:lnSpc>
+                <a:spcPct val="100000"/>
+              </a:lnSpc>
+              <a:spcBef>
+                <a:spcPts val="0"/>
+              </a:spcBef>
+              <a:spcAft>
+                <a:spcPts val="0"/>
+              </a:spcAft>
+              <a:buClrTx/>
+              <a:buSzTx/>
+              <a:buFontTx/>
+              <a:buNone/>
+              <a:tabLst/>
+              <a:defRPr/>
+            </a:pPr>
+            <a:r>
+              <a:rPr lang="fr-FR" noProof="1"/>
+              <a:t>Le produit cartesien pour une ou quelque grappe est bien meilleur que les autres solutions car ça ne fait qu’un seul SELECT.</a:t>
+            </a:r>
+          </a:p>
+          <a:p>
+            <a:pPr marL="0" marR="0" lvl="0" indent="0" algn="l" defTabSz="914400" rtl="0" eaLnBrk="1" fontAlgn="auto" latinLnBrk="0" hangingPunct="1">
+              <a:lnSpc>
+                <a:spcPct val="100000"/>
+              </a:lnSpc>
+              <a:spcBef>
+                <a:spcPts val="0"/>
+              </a:spcBef>
+              <a:spcAft>
+                <a:spcPts val="0"/>
+              </a:spcAft>
+              <a:buClrTx/>
+              <a:buSzTx/>
+              <a:buFontTx/>
+              <a:buNone/>
+              <a:tabLst/>
+              <a:defRPr/>
+            </a:pPr>
+            <a:r>
+              <a:rPr lang="fr-FR" noProof="1"/>
+              <a:t>Et pour des temps aussi courts, c’est l’aller retour server BDD qui va compter le plus.</a:t>
+            </a:r>
+          </a:p>
+          <a:p>
             <a:endParaRPr lang="fr-FR" noProof="1"/>
           </a:p>
         </p:txBody>
@@ -1765,7 +1848,7 @@
     </p:spTree>
     <p:extLst>
       <p:ext uri="{BB962C8B-B14F-4D97-AF65-F5344CB8AC3E}">
-        <p14:creationId xmlns:p14="http://schemas.microsoft.com/office/powerpoint/2010/main" val="342313134"/>
+        <p14:creationId xmlns:p14="http://schemas.microsoft.com/office/powerpoint/2010/main" val="3825159532"/>
       </p:ext>
     </p:extLst>
   </p:cSld>
@@ -1819,10 +1902,7 @@
           <a:bodyPr/>
           <a:lstStyle/>
           <a:p>
-            <a:r>
-              <a:rPr lang="fr-FR" noProof="1"/>
-              <a:t>Avec les batch size = taille de page sur les entités xxxToMany, on est pas mal mais on peut faire encore un peu mieux !</a:t>
-            </a:r>
+            <a:endParaRPr lang="fr-FR" noProof="1"/>
           </a:p>
         </p:txBody>
       </p:sp>
@@ -1853,7 +1933,7 @@
     </p:spTree>
     <p:extLst>
       <p:ext uri="{BB962C8B-B14F-4D97-AF65-F5344CB8AC3E}">
-        <p14:creationId xmlns:p14="http://schemas.microsoft.com/office/powerpoint/2010/main" val="75896141"/>
+        <p14:creationId xmlns:p14="http://schemas.microsoft.com/office/powerpoint/2010/main" val="342313134"/>
       </p:ext>
     </p:extLst>
   </p:cSld>
@@ -2009,30 +2089,10 @@
           <a:bodyPr/>
           <a:lstStyle/>
           <a:p>
-            <a:pPr marL="0" marR="0" lvl="0" indent="0" algn="l" defTabSz="914400" rtl="0" eaLnBrk="1" fontAlgn="auto" latinLnBrk="0" hangingPunct="1">
-              <a:lnSpc>
-                <a:spcPct val="100000"/>
-              </a:lnSpc>
-              <a:spcBef>
-                <a:spcPts val="0"/>
-              </a:spcBef>
-              <a:spcAft>
-                <a:spcPts val="0"/>
-              </a:spcAft>
-              <a:buClrTx/>
-              <a:buSzTx/>
-              <a:buFontTx/>
-              <a:buNone/>
-              <a:tabLst/>
-              <a:defRPr/>
-            </a:pPr>
-            <a:r>
-              <a:rPr lang="en-US" noProof="1"/>
-              <a:t>select count(school0_.id) as col_0_0_ from school school0_</a:t>
-            </a:r>
-          </a:p>
-          <a:p>
-            <a:endParaRPr lang="fr-FR" noProof="1"/>
+            <a:r>
+              <a:rPr lang="fr-FR" noProof="1"/>
+              <a:t>Avec les batch size = taille de page sur les entités xxxToMany, on est pas mal mais on peut faire encore un peu mieux !</a:t>
+            </a:r>
           </a:p>
         </p:txBody>
       </p:sp>
@@ -2063,7 +2123,7 @@
     </p:spTree>
     <p:extLst>
       <p:ext uri="{BB962C8B-B14F-4D97-AF65-F5344CB8AC3E}">
-        <p14:creationId xmlns:p14="http://schemas.microsoft.com/office/powerpoint/2010/main" val="2740065486"/>
+        <p14:creationId xmlns:p14="http://schemas.microsoft.com/office/powerpoint/2010/main" val="75896141"/>
       </p:ext>
     </p:extLst>
   </p:cSld>
@@ -2117,33 +2177,30 @@
           <a:bodyPr/>
           <a:lstStyle/>
           <a:p>
-            <a:r>
-              <a:rPr lang="fr-FR" dirty="0"/>
-              <a:t>Maintenant on passe un peu aux choses sérieuses </a:t>
-            </a:r>
-            <a:r>
-              <a:rPr lang="fr-FR" dirty="0">
-                <a:sym typeface="Wingdings" panose="05000000000000000000" pitchFamily="2" charset="2"/>
-              </a:rPr>
-              <a:t></a:t>
-            </a:r>
-          </a:p>
-          <a:p>
-            <a:r>
-              <a:rPr lang="fr-FR" dirty="0">
-                <a:sym typeface="Wingdings" panose="05000000000000000000" pitchFamily="2" charset="2"/>
-              </a:rPr>
-              <a:t>Tout à l’heure j’ai dit que FETCHER les données n’était pas compatible avec la pagination !</a:t>
-            </a:r>
-          </a:p>
-          <a:p>
-            <a:r>
-              <a:rPr lang="fr-FR" dirty="0">
-                <a:sym typeface="Wingdings" panose="05000000000000000000" pitchFamily="2" charset="2"/>
-              </a:rPr>
-              <a:t>Avec une seule requête je peux faire planter le serveur !</a:t>
-            </a:r>
-            <a:endParaRPr lang="fr-FR" dirty="0"/>
+            <a:pPr marL="0" marR="0" lvl="0" indent="0" algn="l" defTabSz="914400" rtl="0" eaLnBrk="1" fontAlgn="auto" latinLnBrk="0" hangingPunct="1">
+              <a:lnSpc>
+                <a:spcPct val="100000"/>
+              </a:lnSpc>
+              <a:spcBef>
+                <a:spcPts val="0"/>
+              </a:spcBef>
+              <a:spcAft>
+                <a:spcPts val="0"/>
+              </a:spcAft>
+              <a:buClrTx/>
+              <a:buSzTx/>
+              <a:buFontTx/>
+              <a:buNone/>
+              <a:tabLst/>
+              <a:defRPr/>
+            </a:pPr>
+            <a:r>
+              <a:rPr lang="en-US" noProof="1"/>
+              <a:t>select count(school0_.id) as col_0_0_ from school school0_</a:t>
+            </a:r>
+          </a:p>
+          <a:p>
+            <a:endParaRPr lang="fr-FR" noProof="1"/>
           </a:p>
         </p:txBody>
       </p:sp>
@@ -2164,7 +2221,7 @@
           <a:p>
             <a:pPr rtl="0"/>
             <a:fld id="{DF61EA0F-A667-4B49-8422-0062BC55E249}" type="slidenum">
-              <a:rPr lang="fr-FR" noProof="1" smtClean="0"/>
+              <a:rPr lang="fr-FR" noProof="1" dirty="0" smtClean="0"/>
               <a:t>22</a:t>
             </a:fld>
             <a:endParaRPr lang="fr-FR" noProof="1"/>
@@ -2174,7 +2231,7 @@
     </p:spTree>
     <p:extLst>
       <p:ext uri="{BB962C8B-B14F-4D97-AF65-F5344CB8AC3E}">
-        <p14:creationId xmlns:p14="http://schemas.microsoft.com/office/powerpoint/2010/main" val="1644808820"/>
+        <p14:creationId xmlns:p14="http://schemas.microsoft.com/office/powerpoint/2010/main" val="2740065486"/>
       </p:ext>
     </p:extLst>
   </p:cSld>
@@ -2229,9 +2286,32 @@
           <a:lstStyle/>
           <a:p>
             <a:r>
-              <a:rPr lang="fr-FR" noProof="1"/>
-              <a:t>On ne peut pas utiliser une entité pour récupérer le résultat, mais le mapping sera fait automatiquement par le système via une projection</a:t>
-            </a:r>
+              <a:rPr lang="fr-FR" dirty="0"/>
+              <a:t>Maintenant on passe un peu aux choses sérieuses </a:t>
+            </a:r>
+            <a:r>
+              <a:rPr lang="fr-FR" dirty="0">
+                <a:sym typeface="Wingdings" panose="05000000000000000000" pitchFamily="2" charset="2"/>
+              </a:rPr>
+              <a:t></a:t>
+            </a:r>
+          </a:p>
+          <a:p>
+            <a:r>
+              <a:rPr lang="fr-FR" dirty="0">
+                <a:sym typeface="Wingdings" panose="05000000000000000000" pitchFamily="2" charset="2"/>
+              </a:rPr>
+              <a:t>Tout à l’heure j’ai dit que FETCHER les données n’était pas compatible avec la pagination !</a:t>
+            </a:r>
+          </a:p>
+          <a:p>
+            <a:r>
+              <a:rPr lang="fr-FR" dirty="0">
+                <a:sym typeface="Wingdings" panose="05000000000000000000" pitchFamily="2" charset="2"/>
+              </a:rPr>
+              <a:t>Avec une seule requête je peux faire planter le serveur !</a:t>
+            </a:r>
+            <a:endParaRPr lang="fr-FR" dirty="0"/>
           </a:p>
         </p:txBody>
       </p:sp>
@@ -2252,7 +2332,7 @@
           <a:p>
             <a:pPr rtl="0"/>
             <a:fld id="{DF61EA0F-A667-4B49-8422-0062BC55E249}" type="slidenum">
-              <a:rPr lang="fr-FR" noProof="1" dirty="0" smtClean="0"/>
+              <a:rPr lang="fr-FR" noProof="1" smtClean="0"/>
               <a:t>23</a:t>
             </a:fld>
             <a:endParaRPr lang="fr-FR" noProof="1"/>
@@ -2262,7 +2342,7 @@
     </p:spTree>
     <p:extLst>
       <p:ext uri="{BB962C8B-B14F-4D97-AF65-F5344CB8AC3E}">
-        <p14:creationId xmlns:p14="http://schemas.microsoft.com/office/powerpoint/2010/main" val="2685482423"/>
+        <p14:creationId xmlns:p14="http://schemas.microsoft.com/office/powerpoint/2010/main" val="1644808820"/>
       </p:ext>
     </p:extLst>
   </p:cSld>
@@ -2316,7 +2396,10 @@
           <a:bodyPr/>
           <a:lstStyle/>
           <a:p>
-            <a:endParaRPr lang="fr-FR" noProof="1"/>
+            <a:r>
+              <a:rPr lang="fr-FR" noProof="1"/>
+              <a:t>On ne peut pas utiliser une entité pour récupérer le résultat, mais le mapping sera fait automatiquement par le système via une projection</a:t>
+            </a:r>
           </a:p>
         </p:txBody>
       </p:sp>
@@ -2347,7 +2430,7 @@
     </p:spTree>
     <p:extLst>
       <p:ext uri="{BB962C8B-B14F-4D97-AF65-F5344CB8AC3E}">
-        <p14:creationId xmlns:p14="http://schemas.microsoft.com/office/powerpoint/2010/main" val="3804920323"/>
+        <p14:creationId xmlns:p14="http://schemas.microsoft.com/office/powerpoint/2010/main" val="2685482423"/>
       </p:ext>
     </p:extLst>
   </p:cSld>
@@ -2401,16 +2484,7 @@
           <a:bodyPr/>
           <a:lstStyle/>
           <a:p>
-            <a:r>
-              <a:rPr lang="fr-FR" noProof="1"/>
-              <a:t>Le résultat est le même dans les deux cas, je récupère un object ou une liste d’objets remplis avec le résultat de la requete</a:t>
-            </a:r>
-          </a:p>
-          <a:p>
-            <a:r>
-              <a:rPr lang="fr-FR" noProof="1"/>
-              <a:t>Petite note sur le fait que ces objects peuvent sortir des controllers car ils ne sont pas liés au modèle de données et correspondent à un besoin métier précis</a:t>
-            </a:r>
+            <a:endParaRPr lang="fr-FR" noProof="1"/>
           </a:p>
         </p:txBody>
       </p:sp>
@@ -2441,7 +2515,7 @@
     </p:spTree>
     <p:extLst>
       <p:ext uri="{BB962C8B-B14F-4D97-AF65-F5344CB8AC3E}">
-        <p14:creationId xmlns:p14="http://schemas.microsoft.com/office/powerpoint/2010/main" val="2263289659"/>
+        <p14:creationId xmlns:p14="http://schemas.microsoft.com/office/powerpoint/2010/main" val="3804920323"/>
       </p:ext>
     </p:extLst>
   </p:cSld>
@@ -2495,7 +2569,16 @@
           <a:bodyPr/>
           <a:lstStyle/>
           <a:p>
-            <a:endParaRPr lang="fr-FR" noProof="1"/>
+            <a:r>
+              <a:rPr lang="fr-FR" noProof="1"/>
+              <a:t>Le résultat est le même dans les deux cas, je récupère un object ou une liste d’objets remplis avec le résultat de la requete</a:t>
+            </a:r>
+          </a:p>
+          <a:p>
+            <a:r>
+              <a:rPr lang="fr-FR" noProof="1"/>
+              <a:t>Petite note sur le fait que ces objects peuvent sortir des controllers car ils ne sont pas liés au modèle de données et correspondent à un besoin métier précis</a:t>
+            </a:r>
           </a:p>
         </p:txBody>
       </p:sp>
@@ -2526,7 +2609,7 @@
     </p:spTree>
     <p:extLst>
       <p:ext uri="{BB962C8B-B14F-4D97-AF65-F5344CB8AC3E}">
-        <p14:creationId xmlns:p14="http://schemas.microsoft.com/office/powerpoint/2010/main" val="512973995"/>
+        <p14:creationId xmlns:p14="http://schemas.microsoft.com/office/powerpoint/2010/main" val="2263289659"/>
       </p:ext>
     </p:extLst>
   </p:cSld>
@@ -2611,7 +2694,7 @@
     </p:spTree>
     <p:extLst>
       <p:ext uri="{BB962C8B-B14F-4D97-AF65-F5344CB8AC3E}">
-        <p14:creationId xmlns:p14="http://schemas.microsoft.com/office/powerpoint/2010/main" val="2015775768"/>
+        <p14:creationId xmlns:p14="http://schemas.microsoft.com/office/powerpoint/2010/main" val="512973995"/>
       </p:ext>
     </p:extLst>
   </p:cSld>
@@ -2665,50 +2748,7 @@
           <a:bodyPr/>
           <a:lstStyle/>
           <a:p>
-            <a:pPr marL="0" marR="0" lvl="0" indent="0" algn="l" defTabSz="914400" rtl="0" eaLnBrk="1" fontAlgn="auto" latinLnBrk="0" hangingPunct="1">
-              <a:lnSpc>
-                <a:spcPct val="100000"/>
-              </a:lnSpc>
-              <a:spcBef>
-                <a:spcPts val="0"/>
-              </a:spcBef>
-              <a:spcAft>
-                <a:spcPts val="0"/>
-              </a:spcAft>
-              <a:buClrTx/>
-              <a:buSzTx/>
-              <a:buFontTx/>
-              <a:buNone/>
-              <a:tabLst/>
-              <a:defRPr/>
-            </a:pPr>
-            <a:r>
-              <a:rPr lang="fr-FR" noProof="1"/>
-              <a:t>Dès que vous souhaitez récupérer des listes très grandes (avec pagination de préférence), utiliser les annotations</a:t>
-            </a:r>
-          </a:p>
-          <a:p>
-            <a:pPr marL="0" marR="0" lvl="0" indent="0" algn="l" defTabSz="914400" rtl="0" eaLnBrk="1" fontAlgn="auto" latinLnBrk="0" hangingPunct="1">
-              <a:lnSpc>
-                <a:spcPct val="100000"/>
-              </a:lnSpc>
-              <a:spcBef>
-                <a:spcPts val="0"/>
-              </a:spcBef>
-              <a:spcAft>
-                <a:spcPts val="0"/>
-              </a:spcAft>
-              <a:buClrTx/>
-              <a:buSzTx/>
-              <a:buFontTx/>
-              <a:buNone/>
-              <a:tabLst/>
-              <a:defRPr/>
-            </a:pPr>
-            <a:r>
-              <a:rPr lang="fr-FR" noProof="1"/>
-              <a:t>Et en plus ça reste copmpatible avec le cas précédent !</a:t>
-            </a:r>
+            <a:endParaRPr lang="fr-FR" noProof="1"/>
           </a:p>
         </p:txBody>
       </p:sp>
@@ -2739,7 +2779,7 @@
     </p:spTree>
     <p:extLst>
       <p:ext uri="{BB962C8B-B14F-4D97-AF65-F5344CB8AC3E}">
-        <p14:creationId xmlns:p14="http://schemas.microsoft.com/office/powerpoint/2010/main" val="1067624400"/>
+        <p14:creationId xmlns:p14="http://schemas.microsoft.com/office/powerpoint/2010/main" val="2015775768"/>
       </p:ext>
     </p:extLst>
   </p:cSld>
@@ -2793,7 +2833,50 @@
           <a:bodyPr/>
           <a:lstStyle/>
           <a:p>
-            <a:endParaRPr lang="fr-FR" noProof="1"/>
+            <a:pPr marL="0" marR="0" lvl="0" indent="0" algn="l" defTabSz="914400" rtl="0" eaLnBrk="1" fontAlgn="auto" latinLnBrk="0" hangingPunct="1">
+              <a:lnSpc>
+                <a:spcPct val="100000"/>
+              </a:lnSpc>
+              <a:spcBef>
+                <a:spcPts val="0"/>
+              </a:spcBef>
+              <a:spcAft>
+                <a:spcPts val="0"/>
+              </a:spcAft>
+              <a:buClrTx/>
+              <a:buSzTx/>
+              <a:buFontTx/>
+              <a:buNone/>
+              <a:tabLst/>
+              <a:defRPr/>
+            </a:pPr>
+            <a:r>
+              <a:rPr lang="fr-FR" noProof="1"/>
+              <a:t>Dès que vous souhaitez récupérer des listes très grandes (avec pagination de préférence), utiliser les annotations</a:t>
+            </a:r>
+          </a:p>
+          <a:p>
+            <a:pPr marL="0" marR="0" lvl="0" indent="0" algn="l" defTabSz="914400" rtl="0" eaLnBrk="1" fontAlgn="auto" latinLnBrk="0" hangingPunct="1">
+              <a:lnSpc>
+                <a:spcPct val="100000"/>
+              </a:lnSpc>
+              <a:spcBef>
+                <a:spcPts val="0"/>
+              </a:spcBef>
+              <a:spcAft>
+                <a:spcPts val="0"/>
+              </a:spcAft>
+              <a:buClrTx/>
+              <a:buSzTx/>
+              <a:buFontTx/>
+              <a:buNone/>
+              <a:tabLst/>
+              <a:defRPr/>
+            </a:pPr>
+            <a:r>
+              <a:rPr lang="fr-FR" noProof="1"/>
+              <a:t>Et en plus ça reste copmpatible avec le cas précédent !</a:t>
+            </a:r>
           </a:p>
         </p:txBody>
       </p:sp>
@@ -2824,7 +2907,7 @@
     </p:spTree>
     <p:extLst>
       <p:ext uri="{BB962C8B-B14F-4D97-AF65-F5344CB8AC3E}">
-        <p14:creationId xmlns:p14="http://schemas.microsoft.com/office/powerpoint/2010/main" val="2446949418"/>
+        <p14:creationId xmlns:p14="http://schemas.microsoft.com/office/powerpoint/2010/main" val="1067624400"/>
       </p:ext>
     </p:extLst>
   </p:cSld>
@@ -2878,18 +2961,6 @@
           <a:bodyPr/>
           <a:lstStyle/>
           <a:p>
-            <a:r>
-              <a:rPr lang="fr-FR" noProof="1"/>
-              <a:t>Le premier properties est utile, j’en reparle dans le slide suivant !</a:t>
-            </a:r>
-          </a:p>
-          <a:p>
-            <a:r>
-              <a:rPr lang="fr-FR" noProof="1"/>
-              <a:t>Open in view va vous permettre de détecter plus facilement les N+1</a:t>
-            </a:r>
-          </a:p>
-          <a:p>
             <a:endParaRPr lang="fr-FR" noProof="1"/>
           </a:p>
         </p:txBody>
@@ -2921,7 +2992,7 @@
     </p:spTree>
     <p:extLst>
       <p:ext uri="{BB962C8B-B14F-4D97-AF65-F5344CB8AC3E}">
-        <p14:creationId xmlns:p14="http://schemas.microsoft.com/office/powerpoint/2010/main" val="198457126"/>
+        <p14:creationId xmlns:p14="http://schemas.microsoft.com/office/powerpoint/2010/main" val="2446949418"/>
       </p:ext>
     </p:extLst>
   </p:cSld>
@@ -3077,6 +3148,18 @@
           <a:bodyPr/>
           <a:lstStyle/>
           <a:p>
+            <a:r>
+              <a:rPr lang="fr-FR" noProof="1"/>
+              <a:t>Le premier properties est utile, j’en reparle dans le slide suivant !</a:t>
+            </a:r>
+          </a:p>
+          <a:p>
+            <a:r>
+              <a:rPr lang="fr-FR" noProof="1"/>
+              <a:t>Open in view va vous permettre de détecter plus facilement les N+1</a:t>
+            </a:r>
+          </a:p>
+          <a:p>
             <a:endParaRPr lang="fr-FR" noProof="1"/>
           </a:p>
         </p:txBody>
@@ -3108,7 +3191,7 @@
     </p:spTree>
     <p:extLst>
       <p:ext uri="{BB962C8B-B14F-4D97-AF65-F5344CB8AC3E}">
-        <p14:creationId xmlns:p14="http://schemas.microsoft.com/office/powerpoint/2010/main" val="1359022272"/>
+        <p14:creationId xmlns:p14="http://schemas.microsoft.com/office/powerpoint/2010/main" val="198457126"/>
       </p:ext>
     </p:extLst>
   </p:cSld>
@@ -3185,6 +3268,91 @@
             <a:fld id="{DF61EA0F-A667-4B49-8422-0062BC55E249}" type="slidenum">
               <a:rPr lang="fr-FR" noProof="1" dirty="0" smtClean="0"/>
               <a:t>32</a:t>
+            </a:fld>
+            <a:endParaRPr lang="fr-FR" noProof="1"/>
+          </a:p>
+        </p:txBody>
+      </p:sp>
+    </p:spTree>
+    <p:extLst>
+      <p:ext uri="{BB962C8B-B14F-4D97-AF65-F5344CB8AC3E}">
+        <p14:creationId xmlns:p14="http://schemas.microsoft.com/office/powerpoint/2010/main" val="1359022272"/>
+      </p:ext>
+    </p:extLst>
+  </p:cSld>
+  <p:clrMapOvr>
+    <a:masterClrMapping/>
+  </p:clrMapOvr>
+</p:notes>
+</file>
+
+<file path=ppt/notesSlides/notesSlide32.xml><?xml version="1.0" encoding="utf-8"?>
+<p:notes xmlns:a="http://schemas.openxmlformats.org/drawingml/2006/main" xmlns:r="http://schemas.openxmlformats.org/officeDocument/2006/relationships" xmlns:p="http://schemas.openxmlformats.org/presentationml/2006/main">
+  <p:cSld>
+    <p:spTree>
+      <p:nvGrpSpPr>
+        <p:cNvPr id="1" name=""/>
+        <p:cNvGrpSpPr/>
+        <p:nvPr/>
+      </p:nvGrpSpPr>
+      <p:grpSpPr>
+        <a:xfrm>
+          <a:off x="0" y="0"/>
+          <a:ext cx="0" cy="0"/>
+          <a:chOff x="0" y="0"/>
+          <a:chExt cx="0" cy="0"/>
+        </a:xfrm>
+      </p:grpSpPr>
+      <p:sp>
+        <p:nvSpPr>
+          <p:cNvPr id="2" name="Espace réservé de l'image des diapositives 1"/>
+          <p:cNvSpPr>
+            <a:spLocks noGrp="1" noRot="1" noChangeAspect="1"/>
+          </p:cNvSpPr>
+          <p:nvPr>
+            <p:ph type="sldImg"/>
+          </p:nvPr>
+        </p:nvSpPr>
+        <p:spPr/>
+      </p:sp>
+      <p:sp>
+        <p:nvSpPr>
+          <p:cNvPr id="3" name="Espace réservé des notes 2"/>
+          <p:cNvSpPr>
+            <a:spLocks noGrp="1"/>
+          </p:cNvSpPr>
+          <p:nvPr>
+            <p:ph type="body" idx="1"/>
+          </p:nvPr>
+        </p:nvSpPr>
+        <p:spPr/>
+        <p:txBody>
+          <a:bodyPr/>
+          <a:lstStyle/>
+          <a:p>
+            <a:endParaRPr lang="fr-FR" noProof="1"/>
+          </a:p>
+        </p:txBody>
+      </p:sp>
+      <p:sp>
+        <p:nvSpPr>
+          <p:cNvPr id="4" name="Espace réservé du numéro de diapositive 3"/>
+          <p:cNvSpPr>
+            <a:spLocks noGrp="1"/>
+          </p:cNvSpPr>
+          <p:nvPr>
+            <p:ph type="sldNum" sz="quarter" idx="5"/>
+          </p:nvPr>
+        </p:nvSpPr>
+        <p:spPr/>
+        <p:txBody>
+          <a:bodyPr/>
+          <a:lstStyle/>
+          <a:p>
+            <a:pPr rtl="0"/>
+            <a:fld id="{DF61EA0F-A667-4B49-8422-0062BC55E249}" type="slidenum">
+              <a:rPr lang="fr-FR" noProof="1" dirty="0" smtClean="0"/>
+              <a:t>33</a:t>
             </a:fld>
             <a:endParaRPr lang="fr-FR" noProof="1"/>
           </a:p>
@@ -5641,7 +5809,7 @@
             </a:br>
             <a:r>
               <a:rPr lang="fr-FR" dirty="0"/>
-              <a:t>De plus, cela pourrait conduire à des problèmes de performances car des données inutiles seraient systématiquement récupérée</a:t>
+              <a:t>De plus, cela pourrait conduire à des problèmes de performances car des données inutiles seraient systématiquement récupérées</a:t>
             </a:r>
           </a:p>
           <a:p>
@@ -19453,7 +19621,7 @@
         <p:spPr>
           <a:xfrm>
             <a:off x="521207" y="448056"/>
-            <a:ext cx="8778910" cy="640080"/>
+            <a:ext cx="7783344" cy="640080"/>
           </a:xfrm>
         </p:spPr>
         <p:txBody>
@@ -19464,22 +19632,21 @@
           <a:p>
             <a:pPr rtl="0"/>
             <a:r>
-              <a:rPr lang="fr-FR" dirty="0"/>
-              <a:t>Erreur classique !</a:t>
-            </a:r>
-            <a:endParaRPr lang="fr-FR" noProof="1">
-              <a:latin typeface="Segoe UI Light" panose="020B0502040204020203" pitchFamily="34" charset="0"/>
-              <a:cs typeface="Segoe UI Light" panose="020B0502040204020203" pitchFamily="34" charset="0"/>
-            </a:endParaRPr>
+              <a:rPr lang="fr-FR" noProof="1">
+                <a:latin typeface="Segoe UI Light" panose="020B0502040204020203" pitchFamily="34" charset="0"/>
+                <a:cs typeface="Segoe UI Light" panose="020B0502040204020203" pitchFamily="34" charset="0"/>
+              </a:rPr>
+              <a:t>Temps de réponse</a:t>
+            </a:r>
           </a:p>
         </p:txBody>
       </p:sp>
       <p:sp>
         <p:nvSpPr>
-          <p:cNvPr id="5" name="ZoneTexte 4">
+          <p:cNvPr id="10" name="ZoneTexte 9">
             <a:extLst>
               <a:ext uri="{FF2B5EF4-FFF2-40B4-BE49-F238E27FC236}">
-                <a16:creationId xmlns:a16="http://schemas.microsoft.com/office/drawing/2014/main" id="{E6973A45-79BA-4939-9DC8-448D24F2FA3E}"/>
+                <a16:creationId xmlns:a16="http://schemas.microsoft.com/office/drawing/2014/main" id="{4B21C0C4-B67F-4946-91F5-57FCE1A1731F}"/>
               </a:ext>
             </a:extLst>
           </p:cNvPr>
@@ -19488,8 +19655,8 @@
         </p:nvSpPr>
         <p:spPr>
           <a:xfrm>
-            <a:off x="521207" y="1674674"/>
-            <a:ext cx="9790161" cy="2031325"/>
+            <a:off x="521207" y="1588612"/>
+            <a:ext cx="9790161" cy="1200329"/>
           </a:xfrm>
           <a:prstGeom prst="rect">
             <a:avLst/>
@@ -19502,19 +19669,13 @@
           </a:bodyPr>
           <a:lstStyle/>
           <a:p>
-            <a:r>
-              <a:rPr lang="fr-FR" u="sng" dirty="0"/>
-              <a:t>Condition : </a:t>
-            </a:r>
-          </a:p>
-          <a:p>
             <a:pPr marL="285750" indent="-285750">
               <a:buFont typeface="Wingdings" panose="05000000000000000000" pitchFamily="2" charset="2"/>
               <a:buChar char="Ø"/>
             </a:pPr>
             <a:r>
               <a:rPr lang="fr-FR" dirty="0"/>
-              <a:t>Relation parent avec au moins deux List&lt;fils&gt;… (le type List empêche le produit cartésien)</a:t>
+              <a:t>Sur un accès unitaire</a:t>
             </a:r>
           </a:p>
           <a:p>
@@ -19522,108 +19683,32 @@
               <a:buFont typeface="Wingdings" panose="05000000000000000000" pitchFamily="2" charset="2"/>
               <a:buChar char="Ø"/>
             </a:pPr>
+            <a:endParaRPr lang="fr-FR" dirty="0"/>
+          </a:p>
+          <a:p>
+            <a:pPr marL="285750" indent="-285750">
+              <a:buFont typeface="Wingdings" panose="05000000000000000000" pitchFamily="2" charset="2"/>
+              <a:buChar char="Ø"/>
+            </a:pPr>
             <a:r>
               <a:rPr lang="fr-FR" dirty="0"/>
-              <a:t>Tout mettre en EAGER ou faire des FETCH sur tous les fils en même temps</a:t>
-            </a:r>
-          </a:p>
-          <a:p>
+              <a:t>Avec un outil de test de charge : </a:t>
+            </a:r>
+            <a:r>
+              <a:rPr lang="fr-FR" dirty="0" err="1"/>
+              <a:t>Gatling</a:t>
+            </a:r>
             <a:endParaRPr lang="fr-FR" dirty="0"/>
           </a:p>
           <a:p>
-            <a:r>
-              <a:rPr lang="fr-FR" dirty="0" err="1"/>
-              <a:t>org.hibernate.loader.</a:t>
-            </a:r>
-            <a:r>
-              <a:rPr lang="fr-FR" dirty="0" err="1">
-                <a:solidFill>
-                  <a:srgbClr val="FF0000"/>
-                </a:solidFill>
-              </a:rPr>
-              <a:t>MultipleBagFetchException</a:t>
-            </a:r>
-            <a:r>
-              <a:rPr lang="fr-FR" dirty="0"/>
-              <a:t>: </a:t>
-            </a:r>
-            <a:r>
-              <a:rPr lang="fr-FR" dirty="0" err="1"/>
-              <a:t>cannot</a:t>
-            </a:r>
-            <a:r>
-              <a:rPr lang="fr-FR" dirty="0"/>
-              <a:t> </a:t>
-            </a:r>
-            <a:r>
-              <a:rPr lang="fr-FR" dirty="0" err="1"/>
-              <a:t>simultaneously</a:t>
-            </a:r>
-            <a:r>
-              <a:rPr lang="fr-FR" dirty="0"/>
-              <a:t> </a:t>
-            </a:r>
-            <a:r>
-              <a:rPr lang="fr-FR" dirty="0" err="1"/>
-              <a:t>fetch</a:t>
-            </a:r>
-            <a:r>
-              <a:rPr lang="fr-FR" dirty="0"/>
-              <a:t> multiple </a:t>
-            </a:r>
-            <a:r>
-              <a:rPr lang="fr-FR" dirty="0" err="1"/>
-              <a:t>bags</a:t>
-            </a:r>
-            <a:r>
-              <a:rPr lang="fr-FR" dirty="0"/>
-              <a:t>:</a:t>
-            </a:r>
-          </a:p>
-          <a:p>
-            <a:r>
-              <a:rPr lang="fr-FR" dirty="0"/>
-              <a:t>[</a:t>
-            </a:r>
-            <a:r>
-              <a:rPr lang="fr-FR" dirty="0" err="1"/>
-              <a:t>com.example.project.dao.domain.School.</a:t>
-            </a:r>
-            <a:r>
-              <a:rPr lang="fr-FR" dirty="0" err="1">
-                <a:highlight>
-                  <a:srgbClr val="FFFF00"/>
-                </a:highlight>
-              </a:rPr>
-              <a:t>students</a:t>
-            </a:r>
-            <a:r>
-              <a:rPr lang="fr-FR" dirty="0"/>
-              <a:t>, </a:t>
-            </a:r>
-            <a:r>
-              <a:rPr lang="fr-FR" dirty="0" err="1"/>
-              <a:t>com.example.project.dao.domain.School.</a:t>
-            </a:r>
-            <a:r>
-              <a:rPr lang="fr-FR" dirty="0" err="1">
-                <a:highlight>
-                  <a:srgbClr val="FFFF00"/>
-                </a:highlight>
-              </a:rPr>
-              <a:t>teachers</a:t>
-            </a:r>
-            <a:r>
-              <a:rPr lang="fr-FR" dirty="0"/>
-              <a:t>]</a:t>
-            </a:r>
+            <a:endParaRPr lang="fr-FR" dirty="0"/>
           </a:p>
         </p:txBody>
       </p:sp>
     </p:spTree>
     <p:extLst>
       <p:ext uri="{BB962C8B-B14F-4D97-AF65-F5344CB8AC3E}">
-        <p14:creationId xmlns:p14="http://schemas.microsoft.com/office/powerpoint/2010/main" val="2676478294"/>
+        <p14:creationId xmlns:p14="http://schemas.microsoft.com/office/powerpoint/2010/main" val="1951392029"/>
       </p:ext>
     </p:extLst>
   </p:cSld>
@@ -19638,6 +19723,134 @@
       <p:transition/>
     </mc:Fallback>
   </mc:AlternateContent>
+  <p:timing>
+    <p:tnLst>
+      <p:par>
+        <p:cTn id="1" dur="indefinite" restart="never" nodeType="tmRoot">
+          <p:childTnLst>
+            <p:seq concurrent="1" nextAc="seek">
+              <p:cTn id="2" dur="indefinite" nodeType="mainSeq">
+                <p:childTnLst>
+                  <p:par>
+                    <p:cTn id="3" fill="hold">
+                      <p:stCondLst>
+                        <p:cond delay="indefinite"/>
+                      </p:stCondLst>
+                      <p:childTnLst>
+                        <p:par>
+                          <p:cTn id="4" fill="hold">
+                            <p:stCondLst>
+                              <p:cond delay="0"/>
+                            </p:stCondLst>
+                            <p:childTnLst>
+                              <p:par>
+                                <p:cTn id="5" presetID="1" presetClass="entr" presetSubtype="0" fill="hold" nodeType="clickEffect">
+                                  <p:stCondLst>
+                                    <p:cond delay="0"/>
+                                  </p:stCondLst>
+                                  <p:childTnLst>
+                                    <p:set>
+                                      <p:cBhvr>
+                                        <p:cTn id="6" dur="1" fill="hold">
+                                          <p:stCondLst>
+                                            <p:cond delay="0"/>
+                                          </p:stCondLst>
+                                        </p:cTn>
+                                        <p:tgtEl>
+                                          <p:spTgt spid="10">
+                                            <p:txEl>
+                                              <p:pRg st="0" end="0"/>
+                                            </p:txEl>
+                                          </p:spTgt>
+                                        </p:tgtEl>
+                                        <p:attrNameLst>
+                                          <p:attrName>style.visibility</p:attrName>
+                                        </p:attrNameLst>
+                                      </p:cBhvr>
+                                      <p:to>
+                                        <p:strVal val="visible"/>
+                                      </p:to>
+                                    </p:set>
+                                  </p:childTnLst>
+                                </p:cTn>
+                              </p:par>
+                            </p:childTnLst>
+                          </p:cTn>
+                        </p:par>
+                      </p:childTnLst>
+                    </p:cTn>
+                  </p:par>
+                  <p:par>
+                    <p:cTn id="7" fill="hold">
+                      <p:stCondLst>
+                        <p:cond delay="indefinite"/>
+                      </p:stCondLst>
+                      <p:childTnLst>
+                        <p:par>
+                          <p:cTn id="8" fill="hold">
+                            <p:stCondLst>
+                              <p:cond delay="0"/>
+                            </p:stCondLst>
+                            <p:childTnLst>
+                              <p:par>
+                                <p:cTn id="9" presetID="1" presetClass="entr" presetSubtype="0" fill="hold" nodeType="clickEffect">
+                                  <p:stCondLst>
+                                    <p:cond delay="0"/>
+                                  </p:stCondLst>
+                                  <p:childTnLst>
+                                    <p:set>
+                                      <p:cBhvr>
+                                        <p:cTn id="10" dur="1" fill="hold">
+                                          <p:stCondLst>
+                                            <p:cond delay="0"/>
+                                          </p:stCondLst>
+                                        </p:cTn>
+                                        <p:tgtEl>
+                                          <p:spTgt spid="10">
+                                            <p:txEl>
+                                              <p:pRg st="2" end="2"/>
+                                            </p:txEl>
+                                          </p:spTgt>
+                                        </p:tgtEl>
+                                        <p:attrNameLst>
+                                          <p:attrName>style.visibility</p:attrName>
+                                        </p:attrNameLst>
+                                      </p:cBhvr>
+                                      <p:to>
+                                        <p:strVal val="visible"/>
+                                      </p:to>
+                                    </p:set>
+                                  </p:childTnLst>
+                                </p:cTn>
+                              </p:par>
+                            </p:childTnLst>
+                          </p:cTn>
+                        </p:par>
+                      </p:childTnLst>
+                    </p:cTn>
+                  </p:par>
+                </p:childTnLst>
+              </p:cTn>
+              <p:prevCondLst>
+                <p:cond evt="onPrev" delay="0">
+                  <p:tgtEl>
+                    <p:sldTgt/>
+                  </p:tgtEl>
+                </p:cond>
+              </p:prevCondLst>
+              <p:nextCondLst>
+                <p:cond evt="onNext" delay="0">
+                  <p:tgtEl>
+                    <p:sldTgt/>
+                  </p:tgtEl>
+                </p:cond>
+              </p:nextCondLst>
+            </p:seq>
+          </p:childTnLst>
+        </p:cTn>
+      </p:par>
+    </p:tnLst>
+  </p:timing>
 </p:sld>
 </file>
 
@@ -19746,6 +19959,224 @@
 </file>
 
 <file path=ppt/slides/slide20.xml><?xml version="1.0" encoding="utf-8"?>
+<p:sld xmlns:a="http://schemas.openxmlformats.org/drawingml/2006/main" xmlns:r="http://schemas.openxmlformats.org/officeDocument/2006/relationships" xmlns:p="http://schemas.openxmlformats.org/presentationml/2006/main">
+  <p:cSld>
+    <p:spTree>
+      <p:nvGrpSpPr>
+        <p:cNvPr id="1" name=""/>
+        <p:cNvGrpSpPr/>
+        <p:nvPr/>
+      </p:nvGrpSpPr>
+      <p:grpSpPr>
+        <a:xfrm>
+          <a:off x="0" y="0"/>
+          <a:ext cx="0" cy="0"/>
+          <a:chOff x="0" y="0"/>
+          <a:chExt cx="0" cy="0"/>
+        </a:xfrm>
+      </p:grpSpPr>
+      <p:sp>
+        <p:nvSpPr>
+          <p:cNvPr id="4" name="Titre 3"/>
+          <p:cNvSpPr>
+            <a:spLocks noGrp="1"/>
+          </p:cNvSpPr>
+          <p:nvPr>
+            <p:ph type="title"/>
+          </p:nvPr>
+        </p:nvSpPr>
+        <p:spPr>
+          <a:xfrm>
+            <a:off x="521207" y="448056"/>
+            <a:ext cx="8778910" cy="640080"/>
+          </a:xfrm>
+        </p:spPr>
+        <p:txBody>
+          <a:bodyPr rtlCol="0">
+            <a:normAutofit/>
+          </a:bodyPr>
+          <a:lstStyle/>
+          <a:p>
+            <a:pPr rtl="0"/>
+            <a:r>
+              <a:rPr lang="fr-FR" dirty="0"/>
+              <a:t>Erreur classique !</a:t>
+            </a:r>
+            <a:endParaRPr lang="fr-FR" noProof="1">
+              <a:latin typeface="Segoe UI Light" panose="020B0502040204020203" pitchFamily="34" charset="0"/>
+              <a:cs typeface="Segoe UI Light" panose="020B0502040204020203" pitchFamily="34" charset="0"/>
+            </a:endParaRPr>
+          </a:p>
+        </p:txBody>
+      </p:sp>
+      <p:sp>
+        <p:nvSpPr>
+          <p:cNvPr id="5" name="ZoneTexte 4">
+            <a:extLst>
+              <a:ext uri="{FF2B5EF4-FFF2-40B4-BE49-F238E27FC236}">
+                <a16:creationId xmlns:a16="http://schemas.microsoft.com/office/drawing/2014/main" id="{E6973A45-79BA-4939-9DC8-448D24F2FA3E}"/>
+              </a:ext>
+            </a:extLst>
+          </p:cNvPr>
+          <p:cNvSpPr txBox="1"/>
+          <p:nvPr/>
+        </p:nvSpPr>
+        <p:spPr>
+          <a:xfrm>
+            <a:off x="521207" y="1674674"/>
+            <a:ext cx="9790161" cy="2031325"/>
+          </a:xfrm>
+          <a:prstGeom prst="rect">
+            <a:avLst/>
+          </a:prstGeom>
+          <a:noFill/>
+        </p:spPr>
+        <p:txBody>
+          <a:bodyPr wrap="square">
+            <a:spAutoFit/>
+          </a:bodyPr>
+          <a:lstStyle/>
+          <a:p>
+            <a:r>
+              <a:rPr lang="fr-FR" u="sng" dirty="0"/>
+              <a:t>Condition : </a:t>
+            </a:r>
+          </a:p>
+          <a:p>
+            <a:pPr marL="285750" indent="-285750">
+              <a:buFont typeface="Wingdings" panose="05000000000000000000" pitchFamily="2" charset="2"/>
+              <a:buChar char="Ø"/>
+            </a:pPr>
+            <a:r>
+              <a:rPr lang="fr-FR" dirty="0"/>
+              <a:t>Relation parent avec au moins deux List&lt;fils&gt;… (le type List empêche le produit cartésien)</a:t>
+            </a:r>
+          </a:p>
+          <a:p>
+            <a:pPr marL="285750" indent="-285750">
+              <a:buFont typeface="Wingdings" panose="05000000000000000000" pitchFamily="2" charset="2"/>
+              <a:buChar char="Ø"/>
+            </a:pPr>
+            <a:r>
+              <a:rPr lang="fr-FR" dirty="0"/>
+              <a:t>Tout mettre en EAGER ou faire des FETCH sur tous les fils en même temps</a:t>
+            </a:r>
+          </a:p>
+          <a:p>
+            <a:endParaRPr lang="fr-FR" dirty="0"/>
+          </a:p>
+          <a:p>
+            <a:r>
+              <a:rPr lang="fr-FR" dirty="0" err="1"/>
+              <a:t>org.hibernate.loader.</a:t>
+            </a:r>
+            <a:r>
+              <a:rPr lang="fr-FR" dirty="0" err="1">
+                <a:solidFill>
+                  <a:srgbClr val="FF0000"/>
+                </a:solidFill>
+              </a:rPr>
+              <a:t>MultipleBagFetchException</a:t>
+            </a:r>
+            <a:r>
+              <a:rPr lang="fr-FR" dirty="0"/>
+              <a:t>: </a:t>
+            </a:r>
+            <a:r>
+              <a:rPr lang="fr-FR" dirty="0" err="1"/>
+              <a:t>cannot</a:t>
+            </a:r>
+            <a:r>
+              <a:rPr lang="fr-FR" dirty="0"/>
+              <a:t> </a:t>
+            </a:r>
+            <a:r>
+              <a:rPr lang="fr-FR" dirty="0" err="1"/>
+              <a:t>simultaneously</a:t>
+            </a:r>
+            <a:r>
+              <a:rPr lang="fr-FR" dirty="0"/>
+              <a:t> </a:t>
+            </a:r>
+            <a:r>
+              <a:rPr lang="fr-FR" dirty="0" err="1"/>
+              <a:t>fetch</a:t>
+            </a:r>
+            <a:r>
+              <a:rPr lang="fr-FR" dirty="0"/>
+              <a:t> multiple </a:t>
+            </a:r>
+            <a:r>
+              <a:rPr lang="fr-FR" dirty="0" err="1"/>
+              <a:t>bags</a:t>
+            </a:r>
+            <a:r>
+              <a:rPr lang="fr-FR" dirty="0"/>
+              <a:t>:</a:t>
+            </a:r>
+          </a:p>
+          <a:p>
+            <a:r>
+              <a:rPr lang="fr-FR" dirty="0"/>
+              <a:t>[</a:t>
+            </a:r>
+            <a:r>
+              <a:rPr lang="fr-FR" dirty="0" err="1"/>
+              <a:t>com.example.project.dao.domain.School.</a:t>
+            </a:r>
+            <a:r>
+              <a:rPr lang="fr-FR" dirty="0" err="1">
+                <a:highlight>
+                  <a:srgbClr val="FFFF00"/>
+                </a:highlight>
+              </a:rPr>
+              <a:t>students</a:t>
+            </a:r>
+            <a:r>
+              <a:rPr lang="fr-FR" dirty="0"/>
+              <a:t>, </a:t>
+            </a:r>
+            <a:r>
+              <a:rPr lang="fr-FR" dirty="0" err="1"/>
+              <a:t>com.example.project.dao.domain.School.</a:t>
+            </a:r>
+            <a:r>
+              <a:rPr lang="fr-FR" dirty="0" err="1">
+                <a:highlight>
+                  <a:srgbClr val="FFFF00"/>
+                </a:highlight>
+              </a:rPr>
+              <a:t>teachers</a:t>
+            </a:r>
+            <a:r>
+              <a:rPr lang="fr-FR" dirty="0"/>
+              <a:t>]</a:t>
+            </a:r>
+          </a:p>
+        </p:txBody>
+      </p:sp>
+    </p:spTree>
+    <p:extLst>
+      <p:ext uri="{BB962C8B-B14F-4D97-AF65-F5344CB8AC3E}">
+        <p14:creationId xmlns:p14="http://schemas.microsoft.com/office/powerpoint/2010/main" val="2676478294"/>
+      </p:ext>
+    </p:extLst>
+  </p:cSld>
+  <p:clrMapOvr>
+    <a:masterClrMapping/>
+  </p:clrMapOvr>
+  <mc:AlternateContent xmlns:mc="http://schemas.openxmlformats.org/markup-compatibility/2006" xmlns:p14="http://schemas.microsoft.com/office/powerpoint/2010/main">
+    <mc:Choice Requires="p14">
+      <p:transition p14:dur="10"/>
+    </mc:Choice>
+    <mc:Fallback xmlns="">
+      <p:transition/>
+    </mc:Fallback>
+  </mc:AlternateContent>
+</p:sld>
+</file>
+
+<file path=ppt/slides/slide21.xml><?xml version="1.0" encoding="utf-8"?>
 <p:sld xmlns:a="http://schemas.openxmlformats.org/drawingml/2006/main" xmlns:r="http://schemas.openxmlformats.org/officeDocument/2006/relationships" xmlns:p="http://schemas.openxmlformats.org/presentationml/2006/main">
   <p:cSld>
     <p:spTree>
@@ -21326,7 +21757,7 @@
 </p:sld>
 </file>
 
-<file path=ppt/slides/slide21.xml><?xml version="1.0" encoding="utf-8"?>
+<file path=ppt/slides/slide22.xml><?xml version="1.0" encoding="utf-8"?>
 <p:sld xmlns:a="http://schemas.openxmlformats.org/drawingml/2006/main" xmlns:r="http://schemas.openxmlformats.org/officeDocument/2006/relationships" xmlns:p="http://schemas.openxmlformats.org/presentationml/2006/main">
   <p:cSld>
     <p:spTree>
@@ -23073,7 +23504,7 @@
 </p:sld>
 </file>
 
-<file path=ppt/slides/slide22.xml><?xml version="1.0" encoding="utf-8"?>
+<file path=ppt/slides/slide23.xml><?xml version="1.0" encoding="utf-8"?>
 <p:sld xmlns:a="http://schemas.openxmlformats.org/drawingml/2006/main" xmlns:r="http://schemas.openxmlformats.org/officeDocument/2006/relationships" xmlns:p="http://schemas.openxmlformats.org/presentationml/2006/main">
   <p:cSld>
     <p:spTree>
@@ -23120,7 +23551,7 @@
           <a:p>
             <a:r>
               <a:rPr lang="fr-FR" dirty="0"/>
-              <a:t>Pagination : Hibernate favorise la consistance des données</a:t>
+              <a:t>Erreur de pagination : Hibernate favorise la consistance des données</a:t>
             </a:r>
           </a:p>
         </p:txBody>
@@ -23799,6 +24230,53 @@
           </a:p>
         </p:txBody>
       </p:sp>
+      <p:pic>
+        <p:nvPicPr>
+          <p:cNvPr id="1026" name="Picture 2">
+            <a:extLst>
+              <a:ext uri="{FF2B5EF4-FFF2-40B4-BE49-F238E27FC236}">
+                <a16:creationId xmlns:a16="http://schemas.microsoft.com/office/drawing/2014/main" id="{73DF48DB-99B2-4292-B898-751F348378DE}"/>
+              </a:ext>
+            </a:extLst>
+          </p:cNvPr>
+          <p:cNvPicPr>
+            <a:picLocks noChangeAspect="1" noChangeArrowheads="1"/>
+          </p:cNvPicPr>
+          <p:nvPr/>
+        </p:nvPicPr>
+        <p:blipFill>
+          <a:blip r:embed="rId3">
+            <a:extLst>
+              <a:ext uri="{28A0092B-C50C-407E-A947-70E740481C1C}">
+                <a14:useLocalDpi xmlns:a14="http://schemas.microsoft.com/office/drawing/2010/main" val="0"/>
+              </a:ext>
+            </a:extLst>
+          </a:blip>
+          <a:srcRect/>
+          <a:stretch>
+            <a:fillRect/>
+          </a:stretch>
+        </p:blipFill>
+        <p:spPr bwMode="auto">
+          <a:xfrm>
+            <a:off x="4895346" y="5118789"/>
+            <a:ext cx="1559242" cy="1559242"/>
+          </a:xfrm>
+          <a:prstGeom prst="rect">
+            <a:avLst/>
+          </a:prstGeom>
+          <a:noFill/>
+          <a:extLst>
+            <a:ext uri="{909E8E84-426E-40DD-AFC4-6F175D3DCCD1}">
+              <a14:hiddenFill xmlns:a14="http://schemas.microsoft.com/office/drawing/2010/main">
+                <a:solidFill>
+                  <a:srgbClr val="FFFFFF"/>
+                </a:solidFill>
+              </a14:hiddenFill>
+            </a:ext>
+          </a:extLst>
+        </p:spPr>
+      </p:pic>
     </p:spTree>
     <p:extLst>
       <p:ext uri="{BB962C8B-B14F-4D97-AF65-F5344CB8AC3E}">
@@ -23936,7 +24414,7 @@
 </p:sld>
 </file>
 
-<file path=ppt/slides/slide23.xml><?xml version="1.0" encoding="utf-8"?>
+<file path=ppt/slides/slide24.xml><?xml version="1.0" encoding="utf-8"?>
 <p:sld xmlns:a="http://schemas.openxmlformats.org/drawingml/2006/main" xmlns:r="http://schemas.openxmlformats.org/officeDocument/2006/relationships" xmlns:p="http://schemas.openxmlformats.org/presentationml/2006/main">
   <p:cSld>
     <p:spTree>
@@ -24809,7 +25287,7 @@
 </p:sld>
 </file>
 
-<file path=ppt/slides/slide24.xml><?xml version="1.0" encoding="utf-8"?>
+<file path=ppt/slides/slide25.xml><?xml version="1.0" encoding="utf-8"?>
 <p:sld xmlns:a="http://schemas.openxmlformats.org/drawingml/2006/main" xmlns:r="http://schemas.openxmlformats.org/officeDocument/2006/relationships" xmlns:p="http://schemas.openxmlformats.org/presentationml/2006/main">
   <p:cSld>
     <p:spTree>
@@ -27075,7 +27553,7 @@
 </p:sld>
 </file>
 
-<file path=ppt/slides/slide25.xml><?xml version="1.0" encoding="utf-8"?>
+<file path=ppt/slides/slide26.xml><?xml version="1.0" encoding="utf-8"?>
 <p:sld xmlns:a="http://schemas.openxmlformats.org/drawingml/2006/main" xmlns:r="http://schemas.openxmlformats.org/officeDocument/2006/relationships" xmlns:p="http://schemas.openxmlformats.org/presentationml/2006/main">
   <p:cSld>
     <p:spTree>
@@ -29281,7 +29759,7 @@
 </p:sld>
 </file>
 
-<file path=ppt/slides/slide26.xml><?xml version="1.0" encoding="utf-8"?>
+<file path=ppt/slides/slide27.xml><?xml version="1.0" encoding="utf-8"?>
 <p:sld xmlns:a="http://schemas.openxmlformats.org/drawingml/2006/main" xmlns:r="http://schemas.openxmlformats.org/officeDocument/2006/relationships" xmlns:p="http://schemas.openxmlformats.org/presentationml/2006/main">
   <p:cSld>
     <p:spTree>
@@ -29523,7 +30001,7 @@
 </p:sld>
 </file>
 
-<file path=ppt/slides/slide27.xml><?xml version="1.0" encoding="utf-8"?>
+<file path=ppt/slides/slide28.xml><?xml version="1.0" encoding="utf-8"?>
 <p:sld xmlns:a="http://schemas.openxmlformats.org/drawingml/2006/main" xmlns:r="http://schemas.openxmlformats.org/officeDocument/2006/relationships" xmlns:p="http://schemas.openxmlformats.org/presentationml/2006/main">
   <p:cSld>
     <p:spTree>
@@ -29862,7 +30340,7 @@
 </p:sld>
 </file>
 
-<file path=ppt/slides/slide28.xml><?xml version="1.0" encoding="utf-8"?>
+<file path=ppt/slides/slide29.xml><?xml version="1.0" encoding="utf-8"?>
 <p:sld xmlns:a="http://schemas.openxmlformats.org/drawingml/2006/main" xmlns:r="http://schemas.openxmlformats.org/officeDocument/2006/relationships" xmlns:p="http://schemas.openxmlformats.org/presentationml/2006/main">
   <p:cSld>
     <p:spTree>
@@ -30425,7 +30903,134 @@
 </p:sld>
 </file>
 
-<file path=ppt/slides/slide29.xml><?xml version="1.0" encoding="utf-8"?>
+<file path=ppt/slides/slide3.xml><?xml version="1.0" encoding="utf-8"?>
+<p:sld xmlns:a="http://schemas.openxmlformats.org/drawingml/2006/main" xmlns:r="http://schemas.openxmlformats.org/officeDocument/2006/relationships" xmlns:p="http://schemas.openxmlformats.org/presentationml/2006/main">
+  <p:cSld>
+    <p:spTree>
+      <p:nvGrpSpPr>
+        <p:cNvPr id="1" name=""/>
+        <p:cNvGrpSpPr/>
+        <p:nvPr/>
+      </p:nvGrpSpPr>
+      <p:grpSpPr>
+        <a:xfrm>
+          <a:off x="0" y="0"/>
+          <a:ext cx="0" cy="0"/>
+          <a:chOff x="0" y="0"/>
+          <a:chExt cx="0" cy="0"/>
+        </a:xfrm>
+      </p:grpSpPr>
+      <p:sp>
+        <p:nvSpPr>
+          <p:cNvPr id="2" name="Titre 1">
+            <a:extLst>
+              <a:ext uri="{FF2B5EF4-FFF2-40B4-BE49-F238E27FC236}">
+                <a16:creationId xmlns:a16="http://schemas.microsoft.com/office/drawing/2014/main" id="{0C3CF6A7-E17D-4316-8AD8-CAC6DB3A712D}"/>
+              </a:ext>
+            </a:extLst>
+          </p:cNvPr>
+          <p:cNvSpPr>
+            <a:spLocks noGrp="1"/>
+          </p:cNvSpPr>
+          <p:nvPr>
+            <p:ph type="title"/>
+          </p:nvPr>
+        </p:nvSpPr>
+        <p:spPr/>
+        <p:txBody>
+          <a:bodyPr/>
+          <a:lstStyle/>
+          <a:p>
+            <a:r>
+              <a:rPr lang="fr-FR" dirty="0"/>
+              <a:t>Le but de cette présentation</a:t>
+            </a:r>
+          </a:p>
+        </p:txBody>
+      </p:sp>
+      <p:sp>
+        <p:nvSpPr>
+          <p:cNvPr id="3" name="Espace réservé du contenu 2">
+            <a:extLst>
+              <a:ext uri="{FF2B5EF4-FFF2-40B4-BE49-F238E27FC236}">
+                <a16:creationId xmlns:a16="http://schemas.microsoft.com/office/drawing/2014/main" id="{6159C144-B174-42C5-8664-9366D104618A}"/>
+              </a:ext>
+            </a:extLst>
+          </p:cNvPr>
+          <p:cNvSpPr>
+            <a:spLocks noGrp="1"/>
+          </p:cNvSpPr>
+          <p:nvPr>
+            <p:ph sz="quarter" idx="13"/>
+          </p:nvPr>
+        </p:nvSpPr>
+        <p:spPr>
+          <a:xfrm>
+            <a:off x="539495" y="2560320"/>
+            <a:ext cx="10790493" cy="3977640"/>
+          </a:xfrm>
+        </p:spPr>
+        <p:txBody>
+          <a:bodyPr/>
+          <a:lstStyle/>
+          <a:p>
+            <a:pPr marL="342900" indent="-342900">
+              <a:buFont typeface="Wingdings" panose="05000000000000000000" pitchFamily="2" charset="2"/>
+              <a:buChar char="Ø"/>
+            </a:pPr>
+            <a:r>
+              <a:rPr lang="fr-FR" dirty="0"/>
+              <a:t>Identifier les </a:t>
+            </a:r>
+            <a:r>
+              <a:rPr lang="fr-FR" dirty="0" err="1"/>
+              <a:t>mappings</a:t>
+            </a:r>
+            <a:r>
+              <a:rPr lang="fr-FR" dirty="0"/>
+              <a:t> qui peuvent poser des problèmes de performance (N+1)</a:t>
+            </a:r>
+            <a:br>
+              <a:rPr lang="fr-FR" dirty="0"/>
+            </a:br>
+            <a:r>
+              <a:rPr lang="fr-FR" dirty="0"/>
+              <a:t>Et dans quelle situation !</a:t>
+            </a:r>
+          </a:p>
+          <a:p>
+            <a:pPr marL="342900" indent="-342900">
+              <a:buFont typeface="Wingdings" panose="05000000000000000000" pitchFamily="2" charset="2"/>
+              <a:buChar char="Ø"/>
+            </a:pPr>
+            <a:r>
+              <a:rPr lang="fr-FR" dirty="0"/>
+              <a:t>Quelques solutions pour y remédier</a:t>
+            </a:r>
+          </a:p>
+          <a:p>
+            <a:pPr marL="342900" indent="-342900">
+              <a:buFont typeface="Wingdings" panose="05000000000000000000" pitchFamily="2" charset="2"/>
+              <a:buChar char="Ø"/>
+            </a:pPr>
+            <a:endParaRPr lang="fr-FR" dirty="0"/>
+          </a:p>
+        </p:txBody>
+      </p:sp>
+    </p:spTree>
+    <p:extLst>
+      <p:ext uri="{BB962C8B-B14F-4D97-AF65-F5344CB8AC3E}">
+        <p14:creationId xmlns:p14="http://schemas.microsoft.com/office/powerpoint/2010/main" val="3600004125"/>
+      </p:ext>
+    </p:extLst>
+  </p:cSld>
+  <p:clrMapOvr>
+    <a:masterClrMapping/>
+  </p:clrMapOvr>
+</p:sld>
+</file>
+
+<file path=ppt/slides/slide30.xml><?xml version="1.0" encoding="utf-8"?>
 <p:sld xmlns:a="http://schemas.openxmlformats.org/drawingml/2006/main" xmlns:r="http://schemas.openxmlformats.org/officeDocument/2006/relationships" xmlns:p="http://schemas.openxmlformats.org/presentationml/2006/main">
   <p:cSld>
     <p:spTree>
@@ -31075,126 +31680,7 @@
 </p:sld>
 </file>
 
-<file path=ppt/slides/slide3.xml><?xml version="1.0" encoding="utf-8"?>
-<p:sld xmlns:a="http://schemas.openxmlformats.org/drawingml/2006/main" xmlns:r="http://schemas.openxmlformats.org/officeDocument/2006/relationships" xmlns:p="http://schemas.openxmlformats.org/presentationml/2006/main">
-  <p:cSld>
-    <p:spTree>
-      <p:nvGrpSpPr>
-        <p:cNvPr id="1" name=""/>
-        <p:cNvGrpSpPr/>
-        <p:nvPr/>
-      </p:nvGrpSpPr>
-      <p:grpSpPr>
-        <a:xfrm>
-          <a:off x="0" y="0"/>
-          <a:ext cx="0" cy="0"/>
-          <a:chOff x="0" y="0"/>
-          <a:chExt cx="0" cy="0"/>
-        </a:xfrm>
-      </p:grpSpPr>
-      <p:sp>
-        <p:nvSpPr>
-          <p:cNvPr id="2" name="Titre 1">
-            <a:extLst>
-              <a:ext uri="{FF2B5EF4-FFF2-40B4-BE49-F238E27FC236}">
-                <a16:creationId xmlns:a16="http://schemas.microsoft.com/office/drawing/2014/main" id="{0C3CF6A7-E17D-4316-8AD8-CAC6DB3A712D}"/>
-              </a:ext>
-            </a:extLst>
-          </p:cNvPr>
-          <p:cNvSpPr>
-            <a:spLocks noGrp="1"/>
-          </p:cNvSpPr>
-          <p:nvPr>
-            <p:ph type="title"/>
-          </p:nvPr>
-        </p:nvSpPr>
-        <p:spPr/>
-        <p:txBody>
-          <a:bodyPr/>
-          <a:lstStyle/>
-          <a:p>
-            <a:r>
-              <a:rPr lang="fr-FR" dirty="0"/>
-              <a:t>Le but de cette présentation</a:t>
-            </a:r>
-          </a:p>
-        </p:txBody>
-      </p:sp>
-      <p:sp>
-        <p:nvSpPr>
-          <p:cNvPr id="3" name="Espace réservé du contenu 2">
-            <a:extLst>
-              <a:ext uri="{FF2B5EF4-FFF2-40B4-BE49-F238E27FC236}">
-                <a16:creationId xmlns:a16="http://schemas.microsoft.com/office/drawing/2014/main" id="{6159C144-B174-42C5-8664-9366D104618A}"/>
-              </a:ext>
-            </a:extLst>
-          </p:cNvPr>
-          <p:cNvSpPr>
-            <a:spLocks noGrp="1"/>
-          </p:cNvSpPr>
-          <p:nvPr>
-            <p:ph sz="quarter" idx="13"/>
-          </p:nvPr>
-        </p:nvSpPr>
-        <p:spPr>
-          <a:xfrm>
-            <a:off x="539495" y="2560320"/>
-            <a:ext cx="10790493" cy="3977640"/>
-          </a:xfrm>
-        </p:spPr>
-        <p:txBody>
-          <a:bodyPr/>
-          <a:lstStyle/>
-          <a:p>
-            <a:pPr marL="342900" indent="-342900">
-              <a:buFont typeface="Wingdings" panose="05000000000000000000" pitchFamily="2" charset="2"/>
-              <a:buChar char="Ø"/>
-            </a:pPr>
-            <a:r>
-              <a:rPr lang="fr-FR" dirty="0"/>
-              <a:t>Identifier les mapping qui peuvent poser des problèmes de performance (N+1)</a:t>
-            </a:r>
-            <a:br>
-              <a:rPr lang="fr-FR" dirty="0"/>
-            </a:br>
-            <a:r>
-              <a:rPr lang="fr-FR" dirty="0"/>
-              <a:t>Et dans quelle situation !</a:t>
-            </a:r>
-          </a:p>
-          <a:p>
-            <a:pPr marL="342900" indent="-342900">
-              <a:buFont typeface="Wingdings" panose="05000000000000000000" pitchFamily="2" charset="2"/>
-              <a:buChar char="Ø"/>
-            </a:pPr>
-            <a:r>
-              <a:rPr lang="fr-FR" dirty="0"/>
-              <a:t>Quelques solutions pour y remédier</a:t>
-            </a:r>
-          </a:p>
-          <a:p>
-            <a:pPr marL="342900" indent="-342900">
-              <a:buFont typeface="Wingdings" panose="05000000000000000000" pitchFamily="2" charset="2"/>
-              <a:buChar char="Ø"/>
-            </a:pPr>
-            <a:endParaRPr lang="fr-FR" dirty="0"/>
-          </a:p>
-        </p:txBody>
-      </p:sp>
-    </p:spTree>
-    <p:extLst>
-      <p:ext uri="{BB962C8B-B14F-4D97-AF65-F5344CB8AC3E}">
-        <p14:creationId xmlns:p14="http://schemas.microsoft.com/office/powerpoint/2010/main" val="3600004125"/>
-      </p:ext>
-    </p:extLst>
-  </p:cSld>
-  <p:clrMapOvr>
-    <a:masterClrMapping/>
-  </p:clrMapOvr>
-</p:sld>
-</file>
-
-<file path=ppt/slides/slide30.xml><?xml version="1.0" encoding="utf-8"?>
+<file path=ppt/slides/slide31.xml><?xml version="1.0" encoding="utf-8"?>
 <p:sld xmlns:a="http://schemas.openxmlformats.org/drawingml/2006/main" xmlns:r="http://schemas.openxmlformats.org/officeDocument/2006/relationships" xmlns:p="http://schemas.openxmlformats.org/presentationml/2006/main">
   <p:cSld>
     <p:spTree>
@@ -31843,7 +32329,7 @@
 </p:sld>
 </file>
 
-<file path=ppt/slides/slide31.xml><?xml version="1.0" encoding="utf-8"?>
+<file path=ppt/slides/slide32.xml><?xml version="1.0" encoding="utf-8"?>
 <p:sld xmlns:a="http://schemas.openxmlformats.org/drawingml/2006/main" xmlns:r="http://schemas.openxmlformats.org/officeDocument/2006/relationships" xmlns:p="http://schemas.openxmlformats.org/presentationml/2006/main">
   <p:cSld>
     <p:spTree>
@@ -32886,7 +33372,7 @@
 </p:sld>
 </file>
 
-<file path=ppt/slides/slide32.xml><?xml version="1.0" encoding="utf-8"?>
+<file path=ppt/slides/slide33.xml><?xml version="1.0" encoding="utf-8"?>
 <p:sld xmlns:a="http://schemas.openxmlformats.org/drawingml/2006/main" xmlns:r="http://schemas.openxmlformats.org/officeDocument/2006/relationships" xmlns:p="http://schemas.openxmlformats.org/presentationml/2006/main">
   <p:cSld>
     <p:spTree>
@@ -33033,8 +33519,8 @@
         </p:nvSpPr>
         <p:spPr>
           <a:xfrm>
-            <a:off x="521207" y="448056"/>
-            <a:ext cx="7783344" cy="640080"/>
+            <a:off x="521206" y="448056"/>
+            <a:ext cx="8762643" cy="640080"/>
           </a:xfrm>
         </p:spPr>
         <p:txBody>
@@ -33048,7 +33534,7 @@
                 <a:latin typeface="Segoe UI Light" panose="020B0502040204020203" pitchFamily="34" charset="0"/>
                 <a:cs typeface="Segoe UI Light" panose="020B0502040204020203" pitchFamily="34" charset="0"/>
               </a:rPr>
-              <a:t>Notre modèle de démo ui va nous poser des problèles !</a:t>
+              <a:t>Notre modèle de démo qui va nous poser des problèmes !</a:t>
             </a:r>
             <a:endParaRPr lang="fr-FR" sz="1200" noProof="1">
               <a:latin typeface="Segoe UI Light" panose="020B0502040204020203" pitchFamily="34" charset="0"/>
@@ -41989,21 +42475,21 @@
 </file>
 
 <file path=customXml/item2.xml><?xml version="1.0" encoding="utf-8"?>
+<p:properties xmlns:p="http://schemas.microsoft.com/office/2006/metadata/properties" xmlns:xsi="http://www.w3.org/2001/XMLSchema-instance" xmlns:pc="http://schemas.microsoft.com/office/infopath/2007/PartnerControls">
+  <documentManagement>
+    <Status xmlns="71af3243-3dd4-4a8d-8c0d-dd76da1f02a5">Not started</Status>
+    <MediaServiceKeyPoints xmlns="71af3243-3dd4-4a8d-8c0d-dd76da1f02a5" xsi:nil="true"/>
+  </documentManagement>
+</p:properties>
+</file>
+
+<file path=customXml/item3.xml><?xml version="1.0" encoding="utf-8"?>
 <?mso-contentType ?>
 <FormTemplates xmlns="http://schemas.microsoft.com/sharepoint/v3/contenttype/forms">
   <Display>DocumentLibraryForm</Display>
   <Edit>DocumentLibraryForm</Edit>
   <New>DocumentLibraryForm</New>
 </FormTemplates>
-</file>
-
-<file path=customXml/item3.xml><?xml version="1.0" encoding="utf-8"?>
-<p:properties xmlns:p="http://schemas.microsoft.com/office/2006/metadata/properties" xmlns:xsi="http://www.w3.org/2001/XMLSchema-instance" xmlns:pc="http://schemas.microsoft.com/office/infopath/2007/PartnerControls">
-  <documentManagement>
-    <Status xmlns="71af3243-3dd4-4a8d-8c0d-dd76da1f02a5">Not started</Status>
-    <MediaServiceKeyPoints xmlns="71af3243-3dd4-4a8d-8c0d-dd76da1f02a5" xsi:nil="true"/>
-  </documentManagement>
-</p:properties>
 </file>
 
 <file path=customXml/itemProps1.xml><?xml version="1.0" encoding="utf-8"?>
@@ -42026,14 +42512,6 @@
 </file>
 
 <file path=customXml/itemProps2.xml><?xml version="1.0" encoding="utf-8"?>
-<ds:datastoreItem xmlns:ds="http://schemas.openxmlformats.org/officeDocument/2006/customXml" ds:itemID="{7EE8C63A-4744-4DE4-BB49-0FF0B5375C60}">
-  <ds:schemaRefs>
-    <ds:schemaRef ds:uri="http://schemas.microsoft.com/sharepoint/v3/contenttype/forms"/>
-  </ds:schemaRefs>
-</ds:datastoreItem>
-</file>
-
-<file path=customXml/itemProps3.xml><?xml version="1.0" encoding="utf-8"?>
 <ds:datastoreItem xmlns:ds="http://schemas.openxmlformats.org/officeDocument/2006/customXml" ds:itemID="{950072C5-DDE0-4258-BA7A-4D4B80DFA632}">
   <ds:schemaRefs>
     <ds:schemaRef ds:uri="http://purl.org/dc/terms/"/>
@@ -42048,4 +42526,12 @@
     <ds:schemaRef ds:uri="http://purl.org/dc/dcmitype/"/>
   </ds:schemaRefs>
 </ds:datastoreItem>
+</file>
+
+<file path=customXml/itemProps3.xml><?xml version="1.0" encoding="utf-8"?>
+<ds:datastoreItem xmlns:ds="http://schemas.openxmlformats.org/officeDocument/2006/customXml" ds:itemID="{7EE8C63A-4744-4DE4-BB49-0FF0B5375C60}">
+  <ds:schemaRefs>
+    <ds:schemaRef ds:uri="http://schemas.microsoft.com/sharepoint/v3/contenttype/forms"/>
+  </ds:schemaRefs>
+</ds:datastoreItem>
 </file>
--- a/JPA-HIBERNATE.pptx
+++ b/JPA-HIBERNATE.pptx
@@ -5,10 +5,10 @@
     <p:sldMasterId id="2147483660" r:id="rId4"/>
   </p:sldMasterIdLst>
   <p:notesMasterIdLst>
-    <p:notesMasterId r:id="rId38"/>
+    <p:notesMasterId r:id="rId39"/>
   </p:notesMasterIdLst>
   <p:handoutMasterIdLst>
-    <p:handoutMasterId r:id="rId39"/>
+    <p:handoutMasterId r:id="rId40"/>
   </p:handoutMasterIdLst>
   <p:sldIdLst>
     <p:sldId id="256" r:id="rId5"/>
@@ -43,7 +43,8 @@
     <p:sldId id="326" r:id="rId34"/>
     <p:sldId id="306" r:id="rId35"/>
     <p:sldId id="299" r:id="rId36"/>
-    <p:sldId id="327" r:id="rId37"/>
+    <p:sldId id="330" r:id="rId37"/>
+    <p:sldId id="327" r:id="rId38"/>
   </p:sldIdLst>
   <p:sldSz cx="12192000" cy="6858000"/>
   <p:notesSz cx="6858000" cy="9144000"/>
@@ -179,6 +180,7 @@
             <p14:sldId id="326"/>
             <p14:sldId id="306"/>
             <p14:sldId id="299"/>
+            <p14:sldId id="330"/>
             <p14:sldId id="327"/>
           </p14:sldIdLst>
         </p14:section>
@@ -3361,6 +3363,91 @@
     </p:spTree>
     <p:extLst>
       <p:ext uri="{BB962C8B-B14F-4D97-AF65-F5344CB8AC3E}">
+        <p14:creationId xmlns:p14="http://schemas.microsoft.com/office/powerpoint/2010/main" val="686488941"/>
+      </p:ext>
+    </p:extLst>
+  </p:cSld>
+  <p:clrMapOvr>
+    <a:masterClrMapping/>
+  </p:clrMapOvr>
+</p:notes>
+</file>
+
+<file path=ppt/notesSlides/notesSlide33.xml><?xml version="1.0" encoding="utf-8"?>
+<p:notes xmlns:a="http://schemas.openxmlformats.org/drawingml/2006/main" xmlns:r="http://schemas.openxmlformats.org/officeDocument/2006/relationships" xmlns:p="http://schemas.openxmlformats.org/presentationml/2006/main">
+  <p:cSld>
+    <p:spTree>
+      <p:nvGrpSpPr>
+        <p:cNvPr id="1" name=""/>
+        <p:cNvGrpSpPr/>
+        <p:nvPr/>
+      </p:nvGrpSpPr>
+      <p:grpSpPr>
+        <a:xfrm>
+          <a:off x="0" y="0"/>
+          <a:ext cx="0" cy="0"/>
+          <a:chOff x="0" y="0"/>
+          <a:chExt cx="0" cy="0"/>
+        </a:xfrm>
+      </p:grpSpPr>
+      <p:sp>
+        <p:nvSpPr>
+          <p:cNvPr id="2" name="Espace réservé de l'image des diapositives 1"/>
+          <p:cNvSpPr>
+            <a:spLocks noGrp="1" noRot="1" noChangeAspect="1"/>
+          </p:cNvSpPr>
+          <p:nvPr>
+            <p:ph type="sldImg"/>
+          </p:nvPr>
+        </p:nvSpPr>
+        <p:spPr/>
+      </p:sp>
+      <p:sp>
+        <p:nvSpPr>
+          <p:cNvPr id="3" name="Espace réservé des notes 2"/>
+          <p:cNvSpPr>
+            <a:spLocks noGrp="1"/>
+          </p:cNvSpPr>
+          <p:nvPr>
+            <p:ph type="body" idx="1"/>
+          </p:nvPr>
+        </p:nvSpPr>
+        <p:spPr/>
+        <p:txBody>
+          <a:bodyPr/>
+          <a:lstStyle/>
+          <a:p>
+            <a:endParaRPr lang="fr-FR" noProof="1"/>
+          </a:p>
+        </p:txBody>
+      </p:sp>
+      <p:sp>
+        <p:nvSpPr>
+          <p:cNvPr id="4" name="Espace réservé du numéro de diapositive 3"/>
+          <p:cNvSpPr>
+            <a:spLocks noGrp="1"/>
+          </p:cNvSpPr>
+          <p:nvPr>
+            <p:ph type="sldNum" sz="quarter" idx="5"/>
+          </p:nvPr>
+        </p:nvSpPr>
+        <p:spPr/>
+        <p:txBody>
+          <a:bodyPr/>
+          <a:lstStyle/>
+          <a:p>
+            <a:pPr rtl="0"/>
+            <a:fld id="{DF61EA0F-A667-4B49-8422-0062BC55E249}" type="slidenum">
+              <a:rPr lang="fr-FR" noProof="1" dirty="0" smtClean="0"/>
+              <a:t>34</a:t>
+            </a:fld>
+            <a:endParaRPr lang="fr-FR" noProof="1"/>
+          </a:p>
+        </p:txBody>
+      </p:sp>
+    </p:spTree>
+    <p:extLst>
+      <p:ext uri="{BB962C8B-B14F-4D97-AF65-F5344CB8AC3E}">
         <p14:creationId xmlns:p14="http://schemas.microsoft.com/office/powerpoint/2010/main" val="2594538779"/>
       </p:ext>
     </p:extLst>
@@ -3619,7 +3706,10 @@
           <a:bodyPr/>
           <a:lstStyle/>
           <a:p>
-            <a:endParaRPr lang="fr-FR" noProof="1"/>
+            <a:r>
+              <a:rPr lang="fr-FR" noProof="1"/>
+              <a:t>Identification des relations problématiques</a:t>
+            </a:r>
           </a:p>
         </p:txBody>
       </p:sp>
@@ -33373,6 +33463,118 @@
 </file>
 
 <file path=ppt/slides/slide33.xml><?xml version="1.0" encoding="utf-8"?>
+<p:sld xmlns:a="http://schemas.openxmlformats.org/drawingml/2006/main" xmlns:r="http://schemas.openxmlformats.org/officeDocument/2006/relationships" xmlns:p="http://schemas.openxmlformats.org/presentationml/2006/main">
+  <p:cSld>
+    <p:spTree>
+      <p:nvGrpSpPr>
+        <p:cNvPr id="1" name=""/>
+        <p:cNvGrpSpPr/>
+        <p:nvPr/>
+      </p:nvGrpSpPr>
+      <p:grpSpPr>
+        <a:xfrm>
+          <a:off x="0" y="0"/>
+          <a:ext cx="0" cy="0"/>
+          <a:chOff x="0" y="0"/>
+          <a:chExt cx="0" cy="0"/>
+        </a:xfrm>
+      </p:grpSpPr>
+      <p:sp>
+        <p:nvSpPr>
+          <p:cNvPr id="4" name="Titre 3"/>
+          <p:cNvSpPr>
+            <a:spLocks noGrp="1"/>
+          </p:cNvSpPr>
+          <p:nvPr>
+            <p:ph type="title"/>
+          </p:nvPr>
+        </p:nvSpPr>
+        <p:spPr>
+          <a:xfrm>
+            <a:off x="521207" y="448056"/>
+            <a:ext cx="7783344" cy="640080"/>
+          </a:xfrm>
+        </p:spPr>
+        <p:txBody>
+          <a:bodyPr rtlCol="0">
+            <a:normAutofit/>
+          </a:bodyPr>
+          <a:lstStyle/>
+          <a:p>
+            <a:pPr rtl="0"/>
+            <a:r>
+              <a:rPr lang="fr-FR" noProof="1">
+                <a:latin typeface="Segoe UI Light" panose="020B0502040204020203" pitchFamily="34" charset="0"/>
+                <a:cs typeface="Segoe UI Light" panose="020B0502040204020203" pitchFamily="34" charset="0"/>
+              </a:rPr>
+              <a:t>Code source</a:t>
+            </a:r>
+          </a:p>
+        </p:txBody>
+      </p:sp>
+      <p:sp>
+        <p:nvSpPr>
+          <p:cNvPr id="7" name="ZoneTexte 6">
+            <a:extLst>
+              <a:ext uri="{FF2B5EF4-FFF2-40B4-BE49-F238E27FC236}">
+                <a16:creationId xmlns:a16="http://schemas.microsoft.com/office/drawing/2014/main" id="{1351B732-5CDD-4F7E-9691-AF0E2CE8CDA3}"/>
+              </a:ext>
+            </a:extLst>
+          </p:cNvPr>
+          <p:cNvSpPr txBox="1"/>
+          <p:nvPr/>
+        </p:nvSpPr>
+        <p:spPr>
+          <a:xfrm>
+            <a:off x="521207" y="1708680"/>
+            <a:ext cx="6094206" cy="369332"/>
+          </a:xfrm>
+          <a:prstGeom prst="rect">
+            <a:avLst/>
+          </a:prstGeom>
+          <a:noFill/>
+        </p:spPr>
+        <p:txBody>
+          <a:bodyPr wrap="square">
+            <a:spAutoFit/>
+          </a:bodyPr>
+          <a:lstStyle/>
+          <a:p>
+            <a:r>
+              <a:rPr lang="fr-FR" dirty="0">
+                <a:hlinkClick r:id="rId3"/>
+              </a:rPr>
+              <a:t>https://github.com/sebzuki/hibernate</a:t>
+            </a:r>
+            <a:r>
+              <a:rPr lang="fr-FR" dirty="0"/>
+              <a:t> </a:t>
+            </a:r>
+          </a:p>
+        </p:txBody>
+      </p:sp>
+    </p:spTree>
+    <p:extLst>
+      <p:ext uri="{BB962C8B-B14F-4D97-AF65-F5344CB8AC3E}">
+        <p14:creationId xmlns:p14="http://schemas.microsoft.com/office/powerpoint/2010/main" val="590432182"/>
+      </p:ext>
+    </p:extLst>
+  </p:cSld>
+  <p:clrMapOvr>
+    <a:masterClrMapping/>
+  </p:clrMapOvr>
+  <mc:AlternateContent xmlns:mc="http://schemas.openxmlformats.org/markup-compatibility/2006" xmlns:p14="http://schemas.microsoft.com/office/powerpoint/2010/main">
+    <mc:Choice Requires="p14">
+      <p:transition p14:dur="10"/>
+    </mc:Choice>
+    <mc:Fallback xmlns="">
+      <p:transition/>
+    </mc:Fallback>
+  </mc:AlternateContent>
+</p:sld>
+</file>
+
+<file path=ppt/slides/slide34.xml><?xml version="1.0" encoding="utf-8"?>
 <p:sld xmlns:a="http://schemas.openxmlformats.org/drawingml/2006/main" xmlns:r="http://schemas.openxmlformats.org/officeDocument/2006/relationships" xmlns:p="http://schemas.openxmlformats.org/presentationml/2006/main">
   <p:cSld>
     <p:spTree>

--- a/JPA-HIBERNATE.pptx
+++ b/JPA-HIBERNATE.pptx
@@ -29,8 +29,8 @@
     <p:sldId id="309" r:id="rId20"/>
     <p:sldId id="311" r:id="rId21"/>
     <p:sldId id="310" r:id="rId22"/>
-    <p:sldId id="329" r:id="rId23"/>
-    <p:sldId id="305" r:id="rId24"/>
+    <p:sldId id="305" r:id="rId23"/>
+    <p:sldId id="329" r:id="rId24"/>
     <p:sldId id="315" r:id="rId25"/>
     <p:sldId id="317" r:id="rId26"/>
     <p:sldId id="320" r:id="rId27"/>
@@ -166,8 +166,8 @@
             <p14:sldId id="309"/>
             <p14:sldId id="311"/>
             <p14:sldId id="310"/>
+            <p14:sldId id="305"/>
             <p14:sldId id="329"/>
-            <p14:sldId id="305"/>
             <p14:sldId id="315"/>
             <p14:sldId id="317"/>
             <p14:sldId id="320"/>
@@ -1738,87 +1738,6 @@
           <a:bodyPr/>
           <a:lstStyle/>
           <a:p>
-            <a:r>
-              <a:rPr lang="fr-FR" noProof="1"/>
-              <a:t>Réalise l’équivalent un CROSS JOIN, en effet, la clause JOIN se transforme en CROSS JOIN dès lors qu’elle est réalisée sur plusieurs entités non liées entre elles !</a:t>
-            </a:r>
-          </a:p>
-          <a:p>
-            <a:r>
-              <a:rPr lang="fr-FR" noProof="1"/>
-              <a:t>Et c’est le cas de Student et Teacher !</a:t>
-            </a:r>
-          </a:p>
-          <a:p>
-            <a:pPr marL="0" marR="0" lvl="0" indent="0" algn="l" defTabSz="914400" rtl="0" eaLnBrk="1" fontAlgn="auto" latinLnBrk="0" hangingPunct="1">
-              <a:lnSpc>
-                <a:spcPct val="100000"/>
-              </a:lnSpc>
-              <a:spcBef>
-                <a:spcPts val="0"/>
-              </a:spcBef>
-              <a:spcAft>
-                <a:spcPts val="0"/>
-              </a:spcAft>
-              <a:buClrTx/>
-              <a:buSzTx/>
-              <a:buFontTx/>
-              <a:buNone/>
-              <a:tabLst/>
-              <a:defRPr/>
-            </a:pPr>
-            <a:r>
-              <a:rPr lang="fr-FR" noProof="1"/>
-              <a:t>A mettre d’office sur toutes les relations OneToOne</a:t>
-            </a:r>
-          </a:p>
-          <a:p>
-            <a:pPr marL="0" marR="0" lvl="0" indent="0" algn="l" defTabSz="914400" rtl="0" eaLnBrk="1" fontAlgn="auto" latinLnBrk="0" hangingPunct="1">
-              <a:lnSpc>
-                <a:spcPct val="100000"/>
-              </a:lnSpc>
-              <a:spcBef>
-                <a:spcPts val="0"/>
-              </a:spcBef>
-              <a:spcAft>
-                <a:spcPts val="0"/>
-              </a:spcAft>
-              <a:buClrTx/>
-              <a:buSzTx/>
-              <a:buFontTx/>
-              <a:buNone/>
-              <a:tabLst/>
-              <a:defRPr/>
-            </a:pPr>
-            <a:r>
-              <a:rPr lang="fr-FR" noProof="1"/>
-              <a:t>Le produit cartesien pour une ou quelque grappe est bien meilleur que les autres solutions car ça ne fait qu’un seul SELECT.</a:t>
-            </a:r>
-          </a:p>
-          <a:p>
-            <a:pPr marL="0" marR="0" lvl="0" indent="0" algn="l" defTabSz="914400" rtl="0" eaLnBrk="1" fontAlgn="auto" latinLnBrk="0" hangingPunct="1">
-              <a:lnSpc>
-                <a:spcPct val="100000"/>
-              </a:lnSpc>
-              <a:spcBef>
-                <a:spcPts val="0"/>
-              </a:spcBef>
-              <a:spcAft>
-                <a:spcPts val="0"/>
-              </a:spcAft>
-              <a:buClrTx/>
-              <a:buSzTx/>
-              <a:buFontTx/>
-              <a:buNone/>
-              <a:tabLst/>
-              <a:defRPr/>
-            </a:pPr>
-            <a:r>
-              <a:rPr lang="fr-FR" noProof="1"/>
-              <a:t>Et pour des temps aussi courts, c’est l’aller retour server BDD qui va compter le plus.</a:t>
-            </a:r>
-          </a:p>
-          <a:p>
             <a:endParaRPr lang="fr-FR" noProof="1"/>
           </a:p>
         </p:txBody>
@@ -1850,7 +1769,7 @@
     </p:spTree>
     <p:extLst>
       <p:ext uri="{BB962C8B-B14F-4D97-AF65-F5344CB8AC3E}">
-        <p14:creationId xmlns:p14="http://schemas.microsoft.com/office/powerpoint/2010/main" val="3825159532"/>
+        <p14:creationId xmlns:p14="http://schemas.microsoft.com/office/powerpoint/2010/main" val="342313134"/>
       </p:ext>
     </p:extLst>
   </p:cSld>
@@ -1904,6 +1823,87 @@
           <a:bodyPr/>
           <a:lstStyle/>
           <a:p>
+            <a:r>
+              <a:rPr lang="fr-FR" noProof="1"/>
+              <a:t>Réalise l’équivalent un CROSS JOIN, en effet, la clause JOIN se transforme en CROSS JOIN dès lors qu’elle est réalisée sur plusieurs entités non liées entre elles !</a:t>
+            </a:r>
+          </a:p>
+          <a:p>
+            <a:r>
+              <a:rPr lang="fr-FR" noProof="1"/>
+              <a:t>Et c’est le cas de Student et Teacher !</a:t>
+            </a:r>
+          </a:p>
+          <a:p>
+            <a:pPr marL="0" marR="0" lvl="0" indent="0" algn="l" defTabSz="914400" rtl="0" eaLnBrk="1" fontAlgn="auto" latinLnBrk="0" hangingPunct="1">
+              <a:lnSpc>
+                <a:spcPct val="100000"/>
+              </a:lnSpc>
+              <a:spcBef>
+                <a:spcPts val="0"/>
+              </a:spcBef>
+              <a:spcAft>
+                <a:spcPts val="0"/>
+              </a:spcAft>
+              <a:buClrTx/>
+              <a:buSzTx/>
+              <a:buFontTx/>
+              <a:buNone/>
+              <a:tabLst/>
+              <a:defRPr/>
+            </a:pPr>
+            <a:r>
+              <a:rPr lang="fr-FR" noProof="1"/>
+              <a:t>A mettre d’office sur toutes les relations OneToOne</a:t>
+            </a:r>
+          </a:p>
+          <a:p>
+            <a:pPr marL="0" marR="0" lvl="0" indent="0" algn="l" defTabSz="914400" rtl="0" eaLnBrk="1" fontAlgn="auto" latinLnBrk="0" hangingPunct="1">
+              <a:lnSpc>
+                <a:spcPct val="100000"/>
+              </a:lnSpc>
+              <a:spcBef>
+                <a:spcPts val="0"/>
+              </a:spcBef>
+              <a:spcAft>
+                <a:spcPts val="0"/>
+              </a:spcAft>
+              <a:buClrTx/>
+              <a:buSzTx/>
+              <a:buFontTx/>
+              <a:buNone/>
+              <a:tabLst/>
+              <a:defRPr/>
+            </a:pPr>
+            <a:r>
+              <a:rPr lang="fr-FR" noProof="1"/>
+              <a:t>Le produit cartesien pour une ou quelque grappe est bien meilleur que les autres solutions car ça ne fait qu’un seul SELECT.</a:t>
+            </a:r>
+          </a:p>
+          <a:p>
+            <a:pPr marL="0" marR="0" lvl="0" indent="0" algn="l" defTabSz="914400" rtl="0" eaLnBrk="1" fontAlgn="auto" latinLnBrk="0" hangingPunct="1">
+              <a:lnSpc>
+                <a:spcPct val="100000"/>
+              </a:lnSpc>
+              <a:spcBef>
+                <a:spcPts val="0"/>
+              </a:spcBef>
+              <a:spcAft>
+                <a:spcPts val="0"/>
+              </a:spcAft>
+              <a:buClrTx/>
+              <a:buSzTx/>
+              <a:buFontTx/>
+              <a:buNone/>
+              <a:tabLst/>
+              <a:defRPr/>
+            </a:pPr>
+            <a:r>
+              <a:rPr lang="fr-FR" noProof="1"/>
+              <a:t>Et pour des temps aussi courts, c’est l’aller retour server BDD qui va compter le plus.</a:t>
+            </a:r>
+          </a:p>
+          <a:p>
             <a:endParaRPr lang="fr-FR" noProof="1"/>
           </a:p>
         </p:txBody>
@@ -1935,7 +1935,7 @@
     </p:spTree>
     <p:extLst>
       <p:ext uri="{BB962C8B-B14F-4D97-AF65-F5344CB8AC3E}">
-        <p14:creationId xmlns:p14="http://schemas.microsoft.com/office/powerpoint/2010/main" val="342313134"/>
+        <p14:creationId xmlns:p14="http://schemas.microsoft.com/office/powerpoint/2010/main" val="3825159532"/>
       </p:ext>
     </p:extLst>
   </p:cSld>
@@ -7089,7 +7089,7 @@
                 <a:effectLst/>
                 <a:latin typeface="Fira Code"/>
               </a:rPr>
-              <a:t>String</a:t>
+              <a:t>Long</a:t>
             </a:r>
             <a:r>
               <a:rPr kumimoji="0" lang="fr-FR" altLang="fr-FR" sz="1000" b="0" i="0" u="none" strike="noStrike" cap="none" normalizeH="0" baseline="0" dirty="0">
@@ -14657,7 +14657,7 @@
                 <a:effectLst/>
                 <a:latin typeface="Fira Code"/>
               </a:rPr>
-              <a:t>String</a:t>
+              <a:t>Long</a:t>
             </a:r>
             <a:r>
               <a:rPr kumimoji="0" lang="fr-FR" altLang="fr-FR" sz="1000" b="0" i="0" u="none" strike="noStrike" cap="none" normalizeH="0" baseline="0" dirty="0">
@@ -17270,7 +17270,7 @@
                 <a:effectLst/>
                 <a:latin typeface="Fira Code"/>
               </a:rPr>
-              <a:t>String</a:t>
+              <a:t>Long</a:t>
             </a:r>
             <a:r>
               <a:rPr kumimoji="0" lang="fr-FR" altLang="fr-FR" sz="1300" b="0" i="0" u="none" strike="noStrike" cap="none" normalizeH="0" baseline="0" dirty="0">
@@ -19711,6 +19711,328 @@
         <p:spPr>
           <a:xfrm>
             <a:off x="521207" y="448056"/>
+            <a:ext cx="8778910" cy="640080"/>
+          </a:xfrm>
+        </p:spPr>
+        <p:txBody>
+          <a:bodyPr rtlCol="0">
+            <a:normAutofit/>
+          </a:bodyPr>
+          <a:lstStyle/>
+          <a:p>
+            <a:pPr rtl="0"/>
+            <a:r>
+              <a:rPr lang="fr-FR" dirty="0"/>
+              <a:t>Erreur classique !</a:t>
+            </a:r>
+            <a:endParaRPr lang="fr-FR" noProof="1">
+              <a:latin typeface="Segoe UI Light" panose="020B0502040204020203" pitchFamily="34" charset="0"/>
+              <a:cs typeface="Segoe UI Light" panose="020B0502040204020203" pitchFamily="34" charset="0"/>
+            </a:endParaRPr>
+          </a:p>
+        </p:txBody>
+      </p:sp>
+      <p:sp>
+        <p:nvSpPr>
+          <p:cNvPr id="5" name="ZoneTexte 4">
+            <a:extLst>
+              <a:ext uri="{FF2B5EF4-FFF2-40B4-BE49-F238E27FC236}">
+                <a16:creationId xmlns:a16="http://schemas.microsoft.com/office/drawing/2014/main" id="{E6973A45-79BA-4939-9DC8-448D24F2FA3E}"/>
+              </a:ext>
+            </a:extLst>
+          </p:cNvPr>
+          <p:cNvSpPr txBox="1"/>
+          <p:nvPr/>
+        </p:nvSpPr>
+        <p:spPr>
+          <a:xfrm>
+            <a:off x="521207" y="1674674"/>
+            <a:ext cx="9790161" cy="2031325"/>
+          </a:xfrm>
+          <a:prstGeom prst="rect">
+            <a:avLst/>
+          </a:prstGeom>
+          <a:noFill/>
+        </p:spPr>
+        <p:txBody>
+          <a:bodyPr wrap="square">
+            <a:spAutoFit/>
+          </a:bodyPr>
+          <a:lstStyle/>
+          <a:p>
+            <a:r>
+              <a:rPr lang="fr-FR" u="sng" dirty="0"/>
+              <a:t>Condition : </a:t>
+            </a:r>
+          </a:p>
+          <a:p>
+            <a:pPr marL="285750" indent="-285750">
+              <a:buFont typeface="Wingdings" panose="05000000000000000000" pitchFamily="2" charset="2"/>
+              <a:buChar char="Ø"/>
+            </a:pPr>
+            <a:r>
+              <a:rPr lang="fr-FR" dirty="0"/>
+              <a:t>Relation parent avec au moins deux List&lt;fils&gt;… (le type List empêche le produit cartésien)</a:t>
+            </a:r>
+          </a:p>
+          <a:p>
+            <a:pPr marL="285750" indent="-285750">
+              <a:buFont typeface="Wingdings" panose="05000000000000000000" pitchFamily="2" charset="2"/>
+              <a:buChar char="Ø"/>
+            </a:pPr>
+            <a:r>
+              <a:rPr lang="fr-FR" dirty="0"/>
+              <a:t>Tout mettre en EAGER ou faire des FETCH sur tous les fils en même temps</a:t>
+            </a:r>
+          </a:p>
+          <a:p>
+            <a:endParaRPr lang="fr-FR" dirty="0"/>
+          </a:p>
+          <a:p>
+            <a:r>
+              <a:rPr lang="fr-FR" dirty="0" err="1"/>
+              <a:t>org.hibernate.loader.</a:t>
+            </a:r>
+            <a:r>
+              <a:rPr lang="fr-FR" dirty="0" err="1">
+                <a:solidFill>
+                  <a:srgbClr val="FF0000"/>
+                </a:solidFill>
+              </a:rPr>
+              <a:t>MultipleBagFetchException</a:t>
+            </a:r>
+            <a:r>
+              <a:rPr lang="fr-FR" dirty="0"/>
+              <a:t>: </a:t>
+            </a:r>
+            <a:r>
+              <a:rPr lang="fr-FR" dirty="0" err="1"/>
+              <a:t>cannot</a:t>
+            </a:r>
+            <a:r>
+              <a:rPr lang="fr-FR" dirty="0"/>
+              <a:t> </a:t>
+            </a:r>
+            <a:r>
+              <a:rPr lang="fr-FR" dirty="0" err="1"/>
+              <a:t>simultaneously</a:t>
+            </a:r>
+            <a:r>
+              <a:rPr lang="fr-FR" dirty="0"/>
+              <a:t> </a:t>
+            </a:r>
+            <a:r>
+              <a:rPr lang="fr-FR" dirty="0" err="1"/>
+              <a:t>fetch</a:t>
+            </a:r>
+            <a:r>
+              <a:rPr lang="fr-FR" dirty="0"/>
+              <a:t> multiple </a:t>
+            </a:r>
+            <a:r>
+              <a:rPr lang="fr-FR" dirty="0" err="1"/>
+              <a:t>bags</a:t>
+            </a:r>
+            <a:r>
+              <a:rPr lang="fr-FR" dirty="0"/>
+              <a:t>:</a:t>
+            </a:r>
+          </a:p>
+          <a:p>
+            <a:r>
+              <a:rPr lang="fr-FR" dirty="0"/>
+              <a:t>[</a:t>
+            </a:r>
+            <a:r>
+              <a:rPr lang="fr-FR" dirty="0" err="1"/>
+              <a:t>com.example.project.dao.domain.School.</a:t>
+            </a:r>
+            <a:r>
+              <a:rPr lang="fr-FR" dirty="0" err="1">
+                <a:highlight>
+                  <a:srgbClr val="FFFF00"/>
+                </a:highlight>
+              </a:rPr>
+              <a:t>students</a:t>
+            </a:r>
+            <a:r>
+              <a:rPr lang="fr-FR" dirty="0"/>
+              <a:t>, </a:t>
+            </a:r>
+            <a:r>
+              <a:rPr lang="fr-FR" dirty="0" err="1"/>
+              <a:t>com.example.project.dao.domain.School.</a:t>
+            </a:r>
+            <a:r>
+              <a:rPr lang="fr-FR" dirty="0" err="1">
+                <a:highlight>
+                  <a:srgbClr val="FFFF00"/>
+                </a:highlight>
+              </a:rPr>
+              <a:t>teachers</a:t>
+            </a:r>
+            <a:r>
+              <a:rPr lang="fr-FR" dirty="0"/>
+              <a:t>]</a:t>
+            </a:r>
+          </a:p>
+        </p:txBody>
+      </p:sp>
+    </p:spTree>
+    <p:extLst>
+      <p:ext uri="{BB962C8B-B14F-4D97-AF65-F5344CB8AC3E}">
+        <p14:creationId xmlns:p14="http://schemas.microsoft.com/office/powerpoint/2010/main" val="2676478294"/>
+      </p:ext>
+    </p:extLst>
+  </p:cSld>
+  <p:clrMapOvr>
+    <a:masterClrMapping/>
+  </p:clrMapOvr>
+  <mc:AlternateContent xmlns:mc="http://schemas.openxmlformats.org/markup-compatibility/2006" xmlns:p14="http://schemas.microsoft.com/office/powerpoint/2010/main">
+    <mc:Choice Requires="p14">
+      <p:transition p14:dur="10"/>
+    </mc:Choice>
+    <mc:Fallback xmlns="">
+      <p:transition/>
+    </mc:Fallback>
+  </mc:AlternateContent>
+</p:sld>
+</file>
+
+<file path=ppt/slides/slide2.xml><?xml version="1.0" encoding="utf-8"?>
+<p:sld xmlns:a="http://schemas.openxmlformats.org/drawingml/2006/main" xmlns:r="http://schemas.openxmlformats.org/officeDocument/2006/relationships" xmlns:p="http://schemas.openxmlformats.org/presentationml/2006/main">
+  <p:cSld>
+    <p:spTree>
+      <p:nvGrpSpPr>
+        <p:cNvPr id="1" name=""/>
+        <p:cNvGrpSpPr/>
+        <p:nvPr/>
+      </p:nvGrpSpPr>
+      <p:grpSpPr>
+        <a:xfrm>
+          <a:off x="0" y="0"/>
+          <a:ext cx="0" cy="0"/>
+          <a:chOff x="0" y="0"/>
+          <a:chExt cx="0" cy="0"/>
+        </a:xfrm>
+      </p:grpSpPr>
+      <p:sp>
+        <p:nvSpPr>
+          <p:cNvPr id="4" name="Titre 3"/>
+          <p:cNvSpPr>
+            <a:spLocks noGrp="1"/>
+          </p:cNvSpPr>
+          <p:nvPr>
+            <p:ph type="title"/>
+          </p:nvPr>
+        </p:nvSpPr>
+        <p:spPr>
+          <a:xfrm>
+            <a:off x="521207" y="448056"/>
+            <a:ext cx="7783344" cy="640080"/>
+          </a:xfrm>
+        </p:spPr>
+        <p:txBody>
+          <a:bodyPr rtlCol="0">
+            <a:normAutofit/>
+          </a:bodyPr>
+          <a:lstStyle/>
+          <a:p>
+            <a:r>
+              <a:rPr lang="fr-FR" noProof="1">
+                <a:latin typeface="Segoe UI Light" panose="020B0502040204020203" pitchFamily="34" charset="0"/>
+                <a:cs typeface="Segoe UI Light" panose="020B0502040204020203" pitchFamily="34" charset="0"/>
+              </a:rPr>
+              <a:t>Spring Boot / Spring Data</a:t>
+            </a:r>
+            <a:endParaRPr lang="fr-FR" sz="1200" noProof="1">
+              <a:latin typeface="Segoe UI Light" panose="020B0502040204020203" pitchFamily="34" charset="0"/>
+              <a:cs typeface="Segoe UI Light" panose="020B0502040204020203" pitchFamily="34" charset="0"/>
+            </a:endParaRPr>
+          </a:p>
+        </p:txBody>
+      </p:sp>
+      <p:pic>
+        <p:nvPicPr>
+          <p:cNvPr id="3" name="Image 2">
+            <a:extLst>
+              <a:ext uri="{FF2B5EF4-FFF2-40B4-BE49-F238E27FC236}">
+                <a16:creationId xmlns:a16="http://schemas.microsoft.com/office/drawing/2014/main" id="{DDFFF470-9BA6-43F7-91BD-551442E24915}"/>
+              </a:ext>
+            </a:extLst>
+          </p:cNvPr>
+          <p:cNvPicPr>
+            <a:picLocks noChangeAspect="1"/>
+          </p:cNvPicPr>
+          <p:nvPr/>
+        </p:nvPicPr>
+        <p:blipFill>
+          <a:blip r:embed="rId3"/>
+          <a:stretch>
+            <a:fillRect/>
+          </a:stretch>
+        </p:blipFill>
+        <p:spPr>
+          <a:xfrm>
+            <a:off x="2247900" y="1218389"/>
+            <a:ext cx="7696200" cy="5562600"/>
+          </a:xfrm>
+          <a:prstGeom prst="rect">
+            <a:avLst/>
+          </a:prstGeom>
+        </p:spPr>
+      </p:pic>
+    </p:spTree>
+    <p:extLst>
+      <p:ext uri="{BB962C8B-B14F-4D97-AF65-F5344CB8AC3E}">
+        <p14:creationId xmlns:p14="http://schemas.microsoft.com/office/powerpoint/2010/main" val="1107001750"/>
+      </p:ext>
+    </p:extLst>
+  </p:cSld>
+  <p:clrMapOvr>
+    <a:masterClrMapping/>
+  </p:clrMapOvr>
+  <mc:AlternateContent xmlns:mc="http://schemas.openxmlformats.org/markup-compatibility/2006" xmlns:p14="http://schemas.microsoft.com/office/powerpoint/2010/main">
+    <mc:Choice Requires="p14">
+      <p:transition p14:dur="10"/>
+    </mc:Choice>
+    <mc:Fallback xmlns="">
+      <p:transition/>
+    </mc:Fallback>
+  </mc:AlternateContent>
+</p:sld>
+</file>
+
+<file path=ppt/slides/slide20.xml><?xml version="1.0" encoding="utf-8"?>
+<p:sld xmlns:a="http://schemas.openxmlformats.org/drawingml/2006/main" xmlns:r="http://schemas.openxmlformats.org/officeDocument/2006/relationships" xmlns:p="http://schemas.openxmlformats.org/presentationml/2006/main">
+  <p:cSld>
+    <p:spTree>
+      <p:nvGrpSpPr>
+        <p:cNvPr id="1" name=""/>
+        <p:cNvGrpSpPr/>
+        <p:nvPr/>
+      </p:nvGrpSpPr>
+      <p:grpSpPr>
+        <a:xfrm>
+          <a:off x="0" y="0"/>
+          <a:ext cx="0" cy="0"/>
+          <a:chOff x="0" y="0"/>
+          <a:chExt cx="0" cy="0"/>
+        </a:xfrm>
+      </p:grpSpPr>
+      <p:sp>
+        <p:nvSpPr>
+          <p:cNvPr id="4" name="Titre 3"/>
+          <p:cNvSpPr>
+            <a:spLocks noGrp="1"/>
+          </p:cNvSpPr>
+          <p:nvPr>
+            <p:ph type="title"/>
+          </p:nvPr>
+        </p:nvSpPr>
+        <p:spPr>
+          <a:xfrm>
+            <a:off x="521207" y="448056"/>
             <a:ext cx="7783344" cy="640080"/>
           </a:xfrm>
         </p:spPr>
@@ -19944,328 +20266,6 @@
 </p:sld>
 </file>
 
-<file path=ppt/slides/slide2.xml><?xml version="1.0" encoding="utf-8"?>
-<p:sld xmlns:a="http://schemas.openxmlformats.org/drawingml/2006/main" xmlns:r="http://schemas.openxmlformats.org/officeDocument/2006/relationships" xmlns:p="http://schemas.openxmlformats.org/presentationml/2006/main">
-  <p:cSld>
-    <p:spTree>
-      <p:nvGrpSpPr>
-        <p:cNvPr id="1" name=""/>
-        <p:cNvGrpSpPr/>
-        <p:nvPr/>
-      </p:nvGrpSpPr>
-      <p:grpSpPr>
-        <a:xfrm>
-          <a:off x="0" y="0"/>
-          <a:ext cx="0" cy="0"/>
-          <a:chOff x="0" y="0"/>
-          <a:chExt cx="0" cy="0"/>
-        </a:xfrm>
-      </p:grpSpPr>
-      <p:sp>
-        <p:nvSpPr>
-          <p:cNvPr id="4" name="Titre 3"/>
-          <p:cNvSpPr>
-            <a:spLocks noGrp="1"/>
-          </p:cNvSpPr>
-          <p:nvPr>
-            <p:ph type="title"/>
-          </p:nvPr>
-        </p:nvSpPr>
-        <p:spPr>
-          <a:xfrm>
-            <a:off x="521207" y="448056"/>
-            <a:ext cx="7783344" cy="640080"/>
-          </a:xfrm>
-        </p:spPr>
-        <p:txBody>
-          <a:bodyPr rtlCol="0">
-            <a:normAutofit/>
-          </a:bodyPr>
-          <a:lstStyle/>
-          <a:p>
-            <a:r>
-              <a:rPr lang="fr-FR" noProof="1">
-                <a:latin typeface="Segoe UI Light" panose="020B0502040204020203" pitchFamily="34" charset="0"/>
-                <a:cs typeface="Segoe UI Light" panose="020B0502040204020203" pitchFamily="34" charset="0"/>
-              </a:rPr>
-              <a:t>Spring Boot / Spring Data</a:t>
-            </a:r>
-            <a:endParaRPr lang="fr-FR" sz="1200" noProof="1">
-              <a:latin typeface="Segoe UI Light" panose="020B0502040204020203" pitchFamily="34" charset="0"/>
-              <a:cs typeface="Segoe UI Light" panose="020B0502040204020203" pitchFamily="34" charset="0"/>
-            </a:endParaRPr>
-          </a:p>
-        </p:txBody>
-      </p:sp>
-      <p:pic>
-        <p:nvPicPr>
-          <p:cNvPr id="3" name="Image 2">
-            <a:extLst>
-              <a:ext uri="{FF2B5EF4-FFF2-40B4-BE49-F238E27FC236}">
-                <a16:creationId xmlns:a16="http://schemas.microsoft.com/office/drawing/2014/main" id="{DDFFF470-9BA6-43F7-91BD-551442E24915}"/>
-              </a:ext>
-            </a:extLst>
-          </p:cNvPr>
-          <p:cNvPicPr>
-            <a:picLocks noChangeAspect="1"/>
-          </p:cNvPicPr>
-          <p:nvPr/>
-        </p:nvPicPr>
-        <p:blipFill>
-          <a:blip r:embed="rId3"/>
-          <a:stretch>
-            <a:fillRect/>
-          </a:stretch>
-        </p:blipFill>
-        <p:spPr>
-          <a:xfrm>
-            <a:off x="2247900" y="1218389"/>
-            <a:ext cx="7696200" cy="5562600"/>
-          </a:xfrm>
-          <a:prstGeom prst="rect">
-            <a:avLst/>
-          </a:prstGeom>
-        </p:spPr>
-      </p:pic>
-    </p:spTree>
-    <p:extLst>
-      <p:ext uri="{BB962C8B-B14F-4D97-AF65-F5344CB8AC3E}">
-        <p14:creationId xmlns:p14="http://schemas.microsoft.com/office/powerpoint/2010/main" val="1107001750"/>
-      </p:ext>
-    </p:extLst>
-  </p:cSld>
-  <p:clrMapOvr>
-    <a:masterClrMapping/>
-  </p:clrMapOvr>
-  <mc:AlternateContent xmlns:mc="http://schemas.openxmlformats.org/markup-compatibility/2006" xmlns:p14="http://schemas.microsoft.com/office/powerpoint/2010/main">
-    <mc:Choice Requires="p14">
-      <p:transition p14:dur="10"/>
-    </mc:Choice>
-    <mc:Fallback xmlns="">
-      <p:transition/>
-    </mc:Fallback>
-  </mc:AlternateContent>
-</p:sld>
-</file>
-
-<file path=ppt/slides/slide20.xml><?xml version="1.0" encoding="utf-8"?>
-<p:sld xmlns:a="http://schemas.openxmlformats.org/drawingml/2006/main" xmlns:r="http://schemas.openxmlformats.org/officeDocument/2006/relationships" xmlns:p="http://schemas.openxmlformats.org/presentationml/2006/main">
-  <p:cSld>
-    <p:spTree>
-      <p:nvGrpSpPr>
-        <p:cNvPr id="1" name=""/>
-        <p:cNvGrpSpPr/>
-        <p:nvPr/>
-      </p:nvGrpSpPr>
-      <p:grpSpPr>
-        <a:xfrm>
-          <a:off x="0" y="0"/>
-          <a:ext cx="0" cy="0"/>
-          <a:chOff x="0" y="0"/>
-          <a:chExt cx="0" cy="0"/>
-        </a:xfrm>
-      </p:grpSpPr>
-      <p:sp>
-        <p:nvSpPr>
-          <p:cNvPr id="4" name="Titre 3"/>
-          <p:cNvSpPr>
-            <a:spLocks noGrp="1"/>
-          </p:cNvSpPr>
-          <p:nvPr>
-            <p:ph type="title"/>
-          </p:nvPr>
-        </p:nvSpPr>
-        <p:spPr>
-          <a:xfrm>
-            <a:off x="521207" y="448056"/>
-            <a:ext cx="8778910" cy="640080"/>
-          </a:xfrm>
-        </p:spPr>
-        <p:txBody>
-          <a:bodyPr rtlCol="0">
-            <a:normAutofit/>
-          </a:bodyPr>
-          <a:lstStyle/>
-          <a:p>
-            <a:pPr rtl="0"/>
-            <a:r>
-              <a:rPr lang="fr-FR" dirty="0"/>
-              <a:t>Erreur classique !</a:t>
-            </a:r>
-            <a:endParaRPr lang="fr-FR" noProof="1">
-              <a:latin typeface="Segoe UI Light" panose="020B0502040204020203" pitchFamily="34" charset="0"/>
-              <a:cs typeface="Segoe UI Light" panose="020B0502040204020203" pitchFamily="34" charset="0"/>
-            </a:endParaRPr>
-          </a:p>
-        </p:txBody>
-      </p:sp>
-      <p:sp>
-        <p:nvSpPr>
-          <p:cNvPr id="5" name="ZoneTexte 4">
-            <a:extLst>
-              <a:ext uri="{FF2B5EF4-FFF2-40B4-BE49-F238E27FC236}">
-                <a16:creationId xmlns:a16="http://schemas.microsoft.com/office/drawing/2014/main" id="{E6973A45-79BA-4939-9DC8-448D24F2FA3E}"/>
-              </a:ext>
-            </a:extLst>
-          </p:cNvPr>
-          <p:cNvSpPr txBox="1"/>
-          <p:nvPr/>
-        </p:nvSpPr>
-        <p:spPr>
-          <a:xfrm>
-            <a:off x="521207" y="1674674"/>
-            <a:ext cx="9790161" cy="2031325"/>
-          </a:xfrm>
-          <a:prstGeom prst="rect">
-            <a:avLst/>
-          </a:prstGeom>
-          <a:noFill/>
-        </p:spPr>
-        <p:txBody>
-          <a:bodyPr wrap="square">
-            <a:spAutoFit/>
-          </a:bodyPr>
-          <a:lstStyle/>
-          <a:p>
-            <a:r>
-              <a:rPr lang="fr-FR" u="sng" dirty="0"/>
-              <a:t>Condition : </a:t>
-            </a:r>
-          </a:p>
-          <a:p>
-            <a:pPr marL="285750" indent="-285750">
-              <a:buFont typeface="Wingdings" panose="05000000000000000000" pitchFamily="2" charset="2"/>
-              <a:buChar char="Ø"/>
-            </a:pPr>
-            <a:r>
-              <a:rPr lang="fr-FR" dirty="0"/>
-              <a:t>Relation parent avec au moins deux List&lt;fils&gt;… (le type List empêche le produit cartésien)</a:t>
-            </a:r>
-          </a:p>
-          <a:p>
-            <a:pPr marL="285750" indent="-285750">
-              <a:buFont typeface="Wingdings" panose="05000000000000000000" pitchFamily="2" charset="2"/>
-              <a:buChar char="Ø"/>
-            </a:pPr>
-            <a:r>
-              <a:rPr lang="fr-FR" dirty="0"/>
-              <a:t>Tout mettre en EAGER ou faire des FETCH sur tous les fils en même temps</a:t>
-            </a:r>
-          </a:p>
-          <a:p>
-            <a:endParaRPr lang="fr-FR" dirty="0"/>
-          </a:p>
-          <a:p>
-            <a:r>
-              <a:rPr lang="fr-FR" dirty="0" err="1"/>
-              <a:t>org.hibernate.loader.</a:t>
-            </a:r>
-            <a:r>
-              <a:rPr lang="fr-FR" dirty="0" err="1">
-                <a:solidFill>
-                  <a:srgbClr val="FF0000"/>
-                </a:solidFill>
-              </a:rPr>
-              <a:t>MultipleBagFetchException</a:t>
-            </a:r>
-            <a:r>
-              <a:rPr lang="fr-FR" dirty="0"/>
-              <a:t>: </a:t>
-            </a:r>
-            <a:r>
-              <a:rPr lang="fr-FR" dirty="0" err="1"/>
-              <a:t>cannot</a:t>
-            </a:r>
-            <a:r>
-              <a:rPr lang="fr-FR" dirty="0"/>
-              <a:t> </a:t>
-            </a:r>
-            <a:r>
-              <a:rPr lang="fr-FR" dirty="0" err="1"/>
-              <a:t>simultaneously</a:t>
-            </a:r>
-            <a:r>
-              <a:rPr lang="fr-FR" dirty="0"/>
-              <a:t> </a:t>
-            </a:r>
-            <a:r>
-              <a:rPr lang="fr-FR" dirty="0" err="1"/>
-              <a:t>fetch</a:t>
-            </a:r>
-            <a:r>
-              <a:rPr lang="fr-FR" dirty="0"/>
-              <a:t> multiple </a:t>
-            </a:r>
-            <a:r>
-              <a:rPr lang="fr-FR" dirty="0" err="1"/>
-              <a:t>bags</a:t>
-            </a:r>
-            <a:r>
-              <a:rPr lang="fr-FR" dirty="0"/>
-              <a:t>:</a:t>
-            </a:r>
-          </a:p>
-          <a:p>
-            <a:r>
-              <a:rPr lang="fr-FR" dirty="0"/>
-              <a:t>[</a:t>
-            </a:r>
-            <a:r>
-              <a:rPr lang="fr-FR" dirty="0" err="1"/>
-              <a:t>com.example.project.dao.domain.School.</a:t>
-            </a:r>
-            <a:r>
-              <a:rPr lang="fr-FR" dirty="0" err="1">
-                <a:highlight>
-                  <a:srgbClr val="FFFF00"/>
-                </a:highlight>
-              </a:rPr>
-              <a:t>students</a:t>
-            </a:r>
-            <a:r>
-              <a:rPr lang="fr-FR" dirty="0"/>
-              <a:t>, </a:t>
-            </a:r>
-            <a:r>
-              <a:rPr lang="fr-FR" dirty="0" err="1"/>
-              <a:t>com.example.project.dao.domain.School.</a:t>
-            </a:r>
-            <a:r>
-              <a:rPr lang="fr-FR" dirty="0" err="1">
-                <a:highlight>
-                  <a:srgbClr val="FFFF00"/>
-                </a:highlight>
-              </a:rPr>
-              <a:t>teachers</a:t>
-            </a:r>
-            <a:r>
-              <a:rPr lang="fr-FR" dirty="0"/>
-              <a:t>]</a:t>
-            </a:r>
-          </a:p>
-        </p:txBody>
-      </p:sp>
-    </p:spTree>
-    <p:extLst>
-      <p:ext uri="{BB962C8B-B14F-4D97-AF65-F5344CB8AC3E}">
-        <p14:creationId xmlns:p14="http://schemas.microsoft.com/office/powerpoint/2010/main" val="2676478294"/>
-      </p:ext>
-    </p:extLst>
-  </p:cSld>
-  <p:clrMapOvr>
-    <a:masterClrMapping/>
-  </p:clrMapOvr>
-  <mc:AlternateContent xmlns:mc="http://schemas.openxmlformats.org/markup-compatibility/2006" xmlns:p14="http://schemas.microsoft.com/office/powerpoint/2010/main">
-    <mc:Choice Requires="p14">
-      <p:transition p14:dur="10"/>
-    </mc:Choice>
-    <mc:Fallback xmlns="">
-      <p:transition/>
-    </mc:Fallback>
-  </mc:AlternateContent>
-</p:sld>
-</file>
-
 <file path=ppt/slides/slide21.xml><?xml version="1.0" encoding="utf-8"?>
 <p:sld xmlns:a="http://schemas.openxmlformats.org/drawingml/2006/main" xmlns:r="http://schemas.openxmlformats.org/officeDocument/2006/relationships" xmlns:p="http://schemas.openxmlformats.org/presentationml/2006/main">
   <p:cSld>
@@ -20376,21 +20376,13 @@
           </a:bodyPr>
           <a:lstStyle/>
           <a:p>
-            <a:pPr marL="0" marR="0" lvl="0" indent="0" algn="l" defTabSz="914400" rtl="0" eaLnBrk="0" fontAlgn="base" latinLnBrk="0" hangingPunct="0">
-              <a:lnSpc>
-                <a:spcPct val="100000"/>
-              </a:lnSpc>
+            <a:pPr lvl="0" eaLnBrk="0" fontAlgn="base" hangingPunct="0">
               <a:spcBef>
                 <a:spcPct val="0"/>
               </a:spcBef>
               <a:spcAft>
                 <a:spcPct val="0"/>
               </a:spcAft>
-              <a:buClrTx/>
-              <a:buSzTx/>
-              <a:buFontTx/>
-              <a:buNone/>
-              <a:tabLst/>
             </a:pPr>
             <a:r>
               <a:rPr kumimoji="0" lang="fr-FR" altLang="fr-FR" sz="1400" b="0" i="0" u="none" strike="noStrike" cap="none" normalizeH="0" baseline="0" dirty="0">
@@ -20510,17 +20502,13 @@
               <a:t>, </a:t>
             </a:r>
             <a:r>
-              <a:rPr kumimoji="0" lang="fr-FR" altLang="fr-FR" sz="1400" b="0" i="0" u="none" strike="noStrike" cap="none" normalizeH="0" baseline="0" dirty="0">
-                <a:ln>
-                  <a:noFill/>
-                </a:ln>
+              <a:rPr lang="fr-FR" altLang="fr-FR" sz="1400" dirty="0">
                 <a:solidFill>
                   <a:srgbClr val="000000"/>
                 </a:solidFill>
-                <a:effectLst/>
-                <a:latin typeface="Fira Code"/>
-              </a:rPr>
-              <a:t>String</a:t>
+                <a:latin typeface="Fira Code"/>
+              </a:rPr>
+              <a:t>Long</a:t>
             </a:r>
             <a:r>
               <a:rPr kumimoji="0" lang="fr-FR" altLang="fr-FR" sz="1400" b="0" i="0" u="none" strike="noStrike" cap="none" normalizeH="0" baseline="0" dirty="0">
@@ -21957,21 +21945,13 @@
           </a:bodyPr>
           <a:lstStyle/>
           <a:p>
-            <a:pPr marL="0" marR="0" lvl="0" indent="0" algn="l" defTabSz="914400" rtl="0" eaLnBrk="0" fontAlgn="base" latinLnBrk="0" hangingPunct="0">
-              <a:lnSpc>
-                <a:spcPct val="100000"/>
-              </a:lnSpc>
+            <a:pPr lvl="0" eaLnBrk="0" fontAlgn="base" hangingPunct="0">
               <a:spcBef>
                 <a:spcPct val="0"/>
               </a:spcBef>
               <a:spcAft>
                 <a:spcPct val="0"/>
               </a:spcAft>
-              <a:buClrTx/>
-              <a:buSzTx/>
-              <a:buFontTx/>
-              <a:buNone/>
-              <a:tabLst/>
             </a:pPr>
             <a:r>
               <a:rPr kumimoji="0" lang="fr-FR" altLang="fr-FR" sz="1400" b="0" i="0" u="none" strike="noStrike" cap="none" normalizeH="0" baseline="0" dirty="0">
@@ -22091,17 +22071,13 @@
               <a:t>, </a:t>
             </a:r>
             <a:r>
-              <a:rPr kumimoji="0" lang="fr-FR" altLang="fr-FR" sz="1400" b="0" i="0" u="none" strike="noStrike" cap="none" normalizeH="0" baseline="0" dirty="0">
-                <a:ln>
-                  <a:noFill/>
-                </a:ln>
+              <a:rPr lang="fr-FR" altLang="fr-FR" sz="1400" dirty="0">
                 <a:solidFill>
                   <a:srgbClr val="000000"/>
                 </a:solidFill>
-                <a:effectLst/>
-                <a:latin typeface="Fira Code"/>
-              </a:rPr>
-              <a:t>String</a:t>
+                <a:latin typeface="Fira Code"/>
+              </a:rPr>
+              <a:t>Long</a:t>
             </a:r>
             <a:r>
               <a:rPr kumimoji="0" lang="fr-FR" altLang="fr-FR" sz="1400" b="0" i="0" u="none" strike="noStrike" cap="none" normalizeH="0" baseline="0" dirty="0">
@@ -42456,6 +42432,15 @@
 </file>
 
 <file path=customXml/item1.xml><?xml version="1.0" encoding="utf-8"?>
+<p:properties xmlns:p="http://schemas.microsoft.com/office/2006/metadata/properties" xmlns:xsi="http://www.w3.org/2001/XMLSchema-instance" xmlns:pc="http://schemas.microsoft.com/office/infopath/2007/PartnerControls">
+  <documentManagement>
+    <Status xmlns="71af3243-3dd4-4a8d-8c0d-dd76da1f02a5">Not started</Status>
+    <MediaServiceKeyPoints xmlns="71af3243-3dd4-4a8d-8c0d-dd76da1f02a5" xsi:nil="true"/>
+  </documentManagement>
+</p:properties>
+</file>
+
+<file path=customXml/item2.xml><?xml version="1.0" encoding="utf-8"?>
 <ct:contentTypeSchema xmlns:ct="http://schemas.microsoft.com/office/2006/metadata/contentType" xmlns:ma="http://schemas.microsoft.com/office/2006/metadata/properties/metaAttributes" ct:_="" ma:_="" ma:contentTypeName="Document" ma:contentTypeID="0x01010079F111ED35F8CC479449609E8A0923A6" ma:contentTypeVersion="12" ma:contentTypeDescription="Create a new document." ma:contentTypeScope="" ma:versionID="a8a52e8c320b9a064ae3583ae3861c92">
   <xsd:schema xmlns:xsd="http://www.w3.org/2001/XMLSchema" xmlns:xs="http://www.w3.org/2001/XMLSchema" xmlns:p="http://schemas.microsoft.com/office/2006/metadata/properties" xmlns:ns2="71af3243-3dd4-4a8d-8c0d-dd76da1f02a5" xmlns:ns3="16c05727-aa75-4e4a-9b5f-8a80a1165891" targetNamespace="http://schemas.microsoft.com/office/2006/metadata/properties" ma:root="true" ma:fieldsID="88020cb39231a0945110f9cd888b521a" ns2:_="" ns3:_="">
     <xsd:import namespace="71af3243-3dd4-4a8d-8c0d-dd76da1f02a5"/>
@@ -42676,15 +42661,6 @@
 </ct:contentTypeSchema>
 </file>
 
-<file path=customXml/item2.xml><?xml version="1.0" encoding="utf-8"?>
-<p:properties xmlns:p="http://schemas.microsoft.com/office/2006/metadata/properties" xmlns:xsi="http://www.w3.org/2001/XMLSchema-instance" xmlns:pc="http://schemas.microsoft.com/office/infopath/2007/PartnerControls">
-  <documentManagement>
-    <Status xmlns="71af3243-3dd4-4a8d-8c0d-dd76da1f02a5">Not started</Status>
-    <MediaServiceKeyPoints xmlns="71af3243-3dd4-4a8d-8c0d-dd76da1f02a5" xsi:nil="true"/>
-  </documentManagement>
-</p:properties>
-</file>
-
 <file path=customXml/item3.xml><?xml version="1.0" encoding="utf-8"?>
 <?mso-contentType ?>
 <FormTemplates xmlns="http://schemas.microsoft.com/sharepoint/v3/contenttype/forms">
@@ -42695,6 +42671,23 @@
 </file>
 
 <file path=customXml/itemProps1.xml><?xml version="1.0" encoding="utf-8"?>
+<ds:datastoreItem xmlns:ds="http://schemas.openxmlformats.org/officeDocument/2006/customXml" ds:itemID="{950072C5-DDE0-4258-BA7A-4D4B80DFA632}">
+  <ds:schemaRefs>
+    <ds:schemaRef ds:uri="http://purl.org/dc/terms/"/>
+    <ds:schemaRef ds:uri="http://schemas.microsoft.com/office/2006/documentManagement/types"/>
+    <ds:schemaRef ds:uri="http://schemas.openxmlformats.org/package/2006/metadata/core-properties"/>
+    <ds:schemaRef ds:uri="http://purl.org/dc/elements/1.1/"/>
+    <ds:schemaRef ds:uri="http://schemas.microsoft.com/office/infopath/2007/PartnerControls"/>
+    <ds:schemaRef ds:uri="16c05727-aa75-4e4a-9b5f-8a80a1165891"/>
+    <ds:schemaRef ds:uri="71af3243-3dd4-4a8d-8c0d-dd76da1f02a5"/>
+    <ds:schemaRef ds:uri="http://schemas.microsoft.com/office/2006/metadata/properties"/>
+    <ds:schemaRef ds:uri="http://www.w3.org/XML/1998/namespace"/>
+    <ds:schemaRef ds:uri="http://purl.org/dc/dcmitype/"/>
+  </ds:schemaRefs>
+</ds:datastoreItem>
+</file>
+
+<file path=customXml/itemProps2.xml><?xml version="1.0" encoding="utf-8"?>
 <ds:datastoreItem xmlns:ds="http://schemas.openxmlformats.org/officeDocument/2006/customXml" ds:itemID="{FD7FC771-7DFE-49DA-B577-71181BFBCB2E}">
   <ds:schemaRefs>
     <ds:schemaRef ds:uri="http://schemas.microsoft.com/office/2006/metadata/contentType"/>
@@ -42713,23 +42706,6 @@
 </ds:datastoreItem>
 </file>
 
-<file path=customXml/itemProps2.xml><?xml version="1.0" encoding="utf-8"?>
-<ds:datastoreItem xmlns:ds="http://schemas.openxmlformats.org/officeDocument/2006/customXml" ds:itemID="{950072C5-DDE0-4258-BA7A-4D4B80DFA632}">
-  <ds:schemaRefs>
-    <ds:schemaRef ds:uri="http://purl.org/dc/terms/"/>
-    <ds:schemaRef ds:uri="http://schemas.microsoft.com/office/2006/documentManagement/types"/>
-    <ds:schemaRef ds:uri="http://schemas.openxmlformats.org/package/2006/metadata/core-properties"/>
-    <ds:schemaRef ds:uri="http://purl.org/dc/elements/1.1/"/>
-    <ds:schemaRef ds:uri="http://schemas.microsoft.com/office/infopath/2007/PartnerControls"/>
-    <ds:schemaRef ds:uri="16c05727-aa75-4e4a-9b5f-8a80a1165891"/>
-    <ds:schemaRef ds:uri="71af3243-3dd4-4a8d-8c0d-dd76da1f02a5"/>
-    <ds:schemaRef ds:uri="http://schemas.microsoft.com/office/2006/metadata/properties"/>
-    <ds:schemaRef ds:uri="http://www.w3.org/XML/1998/namespace"/>
-    <ds:schemaRef ds:uri="http://purl.org/dc/dcmitype/"/>
-  </ds:schemaRefs>
-</ds:datastoreItem>
-</file>
-
 <file path=customXml/itemProps3.xml><?xml version="1.0" encoding="utf-8"?>
 <ds:datastoreItem xmlns:ds="http://schemas.openxmlformats.org/officeDocument/2006/customXml" ds:itemID="{7EE8C63A-4744-4DE4-BB49-0FF0B5375C60}">
   <ds:schemaRefs>

--- a/JPA-HIBERNATE.pptx
+++ b/JPA-HIBERNATE.pptx
@@ -23637,7 +23637,7 @@
         <p:spPr>
           <a:xfrm>
             <a:off x="607039" y="1446615"/>
-            <a:ext cx="8538881" cy="369332"/>
+            <a:ext cx="8538881" cy="1477328"/>
           </a:xfrm>
           <a:prstGeom prst="rect">
             <a:avLst/>
@@ -23700,10 +23700,68 @@
               </a:rPr>
               <a:t> specified with collection fetch; applying in memory!</a:t>
             </a:r>
-            <a:endParaRPr lang="fr-FR" dirty="0">
+          </a:p>
+          <a:p>
+            <a:endParaRPr lang="en-US" dirty="0">
               <a:solidFill>
                 <a:srgbClr val="FF0000"/>
               </a:solidFill>
+              <a:latin typeface="SFMono-Regular"/>
+            </a:endParaRPr>
+          </a:p>
+          <a:p>
+            <a:r>
+              <a:rPr lang="fr-FR" altLang="fr-FR" dirty="0">
+                <a:highlight>
+                  <a:srgbClr val="FFFF00"/>
+                </a:highlight>
+                <a:latin typeface="SFMono-Regular"/>
+              </a:rPr>
+              <a:t>On ne peut pas mélanger </a:t>
+            </a:r>
+            <a:r>
+              <a:rPr lang="fr-FR" altLang="fr-FR" dirty="0" err="1">
+                <a:highlight>
+                  <a:srgbClr val="FFFF00"/>
+                </a:highlight>
+                <a:latin typeface="SFMono-Regular"/>
+              </a:rPr>
+              <a:t>Fetch</a:t>
+            </a:r>
+            <a:r>
+              <a:rPr lang="fr-FR" altLang="fr-FR" dirty="0">
+                <a:highlight>
+                  <a:srgbClr val="FFFF00"/>
+                </a:highlight>
+                <a:latin typeface="SFMono-Regular"/>
+              </a:rPr>
+              <a:t> et pagination, sinon on tronquerait les résultats, donc le système récupère tous les enregistrements liés à la portée de la requête de départ !</a:t>
+            </a:r>
+          </a:p>
+          <a:p>
+            <a:r>
+              <a:rPr lang="fr-FR" dirty="0">
+                <a:highlight>
+                  <a:srgbClr val="FFFF00"/>
+                </a:highlight>
+                <a:latin typeface="SFMono-Regular"/>
+              </a:rPr>
+              <a:t>Et la pagination se fait </a:t>
+            </a:r>
+            <a:r>
+              <a:rPr lang="fr-FR">
+                <a:highlight>
+                  <a:srgbClr val="FFFF00"/>
+                </a:highlight>
+                <a:latin typeface="SFMono-Regular"/>
+              </a:rPr>
+              <a:t>en mémoire !!</a:t>
+            </a:r>
+            <a:endParaRPr lang="fr-FR" dirty="0">
+              <a:highlight>
+                <a:srgbClr val="FFFF00"/>
+              </a:highlight>
+              <a:latin typeface="SFMono-Regular"/>
             </a:endParaRPr>
           </a:p>
         </p:txBody>
@@ -23724,8 +23782,8 @@
         </p:nvSpPr>
         <p:spPr bwMode="auto">
           <a:xfrm>
-            <a:off x="636494" y="2390144"/>
-            <a:ext cx="10919012" cy="1754326"/>
+            <a:off x="636494" y="2921549"/>
+            <a:ext cx="10919012" cy="1477328"/>
           </a:xfrm>
           <a:prstGeom prst="rect">
             <a:avLst/>
@@ -23784,45 +23842,6 @@
               <a:buNone/>
               <a:tabLst/>
             </a:pPr>
-            <a:r>
-              <a:rPr kumimoji="0" lang="fr-FR" altLang="fr-FR" b="0" i="1" u="none" strike="noStrike" cap="none" normalizeH="0" baseline="0" dirty="0">
-                <a:ln>
-                  <a:noFill/>
-                </a:ln>
-                <a:solidFill>
-                  <a:srgbClr val="8C8C8C"/>
-                </a:solidFill>
-                <a:effectLst/>
-                <a:latin typeface="Fira Code"/>
-              </a:rPr>
-              <a:t>// On ne peut pas mélanger </a:t>
-            </a:r>
-            <a:r>
-              <a:rPr kumimoji="0" lang="fr-FR" altLang="fr-FR" b="0" i="1" u="none" strike="noStrike" cap="none" normalizeH="0" baseline="0" dirty="0" err="1">
-                <a:ln>
-                  <a:noFill/>
-                </a:ln>
-                <a:solidFill>
-                  <a:srgbClr val="8C8C8C"/>
-                </a:solidFill>
-                <a:effectLst/>
-                <a:latin typeface="Fira Code"/>
-              </a:rPr>
-              <a:t>fetch</a:t>
-            </a:r>
-            <a:r>
-              <a:rPr kumimoji="0" lang="fr-FR" altLang="fr-FR" b="0" i="1" u="none" strike="noStrike" cap="none" normalizeH="0" baseline="0" dirty="0">
-                <a:ln>
-                  <a:noFill/>
-                </a:ln>
-                <a:solidFill>
-                  <a:srgbClr val="8C8C8C"/>
-                </a:solidFill>
-                <a:effectLst/>
-                <a:latin typeface="Fira Code"/>
-              </a:rPr>
-              <a:t> et pagination, sinon on tronquerait les résultats, la BD ne le permet pas</a:t>
-            </a:r>
             <a:br>
               <a:rPr kumimoji="0" lang="fr-FR" altLang="fr-FR" b="0" i="1" u="none" strike="noStrike" cap="none" normalizeH="0" baseline="0" dirty="0">
                 <a:ln>
@@ -23874,146 +23893,105 @@
               </a:rPr>
               <a:t> ne pose pas de problème car c'est le même tuple !!</a:t>
             </a:r>
-            <a:br>
-              <a:rPr kumimoji="0" lang="fr-FR" altLang="fr-FR" b="0" i="1" u="none" strike="noStrike" cap="none" normalizeH="0" baseline="0" dirty="0">
-                <a:ln>
-                  <a:noFill/>
-                </a:ln>
-                <a:solidFill>
-                  <a:srgbClr val="8C8C8C"/>
-                </a:solidFill>
-                <a:effectLst/>
-                <a:latin typeface="Fira Code"/>
-              </a:rPr>
-            </a:br>
-            <a:endParaRPr kumimoji="0" lang="fr-FR" altLang="fr-FR" b="0" i="1" u="none" strike="noStrike" cap="none" normalizeH="0" baseline="0" dirty="0">
-              <a:ln>
-                <a:noFill/>
-              </a:ln>
-              <a:solidFill>
-                <a:srgbClr val="8C8C8C"/>
-              </a:solidFill>
-              <a:effectLst/>
-              <a:latin typeface="Fira Code"/>
-            </a:endParaRPr>
-          </a:p>
-          <a:p>
-            <a:pPr marL="0" marR="0" lvl="0" indent="0" algn="l" defTabSz="914400" rtl="0" eaLnBrk="0" fontAlgn="base" latinLnBrk="0" hangingPunct="0">
-              <a:lnSpc>
-                <a:spcPct val="100000"/>
-              </a:lnSpc>
+          </a:p>
+          <a:p>
+            <a:pPr lvl="0" eaLnBrk="0" fontAlgn="base" hangingPunct="0">
               <a:spcBef>
                 <a:spcPct val="0"/>
               </a:spcBef>
               <a:spcAft>
                 <a:spcPct val="0"/>
               </a:spcAft>
-              <a:buClrTx/>
-              <a:buSzTx/>
-              <a:buFontTx/>
-              <a:buNone/>
-              <a:tabLst/>
             </a:pPr>
             <a:r>
-              <a:rPr kumimoji="0" lang="fr-FR" altLang="fr-FR" b="0" i="1" u="none" strike="noStrike" cap="none" normalizeH="0" baseline="0" dirty="0">
-                <a:ln>
-                  <a:noFill/>
-                </a:ln>
+              <a:rPr lang="fr-FR" altLang="fr-FR" dirty="0">
+                <a:solidFill>
+                  <a:srgbClr val="9E880D"/>
+                </a:solidFill>
+                <a:latin typeface="Fira Code"/>
+              </a:rPr>
+              <a:t>@EntityGraph</a:t>
+            </a:r>
+            <a:r>
+              <a:rPr lang="fr-FR" altLang="fr-FR" dirty="0">
+                <a:solidFill>
+                  <a:srgbClr val="080808"/>
+                </a:solidFill>
+                <a:latin typeface="Fira Code"/>
+              </a:rPr>
+              <a:t>(attributePaths = {</a:t>
+            </a:r>
+            <a:r>
+              <a:rPr lang="fr-FR" altLang="fr-FR" dirty="0">
+                <a:solidFill>
+                  <a:srgbClr val="067D17"/>
+                </a:solidFill>
+                <a:latin typeface="Fira Code"/>
+              </a:rPr>
+              <a:t>"</a:t>
+            </a:r>
+            <a:r>
+              <a:rPr lang="fr-FR" altLang="fr-FR" dirty="0" err="1">
+                <a:solidFill>
+                  <a:srgbClr val="067D17"/>
+                </a:solidFill>
+                <a:latin typeface="Fira Code"/>
+              </a:rPr>
+              <a:t>director</a:t>
+            </a:r>
+            <a:r>
+              <a:rPr lang="fr-FR" altLang="fr-FR" dirty="0">
+                <a:solidFill>
+                  <a:srgbClr val="067D17"/>
+                </a:solidFill>
+                <a:latin typeface="Fira Code"/>
+              </a:rPr>
+              <a:t>"</a:t>
+            </a:r>
+            <a:r>
+              <a:rPr lang="fr-FR" altLang="fr-FR" dirty="0">
+                <a:solidFill>
+                  <a:srgbClr val="080808"/>
+                </a:solidFill>
+                <a:latin typeface="Fira Code"/>
+              </a:rPr>
+              <a:t>})  </a:t>
+            </a:r>
+            <a:r>
+              <a:rPr lang="fr-FR" altLang="fr-FR" i="1" dirty="0">
                 <a:solidFill>
                   <a:srgbClr val="8C8C8C"/>
                 </a:solidFill>
-                <a:effectLst/>
-                <a:latin typeface="Fira Code"/>
-              </a:rPr>
-              <a:t>// @EntityGraph(attributePaths = {"</a:t>
-            </a:r>
-            <a:r>
-              <a:rPr kumimoji="0" lang="fr-FR" altLang="fr-FR" b="0" i="1" u="none" strike="noStrike" cap="none" normalizeH="0" baseline="0" dirty="0" err="1">
-                <a:ln>
-                  <a:noFill/>
-                </a:ln>
+                <a:latin typeface="Fira Code"/>
+              </a:rPr>
+              <a:t>=&gt; </a:t>
+            </a:r>
+            <a:r>
+              <a:rPr lang="fr-FR" altLang="fr-FR" i="1" dirty="0" err="1">
                 <a:solidFill>
                   <a:srgbClr val="8C8C8C"/>
                 </a:solidFill>
-                <a:effectLst/>
                 <a:latin typeface="Fira Code"/>
               </a:rPr>
               <a:t>director</a:t>
             </a:r>
             <a:r>
-              <a:rPr kumimoji="0" lang="fr-FR" altLang="fr-FR" b="0" i="1" u="none" strike="noStrike" cap="none" normalizeH="0" baseline="0" dirty="0">
-                <a:ln>
-                  <a:noFill/>
-                </a:ln>
+              <a:rPr lang="fr-FR" altLang="fr-FR" i="1" dirty="0">
                 <a:solidFill>
                   <a:srgbClr val="8C8C8C"/>
                 </a:solidFill>
-                <a:effectLst/>
-                <a:latin typeface="Fira Code"/>
-              </a:rPr>
-              <a:t>", "</a:t>
-            </a:r>
-            <a:r>
-              <a:rPr kumimoji="0" lang="fr-FR" altLang="fr-FR" b="0" i="1" u="none" strike="noStrike" cap="none" normalizeH="0" baseline="0" dirty="0" err="1">
-                <a:ln>
-                  <a:noFill/>
-                </a:ln>
+                <a:latin typeface="Fira Code"/>
+              </a:rPr>
+              <a:t> est </a:t>
+            </a:r>
+            <a:r>
+              <a:rPr lang="fr-FR" altLang="fr-FR" i="1" dirty="0" err="1">
                 <a:solidFill>
                   <a:srgbClr val="8C8C8C"/>
                 </a:solidFill>
-                <a:effectLst/>
-                <a:latin typeface="Fira Code"/>
-              </a:rPr>
-              <a:t>students</a:t>
-            </a:r>
-            <a:r>
-              <a:rPr kumimoji="0" lang="fr-FR" altLang="fr-FR" b="0" i="1" u="none" strike="noStrike" cap="none" normalizeH="0" baseline="0" dirty="0">
-                <a:ln>
-                  <a:noFill/>
-                </a:ln>
-                <a:solidFill>
-                  <a:srgbClr val="8C8C8C"/>
-                </a:solidFill>
-                <a:effectLst/>
-                <a:latin typeface="Fira Code"/>
-              </a:rPr>
-              <a:t>", "</a:t>
-            </a:r>
-            <a:r>
-              <a:rPr kumimoji="0" lang="fr-FR" altLang="fr-FR" b="0" i="1" u="none" strike="noStrike" cap="none" normalizeH="0" baseline="0" dirty="0" err="1">
-                <a:ln>
-                  <a:noFill/>
-                </a:ln>
-                <a:solidFill>
-                  <a:srgbClr val="8C8C8C"/>
-                </a:solidFill>
-                <a:effectLst/>
-                <a:latin typeface="Fira Code"/>
-              </a:rPr>
-              <a:t>teachers</a:t>
-            </a:r>
-            <a:r>
-              <a:rPr kumimoji="0" lang="fr-FR" altLang="fr-FR" b="0" i="1" u="none" strike="noStrike" cap="none" normalizeH="0" baseline="0" dirty="0">
-                <a:ln>
-                  <a:noFill/>
-                </a:ln>
-                <a:solidFill>
-                  <a:srgbClr val="8C8C8C"/>
-                </a:solidFill>
-                <a:effectLst/>
-                <a:latin typeface="Fira Code"/>
-              </a:rPr>
-              <a:t>"}) =&gt; </a:t>
-            </a:r>
-            <a:r>
-              <a:rPr lang="en-US" b="0" i="0" dirty="0">
-                <a:solidFill>
-                  <a:srgbClr val="FF0000"/>
-                </a:solidFill>
-                <a:effectLst/>
-                <a:latin typeface="SFMono-Regular"/>
-              </a:rPr>
-              <a:t>HHH000104</a:t>
+                <a:latin typeface="Fira Code"/>
+              </a:rPr>
+              <a:t>OneToOne</a:t>
             </a:r>
             <a:br>
               <a:rPr kumimoji="0" lang="fr-FR" altLang="fr-FR" b="0" i="1" u="none" strike="noStrike" cap="none" normalizeH="0" baseline="0" dirty="0">
@@ -24028,51 +24006,25 @@
               </a:rPr>
             </a:br>
             <a:r>
-              <a:rPr kumimoji="0" lang="fr-FR" altLang="fr-FR" b="0" i="0" u="none" strike="noStrike" cap="none" normalizeH="0" baseline="0" dirty="0">
-                <a:ln>
-                  <a:noFill/>
-                </a:ln>
-                <a:solidFill>
-                  <a:srgbClr val="9E880D"/>
-                </a:solidFill>
-                <a:effectLst/>
-                <a:latin typeface="Fira Code"/>
-              </a:rPr>
-              <a:t>@EntityGraph</a:t>
-            </a:r>
-            <a:r>
-              <a:rPr kumimoji="0" lang="fr-FR" altLang="fr-FR" b="0" i="0" u="none" strike="noStrike" cap="none" normalizeH="0" baseline="0" dirty="0">
-                <a:ln>
-                  <a:noFill/>
-                </a:ln>
-                <a:solidFill>
-                  <a:srgbClr val="080808"/>
-                </a:solidFill>
-                <a:effectLst/>
-                <a:latin typeface="Fira Code"/>
-              </a:rPr>
-              <a:t>(attributePaths = {</a:t>
-            </a:r>
-            <a:r>
-              <a:rPr kumimoji="0" lang="fr-FR" altLang="fr-FR" b="0" i="0" u="none" strike="noStrike" cap="none" normalizeH="0" baseline="0" dirty="0">
-                <a:ln>
-                  <a:noFill/>
-                </a:ln>
-                <a:solidFill>
-                  <a:srgbClr val="067D17"/>
-                </a:solidFill>
-                <a:effectLst/>
-                <a:latin typeface="Fira Code"/>
-              </a:rPr>
-              <a:t>"</a:t>
-            </a:r>
-            <a:r>
-              <a:rPr kumimoji="0" lang="fr-FR" altLang="fr-FR" b="0" i="0" u="none" strike="noStrike" cap="none" normalizeH="0" baseline="0" dirty="0" err="1">
-                <a:ln>
-                  <a:noFill/>
-                </a:ln>
-                <a:solidFill>
-                  <a:srgbClr val="067D17"/>
+              <a:rPr kumimoji="0" lang="fr-FR" altLang="fr-FR" b="0" i="1" u="none" strike="noStrike" cap="none" normalizeH="0" baseline="0" dirty="0">
+                <a:ln>
+                  <a:noFill/>
+                </a:ln>
+                <a:solidFill>
+                  <a:srgbClr val="8C8C8C"/>
+                </a:solidFill>
+                <a:effectLst/>
+                <a:latin typeface="Fira Code"/>
+              </a:rPr>
+              <a:t>// @EntityGraph(attributePaths = {"</a:t>
+            </a:r>
+            <a:r>
+              <a:rPr kumimoji="0" lang="fr-FR" altLang="fr-FR" b="0" i="1" u="none" strike="noStrike" cap="none" normalizeH="0" baseline="0" dirty="0" err="1">
+                <a:ln>
+                  <a:noFill/>
+                </a:ln>
+                <a:solidFill>
+                  <a:srgbClr val="8C8C8C"/>
                 </a:solidFill>
                 <a:effectLst/>
                 <a:latin typeface="Fira Code"/>
@@ -24080,66 +24032,79 @@
               <a:t>director</a:t>
             </a:r>
             <a:r>
-              <a:rPr kumimoji="0" lang="fr-FR" altLang="fr-FR" b="0" i="0" u="none" strike="noStrike" cap="none" normalizeH="0" baseline="0" dirty="0">
-                <a:ln>
-                  <a:noFill/>
-                </a:ln>
-                <a:solidFill>
-                  <a:srgbClr val="067D17"/>
-                </a:solidFill>
-                <a:effectLst/>
-                <a:latin typeface="Fira Code"/>
-              </a:rPr>
-              <a:t>"</a:t>
-            </a:r>
-            <a:r>
-              <a:rPr kumimoji="0" lang="fr-FR" altLang="fr-FR" b="0" i="0" u="none" strike="noStrike" cap="none" normalizeH="0" baseline="0" dirty="0">
-                <a:ln>
-                  <a:noFill/>
-                </a:ln>
-                <a:solidFill>
-                  <a:srgbClr val="080808"/>
-                </a:solidFill>
-                <a:effectLst/>
-                <a:latin typeface="Fira Code"/>
-              </a:rPr>
-              <a:t>})  </a:t>
-            </a:r>
-            <a:r>
-              <a:rPr lang="fr-FR" altLang="fr-FR" i="1" dirty="0">
+              <a:rPr kumimoji="0" lang="fr-FR" altLang="fr-FR" b="0" i="1" u="none" strike="noStrike" cap="none" normalizeH="0" baseline="0" dirty="0">
+                <a:ln>
+                  <a:noFill/>
+                </a:ln>
                 <a:solidFill>
                   <a:srgbClr val="8C8C8C"/>
                 </a:solidFill>
-                <a:latin typeface="Fira Code"/>
-              </a:rPr>
-              <a:t>=&gt; </a:t>
-            </a:r>
-            <a:r>
-              <a:rPr lang="fr-FR" altLang="fr-FR" i="1" dirty="0" err="1">
+                <a:effectLst/>
+                <a:latin typeface="Fira Code"/>
+              </a:rPr>
+              <a:t>", "</a:t>
+            </a:r>
+            <a:r>
+              <a:rPr kumimoji="0" lang="fr-FR" altLang="fr-FR" b="0" i="1" u="none" strike="noStrike" cap="none" normalizeH="0" baseline="0" dirty="0" err="1">
+                <a:ln>
+                  <a:noFill/>
+                </a:ln>
                 <a:solidFill>
                   <a:srgbClr val="8C8C8C"/>
                 </a:solidFill>
-                <a:latin typeface="Fira Code"/>
-              </a:rPr>
-              <a:t>director</a:t>
-            </a:r>
-            <a:r>
-              <a:rPr lang="fr-FR" altLang="fr-FR" i="1" dirty="0">
+                <a:effectLst/>
+                <a:latin typeface="Fira Code"/>
+              </a:rPr>
+              <a:t>students</a:t>
+            </a:r>
+            <a:r>
+              <a:rPr kumimoji="0" lang="fr-FR" altLang="fr-FR" b="0" i="1" u="none" strike="noStrike" cap="none" normalizeH="0" baseline="0" dirty="0">
+                <a:ln>
+                  <a:noFill/>
+                </a:ln>
                 <a:solidFill>
                   <a:srgbClr val="8C8C8C"/>
                 </a:solidFill>
-                <a:latin typeface="Fira Code"/>
-              </a:rPr>
-              <a:t> est </a:t>
-            </a:r>
-            <a:r>
-              <a:rPr lang="fr-FR" altLang="fr-FR" i="1" dirty="0" err="1">
+                <a:effectLst/>
+                <a:latin typeface="Fira Code"/>
+              </a:rPr>
+              <a:t>", "</a:t>
+            </a:r>
+            <a:r>
+              <a:rPr kumimoji="0" lang="fr-FR" altLang="fr-FR" b="0" i="1" u="none" strike="noStrike" cap="none" normalizeH="0" baseline="0" dirty="0" err="1">
+                <a:ln>
+                  <a:noFill/>
+                </a:ln>
                 <a:solidFill>
                   <a:srgbClr val="8C8C8C"/>
                 </a:solidFill>
-                <a:latin typeface="Fira Code"/>
-              </a:rPr>
-              <a:t>OneToOne</a:t>
+                <a:effectLst/>
+                <a:latin typeface="Fira Code"/>
+              </a:rPr>
+              <a:t>teachers</a:t>
+            </a:r>
+            <a:r>
+              <a:rPr kumimoji="0" lang="fr-FR" altLang="fr-FR" b="0" i="1" u="none" strike="noStrike" cap="none" normalizeH="0" baseline="0" dirty="0">
+                <a:ln>
+                  <a:noFill/>
+                </a:ln>
+                <a:solidFill>
+                  <a:srgbClr val="8C8C8C"/>
+                </a:solidFill>
+                <a:effectLst/>
+                <a:latin typeface="Fira Code"/>
+              </a:rPr>
+              <a:t>"}) =&gt; </a:t>
+            </a:r>
+            <a:r>
+              <a:rPr lang="en-US" b="0" i="0" dirty="0">
+                <a:solidFill>
+                  <a:srgbClr val="FF0000"/>
+                </a:solidFill>
+                <a:effectLst/>
+                <a:latin typeface="SFMono-Regular"/>
+              </a:rPr>
+              <a:t>HHH000104</a:t>
             </a:r>
             <a:br>
               <a:rPr kumimoji="0" lang="fr-FR" altLang="fr-FR" b="0" i="0" u="none" strike="noStrike" cap="none" normalizeH="0" baseline="0" dirty="0">
@@ -42432,15 +42397,6 @@
 </file>
 
 <file path=customXml/item1.xml><?xml version="1.0" encoding="utf-8"?>
-<p:properties xmlns:p="http://schemas.microsoft.com/office/2006/metadata/properties" xmlns:xsi="http://www.w3.org/2001/XMLSchema-instance" xmlns:pc="http://schemas.microsoft.com/office/infopath/2007/PartnerControls">
-  <documentManagement>
-    <Status xmlns="71af3243-3dd4-4a8d-8c0d-dd76da1f02a5">Not started</Status>
-    <MediaServiceKeyPoints xmlns="71af3243-3dd4-4a8d-8c0d-dd76da1f02a5" xsi:nil="true"/>
-  </documentManagement>
-</p:properties>
-</file>
-
-<file path=customXml/item2.xml><?xml version="1.0" encoding="utf-8"?>
 <ct:contentTypeSchema xmlns:ct="http://schemas.microsoft.com/office/2006/metadata/contentType" xmlns:ma="http://schemas.microsoft.com/office/2006/metadata/properties/metaAttributes" ct:_="" ma:_="" ma:contentTypeName="Document" ma:contentTypeID="0x01010079F111ED35F8CC479449609E8A0923A6" ma:contentTypeVersion="12" ma:contentTypeDescription="Create a new document." ma:contentTypeScope="" ma:versionID="a8a52e8c320b9a064ae3583ae3861c92">
   <xsd:schema xmlns:xsd="http://www.w3.org/2001/XMLSchema" xmlns:xs="http://www.w3.org/2001/XMLSchema" xmlns:p="http://schemas.microsoft.com/office/2006/metadata/properties" xmlns:ns2="71af3243-3dd4-4a8d-8c0d-dd76da1f02a5" xmlns:ns3="16c05727-aa75-4e4a-9b5f-8a80a1165891" targetNamespace="http://schemas.microsoft.com/office/2006/metadata/properties" ma:root="true" ma:fieldsID="88020cb39231a0945110f9cd888b521a" ns2:_="" ns3:_="">
     <xsd:import namespace="71af3243-3dd4-4a8d-8c0d-dd76da1f02a5"/>
@@ -42661,6 +42617,15 @@
 </ct:contentTypeSchema>
 </file>
 
+<file path=customXml/item2.xml><?xml version="1.0" encoding="utf-8"?>
+<p:properties xmlns:p="http://schemas.microsoft.com/office/2006/metadata/properties" xmlns:xsi="http://www.w3.org/2001/XMLSchema-instance" xmlns:pc="http://schemas.microsoft.com/office/infopath/2007/PartnerControls">
+  <documentManagement>
+    <Status xmlns="71af3243-3dd4-4a8d-8c0d-dd76da1f02a5">Not started</Status>
+    <MediaServiceKeyPoints xmlns="71af3243-3dd4-4a8d-8c0d-dd76da1f02a5" xsi:nil="true"/>
+  </documentManagement>
+</p:properties>
+</file>
+
 <file path=customXml/item3.xml><?xml version="1.0" encoding="utf-8"?>
 <?mso-contentType ?>
 <FormTemplates xmlns="http://schemas.microsoft.com/sharepoint/v3/contenttype/forms">
@@ -42671,23 +42636,6 @@
 </file>
 
 <file path=customXml/itemProps1.xml><?xml version="1.0" encoding="utf-8"?>
-<ds:datastoreItem xmlns:ds="http://schemas.openxmlformats.org/officeDocument/2006/customXml" ds:itemID="{950072C5-DDE0-4258-BA7A-4D4B80DFA632}">
-  <ds:schemaRefs>
-    <ds:schemaRef ds:uri="http://purl.org/dc/terms/"/>
-    <ds:schemaRef ds:uri="http://schemas.microsoft.com/office/2006/documentManagement/types"/>
-    <ds:schemaRef ds:uri="http://schemas.openxmlformats.org/package/2006/metadata/core-properties"/>
-    <ds:schemaRef ds:uri="http://purl.org/dc/elements/1.1/"/>
-    <ds:schemaRef ds:uri="http://schemas.microsoft.com/office/infopath/2007/PartnerControls"/>
-    <ds:schemaRef ds:uri="16c05727-aa75-4e4a-9b5f-8a80a1165891"/>
-    <ds:schemaRef ds:uri="71af3243-3dd4-4a8d-8c0d-dd76da1f02a5"/>
-    <ds:schemaRef ds:uri="http://schemas.microsoft.com/office/2006/metadata/properties"/>
-    <ds:schemaRef ds:uri="http://www.w3.org/XML/1998/namespace"/>
-    <ds:schemaRef ds:uri="http://purl.org/dc/dcmitype/"/>
-  </ds:schemaRefs>
-</ds:datastoreItem>
-</file>
-
-<file path=customXml/itemProps2.xml><?xml version="1.0" encoding="utf-8"?>
 <ds:datastoreItem xmlns:ds="http://schemas.openxmlformats.org/officeDocument/2006/customXml" ds:itemID="{FD7FC771-7DFE-49DA-B577-71181BFBCB2E}">
   <ds:schemaRefs>
     <ds:schemaRef ds:uri="http://schemas.microsoft.com/office/2006/metadata/contentType"/>
@@ -42706,6 +42654,23 @@
 </ds:datastoreItem>
 </file>
 
+<file path=customXml/itemProps2.xml><?xml version="1.0" encoding="utf-8"?>
+<ds:datastoreItem xmlns:ds="http://schemas.openxmlformats.org/officeDocument/2006/customXml" ds:itemID="{950072C5-DDE0-4258-BA7A-4D4B80DFA632}">
+  <ds:schemaRefs>
+    <ds:schemaRef ds:uri="http://purl.org/dc/terms/"/>
+    <ds:schemaRef ds:uri="http://schemas.microsoft.com/office/2006/documentManagement/types"/>
+    <ds:schemaRef ds:uri="http://schemas.openxmlformats.org/package/2006/metadata/core-properties"/>
+    <ds:schemaRef ds:uri="http://purl.org/dc/elements/1.1/"/>
+    <ds:schemaRef ds:uri="http://schemas.microsoft.com/office/infopath/2007/PartnerControls"/>
+    <ds:schemaRef ds:uri="16c05727-aa75-4e4a-9b5f-8a80a1165891"/>
+    <ds:schemaRef ds:uri="71af3243-3dd4-4a8d-8c0d-dd76da1f02a5"/>
+    <ds:schemaRef ds:uri="http://schemas.microsoft.com/office/2006/metadata/properties"/>
+    <ds:schemaRef ds:uri="http://www.w3.org/XML/1998/namespace"/>
+    <ds:schemaRef ds:uri="http://purl.org/dc/dcmitype/"/>
+  </ds:schemaRefs>
+</ds:datastoreItem>
+</file>
+
 <file path=customXml/itemProps3.xml><?xml version="1.0" encoding="utf-8"?>
 <ds:datastoreItem xmlns:ds="http://schemas.openxmlformats.org/officeDocument/2006/customXml" ds:itemID="{7EE8C63A-4744-4DE4-BB49-0FF0B5375C60}">
   <ds:schemaRefs>

--- a/JPA-HIBERNATE.pptx
+++ b/JPA-HIBERNATE.pptx
@@ -5759,7 +5759,7 @@
         </p:spPr>
         <p:txBody>
           <a:bodyPr rtlCol="0">
-            <a:normAutofit/>
+            <a:normAutofit fontScale="90000"/>
           </a:bodyPr>
           <a:lstStyle/>
           <a:p>
@@ -5769,7 +5769,7 @@
                 <a:latin typeface="Segoe UI Light" panose="020B0502040204020203" pitchFamily="34" charset="0"/>
                 <a:cs typeface="Segoe UI Light" panose="020B0502040204020203" pitchFamily="34" charset="0"/>
               </a:rPr>
-              <a:t>Jointure Eager ou Lazy ?</a:t>
+              <a:t>Type de jointure Eager ou Lazy ? (Attribut « FetchType »)</a:t>
             </a:r>
           </a:p>
         </p:txBody>
@@ -13640,6 +13640,77 @@
           </a:p>
         </p:txBody>
       </p:sp>
+      <p:sp>
+        <p:nvSpPr>
+          <p:cNvPr id="6" name="ZoneTexte 5">
+            <a:extLst>
+              <a:ext uri="{FF2B5EF4-FFF2-40B4-BE49-F238E27FC236}">
+                <a16:creationId xmlns:a16="http://schemas.microsoft.com/office/drawing/2014/main" id="{FB92E64B-E616-4765-ABFD-0B2411A1937E}"/>
+              </a:ext>
+            </a:extLst>
+          </p:cNvPr>
+          <p:cNvSpPr txBox="1"/>
+          <p:nvPr/>
+        </p:nvSpPr>
+        <p:spPr>
+          <a:xfrm>
+            <a:off x="4910662" y="4421182"/>
+            <a:ext cx="1725747" cy="923330"/>
+          </a:xfrm>
+          <a:prstGeom prst="rect">
+            <a:avLst/>
+          </a:prstGeom>
+          <a:noFill/>
+        </p:spPr>
+        <p:txBody>
+          <a:bodyPr wrap="square" rtlCol="0">
+            <a:spAutoFit/>
+          </a:bodyPr>
+          <a:lstStyle/>
+          <a:p>
+            <a:r>
+              <a:rPr lang="fr-FR" b="1" dirty="0">
+                <a:solidFill>
+                  <a:srgbClr val="FF0000"/>
+                </a:solidFill>
+              </a:rPr>
+              <a:t>Démo N+1</a:t>
+            </a:r>
+          </a:p>
+          <a:p>
+            <a:r>
+              <a:rPr lang="fr-FR" altLang="fr-FR" dirty="0" err="1">
+                <a:solidFill>
+                  <a:srgbClr val="067D17"/>
+                </a:solidFill>
+                <a:latin typeface="Fira Code"/>
+              </a:rPr>
+              <a:t>findById</a:t>
+            </a:r>
+            <a:endParaRPr lang="fr-FR" b="1" dirty="0">
+              <a:solidFill>
+                <a:srgbClr val="FF0000"/>
+              </a:solidFill>
+            </a:endParaRPr>
+          </a:p>
+          <a:p>
+            <a:r>
+              <a:rPr lang="fr-FR" altLang="fr-FR" dirty="0" err="1">
+                <a:solidFill>
+                  <a:srgbClr val="067D17"/>
+                </a:solidFill>
+                <a:latin typeface="Fira Code"/>
+              </a:rPr>
+              <a:t>findByLocation</a:t>
+            </a:r>
+            <a:endParaRPr lang="fr-FR" b="1" dirty="0">
+              <a:solidFill>
+                <a:srgbClr val="FF0000"/>
+              </a:solidFill>
+            </a:endParaRPr>
+          </a:p>
+        </p:txBody>
+      </p:sp>
     </p:spTree>
     <p:extLst>
       <p:ext uri="{BB962C8B-B14F-4D97-AF65-F5344CB8AC3E}">
@@ -13764,6 +13835,51 @@
                       </p:childTnLst>
                     </p:cTn>
                   </p:par>
+                  <p:par>
+                    <p:cTn id="11" fill="hold">
+                      <p:stCondLst>
+                        <p:cond delay="indefinite"/>
+                      </p:stCondLst>
+                      <p:childTnLst>
+                        <p:par>
+                          <p:cTn id="12" fill="hold">
+                            <p:stCondLst>
+                              <p:cond delay="0"/>
+                            </p:stCondLst>
+                            <p:childTnLst>
+                              <p:par>
+                                <p:cTn id="13" presetID="1" presetClass="entr" presetSubtype="0" fill="hold" grpId="0" nodeType="clickEffect">
+                                  <p:stCondLst>
+                                    <p:cond delay="0"/>
+                                  </p:stCondLst>
+                                  <p:childTnLst>
+                                    <p:set>
+                                      <p:cBhvr>
+                                        <p:cTn id="14" dur="1" fill="hold">
+                                          <p:stCondLst>
+                                            <p:cond delay="0"/>
+                                          </p:stCondLst>
+                                        </p:cTn>
+                                        <p:tgtEl>
+                                          <p:spTgt spid="6"/>
+                                        </p:tgtEl>
+                                        <p:attrNameLst>
+                                          <p:attrName>style.visibility</p:attrName>
+                                        </p:attrNameLst>
+                                      </p:cBhvr>
+                                      <p:to>
+                                        <p:strVal val="visible"/>
+                                      </p:to>
+                                    </p:set>
+                                  </p:childTnLst>
+                                </p:cTn>
+                              </p:par>
+                            </p:childTnLst>
+                          </p:cTn>
+                        </p:par>
+                      </p:childTnLst>
+                    </p:cTn>
+                  </p:par>
                 </p:childTnLst>
               </p:cTn>
               <p:prevCondLst>
@@ -13785,6 +13901,9 @@
         </p:cTn>
       </p:par>
     </p:tnLst>
+    <p:bldLst>
+      <p:bldP spid="6" grpId="0"/>
+    </p:bldLst>
   </p:timing>
 </p:sld>
 </file>
@@ -23637,7 +23756,7 @@
         <p:spPr>
           <a:xfrm>
             <a:off x="607039" y="1446615"/>
-            <a:ext cx="8538881" cy="1477328"/>
+            <a:ext cx="8538881" cy="1754326"/>
           </a:xfrm>
           <a:prstGeom prst="rect">
             <a:avLst/>
@@ -23740,29 +23859,25 @@
           </a:p>
           <a:p>
             <a:r>
+              <a:rPr lang="fr-FR" altLang="fr-FR" dirty="0">
+                <a:highlight>
+                  <a:srgbClr val="FFFF00"/>
+                </a:highlight>
+                <a:latin typeface="SFMono-Regular"/>
+              </a:rPr>
+              <a:t>Et si pas de filtre…</a:t>
+            </a:r>
+          </a:p>
+          <a:p>
+            <a:r>
               <a:rPr lang="fr-FR" dirty="0">
                 <a:highlight>
                   <a:srgbClr val="FFFF00"/>
                 </a:highlight>
                 <a:latin typeface="SFMono-Regular"/>
               </a:rPr>
-              <a:t>Et la pagination se fait </a:t>
-            </a:r>
-            <a:r>
-              <a:rPr lang="fr-FR">
-                <a:highlight>
-                  <a:srgbClr val="FFFF00"/>
-                </a:highlight>
-                <a:latin typeface="SFMono-Regular"/>
-              </a:rPr>
-              <a:t>en mémoire !!</a:t>
-            </a:r>
-            <a:endParaRPr lang="fr-FR" dirty="0">
-              <a:highlight>
-                <a:srgbClr val="FFFF00"/>
-              </a:highlight>
-              <a:latin typeface="SFMono-Regular"/>
-            </a:endParaRPr>
+              <a:t>Et la pagination se fait en mémoire !!</a:t>
+            </a:r>
           </a:p>
         </p:txBody>
       </p:sp>
@@ -23782,7 +23897,7 @@
         </p:nvSpPr>
         <p:spPr bwMode="auto">
           <a:xfrm>
-            <a:off x="636494" y="2921549"/>
+            <a:off x="683879" y="3421201"/>
             <a:ext cx="10919012" cy="1477328"/>
           </a:xfrm>
           <a:prstGeom prst="rect">
@@ -24290,7 +24405,7 @@
         </p:blipFill>
         <p:spPr bwMode="auto">
           <a:xfrm>
-            <a:off x="4895346" y="5118789"/>
+            <a:off x="9553071" y="1544157"/>
             <a:ext cx="1559242" cy="1559242"/>
           </a:xfrm>
           <a:prstGeom prst="rect">
@@ -42397,6 +42512,15 @@
 </file>
 
 <file path=customXml/item1.xml><?xml version="1.0" encoding="utf-8"?>
+<p:properties xmlns:p="http://schemas.microsoft.com/office/2006/metadata/properties" xmlns:xsi="http://www.w3.org/2001/XMLSchema-instance" xmlns:pc="http://schemas.microsoft.com/office/infopath/2007/PartnerControls">
+  <documentManagement>
+    <Status xmlns="71af3243-3dd4-4a8d-8c0d-dd76da1f02a5">Not started</Status>
+    <MediaServiceKeyPoints xmlns="71af3243-3dd4-4a8d-8c0d-dd76da1f02a5" xsi:nil="true"/>
+  </documentManagement>
+</p:properties>
+</file>
+
+<file path=customXml/item2.xml><?xml version="1.0" encoding="utf-8"?>
 <ct:contentTypeSchema xmlns:ct="http://schemas.microsoft.com/office/2006/metadata/contentType" xmlns:ma="http://schemas.microsoft.com/office/2006/metadata/properties/metaAttributes" ct:_="" ma:_="" ma:contentTypeName="Document" ma:contentTypeID="0x01010079F111ED35F8CC479449609E8A0923A6" ma:contentTypeVersion="12" ma:contentTypeDescription="Create a new document." ma:contentTypeScope="" ma:versionID="a8a52e8c320b9a064ae3583ae3861c92">
   <xsd:schema xmlns:xsd="http://www.w3.org/2001/XMLSchema" xmlns:xs="http://www.w3.org/2001/XMLSchema" xmlns:p="http://schemas.microsoft.com/office/2006/metadata/properties" xmlns:ns2="71af3243-3dd4-4a8d-8c0d-dd76da1f02a5" xmlns:ns3="16c05727-aa75-4e4a-9b5f-8a80a1165891" targetNamespace="http://schemas.microsoft.com/office/2006/metadata/properties" ma:root="true" ma:fieldsID="88020cb39231a0945110f9cd888b521a" ns2:_="" ns3:_="">
     <xsd:import namespace="71af3243-3dd4-4a8d-8c0d-dd76da1f02a5"/>
@@ -42617,15 +42741,6 @@
 </ct:contentTypeSchema>
 </file>
 
-<file path=customXml/item2.xml><?xml version="1.0" encoding="utf-8"?>
-<p:properties xmlns:p="http://schemas.microsoft.com/office/2006/metadata/properties" xmlns:xsi="http://www.w3.org/2001/XMLSchema-instance" xmlns:pc="http://schemas.microsoft.com/office/infopath/2007/PartnerControls">
-  <documentManagement>
-    <Status xmlns="71af3243-3dd4-4a8d-8c0d-dd76da1f02a5">Not started</Status>
-    <MediaServiceKeyPoints xmlns="71af3243-3dd4-4a8d-8c0d-dd76da1f02a5" xsi:nil="true"/>
-  </documentManagement>
-</p:properties>
-</file>
-
 <file path=customXml/item3.xml><?xml version="1.0" encoding="utf-8"?>
 <?mso-contentType ?>
 <FormTemplates xmlns="http://schemas.microsoft.com/sharepoint/v3/contenttype/forms">
@@ -42636,6 +42751,23 @@
 </file>
 
 <file path=customXml/itemProps1.xml><?xml version="1.0" encoding="utf-8"?>
+<ds:datastoreItem xmlns:ds="http://schemas.openxmlformats.org/officeDocument/2006/customXml" ds:itemID="{950072C5-DDE0-4258-BA7A-4D4B80DFA632}">
+  <ds:schemaRefs>
+    <ds:schemaRef ds:uri="http://purl.org/dc/terms/"/>
+    <ds:schemaRef ds:uri="http://schemas.microsoft.com/office/2006/documentManagement/types"/>
+    <ds:schemaRef ds:uri="http://schemas.openxmlformats.org/package/2006/metadata/core-properties"/>
+    <ds:schemaRef ds:uri="http://purl.org/dc/elements/1.1/"/>
+    <ds:schemaRef ds:uri="http://schemas.microsoft.com/office/infopath/2007/PartnerControls"/>
+    <ds:schemaRef ds:uri="16c05727-aa75-4e4a-9b5f-8a80a1165891"/>
+    <ds:schemaRef ds:uri="71af3243-3dd4-4a8d-8c0d-dd76da1f02a5"/>
+    <ds:schemaRef ds:uri="http://schemas.microsoft.com/office/2006/metadata/properties"/>
+    <ds:schemaRef ds:uri="http://www.w3.org/XML/1998/namespace"/>
+    <ds:schemaRef ds:uri="http://purl.org/dc/dcmitype/"/>
+  </ds:schemaRefs>
+</ds:datastoreItem>
+</file>
+
+<file path=customXml/itemProps2.xml><?xml version="1.0" encoding="utf-8"?>
 <ds:datastoreItem xmlns:ds="http://schemas.openxmlformats.org/officeDocument/2006/customXml" ds:itemID="{FD7FC771-7DFE-49DA-B577-71181BFBCB2E}">
   <ds:schemaRefs>
     <ds:schemaRef ds:uri="http://schemas.microsoft.com/office/2006/metadata/contentType"/>
@@ -42654,23 +42786,6 @@
 </ds:datastoreItem>
 </file>
 
-<file path=customXml/itemProps2.xml><?xml version="1.0" encoding="utf-8"?>
-<ds:datastoreItem xmlns:ds="http://schemas.openxmlformats.org/officeDocument/2006/customXml" ds:itemID="{950072C5-DDE0-4258-BA7A-4D4B80DFA632}">
-  <ds:schemaRefs>
-    <ds:schemaRef ds:uri="http://purl.org/dc/terms/"/>
-    <ds:schemaRef ds:uri="http://schemas.microsoft.com/office/2006/documentManagement/types"/>
-    <ds:schemaRef ds:uri="http://schemas.openxmlformats.org/package/2006/metadata/core-properties"/>
-    <ds:schemaRef ds:uri="http://purl.org/dc/elements/1.1/"/>
-    <ds:schemaRef ds:uri="http://schemas.microsoft.com/office/infopath/2007/PartnerControls"/>
-    <ds:schemaRef ds:uri="16c05727-aa75-4e4a-9b5f-8a80a1165891"/>
-    <ds:schemaRef ds:uri="71af3243-3dd4-4a8d-8c0d-dd76da1f02a5"/>
-    <ds:schemaRef ds:uri="http://schemas.microsoft.com/office/2006/metadata/properties"/>
-    <ds:schemaRef ds:uri="http://www.w3.org/XML/1998/namespace"/>
-    <ds:schemaRef ds:uri="http://purl.org/dc/dcmitype/"/>
-  </ds:schemaRefs>
-</ds:datastoreItem>
-</file>
-
 <file path=customXml/itemProps3.xml><?xml version="1.0" encoding="utf-8"?>
 <ds:datastoreItem xmlns:ds="http://schemas.openxmlformats.org/officeDocument/2006/customXml" ds:itemID="{7EE8C63A-4744-4DE4-BB49-0FF0B5375C60}">
   <ds:schemaRefs>

--- a/JPA-HIBERNATE.pptx
+++ b/JPA-HIBERNATE.pptx
@@ -14397,7 +14397,7 @@
               <a:t>FetchMode</a:t>
             </a:r>
             <a:r>
-              <a:rPr kumimoji="0" lang="fr-FR" altLang="fr-FR" sz="1800" b="0" i="0" u="none" strike="noStrike" cap="none" normalizeH="0" baseline="0" dirty="0">
+              <a:rPr kumimoji="0" lang="fr-FR" altLang="fr-FR" sz="1800" b="0" i="0" u="none" strike="noStrike" cap="none" normalizeH="0" baseline="0">
                 <a:ln>
                   <a:noFill/>
                 </a:ln>
@@ -14410,7 +14410,7 @@
               <a:t>.</a:t>
             </a:r>
             <a:r>
-              <a:rPr kumimoji="0" lang="fr-FR" altLang="fr-FR" sz="1800" b="0" i="1" u="none" strike="noStrike" cap="none" normalizeH="0" baseline="0" dirty="0">
+              <a:rPr kumimoji="0" lang="fr-FR" altLang="fr-FR" sz="1800" b="0" i="1" u="none" strike="noStrike" cap="none" normalizeH="0" baseline="0">
                 <a:ln>
                   <a:noFill/>
                 </a:ln>
@@ -14420,10 +14420,10 @@
                 <a:effectLst/>
                 <a:latin typeface="Fira Code"/>
               </a:rPr>
-              <a:t>SUBSELECT</a:t>
-            </a:r>
-            <a:r>
-              <a:rPr kumimoji="0" lang="fr-FR" altLang="fr-FR" sz="1800" b="0" i="0" u="none" strike="noStrike" cap="none" normalizeH="0" baseline="0" dirty="0">
+              <a:t>SUBSELECT / JOIN</a:t>
+            </a:r>
+            <a:r>
+              <a:rPr kumimoji="0" lang="fr-FR" altLang="fr-FR" sz="1800" b="0" i="0" u="none" strike="noStrike" cap="none" normalizeH="0" baseline="0">
                 <a:ln>
                   <a:noFill/>
                 </a:ln>
@@ -42512,15 +42512,6 @@
 </file>
 
 <file path=customXml/item1.xml><?xml version="1.0" encoding="utf-8"?>
-<p:properties xmlns:p="http://schemas.microsoft.com/office/2006/metadata/properties" xmlns:xsi="http://www.w3.org/2001/XMLSchema-instance" xmlns:pc="http://schemas.microsoft.com/office/infopath/2007/PartnerControls">
-  <documentManagement>
-    <Status xmlns="71af3243-3dd4-4a8d-8c0d-dd76da1f02a5">Not started</Status>
-    <MediaServiceKeyPoints xmlns="71af3243-3dd4-4a8d-8c0d-dd76da1f02a5" xsi:nil="true"/>
-  </documentManagement>
-</p:properties>
-</file>
-
-<file path=customXml/item2.xml><?xml version="1.0" encoding="utf-8"?>
 <ct:contentTypeSchema xmlns:ct="http://schemas.microsoft.com/office/2006/metadata/contentType" xmlns:ma="http://schemas.microsoft.com/office/2006/metadata/properties/metaAttributes" ct:_="" ma:_="" ma:contentTypeName="Document" ma:contentTypeID="0x01010079F111ED35F8CC479449609E8A0923A6" ma:contentTypeVersion="12" ma:contentTypeDescription="Create a new document." ma:contentTypeScope="" ma:versionID="a8a52e8c320b9a064ae3583ae3861c92">
   <xsd:schema xmlns:xsd="http://www.w3.org/2001/XMLSchema" xmlns:xs="http://www.w3.org/2001/XMLSchema" xmlns:p="http://schemas.microsoft.com/office/2006/metadata/properties" xmlns:ns2="71af3243-3dd4-4a8d-8c0d-dd76da1f02a5" xmlns:ns3="16c05727-aa75-4e4a-9b5f-8a80a1165891" targetNamespace="http://schemas.microsoft.com/office/2006/metadata/properties" ma:root="true" ma:fieldsID="88020cb39231a0945110f9cd888b521a" ns2:_="" ns3:_="">
     <xsd:import namespace="71af3243-3dd4-4a8d-8c0d-dd76da1f02a5"/>
@@ -42741,6 +42732,15 @@
 </ct:contentTypeSchema>
 </file>
 
+<file path=customXml/item2.xml><?xml version="1.0" encoding="utf-8"?>
+<p:properties xmlns:p="http://schemas.microsoft.com/office/2006/metadata/properties" xmlns:xsi="http://www.w3.org/2001/XMLSchema-instance" xmlns:pc="http://schemas.microsoft.com/office/infopath/2007/PartnerControls">
+  <documentManagement>
+    <Status xmlns="71af3243-3dd4-4a8d-8c0d-dd76da1f02a5">Not started</Status>
+    <MediaServiceKeyPoints xmlns="71af3243-3dd4-4a8d-8c0d-dd76da1f02a5" xsi:nil="true"/>
+  </documentManagement>
+</p:properties>
+</file>
+
 <file path=customXml/item3.xml><?xml version="1.0" encoding="utf-8"?>
 <?mso-contentType ?>
 <FormTemplates xmlns="http://schemas.microsoft.com/sharepoint/v3/contenttype/forms">
@@ -42751,23 +42751,6 @@
 </file>
 
 <file path=customXml/itemProps1.xml><?xml version="1.0" encoding="utf-8"?>
-<ds:datastoreItem xmlns:ds="http://schemas.openxmlformats.org/officeDocument/2006/customXml" ds:itemID="{950072C5-DDE0-4258-BA7A-4D4B80DFA632}">
-  <ds:schemaRefs>
-    <ds:schemaRef ds:uri="http://purl.org/dc/terms/"/>
-    <ds:schemaRef ds:uri="http://schemas.microsoft.com/office/2006/documentManagement/types"/>
-    <ds:schemaRef ds:uri="http://schemas.openxmlformats.org/package/2006/metadata/core-properties"/>
-    <ds:schemaRef ds:uri="http://purl.org/dc/elements/1.1/"/>
-    <ds:schemaRef ds:uri="http://schemas.microsoft.com/office/infopath/2007/PartnerControls"/>
-    <ds:schemaRef ds:uri="16c05727-aa75-4e4a-9b5f-8a80a1165891"/>
-    <ds:schemaRef ds:uri="71af3243-3dd4-4a8d-8c0d-dd76da1f02a5"/>
-    <ds:schemaRef ds:uri="http://schemas.microsoft.com/office/2006/metadata/properties"/>
-    <ds:schemaRef ds:uri="http://www.w3.org/XML/1998/namespace"/>
-    <ds:schemaRef ds:uri="http://purl.org/dc/dcmitype/"/>
-  </ds:schemaRefs>
-</ds:datastoreItem>
-</file>
-
-<file path=customXml/itemProps2.xml><?xml version="1.0" encoding="utf-8"?>
 <ds:datastoreItem xmlns:ds="http://schemas.openxmlformats.org/officeDocument/2006/customXml" ds:itemID="{FD7FC771-7DFE-49DA-B577-71181BFBCB2E}">
   <ds:schemaRefs>
     <ds:schemaRef ds:uri="http://schemas.microsoft.com/office/2006/metadata/contentType"/>
@@ -42786,6 +42769,23 @@
 </ds:datastoreItem>
 </file>
 
+<file path=customXml/itemProps2.xml><?xml version="1.0" encoding="utf-8"?>
+<ds:datastoreItem xmlns:ds="http://schemas.openxmlformats.org/officeDocument/2006/customXml" ds:itemID="{950072C5-DDE0-4258-BA7A-4D4B80DFA632}">
+  <ds:schemaRefs>
+    <ds:schemaRef ds:uri="http://purl.org/dc/terms/"/>
+    <ds:schemaRef ds:uri="http://schemas.microsoft.com/office/2006/documentManagement/types"/>
+    <ds:schemaRef ds:uri="http://schemas.openxmlformats.org/package/2006/metadata/core-properties"/>
+    <ds:schemaRef ds:uri="http://purl.org/dc/elements/1.1/"/>
+    <ds:schemaRef ds:uri="http://schemas.microsoft.com/office/infopath/2007/PartnerControls"/>
+    <ds:schemaRef ds:uri="16c05727-aa75-4e4a-9b5f-8a80a1165891"/>
+    <ds:schemaRef ds:uri="71af3243-3dd4-4a8d-8c0d-dd76da1f02a5"/>
+    <ds:schemaRef ds:uri="http://schemas.microsoft.com/office/2006/metadata/properties"/>
+    <ds:schemaRef ds:uri="http://www.w3.org/XML/1998/namespace"/>
+    <ds:schemaRef ds:uri="http://purl.org/dc/dcmitype/"/>
+  </ds:schemaRefs>
+</ds:datastoreItem>
+</file>
+
 <file path=customXml/itemProps3.xml><?xml version="1.0" encoding="utf-8"?>
 <ds:datastoreItem xmlns:ds="http://schemas.openxmlformats.org/officeDocument/2006/customXml" ds:itemID="{7EE8C63A-4744-4DE4-BB49-0FF0B5375C60}">
   <ds:schemaRefs>

--- a/JPA-HIBERNATE.pptx
+++ b/JPA-HIBERNATE.pptx
@@ -6473,6 +6473,107 @@
           </a:p>
         </p:txBody>
       </p:sp>
+      <p:pic>
+        <p:nvPicPr>
+          <p:cNvPr id="6" name="Image 5">
+            <a:extLst>
+              <a:ext uri="{FF2B5EF4-FFF2-40B4-BE49-F238E27FC236}">
+                <a16:creationId xmlns:a16="http://schemas.microsoft.com/office/drawing/2014/main" id="{DC295CC2-3C55-4263-A392-041686476F64}"/>
+              </a:ext>
+            </a:extLst>
+          </p:cNvPr>
+          <p:cNvPicPr>
+            <a:picLocks noChangeAspect="1"/>
+          </p:cNvPicPr>
+          <p:nvPr/>
+        </p:nvPicPr>
+        <p:blipFill>
+          <a:blip r:embed="rId3"/>
+          <a:stretch>
+            <a:fillRect/>
+          </a:stretch>
+        </p:blipFill>
+        <p:spPr>
+          <a:xfrm>
+            <a:off x="4196040" y="3591734"/>
+            <a:ext cx="7314718" cy="2055019"/>
+          </a:xfrm>
+          <a:prstGeom prst="rect">
+            <a:avLst/>
+          </a:prstGeom>
+        </p:spPr>
+      </p:pic>
+      <p:sp>
+        <p:nvSpPr>
+          <p:cNvPr id="9" name="ZoneTexte 8">
+            <a:extLst>
+              <a:ext uri="{FF2B5EF4-FFF2-40B4-BE49-F238E27FC236}">
+                <a16:creationId xmlns:a16="http://schemas.microsoft.com/office/drawing/2014/main" id="{C8DED574-2F61-4384-8F24-6E5075408A1F}"/>
+              </a:ext>
+            </a:extLst>
+          </p:cNvPr>
+          <p:cNvSpPr txBox="1"/>
+          <p:nvPr/>
+        </p:nvSpPr>
+        <p:spPr>
+          <a:xfrm>
+            <a:off x="4412879" y="3330124"/>
+            <a:ext cx="6924080" cy="261610"/>
+          </a:xfrm>
+          <a:prstGeom prst="rect">
+            <a:avLst/>
+          </a:prstGeom>
+          <a:noFill/>
+        </p:spPr>
+        <p:txBody>
+          <a:bodyPr wrap="square">
+            <a:spAutoFit/>
+          </a:bodyPr>
+          <a:lstStyle/>
+          <a:p>
+            <a:r>
+              <a:rPr lang="fr-FR" sz="1100" dirty="0">
+                <a:hlinkClick r:id="rId4"/>
+              </a:rPr>
+              <a:t>https://docs.jboss.org/hibernate/stable/orm/userguide/html_single/Hibernate_User_Guide.html#fetching</a:t>
+            </a:r>
+            <a:r>
+              <a:rPr lang="fr-FR" sz="1100" dirty="0"/>
+              <a:t> </a:t>
+            </a:r>
+          </a:p>
+        </p:txBody>
+      </p:sp>
+      <p:pic>
+        <p:nvPicPr>
+          <p:cNvPr id="11" name="Image 10">
+            <a:extLst>
+              <a:ext uri="{FF2B5EF4-FFF2-40B4-BE49-F238E27FC236}">
+                <a16:creationId xmlns:a16="http://schemas.microsoft.com/office/drawing/2014/main" id="{ADEED5F9-E4CA-43A0-8BED-4ACC952F9536}"/>
+              </a:ext>
+            </a:extLst>
+          </p:cNvPr>
+          <p:cNvPicPr>
+            <a:picLocks noChangeAspect="1"/>
+          </p:cNvPicPr>
+          <p:nvPr/>
+        </p:nvPicPr>
+        <p:blipFill>
+          <a:blip r:embed="rId5"/>
+          <a:stretch>
+            <a:fillRect/>
+          </a:stretch>
+        </p:blipFill>
+        <p:spPr>
+          <a:xfrm>
+            <a:off x="5168628" y="5614214"/>
+            <a:ext cx="5412582" cy="1114517"/>
+          </a:xfrm>
+          <a:prstGeom prst="rect">
+            <a:avLst/>
+          </a:prstGeom>
+        </p:spPr>
+      </p:pic>
     </p:spTree>
     <p:extLst>
       <p:ext uri="{BB962C8B-B14F-4D97-AF65-F5344CB8AC3E}">
@@ -6749,6 +6850,105 @@
                       </p:childTnLst>
                     </p:cTn>
                   </p:par>
+                  <p:par>
+                    <p:cTn id="23" fill="hold">
+                      <p:stCondLst>
+                        <p:cond delay="indefinite"/>
+                      </p:stCondLst>
+                      <p:childTnLst>
+                        <p:par>
+                          <p:cTn id="24" fill="hold">
+                            <p:stCondLst>
+                              <p:cond delay="0"/>
+                            </p:stCondLst>
+                            <p:childTnLst>
+                              <p:par>
+                                <p:cTn id="25" presetID="1" presetClass="entr" presetSubtype="0" fill="hold" grpId="0" nodeType="clickEffect">
+                                  <p:stCondLst>
+                                    <p:cond delay="0"/>
+                                  </p:stCondLst>
+                                  <p:childTnLst>
+                                    <p:set>
+                                      <p:cBhvr>
+                                        <p:cTn id="26" dur="1" fill="hold">
+                                          <p:stCondLst>
+                                            <p:cond delay="0"/>
+                                          </p:stCondLst>
+                                        </p:cTn>
+                                        <p:tgtEl>
+                                          <p:spTgt spid="9"/>
+                                        </p:tgtEl>
+                                        <p:attrNameLst>
+                                          <p:attrName>style.visibility</p:attrName>
+                                        </p:attrNameLst>
+                                      </p:cBhvr>
+                                      <p:to>
+                                        <p:strVal val="visible"/>
+                                      </p:to>
+                                    </p:set>
+                                  </p:childTnLst>
+                                </p:cTn>
+                              </p:par>
+                              <p:par>
+                                <p:cTn id="27" presetID="1" presetClass="entr" presetSubtype="0" fill="hold" nodeType="withEffect">
+                                  <p:stCondLst>
+                                    <p:cond delay="0"/>
+                                  </p:stCondLst>
+                                  <p:childTnLst>
+                                    <p:set>
+                                      <p:cBhvr>
+                                        <p:cTn id="28" dur="1" fill="hold">
+                                          <p:stCondLst>
+                                            <p:cond delay="0"/>
+                                          </p:stCondLst>
+                                        </p:cTn>
+                                        <p:tgtEl>
+                                          <p:spTgt spid="6"/>
+                                        </p:tgtEl>
+                                        <p:attrNameLst>
+                                          <p:attrName>style.visibility</p:attrName>
+                                        </p:attrNameLst>
+                                      </p:cBhvr>
+                                      <p:to>
+                                        <p:strVal val="visible"/>
+                                      </p:to>
+                                    </p:set>
+                                  </p:childTnLst>
+                                </p:cTn>
+                              </p:par>
+                              <p:par>
+                                <p:cTn id="29" presetID="1" presetClass="entr" presetSubtype="0" fill="hold" nodeType="withEffect">
+                                  <p:stCondLst>
+                                    <p:cond delay="0"/>
+                                  </p:stCondLst>
+                                  <p:childTnLst>
+                                    <p:set>
+                                      <p:cBhvr>
+                                        <p:cTn id="30" dur="1" fill="hold">
+                                          <p:stCondLst>
+                                            <p:cond delay="0"/>
+                                          </p:stCondLst>
+                                        </p:cTn>
+                                        <p:tgtEl>
+                                          <p:spTgt spid="11"/>
+                                        </p:tgtEl>
+                                        <p:attrNameLst>
+                                          <p:attrName>style.visibility</p:attrName>
+                                        </p:attrNameLst>
+                                      </p:cBhvr>
+                                      <p:to>
+                                        <p:strVal val="visible"/>
+                                      </p:to>
+                                    </p:set>
+                                  </p:childTnLst>
+                                </p:cTn>
+                              </p:par>
+                            </p:childTnLst>
+                          </p:cTn>
+                        </p:par>
+                      </p:childTnLst>
+                    </p:cTn>
+                  </p:par>
                 </p:childTnLst>
               </p:cTn>
               <p:prevCondLst>
@@ -6773,6 +6973,7 @@
     <p:bldLst>
       <p:bldP spid="7" grpId="0" animBg="1"/>
       <p:bldP spid="3" grpId="0" animBg="1"/>
+      <p:bldP spid="9" grpId="0"/>
     </p:bldLst>
   </p:timing>
 </p:sld>
@@ -6823,7 +7024,7 @@
                 <a:latin typeface="Segoe UI Light" panose="020B0502040204020203" pitchFamily="34" charset="0"/>
                 <a:cs typeface="Segoe UI Light" panose="020B0502040204020203" pitchFamily="34" charset="0"/>
               </a:rPr>
-              <a:t>Jointures par défaut pour récupérer l’arbre de données </a:t>
+              <a:t>Mon repository !</a:t>
             </a:r>
           </a:p>
         </p:txBody>
@@ -42512,6 +42713,15 @@
 </file>
 
 <file path=customXml/item1.xml><?xml version="1.0" encoding="utf-8"?>
+<p:properties xmlns:p="http://schemas.microsoft.com/office/2006/metadata/properties" xmlns:xsi="http://www.w3.org/2001/XMLSchema-instance" xmlns:pc="http://schemas.microsoft.com/office/infopath/2007/PartnerControls">
+  <documentManagement>
+    <Status xmlns="71af3243-3dd4-4a8d-8c0d-dd76da1f02a5">Not started</Status>
+    <MediaServiceKeyPoints xmlns="71af3243-3dd4-4a8d-8c0d-dd76da1f02a5" xsi:nil="true"/>
+  </documentManagement>
+</p:properties>
+</file>
+
+<file path=customXml/item2.xml><?xml version="1.0" encoding="utf-8"?>
 <ct:contentTypeSchema xmlns:ct="http://schemas.microsoft.com/office/2006/metadata/contentType" xmlns:ma="http://schemas.microsoft.com/office/2006/metadata/properties/metaAttributes" ct:_="" ma:_="" ma:contentTypeName="Document" ma:contentTypeID="0x01010079F111ED35F8CC479449609E8A0923A6" ma:contentTypeVersion="12" ma:contentTypeDescription="Create a new document." ma:contentTypeScope="" ma:versionID="a8a52e8c320b9a064ae3583ae3861c92">
   <xsd:schema xmlns:xsd="http://www.w3.org/2001/XMLSchema" xmlns:xs="http://www.w3.org/2001/XMLSchema" xmlns:p="http://schemas.microsoft.com/office/2006/metadata/properties" xmlns:ns2="71af3243-3dd4-4a8d-8c0d-dd76da1f02a5" xmlns:ns3="16c05727-aa75-4e4a-9b5f-8a80a1165891" targetNamespace="http://schemas.microsoft.com/office/2006/metadata/properties" ma:root="true" ma:fieldsID="88020cb39231a0945110f9cd888b521a" ns2:_="" ns3:_="">
     <xsd:import namespace="71af3243-3dd4-4a8d-8c0d-dd76da1f02a5"/>
@@ -42732,15 +42942,6 @@
 </ct:contentTypeSchema>
 </file>
 
-<file path=customXml/item2.xml><?xml version="1.0" encoding="utf-8"?>
-<p:properties xmlns:p="http://schemas.microsoft.com/office/2006/metadata/properties" xmlns:xsi="http://www.w3.org/2001/XMLSchema-instance" xmlns:pc="http://schemas.microsoft.com/office/infopath/2007/PartnerControls">
-  <documentManagement>
-    <Status xmlns="71af3243-3dd4-4a8d-8c0d-dd76da1f02a5">Not started</Status>
-    <MediaServiceKeyPoints xmlns="71af3243-3dd4-4a8d-8c0d-dd76da1f02a5" xsi:nil="true"/>
-  </documentManagement>
-</p:properties>
-</file>
-
 <file path=customXml/item3.xml><?xml version="1.0" encoding="utf-8"?>
 <?mso-contentType ?>
 <FormTemplates xmlns="http://schemas.microsoft.com/sharepoint/v3/contenttype/forms">
@@ -42751,6 +42952,23 @@
 </file>
 
 <file path=customXml/itemProps1.xml><?xml version="1.0" encoding="utf-8"?>
+<ds:datastoreItem xmlns:ds="http://schemas.openxmlformats.org/officeDocument/2006/customXml" ds:itemID="{950072C5-DDE0-4258-BA7A-4D4B80DFA632}">
+  <ds:schemaRefs>
+    <ds:schemaRef ds:uri="http://purl.org/dc/terms/"/>
+    <ds:schemaRef ds:uri="http://schemas.microsoft.com/office/2006/documentManagement/types"/>
+    <ds:schemaRef ds:uri="http://schemas.openxmlformats.org/package/2006/metadata/core-properties"/>
+    <ds:schemaRef ds:uri="http://purl.org/dc/elements/1.1/"/>
+    <ds:schemaRef ds:uri="http://schemas.microsoft.com/office/infopath/2007/PartnerControls"/>
+    <ds:schemaRef ds:uri="16c05727-aa75-4e4a-9b5f-8a80a1165891"/>
+    <ds:schemaRef ds:uri="71af3243-3dd4-4a8d-8c0d-dd76da1f02a5"/>
+    <ds:schemaRef ds:uri="http://schemas.microsoft.com/office/2006/metadata/properties"/>
+    <ds:schemaRef ds:uri="http://www.w3.org/XML/1998/namespace"/>
+    <ds:schemaRef ds:uri="http://purl.org/dc/dcmitype/"/>
+  </ds:schemaRefs>
+</ds:datastoreItem>
+</file>
+
+<file path=customXml/itemProps2.xml><?xml version="1.0" encoding="utf-8"?>
 <ds:datastoreItem xmlns:ds="http://schemas.openxmlformats.org/officeDocument/2006/customXml" ds:itemID="{FD7FC771-7DFE-49DA-B577-71181BFBCB2E}">
   <ds:schemaRefs>
     <ds:schemaRef ds:uri="http://schemas.microsoft.com/office/2006/metadata/contentType"/>
@@ -42769,23 +42987,6 @@
 </ds:datastoreItem>
 </file>
 
-<file path=customXml/itemProps2.xml><?xml version="1.0" encoding="utf-8"?>
-<ds:datastoreItem xmlns:ds="http://schemas.openxmlformats.org/officeDocument/2006/customXml" ds:itemID="{950072C5-DDE0-4258-BA7A-4D4B80DFA632}">
-  <ds:schemaRefs>
-    <ds:schemaRef ds:uri="http://purl.org/dc/terms/"/>
-    <ds:schemaRef ds:uri="http://schemas.microsoft.com/office/2006/documentManagement/types"/>
-    <ds:schemaRef ds:uri="http://schemas.openxmlformats.org/package/2006/metadata/core-properties"/>
-    <ds:schemaRef ds:uri="http://purl.org/dc/elements/1.1/"/>
-    <ds:schemaRef ds:uri="http://schemas.microsoft.com/office/infopath/2007/PartnerControls"/>
-    <ds:schemaRef ds:uri="16c05727-aa75-4e4a-9b5f-8a80a1165891"/>
-    <ds:schemaRef ds:uri="71af3243-3dd4-4a8d-8c0d-dd76da1f02a5"/>
-    <ds:schemaRef ds:uri="http://schemas.microsoft.com/office/2006/metadata/properties"/>
-    <ds:schemaRef ds:uri="http://www.w3.org/XML/1998/namespace"/>
-    <ds:schemaRef ds:uri="http://purl.org/dc/dcmitype/"/>
-  </ds:schemaRefs>
-</ds:datastoreItem>
-</file>
-
 <file path=customXml/itemProps3.xml><?xml version="1.0" encoding="utf-8"?>
 <ds:datastoreItem xmlns:ds="http://schemas.openxmlformats.org/officeDocument/2006/customXml" ds:itemID="{7EE8C63A-4744-4DE4-BB49-0FF0B5375C60}">
   <ds:schemaRefs>

--- a/JPA-HIBERNATE.pptx
+++ b/JPA-HIBERNATE.pptx
@@ -6566,8 +6566,38 @@
         </p:blipFill>
         <p:spPr>
           <a:xfrm>
-            <a:off x="5168628" y="5614214"/>
+            <a:off x="6574630" y="5613440"/>
             <a:ext cx="5412582" cy="1114517"/>
+          </a:xfrm>
+          <a:prstGeom prst="rect">
+            <a:avLst/>
+          </a:prstGeom>
+        </p:spPr>
+      </p:pic>
+      <p:pic>
+        <p:nvPicPr>
+          <p:cNvPr id="8" name="Image 7">
+            <a:extLst>
+              <a:ext uri="{FF2B5EF4-FFF2-40B4-BE49-F238E27FC236}">
+                <a16:creationId xmlns:a16="http://schemas.microsoft.com/office/drawing/2014/main" id="{234E059A-625B-4ACE-9859-9E2E136A29CB}"/>
+              </a:ext>
+            </a:extLst>
+          </p:cNvPr>
+          <p:cNvPicPr>
+            <a:picLocks noChangeAspect="1"/>
+          </p:cNvPicPr>
+          <p:nvPr/>
+        </p:nvPicPr>
+        <p:blipFill>
+          <a:blip r:embed="rId6"/>
+          <a:stretch>
+            <a:fillRect/>
+          </a:stretch>
+        </p:blipFill>
+        <p:spPr>
+          <a:xfrm>
+            <a:off x="1664493" y="5694841"/>
+            <a:ext cx="4910137" cy="985027"/>
           </a:xfrm>
           <a:prstGeom prst="rect">
             <a:avLst/>
@@ -6931,6 +6961,33 @@
                                         </p:cTn>
                                         <p:tgtEl>
                                           <p:spTgt spid="11"/>
+                                        </p:tgtEl>
+                                        <p:attrNameLst>
+                                          <p:attrName>style.visibility</p:attrName>
+                                        </p:attrNameLst>
+                                      </p:cBhvr>
+                                      <p:to>
+                                        <p:strVal val="visible"/>
+                                      </p:to>
+                                    </p:set>
+                                  </p:childTnLst>
+                                </p:cTn>
+                              </p:par>
+                              <p:par>
+                                <p:cTn id="31" presetID="1" presetClass="entr" presetSubtype="0" fill="hold" nodeType="withEffect">
+                                  <p:stCondLst>
+                                    <p:cond delay="0"/>
+                                  </p:stCondLst>
+                                  <p:childTnLst>
+                                    <p:set>
+                                      <p:cBhvr>
+                                        <p:cTn id="32" dur="1" fill="hold">
+                                          <p:stCondLst>
+                                            <p:cond delay="0"/>
+                                          </p:stCondLst>
+                                        </p:cTn>
+                                        <p:tgtEl>
+                                          <p:spTgt spid="8"/>
                                         </p:tgtEl>
                                         <p:attrNameLst>
                                           <p:attrName>style.visibility</p:attrName>
@@ -42713,15 +42770,6 @@
 </file>
 
 <file path=customXml/item1.xml><?xml version="1.0" encoding="utf-8"?>
-<p:properties xmlns:p="http://schemas.microsoft.com/office/2006/metadata/properties" xmlns:xsi="http://www.w3.org/2001/XMLSchema-instance" xmlns:pc="http://schemas.microsoft.com/office/infopath/2007/PartnerControls">
-  <documentManagement>
-    <Status xmlns="71af3243-3dd4-4a8d-8c0d-dd76da1f02a5">Not started</Status>
-    <MediaServiceKeyPoints xmlns="71af3243-3dd4-4a8d-8c0d-dd76da1f02a5" xsi:nil="true"/>
-  </documentManagement>
-</p:properties>
-</file>
-
-<file path=customXml/item2.xml><?xml version="1.0" encoding="utf-8"?>
 <ct:contentTypeSchema xmlns:ct="http://schemas.microsoft.com/office/2006/metadata/contentType" xmlns:ma="http://schemas.microsoft.com/office/2006/metadata/properties/metaAttributes" ct:_="" ma:_="" ma:contentTypeName="Document" ma:contentTypeID="0x01010079F111ED35F8CC479449609E8A0923A6" ma:contentTypeVersion="12" ma:contentTypeDescription="Create a new document." ma:contentTypeScope="" ma:versionID="a8a52e8c320b9a064ae3583ae3861c92">
   <xsd:schema xmlns:xsd="http://www.w3.org/2001/XMLSchema" xmlns:xs="http://www.w3.org/2001/XMLSchema" xmlns:p="http://schemas.microsoft.com/office/2006/metadata/properties" xmlns:ns2="71af3243-3dd4-4a8d-8c0d-dd76da1f02a5" xmlns:ns3="16c05727-aa75-4e4a-9b5f-8a80a1165891" targetNamespace="http://schemas.microsoft.com/office/2006/metadata/properties" ma:root="true" ma:fieldsID="88020cb39231a0945110f9cd888b521a" ns2:_="" ns3:_="">
     <xsd:import namespace="71af3243-3dd4-4a8d-8c0d-dd76da1f02a5"/>
@@ -42942,6 +42990,15 @@
 </ct:contentTypeSchema>
 </file>
 
+<file path=customXml/item2.xml><?xml version="1.0" encoding="utf-8"?>
+<p:properties xmlns:p="http://schemas.microsoft.com/office/2006/metadata/properties" xmlns:xsi="http://www.w3.org/2001/XMLSchema-instance" xmlns:pc="http://schemas.microsoft.com/office/infopath/2007/PartnerControls">
+  <documentManagement>
+    <Status xmlns="71af3243-3dd4-4a8d-8c0d-dd76da1f02a5">Not started</Status>
+    <MediaServiceKeyPoints xmlns="71af3243-3dd4-4a8d-8c0d-dd76da1f02a5" xsi:nil="true"/>
+  </documentManagement>
+</p:properties>
+</file>
+
 <file path=customXml/item3.xml><?xml version="1.0" encoding="utf-8"?>
 <?mso-contentType ?>
 <FormTemplates xmlns="http://schemas.microsoft.com/sharepoint/v3/contenttype/forms">
@@ -42952,23 +43009,6 @@
 </file>
 
 <file path=customXml/itemProps1.xml><?xml version="1.0" encoding="utf-8"?>
-<ds:datastoreItem xmlns:ds="http://schemas.openxmlformats.org/officeDocument/2006/customXml" ds:itemID="{950072C5-DDE0-4258-BA7A-4D4B80DFA632}">
-  <ds:schemaRefs>
-    <ds:schemaRef ds:uri="http://purl.org/dc/terms/"/>
-    <ds:schemaRef ds:uri="http://schemas.microsoft.com/office/2006/documentManagement/types"/>
-    <ds:schemaRef ds:uri="http://schemas.openxmlformats.org/package/2006/metadata/core-properties"/>
-    <ds:schemaRef ds:uri="http://purl.org/dc/elements/1.1/"/>
-    <ds:schemaRef ds:uri="http://schemas.microsoft.com/office/infopath/2007/PartnerControls"/>
-    <ds:schemaRef ds:uri="16c05727-aa75-4e4a-9b5f-8a80a1165891"/>
-    <ds:schemaRef ds:uri="71af3243-3dd4-4a8d-8c0d-dd76da1f02a5"/>
-    <ds:schemaRef ds:uri="http://schemas.microsoft.com/office/2006/metadata/properties"/>
-    <ds:schemaRef ds:uri="http://www.w3.org/XML/1998/namespace"/>
-    <ds:schemaRef ds:uri="http://purl.org/dc/dcmitype/"/>
-  </ds:schemaRefs>
-</ds:datastoreItem>
-</file>
-
-<file path=customXml/itemProps2.xml><?xml version="1.0" encoding="utf-8"?>
 <ds:datastoreItem xmlns:ds="http://schemas.openxmlformats.org/officeDocument/2006/customXml" ds:itemID="{FD7FC771-7DFE-49DA-B577-71181BFBCB2E}">
   <ds:schemaRefs>
     <ds:schemaRef ds:uri="http://schemas.microsoft.com/office/2006/metadata/contentType"/>
@@ -42987,6 +43027,23 @@
 </ds:datastoreItem>
 </file>
 
+<file path=customXml/itemProps2.xml><?xml version="1.0" encoding="utf-8"?>
+<ds:datastoreItem xmlns:ds="http://schemas.openxmlformats.org/officeDocument/2006/customXml" ds:itemID="{950072C5-DDE0-4258-BA7A-4D4B80DFA632}">
+  <ds:schemaRefs>
+    <ds:schemaRef ds:uri="http://purl.org/dc/terms/"/>
+    <ds:schemaRef ds:uri="http://schemas.microsoft.com/office/2006/documentManagement/types"/>
+    <ds:schemaRef ds:uri="http://schemas.openxmlformats.org/package/2006/metadata/core-properties"/>
+    <ds:schemaRef ds:uri="http://purl.org/dc/elements/1.1/"/>
+    <ds:schemaRef ds:uri="http://schemas.microsoft.com/office/infopath/2007/PartnerControls"/>
+    <ds:schemaRef ds:uri="16c05727-aa75-4e4a-9b5f-8a80a1165891"/>
+    <ds:schemaRef ds:uri="71af3243-3dd4-4a8d-8c0d-dd76da1f02a5"/>
+    <ds:schemaRef ds:uri="http://schemas.microsoft.com/office/2006/metadata/properties"/>
+    <ds:schemaRef ds:uri="http://www.w3.org/XML/1998/namespace"/>
+    <ds:schemaRef ds:uri="http://purl.org/dc/dcmitype/"/>
+  </ds:schemaRefs>
+</ds:datastoreItem>
+</file>
+
 <file path=customXml/itemProps3.xml><?xml version="1.0" encoding="utf-8"?>
 <ds:datastoreItem xmlns:ds="http://schemas.openxmlformats.org/officeDocument/2006/customXml" ds:itemID="{7EE8C63A-4744-4DE4-BB49-0FF0B5375C60}">
   <ds:schemaRefs>

--- a/JPA-HIBERNATE.pptx
+++ b/JPA-HIBERNATE.pptx
@@ -297,7 +297,7 @@
             <a:pPr rtl="0"/>
             <a:fld id="{3C80F580-3B6A-44CD-9A1E-E890016126F8}" type="datetime1">
               <a:rPr lang="fr-FR" smtClean="0"/>
-              <a:t>21/06/2021</a:t>
+              <a:t>28/06/2021</a:t>
             </a:fld>
             <a:endParaRPr lang="fr-FR"/>
           </a:p>
@@ -467,7 +467,7 @@
             <a:pPr rtl="0"/>
             <a:fld id="{7DF8ED89-FBF4-48E3-B6C6-C071DA98F802}" type="datetime1">
               <a:rPr lang="fr-FR" noProof="1" dirty="0" smtClean="0"/>
-              <a:t>21/06/2021</a:t>
+              <a:t>28/06/2021</a:t>
             </a:fld>
             <a:endParaRPr lang="fr-FR" noProof="1"/>
           </a:p>
@@ -4452,7 +4452,7 @@
             <a:pPr rtl="0"/>
             <a:fld id="{7DF3CA4B-903E-431D-AF93-2AD02E04DE8A}" type="datetime1">
               <a:rPr lang="fr-FR" noProof="0" smtClean="0"/>
-              <a:t>21/06/2021</a:t>
+              <a:t>28/06/2021</a:t>
             </a:fld>
             <a:endParaRPr lang="fr-FR" noProof="0"/>
           </a:p>
@@ -5078,7 +5078,7 @@
             <a:pPr rtl="0"/>
             <a:fld id="{802CD4F2-526B-4131-B91B-856C46007FC5}" type="datetime1">
               <a:rPr lang="fr-FR" noProof="0" smtClean="0"/>
-              <a:t>21/06/2021</a:t>
+              <a:t>28/06/2021</a:t>
             </a:fld>
             <a:endParaRPr lang="fr-FR" noProof="0"/>
           </a:p>
@@ -38071,7 +38071,15 @@
             </a:pPr>
             <a:r>
               <a:rPr lang="fr-FR" dirty="0"/>
-              <a:t>Dans le cas d’une relation « 1 – n » ou « unidirectionnelle », il faut obligatoirement définir le mapping inverse</a:t>
+              <a:t>Dans le cas d’une relation « 1 – n » ou « unidirectionnelle », il faut obligatoirement définir le mapping inverse, sinon il se comportera comme un </a:t>
+            </a:r>
+            <a:r>
+              <a:rPr lang="fr-FR" dirty="0" err="1"/>
+              <a:t>ManyToMany</a:t>
+            </a:r>
+            <a:r>
+              <a:rPr lang="fr-FR" dirty="0"/>
+              <a:t> (cas suivant)</a:t>
             </a:r>
           </a:p>
         </p:txBody>
@@ -42770,6 +42778,15 @@
 </file>
 
 <file path=customXml/item1.xml><?xml version="1.0" encoding="utf-8"?>
+<p:properties xmlns:p="http://schemas.microsoft.com/office/2006/metadata/properties" xmlns:xsi="http://www.w3.org/2001/XMLSchema-instance" xmlns:pc="http://schemas.microsoft.com/office/infopath/2007/PartnerControls">
+  <documentManagement>
+    <Status xmlns="71af3243-3dd4-4a8d-8c0d-dd76da1f02a5">Not started</Status>
+    <MediaServiceKeyPoints xmlns="71af3243-3dd4-4a8d-8c0d-dd76da1f02a5" xsi:nil="true"/>
+  </documentManagement>
+</p:properties>
+</file>
+
+<file path=customXml/item2.xml><?xml version="1.0" encoding="utf-8"?>
 <ct:contentTypeSchema xmlns:ct="http://schemas.microsoft.com/office/2006/metadata/contentType" xmlns:ma="http://schemas.microsoft.com/office/2006/metadata/properties/metaAttributes" ct:_="" ma:_="" ma:contentTypeName="Document" ma:contentTypeID="0x01010079F111ED35F8CC479449609E8A0923A6" ma:contentTypeVersion="12" ma:contentTypeDescription="Create a new document." ma:contentTypeScope="" ma:versionID="a8a52e8c320b9a064ae3583ae3861c92">
   <xsd:schema xmlns:xsd="http://www.w3.org/2001/XMLSchema" xmlns:xs="http://www.w3.org/2001/XMLSchema" xmlns:p="http://schemas.microsoft.com/office/2006/metadata/properties" xmlns:ns2="71af3243-3dd4-4a8d-8c0d-dd76da1f02a5" xmlns:ns3="16c05727-aa75-4e4a-9b5f-8a80a1165891" targetNamespace="http://schemas.microsoft.com/office/2006/metadata/properties" ma:root="true" ma:fieldsID="88020cb39231a0945110f9cd888b521a" ns2:_="" ns3:_="">
     <xsd:import namespace="71af3243-3dd4-4a8d-8c0d-dd76da1f02a5"/>
@@ -42990,15 +43007,6 @@
 </ct:contentTypeSchema>
 </file>
 
-<file path=customXml/item2.xml><?xml version="1.0" encoding="utf-8"?>
-<p:properties xmlns:p="http://schemas.microsoft.com/office/2006/metadata/properties" xmlns:xsi="http://www.w3.org/2001/XMLSchema-instance" xmlns:pc="http://schemas.microsoft.com/office/infopath/2007/PartnerControls">
-  <documentManagement>
-    <Status xmlns="71af3243-3dd4-4a8d-8c0d-dd76da1f02a5">Not started</Status>
-    <MediaServiceKeyPoints xmlns="71af3243-3dd4-4a8d-8c0d-dd76da1f02a5" xsi:nil="true"/>
-  </documentManagement>
-</p:properties>
-</file>
-
 <file path=customXml/item3.xml><?xml version="1.0" encoding="utf-8"?>
 <?mso-contentType ?>
 <FormTemplates xmlns="http://schemas.microsoft.com/sharepoint/v3/contenttype/forms">
@@ -43009,6 +43017,23 @@
 </file>
 
 <file path=customXml/itemProps1.xml><?xml version="1.0" encoding="utf-8"?>
+<ds:datastoreItem xmlns:ds="http://schemas.openxmlformats.org/officeDocument/2006/customXml" ds:itemID="{950072C5-DDE0-4258-BA7A-4D4B80DFA632}">
+  <ds:schemaRefs>
+    <ds:schemaRef ds:uri="http://purl.org/dc/terms/"/>
+    <ds:schemaRef ds:uri="http://schemas.microsoft.com/office/2006/documentManagement/types"/>
+    <ds:schemaRef ds:uri="http://schemas.openxmlformats.org/package/2006/metadata/core-properties"/>
+    <ds:schemaRef ds:uri="http://purl.org/dc/elements/1.1/"/>
+    <ds:schemaRef ds:uri="http://schemas.microsoft.com/office/infopath/2007/PartnerControls"/>
+    <ds:schemaRef ds:uri="16c05727-aa75-4e4a-9b5f-8a80a1165891"/>
+    <ds:schemaRef ds:uri="71af3243-3dd4-4a8d-8c0d-dd76da1f02a5"/>
+    <ds:schemaRef ds:uri="http://schemas.microsoft.com/office/2006/metadata/properties"/>
+    <ds:schemaRef ds:uri="http://www.w3.org/XML/1998/namespace"/>
+    <ds:schemaRef ds:uri="http://purl.org/dc/dcmitype/"/>
+  </ds:schemaRefs>
+</ds:datastoreItem>
+</file>
+
+<file path=customXml/itemProps2.xml><?xml version="1.0" encoding="utf-8"?>
 <ds:datastoreItem xmlns:ds="http://schemas.openxmlformats.org/officeDocument/2006/customXml" ds:itemID="{FD7FC771-7DFE-49DA-B577-71181BFBCB2E}">
   <ds:schemaRefs>
     <ds:schemaRef ds:uri="http://schemas.microsoft.com/office/2006/metadata/contentType"/>
@@ -43027,23 +43052,6 @@
 </ds:datastoreItem>
 </file>
 
-<file path=customXml/itemProps2.xml><?xml version="1.0" encoding="utf-8"?>
-<ds:datastoreItem xmlns:ds="http://schemas.openxmlformats.org/officeDocument/2006/customXml" ds:itemID="{950072C5-DDE0-4258-BA7A-4D4B80DFA632}">
-  <ds:schemaRefs>
-    <ds:schemaRef ds:uri="http://purl.org/dc/terms/"/>
-    <ds:schemaRef ds:uri="http://schemas.microsoft.com/office/2006/documentManagement/types"/>
-    <ds:schemaRef ds:uri="http://schemas.openxmlformats.org/package/2006/metadata/core-properties"/>
-    <ds:schemaRef ds:uri="http://purl.org/dc/elements/1.1/"/>
-    <ds:schemaRef ds:uri="http://schemas.microsoft.com/office/infopath/2007/PartnerControls"/>
-    <ds:schemaRef ds:uri="16c05727-aa75-4e4a-9b5f-8a80a1165891"/>
-    <ds:schemaRef ds:uri="71af3243-3dd4-4a8d-8c0d-dd76da1f02a5"/>
-    <ds:schemaRef ds:uri="http://schemas.microsoft.com/office/2006/metadata/properties"/>
-    <ds:schemaRef ds:uri="http://www.w3.org/XML/1998/namespace"/>
-    <ds:schemaRef ds:uri="http://purl.org/dc/dcmitype/"/>
-  </ds:schemaRefs>
-</ds:datastoreItem>
-</file>
-
 <file path=customXml/itemProps3.xml><?xml version="1.0" encoding="utf-8"?>
 <ds:datastoreItem xmlns:ds="http://schemas.openxmlformats.org/officeDocument/2006/customXml" ds:itemID="{7EE8C63A-4744-4DE4-BB49-0FF0B5375C60}">
   <ds:schemaRefs>

--- a/JPA-HIBERNATE.pptx
+++ b/JPA-HIBERNATE.pptx
@@ -297,7 +297,7 @@
             <a:pPr rtl="0"/>
             <a:fld id="{3C80F580-3B6A-44CD-9A1E-E890016126F8}" type="datetime1">
               <a:rPr lang="fr-FR" smtClean="0"/>
-              <a:t>28/06/2021</a:t>
+              <a:t>16/03/2022</a:t>
             </a:fld>
             <a:endParaRPr lang="fr-FR"/>
           </a:p>
@@ -467,7 +467,7 @@
             <a:pPr rtl="0"/>
             <a:fld id="{7DF8ED89-FBF4-48E3-B6C6-C071DA98F802}" type="datetime1">
               <a:rPr lang="fr-FR" noProof="1" dirty="0" smtClean="0"/>
-              <a:t>28/06/2021</a:t>
+              <a:t>16/03/2022</a:t>
             </a:fld>
             <a:endParaRPr lang="fr-FR" noProof="1"/>
           </a:p>
@@ -4452,7 +4452,7 @@
             <a:pPr rtl="0"/>
             <a:fld id="{7DF3CA4B-903E-431D-AF93-2AD02E04DE8A}" type="datetime1">
               <a:rPr lang="fr-FR" noProof="0" smtClean="0"/>
-              <a:t>28/06/2021</a:t>
+              <a:t>16/03/2022</a:t>
             </a:fld>
             <a:endParaRPr lang="fr-FR" noProof="0"/>
           </a:p>
@@ -5078,7 +5078,7 @@
             <a:pPr rtl="0"/>
             <a:fld id="{802CD4F2-526B-4131-B91B-856C46007FC5}" type="datetime1">
               <a:rPr lang="fr-FR" noProof="0" smtClean="0"/>
-              <a:t>28/06/2021</a:t>
+              <a:t>16/03/2022</a:t>
             </a:fld>
             <a:endParaRPr lang="fr-FR" noProof="0"/>
           </a:p>
@@ -12531,8 +12531,8 @@
         </p:nvSpPr>
         <p:spPr bwMode="auto">
           <a:xfrm>
-            <a:off x="615042" y="1549164"/>
-            <a:ext cx="3287885" cy="383714"/>
+            <a:off x="512324" y="1587133"/>
+            <a:ext cx="3390603" cy="307777"/>
           </a:xfrm>
           <a:prstGeom prst="rect">
             <a:avLst/>
@@ -12592,7 +12592,7 @@
               <a:tabLst/>
             </a:pPr>
             <a:r>
-              <a:rPr kumimoji="0" lang="fr-FR" altLang="fr-FR" b="0" i="0" u="none" strike="noStrike" cap="none" normalizeH="0" baseline="0" dirty="0" err="1">
+              <a:rPr kumimoji="0" lang="fr-FR" altLang="fr-FR" sz="1400" b="0" i="0" u="none" strike="noStrike" cap="none" normalizeH="0" baseline="0" dirty="0" err="1">
                 <a:ln>
                   <a:noFill/>
                 </a:ln>
@@ -12605,7 +12605,7 @@
               <a:t>spring.jpa.open</a:t>
             </a:r>
             <a:r>
-              <a:rPr kumimoji="0" lang="fr-FR" altLang="fr-FR" b="0" i="0" u="none" strike="noStrike" cap="none" normalizeH="0" baseline="0" dirty="0">
+              <a:rPr kumimoji="0" lang="fr-FR" altLang="fr-FR" sz="1400" b="0" i="0" u="none" strike="noStrike" cap="none" normalizeH="0" baseline="0" dirty="0">
                 <a:ln>
                   <a:noFill/>
                 </a:ln>
@@ -12618,7 +12618,7 @@
               <a:t>-in-</a:t>
             </a:r>
             <a:r>
-              <a:rPr kumimoji="0" lang="fr-FR" altLang="fr-FR" b="0" i="0" u="none" strike="noStrike" cap="none" normalizeH="0" baseline="0" dirty="0" err="1">
+              <a:rPr kumimoji="0" lang="fr-FR" altLang="fr-FR" sz="1400" b="0" i="0" u="none" strike="noStrike" cap="none" normalizeH="0" baseline="0" dirty="0" err="1">
                 <a:ln>
                   <a:noFill/>
                 </a:ln>
@@ -12631,7 +12631,7 @@
               <a:t>view</a:t>
             </a:r>
             <a:r>
-              <a:rPr kumimoji="0" lang="fr-FR" altLang="fr-FR" b="0" i="0" u="none" strike="noStrike" cap="none" normalizeH="0" baseline="0" dirty="0">
+              <a:rPr kumimoji="0" lang="fr-FR" altLang="fr-FR" sz="1400" b="0" i="0" u="none" strike="noStrike" cap="none" normalizeH="0" baseline="0" dirty="0">
                 <a:ln>
                   <a:noFill/>
                 </a:ln>
@@ -12644,7 +12644,7 @@
               <a:t>=</a:t>
             </a:r>
             <a:r>
-              <a:rPr kumimoji="0" lang="fr-FR" altLang="fr-FR" b="0" i="0" u="none" strike="noStrike" cap="none" normalizeH="0" baseline="0" dirty="0">
+              <a:rPr kumimoji="0" lang="fr-FR" altLang="fr-FR" sz="1400" b="0" i="0" u="none" strike="noStrike" cap="none" normalizeH="0" baseline="0" dirty="0">
                 <a:ln>
                   <a:noFill/>
                 </a:ln>
@@ -12656,7 +12656,7 @@
               </a:rPr>
               <a:t>false</a:t>
             </a:r>
-            <a:endParaRPr kumimoji="0" lang="fr-FR" altLang="fr-FR" b="0" i="0" u="none" strike="noStrike" cap="none" normalizeH="0" baseline="0" dirty="0">
+            <a:endParaRPr kumimoji="0" lang="fr-FR" altLang="fr-FR" sz="1400" b="0" i="0" u="none" strike="noStrike" cap="none" normalizeH="0" baseline="0" dirty="0">
               <a:ln>
                 <a:noFill/>
               </a:ln>
@@ -14197,7 +14197,59 @@
         </p:nvSpPr>
         <p:spPr>
           <a:xfrm>
-            <a:off x="521207" y="5740421"/>
+            <a:off x="521207" y="6097617"/>
+            <a:ext cx="10866640" cy="760383"/>
+          </a:xfrm>
+          <a:prstGeom prst="rect">
+            <a:avLst/>
+          </a:prstGeom>
+          <a:solidFill>
+            <a:schemeClr val="accent6">
+              <a:lumMod val="60000"/>
+              <a:lumOff val="40000"/>
+            </a:schemeClr>
+          </a:solidFill>
+        </p:spPr>
+        <p:style>
+          <a:lnRef idx="2">
+            <a:schemeClr val="accent1">
+              <a:shade val="50000"/>
+            </a:schemeClr>
+          </a:lnRef>
+          <a:fillRef idx="1">
+            <a:schemeClr val="accent1"/>
+          </a:fillRef>
+          <a:effectRef idx="0">
+            <a:schemeClr val="accent1"/>
+          </a:effectRef>
+          <a:fontRef idx="minor">
+            <a:schemeClr val="lt1"/>
+          </a:fontRef>
+        </p:style>
+        <p:txBody>
+          <a:bodyPr rtlCol="0" anchor="ctr"/>
+          <a:lstStyle/>
+          <a:p>
+            <a:pPr algn="ctr"/>
+            <a:endParaRPr lang="fr-FR"/>
+          </a:p>
+        </p:txBody>
+      </p:sp>
+      <p:sp>
+        <p:nvSpPr>
+          <p:cNvPr id="9" name="Rectangle 8">
+            <a:extLst>
+              <a:ext uri="{FF2B5EF4-FFF2-40B4-BE49-F238E27FC236}">
+                <a16:creationId xmlns:a16="http://schemas.microsoft.com/office/drawing/2014/main" id="{F3B7240A-10E8-4D88-B6BF-589ED00A1F23}"/>
+              </a:ext>
+            </a:extLst>
+          </p:cNvPr>
+          <p:cNvSpPr/>
+          <p:nvPr/>
+        </p:nvSpPr>
+        <p:spPr>
+          <a:xfrm>
+            <a:off x="521207" y="4099213"/>
             <a:ext cx="10866640" cy="669523"/>
           </a:xfrm>
           <a:prstGeom prst="rect">
@@ -14237,58 +14289,6 @@
       </p:sp>
       <p:sp>
         <p:nvSpPr>
-          <p:cNvPr id="9" name="Rectangle 8">
-            <a:extLst>
-              <a:ext uri="{FF2B5EF4-FFF2-40B4-BE49-F238E27FC236}">
-                <a16:creationId xmlns:a16="http://schemas.microsoft.com/office/drawing/2014/main" id="{F3B7240A-10E8-4D88-B6BF-589ED00A1F23}"/>
-              </a:ext>
-            </a:extLst>
-          </p:cNvPr>
-          <p:cNvSpPr/>
-          <p:nvPr/>
-        </p:nvSpPr>
-        <p:spPr>
-          <a:xfrm>
-            <a:off x="521207" y="3934903"/>
-            <a:ext cx="10866640" cy="669523"/>
-          </a:xfrm>
-          <a:prstGeom prst="rect">
-            <a:avLst/>
-          </a:prstGeom>
-          <a:solidFill>
-            <a:schemeClr val="accent6">
-              <a:lumMod val="60000"/>
-              <a:lumOff val="40000"/>
-            </a:schemeClr>
-          </a:solidFill>
-        </p:spPr>
-        <p:style>
-          <a:lnRef idx="2">
-            <a:schemeClr val="accent1">
-              <a:shade val="50000"/>
-            </a:schemeClr>
-          </a:lnRef>
-          <a:fillRef idx="1">
-            <a:schemeClr val="accent1"/>
-          </a:fillRef>
-          <a:effectRef idx="0">
-            <a:schemeClr val="accent1"/>
-          </a:effectRef>
-          <a:fontRef idx="minor">
-            <a:schemeClr val="lt1"/>
-          </a:fontRef>
-        </p:style>
-        <p:txBody>
-          <a:bodyPr rtlCol="0" anchor="ctr"/>
-          <a:lstStyle/>
-          <a:p>
-            <a:pPr algn="ctr"/>
-            <a:endParaRPr lang="fr-FR"/>
-          </a:p>
-        </p:txBody>
-      </p:sp>
-      <p:sp>
-        <p:nvSpPr>
           <p:cNvPr id="4" name="Titre 3"/>
           <p:cNvSpPr>
             <a:spLocks noGrp="1"/>
@@ -14655,7 +14655,7 @@
               <a:t>FetchMode</a:t>
             </a:r>
             <a:r>
-              <a:rPr kumimoji="0" lang="fr-FR" altLang="fr-FR" sz="1800" b="0" i="0" u="none" strike="noStrike" cap="none" normalizeH="0" baseline="0">
+              <a:rPr kumimoji="0" lang="fr-FR" altLang="fr-FR" sz="1800" b="0" i="0" u="none" strike="noStrike" cap="none" normalizeH="0" baseline="0" dirty="0">
                 <a:ln>
                   <a:noFill/>
                 </a:ln>
@@ -14668,7 +14668,7 @@
               <a:t>.</a:t>
             </a:r>
             <a:r>
-              <a:rPr kumimoji="0" lang="fr-FR" altLang="fr-FR" sz="1800" b="0" i="1" u="none" strike="noStrike" cap="none" normalizeH="0" baseline="0">
+              <a:rPr kumimoji="0" lang="fr-FR" altLang="fr-FR" sz="1800" b="0" i="1" u="none" strike="noStrike" cap="none" normalizeH="0" baseline="0" dirty="0">
                 <a:ln>
                   <a:noFill/>
                 </a:ln>
@@ -14681,7 +14681,7 @@
               <a:t>SUBSELECT / JOIN</a:t>
             </a:r>
             <a:r>
-              <a:rPr kumimoji="0" lang="fr-FR" altLang="fr-FR" sz="1800" b="0" i="0" u="none" strike="noStrike" cap="none" normalizeH="0" baseline="0">
+              <a:rPr kumimoji="0" lang="fr-FR" altLang="fr-FR" sz="1800" b="0" i="0" u="none" strike="noStrike" cap="none" normalizeH="0" baseline="0" dirty="0">
                 <a:ln>
                   <a:noFill/>
                 </a:ln>
@@ -15776,7 +15776,7 @@
         </p:spPr>
         <p:txBody>
           <a:bodyPr rtlCol="0">
-            <a:normAutofit/>
+            <a:normAutofit fontScale="90000"/>
           </a:bodyPr>
           <a:lstStyle/>
           <a:p>
@@ -16815,7 +16815,7 @@
         </p:nvSpPr>
         <p:spPr>
           <a:xfrm>
-            <a:off x="2706029" y="1766359"/>
+            <a:off x="2506646" y="1745802"/>
             <a:ext cx="1910576" cy="369332"/>
           </a:xfrm>
           <a:prstGeom prst="rect">
@@ -30816,7 +30816,7 @@
         </p:nvGraphicFramePr>
         <p:xfrm>
           <a:off x="687421" y="1284051"/>
-          <a:ext cx="10551267" cy="3703416"/>
+          <a:ext cx="10551267" cy="3916776"/>
         </p:xfrm>
         <a:graphic>
           <a:graphicData uri="http://schemas.openxmlformats.org/drawingml/2006/table">
@@ -31506,7 +31506,7 @@
         </p:nvGraphicFramePr>
         <p:xfrm>
           <a:off x="687421" y="1284051"/>
-          <a:ext cx="10551267" cy="5284790"/>
+          <a:ext cx="10551267" cy="5498150"/>
         </p:xfrm>
         <a:graphic>
           <a:graphicData uri="http://schemas.openxmlformats.org/drawingml/2006/table">
@@ -35406,8 +35406,8 @@
         </p:nvSpPr>
         <p:spPr bwMode="auto">
           <a:xfrm>
-            <a:off x="1159727" y="1651147"/>
-            <a:ext cx="2899318" cy="1754326"/>
+            <a:off x="435128" y="1651147"/>
+            <a:ext cx="4086422" cy="1754326"/>
           </a:xfrm>
           <a:prstGeom prst="rect">
             <a:avLst/>
@@ -35905,8 +35905,8 @@
         </p:nvSpPr>
         <p:spPr bwMode="auto">
           <a:xfrm>
-            <a:off x="7145850" y="1923575"/>
-            <a:ext cx="3278458" cy="1169551"/>
+            <a:off x="6533229" y="1923575"/>
+            <a:ext cx="4710737" cy="1169551"/>
           </a:xfrm>
           <a:prstGeom prst="rect">
             <a:avLst/>
@@ -36472,8 +36472,8 @@
         </p:nvSpPr>
         <p:spPr bwMode="auto">
           <a:xfrm>
-            <a:off x="7145850" y="3582167"/>
-            <a:ext cx="3278458" cy="1631216"/>
+            <a:off x="6533229" y="3582167"/>
+            <a:ext cx="4710737" cy="1631216"/>
           </a:xfrm>
           <a:prstGeom prst="rect">
             <a:avLst/>
@@ -37164,8 +37164,8 @@
         </p:nvSpPr>
         <p:spPr bwMode="auto">
           <a:xfrm>
-            <a:off x="1159727" y="3679184"/>
-            <a:ext cx="2899318" cy="1477328"/>
+            <a:off x="435128" y="3679184"/>
+            <a:ext cx="4086422" cy="1477328"/>
           </a:xfrm>
           <a:prstGeom prst="rect">
             <a:avLst/>
@@ -38100,8 +38100,8 @@
         </p:nvSpPr>
         <p:spPr bwMode="auto">
           <a:xfrm>
-            <a:off x="1300976" y="2730473"/>
-            <a:ext cx="3241288" cy="1754326"/>
+            <a:off x="521207" y="2730473"/>
+            <a:ext cx="4021057" cy="1754326"/>
           </a:xfrm>
           <a:prstGeom prst="rect">
             <a:avLst/>
@@ -38462,19 +38462,6 @@
                 <a:latin typeface="Fira Code"/>
               </a:rPr>
             </a:br>
-            <a:r>
-              <a:rPr kumimoji="0" lang="fr-FR" altLang="fr-FR" sz="1000" b="0" i="0" u="none" strike="noStrike" cap="none" normalizeH="0" baseline="0" dirty="0">
-                <a:ln>
-                  <a:noFill/>
-                </a:ln>
-                <a:solidFill>
-                  <a:srgbClr val="080808"/>
-                </a:solidFill>
-                <a:effectLst/>
-                <a:latin typeface="Fira Code"/>
-              </a:rPr>
-              <a:t> </a:t>
-            </a:r>
             <a:r>
               <a:rPr kumimoji="0" lang="fr-FR" altLang="fr-FR" sz="1000" b="0" i="0" u="none" strike="noStrike" cap="none" normalizeH="0" baseline="0" dirty="0" err="1">
                 <a:ln>
@@ -38669,8 +38656,8 @@
         </p:nvSpPr>
         <p:spPr bwMode="auto">
           <a:xfrm>
-            <a:off x="7108678" y="2647471"/>
-            <a:ext cx="3873190" cy="1785104"/>
+            <a:off x="7018808" y="2647471"/>
+            <a:ext cx="4651985" cy="1785104"/>
           </a:xfrm>
           <a:prstGeom prst="rect">
             <a:avLst/>
@@ -39740,8 +39727,8 @@
         </p:nvSpPr>
         <p:spPr bwMode="auto">
           <a:xfrm>
-            <a:off x="521206" y="1496697"/>
-            <a:ext cx="5382323" cy="3447098"/>
+            <a:off x="290086" y="1558253"/>
+            <a:ext cx="5805914" cy="3323987"/>
           </a:xfrm>
           <a:prstGeom prst="rect">
             <a:avLst/>
@@ -39801,7 +39788,7 @@
               <a:tabLst/>
             </a:pPr>
             <a:r>
-              <a:rPr kumimoji="0" lang="fr-FR" altLang="fr-FR" sz="1000" b="0" i="0" u="none" strike="noStrike" cap="none" normalizeH="0" baseline="0" dirty="0">
+              <a:rPr kumimoji="0" lang="fr-FR" altLang="fr-FR" sz="900" b="0" i="0" u="none" strike="noStrike" cap="none" normalizeH="0" baseline="0" dirty="0">
                 <a:ln>
                   <a:noFill/>
                 </a:ln>
@@ -39814,7 +39801,7 @@
               <a:t>@Table</a:t>
             </a:r>
             <a:r>
-              <a:rPr kumimoji="0" lang="fr-FR" altLang="fr-FR" sz="1000" b="0" i="0" u="none" strike="noStrike" cap="none" normalizeH="0" baseline="0" dirty="0">
+              <a:rPr kumimoji="0" lang="fr-FR" altLang="fr-FR" sz="900" b="0" i="0" u="none" strike="noStrike" cap="none" normalizeH="0" baseline="0" dirty="0">
                 <a:ln>
                   <a:noFill/>
                 </a:ln>
@@ -39827,7 +39814,7 @@
               <a:t>(name = </a:t>
             </a:r>
             <a:r>
-              <a:rPr kumimoji="0" lang="fr-FR" altLang="fr-FR" sz="1000" b="0" i="0" u="none" strike="noStrike" cap="none" normalizeH="0" baseline="0" dirty="0">
+              <a:rPr kumimoji="0" lang="fr-FR" altLang="fr-FR" sz="900" b="0" i="0" u="none" strike="noStrike" cap="none" normalizeH="0" baseline="0" dirty="0">
                 <a:ln>
                   <a:noFill/>
                 </a:ln>
@@ -39840,7 +39827,7 @@
               <a:t>"SCHOOL"</a:t>
             </a:r>
             <a:r>
-              <a:rPr kumimoji="0" lang="fr-FR" altLang="fr-FR" sz="1000" b="0" i="0" u="none" strike="noStrike" cap="none" normalizeH="0" baseline="0" dirty="0">
+              <a:rPr kumimoji="0" lang="fr-FR" altLang="fr-FR" sz="900" b="0" i="0" u="none" strike="noStrike" cap="none" normalizeH="0" baseline="0" dirty="0">
                 <a:ln>
                   <a:noFill/>
                 </a:ln>
@@ -39853,7 +39840,7 @@
               <a:t>,</a:t>
             </a:r>
             <a:br>
-              <a:rPr kumimoji="0" lang="fr-FR" altLang="fr-FR" sz="1000" b="0" i="0" u="none" strike="noStrike" cap="none" normalizeH="0" baseline="0" dirty="0">
+              <a:rPr kumimoji="0" lang="fr-FR" altLang="fr-FR" sz="900" b="0" i="0" u="none" strike="noStrike" cap="none" normalizeH="0" baseline="0" dirty="0">
                 <a:ln>
                   <a:noFill/>
                 </a:ln>
@@ -39865,7 +39852,7 @@
               </a:rPr>
             </a:br>
             <a:r>
-              <a:rPr kumimoji="0" lang="fr-FR" altLang="fr-FR" sz="1000" b="0" i="0" u="none" strike="noStrike" cap="none" normalizeH="0" baseline="0" dirty="0">
+              <a:rPr kumimoji="0" lang="fr-FR" altLang="fr-FR" sz="900" b="0" i="0" u="none" strike="noStrike" cap="none" normalizeH="0" baseline="0" dirty="0">
                 <a:ln>
                   <a:noFill/>
                 </a:ln>
@@ -39878,7 +39865,7 @@
               <a:t>        indexes = </a:t>
             </a:r>
             <a:r>
-              <a:rPr kumimoji="0" lang="fr-FR" altLang="fr-FR" sz="1000" b="0" i="0" u="none" strike="noStrike" cap="none" normalizeH="0" baseline="0" dirty="0">
+              <a:rPr kumimoji="0" lang="fr-FR" altLang="fr-FR" sz="900" b="0" i="0" u="none" strike="noStrike" cap="none" normalizeH="0" baseline="0" dirty="0">
                 <a:ln>
                   <a:noFill/>
                 </a:ln>
@@ -39891,7 +39878,7 @@
               <a:t>@Index</a:t>
             </a:r>
             <a:r>
-              <a:rPr kumimoji="0" lang="fr-FR" altLang="fr-FR" sz="1000" b="0" i="0" u="none" strike="noStrike" cap="none" normalizeH="0" baseline="0" dirty="0">
+              <a:rPr kumimoji="0" lang="fr-FR" altLang="fr-FR" sz="900" b="0" i="0" u="none" strike="noStrike" cap="none" normalizeH="0" baseline="0" dirty="0">
                 <a:ln>
                   <a:noFill/>
                 </a:ln>
@@ -39904,7 +39891,7 @@
               <a:t>(name = </a:t>
             </a:r>
             <a:r>
-              <a:rPr kumimoji="0" lang="fr-FR" altLang="fr-FR" sz="1000" b="0" i="0" u="none" strike="noStrike" cap="none" normalizeH="0" baseline="0" dirty="0">
+              <a:rPr kumimoji="0" lang="fr-FR" altLang="fr-FR" sz="900" b="0" i="0" u="none" strike="noStrike" cap="none" normalizeH="0" baseline="0" dirty="0">
                 <a:ln>
                   <a:noFill/>
                 </a:ln>
@@ -39917,7 +39904,7 @@
               <a:t>"</a:t>
             </a:r>
             <a:r>
-              <a:rPr kumimoji="0" lang="fr-FR" altLang="fr-FR" sz="1000" b="0" i="0" u="none" strike="noStrike" cap="none" normalizeH="0" baseline="0" dirty="0" err="1">
+              <a:rPr kumimoji="0" lang="fr-FR" altLang="fr-FR" sz="900" b="0" i="0" u="none" strike="noStrike" cap="none" normalizeH="0" baseline="0" dirty="0" err="1">
                 <a:ln>
                   <a:noFill/>
                 </a:ln>
@@ -39930,7 +39917,7 @@
               <a:t>director_school_index</a:t>
             </a:r>
             <a:r>
-              <a:rPr kumimoji="0" lang="fr-FR" altLang="fr-FR" sz="1000" b="0" i="0" u="none" strike="noStrike" cap="none" normalizeH="0" baseline="0" dirty="0">
+              <a:rPr kumimoji="0" lang="fr-FR" altLang="fr-FR" sz="900" b="0" i="0" u="none" strike="noStrike" cap="none" normalizeH="0" baseline="0" dirty="0">
                 <a:ln>
                   <a:noFill/>
                 </a:ln>
@@ -39943,7 +39930,7 @@
               <a:t>"</a:t>
             </a:r>
             <a:r>
-              <a:rPr kumimoji="0" lang="fr-FR" altLang="fr-FR" sz="1000" b="0" i="0" u="none" strike="noStrike" cap="none" normalizeH="0" baseline="0" dirty="0">
+              <a:rPr kumimoji="0" lang="fr-FR" altLang="fr-FR" sz="900" b="0" i="0" u="none" strike="noStrike" cap="none" normalizeH="0" baseline="0" dirty="0">
                 <a:ln>
                   <a:noFill/>
                 </a:ln>
@@ -39956,7 +39943,7 @@
               <a:t>, </a:t>
             </a:r>
             <a:r>
-              <a:rPr kumimoji="0" lang="fr-FR" altLang="fr-FR" sz="1000" b="0" i="0" u="none" strike="noStrike" cap="none" normalizeH="0" baseline="0" dirty="0" err="1">
+              <a:rPr kumimoji="0" lang="fr-FR" altLang="fr-FR" sz="900" b="0" i="0" u="none" strike="noStrike" cap="none" normalizeH="0" baseline="0" dirty="0" err="1">
                 <a:ln>
                   <a:noFill/>
                 </a:ln>
@@ -39969,7 +39956,7 @@
               <a:t>columnList</a:t>
             </a:r>
             <a:r>
-              <a:rPr kumimoji="0" lang="fr-FR" altLang="fr-FR" sz="1000" b="0" i="0" u="none" strike="noStrike" cap="none" normalizeH="0" baseline="0" dirty="0">
+              <a:rPr kumimoji="0" lang="fr-FR" altLang="fr-FR" sz="900" b="0" i="0" u="none" strike="noStrike" cap="none" normalizeH="0" baseline="0" dirty="0">
                 <a:ln>
                   <a:noFill/>
                 </a:ln>
@@ -39982,7 +39969,7 @@
               <a:t> = </a:t>
             </a:r>
             <a:r>
-              <a:rPr kumimoji="0" lang="fr-FR" altLang="fr-FR" sz="1000" b="0" i="0" u="none" strike="noStrike" cap="none" normalizeH="0" baseline="0" dirty="0">
+              <a:rPr kumimoji="0" lang="fr-FR" altLang="fr-FR" sz="900" b="0" i="0" u="none" strike="noStrike" cap="none" normalizeH="0" baseline="0" dirty="0">
                 <a:ln>
                   <a:noFill/>
                 </a:ln>
@@ -39995,7 +39982,7 @@
               <a:t>"</a:t>
             </a:r>
             <a:r>
-              <a:rPr kumimoji="0" lang="fr-FR" altLang="fr-FR" sz="1000" b="0" i="0" u="none" strike="noStrike" cap="none" normalizeH="0" baseline="0" dirty="0" err="1">
+              <a:rPr kumimoji="0" lang="fr-FR" altLang="fr-FR" sz="900" b="0" i="0" u="none" strike="noStrike" cap="none" normalizeH="0" baseline="0" dirty="0" err="1">
                 <a:ln>
                   <a:noFill/>
                 </a:ln>
@@ -40008,7 +39995,7 @@
               <a:t>director_id</a:t>
             </a:r>
             <a:r>
-              <a:rPr kumimoji="0" lang="fr-FR" altLang="fr-FR" sz="1000" b="0" i="0" u="none" strike="noStrike" cap="none" normalizeH="0" baseline="0" dirty="0">
+              <a:rPr kumimoji="0" lang="fr-FR" altLang="fr-FR" sz="900" b="0" i="0" u="none" strike="noStrike" cap="none" normalizeH="0" baseline="0" dirty="0">
                 <a:ln>
                   <a:noFill/>
                 </a:ln>
@@ -40021,7 +40008,7 @@
               <a:t>"</a:t>
             </a:r>
             <a:r>
-              <a:rPr kumimoji="0" lang="fr-FR" altLang="fr-FR" sz="1000" b="0" i="0" u="none" strike="noStrike" cap="none" normalizeH="0" baseline="0" dirty="0">
+              <a:rPr kumimoji="0" lang="fr-FR" altLang="fr-FR" sz="900" b="0" i="0" u="none" strike="noStrike" cap="none" normalizeH="0" baseline="0" dirty="0">
                 <a:ln>
                   <a:noFill/>
                 </a:ln>
@@ -40305,7 +40292,7 @@
               </a:rPr>
             </a:br>
             <a:r>
-              <a:rPr kumimoji="0" lang="fr-FR" altLang="fr-FR" sz="1000" b="0" i="0" u="none" strike="noStrike" cap="none" normalizeH="0" baseline="0" dirty="0">
+              <a:rPr kumimoji="0" lang="fr-FR" altLang="fr-FR" sz="800" b="0" i="0" u="none" strike="noStrike" cap="none" normalizeH="0" baseline="0" dirty="0">
                 <a:ln>
                   <a:noFill/>
                 </a:ln>
@@ -40318,7 +40305,7 @@
               <a:t>@JoinTable</a:t>
             </a:r>
             <a:r>
-              <a:rPr kumimoji="0" lang="fr-FR" altLang="fr-FR" sz="1000" b="0" i="0" u="none" strike="noStrike" cap="none" normalizeH="0" baseline="0" dirty="0">
+              <a:rPr kumimoji="0" lang="fr-FR" altLang="fr-FR" sz="800" b="0" i="0" u="none" strike="noStrike" cap="none" normalizeH="0" baseline="0" dirty="0">
                 <a:ln>
                   <a:noFill/>
                 </a:ln>
@@ -40331,7 +40318,7 @@
               <a:t>(  </a:t>
             </a:r>
             <a:r>
-              <a:rPr kumimoji="0" lang="fr-FR" altLang="fr-FR" sz="1000" b="0" i="1" u="none" strike="noStrike" cap="none" normalizeH="0" baseline="0" dirty="0">
+              <a:rPr kumimoji="0" lang="fr-FR" altLang="fr-FR" sz="800" b="0" i="1" u="none" strike="noStrike" cap="none" normalizeH="0" baseline="0" dirty="0">
                 <a:ln>
                   <a:noFill/>
                 </a:ln>
@@ -40347,7 +40334,7 @@
               <a:t>// optionnel</a:t>
             </a:r>
             <a:br>
-              <a:rPr kumimoji="0" lang="fr-FR" altLang="fr-FR" sz="1000" b="0" i="0" u="none" strike="noStrike" cap="none" normalizeH="0" baseline="0" dirty="0">
+              <a:rPr kumimoji="0" lang="fr-FR" altLang="fr-FR" sz="800" b="0" i="0" u="none" strike="noStrike" cap="none" normalizeH="0" baseline="0" dirty="0">
                 <a:ln>
                   <a:noFill/>
                 </a:ln>
@@ -40359,7 +40346,7 @@
               </a:rPr>
             </a:br>
             <a:r>
-              <a:rPr kumimoji="0" lang="fr-FR" altLang="fr-FR" sz="1000" b="0" i="0" u="none" strike="noStrike" cap="none" normalizeH="0" baseline="0" dirty="0">
+              <a:rPr kumimoji="0" lang="fr-FR" altLang="fr-FR" sz="800" b="0" i="0" u="none" strike="noStrike" cap="none" normalizeH="0" baseline="0" dirty="0">
                 <a:ln>
                   <a:noFill/>
                 </a:ln>
@@ -40372,7 +40359,7 @@
               <a:t>        </a:t>
             </a:r>
             <a:r>
-              <a:rPr kumimoji="0" lang="fr-FR" altLang="fr-FR" sz="1000" b="0" i="0" u="none" strike="noStrike" cap="none" normalizeH="0" baseline="0" dirty="0" err="1">
+              <a:rPr kumimoji="0" lang="fr-FR" altLang="fr-FR" sz="800" b="0" i="0" u="none" strike="noStrike" cap="none" normalizeH="0" baseline="0" dirty="0" err="1">
                 <a:ln>
                   <a:noFill/>
                 </a:ln>
@@ -40385,7 +40372,7 @@
               <a:t>name</a:t>
             </a:r>
             <a:r>
-              <a:rPr kumimoji="0" lang="fr-FR" altLang="fr-FR" sz="1000" b="0" i="0" u="none" strike="noStrike" cap="none" normalizeH="0" baseline="0" dirty="0">
+              <a:rPr kumimoji="0" lang="fr-FR" altLang="fr-FR" sz="800" b="0" i="0" u="none" strike="noStrike" cap="none" normalizeH="0" baseline="0" dirty="0">
                 <a:ln>
                   <a:noFill/>
                 </a:ln>
@@ -40398,7 +40385,7 @@
               <a:t> = </a:t>
             </a:r>
             <a:r>
-              <a:rPr kumimoji="0" lang="fr-FR" altLang="fr-FR" sz="1000" b="0" i="0" u="none" strike="noStrike" cap="none" normalizeH="0" baseline="0" dirty="0">
+              <a:rPr kumimoji="0" lang="fr-FR" altLang="fr-FR" sz="800" b="0" i="0" u="none" strike="noStrike" cap="none" normalizeH="0" baseline="0" dirty="0">
                 <a:ln>
                   <a:noFill/>
                 </a:ln>
@@ -40411,7 +40398,7 @@
               <a:t>"SCHOOL_STUDENT"</a:t>
             </a:r>
             <a:r>
-              <a:rPr kumimoji="0" lang="fr-FR" altLang="fr-FR" sz="1000" b="0" i="0" u="none" strike="noStrike" cap="none" normalizeH="0" baseline="0" dirty="0">
+              <a:rPr kumimoji="0" lang="fr-FR" altLang="fr-FR" sz="800" b="0" i="0" u="none" strike="noStrike" cap="none" normalizeH="0" baseline="0" dirty="0">
                 <a:ln>
                   <a:noFill/>
                 </a:ln>
@@ -40424,7 +40411,7 @@
               <a:t>,</a:t>
             </a:r>
             <a:br>
-              <a:rPr kumimoji="0" lang="fr-FR" altLang="fr-FR" sz="1000" b="0" i="0" u="none" strike="noStrike" cap="none" normalizeH="0" baseline="0" dirty="0">
+              <a:rPr kumimoji="0" lang="fr-FR" altLang="fr-FR" sz="800" b="0" i="0" u="none" strike="noStrike" cap="none" normalizeH="0" baseline="0" dirty="0">
                 <a:ln>
                   <a:noFill/>
                 </a:ln>
@@ -40436,7 +40423,7 @@
               </a:rPr>
             </a:br>
             <a:r>
-              <a:rPr kumimoji="0" lang="fr-FR" altLang="fr-FR" sz="1000" b="0" i="0" u="none" strike="noStrike" cap="none" normalizeH="0" baseline="0" dirty="0">
+              <a:rPr kumimoji="0" lang="fr-FR" altLang="fr-FR" sz="800" b="0" i="0" u="none" strike="noStrike" cap="none" normalizeH="0" baseline="0" dirty="0">
                 <a:ln>
                   <a:noFill/>
                 </a:ln>
@@ -40449,7 +40436,7 @@
               <a:t>        </a:t>
             </a:r>
             <a:r>
-              <a:rPr kumimoji="0" lang="fr-FR" altLang="fr-FR" sz="1000" b="0" i="0" u="none" strike="noStrike" cap="none" normalizeH="0" baseline="0" dirty="0" err="1">
+              <a:rPr kumimoji="0" lang="fr-FR" altLang="fr-FR" sz="800" b="0" i="0" u="none" strike="noStrike" cap="none" normalizeH="0" baseline="0" dirty="0" err="1">
                 <a:ln>
                   <a:noFill/>
                 </a:ln>
@@ -40462,7 +40449,7 @@
               <a:t>joinColumns</a:t>
             </a:r>
             <a:r>
-              <a:rPr kumimoji="0" lang="fr-FR" altLang="fr-FR" sz="1000" b="0" i="0" u="none" strike="noStrike" cap="none" normalizeH="0" baseline="0" dirty="0">
+              <a:rPr kumimoji="0" lang="fr-FR" altLang="fr-FR" sz="800" b="0" i="0" u="none" strike="noStrike" cap="none" normalizeH="0" baseline="0" dirty="0">
                 <a:ln>
                   <a:noFill/>
                 </a:ln>
@@ -40475,7 +40462,7 @@
               <a:t> = </a:t>
             </a:r>
             <a:r>
-              <a:rPr kumimoji="0" lang="fr-FR" altLang="fr-FR" sz="1000" b="0" i="0" u="none" strike="noStrike" cap="none" normalizeH="0" baseline="0" dirty="0">
+              <a:rPr kumimoji="0" lang="fr-FR" altLang="fr-FR" sz="800" b="0" i="0" u="none" strike="noStrike" cap="none" normalizeH="0" baseline="0" dirty="0">
                 <a:ln>
                   <a:noFill/>
                 </a:ln>
@@ -40488,7 +40475,7 @@
               <a:t>@JoinColumn</a:t>
             </a:r>
             <a:r>
-              <a:rPr kumimoji="0" lang="fr-FR" altLang="fr-FR" sz="1000" b="0" i="0" u="none" strike="noStrike" cap="none" normalizeH="0" baseline="0" dirty="0">
+              <a:rPr kumimoji="0" lang="fr-FR" altLang="fr-FR" sz="800" b="0" i="0" u="none" strike="noStrike" cap="none" normalizeH="0" baseline="0" dirty="0">
                 <a:ln>
                   <a:noFill/>
                 </a:ln>
@@ -40501,7 +40488,7 @@
               <a:t>(name = </a:t>
             </a:r>
             <a:r>
-              <a:rPr kumimoji="0" lang="fr-FR" altLang="fr-FR" sz="1000" b="0" i="0" u="none" strike="noStrike" cap="none" normalizeH="0" baseline="0" dirty="0">
+              <a:rPr kumimoji="0" lang="fr-FR" altLang="fr-FR" sz="800" b="0" i="0" u="none" strike="noStrike" cap="none" normalizeH="0" baseline="0" dirty="0">
                 <a:ln>
                   <a:noFill/>
                 </a:ln>
@@ -40514,7 +40501,7 @@
               <a:t>"SCHOOL_ID"</a:t>
             </a:r>
             <a:r>
-              <a:rPr kumimoji="0" lang="fr-FR" altLang="fr-FR" sz="1000" b="0" i="0" u="none" strike="noStrike" cap="none" normalizeH="0" baseline="0" dirty="0">
+              <a:rPr kumimoji="0" lang="fr-FR" altLang="fr-FR" sz="800" b="0" i="0" u="none" strike="noStrike" cap="none" normalizeH="0" baseline="0" dirty="0">
                 <a:ln>
                   <a:noFill/>
                 </a:ln>
@@ -40527,7 +40514,7 @@
               <a:t>, </a:t>
             </a:r>
             <a:r>
-              <a:rPr kumimoji="0" lang="fr-FR" altLang="fr-FR" sz="1000" b="0" i="0" u="none" strike="noStrike" cap="none" normalizeH="0" baseline="0" dirty="0" err="1">
+              <a:rPr kumimoji="0" lang="fr-FR" altLang="fr-FR" sz="800" b="0" i="0" u="none" strike="noStrike" cap="none" normalizeH="0" baseline="0" dirty="0" err="1">
                 <a:ln>
                   <a:noFill/>
                 </a:ln>
@@ -40540,7 +40527,7 @@
               <a:t>referencedColumnName</a:t>
             </a:r>
             <a:r>
-              <a:rPr kumimoji="0" lang="fr-FR" altLang="fr-FR" sz="1000" b="0" i="0" u="none" strike="noStrike" cap="none" normalizeH="0" baseline="0" dirty="0">
+              <a:rPr kumimoji="0" lang="fr-FR" altLang="fr-FR" sz="800" b="0" i="0" u="none" strike="noStrike" cap="none" normalizeH="0" baseline="0" dirty="0">
                 <a:ln>
                   <a:noFill/>
                 </a:ln>
@@ -40553,7 +40540,7 @@
               <a:t> = </a:t>
             </a:r>
             <a:r>
-              <a:rPr kumimoji="0" lang="fr-FR" altLang="fr-FR" sz="1000" b="0" i="0" u="none" strike="noStrike" cap="none" normalizeH="0" baseline="0" dirty="0">
+              <a:rPr kumimoji="0" lang="fr-FR" altLang="fr-FR" sz="800" b="0" i="0" u="none" strike="noStrike" cap="none" normalizeH="0" baseline="0" dirty="0">
                 <a:ln>
                   <a:noFill/>
                 </a:ln>
@@ -40566,7 +40553,7 @@
               <a:t>"ID"</a:t>
             </a:r>
             <a:r>
-              <a:rPr kumimoji="0" lang="fr-FR" altLang="fr-FR" sz="1000" b="0" i="0" u="none" strike="noStrike" cap="none" normalizeH="0" baseline="0" dirty="0">
+              <a:rPr kumimoji="0" lang="fr-FR" altLang="fr-FR" sz="800" b="0" i="0" u="none" strike="noStrike" cap="none" normalizeH="0" baseline="0" dirty="0">
                 <a:ln>
                   <a:noFill/>
                 </a:ln>
@@ -40579,7 +40566,7 @@
               <a:t>),</a:t>
             </a:r>
             <a:br>
-              <a:rPr kumimoji="0" lang="fr-FR" altLang="fr-FR" sz="1000" b="0" i="0" u="none" strike="noStrike" cap="none" normalizeH="0" baseline="0" dirty="0">
+              <a:rPr kumimoji="0" lang="fr-FR" altLang="fr-FR" sz="800" b="0" i="0" u="none" strike="noStrike" cap="none" normalizeH="0" baseline="0" dirty="0">
                 <a:ln>
                   <a:noFill/>
                 </a:ln>
@@ -40591,7 +40578,7 @@
               </a:rPr>
             </a:br>
             <a:r>
-              <a:rPr kumimoji="0" lang="fr-FR" altLang="fr-FR" sz="1000" b="0" i="0" u="none" strike="noStrike" cap="none" normalizeH="0" baseline="0" dirty="0">
+              <a:rPr kumimoji="0" lang="fr-FR" altLang="fr-FR" sz="800" b="0" i="0" u="none" strike="noStrike" cap="none" normalizeH="0" baseline="0" dirty="0">
                 <a:ln>
                   <a:noFill/>
                 </a:ln>
@@ -40604,7 +40591,7 @@
               <a:t>        </a:t>
             </a:r>
             <a:r>
-              <a:rPr kumimoji="0" lang="fr-FR" altLang="fr-FR" sz="1000" b="0" i="0" u="none" strike="noStrike" cap="none" normalizeH="0" baseline="0" dirty="0" err="1">
+              <a:rPr kumimoji="0" lang="fr-FR" altLang="fr-FR" sz="800" b="0" i="0" u="none" strike="noStrike" cap="none" normalizeH="0" baseline="0" dirty="0" err="1">
                 <a:ln>
                   <a:noFill/>
                 </a:ln>
@@ -40617,7 +40604,7 @@
               <a:t>inverseJoinColumns</a:t>
             </a:r>
             <a:r>
-              <a:rPr kumimoji="0" lang="fr-FR" altLang="fr-FR" sz="1000" b="0" i="0" u="none" strike="noStrike" cap="none" normalizeH="0" baseline="0" dirty="0">
+              <a:rPr kumimoji="0" lang="fr-FR" altLang="fr-FR" sz="800" b="0" i="0" u="none" strike="noStrike" cap="none" normalizeH="0" baseline="0" dirty="0">
                 <a:ln>
                   <a:noFill/>
                 </a:ln>
@@ -40630,7 +40617,7 @@
               <a:t> = </a:t>
             </a:r>
             <a:r>
-              <a:rPr kumimoji="0" lang="fr-FR" altLang="fr-FR" sz="1000" b="0" i="0" u="none" strike="noStrike" cap="none" normalizeH="0" baseline="0" dirty="0">
+              <a:rPr kumimoji="0" lang="fr-FR" altLang="fr-FR" sz="800" b="0" i="0" u="none" strike="noStrike" cap="none" normalizeH="0" baseline="0" dirty="0">
                 <a:ln>
                   <a:noFill/>
                 </a:ln>
@@ -40643,7 +40630,7 @@
               <a:t>@JoinColumn</a:t>
             </a:r>
             <a:r>
-              <a:rPr kumimoji="0" lang="fr-FR" altLang="fr-FR" sz="1000" b="0" i="0" u="none" strike="noStrike" cap="none" normalizeH="0" baseline="0" dirty="0">
+              <a:rPr kumimoji="0" lang="fr-FR" altLang="fr-FR" sz="800" b="0" i="0" u="none" strike="noStrike" cap="none" normalizeH="0" baseline="0" dirty="0">
                 <a:ln>
                   <a:noFill/>
                 </a:ln>
@@ -40656,7 +40643,7 @@
               <a:t>(name = </a:t>
             </a:r>
             <a:r>
-              <a:rPr kumimoji="0" lang="fr-FR" altLang="fr-FR" sz="1000" b="0" i="0" u="none" strike="noStrike" cap="none" normalizeH="0" baseline="0" dirty="0">
+              <a:rPr kumimoji="0" lang="fr-FR" altLang="fr-FR" sz="800" b="0" i="0" u="none" strike="noStrike" cap="none" normalizeH="0" baseline="0" dirty="0">
                 <a:ln>
                   <a:noFill/>
                 </a:ln>
@@ -40669,7 +40656,7 @@
               <a:t>"STUDENT_ID"</a:t>
             </a:r>
             <a:r>
-              <a:rPr kumimoji="0" lang="fr-FR" altLang="fr-FR" sz="1000" b="0" i="0" u="none" strike="noStrike" cap="none" normalizeH="0" baseline="0" dirty="0">
+              <a:rPr kumimoji="0" lang="fr-FR" altLang="fr-FR" sz="800" b="0" i="0" u="none" strike="noStrike" cap="none" normalizeH="0" baseline="0" dirty="0">
                 <a:ln>
                   <a:noFill/>
                 </a:ln>
@@ -40682,7 +40669,7 @@
               <a:t>, </a:t>
             </a:r>
             <a:r>
-              <a:rPr kumimoji="0" lang="fr-FR" altLang="fr-FR" sz="1000" b="0" i="0" u="none" strike="noStrike" cap="none" normalizeH="0" baseline="0" dirty="0" err="1">
+              <a:rPr kumimoji="0" lang="fr-FR" altLang="fr-FR" sz="800" b="0" i="0" u="none" strike="noStrike" cap="none" normalizeH="0" baseline="0" dirty="0" err="1">
                 <a:ln>
                   <a:noFill/>
                 </a:ln>
@@ -40695,7 +40682,7 @@
               <a:t>referencedColumnName</a:t>
             </a:r>
             <a:r>
-              <a:rPr kumimoji="0" lang="fr-FR" altLang="fr-FR" sz="1000" b="0" i="0" u="none" strike="noStrike" cap="none" normalizeH="0" baseline="0" dirty="0">
+              <a:rPr kumimoji="0" lang="fr-FR" altLang="fr-FR" sz="800" b="0" i="0" u="none" strike="noStrike" cap="none" normalizeH="0" baseline="0" dirty="0">
                 <a:ln>
                   <a:noFill/>
                 </a:ln>
@@ -40708,7 +40695,7 @@
               <a:t> = </a:t>
             </a:r>
             <a:r>
-              <a:rPr kumimoji="0" lang="fr-FR" altLang="fr-FR" sz="1000" b="0" i="0" u="none" strike="noStrike" cap="none" normalizeH="0" baseline="0" dirty="0">
+              <a:rPr kumimoji="0" lang="fr-FR" altLang="fr-FR" sz="800" b="0" i="0" u="none" strike="noStrike" cap="none" normalizeH="0" baseline="0" dirty="0">
                 <a:ln>
                   <a:noFill/>
                 </a:ln>
@@ -40721,7 +40708,7 @@
               <a:t>"ID"</a:t>
             </a:r>
             <a:r>
-              <a:rPr kumimoji="0" lang="fr-FR" altLang="fr-FR" sz="1000" b="0" i="0" u="none" strike="noStrike" cap="none" normalizeH="0" baseline="0" dirty="0">
+              <a:rPr kumimoji="0" lang="fr-FR" altLang="fr-FR" sz="800" b="0" i="0" u="none" strike="noStrike" cap="none" normalizeH="0" baseline="0" dirty="0">
                 <a:ln>
                   <a:noFill/>
                 </a:ln>
@@ -40734,7 +40721,7 @@
               <a:t>),</a:t>
             </a:r>
             <a:br>
-              <a:rPr kumimoji="0" lang="fr-FR" altLang="fr-FR" sz="1000" b="0" i="0" u="none" strike="noStrike" cap="none" normalizeH="0" baseline="0" dirty="0">
+              <a:rPr kumimoji="0" lang="fr-FR" altLang="fr-FR" sz="800" b="0" i="0" u="none" strike="noStrike" cap="none" normalizeH="0" baseline="0" dirty="0">
                 <a:ln>
                   <a:noFill/>
                 </a:ln>
@@ -40746,7 +40733,7 @@
               </a:rPr>
             </a:br>
             <a:r>
-              <a:rPr kumimoji="0" lang="fr-FR" altLang="fr-FR" sz="1000" b="0" i="0" u="none" strike="noStrike" cap="none" normalizeH="0" baseline="0" dirty="0">
+              <a:rPr kumimoji="0" lang="fr-FR" altLang="fr-FR" sz="800" b="0" i="0" u="none" strike="noStrike" cap="none" normalizeH="0" baseline="0" dirty="0">
                 <a:ln>
                   <a:noFill/>
                 </a:ln>
@@ -40759,7 +40746,7 @@
               <a:t>        indexes = {</a:t>
             </a:r>
             <a:br>
-              <a:rPr kumimoji="0" lang="fr-FR" altLang="fr-FR" sz="1000" b="0" i="0" u="none" strike="noStrike" cap="none" normalizeH="0" baseline="0" dirty="0">
+              <a:rPr kumimoji="0" lang="fr-FR" altLang="fr-FR" sz="800" b="0" i="0" u="none" strike="noStrike" cap="none" normalizeH="0" baseline="0" dirty="0">
                 <a:ln>
                   <a:noFill/>
                 </a:ln>
@@ -40771,7 +40758,7 @@
               </a:rPr>
             </a:br>
             <a:r>
-              <a:rPr kumimoji="0" lang="fr-FR" altLang="fr-FR" sz="1000" b="0" i="0" u="none" strike="noStrike" cap="none" normalizeH="0" baseline="0" dirty="0">
+              <a:rPr kumimoji="0" lang="fr-FR" altLang="fr-FR" sz="800" b="0" i="0" u="none" strike="noStrike" cap="none" normalizeH="0" baseline="0" dirty="0">
                 <a:ln>
                   <a:noFill/>
                 </a:ln>
@@ -40784,7 +40771,7 @@
               <a:t>                </a:t>
             </a:r>
             <a:r>
-              <a:rPr kumimoji="0" lang="fr-FR" altLang="fr-FR" sz="1000" b="0" i="0" u="none" strike="noStrike" cap="none" normalizeH="0" baseline="0" dirty="0">
+              <a:rPr kumimoji="0" lang="fr-FR" altLang="fr-FR" sz="800" b="0" i="0" u="none" strike="noStrike" cap="none" normalizeH="0" baseline="0" dirty="0">
                 <a:ln>
                   <a:noFill/>
                 </a:ln>
@@ -40797,7 +40784,7 @@
               <a:t>@Index</a:t>
             </a:r>
             <a:r>
-              <a:rPr kumimoji="0" lang="fr-FR" altLang="fr-FR" sz="1000" b="0" i="0" u="none" strike="noStrike" cap="none" normalizeH="0" baseline="0" dirty="0">
+              <a:rPr kumimoji="0" lang="fr-FR" altLang="fr-FR" sz="800" b="0" i="0" u="none" strike="noStrike" cap="none" normalizeH="0" baseline="0" dirty="0">
                 <a:ln>
                   <a:noFill/>
                 </a:ln>
@@ -40810,7 +40797,7 @@
               <a:t>(name = </a:t>
             </a:r>
             <a:r>
-              <a:rPr kumimoji="0" lang="fr-FR" altLang="fr-FR" sz="1000" b="0" i="0" u="none" strike="noStrike" cap="none" normalizeH="0" baseline="0" dirty="0">
+              <a:rPr kumimoji="0" lang="fr-FR" altLang="fr-FR" sz="800" b="0" i="0" u="none" strike="noStrike" cap="none" normalizeH="0" baseline="0" dirty="0">
                 <a:ln>
                   <a:noFill/>
                 </a:ln>
@@ -40823,7 +40810,7 @@
               <a:t>"</a:t>
             </a:r>
             <a:r>
-              <a:rPr kumimoji="0" lang="fr-FR" altLang="fr-FR" sz="1000" b="0" i="0" u="none" strike="noStrike" cap="none" normalizeH="0" baseline="0" dirty="0" err="1">
+              <a:rPr kumimoji="0" lang="fr-FR" altLang="fr-FR" sz="800" b="0" i="0" u="none" strike="noStrike" cap="none" normalizeH="0" baseline="0" dirty="0" err="1">
                 <a:ln>
                   <a:noFill/>
                 </a:ln>
@@ -40836,7 +40823,7 @@
               <a:t>school_school_student_index</a:t>
             </a:r>
             <a:r>
-              <a:rPr kumimoji="0" lang="fr-FR" altLang="fr-FR" sz="1000" b="0" i="0" u="none" strike="noStrike" cap="none" normalizeH="0" baseline="0" dirty="0">
+              <a:rPr kumimoji="0" lang="fr-FR" altLang="fr-FR" sz="800" b="0" i="0" u="none" strike="noStrike" cap="none" normalizeH="0" baseline="0" dirty="0">
                 <a:ln>
                   <a:noFill/>
                 </a:ln>
@@ -40849,7 +40836,7 @@
               <a:t>"</a:t>
             </a:r>
             <a:r>
-              <a:rPr kumimoji="0" lang="fr-FR" altLang="fr-FR" sz="1000" b="0" i="0" u="none" strike="noStrike" cap="none" normalizeH="0" baseline="0" dirty="0">
+              <a:rPr kumimoji="0" lang="fr-FR" altLang="fr-FR" sz="800" b="0" i="0" u="none" strike="noStrike" cap="none" normalizeH="0" baseline="0" dirty="0">
                 <a:ln>
                   <a:noFill/>
                 </a:ln>
@@ -40862,7 +40849,7 @@
               <a:t>, </a:t>
             </a:r>
             <a:r>
-              <a:rPr kumimoji="0" lang="fr-FR" altLang="fr-FR" sz="1000" b="0" i="0" u="none" strike="noStrike" cap="none" normalizeH="0" baseline="0" dirty="0" err="1">
+              <a:rPr kumimoji="0" lang="fr-FR" altLang="fr-FR" sz="800" b="0" i="0" u="none" strike="noStrike" cap="none" normalizeH="0" baseline="0" dirty="0" err="1">
                 <a:ln>
                   <a:noFill/>
                 </a:ln>
@@ -40875,7 +40862,7 @@
               <a:t>columnList</a:t>
             </a:r>
             <a:r>
-              <a:rPr kumimoji="0" lang="fr-FR" altLang="fr-FR" sz="1000" b="0" i="0" u="none" strike="noStrike" cap="none" normalizeH="0" baseline="0" dirty="0">
+              <a:rPr kumimoji="0" lang="fr-FR" altLang="fr-FR" sz="800" b="0" i="0" u="none" strike="noStrike" cap="none" normalizeH="0" baseline="0" dirty="0">
                 <a:ln>
                   <a:noFill/>
                 </a:ln>
@@ -40888,7 +40875,7 @@
               <a:t> = </a:t>
             </a:r>
             <a:r>
-              <a:rPr kumimoji="0" lang="fr-FR" altLang="fr-FR" sz="1000" b="0" i="0" u="none" strike="noStrike" cap="none" normalizeH="0" baseline="0" dirty="0">
+              <a:rPr kumimoji="0" lang="fr-FR" altLang="fr-FR" sz="800" b="0" i="0" u="none" strike="noStrike" cap="none" normalizeH="0" baseline="0" dirty="0">
                 <a:ln>
                   <a:noFill/>
                 </a:ln>
@@ -40901,7 +40888,7 @@
               <a:t>"</a:t>
             </a:r>
             <a:r>
-              <a:rPr kumimoji="0" lang="fr-FR" altLang="fr-FR" sz="1000" b="0" i="0" u="none" strike="noStrike" cap="none" normalizeH="0" baseline="0" dirty="0" err="1">
+              <a:rPr kumimoji="0" lang="fr-FR" altLang="fr-FR" sz="800" b="0" i="0" u="none" strike="noStrike" cap="none" normalizeH="0" baseline="0" dirty="0" err="1">
                 <a:ln>
                   <a:noFill/>
                 </a:ln>
@@ -40914,7 +40901,7 @@
               <a:t>school_id</a:t>
             </a:r>
             <a:r>
-              <a:rPr kumimoji="0" lang="fr-FR" altLang="fr-FR" sz="1000" b="0" i="0" u="none" strike="noStrike" cap="none" normalizeH="0" baseline="0" dirty="0">
+              <a:rPr kumimoji="0" lang="fr-FR" altLang="fr-FR" sz="800" b="0" i="0" u="none" strike="noStrike" cap="none" normalizeH="0" baseline="0" dirty="0">
                 <a:ln>
                   <a:noFill/>
                 </a:ln>
@@ -40927,7 +40914,7 @@
               <a:t>"</a:t>
             </a:r>
             <a:r>
-              <a:rPr kumimoji="0" lang="fr-FR" altLang="fr-FR" sz="1000" b="0" i="0" u="none" strike="noStrike" cap="none" normalizeH="0" baseline="0" dirty="0">
+              <a:rPr kumimoji="0" lang="fr-FR" altLang="fr-FR" sz="800" b="0" i="0" u="none" strike="noStrike" cap="none" normalizeH="0" baseline="0" dirty="0">
                 <a:ln>
                   <a:noFill/>
                 </a:ln>
@@ -40940,7 +40927,7 @@
               <a:t>),</a:t>
             </a:r>
             <a:br>
-              <a:rPr kumimoji="0" lang="fr-FR" altLang="fr-FR" sz="1000" b="0" i="0" u="none" strike="noStrike" cap="none" normalizeH="0" baseline="0" dirty="0">
+              <a:rPr kumimoji="0" lang="fr-FR" altLang="fr-FR" sz="800" b="0" i="0" u="none" strike="noStrike" cap="none" normalizeH="0" baseline="0" dirty="0">
                 <a:ln>
                   <a:noFill/>
                 </a:ln>
@@ -40952,7 +40939,7 @@
               </a:rPr>
             </a:br>
             <a:r>
-              <a:rPr kumimoji="0" lang="fr-FR" altLang="fr-FR" sz="1000" b="0" i="0" u="none" strike="noStrike" cap="none" normalizeH="0" baseline="0" dirty="0">
+              <a:rPr kumimoji="0" lang="fr-FR" altLang="fr-FR" sz="800" b="0" i="0" u="none" strike="noStrike" cap="none" normalizeH="0" baseline="0" dirty="0">
                 <a:ln>
                   <a:noFill/>
                 </a:ln>
@@ -40965,7 +40952,7 @@
               <a:t>                </a:t>
             </a:r>
             <a:r>
-              <a:rPr kumimoji="0" lang="fr-FR" altLang="fr-FR" sz="1000" b="0" i="0" u="none" strike="noStrike" cap="none" normalizeH="0" baseline="0" dirty="0">
+              <a:rPr kumimoji="0" lang="fr-FR" altLang="fr-FR" sz="800" b="0" i="0" u="none" strike="noStrike" cap="none" normalizeH="0" baseline="0" dirty="0">
                 <a:ln>
                   <a:noFill/>
                 </a:ln>
@@ -40978,7 +40965,7 @@
               <a:t>@Index</a:t>
             </a:r>
             <a:r>
-              <a:rPr kumimoji="0" lang="fr-FR" altLang="fr-FR" sz="1000" b="0" i="0" u="none" strike="noStrike" cap="none" normalizeH="0" baseline="0" dirty="0">
+              <a:rPr kumimoji="0" lang="fr-FR" altLang="fr-FR" sz="800" b="0" i="0" u="none" strike="noStrike" cap="none" normalizeH="0" baseline="0" dirty="0">
                 <a:ln>
                   <a:noFill/>
                 </a:ln>
@@ -40991,7 +40978,7 @@
               <a:t>(name = </a:t>
             </a:r>
             <a:r>
-              <a:rPr kumimoji="0" lang="fr-FR" altLang="fr-FR" sz="1000" b="0" i="0" u="none" strike="noStrike" cap="none" normalizeH="0" baseline="0" dirty="0">
+              <a:rPr kumimoji="0" lang="fr-FR" altLang="fr-FR" sz="800" b="0" i="0" u="none" strike="noStrike" cap="none" normalizeH="0" baseline="0" dirty="0">
                 <a:ln>
                   <a:noFill/>
                 </a:ln>
@@ -41004,7 +40991,7 @@
               <a:t>"</a:t>
             </a:r>
             <a:r>
-              <a:rPr kumimoji="0" lang="fr-FR" altLang="fr-FR" sz="1000" b="0" i="0" u="none" strike="noStrike" cap="none" normalizeH="0" baseline="0" dirty="0" err="1">
+              <a:rPr kumimoji="0" lang="fr-FR" altLang="fr-FR" sz="800" b="0" i="0" u="none" strike="noStrike" cap="none" normalizeH="0" baseline="0" dirty="0" err="1">
                 <a:ln>
                   <a:noFill/>
                 </a:ln>
@@ -41017,7 +41004,7 @@
               <a:t>student_school_student_index</a:t>
             </a:r>
             <a:r>
-              <a:rPr kumimoji="0" lang="fr-FR" altLang="fr-FR" sz="1000" b="0" i="0" u="none" strike="noStrike" cap="none" normalizeH="0" baseline="0" dirty="0">
+              <a:rPr kumimoji="0" lang="fr-FR" altLang="fr-FR" sz="800" b="0" i="0" u="none" strike="noStrike" cap="none" normalizeH="0" baseline="0" dirty="0">
                 <a:ln>
                   <a:noFill/>
                 </a:ln>
@@ -41030,7 +41017,7 @@
               <a:t>"</a:t>
             </a:r>
             <a:r>
-              <a:rPr kumimoji="0" lang="fr-FR" altLang="fr-FR" sz="1000" b="0" i="0" u="none" strike="noStrike" cap="none" normalizeH="0" baseline="0" dirty="0">
+              <a:rPr kumimoji="0" lang="fr-FR" altLang="fr-FR" sz="800" b="0" i="0" u="none" strike="noStrike" cap="none" normalizeH="0" baseline="0" dirty="0">
                 <a:ln>
                   <a:noFill/>
                 </a:ln>
@@ -41043,7 +41030,7 @@
               <a:t>, </a:t>
             </a:r>
             <a:r>
-              <a:rPr kumimoji="0" lang="fr-FR" altLang="fr-FR" sz="1000" b="0" i="0" u="none" strike="noStrike" cap="none" normalizeH="0" baseline="0" dirty="0" err="1">
+              <a:rPr kumimoji="0" lang="fr-FR" altLang="fr-FR" sz="800" b="0" i="0" u="none" strike="noStrike" cap="none" normalizeH="0" baseline="0" dirty="0" err="1">
                 <a:ln>
                   <a:noFill/>
                 </a:ln>
@@ -41056,7 +41043,7 @@
               <a:t>columnList</a:t>
             </a:r>
             <a:r>
-              <a:rPr kumimoji="0" lang="fr-FR" altLang="fr-FR" sz="1000" b="0" i="0" u="none" strike="noStrike" cap="none" normalizeH="0" baseline="0" dirty="0">
+              <a:rPr kumimoji="0" lang="fr-FR" altLang="fr-FR" sz="800" b="0" i="0" u="none" strike="noStrike" cap="none" normalizeH="0" baseline="0" dirty="0">
                 <a:ln>
                   <a:noFill/>
                 </a:ln>
@@ -41069,7 +41056,7 @@
               <a:t> = </a:t>
             </a:r>
             <a:r>
-              <a:rPr kumimoji="0" lang="fr-FR" altLang="fr-FR" sz="1000" b="0" i="0" u="none" strike="noStrike" cap="none" normalizeH="0" baseline="0" dirty="0">
+              <a:rPr kumimoji="0" lang="fr-FR" altLang="fr-FR" sz="800" b="0" i="0" u="none" strike="noStrike" cap="none" normalizeH="0" baseline="0" dirty="0">
                 <a:ln>
                   <a:noFill/>
                 </a:ln>
@@ -41082,7 +41069,7 @@
               <a:t>"</a:t>
             </a:r>
             <a:r>
-              <a:rPr kumimoji="0" lang="fr-FR" altLang="fr-FR" sz="1000" b="0" i="0" u="none" strike="noStrike" cap="none" normalizeH="0" baseline="0" dirty="0" err="1">
+              <a:rPr kumimoji="0" lang="fr-FR" altLang="fr-FR" sz="800" b="0" i="0" u="none" strike="noStrike" cap="none" normalizeH="0" baseline="0" dirty="0" err="1">
                 <a:ln>
                   <a:noFill/>
                 </a:ln>
@@ -41095,7 +41082,7 @@
               <a:t>student_id</a:t>
             </a:r>
             <a:r>
-              <a:rPr kumimoji="0" lang="fr-FR" altLang="fr-FR" sz="1000" b="0" i="0" u="none" strike="noStrike" cap="none" normalizeH="0" baseline="0" dirty="0">
+              <a:rPr kumimoji="0" lang="fr-FR" altLang="fr-FR" sz="800" b="0" i="0" u="none" strike="noStrike" cap="none" normalizeH="0" baseline="0" dirty="0">
                 <a:ln>
                   <a:noFill/>
                 </a:ln>
@@ -41108,7 +41095,7 @@
               <a:t>"</a:t>
             </a:r>
             <a:r>
-              <a:rPr kumimoji="0" lang="fr-FR" altLang="fr-FR" sz="1000" b="0" i="0" u="none" strike="noStrike" cap="none" normalizeH="0" baseline="0" dirty="0">
+              <a:rPr kumimoji="0" lang="fr-FR" altLang="fr-FR" sz="800" b="0" i="0" u="none" strike="noStrike" cap="none" normalizeH="0" baseline="0" dirty="0">
                 <a:ln>
                   <a:noFill/>
                 </a:ln>
@@ -41121,7 +41108,7 @@
               <a:t>)</a:t>
             </a:r>
             <a:br>
-              <a:rPr kumimoji="0" lang="fr-FR" altLang="fr-FR" sz="1000" b="0" i="0" u="none" strike="noStrike" cap="none" normalizeH="0" baseline="0" dirty="0">
+              <a:rPr kumimoji="0" lang="fr-FR" altLang="fr-FR" sz="800" b="0" i="0" u="none" strike="noStrike" cap="none" normalizeH="0" baseline="0" dirty="0">
                 <a:ln>
                   <a:noFill/>
                 </a:ln>
@@ -41133,7 +41120,7 @@
               </a:rPr>
             </a:br>
             <a:r>
-              <a:rPr kumimoji="0" lang="fr-FR" altLang="fr-FR" sz="1000" b="0" i="0" u="none" strike="noStrike" cap="none" normalizeH="0" baseline="0" dirty="0">
+              <a:rPr kumimoji="0" lang="fr-FR" altLang="fr-FR" sz="800" b="0" i="0" u="none" strike="noStrike" cap="none" normalizeH="0" baseline="0" dirty="0">
                 <a:ln>
                   <a:noFill/>
                 </a:ln>
@@ -41146,7 +41133,7 @@
               <a:t>        }</a:t>
             </a:r>
             <a:br>
-              <a:rPr kumimoji="0" lang="fr-FR" altLang="fr-FR" sz="1000" b="0" i="0" u="none" strike="noStrike" cap="none" normalizeH="0" baseline="0" dirty="0">
+              <a:rPr kumimoji="0" lang="fr-FR" altLang="fr-FR" sz="800" b="0" i="0" u="none" strike="noStrike" cap="none" normalizeH="0" baseline="0" dirty="0">
                 <a:ln>
                   <a:noFill/>
                 </a:ln>
@@ -41158,7 +41145,7 @@
               </a:rPr>
             </a:br>
             <a:r>
-              <a:rPr kumimoji="0" lang="fr-FR" altLang="fr-FR" sz="1000" b="0" i="0" u="none" strike="noStrike" cap="none" normalizeH="0" baseline="0" dirty="0">
+              <a:rPr kumimoji="0" lang="fr-FR" altLang="fr-FR" sz="800" b="0" i="0" u="none" strike="noStrike" cap="none" normalizeH="0" baseline="0" dirty="0">
                 <a:ln>
                   <a:noFill/>
                 </a:ln>
@@ -41343,7 +41330,7 @@
         <p:spPr bwMode="auto">
           <a:xfrm>
             <a:off x="7561345" y="2552000"/>
-            <a:ext cx="3872759" cy="1169551"/>
+            <a:ext cx="4630655" cy="1169551"/>
           </a:xfrm>
           <a:prstGeom prst="rect">
             <a:avLst/>
@@ -41857,7 +41844,7 @@
         </p:blipFill>
         <p:spPr>
           <a:xfrm>
-            <a:off x="2173114" y="5066609"/>
+            <a:off x="2110052" y="5352357"/>
             <a:ext cx="7658100" cy="1314450"/>
           </a:xfrm>
           <a:prstGeom prst="rect">

--- a/JPA-HIBERNATE.pptx
+++ b/JPA-HIBERNATE.pptx
@@ -5,10 +5,10 @@
     <p:sldMasterId id="2147483660" r:id="rId4"/>
   </p:sldMasterIdLst>
   <p:notesMasterIdLst>
-    <p:notesMasterId r:id="rId39"/>
+    <p:notesMasterId r:id="rId40"/>
   </p:notesMasterIdLst>
   <p:handoutMasterIdLst>
-    <p:handoutMasterId r:id="rId40"/>
+    <p:handoutMasterId r:id="rId41"/>
   </p:handoutMasterIdLst>
   <p:sldIdLst>
     <p:sldId id="256" r:id="rId5"/>
@@ -43,8 +43,9 @@
     <p:sldId id="326" r:id="rId34"/>
     <p:sldId id="306" r:id="rId35"/>
     <p:sldId id="299" r:id="rId36"/>
-    <p:sldId id="330" r:id="rId37"/>
-    <p:sldId id="327" r:id="rId38"/>
+    <p:sldId id="331" r:id="rId37"/>
+    <p:sldId id="330" r:id="rId38"/>
+    <p:sldId id="327" r:id="rId39"/>
   </p:sldIdLst>
   <p:sldSz cx="12192000" cy="6858000"/>
   <p:notesSz cx="6858000" cy="9144000"/>
@@ -180,6 +181,7 @@
             <p14:sldId id="326"/>
             <p14:sldId id="306"/>
             <p14:sldId id="299"/>
+            <p14:sldId id="331"/>
             <p14:sldId id="330"/>
             <p14:sldId id="327"/>
           </p14:sldIdLst>
@@ -297,7 +299,7 @@
             <a:pPr rtl="0"/>
             <a:fld id="{3C80F580-3B6A-44CD-9A1E-E890016126F8}" type="datetime1">
               <a:rPr lang="fr-FR" smtClean="0"/>
-              <a:t>16/03/2022</a:t>
+              <a:t>23/03/2022</a:t>
             </a:fld>
             <a:endParaRPr lang="fr-FR"/>
           </a:p>
@@ -467,7 +469,7 @@
             <a:pPr rtl="0"/>
             <a:fld id="{7DF8ED89-FBF4-48E3-B6C6-C071DA98F802}" type="datetime1">
               <a:rPr lang="fr-FR" noProof="1" dirty="0" smtClean="0"/>
-              <a:t>16/03/2022</a:t>
+              <a:t>23/03/2022</a:t>
             </a:fld>
             <a:endParaRPr lang="fr-FR" noProof="1"/>
           </a:p>
@@ -3354,7 +3356,7 @@
             <a:pPr rtl="0"/>
             <a:fld id="{DF61EA0F-A667-4B49-8422-0062BC55E249}" type="slidenum">
               <a:rPr lang="fr-FR" noProof="1" dirty="0" smtClean="0"/>
-              <a:t>33</a:t>
+              <a:t>34</a:t>
             </a:fld>
             <a:endParaRPr lang="fr-FR" noProof="1"/>
           </a:p>
@@ -3439,7 +3441,7 @@
             <a:pPr rtl="0"/>
             <a:fld id="{DF61EA0F-A667-4B49-8422-0062BC55E249}" type="slidenum">
               <a:rPr lang="fr-FR" noProof="1" dirty="0" smtClean="0"/>
-              <a:t>34</a:t>
+              <a:t>35</a:t>
             </a:fld>
             <a:endParaRPr lang="fr-FR" noProof="1"/>
           </a:p>
@@ -4452,7 +4454,7 @@
             <a:pPr rtl="0"/>
             <a:fld id="{7DF3CA4B-903E-431D-AF93-2AD02E04DE8A}" type="datetime1">
               <a:rPr lang="fr-FR" noProof="0" smtClean="0"/>
-              <a:t>16/03/2022</a:t>
+              <a:t>23/03/2022</a:t>
             </a:fld>
             <a:endParaRPr lang="fr-FR" noProof="0"/>
           </a:p>
@@ -5078,7 +5080,7 @@
             <a:pPr rtl="0"/>
             <a:fld id="{802CD4F2-526B-4131-B91B-856C46007FC5}" type="datetime1">
               <a:rPr lang="fr-FR" noProof="0" smtClean="0"/>
-              <a:t>16/03/2022</a:t>
+              <a:t>23/03/2022</a:t>
             </a:fld>
             <a:endParaRPr lang="fr-FR" noProof="0"/>
           </a:p>
@@ -8062,8 +8064,8 @@
         </p:nvSpPr>
         <p:spPr bwMode="auto">
           <a:xfrm>
-            <a:off x="313684" y="1513245"/>
-            <a:ext cx="4822520" cy="4616648"/>
+            <a:off x="313684" y="1790244"/>
+            <a:ext cx="5670906" cy="4062651"/>
           </a:xfrm>
           <a:prstGeom prst="rect">
             <a:avLst/>
@@ -8212,7 +8214,7 @@
               <a:t>    </a:t>
             </a:r>
             <a:r>
-              <a:rPr kumimoji="0" lang="fr-FR" altLang="fr-FR" sz="1400" b="0" i="0" u="none" strike="noStrike" cap="none" normalizeH="0" baseline="0" dirty="0">
+              <a:rPr kumimoji="0" lang="fr-FR" altLang="fr-FR" sz="1200" b="0" i="0" u="none" strike="noStrike" cap="none" normalizeH="0" baseline="0" dirty="0">
                 <a:ln>
                   <a:noFill/>
                 </a:ln>
@@ -8225,7 +8227,7 @@
               <a:t>@Id</a:t>
             </a:r>
             <a:br>
-              <a:rPr kumimoji="0" lang="fr-FR" altLang="fr-FR" sz="1400" b="0" i="0" u="none" strike="noStrike" cap="none" normalizeH="0" baseline="0" dirty="0">
+              <a:rPr kumimoji="0" lang="fr-FR" altLang="fr-FR" sz="1200" b="0" i="0" u="none" strike="noStrike" cap="none" normalizeH="0" baseline="0" dirty="0">
                 <a:ln>
                   <a:noFill/>
                 </a:ln>
@@ -8237,7 +8239,7 @@
               </a:rPr>
             </a:br>
             <a:r>
-              <a:rPr kumimoji="0" lang="fr-FR" altLang="fr-FR" sz="1400" b="0" i="0" u="none" strike="noStrike" cap="none" normalizeH="0" baseline="0" dirty="0">
+              <a:rPr kumimoji="0" lang="fr-FR" altLang="fr-FR" sz="1200" b="0" i="0" u="none" strike="noStrike" cap="none" normalizeH="0" baseline="0" dirty="0">
                 <a:ln>
                   <a:noFill/>
                 </a:ln>
@@ -8250,7 +8252,7 @@
               <a:t>    @GeneratedValue</a:t>
             </a:r>
             <a:r>
-              <a:rPr kumimoji="0" lang="fr-FR" altLang="fr-FR" sz="1400" b="0" i="0" u="none" strike="noStrike" cap="none" normalizeH="0" baseline="0" dirty="0">
+              <a:rPr kumimoji="0" lang="fr-FR" altLang="fr-FR" sz="1200" b="0" i="0" u="none" strike="noStrike" cap="none" normalizeH="0" baseline="0" dirty="0">
                 <a:ln>
                   <a:noFill/>
                 </a:ln>
@@ -8263,7 +8265,7 @@
               <a:t>(strategy = </a:t>
             </a:r>
             <a:r>
-              <a:rPr kumimoji="0" lang="fr-FR" altLang="fr-FR" sz="1400" b="0" i="0" u="none" strike="noStrike" cap="none" normalizeH="0" baseline="0" dirty="0" err="1">
+              <a:rPr kumimoji="0" lang="fr-FR" altLang="fr-FR" sz="1200" b="0" i="0" u="none" strike="noStrike" cap="none" normalizeH="0" baseline="0" dirty="0" err="1">
                 <a:ln>
                   <a:noFill/>
                 </a:ln>
@@ -8276,7 +8278,7 @@
               <a:t>GenerationType</a:t>
             </a:r>
             <a:r>
-              <a:rPr kumimoji="0" lang="fr-FR" altLang="fr-FR" sz="1400" b="0" i="0" u="none" strike="noStrike" cap="none" normalizeH="0" baseline="0" dirty="0" err="1">
+              <a:rPr kumimoji="0" lang="fr-FR" altLang="fr-FR" sz="1200" b="0" i="0" u="none" strike="noStrike" cap="none" normalizeH="0" baseline="0" dirty="0" err="1">
                 <a:ln>
                   <a:noFill/>
                 </a:ln>
@@ -8289,7 +8291,7 @@
               <a:t>.</a:t>
             </a:r>
             <a:r>
-              <a:rPr kumimoji="0" lang="fr-FR" altLang="fr-FR" sz="1400" b="0" i="1" u="none" strike="noStrike" cap="none" normalizeH="0" baseline="0" dirty="0" err="1">
+              <a:rPr kumimoji="0" lang="fr-FR" altLang="fr-FR" sz="1200" b="0" i="1" u="none" strike="noStrike" cap="none" normalizeH="0" baseline="0" dirty="0" err="1">
                 <a:ln>
                   <a:noFill/>
                 </a:ln>
@@ -8302,7 +8304,7 @@
               <a:t>IDENTITY</a:t>
             </a:r>
             <a:r>
-              <a:rPr kumimoji="0" lang="fr-FR" altLang="fr-FR" sz="1400" b="0" i="0" u="none" strike="noStrike" cap="none" normalizeH="0" baseline="0" dirty="0">
+              <a:rPr kumimoji="0" lang="fr-FR" altLang="fr-FR" sz="1200" b="0" i="0" u="none" strike="noStrike" cap="none" normalizeH="0" baseline="0" dirty="0">
                 <a:ln>
                   <a:noFill/>
                 </a:ln>
@@ -8315,7 +8317,7 @@
               <a:t>)</a:t>
             </a:r>
             <a:br>
-              <a:rPr kumimoji="0" lang="fr-FR" altLang="fr-FR" sz="1400" b="0" i="0" u="none" strike="noStrike" cap="none" normalizeH="0" baseline="0" dirty="0">
+              <a:rPr kumimoji="0" lang="fr-FR" altLang="fr-FR" sz="1200" b="0" i="0" u="none" strike="noStrike" cap="none" normalizeH="0" baseline="0" dirty="0">
                 <a:ln>
                   <a:noFill/>
                 </a:ln>
@@ -8327,7 +8329,7 @@
               </a:rPr>
             </a:br>
             <a:r>
-              <a:rPr kumimoji="0" lang="fr-FR" altLang="fr-FR" sz="1400" b="0" i="0" u="none" strike="noStrike" cap="none" normalizeH="0" baseline="0" dirty="0">
+              <a:rPr kumimoji="0" lang="fr-FR" altLang="fr-FR" sz="1200" b="0" i="0" u="none" strike="noStrike" cap="none" normalizeH="0" baseline="0" dirty="0">
                 <a:ln>
                   <a:noFill/>
                 </a:ln>
@@ -8340,7 +8342,7 @@
               <a:t>    </a:t>
             </a:r>
             <a:r>
-              <a:rPr kumimoji="0" lang="fr-FR" altLang="fr-FR" sz="1400" b="0" i="0" u="none" strike="noStrike" cap="none" normalizeH="0" baseline="0" dirty="0" err="1">
+              <a:rPr kumimoji="0" lang="fr-FR" altLang="fr-FR" sz="1200" b="0" i="0" u="none" strike="noStrike" cap="none" normalizeH="0" baseline="0" dirty="0" err="1">
                 <a:ln>
                   <a:noFill/>
                 </a:ln>
@@ -8353,7 +8355,7 @@
               <a:t>private</a:t>
             </a:r>
             <a:r>
-              <a:rPr kumimoji="0" lang="fr-FR" altLang="fr-FR" sz="1400" b="0" i="0" u="none" strike="noStrike" cap="none" normalizeH="0" baseline="0" dirty="0">
+              <a:rPr kumimoji="0" lang="fr-FR" altLang="fr-FR" sz="1200" b="0" i="0" u="none" strike="noStrike" cap="none" normalizeH="0" baseline="0" dirty="0">
                 <a:ln>
                   <a:noFill/>
                 </a:ln>
@@ -8366,7 +8368,7 @@
               <a:t> </a:t>
             </a:r>
             <a:r>
-              <a:rPr kumimoji="0" lang="fr-FR" altLang="fr-FR" sz="1400" b="0" i="0" u="none" strike="noStrike" cap="none" normalizeH="0" baseline="0" dirty="0">
+              <a:rPr kumimoji="0" lang="fr-FR" altLang="fr-FR" sz="1200" b="0" i="0" u="none" strike="noStrike" cap="none" normalizeH="0" baseline="0" dirty="0">
                 <a:ln>
                   <a:noFill/>
                 </a:ln>
@@ -8379,7 +8381,7 @@
               <a:t>Long </a:t>
             </a:r>
             <a:r>
-              <a:rPr kumimoji="0" lang="fr-FR" altLang="fr-FR" sz="1400" b="0" i="0" u="none" strike="noStrike" cap="none" normalizeH="0" baseline="0" dirty="0">
+              <a:rPr kumimoji="0" lang="fr-FR" altLang="fr-FR" sz="1200" b="0" i="0" u="none" strike="noStrike" cap="none" normalizeH="0" baseline="0" dirty="0">
                 <a:ln>
                   <a:noFill/>
                 </a:ln>
@@ -8392,7 +8394,7 @@
               <a:t>id</a:t>
             </a:r>
             <a:r>
-              <a:rPr kumimoji="0" lang="fr-FR" altLang="fr-FR" sz="1400" b="0" i="0" u="none" strike="noStrike" cap="none" normalizeH="0" baseline="0" dirty="0">
+              <a:rPr kumimoji="0" lang="fr-FR" altLang="fr-FR" sz="1200" b="0" i="0" u="none" strike="noStrike" cap="none" normalizeH="0" baseline="0" dirty="0">
                 <a:ln>
                   <a:noFill/>
                 </a:ln>
@@ -8405,7 +8407,7 @@
               <a:t>;</a:t>
             </a:r>
             <a:br>
-              <a:rPr kumimoji="0" lang="fr-FR" altLang="fr-FR" sz="1400" b="0" i="0" u="none" strike="noStrike" cap="none" normalizeH="0" baseline="0" dirty="0">
+              <a:rPr kumimoji="0" lang="fr-FR" altLang="fr-FR" sz="1200" b="0" i="0" u="none" strike="noStrike" cap="none" normalizeH="0" baseline="0" dirty="0">
                 <a:ln>
                   <a:noFill/>
                 </a:ln>
@@ -8417,7 +8419,7 @@
               </a:rPr>
             </a:br>
             <a:br>
-              <a:rPr kumimoji="0" lang="fr-FR" altLang="fr-FR" sz="1400" b="0" i="0" u="none" strike="noStrike" cap="none" normalizeH="0" baseline="0" dirty="0">
+              <a:rPr kumimoji="0" lang="fr-FR" altLang="fr-FR" sz="1200" b="0" i="0" u="none" strike="noStrike" cap="none" normalizeH="0" baseline="0" dirty="0">
                 <a:ln>
                   <a:noFill/>
                 </a:ln>
@@ -8429,7 +8431,7 @@
               </a:rPr>
             </a:br>
             <a:r>
-              <a:rPr kumimoji="0" lang="fr-FR" altLang="fr-FR" sz="1400" b="0" i="0" u="none" strike="noStrike" cap="none" normalizeH="0" baseline="0" dirty="0">
+              <a:rPr kumimoji="0" lang="fr-FR" altLang="fr-FR" sz="1200" b="0" i="0" u="none" strike="noStrike" cap="none" normalizeH="0" baseline="0" dirty="0">
                 <a:ln>
                   <a:noFill/>
                 </a:ln>
@@ -8442,7 +8444,7 @@
               <a:t>    </a:t>
             </a:r>
             <a:r>
-              <a:rPr kumimoji="0" lang="fr-FR" altLang="fr-FR" sz="1400" b="0" i="0" u="none" strike="noStrike" cap="none" normalizeH="0" baseline="0" dirty="0">
+              <a:rPr kumimoji="0" lang="fr-FR" altLang="fr-FR" sz="1200" b="0" i="0" u="none" strike="noStrike" cap="none" normalizeH="0" baseline="0" dirty="0">
                 <a:ln>
                   <a:noFill/>
                 </a:ln>
@@ -8455,7 +8457,7 @@
               <a:t>@Column</a:t>
             </a:r>
             <a:r>
-              <a:rPr kumimoji="0" lang="fr-FR" altLang="fr-FR" sz="1400" b="0" i="0" u="none" strike="noStrike" cap="none" normalizeH="0" baseline="0" dirty="0">
+              <a:rPr kumimoji="0" lang="fr-FR" altLang="fr-FR" sz="1200" b="0" i="0" u="none" strike="noStrike" cap="none" normalizeH="0" baseline="0" dirty="0">
                 <a:ln>
                   <a:noFill/>
                 </a:ln>
@@ -8468,7 +8470,7 @@
               <a:t>(name = </a:t>
             </a:r>
             <a:r>
-              <a:rPr kumimoji="0" lang="fr-FR" altLang="fr-FR" sz="1400" b="0" i="0" u="none" strike="noStrike" cap="none" normalizeH="0" baseline="0" dirty="0">
+              <a:rPr kumimoji="0" lang="fr-FR" altLang="fr-FR" sz="1200" b="0" i="0" u="none" strike="noStrike" cap="none" normalizeH="0" baseline="0" dirty="0">
                 <a:ln>
                   <a:noFill/>
                 </a:ln>
@@ -8481,7 +8483,7 @@
               <a:t>"location</a:t>
             </a:r>
             <a:br>
-              <a:rPr kumimoji="0" lang="fr-FR" altLang="fr-FR" sz="1400" b="0" i="1" u="none" strike="noStrike" cap="none" normalizeH="0" baseline="0" dirty="0">
+              <a:rPr kumimoji="0" lang="fr-FR" altLang="fr-FR" sz="1200" b="0" i="1" u="none" strike="noStrike" cap="none" normalizeH="0" baseline="0" dirty="0">
                 <a:ln>
                   <a:noFill/>
                 </a:ln>
@@ -8493,7 +8495,7 @@
               </a:rPr>
             </a:br>
             <a:r>
-              <a:rPr kumimoji="0" lang="fr-FR" altLang="fr-FR" sz="1400" b="0" i="1" u="none" strike="noStrike" cap="none" normalizeH="0" baseline="0" dirty="0">
+              <a:rPr kumimoji="0" lang="fr-FR" altLang="fr-FR" sz="1200" b="0" i="1" u="none" strike="noStrike" cap="none" normalizeH="0" baseline="0" dirty="0">
                 <a:ln>
                   <a:noFill/>
                 </a:ln>
@@ -8506,7 +8508,7 @@
               <a:t>    </a:t>
             </a:r>
             <a:r>
-              <a:rPr kumimoji="0" lang="fr-FR" altLang="fr-FR" sz="1400" b="0" i="0" u="none" strike="noStrike" cap="none" normalizeH="0" baseline="0" dirty="0" err="1">
+              <a:rPr kumimoji="0" lang="fr-FR" altLang="fr-FR" sz="1200" b="0" i="0" u="none" strike="noStrike" cap="none" normalizeH="0" baseline="0" dirty="0" err="1">
                 <a:ln>
                   <a:noFill/>
                 </a:ln>
@@ -8519,7 +8521,7 @@
               <a:t>private</a:t>
             </a:r>
             <a:r>
-              <a:rPr kumimoji="0" lang="fr-FR" altLang="fr-FR" sz="1400" b="0" i="0" u="none" strike="noStrike" cap="none" normalizeH="0" baseline="0" dirty="0">
+              <a:rPr kumimoji="0" lang="fr-FR" altLang="fr-FR" sz="1200" b="0" i="0" u="none" strike="noStrike" cap="none" normalizeH="0" baseline="0" dirty="0">
                 <a:ln>
                   <a:noFill/>
                 </a:ln>
@@ -8532,7 +8534,7 @@
               <a:t> </a:t>
             </a:r>
             <a:r>
-              <a:rPr kumimoji="0" lang="fr-FR" altLang="fr-FR" sz="1400" b="0" i="0" u="none" strike="noStrike" cap="none" normalizeH="0" baseline="0" dirty="0">
+              <a:rPr kumimoji="0" lang="fr-FR" altLang="fr-FR" sz="1200" b="0" i="0" u="none" strike="noStrike" cap="none" normalizeH="0" baseline="0" dirty="0">
                 <a:ln>
                   <a:noFill/>
                 </a:ln>
@@ -8545,7 +8547,7 @@
               <a:t>String </a:t>
             </a:r>
             <a:r>
-              <a:rPr kumimoji="0" lang="fr-FR" altLang="fr-FR" sz="1400" b="0" i="0" u="none" strike="noStrike" cap="none" normalizeH="0" baseline="0" dirty="0">
+              <a:rPr kumimoji="0" lang="fr-FR" altLang="fr-FR" sz="1200" b="0" i="0" u="none" strike="noStrike" cap="none" normalizeH="0" baseline="0" dirty="0">
                 <a:ln>
                   <a:noFill/>
                 </a:ln>
@@ -8558,7 +8560,7 @@
               <a:t>location</a:t>
             </a:r>
             <a:r>
-              <a:rPr kumimoji="0" lang="fr-FR" altLang="fr-FR" sz="1400" b="0" i="0" u="none" strike="noStrike" cap="none" normalizeH="0" baseline="0" dirty="0">
+              <a:rPr kumimoji="0" lang="fr-FR" altLang="fr-FR" sz="1200" b="0" i="0" u="none" strike="noStrike" cap="none" normalizeH="0" baseline="0" dirty="0">
                 <a:ln>
                   <a:noFill/>
                 </a:ln>
@@ -8571,7 +8573,7 @@
               <a:t>;</a:t>
             </a:r>
             <a:br>
-              <a:rPr kumimoji="0" lang="fr-FR" altLang="fr-FR" sz="1400" b="0" i="0" u="none" strike="noStrike" cap="none" normalizeH="0" baseline="0" dirty="0">
+              <a:rPr kumimoji="0" lang="fr-FR" altLang="fr-FR" sz="1200" b="0" i="0" u="none" strike="noStrike" cap="none" normalizeH="0" baseline="0" dirty="0">
                 <a:ln>
                   <a:noFill/>
                 </a:ln>
@@ -8583,7 +8585,7 @@
               </a:rPr>
             </a:br>
             <a:br>
-              <a:rPr kumimoji="0" lang="fr-FR" altLang="fr-FR" sz="1400" b="0" i="0" u="none" strike="noStrike" cap="none" normalizeH="0" baseline="0" dirty="0">
+              <a:rPr kumimoji="0" lang="fr-FR" altLang="fr-FR" sz="1200" b="0" i="0" u="none" strike="noStrike" cap="none" normalizeH="0" baseline="0" dirty="0">
                 <a:ln>
                   <a:noFill/>
                 </a:ln>
@@ -8595,7 +8597,7 @@
               </a:rPr>
             </a:br>
             <a:r>
-              <a:rPr kumimoji="0" lang="fr-FR" altLang="fr-FR" sz="1400" b="0" i="0" u="none" strike="noStrike" cap="none" normalizeH="0" baseline="0" dirty="0">
+              <a:rPr kumimoji="0" lang="fr-FR" altLang="fr-FR" sz="1200" b="0" i="0" u="none" strike="noStrike" cap="none" normalizeH="0" baseline="0" dirty="0">
                 <a:ln>
                   <a:noFill/>
                 </a:ln>
@@ -8608,7 +8610,7 @@
               <a:t>    </a:t>
             </a:r>
             <a:r>
-              <a:rPr kumimoji="0" lang="fr-FR" altLang="fr-FR" sz="1400" b="0" i="0" u="none" strike="noStrike" cap="none" normalizeH="0" baseline="0" dirty="0">
+              <a:rPr kumimoji="0" lang="fr-FR" altLang="fr-FR" sz="1200" b="0" i="0" u="none" strike="noStrike" cap="none" normalizeH="0" baseline="0" dirty="0">
                 <a:ln>
                   <a:noFill/>
                 </a:ln>
@@ -8621,7 +8623,7 @@
               <a:t>@Column</a:t>
             </a:r>
             <a:r>
-              <a:rPr kumimoji="0" lang="fr-FR" altLang="fr-FR" sz="1400" b="0" i="0" u="none" strike="noStrike" cap="none" normalizeH="0" baseline="0" dirty="0">
+              <a:rPr kumimoji="0" lang="fr-FR" altLang="fr-FR" sz="1200" b="0" i="0" u="none" strike="noStrike" cap="none" normalizeH="0" baseline="0" dirty="0">
                 <a:ln>
                   <a:noFill/>
                 </a:ln>
@@ -8634,7 +8636,7 @@
               <a:t>(name = </a:t>
             </a:r>
             <a:r>
-              <a:rPr kumimoji="0" lang="fr-FR" altLang="fr-FR" sz="1400" b="0" i="0" u="none" strike="noStrike" cap="none" normalizeH="0" baseline="0" dirty="0">
+              <a:rPr kumimoji="0" lang="fr-FR" altLang="fr-FR" sz="1200" b="0" i="0" u="none" strike="noStrike" cap="none" normalizeH="0" baseline="0" dirty="0">
                 <a:ln>
                   <a:noFill/>
                 </a:ln>
@@ -8647,7 +8649,7 @@
               <a:t>"</a:t>
             </a:r>
             <a:r>
-              <a:rPr kumimoji="0" lang="fr-FR" altLang="fr-FR" sz="1400" b="0" i="0" u="none" strike="noStrike" cap="none" normalizeH="0" baseline="0" dirty="0" err="1">
+              <a:rPr kumimoji="0" lang="fr-FR" altLang="fr-FR" sz="1200" b="0" i="0" u="none" strike="noStrike" cap="none" normalizeH="0" baseline="0" dirty="0" err="1">
                 <a:ln>
                   <a:noFill/>
                 </a:ln>
@@ -8660,7 +8662,7 @@
               <a:t>name</a:t>
             </a:r>
             <a:r>
-              <a:rPr kumimoji="0" lang="fr-FR" altLang="fr-FR" sz="1400" b="0" i="0" u="none" strike="noStrike" cap="none" normalizeH="0" baseline="0" dirty="0">
+              <a:rPr kumimoji="0" lang="fr-FR" altLang="fr-FR" sz="1200" b="0" i="0" u="none" strike="noStrike" cap="none" normalizeH="0" baseline="0" dirty="0">
                 <a:ln>
                   <a:noFill/>
                 </a:ln>
@@ -8673,7 +8675,7 @@
               <a:t>"</a:t>
             </a:r>
             <a:r>
-              <a:rPr kumimoji="0" lang="fr-FR" altLang="fr-FR" sz="1400" b="0" i="0" u="none" strike="noStrike" cap="none" normalizeH="0" baseline="0" dirty="0">
+              <a:rPr kumimoji="0" lang="fr-FR" altLang="fr-FR" sz="1200" b="0" i="0" u="none" strike="noStrike" cap="none" normalizeH="0" baseline="0" dirty="0">
                 <a:ln>
                   <a:noFill/>
                 </a:ln>
@@ -8686,7 +8688,7 @@
               <a:t>, </a:t>
             </a:r>
             <a:r>
-              <a:rPr kumimoji="0" lang="fr-FR" altLang="fr-FR" sz="1400" b="0" i="0" u="none" strike="noStrike" cap="none" normalizeH="0" baseline="0" dirty="0" err="1">
+              <a:rPr kumimoji="0" lang="fr-FR" altLang="fr-FR" sz="1200" b="0" i="0" u="none" strike="noStrike" cap="none" normalizeH="0" baseline="0" dirty="0" err="1">
                 <a:ln>
                   <a:noFill/>
                 </a:ln>
@@ -8699,7 +8701,7 @@
               <a:t>length</a:t>
             </a:r>
             <a:r>
-              <a:rPr kumimoji="0" lang="fr-FR" altLang="fr-FR" sz="1400" b="0" i="0" u="none" strike="noStrike" cap="none" normalizeH="0" baseline="0" dirty="0">
+              <a:rPr kumimoji="0" lang="fr-FR" altLang="fr-FR" sz="1200" b="0" i="0" u="none" strike="noStrike" cap="none" normalizeH="0" baseline="0" dirty="0">
                 <a:ln>
                   <a:noFill/>
                 </a:ln>
@@ -8712,7 +8714,7 @@
               <a:t> = </a:t>
             </a:r>
             <a:r>
-              <a:rPr kumimoji="0" lang="fr-FR" altLang="fr-FR" sz="1400" b="0" i="0" u="none" strike="noStrike" cap="none" normalizeH="0" baseline="0" dirty="0">
+              <a:rPr kumimoji="0" lang="fr-FR" altLang="fr-FR" sz="1200" b="0" i="0" u="none" strike="noStrike" cap="none" normalizeH="0" baseline="0" dirty="0">
                 <a:ln>
                   <a:noFill/>
                 </a:ln>
@@ -8725,7 +8727,7 @@
               <a:t>100</a:t>
             </a:r>
             <a:r>
-              <a:rPr kumimoji="0" lang="fr-FR" altLang="fr-FR" sz="1400" b="0" i="0" u="none" strike="noStrike" cap="none" normalizeH="0" baseline="0" dirty="0">
+              <a:rPr kumimoji="0" lang="fr-FR" altLang="fr-FR" sz="1200" b="0" i="0" u="none" strike="noStrike" cap="none" normalizeH="0" baseline="0" dirty="0">
                 <a:ln>
                   <a:noFill/>
                 </a:ln>
@@ -8738,7 +8740,7 @@
               <a:t>)</a:t>
             </a:r>
             <a:br>
-              <a:rPr kumimoji="0" lang="fr-FR" altLang="fr-FR" sz="1400" b="0" i="0" u="none" strike="noStrike" cap="none" normalizeH="0" baseline="0" dirty="0">
+              <a:rPr kumimoji="0" lang="fr-FR" altLang="fr-FR" sz="1200" b="0" i="0" u="none" strike="noStrike" cap="none" normalizeH="0" baseline="0" dirty="0">
                 <a:ln>
                   <a:noFill/>
                 </a:ln>
@@ -8750,7 +8752,7 @@
               </a:rPr>
             </a:br>
             <a:r>
-              <a:rPr kumimoji="0" lang="fr-FR" altLang="fr-FR" sz="1400" b="0" i="0" u="none" strike="noStrike" cap="none" normalizeH="0" baseline="0" dirty="0">
+              <a:rPr kumimoji="0" lang="fr-FR" altLang="fr-FR" sz="1200" b="0" i="0" u="none" strike="noStrike" cap="none" normalizeH="0" baseline="0" dirty="0">
                 <a:ln>
                   <a:noFill/>
                 </a:ln>
@@ -8763,7 +8765,7 @@
               <a:t>    </a:t>
             </a:r>
             <a:r>
-              <a:rPr kumimoji="0" lang="fr-FR" altLang="fr-FR" sz="1400" b="0" i="0" u="none" strike="noStrike" cap="none" normalizeH="0" baseline="0" dirty="0" err="1">
+              <a:rPr kumimoji="0" lang="fr-FR" altLang="fr-FR" sz="1200" b="0" i="0" u="none" strike="noStrike" cap="none" normalizeH="0" baseline="0" dirty="0" err="1">
                 <a:ln>
                   <a:noFill/>
                 </a:ln>
@@ -8776,7 +8778,7 @@
               <a:t>private</a:t>
             </a:r>
             <a:r>
-              <a:rPr kumimoji="0" lang="fr-FR" altLang="fr-FR" sz="1400" b="0" i="0" u="none" strike="noStrike" cap="none" normalizeH="0" baseline="0" dirty="0">
+              <a:rPr kumimoji="0" lang="fr-FR" altLang="fr-FR" sz="1200" b="0" i="0" u="none" strike="noStrike" cap="none" normalizeH="0" baseline="0" dirty="0">
                 <a:ln>
                   <a:noFill/>
                 </a:ln>
@@ -8789,7 +8791,7 @@
               <a:t> </a:t>
             </a:r>
             <a:r>
-              <a:rPr kumimoji="0" lang="fr-FR" altLang="fr-FR" sz="1400" b="0" i="0" u="none" strike="noStrike" cap="none" normalizeH="0" baseline="0" dirty="0">
+              <a:rPr kumimoji="0" lang="fr-FR" altLang="fr-FR" sz="1200" b="0" i="0" u="none" strike="noStrike" cap="none" normalizeH="0" baseline="0" dirty="0">
                 <a:ln>
                   <a:noFill/>
                 </a:ln>
@@ -8802,7 +8804,7 @@
               <a:t>String </a:t>
             </a:r>
             <a:r>
-              <a:rPr kumimoji="0" lang="fr-FR" altLang="fr-FR" sz="1400" b="0" i="0" u="none" strike="noStrike" cap="none" normalizeH="0" baseline="0" dirty="0" err="1">
+              <a:rPr kumimoji="0" lang="fr-FR" altLang="fr-FR" sz="1200" b="0" i="0" u="none" strike="noStrike" cap="none" normalizeH="0" baseline="0" dirty="0" err="1">
                 <a:ln>
                   <a:noFill/>
                 </a:ln>
@@ -8815,7 +8817,7 @@
               <a:t>name</a:t>
             </a:r>
             <a:r>
-              <a:rPr kumimoji="0" lang="fr-FR" altLang="fr-FR" sz="1400" b="0" i="0" u="none" strike="noStrike" cap="none" normalizeH="0" baseline="0" dirty="0">
+              <a:rPr kumimoji="0" lang="fr-FR" altLang="fr-FR" sz="1200" b="0" i="0" u="none" strike="noStrike" cap="none" normalizeH="0" baseline="0" dirty="0">
                 <a:ln>
                   <a:noFill/>
                 </a:ln>
@@ -8828,7 +8830,7 @@
               <a:t>;</a:t>
             </a:r>
             <a:br>
-              <a:rPr kumimoji="0" lang="fr-FR" altLang="fr-FR" sz="1400" b="0" i="0" u="none" strike="noStrike" cap="none" normalizeH="0" baseline="0" dirty="0">
+              <a:rPr kumimoji="0" lang="fr-FR" altLang="fr-FR" sz="1200" b="0" i="0" u="none" strike="noStrike" cap="none" normalizeH="0" baseline="0" dirty="0">
                 <a:ln>
                   <a:noFill/>
                 </a:ln>
@@ -8840,7 +8842,7 @@
               </a:rPr>
             </a:br>
             <a:br>
-              <a:rPr kumimoji="0" lang="fr-FR" altLang="fr-FR" sz="1400" b="0" i="0" u="none" strike="noStrike" cap="none" normalizeH="0" baseline="0" dirty="0">
+              <a:rPr kumimoji="0" lang="fr-FR" altLang="fr-FR" sz="1200" b="0" i="0" u="none" strike="noStrike" cap="none" normalizeH="0" baseline="0" dirty="0">
                 <a:ln>
                   <a:noFill/>
                 </a:ln>
@@ -8852,7 +8854,7 @@
               </a:rPr>
             </a:br>
             <a:r>
-              <a:rPr kumimoji="0" lang="fr-FR" altLang="fr-FR" sz="1400" b="0" i="0" u="none" strike="noStrike" cap="none" normalizeH="0" baseline="0" dirty="0">
+              <a:rPr kumimoji="0" lang="fr-FR" altLang="fr-FR" sz="1200" b="0" i="0" u="none" strike="noStrike" cap="none" normalizeH="0" baseline="0" dirty="0">
                 <a:ln>
                   <a:noFill/>
                 </a:ln>
@@ -8865,7 +8867,7 @@
               <a:t>    </a:t>
             </a:r>
             <a:r>
-              <a:rPr kumimoji="0" lang="fr-FR" altLang="fr-FR" sz="1400" b="0" i="0" u="none" strike="noStrike" cap="none" normalizeH="0" baseline="0" dirty="0">
+              <a:rPr kumimoji="0" lang="fr-FR" altLang="fr-FR" sz="1200" b="0" i="0" u="none" strike="noStrike" cap="none" normalizeH="0" baseline="0" dirty="0">
                 <a:ln>
                   <a:noFill/>
                 </a:ln>
@@ -8878,7 +8880,7 @@
               <a:t>@OneToOne</a:t>
             </a:r>
             <a:r>
-              <a:rPr kumimoji="0" lang="fr-FR" altLang="fr-FR" sz="1400" b="0" i="0" u="none" strike="noStrike" cap="none" normalizeH="0" baseline="0" dirty="0">
+              <a:rPr kumimoji="0" lang="fr-FR" altLang="fr-FR" sz="1200" b="0" i="0" u="none" strike="noStrike" cap="none" normalizeH="0" baseline="0" dirty="0">
                 <a:ln>
                   <a:noFill/>
                 </a:ln>
@@ -8891,7 +8893,7 @@
               <a:t>(fetch = </a:t>
             </a:r>
             <a:r>
-              <a:rPr kumimoji="0" lang="fr-FR" altLang="fr-FR" sz="1400" b="0" i="0" u="none" strike="noStrike" cap="none" normalizeH="0" baseline="0" dirty="0" err="1">
+              <a:rPr kumimoji="0" lang="fr-FR" altLang="fr-FR" sz="1200" b="0" i="0" u="none" strike="noStrike" cap="none" normalizeH="0" baseline="0" dirty="0" err="1">
                 <a:ln>
                   <a:noFill/>
                 </a:ln>
@@ -8904,7 +8906,7 @@
               <a:t>FetchType</a:t>
             </a:r>
             <a:r>
-              <a:rPr kumimoji="0" lang="fr-FR" altLang="fr-FR" sz="1400" b="0" i="0" u="none" strike="noStrike" cap="none" normalizeH="0" baseline="0" dirty="0" err="1">
+              <a:rPr kumimoji="0" lang="fr-FR" altLang="fr-FR" sz="1200" b="0" i="0" u="none" strike="noStrike" cap="none" normalizeH="0" baseline="0" dirty="0" err="1">
                 <a:ln>
                   <a:noFill/>
                 </a:ln>
@@ -8917,7 +8919,7 @@
               <a:t>.</a:t>
             </a:r>
             <a:r>
-              <a:rPr kumimoji="0" lang="fr-FR" altLang="fr-FR" sz="1400" b="0" i="1" u="none" strike="noStrike" cap="none" normalizeH="0" baseline="0" dirty="0" err="1">
+              <a:rPr kumimoji="0" lang="fr-FR" altLang="fr-FR" sz="1200" b="0" i="1" u="none" strike="noStrike" cap="none" normalizeH="0" baseline="0" dirty="0" err="1">
                 <a:ln>
                   <a:noFill/>
                 </a:ln>
@@ -8930,7 +8932,7 @@
               <a:t>LAZY</a:t>
             </a:r>
             <a:r>
-              <a:rPr kumimoji="0" lang="fr-FR" altLang="fr-FR" sz="1400" b="0" i="0" u="none" strike="noStrike" cap="none" normalizeH="0" baseline="0" dirty="0">
+              <a:rPr kumimoji="0" lang="fr-FR" altLang="fr-FR" sz="1200" b="0" i="0" u="none" strike="noStrike" cap="none" normalizeH="0" baseline="0" dirty="0">
                 <a:ln>
                   <a:noFill/>
                 </a:ln>
@@ -8943,7 +8945,7 @@
               <a:t>)</a:t>
             </a:r>
             <a:br>
-              <a:rPr kumimoji="0" lang="fr-FR" altLang="fr-FR" sz="1400" b="0" i="0" u="none" strike="noStrike" cap="none" normalizeH="0" baseline="0" dirty="0">
+              <a:rPr kumimoji="0" lang="fr-FR" altLang="fr-FR" sz="1200" b="0" i="0" u="none" strike="noStrike" cap="none" normalizeH="0" baseline="0" dirty="0">
                 <a:ln>
                   <a:noFill/>
                 </a:ln>
@@ -8955,7 +8957,7 @@
               </a:rPr>
             </a:br>
             <a:r>
-              <a:rPr kumimoji="0" lang="fr-FR" altLang="fr-FR" sz="1400" b="0" i="0" u="none" strike="noStrike" cap="none" normalizeH="0" baseline="0" dirty="0">
+              <a:rPr kumimoji="0" lang="fr-FR" altLang="fr-FR" sz="1200" b="0" i="0" u="none" strike="noStrike" cap="none" normalizeH="0" baseline="0" dirty="0">
                 <a:ln>
                   <a:noFill/>
                 </a:ln>
@@ -8968,7 +8970,7 @@
               <a:t>    </a:t>
             </a:r>
             <a:r>
-              <a:rPr kumimoji="0" lang="fr-FR" altLang="fr-FR" sz="1400" b="0" i="0" u="none" strike="noStrike" cap="none" normalizeH="0" baseline="0" dirty="0">
+              <a:rPr kumimoji="0" lang="fr-FR" altLang="fr-FR" sz="1200" b="0" i="0" u="none" strike="noStrike" cap="none" normalizeH="0" baseline="0" dirty="0">
                 <a:ln>
                   <a:noFill/>
                 </a:ln>
@@ -8981,7 +8983,7 @@
               <a:t>@JoinColumn</a:t>
             </a:r>
             <a:r>
-              <a:rPr kumimoji="0" lang="fr-FR" altLang="fr-FR" sz="1400" b="0" i="0" u="none" strike="noStrike" cap="none" normalizeH="0" baseline="0" dirty="0">
+              <a:rPr kumimoji="0" lang="fr-FR" altLang="fr-FR" sz="1200" b="0" i="0" u="none" strike="noStrike" cap="none" normalizeH="0" baseline="0" dirty="0">
                 <a:ln>
                   <a:noFill/>
                 </a:ln>
@@ -8994,7 +8996,7 @@
               <a:t>(name = </a:t>
             </a:r>
             <a:r>
-              <a:rPr kumimoji="0" lang="fr-FR" altLang="fr-FR" sz="1400" b="0" i="0" u="none" strike="noStrike" cap="none" normalizeH="0" baseline="0" dirty="0">
+              <a:rPr kumimoji="0" lang="fr-FR" altLang="fr-FR" sz="1200" b="0" i="0" u="none" strike="noStrike" cap="none" normalizeH="0" baseline="0" dirty="0">
                 <a:ln>
                   <a:noFill/>
                 </a:ln>
@@ -9007,7 +9009,7 @@
               <a:t>"</a:t>
             </a:r>
             <a:r>
-              <a:rPr kumimoji="0" lang="fr-FR" altLang="fr-FR" sz="1400" b="0" i="0" u="none" strike="noStrike" cap="none" normalizeH="0" baseline="0" dirty="0" err="1">
+              <a:rPr kumimoji="0" lang="fr-FR" altLang="fr-FR" sz="1200" b="0" i="0" u="none" strike="noStrike" cap="none" normalizeH="0" baseline="0" dirty="0" err="1">
                 <a:ln>
                   <a:noFill/>
                 </a:ln>
@@ -9020,7 +9022,7 @@
               <a:t>director_id</a:t>
             </a:r>
             <a:r>
-              <a:rPr kumimoji="0" lang="fr-FR" altLang="fr-FR" sz="1400" b="0" i="0" u="none" strike="noStrike" cap="none" normalizeH="0" baseline="0" dirty="0">
+              <a:rPr kumimoji="0" lang="fr-FR" altLang="fr-FR" sz="1200" b="0" i="0" u="none" strike="noStrike" cap="none" normalizeH="0" baseline="0" dirty="0">
                 <a:ln>
                   <a:noFill/>
                 </a:ln>
@@ -9033,7 +9035,7 @@
               <a:t>"</a:t>
             </a:r>
             <a:r>
-              <a:rPr kumimoji="0" lang="fr-FR" altLang="fr-FR" sz="1400" b="0" i="0" u="none" strike="noStrike" cap="none" normalizeH="0" baseline="0" dirty="0">
+              <a:rPr kumimoji="0" lang="fr-FR" altLang="fr-FR" sz="1200" b="0" i="0" u="none" strike="noStrike" cap="none" normalizeH="0" baseline="0" dirty="0">
                 <a:ln>
                   <a:noFill/>
                 </a:ln>
@@ -9046,7 +9048,7 @@
               <a:t>)</a:t>
             </a:r>
             <a:br>
-              <a:rPr kumimoji="0" lang="fr-FR" altLang="fr-FR" sz="1400" b="0" i="0" u="none" strike="noStrike" cap="none" normalizeH="0" baseline="0" dirty="0">
+              <a:rPr kumimoji="0" lang="fr-FR" altLang="fr-FR" sz="1200" b="0" i="0" u="none" strike="noStrike" cap="none" normalizeH="0" baseline="0" dirty="0">
                 <a:ln>
                   <a:noFill/>
                 </a:ln>
@@ -9058,7 +9060,7 @@
               </a:rPr>
             </a:br>
             <a:r>
-              <a:rPr kumimoji="0" lang="fr-FR" altLang="fr-FR" sz="1400" b="0" i="0" u="none" strike="noStrike" cap="none" normalizeH="0" baseline="0" dirty="0">
+              <a:rPr kumimoji="0" lang="fr-FR" altLang="fr-FR" sz="1200" b="0" i="0" u="none" strike="noStrike" cap="none" normalizeH="0" baseline="0" dirty="0">
                 <a:ln>
                   <a:noFill/>
                 </a:ln>
@@ -9071,7 +9073,7 @@
               <a:t>    </a:t>
             </a:r>
             <a:r>
-              <a:rPr kumimoji="0" lang="fr-FR" altLang="fr-FR" sz="1400" b="0" i="0" u="none" strike="noStrike" cap="none" normalizeH="0" baseline="0" dirty="0" err="1">
+              <a:rPr kumimoji="0" lang="fr-FR" altLang="fr-FR" sz="1200" b="0" i="0" u="none" strike="noStrike" cap="none" normalizeH="0" baseline="0" dirty="0" err="1">
                 <a:ln>
                   <a:noFill/>
                 </a:ln>
@@ -9084,7 +9086,7 @@
               <a:t>private</a:t>
             </a:r>
             <a:r>
-              <a:rPr kumimoji="0" lang="fr-FR" altLang="fr-FR" sz="1400" b="0" i="0" u="none" strike="noStrike" cap="none" normalizeH="0" baseline="0" dirty="0">
+              <a:rPr kumimoji="0" lang="fr-FR" altLang="fr-FR" sz="1200" b="0" i="0" u="none" strike="noStrike" cap="none" normalizeH="0" baseline="0" dirty="0">
                 <a:ln>
                   <a:noFill/>
                 </a:ln>
@@ -9097,7 +9099,7 @@
               <a:t> </a:t>
             </a:r>
             <a:r>
-              <a:rPr kumimoji="0" lang="fr-FR" altLang="fr-FR" sz="1400" b="0" i="0" u="none" strike="noStrike" cap="none" normalizeH="0" baseline="0" dirty="0" err="1">
+              <a:rPr kumimoji="0" lang="fr-FR" altLang="fr-FR" sz="1200" b="0" i="0" u="none" strike="noStrike" cap="none" normalizeH="0" baseline="0" dirty="0" err="1">
                 <a:ln>
                   <a:noFill/>
                 </a:ln>
@@ -9110,7 +9112,7 @@
               <a:t>Director</a:t>
             </a:r>
             <a:r>
-              <a:rPr kumimoji="0" lang="fr-FR" altLang="fr-FR" sz="1400" b="0" i="0" u="none" strike="noStrike" cap="none" normalizeH="0" baseline="0" dirty="0">
+              <a:rPr kumimoji="0" lang="fr-FR" altLang="fr-FR" sz="1200" b="0" i="0" u="none" strike="noStrike" cap="none" normalizeH="0" baseline="0" dirty="0">
                 <a:ln>
                   <a:noFill/>
                 </a:ln>
@@ -9123,7 +9125,7 @@
               <a:t> </a:t>
             </a:r>
             <a:r>
-              <a:rPr kumimoji="0" lang="fr-FR" altLang="fr-FR" sz="1400" b="0" i="0" u="none" strike="noStrike" cap="none" normalizeH="0" baseline="0" dirty="0" err="1">
+              <a:rPr kumimoji="0" lang="fr-FR" altLang="fr-FR" sz="1200" b="0" i="0" u="none" strike="noStrike" cap="none" normalizeH="0" baseline="0" dirty="0" err="1">
                 <a:ln>
                   <a:noFill/>
                 </a:ln>
@@ -9136,7 +9138,7 @@
               <a:t>director</a:t>
             </a:r>
             <a:r>
-              <a:rPr kumimoji="0" lang="fr-FR" altLang="fr-FR" sz="1400" b="0" i="0" u="none" strike="noStrike" cap="none" normalizeH="0" baseline="0" dirty="0">
+              <a:rPr kumimoji="0" lang="fr-FR" altLang="fr-FR" sz="1200" b="0" i="0" u="none" strike="noStrike" cap="none" normalizeH="0" baseline="0" dirty="0">
                 <a:ln>
                   <a:noFill/>
                 </a:ln>
@@ -9149,7 +9151,7 @@
               <a:t>;</a:t>
             </a:r>
             <a:br>
-              <a:rPr kumimoji="0" lang="fr-FR" altLang="fr-FR" sz="1400" b="0" i="0" u="none" strike="noStrike" cap="none" normalizeH="0" baseline="0" dirty="0">
+              <a:rPr kumimoji="0" lang="fr-FR" altLang="fr-FR" sz="1200" b="0" i="0" u="none" strike="noStrike" cap="none" normalizeH="0" baseline="0" dirty="0">
                 <a:ln>
                   <a:noFill/>
                 </a:ln>
@@ -9161,7 +9163,7 @@
               </a:rPr>
             </a:br>
             <a:br>
-              <a:rPr kumimoji="0" lang="fr-FR" altLang="fr-FR" sz="1400" b="0" i="1" u="none" strike="noStrike" cap="none" normalizeH="0" baseline="0" dirty="0">
+              <a:rPr kumimoji="0" lang="fr-FR" altLang="fr-FR" sz="1200" b="0" i="1" u="none" strike="noStrike" cap="none" normalizeH="0" baseline="0" dirty="0">
                 <a:ln>
                   <a:noFill/>
                 </a:ln>
@@ -9173,7 +9175,7 @@
               </a:rPr>
             </a:br>
             <a:r>
-              <a:rPr kumimoji="0" lang="fr-FR" altLang="fr-FR" sz="1400" b="0" i="1" u="none" strike="noStrike" cap="none" normalizeH="0" baseline="0" dirty="0">
+              <a:rPr kumimoji="0" lang="fr-FR" altLang="fr-FR" sz="1200" b="0" i="1" u="none" strike="noStrike" cap="none" normalizeH="0" baseline="0" dirty="0">
                 <a:ln>
                   <a:noFill/>
                 </a:ln>
@@ -9186,7 +9188,7 @@
               <a:t>    </a:t>
             </a:r>
             <a:r>
-              <a:rPr kumimoji="0" lang="fr-FR" altLang="fr-FR" sz="1400" b="0" i="0" u="none" strike="noStrike" cap="none" normalizeH="0" baseline="0" dirty="0">
+              <a:rPr kumimoji="0" lang="fr-FR" altLang="fr-FR" sz="1200" b="0" i="0" u="none" strike="noStrike" cap="none" normalizeH="0" baseline="0" dirty="0">
                 <a:ln>
                   <a:noFill/>
                 </a:ln>
@@ -9199,7 +9201,7 @@
               <a:t>@ManyToMany</a:t>
             </a:r>
             <a:r>
-              <a:rPr kumimoji="0" lang="fr-FR" altLang="fr-FR" sz="1400" b="0" i="0" u="none" strike="noStrike" cap="none" normalizeH="0" baseline="0" dirty="0">
+              <a:rPr kumimoji="0" lang="fr-FR" altLang="fr-FR" sz="1200" b="0" i="0" u="none" strike="noStrike" cap="none" normalizeH="0" baseline="0" dirty="0">
                 <a:ln>
                   <a:noFill/>
                 </a:ln>
@@ -9212,7 +9214,7 @@
               <a:t>(fetch = </a:t>
             </a:r>
             <a:r>
-              <a:rPr kumimoji="0" lang="fr-FR" altLang="fr-FR" sz="1400" b="0" i="0" u="none" strike="noStrike" cap="none" normalizeH="0" baseline="0" dirty="0" err="1">
+              <a:rPr kumimoji="0" lang="fr-FR" altLang="fr-FR" sz="1200" b="0" i="0" u="none" strike="noStrike" cap="none" normalizeH="0" baseline="0" dirty="0" err="1">
                 <a:ln>
                   <a:noFill/>
                 </a:ln>
@@ -9225,7 +9227,7 @@
               <a:t>FetchType</a:t>
             </a:r>
             <a:r>
-              <a:rPr kumimoji="0" lang="fr-FR" altLang="fr-FR" sz="1400" b="0" i="0" u="none" strike="noStrike" cap="none" normalizeH="0" baseline="0" dirty="0" err="1">
+              <a:rPr kumimoji="0" lang="fr-FR" altLang="fr-FR" sz="1200" b="0" i="0" u="none" strike="noStrike" cap="none" normalizeH="0" baseline="0" dirty="0" err="1">
                 <a:ln>
                   <a:noFill/>
                 </a:ln>
@@ -9238,7 +9240,7 @@
               <a:t>.</a:t>
             </a:r>
             <a:r>
-              <a:rPr kumimoji="0" lang="fr-FR" altLang="fr-FR" sz="1400" b="0" i="1" u="none" strike="noStrike" cap="none" normalizeH="0" baseline="0" dirty="0" err="1">
+              <a:rPr kumimoji="0" lang="fr-FR" altLang="fr-FR" sz="1200" b="0" i="1" u="none" strike="noStrike" cap="none" normalizeH="0" baseline="0" dirty="0" err="1">
                 <a:ln>
                   <a:noFill/>
                 </a:ln>
@@ -9251,7 +9253,7 @@
               <a:t>LAZY</a:t>
             </a:r>
             <a:r>
-              <a:rPr kumimoji="0" lang="fr-FR" altLang="fr-FR" sz="1400" b="0" i="0" u="none" strike="noStrike" cap="none" normalizeH="0" baseline="0" dirty="0">
+              <a:rPr kumimoji="0" lang="fr-FR" altLang="fr-FR" sz="1200" b="0" i="0" u="none" strike="noStrike" cap="none" normalizeH="0" baseline="0" dirty="0">
                 <a:ln>
                   <a:noFill/>
                 </a:ln>
@@ -9264,7 +9266,7 @@
               <a:t>)</a:t>
             </a:r>
             <a:br>
-              <a:rPr kumimoji="0" lang="fr-FR" altLang="fr-FR" sz="1400" b="0" i="0" u="none" strike="noStrike" cap="none" normalizeH="0" baseline="0" dirty="0">
+              <a:rPr kumimoji="0" lang="fr-FR" altLang="fr-FR" sz="1200" b="0" i="0" u="none" strike="noStrike" cap="none" normalizeH="0" baseline="0" dirty="0">
                 <a:ln>
                   <a:noFill/>
                 </a:ln>
@@ -9276,7 +9278,7 @@
               </a:rPr>
             </a:br>
             <a:r>
-              <a:rPr kumimoji="0" lang="fr-FR" altLang="fr-FR" sz="1400" b="0" i="0" u="none" strike="noStrike" cap="none" normalizeH="0" baseline="0" dirty="0">
+              <a:rPr kumimoji="0" lang="fr-FR" altLang="fr-FR" sz="1200" b="0" i="0" u="none" strike="noStrike" cap="none" normalizeH="0" baseline="0" dirty="0">
                 <a:ln>
                   <a:noFill/>
                 </a:ln>
@@ -9289,7 +9291,7 @@
               <a:t>    </a:t>
             </a:r>
             <a:r>
-              <a:rPr kumimoji="0" lang="fr-FR" altLang="fr-FR" sz="1400" b="0" i="0" u="none" strike="noStrike" cap="none" normalizeH="0" baseline="0" dirty="0" err="1">
+              <a:rPr kumimoji="0" lang="fr-FR" altLang="fr-FR" sz="1200" b="0" i="0" u="none" strike="noStrike" cap="none" normalizeH="0" baseline="0" dirty="0" err="1">
                 <a:ln>
                   <a:noFill/>
                 </a:ln>
@@ -9302,7 +9304,7 @@
               <a:t>private</a:t>
             </a:r>
             <a:r>
-              <a:rPr kumimoji="0" lang="fr-FR" altLang="fr-FR" sz="1400" b="0" i="0" u="none" strike="noStrike" cap="none" normalizeH="0" baseline="0" dirty="0">
+              <a:rPr kumimoji="0" lang="fr-FR" altLang="fr-FR" sz="1200" b="0" i="0" u="none" strike="noStrike" cap="none" normalizeH="0" baseline="0" dirty="0">
                 <a:ln>
                   <a:noFill/>
                 </a:ln>
@@ -9315,7 +9317,7 @@
               <a:t> </a:t>
             </a:r>
             <a:r>
-              <a:rPr kumimoji="0" lang="fr-FR" altLang="fr-FR" sz="1400" b="0" i="0" u="none" strike="noStrike" cap="none" normalizeH="0" baseline="0" dirty="0">
+              <a:rPr kumimoji="0" lang="fr-FR" altLang="fr-FR" sz="1200" b="0" i="0" u="none" strike="noStrike" cap="none" normalizeH="0" baseline="0" dirty="0">
                 <a:ln>
                   <a:noFill/>
                 </a:ln>
@@ -9328,7 +9330,7 @@
               <a:t>Set</a:t>
             </a:r>
             <a:r>
-              <a:rPr kumimoji="0" lang="fr-FR" altLang="fr-FR" sz="1400" b="0" i="0" u="none" strike="noStrike" cap="none" normalizeH="0" baseline="0" dirty="0">
+              <a:rPr kumimoji="0" lang="fr-FR" altLang="fr-FR" sz="1200" b="0" i="0" u="none" strike="noStrike" cap="none" normalizeH="0" baseline="0" dirty="0">
                 <a:ln>
                   <a:noFill/>
                 </a:ln>
@@ -9341,7 +9343,7 @@
               <a:t>&lt;</a:t>
             </a:r>
             <a:r>
-              <a:rPr kumimoji="0" lang="fr-FR" altLang="fr-FR" sz="1400" b="0" i="0" u="none" strike="noStrike" cap="none" normalizeH="0" baseline="0" dirty="0" err="1">
+              <a:rPr kumimoji="0" lang="fr-FR" altLang="fr-FR" sz="1200" b="0" i="0" u="none" strike="noStrike" cap="none" normalizeH="0" baseline="0" dirty="0" err="1">
                 <a:ln>
                   <a:noFill/>
                 </a:ln>
@@ -9354,7 +9356,7 @@
               <a:t>Student</a:t>
             </a:r>
             <a:r>
-              <a:rPr kumimoji="0" lang="fr-FR" altLang="fr-FR" sz="1400" b="0" i="0" u="none" strike="noStrike" cap="none" normalizeH="0" baseline="0" dirty="0">
+              <a:rPr kumimoji="0" lang="fr-FR" altLang="fr-FR" sz="1200" b="0" i="0" u="none" strike="noStrike" cap="none" normalizeH="0" baseline="0" dirty="0">
                 <a:ln>
                   <a:noFill/>
                 </a:ln>
@@ -9367,7 +9369,7 @@
               <a:t>&gt; </a:t>
             </a:r>
             <a:r>
-              <a:rPr kumimoji="0" lang="fr-FR" altLang="fr-FR" sz="1400" b="0" i="0" u="none" strike="noStrike" cap="none" normalizeH="0" baseline="0" dirty="0" err="1">
+              <a:rPr kumimoji="0" lang="fr-FR" altLang="fr-FR" sz="1200" b="0" i="0" u="none" strike="noStrike" cap="none" normalizeH="0" baseline="0" dirty="0" err="1">
                 <a:ln>
                   <a:noFill/>
                 </a:ln>
@@ -9380,7 +9382,7 @@
               <a:t>students</a:t>
             </a:r>
             <a:r>
-              <a:rPr kumimoji="0" lang="fr-FR" altLang="fr-FR" sz="1400" b="0" i="0" u="none" strike="noStrike" cap="none" normalizeH="0" baseline="0" dirty="0">
+              <a:rPr kumimoji="0" lang="fr-FR" altLang="fr-FR" sz="1200" b="0" i="0" u="none" strike="noStrike" cap="none" normalizeH="0" baseline="0" dirty="0">
                 <a:ln>
                   <a:noFill/>
                 </a:ln>
@@ -9393,7 +9395,7 @@
               <a:t>;</a:t>
             </a:r>
             <a:br>
-              <a:rPr kumimoji="0" lang="fr-FR" altLang="fr-FR" sz="1400" b="0" i="0" u="none" strike="noStrike" cap="none" normalizeH="0" baseline="0" dirty="0">
+              <a:rPr kumimoji="0" lang="fr-FR" altLang="fr-FR" sz="1200" b="0" i="0" u="none" strike="noStrike" cap="none" normalizeH="0" baseline="0" dirty="0">
                 <a:ln>
                   <a:noFill/>
                 </a:ln>
@@ -9405,7 +9407,7 @@
               </a:rPr>
             </a:br>
             <a:br>
-              <a:rPr kumimoji="0" lang="fr-FR" altLang="fr-FR" sz="1400" b="0" i="1" u="none" strike="noStrike" cap="none" normalizeH="0" baseline="0" dirty="0">
+              <a:rPr kumimoji="0" lang="fr-FR" altLang="fr-FR" sz="1200" b="0" i="1" u="none" strike="noStrike" cap="none" normalizeH="0" baseline="0" dirty="0">
                 <a:ln>
                   <a:noFill/>
                 </a:ln>
@@ -9417,7 +9419,7 @@
               </a:rPr>
             </a:br>
             <a:r>
-              <a:rPr kumimoji="0" lang="fr-FR" altLang="fr-FR" sz="1400" b="0" i="1" u="none" strike="noStrike" cap="none" normalizeH="0" baseline="0" dirty="0">
+              <a:rPr kumimoji="0" lang="fr-FR" altLang="fr-FR" sz="1200" b="0" i="1" u="none" strike="noStrike" cap="none" normalizeH="0" baseline="0" dirty="0">
                 <a:ln>
                   <a:noFill/>
                 </a:ln>
@@ -9430,7 +9432,7 @@
               <a:t>    </a:t>
             </a:r>
             <a:r>
-              <a:rPr kumimoji="0" lang="fr-FR" altLang="fr-FR" sz="1400" b="0" i="0" u="none" strike="noStrike" cap="none" normalizeH="0" baseline="0" dirty="0">
+              <a:rPr kumimoji="0" lang="fr-FR" altLang="fr-FR" sz="1200" b="0" i="0" u="none" strike="noStrike" cap="none" normalizeH="0" baseline="0" dirty="0">
                 <a:ln>
                   <a:noFill/>
                 </a:ln>
@@ -9443,7 +9445,7 @@
               <a:t>@OneToMany</a:t>
             </a:r>
             <a:r>
-              <a:rPr kumimoji="0" lang="fr-FR" altLang="fr-FR" sz="1400" b="0" i="0" u="none" strike="noStrike" cap="none" normalizeH="0" baseline="0" dirty="0">
+              <a:rPr kumimoji="0" lang="fr-FR" altLang="fr-FR" sz="1200" b="0" i="0" u="none" strike="noStrike" cap="none" normalizeH="0" baseline="0" dirty="0">
                 <a:ln>
                   <a:noFill/>
                 </a:ln>
@@ -9456,7 +9458,7 @@
               <a:t>(mappedBy = </a:t>
             </a:r>
             <a:r>
-              <a:rPr kumimoji="0" lang="fr-FR" altLang="fr-FR" sz="1400" b="0" i="0" u="none" strike="noStrike" cap="none" normalizeH="0" baseline="0" dirty="0">
+              <a:rPr kumimoji="0" lang="fr-FR" altLang="fr-FR" sz="1200" b="0" i="0" u="none" strike="noStrike" cap="none" normalizeH="0" baseline="0" dirty="0">
                 <a:ln>
                   <a:noFill/>
                 </a:ln>
@@ -9469,7 +9471,7 @@
               <a:t>"</a:t>
             </a:r>
             <a:r>
-              <a:rPr kumimoji="0" lang="fr-FR" altLang="fr-FR" sz="1400" b="0" i="0" u="none" strike="noStrike" cap="none" normalizeH="0" baseline="0" dirty="0" err="1">
+              <a:rPr kumimoji="0" lang="fr-FR" altLang="fr-FR" sz="1200" b="0" i="0" u="none" strike="noStrike" cap="none" normalizeH="0" baseline="0" dirty="0" err="1">
                 <a:ln>
                   <a:noFill/>
                 </a:ln>
@@ -9482,7 +9484,7 @@
               <a:t>school</a:t>
             </a:r>
             <a:r>
-              <a:rPr kumimoji="0" lang="fr-FR" altLang="fr-FR" sz="1400" b="0" i="0" u="none" strike="noStrike" cap="none" normalizeH="0" baseline="0" dirty="0">
+              <a:rPr kumimoji="0" lang="fr-FR" altLang="fr-FR" sz="1200" b="0" i="0" u="none" strike="noStrike" cap="none" normalizeH="0" baseline="0" dirty="0">
                 <a:ln>
                   <a:noFill/>
                 </a:ln>
@@ -9495,7 +9497,7 @@
               <a:t>"</a:t>
             </a:r>
             <a:r>
-              <a:rPr kumimoji="0" lang="fr-FR" altLang="fr-FR" sz="1400" b="0" i="0" u="none" strike="noStrike" cap="none" normalizeH="0" baseline="0" dirty="0">
+              <a:rPr kumimoji="0" lang="fr-FR" altLang="fr-FR" sz="1200" b="0" i="0" u="none" strike="noStrike" cap="none" normalizeH="0" baseline="0" dirty="0">
                 <a:ln>
                   <a:noFill/>
                 </a:ln>
@@ -9508,7 +9510,7 @@
               <a:t>, </a:t>
             </a:r>
             <a:r>
-              <a:rPr kumimoji="0" lang="fr-FR" altLang="fr-FR" sz="1400" b="0" i="0" u="none" strike="noStrike" cap="none" normalizeH="0" baseline="0" dirty="0" err="1">
+              <a:rPr kumimoji="0" lang="fr-FR" altLang="fr-FR" sz="1200" b="0" i="0" u="none" strike="noStrike" cap="none" normalizeH="0" baseline="0" dirty="0" err="1">
                 <a:ln>
                   <a:noFill/>
                 </a:ln>
@@ -9521,7 +9523,7 @@
               <a:t>fetch</a:t>
             </a:r>
             <a:r>
-              <a:rPr kumimoji="0" lang="fr-FR" altLang="fr-FR" sz="1400" b="0" i="0" u="none" strike="noStrike" cap="none" normalizeH="0" baseline="0" dirty="0">
+              <a:rPr kumimoji="0" lang="fr-FR" altLang="fr-FR" sz="1200" b="0" i="0" u="none" strike="noStrike" cap="none" normalizeH="0" baseline="0" dirty="0">
                 <a:ln>
                   <a:noFill/>
                 </a:ln>
@@ -9534,7 +9536,7 @@
               <a:t> = </a:t>
             </a:r>
             <a:r>
-              <a:rPr kumimoji="0" lang="fr-FR" altLang="fr-FR" sz="1400" b="0" i="0" u="none" strike="noStrike" cap="none" normalizeH="0" baseline="0" dirty="0" err="1">
+              <a:rPr kumimoji="0" lang="fr-FR" altLang="fr-FR" sz="1200" b="0" i="0" u="none" strike="noStrike" cap="none" normalizeH="0" baseline="0" dirty="0" err="1">
                 <a:ln>
                   <a:noFill/>
                 </a:ln>
@@ -9547,7 +9549,7 @@
               <a:t>FetchType</a:t>
             </a:r>
             <a:r>
-              <a:rPr kumimoji="0" lang="fr-FR" altLang="fr-FR" sz="1400" b="0" i="0" u="none" strike="noStrike" cap="none" normalizeH="0" baseline="0" dirty="0" err="1">
+              <a:rPr kumimoji="0" lang="fr-FR" altLang="fr-FR" sz="1200" b="0" i="0" u="none" strike="noStrike" cap="none" normalizeH="0" baseline="0" dirty="0" err="1">
                 <a:ln>
                   <a:noFill/>
                 </a:ln>
@@ -9560,7 +9562,7 @@
               <a:t>.</a:t>
             </a:r>
             <a:r>
-              <a:rPr kumimoji="0" lang="fr-FR" altLang="fr-FR" sz="1400" b="0" i="1" u="none" strike="noStrike" cap="none" normalizeH="0" baseline="0" dirty="0" err="1">
+              <a:rPr kumimoji="0" lang="fr-FR" altLang="fr-FR" sz="1200" b="0" i="1" u="none" strike="noStrike" cap="none" normalizeH="0" baseline="0" dirty="0" err="1">
                 <a:ln>
                   <a:noFill/>
                 </a:ln>
@@ -9573,7 +9575,7 @@
               <a:t>LAZY</a:t>
             </a:r>
             <a:r>
-              <a:rPr kumimoji="0" lang="fr-FR" altLang="fr-FR" sz="1400" b="0" i="0" u="none" strike="noStrike" cap="none" normalizeH="0" baseline="0" dirty="0">
+              <a:rPr kumimoji="0" lang="fr-FR" altLang="fr-FR" sz="1200" b="0" i="0" u="none" strike="noStrike" cap="none" normalizeH="0" baseline="0" dirty="0">
                 <a:ln>
                   <a:noFill/>
                 </a:ln>
@@ -9586,7 +9588,7 @@
               <a:t>)</a:t>
             </a:r>
             <a:br>
-              <a:rPr kumimoji="0" lang="fr-FR" altLang="fr-FR" sz="1400" b="0" i="1" u="none" strike="noStrike" cap="none" normalizeH="0" baseline="0" dirty="0">
+              <a:rPr kumimoji="0" lang="fr-FR" altLang="fr-FR" sz="1200" b="0" i="1" u="none" strike="noStrike" cap="none" normalizeH="0" baseline="0" dirty="0">
                 <a:ln>
                   <a:noFill/>
                 </a:ln>
@@ -9598,7 +9600,7 @@
               </a:rPr>
             </a:br>
             <a:r>
-              <a:rPr kumimoji="0" lang="fr-FR" altLang="fr-FR" sz="1400" b="0" i="1" u="none" strike="noStrike" cap="none" normalizeH="0" baseline="0" dirty="0">
+              <a:rPr kumimoji="0" lang="fr-FR" altLang="fr-FR" sz="1200" b="0" i="1" u="none" strike="noStrike" cap="none" normalizeH="0" baseline="0" dirty="0">
                 <a:ln>
                   <a:noFill/>
                 </a:ln>
@@ -9611,7 +9613,7 @@
               <a:t>    </a:t>
             </a:r>
             <a:r>
-              <a:rPr kumimoji="0" lang="fr-FR" altLang="fr-FR" sz="1400" b="0" i="0" u="none" strike="noStrike" cap="none" normalizeH="0" baseline="0" dirty="0" err="1">
+              <a:rPr kumimoji="0" lang="fr-FR" altLang="fr-FR" sz="1200" b="0" i="0" u="none" strike="noStrike" cap="none" normalizeH="0" baseline="0" dirty="0" err="1">
                 <a:ln>
                   <a:noFill/>
                 </a:ln>
@@ -9624,7 +9626,7 @@
               <a:t>private</a:t>
             </a:r>
             <a:r>
-              <a:rPr kumimoji="0" lang="fr-FR" altLang="fr-FR" sz="1400" b="0" i="0" u="none" strike="noStrike" cap="none" normalizeH="0" baseline="0" dirty="0">
+              <a:rPr kumimoji="0" lang="fr-FR" altLang="fr-FR" sz="1200" b="0" i="0" u="none" strike="noStrike" cap="none" normalizeH="0" baseline="0" dirty="0">
                 <a:ln>
                   <a:noFill/>
                 </a:ln>
@@ -9637,7 +9639,7 @@
               <a:t> </a:t>
             </a:r>
             <a:r>
-              <a:rPr kumimoji="0" lang="fr-FR" altLang="fr-FR" sz="1400" b="0" i="0" u="none" strike="noStrike" cap="none" normalizeH="0" baseline="0" dirty="0">
+              <a:rPr kumimoji="0" lang="fr-FR" altLang="fr-FR" sz="1200" b="0" i="0" u="none" strike="noStrike" cap="none" normalizeH="0" baseline="0" dirty="0">
                 <a:ln>
                   <a:noFill/>
                 </a:ln>
@@ -9650,7 +9652,7 @@
               <a:t>Set</a:t>
             </a:r>
             <a:r>
-              <a:rPr kumimoji="0" lang="fr-FR" altLang="fr-FR" sz="1400" b="0" i="0" u="none" strike="noStrike" cap="none" normalizeH="0" baseline="0" dirty="0">
+              <a:rPr kumimoji="0" lang="fr-FR" altLang="fr-FR" sz="1200" b="0" i="0" u="none" strike="noStrike" cap="none" normalizeH="0" baseline="0" dirty="0">
                 <a:ln>
                   <a:noFill/>
                 </a:ln>
@@ -9663,7 +9665,7 @@
               <a:t>&lt;</a:t>
             </a:r>
             <a:r>
-              <a:rPr kumimoji="0" lang="fr-FR" altLang="fr-FR" sz="1400" b="0" i="0" u="none" strike="noStrike" cap="none" normalizeH="0" baseline="0" dirty="0">
+              <a:rPr kumimoji="0" lang="fr-FR" altLang="fr-FR" sz="1200" b="0" i="0" u="none" strike="noStrike" cap="none" normalizeH="0" baseline="0" dirty="0">
                 <a:ln>
                   <a:noFill/>
                 </a:ln>
@@ -9676,7 +9678,7 @@
               <a:t>Teacher</a:t>
             </a:r>
             <a:r>
-              <a:rPr kumimoji="0" lang="fr-FR" altLang="fr-FR" sz="1400" b="0" i="0" u="none" strike="noStrike" cap="none" normalizeH="0" baseline="0" dirty="0">
+              <a:rPr kumimoji="0" lang="fr-FR" altLang="fr-FR" sz="1200" b="0" i="0" u="none" strike="noStrike" cap="none" normalizeH="0" baseline="0" dirty="0">
                 <a:ln>
                   <a:noFill/>
                 </a:ln>
@@ -9689,7 +9691,7 @@
               <a:t>&gt; </a:t>
             </a:r>
             <a:r>
-              <a:rPr kumimoji="0" lang="fr-FR" altLang="fr-FR" sz="1400" b="0" i="0" u="none" strike="noStrike" cap="none" normalizeH="0" baseline="0" dirty="0" err="1">
+              <a:rPr kumimoji="0" lang="fr-FR" altLang="fr-FR" sz="1200" b="0" i="0" u="none" strike="noStrike" cap="none" normalizeH="0" baseline="0" dirty="0" err="1">
                 <a:ln>
                   <a:noFill/>
                 </a:ln>
@@ -9702,7 +9704,7 @@
               <a:t>teachers</a:t>
             </a:r>
             <a:r>
-              <a:rPr kumimoji="0" lang="fr-FR" altLang="fr-FR" sz="1400" b="0" i="0" u="none" strike="noStrike" cap="none" normalizeH="0" baseline="0" dirty="0">
+              <a:rPr kumimoji="0" lang="fr-FR" altLang="fr-FR" sz="1200" b="0" i="0" u="none" strike="noStrike" cap="none" normalizeH="0" baseline="0" dirty="0">
                 <a:ln>
                   <a:noFill/>
                 </a:ln>
@@ -9714,7 +9716,7 @@
               </a:rPr>
               <a:t>;</a:t>
             </a:r>
-            <a:endParaRPr kumimoji="0" lang="fr-FR" altLang="fr-FR" sz="1400" b="0" i="0" u="none" strike="noStrike" cap="none" normalizeH="0" baseline="0" dirty="0">
+            <a:endParaRPr kumimoji="0" lang="fr-FR" altLang="fr-FR" sz="1200" b="0" i="0" u="none" strike="noStrike" cap="none" normalizeH="0" baseline="0" dirty="0">
               <a:ln>
                 <a:noFill/>
               </a:ln>
@@ -33795,6 +33797,216 @@
       </p:grpSpPr>
       <p:sp>
         <p:nvSpPr>
+          <p:cNvPr id="2" name="Titre 1">
+            <a:extLst>
+              <a:ext uri="{FF2B5EF4-FFF2-40B4-BE49-F238E27FC236}">
+                <a16:creationId xmlns:a16="http://schemas.microsoft.com/office/drawing/2014/main" id="{BD8B69C2-54A8-4347-AEF1-E21A575C65A6}"/>
+              </a:ext>
+            </a:extLst>
+          </p:cNvPr>
+          <p:cNvSpPr>
+            <a:spLocks noGrp="1"/>
+          </p:cNvSpPr>
+          <p:nvPr>
+            <p:ph type="title"/>
+          </p:nvPr>
+        </p:nvSpPr>
+        <p:spPr/>
+        <p:txBody>
+          <a:bodyPr/>
+          <a:lstStyle/>
+          <a:p>
+            <a:r>
+              <a:rPr lang="fr-FR" dirty="0"/>
+              <a:t>Lombok (JPA Buddy)</a:t>
+            </a:r>
+          </a:p>
+        </p:txBody>
+      </p:sp>
+      <p:pic>
+        <p:nvPicPr>
+          <p:cNvPr id="5" name="Espace réservé du contenu 4" descr="Une image contenant texte&#10;&#10;Description générée automatiquement">
+            <a:extLst>
+              <a:ext uri="{FF2B5EF4-FFF2-40B4-BE49-F238E27FC236}">
+                <a16:creationId xmlns:a16="http://schemas.microsoft.com/office/drawing/2014/main" id="{5D95D336-A353-41E0-B3D4-94B7271B5BAB}"/>
+              </a:ext>
+            </a:extLst>
+          </p:cNvPr>
+          <p:cNvPicPr>
+            <a:picLocks noGrp="1" noChangeAspect="1"/>
+          </p:cNvPicPr>
+          <p:nvPr>
+            <p:ph sz="quarter" idx="10"/>
+          </p:nvPr>
+        </p:nvPicPr>
+        <p:blipFill>
+          <a:blip r:embed="rId2"/>
+          <a:stretch>
+            <a:fillRect/>
+          </a:stretch>
+        </p:blipFill>
+        <p:spPr>
+          <a:xfrm>
+            <a:off x="3541505" y="1699587"/>
+            <a:ext cx="4416425" cy="1948422"/>
+          </a:xfrm>
+        </p:spPr>
+      </p:pic>
+      <p:sp>
+        <p:nvSpPr>
+          <p:cNvPr id="7" name="ZoneTexte 6">
+            <a:extLst>
+              <a:ext uri="{FF2B5EF4-FFF2-40B4-BE49-F238E27FC236}">
+                <a16:creationId xmlns:a16="http://schemas.microsoft.com/office/drawing/2014/main" id="{9A368053-3901-4B51-979A-FAFE98C1AB5F}"/>
+              </a:ext>
+            </a:extLst>
+          </p:cNvPr>
+          <p:cNvSpPr txBox="1"/>
+          <p:nvPr/>
+        </p:nvSpPr>
+        <p:spPr>
+          <a:xfrm>
+            <a:off x="2024292" y="3648009"/>
+            <a:ext cx="8045143" cy="369332"/>
+          </a:xfrm>
+          <a:prstGeom prst="rect">
+            <a:avLst/>
+          </a:prstGeom>
+          <a:noFill/>
+        </p:spPr>
+        <p:txBody>
+          <a:bodyPr wrap="square">
+            <a:spAutoFit/>
+          </a:bodyPr>
+          <a:lstStyle/>
+          <a:p>
+            <a:r>
+              <a:rPr lang="fr-FR" dirty="0">
+                <a:hlinkClick r:id="rId3"/>
+              </a:rPr>
+              <a:t>https://www.jpa-buddy.com/blog/lombok-and-jpa-what-may-go-wrong/</a:t>
+            </a:r>
+            <a:r>
+              <a:rPr lang="fr-FR" dirty="0"/>
+              <a:t> </a:t>
+            </a:r>
+          </a:p>
+        </p:txBody>
+      </p:sp>
+      <p:sp>
+        <p:nvSpPr>
+          <p:cNvPr id="9" name="ZoneTexte 8">
+            <a:extLst>
+              <a:ext uri="{FF2B5EF4-FFF2-40B4-BE49-F238E27FC236}">
+                <a16:creationId xmlns:a16="http://schemas.microsoft.com/office/drawing/2014/main" id="{F4ABF9A0-A30A-4250-B52C-656DB05DCBB2}"/>
+              </a:ext>
+            </a:extLst>
+          </p:cNvPr>
+          <p:cNvSpPr txBox="1"/>
+          <p:nvPr/>
+        </p:nvSpPr>
+        <p:spPr>
+          <a:xfrm>
+            <a:off x="1073633" y="4512082"/>
+            <a:ext cx="9691062" cy="1200329"/>
+          </a:xfrm>
+          <a:prstGeom prst="rect">
+            <a:avLst/>
+          </a:prstGeom>
+          <a:noFill/>
+        </p:spPr>
+        <p:txBody>
+          <a:bodyPr wrap="square">
+            <a:spAutoFit/>
+          </a:bodyPr>
+          <a:lstStyle/>
+          <a:p>
+            <a:pPr marL="285750" indent="-285750">
+              <a:buFont typeface="Wingdings" panose="05000000000000000000" pitchFamily="2" charset="2"/>
+              <a:buChar char="Ø"/>
+            </a:pPr>
+            <a:r>
+              <a:rPr lang="fr-FR" dirty="0"/>
+              <a:t>Ne pas toucher au </a:t>
+            </a:r>
+            <a:r>
+              <a:rPr lang="fr-FR" dirty="0" err="1"/>
+              <a:t>hashcode</a:t>
+            </a:r>
+            <a:r>
+              <a:rPr lang="fr-FR" dirty="0"/>
+              <a:t> =&gt; on perd les entités créées dans le cas d’une séquence…</a:t>
+            </a:r>
+          </a:p>
+          <a:p>
+            <a:pPr marL="285750" indent="-285750">
+              <a:buFont typeface="Wingdings" panose="05000000000000000000" pitchFamily="2" charset="2"/>
+              <a:buChar char="Ø"/>
+            </a:pPr>
+            <a:r>
+              <a:rPr lang="fr-FR" dirty="0"/>
+              <a:t>Ne pas toucher au </a:t>
+            </a:r>
+            <a:r>
+              <a:rPr lang="fr-FR" dirty="0" err="1"/>
+              <a:t>toString</a:t>
+            </a:r>
+            <a:r>
+              <a:rPr lang="fr-FR" dirty="0"/>
+              <a:t> =&gt; N+1 et Crash</a:t>
+            </a:r>
+          </a:p>
+          <a:p>
+            <a:pPr marL="285750" indent="-285750">
+              <a:buFont typeface="Wingdings" panose="05000000000000000000" pitchFamily="2" charset="2"/>
+              <a:buChar char="Ø"/>
+            </a:pPr>
+            <a:endParaRPr lang="fr-FR" dirty="0"/>
+          </a:p>
+          <a:p>
+            <a:pPr marL="285750" indent="-285750">
+              <a:buFont typeface="Wingdings" panose="05000000000000000000" pitchFamily="2" charset="2"/>
+              <a:buChar char="Ø"/>
+            </a:pPr>
+            <a:r>
+              <a:rPr lang="fr-FR" dirty="0"/>
+              <a:t>Donc ne jamais mettre @Data sur une entité !</a:t>
+            </a:r>
+          </a:p>
+        </p:txBody>
+      </p:sp>
+    </p:spTree>
+    <p:extLst>
+      <p:ext uri="{BB962C8B-B14F-4D97-AF65-F5344CB8AC3E}">
+        <p14:creationId xmlns:p14="http://schemas.microsoft.com/office/powerpoint/2010/main" val="4162638425"/>
+      </p:ext>
+    </p:extLst>
+  </p:cSld>
+  <p:clrMapOvr>
+    <a:masterClrMapping/>
+  </p:clrMapOvr>
+</p:sld>
+</file>
+
+<file path=ppt/slides/slide34.xml><?xml version="1.0" encoding="utf-8"?>
+<p:sld xmlns:a="http://schemas.openxmlformats.org/drawingml/2006/main" xmlns:r="http://schemas.openxmlformats.org/officeDocument/2006/relationships" xmlns:p="http://schemas.openxmlformats.org/presentationml/2006/main">
+  <p:cSld>
+    <p:spTree>
+      <p:nvGrpSpPr>
+        <p:cNvPr id="1" name=""/>
+        <p:cNvGrpSpPr/>
+        <p:nvPr/>
+      </p:nvGrpSpPr>
+      <p:grpSpPr>
+        <a:xfrm>
+          <a:off x="0" y="0"/>
+          <a:ext cx="0" cy="0"/>
+          <a:chOff x="0" y="0"/>
+          <a:chExt cx="0" cy="0"/>
+        </a:xfrm>
+      </p:grpSpPr>
+      <p:sp>
+        <p:nvSpPr>
           <p:cNvPr id="4" name="Titre 3"/>
           <p:cNvSpPr>
             <a:spLocks noGrp="1"/>
@@ -33888,7 +34100,7 @@
 </p:sld>
 </file>
 
-<file path=ppt/slides/slide34.xml><?xml version="1.0" encoding="utf-8"?>
+<file path=ppt/slides/slide35.xml><?xml version="1.0" encoding="utf-8"?>
 <p:sld xmlns:a="http://schemas.openxmlformats.org/drawingml/2006/main" xmlns:r="http://schemas.openxmlformats.org/officeDocument/2006/relationships" xmlns:p="http://schemas.openxmlformats.org/presentationml/2006/main">
   <p:cSld>
     <p:spTree>
@@ -42765,15 +42977,6 @@
 </file>
 
 <file path=customXml/item1.xml><?xml version="1.0" encoding="utf-8"?>
-<p:properties xmlns:p="http://schemas.microsoft.com/office/2006/metadata/properties" xmlns:xsi="http://www.w3.org/2001/XMLSchema-instance" xmlns:pc="http://schemas.microsoft.com/office/infopath/2007/PartnerControls">
-  <documentManagement>
-    <Status xmlns="71af3243-3dd4-4a8d-8c0d-dd76da1f02a5">Not started</Status>
-    <MediaServiceKeyPoints xmlns="71af3243-3dd4-4a8d-8c0d-dd76da1f02a5" xsi:nil="true"/>
-  </documentManagement>
-</p:properties>
-</file>
-
-<file path=customXml/item2.xml><?xml version="1.0" encoding="utf-8"?>
 <ct:contentTypeSchema xmlns:ct="http://schemas.microsoft.com/office/2006/metadata/contentType" xmlns:ma="http://schemas.microsoft.com/office/2006/metadata/properties/metaAttributes" ct:_="" ma:_="" ma:contentTypeName="Document" ma:contentTypeID="0x01010079F111ED35F8CC479449609E8A0923A6" ma:contentTypeVersion="12" ma:contentTypeDescription="Create a new document." ma:contentTypeScope="" ma:versionID="a8a52e8c320b9a064ae3583ae3861c92">
   <xsd:schema xmlns:xsd="http://www.w3.org/2001/XMLSchema" xmlns:xs="http://www.w3.org/2001/XMLSchema" xmlns:p="http://schemas.microsoft.com/office/2006/metadata/properties" xmlns:ns2="71af3243-3dd4-4a8d-8c0d-dd76da1f02a5" xmlns:ns3="16c05727-aa75-4e4a-9b5f-8a80a1165891" targetNamespace="http://schemas.microsoft.com/office/2006/metadata/properties" ma:root="true" ma:fieldsID="88020cb39231a0945110f9cd888b521a" ns2:_="" ns3:_="">
     <xsd:import namespace="71af3243-3dd4-4a8d-8c0d-dd76da1f02a5"/>
@@ -42994,6 +43197,15 @@
 </ct:contentTypeSchema>
 </file>
 
+<file path=customXml/item2.xml><?xml version="1.0" encoding="utf-8"?>
+<p:properties xmlns:p="http://schemas.microsoft.com/office/2006/metadata/properties" xmlns:xsi="http://www.w3.org/2001/XMLSchema-instance" xmlns:pc="http://schemas.microsoft.com/office/infopath/2007/PartnerControls">
+  <documentManagement>
+    <Status xmlns="71af3243-3dd4-4a8d-8c0d-dd76da1f02a5">Not started</Status>
+    <MediaServiceKeyPoints xmlns="71af3243-3dd4-4a8d-8c0d-dd76da1f02a5" xsi:nil="true"/>
+  </documentManagement>
+</p:properties>
+</file>
+
 <file path=customXml/item3.xml><?xml version="1.0" encoding="utf-8"?>
 <?mso-contentType ?>
 <FormTemplates xmlns="http://schemas.microsoft.com/sharepoint/v3/contenttype/forms">
@@ -43004,23 +43216,6 @@
 </file>
 
 <file path=customXml/itemProps1.xml><?xml version="1.0" encoding="utf-8"?>
-<ds:datastoreItem xmlns:ds="http://schemas.openxmlformats.org/officeDocument/2006/customXml" ds:itemID="{950072C5-DDE0-4258-BA7A-4D4B80DFA632}">
-  <ds:schemaRefs>
-    <ds:schemaRef ds:uri="http://purl.org/dc/terms/"/>
-    <ds:schemaRef ds:uri="http://schemas.microsoft.com/office/2006/documentManagement/types"/>
-    <ds:schemaRef ds:uri="http://schemas.openxmlformats.org/package/2006/metadata/core-properties"/>
-    <ds:schemaRef ds:uri="http://purl.org/dc/elements/1.1/"/>
-    <ds:schemaRef ds:uri="http://schemas.microsoft.com/office/infopath/2007/PartnerControls"/>
-    <ds:schemaRef ds:uri="16c05727-aa75-4e4a-9b5f-8a80a1165891"/>
-    <ds:schemaRef ds:uri="71af3243-3dd4-4a8d-8c0d-dd76da1f02a5"/>
-    <ds:schemaRef ds:uri="http://schemas.microsoft.com/office/2006/metadata/properties"/>
-    <ds:schemaRef ds:uri="http://www.w3.org/XML/1998/namespace"/>
-    <ds:schemaRef ds:uri="http://purl.org/dc/dcmitype/"/>
-  </ds:schemaRefs>
-</ds:datastoreItem>
-</file>
-
-<file path=customXml/itemProps2.xml><?xml version="1.0" encoding="utf-8"?>
 <ds:datastoreItem xmlns:ds="http://schemas.openxmlformats.org/officeDocument/2006/customXml" ds:itemID="{FD7FC771-7DFE-49DA-B577-71181BFBCB2E}">
   <ds:schemaRefs>
     <ds:schemaRef ds:uri="http://schemas.microsoft.com/office/2006/metadata/contentType"/>
@@ -43039,6 +43234,23 @@
 </ds:datastoreItem>
 </file>
 
+<file path=customXml/itemProps2.xml><?xml version="1.0" encoding="utf-8"?>
+<ds:datastoreItem xmlns:ds="http://schemas.openxmlformats.org/officeDocument/2006/customXml" ds:itemID="{950072C5-DDE0-4258-BA7A-4D4B80DFA632}">
+  <ds:schemaRefs>
+    <ds:schemaRef ds:uri="http://purl.org/dc/terms/"/>
+    <ds:schemaRef ds:uri="http://schemas.microsoft.com/office/2006/documentManagement/types"/>
+    <ds:schemaRef ds:uri="http://schemas.openxmlformats.org/package/2006/metadata/core-properties"/>
+    <ds:schemaRef ds:uri="http://purl.org/dc/elements/1.1/"/>
+    <ds:schemaRef ds:uri="http://schemas.microsoft.com/office/infopath/2007/PartnerControls"/>
+    <ds:schemaRef ds:uri="16c05727-aa75-4e4a-9b5f-8a80a1165891"/>
+    <ds:schemaRef ds:uri="71af3243-3dd4-4a8d-8c0d-dd76da1f02a5"/>
+    <ds:schemaRef ds:uri="http://schemas.microsoft.com/office/2006/metadata/properties"/>
+    <ds:schemaRef ds:uri="http://www.w3.org/XML/1998/namespace"/>
+    <ds:schemaRef ds:uri="http://purl.org/dc/dcmitype/"/>
+  </ds:schemaRefs>
+</ds:datastoreItem>
+</file>
+
 <file path=customXml/itemProps3.xml><?xml version="1.0" encoding="utf-8"?>
 <ds:datastoreItem xmlns:ds="http://schemas.openxmlformats.org/officeDocument/2006/customXml" ds:itemID="{7EE8C63A-4744-4DE4-BB49-0FF0B5375C60}">
   <ds:schemaRefs>
